--- a/seminario/apresentacao/seminario-analise-de-artigo.pptx
+++ b/seminario/apresentacao/seminario-analise-de-artigo.pptx
@@ -2,37 +2,37 @@
 <file path=ppt/presentation.xml><?xml version="1.0" encoding="utf-8"?>
 <p:presentation xmlns:p="http://schemas.openxmlformats.org/presentationml/2006/main">
   <p:sldMasterIdLst>
-    <p:sldMasterId xmlns:r="http://schemas.openxmlformats.org/officeDocument/2006/relationships" id="2147483648" r:id="R78259aca069e4cfa"/>
+    <p:sldMasterId xmlns:r="http://schemas.openxmlformats.org/officeDocument/2006/relationships" id="2147483648" r:id="R5a19ecd223484bb5"/>
   </p:sldMasterIdLst>
   <p:notesMasterIdLst>
-    <p:notesMasterId xmlns:r="http://schemas.openxmlformats.org/officeDocument/2006/relationships" r:id="R0d66ba97290b4dfd"/>
+    <p:notesMasterId xmlns:r="http://schemas.openxmlformats.org/officeDocument/2006/relationships" r:id="R2bc6db7ad54e481e"/>
   </p:notesMasterIdLst>
   <p:sldIdLst>
-    <p:sldId xmlns:r="http://schemas.openxmlformats.org/officeDocument/2006/relationships" id="256" r:id="Rbfd2b6c903e44262"/>
-    <p:sldId xmlns:r="http://schemas.openxmlformats.org/officeDocument/2006/relationships" id="257" r:id="R24d0c758fef642c1"/>
-    <p:sldId xmlns:r="http://schemas.openxmlformats.org/officeDocument/2006/relationships" id="258" r:id="Rbcf8df18b0544bb5"/>
-    <p:sldId xmlns:r="http://schemas.openxmlformats.org/officeDocument/2006/relationships" id="259" r:id="Rec351fc880984ccd"/>
-    <p:sldId xmlns:r="http://schemas.openxmlformats.org/officeDocument/2006/relationships" id="260" r:id="R469938e33eab45d6"/>
-    <p:sldId xmlns:r="http://schemas.openxmlformats.org/officeDocument/2006/relationships" id="261" r:id="R87c150c54a7b4dd9"/>
-    <p:sldId xmlns:r="http://schemas.openxmlformats.org/officeDocument/2006/relationships" id="262" r:id="R9f0bad996dd54c8b"/>
-    <p:sldId xmlns:r="http://schemas.openxmlformats.org/officeDocument/2006/relationships" id="263" r:id="R88a5f3a0e7064bf0"/>
-    <p:sldId xmlns:r="http://schemas.openxmlformats.org/officeDocument/2006/relationships" id="264" r:id="R15cd610cacdb4da7"/>
-    <p:sldId xmlns:r="http://schemas.openxmlformats.org/officeDocument/2006/relationships" id="265" r:id="Rcc0dd30cae66459c"/>
-    <p:sldId xmlns:r="http://schemas.openxmlformats.org/officeDocument/2006/relationships" id="266" r:id="R0cd3fb5ac5ca47af"/>
-    <p:sldId xmlns:r="http://schemas.openxmlformats.org/officeDocument/2006/relationships" id="267" r:id="R7e6e4d3f262d4e45"/>
-    <p:sldId xmlns:r="http://schemas.openxmlformats.org/officeDocument/2006/relationships" id="268" r:id="R742497b5b66842b7"/>
-    <p:sldId xmlns:r="http://schemas.openxmlformats.org/officeDocument/2006/relationships" id="269" r:id="R0fd983fabcc44fb3"/>
-    <p:sldId xmlns:r="http://schemas.openxmlformats.org/officeDocument/2006/relationships" id="270" r:id="Rec92326b0f434886"/>
-    <p:sldId xmlns:r="http://schemas.openxmlformats.org/officeDocument/2006/relationships" id="271" r:id="R0d864fdc046f4ddd"/>
-    <p:sldId xmlns:r="http://schemas.openxmlformats.org/officeDocument/2006/relationships" id="272" r:id="R02e0ba2683cb4827"/>
-    <p:sldId xmlns:r="http://schemas.openxmlformats.org/officeDocument/2006/relationships" id="273" r:id="R56ef22a68ac9489e"/>
-    <p:sldId xmlns:r="http://schemas.openxmlformats.org/officeDocument/2006/relationships" id="274" r:id="R98e281013a65403c"/>
-    <p:sldId xmlns:r="http://schemas.openxmlformats.org/officeDocument/2006/relationships" id="275" r:id="Rb6999ca6a6264e82"/>
-    <p:sldId xmlns:r="http://schemas.openxmlformats.org/officeDocument/2006/relationships" id="276" r:id="R87326113ff1947bd"/>
-    <p:sldId xmlns:r="http://schemas.openxmlformats.org/officeDocument/2006/relationships" id="277" r:id="R326d0207f00e46a6"/>
-    <p:sldId xmlns:r="http://schemas.openxmlformats.org/officeDocument/2006/relationships" id="278" r:id="R7ca5328ff0c34699"/>
-    <p:sldId xmlns:r="http://schemas.openxmlformats.org/officeDocument/2006/relationships" id="279" r:id="Rff95da515c3c494d"/>
-    <p:sldId xmlns:r="http://schemas.openxmlformats.org/officeDocument/2006/relationships" id="280" r:id="Rd49c94aa40944304"/>
+    <p:sldId xmlns:r="http://schemas.openxmlformats.org/officeDocument/2006/relationships" id="256" r:id="Rb05aff36f8e34a2c"/>
+    <p:sldId xmlns:r="http://schemas.openxmlformats.org/officeDocument/2006/relationships" id="257" r:id="R051c1e3475094152"/>
+    <p:sldId xmlns:r="http://schemas.openxmlformats.org/officeDocument/2006/relationships" id="258" r:id="Rd157c712f76c4f1e"/>
+    <p:sldId xmlns:r="http://schemas.openxmlformats.org/officeDocument/2006/relationships" id="259" r:id="R817ce8f62e50446e"/>
+    <p:sldId xmlns:r="http://schemas.openxmlformats.org/officeDocument/2006/relationships" id="260" r:id="R92100f3024cc47a8"/>
+    <p:sldId xmlns:r="http://schemas.openxmlformats.org/officeDocument/2006/relationships" id="261" r:id="Ra97e7f92c4cf4fe9"/>
+    <p:sldId xmlns:r="http://schemas.openxmlformats.org/officeDocument/2006/relationships" id="262" r:id="R419ac86e95f24da7"/>
+    <p:sldId xmlns:r="http://schemas.openxmlformats.org/officeDocument/2006/relationships" id="263" r:id="Rd4887e760ac64684"/>
+    <p:sldId xmlns:r="http://schemas.openxmlformats.org/officeDocument/2006/relationships" id="264" r:id="R56d2193e673e401a"/>
+    <p:sldId xmlns:r="http://schemas.openxmlformats.org/officeDocument/2006/relationships" id="265" r:id="R0bb51f564c8b42d6"/>
+    <p:sldId xmlns:r="http://schemas.openxmlformats.org/officeDocument/2006/relationships" id="266" r:id="R6bb06802ecab4252"/>
+    <p:sldId xmlns:r="http://schemas.openxmlformats.org/officeDocument/2006/relationships" id="267" r:id="R262f037b9b29421e"/>
+    <p:sldId xmlns:r="http://schemas.openxmlformats.org/officeDocument/2006/relationships" id="268" r:id="Rccd48055365c4034"/>
+    <p:sldId xmlns:r="http://schemas.openxmlformats.org/officeDocument/2006/relationships" id="269" r:id="R6a02434fd64e4ff7"/>
+    <p:sldId xmlns:r="http://schemas.openxmlformats.org/officeDocument/2006/relationships" id="270" r:id="Rcf7d7ae996544b83"/>
+    <p:sldId xmlns:r="http://schemas.openxmlformats.org/officeDocument/2006/relationships" id="271" r:id="Rd15231d696fc477e"/>
+    <p:sldId xmlns:r="http://schemas.openxmlformats.org/officeDocument/2006/relationships" id="272" r:id="R264c0bdc164e411d"/>
+    <p:sldId xmlns:r="http://schemas.openxmlformats.org/officeDocument/2006/relationships" id="273" r:id="R0ccf93dba9fb4af1"/>
+    <p:sldId xmlns:r="http://schemas.openxmlformats.org/officeDocument/2006/relationships" id="274" r:id="Rc404867da6cb4e4d"/>
+    <p:sldId xmlns:r="http://schemas.openxmlformats.org/officeDocument/2006/relationships" id="275" r:id="Re1cc48383c2a40a1"/>
+    <p:sldId xmlns:r="http://schemas.openxmlformats.org/officeDocument/2006/relationships" id="276" r:id="R339cab2d039a4401"/>
+    <p:sldId xmlns:r="http://schemas.openxmlformats.org/officeDocument/2006/relationships" id="277" r:id="Rb243fb680794469d"/>
+    <p:sldId xmlns:r="http://schemas.openxmlformats.org/officeDocument/2006/relationships" id="278" r:id="R4eddd8ee9c9e4807"/>
+    <p:sldId xmlns:r="http://schemas.openxmlformats.org/officeDocument/2006/relationships" id="279" r:id="R690320385de64f8b"/>
+    <p:sldId xmlns:r="http://schemas.openxmlformats.org/officeDocument/2006/relationships" id="280" r:id="R02a6eccc923f4528"/>
   </p:sldIdLst>
   <p:sldSz cx="12192000" cy="6858000"/>
   <p:notesSz cx="6858000" cy="9144000"/>
@@ -491,7 +491,7 @@
           </a:p>
           <a:p xmlns:a="http://schemas.openxmlformats.org/drawingml/2006/main">
             <a:r>
-              <a:t>Trechos EN entre aspas reproduzem o original. PT indica tradução do apresentador. Análises identificadas no slide são interpretações do seminário. As páginas indicadas são as páginas do PDF fornecido (1 a 15).</a:t>
+              <a:t>Trechos EN entre aspas reproduzem o original. PT indica tradução do apresentador. Análises identificadas no slide são interpretações do seminário. As páginas indicadas são as páginas internas do PDF da ACM 3548606.3560564 (1 a 15), equivalentes às páginas 2369–2383 dos anais.</a:t>
             </a:r>
           </a:p>
         </p:txBody>
@@ -586,7 +586,7 @@
           </a:p>
           <a:p xmlns:a="http://schemas.openxmlformats.org/drawingml/2006/main">
             <a:r>
-              <a:t>Trechos EN entre aspas reproduzem o original. PT indica tradução do apresentador. Análises identificadas no slide são interpretações do seminário. As páginas indicadas são as páginas do PDF fornecido (1 a 15).</a:t>
+              <a:t>Trechos EN entre aspas reproduzem o original. PT indica tradução do apresentador. Análises identificadas no slide são interpretações do seminário. As páginas indicadas são as páginas internas do PDF da ACM 3548606.3560564 (1 a 15), equivalentes às páginas 2369–2383 dos anais.</a:t>
             </a:r>
           </a:p>
         </p:txBody>
@@ -681,7 +681,7 @@
           </a:p>
           <a:p xmlns:a="http://schemas.openxmlformats.org/drawingml/2006/main">
             <a:r>
-              <a:t>Trechos EN entre aspas reproduzem o original. PT indica tradução do apresentador. Análises identificadas no slide são interpretações do seminário. As páginas indicadas são as páginas do PDF fornecido (1 a 15).</a:t>
+              <a:t>Trechos EN entre aspas reproduzem o original. PT indica tradução do apresentador. Análises identificadas no slide são interpretações do seminário. As páginas indicadas são as páginas internas do PDF da ACM 3548606.3560564 (1 a 15), equivalentes às páginas 2369–2383 dos anais.</a:t>
             </a:r>
           </a:p>
         </p:txBody>
@@ -776,7 +776,7 @@
           </a:p>
           <a:p xmlns:a="http://schemas.openxmlformats.org/drawingml/2006/main">
             <a:r>
-              <a:t>Trechos EN entre aspas reproduzem o original. PT indica tradução do apresentador. Análises identificadas no slide são interpretações do seminário. As páginas indicadas são as páginas do PDF fornecido (1 a 15).</a:t>
+              <a:t>Trechos EN entre aspas reproduzem o original. PT indica tradução do apresentador. Análises identificadas no slide são interpretações do seminário. As páginas indicadas são as páginas internas do PDF da ACM 3548606.3560564 (1 a 15), equivalentes às páginas 2369–2383 dos anais.</a:t>
             </a:r>
           </a:p>
         </p:txBody>
@@ -871,7 +871,7 @@
           </a:p>
           <a:p xmlns:a="http://schemas.openxmlformats.org/drawingml/2006/main">
             <a:r>
-              <a:t>Trechos EN entre aspas reproduzem o original. PT indica tradução do apresentador. Análises identificadas no slide são interpretações do seminário. As páginas indicadas são as páginas do PDF fornecido (1 a 15).</a:t>
+              <a:t>Trechos EN entre aspas reproduzem o original. PT indica tradução do apresentador. Análises identificadas no slide são interpretações do seminário. As páginas indicadas são as páginas internas do PDF da ACM 3548606.3560564 (1 a 15), equivalentes às páginas 2369–2383 dos anais.</a:t>
             </a:r>
           </a:p>
         </p:txBody>
@@ -966,7 +966,7 @@
           </a:p>
           <a:p xmlns:a="http://schemas.openxmlformats.org/drawingml/2006/main">
             <a:r>
-              <a:t>Trechos EN entre aspas reproduzem o original. PT indica tradução do apresentador. Análises identificadas no slide são interpretações do seminário. As páginas indicadas são as páginas do PDF fornecido (1 a 15).</a:t>
+              <a:t>Trechos EN entre aspas reproduzem o original. PT indica tradução do apresentador. Análises identificadas no slide são interpretações do seminário. As páginas indicadas são as páginas internas do PDF da ACM 3548606.3560564 (1 a 15), equivalentes às páginas 2369–2383 dos anais.</a:t>
             </a:r>
           </a:p>
         </p:txBody>
@@ -1061,7 +1061,7 @@
           </a:p>
           <a:p xmlns:a="http://schemas.openxmlformats.org/drawingml/2006/main">
             <a:r>
-              <a:t>Trechos EN entre aspas reproduzem o original. PT indica tradução do apresentador. Análises identificadas no slide são interpretações do seminário. As páginas indicadas são as páginas do PDF fornecido (1 a 15).</a:t>
+              <a:t>Trechos EN entre aspas reproduzem o original. PT indica tradução do apresentador. Análises identificadas no slide são interpretações do seminário. As páginas indicadas são as páginas internas do PDF da ACM 3548606.3560564 (1 a 15), equivalentes às páginas 2369–2383 dos anais.</a:t>
             </a:r>
           </a:p>
         </p:txBody>
@@ -1156,7 +1156,7 @@
           </a:p>
           <a:p xmlns:a="http://schemas.openxmlformats.org/drawingml/2006/main">
             <a:r>
-              <a:t>Trechos EN entre aspas reproduzem o original. PT indica tradução do apresentador. Análises identificadas no slide são interpretações do seminário. As páginas indicadas são as páginas do PDF fornecido (1 a 15).</a:t>
+              <a:t>Trechos EN entre aspas reproduzem o original. PT indica tradução do apresentador. Análises identificadas no slide são interpretações do seminário. As páginas indicadas são as páginas internas do PDF da ACM 3548606.3560564 (1 a 15), equivalentes às páginas 2369–2383 dos anais.</a:t>
             </a:r>
           </a:p>
         </p:txBody>
@@ -1251,7 +1251,7 @@
           </a:p>
           <a:p xmlns:a="http://schemas.openxmlformats.org/drawingml/2006/main">
             <a:r>
-              <a:t>Trechos EN entre aspas reproduzem o original. PT indica tradução do apresentador. Análises identificadas no slide são interpretações do seminário. As páginas indicadas são as páginas do PDF fornecido (1 a 15).</a:t>
+              <a:t>Trechos EN entre aspas reproduzem o original. PT indica tradução do apresentador. Análises identificadas no slide são interpretações do seminário. As páginas indicadas são as páginas internas do PDF da ACM 3548606.3560564 (1 a 15), equivalentes às páginas 2369–2383 dos anais.</a:t>
             </a:r>
           </a:p>
         </p:txBody>
@@ -1346,7 +1346,7 @@
           </a:p>
           <a:p xmlns:a="http://schemas.openxmlformats.org/drawingml/2006/main">
             <a:r>
-              <a:t>Trechos EN entre aspas reproduzem o original. PT indica tradução do apresentador. Análises identificadas no slide são interpretações do seminário. As páginas indicadas são as páginas do PDF fornecido (1 a 15).</a:t>
+              <a:t>Trechos EN entre aspas reproduzem o original. PT indica tradução do apresentador. Análises identificadas no slide são interpretações do seminário. As páginas indicadas são as páginas internas do PDF da ACM 3548606.3560564 (1 a 15), equivalentes às páginas 2369–2383 dos anais.</a:t>
             </a:r>
           </a:p>
         </p:txBody>
@@ -1441,7 +1441,7 @@
           </a:p>
           <a:p xmlns:a="http://schemas.openxmlformats.org/drawingml/2006/main">
             <a:r>
-              <a:t>Trechos EN entre aspas reproduzem o original. PT indica tradução do apresentador. Análises identificadas no slide são interpretações do seminário. As páginas indicadas são as páginas do PDF fornecido (1 a 15).</a:t>
+              <a:t>Trechos EN entre aspas reproduzem o original. PT indica tradução do apresentador. Análises identificadas no slide são interpretações do seminário. As páginas indicadas são as páginas internas do PDF da ACM 3548606.3560564 (1 a 15), equivalentes às páginas 2369–2383 dos anais.</a:t>
             </a:r>
           </a:p>
         </p:txBody>
@@ -1521,7 +1521,7 @@
           </a:p>
           <a:p xmlns:a="http://schemas.openxmlformats.org/drawingml/2006/main">
             <a:r>
-              <a:t>A busca ocorreu no Scopus via acesso institucional. A expressão exata gerou 131 resultados. Os filtros de ano, área e tipo reduziram a 70. O refino por palavras-chave e período levou a cinco candidatos. A seleção final priorizou a relação com o objeto do TCC. Os cinco finalistas estão no slide de apoio.</a:t>
+              <a:t>Acesse o Portal de Periódicos da CAPES, entre pela CAFe com a instituição IDP e abra a base Scopus. A busca em título, resumo e palavras-chave, em 21/09/2026, gerou 131 resultados. Ano, área e tipo de documento reduziram o conjunto a 70. As palavras-chave Third Parties e Third-party Tracking levaram a 39. Acrescentar consent à expressão e ajustar o período para 2018–2025 levou a cinco. A passagem de 39 a cinco é uma decisão metodológica: o consentimento é o recorte do TCC. Por fim, a leitura de títulos e resumos priorizou Android, consentimento, escala e aderência ao projeto. Os cinco finalistas estão no slide de apoio.</a:t>
             </a:r>
           </a:p>
           <a:p xmlns:a="http://schemas.openxmlformats.org/drawingml/2006/main">
@@ -1531,12 +1531,12 @@
           </a:p>
           <a:p xmlns:a="http://schemas.openxmlformats.org/drawingml/2006/main">
             <a:r>
-              <a:t>Fontes: https://github.com/ClaudioAMF1/TCC/blob/main/seminario/pesquisa/README.md. Capturas presentes no PPTX fornecido.</a:t>
-            </a:r>
-          </a:p>
-          <a:p xmlns:a="http://schemas.openxmlformats.org/drawingml/2006/main">
-            <a:r>
-              <a:t>Trechos EN entre aspas reproduzem o original. PT indica tradução do apresentador. Análises identificadas no slide são interpretações do seminário. As páginas indicadas são as páginas do PDF fornecido (1 a 15).</a:t>
+              <a:t>Fontes: https://github.com/ClaudioAMF1/TCC/blob/main/seminario/pesquisa/README.md. Capturas funil-1 a funil-4 em pesquisa/recortes-para-slide/. Acesso documentado em pesquisa/0-acesso/.</a:t>
+            </a:r>
+          </a:p>
+          <a:p xmlns:a="http://schemas.openxmlformats.org/drawingml/2006/main">
+            <a:r>
+              <a:t>Trechos EN entre aspas reproduzem o original. PT indica tradução do apresentador. Análises identificadas no slide são interpretações do seminário. As páginas indicadas são as páginas internas do PDF da ACM 3548606.3560564 (1 a 15), equivalentes às páginas 2369–2383 dos anais.</a:t>
             </a:r>
           </a:p>
         </p:txBody>
@@ -1631,7 +1631,7 @@
           </a:p>
           <a:p xmlns:a="http://schemas.openxmlformats.org/drawingml/2006/main">
             <a:r>
-              <a:t>Trechos EN entre aspas reproduzem o original. PT indica tradução do apresentador. Análises identificadas no slide são interpretações do seminário. As páginas indicadas são as páginas do PDF fornecido (1 a 15).</a:t>
+              <a:t>Trechos EN entre aspas reproduzem o original. PT indica tradução do apresentador. Análises identificadas no slide são interpretações do seminário. As páginas indicadas são as páginas internas do PDF da ACM 3548606.3560564 (1 a 15), equivalentes às páginas 2369–2383 dos anais.</a:t>
             </a:r>
           </a:p>
         </p:txBody>
@@ -1726,7 +1726,7 @@
           </a:p>
           <a:p xmlns:a="http://schemas.openxmlformats.org/drawingml/2006/main">
             <a:r>
-              <a:t>Trechos EN entre aspas reproduzem o original. PT indica tradução do apresentador. Análises identificadas no slide são interpretações do seminário. As páginas indicadas são as páginas do PDF fornecido (1 a 15).</a:t>
+              <a:t>Trechos EN entre aspas reproduzem o original. PT indica tradução do apresentador. Análises identificadas no slide são interpretações do seminário. As páginas indicadas são as páginas internas do PDF da ACM 3548606.3560564 (1 a 15), equivalentes às páginas 2369–2383 dos anais.</a:t>
             </a:r>
           </a:p>
         </p:txBody>
@@ -1821,7 +1821,7 @@
           </a:p>
           <a:p xmlns:a="http://schemas.openxmlformats.org/drawingml/2006/main">
             <a:r>
-              <a:t>Trechos EN entre aspas reproduzem o original. PT indica tradução do apresentador. Análises identificadas no slide são interpretações do seminário. As páginas indicadas são as páginas do PDF fornecido (1 a 15).</a:t>
+              <a:t>Trechos EN entre aspas reproduzem o original. PT indica tradução do apresentador. Análises identificadas no slide são interpretações do seminário. As páginas indicadas são as páginas internas do PDF da ACM 3548606.3560564 (1 a 15), equivalentes às páginas 2369–2383 dos anais.</a:t>
             </a:r>
           </a:p>
         </p:txBody>
@@ -1911,12 +1911,12 @@
           </a:p>
           <a:p xmlns:a="http://schemas.openxmlformats.org/drawingml/2006/main">
             <a:r>
-              <a:t>Fontes: https://github.com/ClaudioAMF1/TCC/blob/main/desenhos/N3-proposta-formal.md e https://github.com/ClaudioAMF1/TCC/blob/main/seminario/plano-do-seminario.md. Versão consultada em 22/09/2026, commit a779038cc235e481c542873e024bfc8b559a60cd.</a:t>
-            </a:r>
-          </a:p>
-          <a:p xmlns:a="http://schemas.openxmlformats.org/drawingml/2006/main">
-            <a:r>
-              <a:t>Trechos EN entre aspas reproduzem o original. PT indica tradução do apresentador. Análises identificadas no slide são interpretações do seminário. As páginas indicadas são as páginas do PDF fornecido (1 a 15).</a:t>
+              <a:t>Fontes: https://github.com/ClaudioAMF1/TCC/blob/main/desenhos/N3-proposta-formal.md. Versão consultada em 22/09/2026.</a:t>
+            </a:r>
+          </a:p>
+          <a:p xmlns:a="http://schemas.openxmlformats.org/drawingml/2006/main">
+            <a:r>
+              <a:t>Trechos EN entre aspas reproduzem o original. PT indica tradução do apresentador. Análises identificadas no slide são interpretações do seminário. As páginas indicadas são as páginas internas do PDF da ACM 3548606.3560564 (1 a 15), equivalentes às páginas 2369–2383 dos anais.</a:t>
             </a:r>
           </a:p>
         </p:txBody>
@@ -1996,7 +1996,7 @@
           </a:p>
           <a:p xmlns:a="http://schemas.openxmlformats.org/drawingml/2006/main">
             <a:r>
-              <a:t>Títulos abreviados para leitura. A contagem de citações representa o registro da sessão de busca, não uma atualização em tempo real. A seleção também considerou o alinhamento com Android e rastreamento, além do método e da escala. Não se infere qualidade do artigo apenas pelo número de citações.</a:t>
+              <a:t>Títulos abreviados para leitura. O quinto título desta tabela é An Empirical Measurement of Cookie Banners Potential Legal Violations in EU vs US Websites, LNCS, 2025, zero citações no registro. Ele substitui WhisperTest, que aparecia em outras buscas, mas não entre estes cinco finalistas. A classificação do SOUPS foi atualizada para A na edição ICORE2026, conforme o portal oficial e a captura fornecida. O ano 2021 na coluna Veículo / ano é o de publicação do artigo. As edições CORE2021 e CORE2023 registravam B, mas a comparação nesta apresentação usa a edição 2026, também adotada para o CCS no slide 4. A contagem de citações representa o registro da sessão de busca, não uma atualização em tempo real. A seleção também considerou Android, consentimento, método e escala. Não se infere qualidade do artigo apenas pelo número de citações.</a:t>
             </a:r>
           </a:p>
           <a:p xmlns:a="http://schemas.openxmlformats.org/drawingml/2006/main">
@@ -2006,12 +2006,12 @@
           </a:p>
           <a:p xmlns:a="http://schemas.openxmlformats.org/drawingml/2006/main">
             <a:r>
-              <a:t>Fontes: https://github.com/ClaudioAMF1/TCC/blob/main/seminario/pesquisa/README.md.</a:t>
-            </a:r>
-          </a:p>
-          <a:p xmlns:a="http://schemas.openxmlformats.org/drawingml/2006/main">
-            <a:r>
-              <a:t>Trechos EN entre aspas reproduzem o original. PT indica tradução do apresentador. Análises identificadas no slide são interpretações do seminário. As páginas indicadas são as páginas do PDF fornecido (1 a 15).</a:t>
+              <a:t>Fontes: https://github.com/ClaudioAMF1/TCC/blob/main/seminario/pesquisa/README.md e capturas 23 e 24 de pesquisa/busca-3/. ICORE, registro SOUPS: https://portal.core.edu.au/conf-ranks/2167/. Consulta e captura fornecida em 22/09/2026.</a:t>
+            </a:r>
+          </a:p>
+          <a:p xmlns:a="http://schemas.openxmlformats.org/drawingml/2006/main">
+            <a:r>
+              <a:t>Trechos EN entre aspas reproduzem o original. PT indica tradução do apresentador. Análises identificadas no slide são interpretações do seminário. As páginas indicadas são as páginas internas do PDF da ACM 3548606.3560564 (1 a 15), equivalentes às páginas 2369–2383 dos anais.</a:t>
             </a:r>
           </a:p>
         </p:txBody>
@@ -2091,7 +2091,7 @@
           </a:p>
           <a:p xmlns:a="http://schemas.openxmlformats.org/drawingml/2006/main">
             <a:r>
-              <a:t>As traduções em português são do apresentador. As figuras são recortes do PDF original. Os dados do projeto e da busca são identificados separadamente das conclusões dos autores.</a:t>
+              <a:t>As traduções em português são do apresentador. Todas as figuras foram extraídas do PDF da ACM fornecido nesta revisão. Os dados do projeto e da busca são identificados separadamente das conclusões dos autores. As consultas de métricas em 17/09/2026 são documentadas pelas capturas; o print do relatório CAPES é de 22/09/2026. Qualis Eventos e Qualis Periódicos são identificados separadamente, sem conversão inferida do h5.</a:t>
             </a:r>
           </a:p>
           <a:p xmlns:a="http://schemas.openxmlformats.org/drawingml/2006/main">
@@ -2101,12 +2101,12 @@
           </a:p>
           <a:p xmlns:a="http://schemas.openxmlformats.org/drawingml/2006/main">
             <a:r>
-              <a:t>Fontes: Artigo fornecido: https://doi.org/10.1145/3548606.3560564. Repositório: https://github.com/ClaudioAMF1/TCC. ICORE: https://portal.core.edu.au/conf-ranks/12/. CAPES: https://www.gov.br/capes/pt-br/centrais-de-conteudo/documentos/avaliacao/avaliacao-quadrienal-2017/DocumentotcnicoQualisPeridicosfinal.pdf.</a:t>
-            </a:r>
-          </a:p>
-          <a:p xmlns:a="http://schemas.openxmlformats.org/drawingml/2006/main">
-            <a:r>
-              <a:t>Trechos EN entre aspas reproduzem o original. PT indica tradução do apresentador. Análises identificadas no slide são interpretações do seminário. As páginas indicadas são as páginas do PDF fornecido (1 a 15).</a:t>
+              <a:t>Fontes: Artigo ACM fornecido: https://doi.org/10.1145/3548606.3560564. Repositório: https://github.com/ClaudioAMF1/TCC. Google Scholar Metrics: Computer Security &amp; Cryptography, captura 06 em seminario/pesquisa/metricas/. ICORE, CCS: https://portal.core.edu.au/conf-ranks/12/. ICORE, SOUPS: https://portal.core.edu.au/conf-ranks/2167/ (consulta em 22/09/2026). CAPES Eventos: https://www.gov.br/capes/pt-br/centrais-de-conteudo/documentos/avaliacao/09012022_RELATORIOQUALISEVENTOS20172020COMPUTACAO.PDF/@@display-file/file. CAPES Periódicos: https://www.gov.br/capes/pt-br/centrais-de-conteudo/documentos/avaliacao/avaliacao-quadrienal-2017/DocumentotcnicoQualisPeridicosfinal.pdf.</a:t>
+            </a:r>
+          </a:p>
+          <a:p xmlns:a="http://schemas.openxmlformats.org/drawingml/2006/main">
+            <a:r>
+              <a:t>Trechos EN entre aspas reproduzem o original. PT indica tradução do apresentador. Análises identificadas no slide são interpretações do seminário. As páginas indicadas são as páginas internas do PDF da ACM 3548606.3560564 (1 a 15), equivalentes às páginas 2369–2383 dos anais.</a:t>
             </a:r>
           </a:p>
         </p:txBody>
@@ -2186,7 +2186,7 @@
           </a:p>
           <a:p xmlns:a="http://schemas.openxmlformats.org/drawingml/2006/main">
             <a:r>
-              <a:t>A originalidade está no estudo empírico e no desenvolvimento do instrumento, segundo a apresentação dos autores. Eles descrevem a contribuição como o primeiro estudo em larga escala de avisos de consentimento nesse recorte. No TCC, o método inspira a confirmação do comportamento observado, mas o corpus governamental e o controle comercial pertencem ao meu projeto.</a:t>
+              <a:t>A originalidade está nos novos dados empíricos e no desenvolvimento do instrumento. A ACM identifica o trabalho como RESEARCH-ARTICLE. Os autores descrevem a contribuição como o primeiro estudo em larga escala de avisos de consentimento nesse recorte; essa afirmação é deles. As contagens registradas em 17/09/2026 são 42 citações na ACM, 52 no Scopus e 99 no Google Acadêmico. São bases com cobertura diferente; não se somam os valores. No TCC, o método inspira a confirmação do comportamento observado, mas o corpus governamental e o controle comercial pertencem ao meu projeto.</a:t>
             </a:r>
           </a:p>
           <a:p xmlns:a="http://schemas.openxmlformats.org/drawingml/2006/main">
@@ -2196,12 +2196,12 @@
           </a:p>
           <a:p xmlns:a="http://schemas.openxmlformats.org/drawingml/2006/main">
             <a:r>
-              <a:t>Fontes: Artigo, p. 1–2. https://github.com/ClaudioAMF1/TCC/blob/main/desenhos/N3-proposta-formal.md.</a:t>
-            </a:r>
-          </a:p>
-          <a:p xmlns:a="http://schemas.openxmlformats.org/drawingml/2006/main">
-            <a:r>
-              <a:t>Trechos EN entre aspas reproduzem o original. PT indica tradução do apresentador. Análises identificadas no slide são interpretações do seminário. As páginas indicadas são as páginas do PDF fornecido (1 a 15).</a:t>
+              <a:t>Fontes: Artigo ACM, p. 1–2. https://github.com/ClaudioAMF1/TCC/blob/main/desenhos/N3-proposta-formal.md. Capturas 01, 02, 04 e 05 em seminario/pesquisa/metricas/.</a:t>
+            </a:r>
+          </a:p>
+          <a:p xmlns:a="http://schemas.openxmlformats.org/drawingml/2006/main">
+            <a:r>
+              <a:t>Trechos EN entre aspas reproduzem o original. PT indica tradução do apresentador. Análises identificadas no slide são interpretações do seminário. As páginas indicadas são as páginas internas do PDF da ACM 3548606.3560564 (1 a 15), equivalentes às páginas 2369–2383 dos anais.</a:t>
             </a:r>
           </a:p>
         </p:txBody>
@@ -2281,7 +2281,7 @@
           </a:p>
           <a:p xmlns:a="http://schemas.openxmlformats.org/drawingml/2006/main">
             <a:r>
-              <a:t>CCS é uma conferência. O rank A* está disponível no portal ICORE. O material do seminário registra h5 90 e mediana 146, preservados como registro, sem nova validação na fonte. O estrato A1 da versão anterior não tem cálculo de percentil verificável. A CAPES descreve percentis e modelos de imputação, não a conversão direta do valor 90 para percentil 90. CORE e Qualis são sistemas distintos.</a:t>
+              <a:t>O CCS tem h5 90 e mediana h5 146 no registro fornecido. Aparece em quinto na subárea e em terceiro entre suas conferências. O portal ICORE registra A* na edição 2026. O relatório oficial da CAPES lista CCS como A1 no Qualis Eventos da Computação 2017–2020. Esse registro refere-se ao ACM CCS, e não ao AsiaCCS. O enunciado usa a expressão Qualis Periódicos correspondente ao h5. Aqui a comprovação disponível é de Qualis Eventos: os sistemas e os períodos não são equivalentes. A posição numa lista de 20 itens não demonstra o percentil em um universo maior, e não usamos um universo hipotético de 40 veículos para derivar A1. O A1 apresentado é o estrato documental da conferência.</a:t>
             </a:r>
           </a:p>
           <a:p xmlns:a="http://schemas.openxmlformats.org/drawingml/2006/main">
@@ -2291,12 +2291,12 @@
           </a:p>
           <a:p xmlns:a="http://schemas.openxmlformats.org/drawingml/2006/main">
             <a:r>
-              <a:t>Fontes: ICORE: https://portal.core.edu.au/conf-ranks/12/ (consulta em 22/09/2026). CAPES: Documento técnico do Qualis Periódicos, janeiro de 2023, discussão de percentis e imputação, p. 11–13 do PDF. https://www.gov.br/capes/pt-br/centrais-de-conteudo/documentos/avaliacao/avaliacao-quadrienal-2017/DocumentotcnicoQualisPeridicosfinal.pdf. h5 e mediana: slide 4 do PPTX fornecido.</a:t>
-            </a:r>
-          </a:p>
-          <a:p xmlns:a="http://schemas.openxmlformats.org/drawingml/2006/main">
-            <a:r>
-              <a:t>Trechos EN entre aspas reproduzem o original. PT indica tradução do apresentador. Análises identificadas no slide são interpretações do seminário. As páginas indicadas são as páginas do PDF fornecido (1 a 15).</a:t>
+              <a:t>Fontes: Google Scholar Metrics, Computer Security &amp; Cryptography; ICORE: https://portal.core.edu.au/conf-ranks/12/. Consultas registradas em 17/09/2026 nas capturas 06 e 09. CAPES: Relatório Qualis Eventos Computação 2017–2020, p. 9, captura 07. Relatório: https://www.gov.br/capes/pt-br/centrais-de-conteudo/documentos/avaliacao/09012022_RELATORIOQUALISEVENTOS20172020COMPUTACAO.PDF/@@display-file/file.</a:t>
+            </a:r>
+          </a:p>
+          <a:p xmlns:a="http://schemas.openxmlformats.org/drawingml/2006/main">
+            <a:r>
+              <a:t>Trechos EN entre aspas reproduzem o original. PT indica tradução do apresentador. Análises identificadas no slide são interpretações do seminário. As páginas indicadas são as páginas internas do PDF da ACM 3548606.3560564 (1 a 15), equivalentes às páginas 2369–2383 dos anais.</a:t>
             </a:r>
           </a:p>
         </p:txBody>
@@ -2391,7 +2391,7 @@
           </a:p>
           <a:p xmlns:a="http://schemas.openxmlformats.org/drawingml/2006/main">
             <a:r>
-              <a:t>Trechos EN entre aspas reproduzem o original. PT indica tradução do apresentador. Análises identificadas no slide são interpretações do seminário. As páginas indicadas são as páginas do PDF fornecido (1 a 15).</a:t>
+              <a:t>Trechos EN entre aspas reproduzem o original. PT indica tradução do apresentador. Análises identificadas no slide são interpretações do seminário. As páginas indicadas são as páginas internas do PDF da ACM 3548606.3560564 (1 a 15), equivalentes às páginas 2369–2383 dos anais.</a:t>
             </a:r>
           </a:p>
         </p:txBody>
@@ -2486,7 +2486,7 @@
           </a:p>
           <a:p xmlns:a="http://schemas.openxmlformats.org/drawingml/2006/main">
             <a:r>
-              <a:t>Trechos EN entre aspas reproduzem o original. PT indica tradução do apresentador. Análises identificadas no slide são interpretações do seminário. As páginas indicadas são as páginas do PDF fornecido (1 a 15).</a:t>
+              <a:t>Trechos EN entre aspas reproduzem o original. PT indica tradução do apresentador. Análises identificadas no slide são interpretações do seminário. As páginas indicadas são as páginas internas do PDF da ACM 3548606.3560564 (1 a 15), equivalentes às páginas 2369–2383 dos anais.</a:t>
             </a:r>
           </a:p>
         </p:txBody>
@@ -2581,7 +2581,7 @@
           </a:p>
           <a:p xmlns:a="http://schemas.openxmlformats.org/drawingml/2006/main">
             <a:r>
-              <a:t>Trechos EN entre aspas reproduzem o original. PT indica tradução do apresentador. Análises identificadas no slide são interpretações do seminário. As páginas indicadas são as páginas do PDF fornecido (1 a 15).</a:t>
+              <a:t>Trechos EN entre aspas reproduzem o original. PT indica tradução do apresentador. Análises identificadas no slide são interpretações do seminário. As páginas indicadas são as páginas internas do PDF da ACM 3548606.3560564 (1 a 15), equivalentes às páginas 2369–2383 dos anais.</a:t>
             </a:r>
           </a:p>
         </p:txBody>
@@ -2661,7 +2661,7 @@
           </a:p>
           <a:p xmlns:a="http://schemas.openxmlformats.org/drawingml/2006/main">
             <a:r>
-              <a:t>A introdução transforma o tema em questões investigáveis. A primeira exige observar e classificar interfaces. A segunda exige relacionar interface e tráfego sob critérios definidos pelos autores. A terceira exige ouvir desenvolvedores e explica a presença da Seção 5. A pergunta em inglês mantém a construção gramatical do PDF.</a:t>
+              <a:t>A introdução transforma o tema em questões investigáveis. A primeira exige observar e classificar interfaces. A segunda exige relacionar interface e tráfego sob critérios definidos pelos autores. A terceira exige ouvir desenvolvedores e explica a presença da Seção 5. A segunda pergunta transcreve literalmente a versão da ACM: Can these implemented consent notices be legally justified under GDPR?</a:t>
             </a:r>
           </a:p>
           <a:p xmlns:a="http://schemas.openxmlformats.org/drawingml/2006/main">
@@ -2671,12 +2671,12 @@
           </a:p>
           <a:p xmlns:a="http://schemas.openxmlformats.org/drawingml/2006/main">
             <a:r>
-              <a:t>Fontes: Artigo, Seção 1, p. 2.</a:t>
-            </a:r>
-          </a:p>
-          <a:p xmlns:a="http://schemas.openxmlformats.org/drawingml/2006/main">
-            <a:r>
-              <a:t>Trechos EN entre aspas reproduzem o original. PT indica tradução do apresentador. Análises identificadas no slide são interpretações do seminário. As páginas indicadas são as páginas do PDF fornecido (1 a 15).</a:t>
+              <a:t>Fontes: Artigo ACM 3548606.3560564, Seção 1, p. 2.</a:t>
+            </a:r>
+          </a:p>
+          <a:p xmlns:a="http://schemas.openxmlformats.org/drawingml/2006/main">
+            <a:r>
+              <a:t>Trechos EN entre aspas reproduzem o original. PT indica tradução do apresentador. Análises identificadas no slide são interpretações do seminário. As páginas indicadas são as páginas internas do PDF da ACM 3548606.3560564 (1 a 15), equivalentes às páginas 2369–2383 dos anais.</a:t>
             </a:r>
           </a:p>
         </p:txBody>
@@ -2771,7 +2771,7 @@
           </a:p>
           <a:p xmlns:a="http://schemas.openxmlformats.org/drawingml/2006/main">
             <a:r>
-              <a:t>Trechos EN entre aspas reproduzem o original. PT indica tradução do apresentador. Análises identificadas no slide são interpretações do seminário. As páginas indicadas são as páginas do PDF fornecido (1 a 15).</a:t>
+              <a:t>Trechos EN entre aspas reproduzem o original. PT indica tradução do apresentador. Análises identificadas no slide são interpretações do seminário. As páginas indicadas são as páginas internas do PDF da ACM 3548606.3560564 (1 a 15), equivalentes às páginas 2369–2383 dos anais.</a:t>
             </a:r>
           </a:p>
         </p:txBody>
@@ -2839,7 +2839,7 @@
   </p:cSld>
   <p:clrMap bg1="lt1" tx1="dk1" bg2="lt2" tx2="dk2" accent1="accent1" accent2="accent2" accent3="accent3" accent4="accent4" accent5="accent5" accent6="accent6" hlink="hlink" folHlink="folHlink"/>
   <p:sldLayoutIdLst>
-    <p:sldLayoutId xmlns:r="http://schemas.openxmlformats.org/officeDocument/2006/relationships" id="2147483649" r:id="R2337035e76534db9"/>
+    <p:sldLayoutId xmlns:r="http://schemas.openxmlformats.org/officeDocument/2006/relationships" id="2147483649" r:id="Re9e05cb1c3c544ed"/>
   </p:sldLayoutIdLst>
   <p:txStyles>
     <p:titleStyle>
@@ -3387,10 +3387,10 @@
       </p:grpSpPr>
       <p:sp>
         <p:nvSpPr>
-          <p:cNvPr id="12" name="">
-            <a:extLst xmlns:a="http://schemas.openxmlformats.org/drawingml/2006/main">
-              <a:ext uri="{FF2B5EF4-FFF2-40B4-BE49-F238E27FC236}">
-                <a16:creationId xmlns:a16="http://schemas.microsoft.com/office/drawing/2014/main" id="{0F61BEC2-F3F8-490F-989E-0640663DBBCF}"/>
+          <p:cNvPr id="13" name="">
+            <a:extLst xmlns:a="http://schemas.openxmlformats.org/drawingml/2006/main">
+              <a:ext uri="{FF2B5EF4-FFF2-40B4-BE49-F238E27FC236}">
+                <a16:creationId xmlns:a16="http://schemas.microsoft.com/office/drawing/2014/main" id="{FEA57A68-05A1-4710-9450-DE8375EBB935}"/>
               </a:ext>
             </a:extLst>
           </p:cNvPr>
@@ -3420,7 +3420,7 @@
           <p:cNvPr id="2" name="ANÁLISE DE ARTIGO CIENTÍFICO">
             <a:extLst xmlns:a="http://schemas.openxmlformats.org/drawingml/2006/main">
               <a:ext uri="{FF2B5EF4-FFF2-40B4-BE49-F238E27FC236}">
-                <a16:creationId xmlns:a16="http://schemas.microsoft.com/office/drawing/2014/main" id="{5D1F19B8-E201-40A6-9B5E-50582B7910C0}"/>
+                <a16:creationId xmlns:a16="http://schemas.microsoft.com/office/drawing/2014/main" id="{18ABBCD0-B840-46A1-9EB0-1E3967A909F3}"/>
               </a:ext>
             </a:extLst>
           </p:cNvPr>
@@ -3477,7 +3477,7 @@
           <p:cNvPr id="3" name="Freely Given Consent?">
             <a:extLst xmlns:a="http://schemas.openxmlformats.org/drawingml/2006/main">
               <a:ext uri="{FF2B5EF4-FFF2-40B4-BE49-F238E27FC236}">
-                <a16:creationId xmlns:a16="http://schemas.microsoft.com/office/drawing/2014/main" id="{6B6331A7-DFB1-451F-9E31-4978E2C83B51}"/>
+                <a16:creationId xmlns:a16="http://schemas.microsoft.com/office/drawing/2014/main" id="{E7EDB540-E51C-4D81-9DF9-918F6E363906}"/>
               </a:ext>
             </a:extLst>
           </p:cNvPr>
@@ -3534,7 +3534,7 @@
           <p:cNvPr id="4" name="Studying Consent Notice of Third-Party T">
             <a:extLst xmlns:a="http://schemas.openxmlformats.org/drawingml/2006/main">
               <a:ext uri="{FF2B5EF4-FFF2-40B4-BE49-F238E27FC236}">
-                <a16:creationId xmlns:a16="http://schemas.microsoft.com/office/drawing/2014/main" id="{EC8C591B-633D-40DF-B611-0C8593315C52}"/>
+                <a16:creationId xmlns:a16="http://schemas.microsoft.com/office/drawing/2014/main" id="{17174CA9-6B9D-4304-A57C-62D48AD51A63}"/>
               </a:ext>
             </a:extLst>
           </p:cNvPr>
@@ -3614,7 +3614,7 @@
           <p:cNvPr id="5" name="PT">
             <a:extLst xmlns:a="http://schemas.openxmlformats.org/drawingml/2006/main">
               <a:ext uri="{FF2B5EF4-FFF2-40B4-BE49-F238E27FC236}">
-                <a16:creationId xmlns:a16="http://schemas.microsoft.com/office/drawing/2014/main" id="{4584E4BF-DF2C-43AF-A706-03E8A452B15C}"/>
+                <a16:creationId xmlns:a16="http://schemas.microsoft.com/office/drawing/2014/main" id="{E93624F6-136D-4750-9149-31CD6A03E2AE}"/>
               </a:ext>
             </a:extLst>
           </p:cNvPr>
@@ -3671,7 +3671,7 @@
           <p:cNvPr id="6" name="Consentimento dado livremente? Estudo do">
             <a:extLst xmlns:a="http://schemas.openxmlformats.org/drawingml/2006/main">
               <a:ext uri="{FF2B5EF4-FFF2-40B4-BE49-F238E27FC236}">
-                <a16:creationId xmlns:a16="http://schemas.microsoft.com/office/drawing/2014/main" id="{D10B7848-987F-41AE-800E-38257C33CAEE}"/>
+                <a16:creationId xmlns:a16="http://schemas.microsoft.com/office/drawing/2014/main" id="{4CEE16DC-6C12-4F61-B397-5E63205E56D3}"/>
               </a:ext>
             </a:extLst>
           </p:cNvPr>
@@ -3751,7 +3751,7 @@
           <p:cNvPr id="7" name="">
             <a:extLst xmlns:a="http://schemas.openxmlformats.org/drawingml/2006/main">
               <a:ext uri="{FF2B5EF4-FFF2-40B4-BE49-F238E27FC236}">
-                <a16:creationId xmlns:a16="http://schemas.microsoft.com/office/drawing/2014/main" id="{7B85A095-7F81-49CE-86E3-EA68F8515E55}"/>
+                <a16:creationId xmlns:a16="http://schemas.microsoft.com/office/drawing/2014/main" id="{AECF129C-5ED1-422E-9E07-4D542F28BB08}"/>
               </a:ext>
             </a:extLst>
           </p:cNvPr>
@@ -3781,7 +3781,7 @@
           <p:cNvPr id="8" name="Trung Tin Nguyen, Michael Backes e Ben S">
             <a:extLst xmlns:a="http://schemas.openxmlformats.org/drawingml/2006/main">
               <a:ext uri="{FF2B5EF4-FFF2-40B4-BE49-F238E27FC236}">
-                <a16:creationId xmlns:a16="http://schemas.microsoft.com/office/drawing/2014/main" id="{898B7F50-862B-4A5E-9CE2-16FAD148C95D}"/>
+                <a16:creationId xmlns:a16="http://schemas.microsoft.com/office/drawing/2014/main" id="{C68643F6-66C9-43BE-9286-BED809BF7135}"/>
               </a:ext>
             </a:extLst>
           </p:cNvPr>
@@ -3838,7 +3838,7 @@
           <p:cNvPr id="9" name="ACM CCS 2022, p. 2369–2383. DOI: 10.1145">
             <a:extLst xmlns:a="http://schemas.openxmlformats.org/drawingml/2006/main">
               <a:ext uri="{FF2B5EF4-FFF2-40B4-BE49-F238E27FC236}">
-                <a16:creationId xmlns:a16="http://schemas.microsoft.com/office/drawing/2014/main" id="{C7CC6564-0B0E-4FDF-BF2B-4C9498384D49}"/>
+                <a16:creationId xmlns:a16="http://schemas.microsoft.com/office/drawing/2014/main" id="{B991ABE2-0776-4FEC-B17C-7C7865E1B816}"/>
               </a:ext>
             </a:extLst>
           </p:cNvPr>
@@ -3895,7 +3895,7 @@
           <p:cNvPr id="10" name="Claudio Meireles">
             <a:extLst xmlns:a="http://schemas.openxmlformats.org/drawingml/2006/main">
               <a:ext uri="{FF2B5EF4-FFF2-40B4-BE49-F238E27FC236}">
-                <a16:creationId xmlns:a16="http://schemas.microsoft.com/office/drawing/2014/main" id="{1BA6A3CB-CF61-4E6B-996C-5D4A98C6DDCD}"/>
+                <a16:creationId xmlns:a16="http://schemas.microsoft.com/office/drawing/2014/main" id="{A9E6D3A5-A677-450B-A0CF-B7A911FAD44C}"/>
               </a:ext>
             </a:extLst>
           </p:cNvPr>
@@ -3952,7 +3952,7 @@
           <p:cNvPr id="11" name="Projeto Capstone I · IDP · 29/09/2026">
             <a:extLst xmlns:a="http://schemas.openxmlformats.org/drawingml/2006/main">
               <a:ext uri="{FF2B5EF4-FFF2-40B4-BE49-F238E27FC236}">
-                <a16:creationId xmlns:a16="http://schemas.microsoft.com/office/drawing/2014/main" id="{5EB2EE06-2264-46F7-A30B-A5AE19171A8A}"/>
+                <a16:creationId xmlns:a16="http://schemas.microsoft.com/office/drawing/2014/main" id="{23A2781B-CEC9-4C4E-8B9E-245367F80C66}"/>
               </a:ext>
             </a:extLst>
           </p:cNvPr>
@@ -4004,10 +4004,67 @@
           </a:p>
         </p:txBody>
       </p:sp>
+      <p:sp>
+        <p:nvSpPr>
+          <p:cNvPr id="12" name="01 / 23">
+            <a:extLst xmlns:a="http://schemas.openxmlformats.org/drawingml/2006/main">
+              <a:ext uri="{FF2B5EF4-FFF2-40B4-BE49-F238E27FC236}">
+                <a16:creationId xmlns:a16="http://schemas.microsoft.com/office/drawing/2014/main" id="{A61CC503-700A-445D-84B0-62D90F8C0967}"/>
+              </a:ext>
+            </a:extLst>
+          </p:cNvPr>
+          <p:cNvSpPr>
+            <a:spLocks xmlns:a="http://schemas.openxmlformats.org/drawingml/2006/main" noGrp="1"/>
+          </p:cNvSpPr>
+          <p:nvPr/>
+        </p:nvSpPr>
+        <p:spPr>
+          <a:xfrm xmlns:a="http://schemas.openxmlformats.org/drawingml/2006/main">
+            <a:off x="10668000" y="6477000"/>
+            <a:ext cx="914400" cy="228600"/>
+          </a:xfrm>
+          <a:prstGeom xmlns:a="http://schemas.openxmlformats.org/drawingml/2006/main" prst="rect">
+            <a:avLst/>
+          </a:prstGeom>
+          <a:noFill xmlns:a="http://schemas.openxmlformats.org/drawingml/2006/main"/>
+          <a:ln xmlns:a="http://schemas.openxmlformats.org/drawingml/2006/main" w="0">
+            <a:noFill/>
+          </a:ln>
+        </p:spPr>
+        <p:txBody>
+          <a:bodyPr xmlns:a="http://schemas.openxmlformats.org/drawingml/2006/main" wrap="square" lIns="0" tIns="0" rIns="0" bIns="0" anchor="t">
+            <a:noAutofit/>
+          </a:bodyPr>
+          <a:lstStyle xmlns:a="http://schemas.openxmlformats.org/drawingml/2006/main"/>
+          <a:p xmlns:a="http://schemas.openxmlformats.org/drawingml/2006/main">
+            <a:pPr algn="r">
+              <a:defRPr sz="1200" b="0">
+                <a:solidFill>
+                  <a:srgbClr val="596B7A"/>
+                </a:solidFill>
+                <a:latin typeface="Arial"/>
+                <a:ea typeface="Arial"/>
+                <a:cs typeface="Arial"/>
+              </a:defRPr>
+            </a:pPr>
+            <a:r>
+              <a:rPr sz="1200" b="0">
+                <a:solidFill>
+                  <a:srgbClr val="596B7A"/>
+                </a:solidFill>
+                <a:latin typeface="Arial"/>
+                <a:ea typeface="Arial"/>
+                <a:cs typeface="Arial"/>
+              </a:rPr>
+              <a:t>01 / 23</a:t>
+            </a:r>
+          </a:p>
+        </p:txBody>
+      </p:sp>
     </p:spTree>
     <p:extLst>
       <p:ext uri="{BB962C8B-B14F-4D97-AF65-F5344CB8AC3E}">
-        <p14:creationId xmlns:p14="http://schemas.microsoft.com/office/powerpoint/2010/main" val="1426905805"/>
+        <p14:creationId xmlns:p14="http://schemas.microsoft.com/office/powerpoint/2010/main" val="634229451"/>
       </p:ext>
     </p:extLst>
   </p:cSld>
@@ -4038,7 +4095,7 @@
           <p:cNvPr id="20" name="">
             <a:extLst xmlns:a="http://schemas.openxmlformats.org/drawingml/2006/main">
               <a:ext uri="{FF2B5EF4-FFF2-40B4-BE49-F238E27FC236}">
-                <a16:creationId xmlns:a16="http://schemas.microsoft.com/office/drawing/2014/main" id="{12E86464-3B98-4033-BDB8-962649CD1484}"/>
+                <a16:creationId xmlns:a16="http://schemas.microsoft.com/office/drawing/2014/main" id="{22F7B65F-A0CB-4B69-A225-61DE15893DCE}"/>
               </a:ext>
             </a:extLst>
           </p:cNvPr>
@@ -4068,7 +4125,7 @@
           <p:cNvPr id="2" name="ANÁLISE VISUAL DA INTRODUÇÃO">
             <a:extLst xmlns:a="http://schemas.openxmlformats.org/drawingml/2006/main">
               <a:ext uri="{FF2B5EF4-FFF2-40B4-BE49-F238E27FC236}">
-                <a16:creationId xmlns:a16="http://schemas.microsoft.com/office/drawing/2014/main" id="{091A6CFB-D16F-42F2-B792-4F684C986C0D}"/>
+                <a16:creationId xmlns:a16="http://schemas.microsoft.com/office/drawing/2014/main" id="{33AC7AE4-4BA8-4A64-B36C-BAD8F7536E4B}"/>
               </a:ext>
             </a:extLst>
           </p:cNvPr>
@@ -4125,7 +4182,7 @@
           <p:cNvPr id="3" name="Figura 1: recusa e escolhas mais complex">
             <a:extLst xmlns:a="http://schemas.openxmlformats.org/drawingml/2006/main">
               <a:ext uri="{FF2B5EF4-FFF2-40B4-BE49-F238E27FC236}">
-                <a16:creationId xmlns:a16="http://schemas.microsoft.com/office/drawing/2014/main" id="{BBCF1A12-DE5A-43EC-8ED6-9184E4006ED8}"/>
+                <a16:creationId xmlns:a16="http://schemas.microsoft.com/office/drawing/2014/main" id="{FB8CF019-6F52-4840-87C3-1E195DAE92BC}"/>
               </a:ext>
             </a:extLst>
           </p:cNvPr>
@@ -4182,7 +4239,7 @@
           <p:cNvPr id="4" name="">
             <a:extLst xmlns:a="http://schemas.openxmlformats.org/drawingml/2006/main">
               <a:ext uri="{FF2B5EF4-FFF2-40B4-BE49-F238E27FC236}">
-                <a16:creationId xmlns:a16="http://schemas.microsoft.com/office/drawing/2014/main" id="{0473BEF4-0901-4FF4-92B3-42544837FDB6}"/>
+                <a16:creationId xmlns:a16="http://schemas.microsoft.com/office/drawing/2014/main" id="{8524D9B9-CF45-43EA-A539-47C023914023}"/>
               </a:ext>
             </a:extLst>
           </p:cNvPr>
@@ -4212,7 +4269,7 @@
           <p:cNvPr id="5" name="">
             <a:extLst xmlns:a="http://schemas.openxmlformats.org/drawingml/2006/main">
               <a:ext uri="{FF2B5EF4-FFF2-40B4-BE49-F238E27FC236}">
-                <a16:creationId xmlns:a16="http://schemas.microsoft.com/office/drawing/2014/main" id="{B146D63B-3441-463A-9C11-23AE8723ED6B}"/>
+                <a16:creationId xmlns:a16="http://schemas.microsoft.com/office/drawing/2014/main" id="{D3F2BB14-3303-4DC1-A820-FD5AE1EBD1E4}"/>
               </a:ext>
             </a:extLst>
           </p:cNvPr>
@@ -4242,7 +4299,7 @@
           <p:cNvPr id="6" name="Nguyen, Backes e Stock (2022), Figura 1 ">
             <a:extLst xmlns:a="http://schemas.openxmlformats.org/drawingml/2006/main">
               <a:ext uri="{FF2B5EF4-FFF2-40B4-BE49-F238E27FC236}">
-                <a16:creationId xmlns:a16="http://schemas.microsoft.com/office/drawing/2014/main" id="{18B5D242-5D57-4106-8159-4DA2A4759FC4}"/>
+                <a16:creationId xmlns:a16="http://schemas.microsoft.com/office/drawing/2014/main" id="{723B631E-6913-413D-BCA2-739668D70179}"/>
               </a:ext>
             </a:extLst>
           </p:cNvPr>
@@ -4254,7 +4311,7 @@
         <p:spPr>
           <a:xfrm xmlns:a="http://schemas.openxmlformats.org/drawingml/2006/main">
             <a:off x="609600" y="6477000"/>
-            <a:ext cx="10096500" cy="228600"/>
+            <a:ext cx="9982200" cy="228600"/>
           </a:xfrm>
           <a:prstGeom xmlns:a="http://schemas.openxmlformats.org/drawingml/2006/main" prst="rect">
             <a:avLst/>
@@ -4271,7 +4328,7 @@
           <a:lstStyle xmlns:a="http://schemas.openxmlformats.org/drawingml/2006/main"/>
           <a:p xmlns:a="http://schemas.openxmlformats.org/drawingml/2006/main">
             <a:pPr algn="l">
-              <a:defRPr sz="1125" b="0">
+              <a:defRPr sz="1200" b="0">
                 <a:solidFill>
                   <a:srgbClr val="596B7A"/>
                 </a:solidFill>
@@ -4281,7 +4338,7 @@
               </a:defRPr>
             </a:pPr>
             <a:r>
-              <a:rPr sz="1125" b="0">
+              <a:rPr sz="1200" b="0">
                 <a:solidFill>
                   <a:srgbClr val="596B7A"/>
                 </a:solidFill>
@@ -4299,7 +4356,7 @@
           <p:cNvPr id="7" name="10 / 23">
             <a:extLst xmlns:a="http://schemas.openxmlformats.org/drawingml/2006/main">
               <a:ext uri="{FF2B5EF4-FFF2-40B4-BE49-F238E27FC236}">
-                <a16:creationId xmlns:a16="http://schemas.microsoft.com/office/drawing/2014/main" id="{DDA34241-9956-4D80-A589-DA52D866F57E}"/>
+                <a16:creationId xmlns:a16="http://schemas.microsoft.com/office/drawing/2014/main" id="{EB78F7EE-EE6A-4FDD-BD60-4AA5CC3CCEE4}"/>
               </a:ext>
             </a:extLst>
           </p:cNvPr>
@@ -4328,7 +4385,7 @@
           <a:lstStyle xmlns:a="http://schemas.openxmlformats.org/drawingml/2006/main"/>
           <a:p xmlns:a="http://schemas.openxmlformats.org/drawingml/2006/main">
             <a:pPr algn="r">
-              <a:defRPr sz="1125" b="0">
+              <a:defRPr sz="1200" b="0">
                 <a:solidFill>
                   <a:srgbClr val="596B7A"/>
                 </a:solidFill>
@@ -4338,7 +4395,7 @@
               </a:defRPr>
             </a:pPr>
             <a:r>
-              <a:rPr sz="1125" b="0">
+              <a:rPr sz="1200" b="0">
                 <a:solidFill>
                   <a:srgbClr val="596B7A"/>
                 </a:solidFill>
@@ -4360,7 +4417,7 @@
           <p:nvPr/>
         </p:nvPicPr>
         <p:blipFill>
-          <a:blip xmlns:r="http://schemas.openxmlformats.org/officeDocument/2006/relationships" xmlns:a="http://schemas.openxmlformats.org/drawingml/2006/main" r:embed="R9a3e576663784945"/>
+          <a:blip xmlns:r="http://schemas.openxmlformats.org/officeDocument/2006/relationships" xmlns:a="http://schemas.openxmlformats.org/drawingml/2006/main" r:embed="Rabccc4ab4c914566"/>
           <a:stretch xmlns:a="http://schemas.openxmlformats.org/drawingml/2006/main"/>
         </p:blipFill>
         <p:spPr>
@@ -4378,7 +4435,7 @@
           <p:cNvPr id="9" name="(d)">
             <a:extLst xmlns:a="http://schemas.openxmlformats.org/drawingml/2006/main">
               <a:ext uri="{FF2B5EF4-FFF2-40B4-BE49-F238E27FC236}">
-                <a16:creationId xmlns:a16="http://schemas.microsoft.com/office/drawing/2014/main" id="{CDBF5F2F-5CED-46F2-8418-1B236104B588}"/>
+                <a16:creationId xmlns:a16="http://schemas.microsoft.com/office/drawing/2014/main" id="{37A2D73C-6453-4462-B774-BBA7561BD3B6}"/>
               </a:ext>
             </a:extLst>
           </p:cNvPr>
@@ -4439,7 +4496,7 @@
           <p:nvPr/>
         </p:nvPicPr>
         <p:blipFill>
-          <a:blip xmlns:r="http://schemas.openxmlformats.org/officeDocument/2006/relationships" xmlns:a="http://schemas.openxmlformats.org/drawingml/2006/main" r:embed="R273985224cb246a7"/>
+          <a:blip xmlns:r="http://schemas.openxmlformats.org/officeDocument/2006/relationships" xmlns:a="http://schemas.openxmlformats.org/drawingml/2006/main" r:embed="R21feb75d04d445b8"/>
           <a:stretch xmlns:a="http://schemas.openxmlformats.org/drawingml/2006/main"/>
         </p:blipFill>
         <p:spPr>
@@ -4457,7 +4514,7 @@
           <p:cNvPr id="11" name="(e)">
             <a:extLst xmlns:a="http://schemas.openxmlformats.org/drawingml/2006/main">
               <a:ext uri="{FF2B5EF4-FFF2-40B4-BE49-F238E27FC236}">
-                <a16:creationId xmlns:a16="http://schemas.microsoft.com/office/drawing/2014/main" id="{B0039857-686F-41BE-9A4C-DBF7CEC90DA7}"/>
+                <a16:creationId xmlns:a16="http://schemas.microsoft.com/office/drawing/2014/main" id="{9856D1F9-8ADC-4F25-8D79-9EBB076A510B}"/>
               </a:ext>
             </a:extLst>
           </p:cNvPr>
@@ -4518,7 +4575,7 @@
           <p:nvPr/>
         </p:nvPicPr>
         <p:blipFill>
-          <a:blip xmlns:r="http://schemas.openxmlformats.org/officeDocument/2006/relationships" xmlns:a="http://schemas.openxmlformats.org/drawingml/2006/main" r:embed="Re94270d300d84baf"/>
+          <a:blip xmlns:r="http://schemas.openxmlformats.org/officeDocument/2006/relationships" xmlns:a="http://schemas.openxmlformats.org/drawingml/2006/main" r:embed="R1cd72a1422ab46a6"/>
           <a:stretch xmlns:a="http://schemas.openxmlformats.org/drawingml/2006/main"/>
         </p:blipFill>
         <p:spPr>
@@ -4536,7 +4593,7 @@
           <p:cNvPr id="13" name="(f)">
             <a:extLst xmlns:a="http://schemas.openxmlformats.org/drawingml/2006/main">
               <a:ext uri="{FF2B5EF4-FFF2-40B4-BE49-F238E27FC236}">
-                <a16:creationId xmlns:a16="http://schemas.microsoft.com/office/drawing/2014/main" id="{4AE244DB-BB51-406F-980B-3DACD183B5B1}"/>
+                <a16:creationId xmlns:a16="http://schemas.microsoft.com/office/drawing/2014/main" id="{CF488BD7-3F48-4DA4-95E4-FD853347924F}"/>
               </a:ext>
             </a:extLst>
           </p:cNvPr>
@@ -4593,7 +4650,7 @@
           <p:cNvPr id="14" name="EN">
             <a:extLst xmlns:a="http://schemas.openxmlformats.org/drawingml/2006/main">
               <a:ext uri="{FF2B5EF4-FFF2-40B4-BE49-F238E27FC236}">
-                <a16:creationId xmlns:a16="http://schemas.microsoft.com/office/drawing/2014/main" id="{6C3732CC-2EE5-4F9B-B0B1-10AB6D8049DD}"/>
+                <a16:creationId xmlns:a16="http://schemas.microsoft.com/office/drawing/2014/main" id="{F80B7720-BC04-43E7-B30A-C0E049AE978F}"/>
               </a:ext>
             </a:extLst>
           </p:cNvPr>
@@ -4622,7 +4679,7 @@
           <a:lstStyle xmlns:a="http://schemas.openxmlformats.org/drawingml/2006/main"/>
           <a:p xmlns:a="http://schemas.openxmlformats.org/drawingml/2006/main">
             <a:pPr algn="l">
-              <a:defRPr sz="1125" b="1">
+              <a:defRPr sz="1200" b="1">
                 <a:solidFill>
                   <a:srgbClr val="174875"/>
                 </a:solidFill>
@@ -4632,7 +4689,7 @@
               </a:defRPr>
             </a:pPr>
             <a:r>
-              <a:rPr sz="1125" b="1">
+              <a:rPr sz="1200" b="1">
                 <a:solidFill>
                   <a:srgbClr val="174875"/>
                 </a:solidFill>
@@ -4650,7 +4707,7 @@
           <p:cNvPr id="15" name="“the consent dialog in Figure 1 (f) show">
             <a:extLst xmlns:a="http://schemas.openxmlformats.org/drawingml/2006/main">
               <a:ext uri="{FF2B5EF4-FFF2-40B4-BE49-F238E27FC236}">
-                <a16:creationId xmlns:a16="http://schemas.microsoft.com/office/drawing/2014/main" id="{65A54BB7-A022-4AFA-ADF4-8A9E0DEB5357}"/>
+                <a16:creationId xmlns:a16="http://schemas.microsoft.com/office/drawing/2014/main" id="{69B6036F-92C2-4F38-9497-19418609BCD2}"/>
               </a:ext>
             </a:extLst>
           </p:cNvPr>
@@ -4707,7 +4764,7 @@
           <p:cNvPr id="16" name="PT">
             <a:extLst xmlns:a="http://schemas.openxmlformats.org/drawingml/2006/main">
               <a:ext uri="{FF2B5EF4-FFF2-40B4-BE49-F238E27FC236}">
-                <a16:creationId xmlns:a16="http://schemas.microsoft.com/office/drawing/2014/main" id="{B0DA5D50-64CF-4B13-919C-5467E41465CF}"/>
+                <a16:creationId xmlns:a16="http://schemas.microsoft.com/office/drawing/2014/main" id="{5248491C-1B56-4D3A-98B3-A89A49CD8133}"/>
               </a:ext>
             </a:extLst>
           </p:cNvPr>
@@ -4736,7 +4793,7 @@
           <a:lstStyle xmlns:a="http://schemas.openxmlformats.org/drawingml/2006/main"/>
           <a:p xmlns:a="http://schemas.openxmlformats.org/drawingml/2006/main">
             <a:pPr algn="l">
-              <a:defRPr sz="1125" b="1">
+              <a:defRPr sz="1200" b="1">
                 <a:solidFill>
                   <a:srgbClr val="174875"/>
                 </a:solidFill>
@@ -4746,7 +4803,7 @@
               </a:defRPr>
             </a:pPr>
             <a:r>
-              <a:rPr sz="1125" b="1">
+              <a:rPr sz="1200" b="1">
                 <a:solidFill>
                   <a:srgbClr val="174875"/>
                 </a:solidFill>
@@ -4764,7 +4821,7 @@
           <p:cNvPr id="17" name="O diálogo da Figura 1(f) mostra mecanism">
             <a:extLst xmlns:a="http://schemas.openxmlformats.org/drawingml/2006/main">
               <a:ext uri="{FF2B5EF4-FFF2-40B4-BE49-F238E27FC236}">
-                <a16:creationId xmlns:a16="http://schemas.microsoft.com/office/drawing/2014/main" id="{277CAB41-0E45-442C-8F09-16F44BDBEC48}"/>
+                <a16:creationId xmlns:a16="http://schemas.microsoft.com/office/drawing/2014/main" id="{6EA63739-C709-4C6D-A7E1-93DFF4676848}"/>
               </a:ext>
             </a:extLst>
           </p:cNvPr>
@@ -4821,7 +4878,7 @@
           <p:cNvPr id="18" name="ANÁLISE DO SEMINÁRIO">
             <a:extLst xmlns:a="http://schemas.openxmlformats.org/drawingml/2006/main">
               <a:ext uri="{FF2B5EF4-FFF2-40B4-BE49-F238E27FC236}">
-                <a16:creationId xmlns:a16="http://schemas.microsoft.com/office/drawing/2014/main" id="{57BFA4BE-8DC3-4A8D-A3A1-B28ECC5243F4}"/>
+                <a16:creationId xmlns:a16="http://schemas.microsoft.com/office/drawing/2014/main" id="{A675C256-CF0D-4F8F-AC7A-BCC1BC8B7CF5}"/>
               </a:ext>
             </a:extLst>
           </p:cNvPr>
@@ -4878,7 +4935,7 @@
           <p:cNvPr id="19" name="As opções visíveis precisam ser&#10;confront">
             <a:extLst xmlns:a="http://schemas.openxmlformats.org/drawingml/2006/main">
               <a:ext uri="{FF2B5EF4-FFF2-40B4-BE49-F238E27FC236}">
-                <a16:creationId xmlns:a16="http://schemas.microsoft.com/office/drawing/2014/main" id="{73BA6685-FA18-4414-9916-41488639B179}"/>
+                <a16:creationId xmlns:a16="http://schemas.microsoft.com/office/drawing/2014/main" id="{9043EF93-2301-49D5-A362-FCF197D720D8}"/>
               </a:ext>
             </a:extLst>
           </p:cNvPr>
@@ -4979,7 +5036,7 @@
     </p:spTree>
     <p:extLst>
       <p:ext uri="{BB962C8B-B14F-4D97-AF65-F5344CB8AC3E}">
-        <p14:creationId xmlns:p14="http://schemas.microsoft.com/office/powerpoint/2010/main" val="995372835"/>
+        <p14:creationId xmlns:p14="http://schemas.microsoft.com/office/powerpoint/2010/main" val="569919866"/>
       </p:ext>
     </p:extLst>
   </p:cSld>
@@ -5010,7 +5067,7 @@
           <p:cNvPr id="13" name="">
             <a:extLst xmlns:a="http://schemas.openxmlformats.org/drawingml/2006/main">
               <a:ext uri="{FF2B5EF4-FFF2-40B4-BE49-F238E27FC236}">
-                <a16:creationId xmlns:a16="http://schemas.microsoft.com/office/drawing/2014/main" id="{8853C013-FB24-4E0E-8D18-A6E3860F3743}"/>
+                <a16:creationId xmlns:a16="http://schemas.microsoft.com/office/drawing/2014/main" id="{04082747-7CBA-4934-B3BB-A58C57F31474}"/>
               </a:ext>
             </a:extLst>
           </p:cNvPr>
@@ -5040,7 +5097,7 @@
           <p:cNvPr id="2" name="ANÁLISE DA FUNDAMENTAÇÃO">
             <a:extLst xmlns:a="http://schemas.openxmlformats.org/drawingml/2006/main">
               <a:ext uri="{FF2B5EF4-FFF2-40B4-BE49-F238E27FC236}">
-                <a16:creationId xmlns:a16="http://schemas.microsoft.com/office/drawing/2014/main" id="{55D232AA-9156-4C3C-9C4C-D8A0A1ED587C}"/>
+                <a16:creationId xmlns:a16="http://schemas.microsoft.com/office/drawing/2014/main" id="{4B4CD703-8EC6-450C-BED6-D713F8171DFE}"/>
               </a:ext>
             </a:extLst>
           </p:cNvPr>
@@ -5097,7 +5154,7 @@
           <p:cNvPr id="3" name="Marco jurídico: critérios usados no estu">
             <a:extLst xmlns:a="http://schemas.openxmlformats.org/drawingml/2006/main">
               <a:ext uri="{FF2B5EF4-FFF2-40B4-BE49-F238E27FC236}">
-                <a16:creationId xmlns:a16="http://schemas.microsoft.com/office/drawing/2014/main" id="{5E85D3E1-03B9-461F-9B4F-6ED01413BF3A}"/>
+                <a16:creationId xmlns:a16="http://schemas.microsoft.com/office/drawing/2014/main" id="{9F0116E4-A5DB-4F65-973A-8E1EB0D6667D}"/>
               </a:ext>
             </a:extLst>
           </p:cNvPr>
@@ -5154,7 +5211,7 @@
           <p:cNvPr id="4" name="">
             <a:extLst xmlns:a="http://schemas.openxmlformats.org/drawingml/2006/main">
               <a:ext uri="{FF2B5EF4-FFF2-40B4-BE49-F238E27FC236}">
-                <a16:creationId xmlns:a16="http://schemas.microsoft.com/office/drawing/2014/main" id="{555A20D0-9A1D-4BAC-9B16-DF8B05FE5896}"/>
+                <a16:creationId xmlns:a16="http://schemas.microsoft.com/office/drawing/2014/main" id="{30348539-28A7-4E22-8968-ADCDC1FC349B}"/>
               </a:ext>
             </a:extLst>
           </p:cNvPr>
@@ -5184,7 +5241,7 @@
           <p:cNvPr id="5" name="">
             <a:extLst xmlns:a="http://schemas.openxmlformats.org/drawingml/2006/main">
               <a:ext uri="{FF2B5EF4-FFF2-40B4-BE49-F238E27FC236}">
-                <a16:creationId xmlns:a16="http://schemas.microsoft.com/office/drawing/2014/main" id="{A09D279D-D5BD-4936-9458-34AA4DBD53D7}"/>
+                <a16:creationId xmlns:a16="http://schemas.microsoft.com/office/drawing/2014/main" id="{13C241D2-A069-4E38-B2A1-6C2EE7381320}"/>
               </a:ext>
             </a:extLst>
           </p:cNvPr>
@@ -5214,7 +5271,7 @@
           <p:cNvPr id="6" name="Nguyen, Backes e Stock (2022), Seção 2, ">
             <a:extLst xmlns:a="http://schemas.openxmlformats.org/drawingml/2006/main">
               <a:ext uri="{FF2B5EF4-FFF2-40B4-BE49-F238E27FC236}">
-                <a16:creationId xmlns:a16="http://schemas.microsoft.com/office/drawing/2014/main" id="{AC134FB3-5568-464B-9BDE-E9D36F409260}"/>
+                <a16:creationId xmlns:a16="http://schemas.microsoft.com/office/drawing/2014/main" id="{566EF3A9-AEA3-4B5C-8637-1E450324A398}"/>
               </a:ext>
             </a:extLst>
           </p:cNvPr>
@@ -5226,7 +5283,7 @@
         <p:spPr>
           <a:xfrm xmlns:a="http://schemas.openxmlformats.org/drawingml/2006/main">
             <a:off x="609600" y="6477000"/>
-            <a:ext cx="10096500" cy="228600"/>
+            <a:ext cx="9982200" cy="228600"/>
           </a:xfrm>
           <a:prstGeom xmlns:a="http://schemas.openxmlformats.org/drawingml/2006/main" prst="rect">
             <a:avLst/>
@@ -5243,7 +5300,7 @@
           <a:lstStyle xmlns:a="http://schemas.openxmlformats.org/drawingml/2006/main"/>
           <a:p xmlns:a="http://schemas.openxmlformats.org/drawingml/2006/main">
             <a:pPr algn="l">
-              <a:defRPr sz="1125" b="0">
+              <a:defRPr sz="1200" b="0">
                 <a:solidFill>
                   <a:srgbClr val="596B7A"/>
                 </a:solidFill>
@@ -5253,7 +5310,7 @@
               </a:defRPr>
             </a:pPr>
             <a:r>
-              <a:rPr sz="1125" b="0">
+              <a:rPr sz="1200" b="0">
                 <a:solidFill>
                   <a:srgbClr val="596B7A"/>
                 </a:solidFill>
@@ -5271,7 +5328,7 @@
           <p:cNvPr id="7" name="11 / 23">
             <a:extLst xmlns:a="http://schemas.openxmlformats.org/drawingml/2006/main">
               <a:ext uri="{FF2B5EF4-FFF2-40B4-BE49-F238E27FC236}">
-                <a16:creationId xmlns:a16="http://schemas.microsoft.com/office/drawing/2014/main" id="{BE6C37AE-5961-489A-9CF7-EA5BE77859AC}"/>
+                <a16:creationId xmlns:a16="http://schemas.microsoft.com/office/drawing/2014/main" id="{EE9EA350-4229-4683-8648-8FF509194862}"/>
               </a:ext>
             </a:extLst>
           </p:cNvPr>
@@ -5300,7 +5357,7 @@
           <a:lstStyle xmlns:a="http://schemas.openxmlformats.org/drawingml/2006/main"/>
           <a:p xmlns:a="http://schemas.openxmlformats.org/drawingml/2006/main">
             <a:pPr algn="r">
-              <a:defRPr sz="1125" b="0">
+              <a:defRPr sz="1200" b="0">
                 <a:solidFill>
                   <a:srgbClr val="596B7A"/>
                 </a:solidFill>
@@ -5310,7 +5367,7 @@
               </a:defRPr>
             </a:pPr>
             <a:r>
-              <a:rPr sz="1125" b="0">
+              <a:rPr sz="1200" b="0">
                 <a:solidFill>
                   <a:srgbClr val="596B7A"/>
                 </a:solidFill>
@@ -5870,7 +5927,7 @@
           <p:cNvPr id="9" name="EN">
             <a:extLst xmlns:a="http://schemas.openxmlformats.org/drawingml/2006/main">
               <a:ext uri="{FF2B5EF4-FFF2-40B4-BE49-F238E27FC236}">
-                <a16:creationId xmlns:a16="http://schemas.microsoft.com/office/drawing/2014/main" id="{648AC75C-8684-4F7D-80C9-21E65DA63216}"/>
+                <a16:creationId xmlns:a16="http://schemas.microsoft.com/office/drawing/2014/main" id="{DE5B3F42-247A-4847-9DA6-68053D98CE5D}"/>
               </a:ext>
             </a:extLst>
           </p:cNvPr>
@@ -5899,7 +5956,7 @@
           <a:lstStyle xmlns:a="http://schemas.openxmlformats.org/drawingml/2006/main"/>
           <a:p xmlns:a="http://schemas.openxmlformats.org/drawingml/2006/main">
             <a:pPr algn="l">
-              <a:defRPr sz="1125" b="1">
+              <a:defRPr sz="1200" b="1">
                 <a:solidFill>
                   <a:srgbClr val="95652D"/>
                 </a:solidFill>
@@ -5909,7 +5966,7 @@
               </a:defRPr>
             </a:pPr>
             <a:r>
-              <a:rPr sz="1125" b="1">
+              <a:rPr sz="1200" b="1">
                 <a:solidFill>
                   <a:srgbClr val="95652D"/>
                 </a:solidFill>
@@ -5927,7 +5984,7 @@
           <p:cNvPr id="10" name="“only a judicial ruling can provide lega">
             <a:extLst xmlns:a="http://schemas.openxmlformats.org/drawingml/2006/main">
               <a:ext uri="{FF2B5EF4-FFF2-40B4-BE49-F238E27FC236}">
-                <a16:creationId xmlns:a16="http://schemas.microsoft.com/office/drawing/2014/main" id="{7B29A68D-6B90-479B-B74B-2B1E2697D608}"/>
+                <a16:creationId xmlns:a16="http://schemas.microsoft.com/office/drawing/2014/main" id="{65711CDD-FF3E-4553-A1CB-EAE0C4E99535}"/>
               </a:ext>
             </a:extLst>
           </p:cNvPr>
@@ -5984,7 +6041,7 @@
           <p:cNvPr id="11" name="PT">
             <a:extLst xmlns:a="http://schemas.openxmlformats.org/drawingml/2006/main">
               <a:ext uri="{FF2B5EF4-FFF2-40B4-BE49-F238E27FC236}">
-                <a16:creationId xmlns:a16="http://schemas.microsoft.com/office/drawing/2014/main" id="{318B37E1-DD36-4368-8DFE-8C88F4368B9A}"/>
+                <a16:creationId xmlns:a16="http://schemas.microsoft.com/office/drawing/2014/main" id="{8AE9CC72-3A9F-4094-A5EF-651FC07C00EC}"/>
               </a:ext>
             </a:extLst>
           </p:cNvPr>
@@ -6013,7 +6070,7 @@
           <a:lstStyle xmlns:a="http://schemas.openxmlformats.org/drawingml/2006/main"/>
           <a:p xmlns:a="http://schemas.openxmlformats.org/drawingml/2006/main">
             <a:pPr algn="l">
-              <a:defRPr sz="1125" b="1">
+              <a:defRPr sz="1200" b="1">
                 <a:solidFill>
                   <a:srgbClr val="95652D"/>
                 </a:solidFill>
@@ -6023,7 +6080,7 @@
               </a:defRPr>
             </a:pPr>
             <a:r>
-              <a:rPr sz="1125" b="1">
+              <a:rPr sz="1200" b="1">
                 <a:solidFill>
                   <a:srgbClr val="95652D"/>
                 </a:solidFill>
@@ -6041,7 +6098,7 @@
           <p:cNvPr id="12" name="Somente uma decisão judicial pode propor">
             <a:extLst xmlns:a="http://schemas.openxmlformats.org/drawingml/2006/main">
               <a:ext uri="{FF2B5EF4-FFF2-40B4-BE49-F238E27FC236}">
-                <a16:creationId xmlns:a16="http://schemas.microsoft.com/office/drawing/2014/main" id="{110985A7-DF5C-4BA7-829E-B86BBEF4EF6E}"/>
+                <a16:creationId xmlns:a16="http://schemas.microsoft.com/office/drawing/2014/main" id="{D42B8899-87DF-4535-B616-6B83026023B9}"/>
               </a:ext>
             </a:extLst>
           </p:cNvPr>
@@ -6096,7 +6153,7 @@
     </p:spTree>
     <p:extLst>
       <p:ext uri="{BB962C8B-B14F-4D97-AF65-F5344CB8AC3E}">
-        <p14:creationId xmlns:p14="http://schemas.microsoft.com/office/powerpoint/2010/main" val="1969207021"/>
+        <p14:creationId xmlns:p14="http://schemas.microsoft.com/office/powerpoint/2010/main" val="1262260964"/>
       </p:ext>
     </p:extLst>
   </p:cSld>
@@ -6127,7 +6184,7 @@
           <p:cNvPr id="31" name="">
             <a:extLst xmlns:a="http://schemas.openxmlformats.org/drawingml/2006/main">
               <a:ext uri="{FF2B5EF4-FFF2-40B4-BE49-F238E27FC236}">
-                <a16:creationId xmlns:a16="http://schemas.microsoft.com/office/drawing/2014/main" id="{3206DFB3-091B-4124-A55A-4253D5525C67}"/>
+                <a16:creationId xmlns:a16="http://schemas.microsoft.com/office/drawing/2014/main" id="{A1958DEA-E683-4372-ABD3-E2DCDEFE243D}"/>
               </a:ext>
             </a:extLst>
           </p:cNvPr>
@@ -6157,7 +6214,7 @@
           <p:cNvPr id="2" name="METODOLOGIA">
             <a:extLst xmlns:a="http://schemas.openxmlformats.org/drawingml/2006/main">
               <a:ext uri="{FF2B5EF4-FFF2-40B4-BE49-F238E27FC236}">
-                <a16:creationId xmlns:a16="http://schemas.microsoft.com/office/drawing/2014/main" id="{FF46BB03-ED85-4E78-8139-32FFE4884797}"/>
+                <a16:creationId xmlns:a16="http://schemas.microsoft.com/office/drawing/2014/main" id="{CCBE2055-3A53-42B8-A28C-45C364B9B0AF}"/>
               </a:ext>
             </a:extLst>
           </p:cNvPr>
@@ -6214,7 +6271,7 @@
           <p:cNvPr id="3" name="Método I: identificação dos avisos">
             <a:extLst xmlns:a="http://schemas.openxmlformats.org/drawingml/2006/main">
               <a:ext uri="{FF2B5EF4-FFF2-40B4-BE49-F238E27FC236}">
-                <a16:creationId xmlns:a16="http://schemas.microsoft.com/office/drawing/2014/main" id="{2E80AC6A-D3B8-4852-8021-0488EDD7CCDC}"/>
+                <a16:creationId xmlns:a16="http://schemas.microsoft.com/office/drawing/2014/main" id="{2279FCF7-A712-4B86-8A81-B0086C20BD45}"/>
               </a:ext>
             </a:extLst>
           </p:cNvPr>
@@ -6271,7 +6328,7 @@
           <p:cNvPr id="4" name="">
             <a:extLst xmlns:a="http://schemas.openxmlformats.org/drawingml/2006/main">
               <a:ext uri="{FF2B5EF4-FFF2-40B4-BE49-F238E27FC236}">
-                <a16:creationId xmlns:a16="http://schemas.microsoft.com/office/drawing/2014/main" id="{4B36EC43-82B2-48BB-8FB0-8B50C268B279}"/>
+                <a16:creationId xmlns:a16="http://schemas.microsoft.com/office/drawing/2014/main" id="{4258C0D3-914B-49F5-ADE3-AA8C408050F6}"/>
               </a:ext>
             </a:extLst>
           </p:cNvPr>
@@ -6301,7 +6358,7 @@
           <p:cNvPr id="5" name="">
             <a:extLst xmlns:a="http://schemas.openxmlformats.org/drawingml/2006/main">
               <a:ext uri="{FF2B5EF4-FFF2-40B4-BE49-F238E27FC236}">
-                <a16:creationId xmlns:a16="http://schemas.microsoft.com/office/drawing/2014/main" id="{0993F2C5-0BD0-475E-84A4-AF7AAB245FD7}"/>
+                <a16:creationId xmlns:a16="http://schemas.microsoft.com/office/drawing/2014/main" id="{C248C8AE-0ACE-4F71-A194-2A58C597A400}"/>
               </a:ext>
             </a:extLst>
           </p:cNvPr>
@@ -6331,7 +6388,7 @@
           <p:cNvPr id="6" name="Nguyen, Backes e Stock (2022), Seções 3,">
             <a:extLst xmlns:a="http://schemas.openxmlformats.org/drawingml/2006/main">
               <a:ext uri="{FF2B5EF4-FFF2-40B4-BE49-F238E27FC236}">
-                <a16:creationId xmlns:a16="http://schemas.microsoft.com/office/drawing/2014/main" id="{AF08B185-ABDC-44F1-9653-538C4A80FDEA}"/>
+                <a16:creationId xmlns:a16="http://schemas.microsoft.com/office/drawing/2014/main" id="{B27AC270-B3F2-45AD-B83E-15E31EB35531}"/>
               </a:ext>
             </a:extLst>
           </p:cNvPr>
@@ -6343,7 +6400,7 @@
         <p:spPr>
           <a:xfrm xmlns:a="http://schemas.openxmlformats.org/drawingml/2006/main">
             <a:off x="609600" y="6477000"/>
-            <a:ext cx="10096500" cy="228600"/>
+            <a:ext cx="9982200" cy="228600"/>
           </a:xfrm>
           <a:prstGeom xmlns:a="http://schemas.openxmlformats.org/drawingml/2006/main" prst="rect">
             <a:avLst/>
@@ -6360,7 +6417,7 @@
           <a:lstStyle xmlns:a="http://schemas.openxmlformats.org/drawingml/2006/main"/>
           <a:p xmlns:a="http://schemas.openxmlformats.org/drawingml/2006/main">
             <a:pPr algn="l">
-              <a:defRPr sz="1125" b="0">
+              <a:defRPr sz="1200" b="0">
                 <a:solidFill>
                   <a:srgbClr val="596B7A"/>
                 </a:solidFill>
@@ -6370,7 +6427,7 @@
               </a:defRPr>
             </a:pPr>
             <a:r>
-              <a:rPr sz="1125" b="0">
+              <a:rPr sz="1200" b="0">
                 <a:solidFill>
                   <a:srgbClr val="596B7A"/>
                 </a:solidFill>
@@ -6388,7 +6445,7 @@
           <p:cNvPr id="7" name="12 / 23">
             <a:extLst xmlns:a="http://schemas.openxmlformats.org/drawingml/2006/main">
               <a:ext uri="{FF2B5EF4-FFF2-40B4-BE49-F238E27FC236}">
-                <a16:creationId xmlns:a16="http://schemas.microsoft.com/office/drawing/2014/main" id="{73612218-BAD9-41B6-99C9-6F4A858071C3}"/>
+                <a16:creationId xmlns:a16="http://schemas.microsoft.com/office/drawing/2014/main" id="{344ED782-AC42-4058-973F-DE63806DBF6D}"/>
               </a:ext>
             </a:extLst>
           </p:cNvPr>
@@ -6417,7 +6474,7 @@
           <a:lstStyle xmlns:a="http://schemas.openxmlformats.org/drawingml/2006/main"/>
           <a:p xmlns:a="http://schemas.openxmlformats.org/drawingml/2006/main">
             <a:pPr algn="r">
-              <a:defRPr sz="1125" b="0">
+              <a:defRPr sz="1200" b="0">
                 <a:solidFill>
                   <a:srgbClr val="596B7A"/>
                 </a:solidFill>
@@ -6427,7 +6484,7 @@
               </a:defRPr>
             </a:pPr>
             <a:r>
-              <a:rPr sz="1125" b="0">
+              <a:rPr sz="1200" b="0">
                 <a:solidFill>
                   <a:srgbClr val="596B7A"/>
                 </a:solidFill>
@@ -6449,13 +6506,13 @@
           <p:nvPr/>
         </p:nvPicPr>
         <p:blipFill>
-          <a:blip xmlns:r="http://schemas.openxmlformats.org/officeDocument/2006/relationships" xmlns:a="http://schemas.openxmlformats.org/drawingml/2006/main" r:embed="R9e72a99c69024f18"/>
+          <a:blip xmlns:r="http://schemas.openxmlformats.org/officeDocument/2006/relationships" xmlns:a="http://schemas.openxmlformats.org/drawingml/2006/main" r:embed="R42bbba3d76c340a0"/>
           <a:stretch xmlns:a="http://schemas.openxmlformats.org/drawingml/2006/main"/>
         </p:blipFill>
         <p:spPr>
           <a:xfrm xmlns:a="http://schemas.openxmlformats.org/drawingml/2006/main">
-            <a:off x="609600" y="1728285"/>
-            <a:ext cx="10972800" cy="1363081"/>
+            <a:off x="609600" y="1785080"/>
+            <a:ext cx="10972800" cy="1249491"/>
           </a:xfrm>
           <a:prstGeom xmlns:a="http://schemas.openxmlformats.org/drawingml/2006/main" prst="rect">
             <a:avLst/>
@@ -6467,7 +6524,7 @@
           <p:cNvPr id="9" name="Figura 2 do artigo: corpus e resultados ">
             <a:extLst xmlns:a="http://schemas.openxmlformats.org/drawingml/2006/main">
               <a:ext uri="{FF2B5EF4-FFF2-40B4-BE49-F238E27FC236}">
-                <a16:creationId xmlns:a16="http://schemas.microsoft.com/office/drawing/2014/main" id="{36D3E739-41B2-404E-A018-D4276F3EA20A}"/>
+                <a16:creationId xmlns:a16="http://schemas.microsoft.com/office/drawing/2014/main" id="{7ED4BAE8-5102-40E0-A179-8B4F017D9E8A}"/>
               </a:ext>
             </a:extLst>
           </p:cNvPr>
@@ -6524,7 +6581,7 @@
           <p:cNvPr id="10" name="CRITÉRIOS DO CORPUS">
             <a:extLst xmlns:a="http://schemas.openxmlformats.org/drawingml/2006/main">
               <a:ext uri="{FF2B5EF4-FFF2-40B4-BE49-F238E27FC236}">
-                <a16:creationId xmlns:a16="http://schemas.microsoft.com/office/drawing/2014/main" id="{48A6DFA9-464D-4335-A97C-17AD4C3E5E11}"/>
+                <a16:creationId xmlns:a16="http://schemas.microsoft.com/office/drawing/2014/main" id="{523B5D89-46CD-459C-AE31-539D4A7E1D17}"/>
               </a:ext>
             </a:extLst>
           </p:cNvPr>
@@ -6581,7 +6638,7 @@
           <p:cNvPr id="11" name="Apps gratuitos, ao menos 10.000 download">
             <a:extLst xmlns:a="http://schemas.openxmlformats.org/drawingml/2006/main">
               <a:ext uri="{FF2B5EF4-FFF2-40B4-BE49-F238E27FC236}">
-                <a16:creationId xmlns:a16="http://schemas.microsoft.com/office/drawing/2014/main" id="{74AD8B14-F3F3-46A0-BFF0-762AFF16E1F1}"/>
+                <a16:creationId xmlns:a16="http://schemas.microsoft.com/office/drawing/2014/main" id="{BDFBD43B-5D19-415C-BF35-477EE9D1D2C5}"/>
               </a:ext>
             </a:extLst>
           </p:cNvPr>
@@ -6684,7 +6741,7 @@
           <p:cNvPr id="12" name="">
             <a:extLst xmlns:a="http://schemas.openxmlformats.org/drawingml/2006/main">
               <a:ext uri="{FF2B5EF4-FFF2-40B4-BE49-F238E27FC236}">
-                <a16:creationId xmlns:a16="http://schemas.microsoft.com/office/drawing/2014/main" id="{552369F0-452B-49AC-9F80-B3AE5317E0BC}"/>
+                <a16:creationId xmlns:a16="http://schemas.microsoft.com/office/drawing/2014/main" id="{A7B636BF-3A4E-4F85-8F6B-417C24F707D7}"/>
               </a:ext>
             </a:extLst>
           </p:cNvPr>
@@ -6714,7 +6771,7 @@
           <p:cNvPr id="13" name="Screenshots">
             <a:extLst xmlns:a="http://schemas.openxmlformats.org/drawingml/2006/main">
               <a:ext uri="{FF2B5EF4-FFF2-40B4-BE49-F238E27FC236}">
-                <a16:creationId xmlns:a16="http://schemas.microsoft.com/office/drawing/2014/main" id="{7C4C2EDE-3EB1-4EF0-BEEF-4448DAC00FB8}"/>
+                <a16:creationId xmlns:a16="http://schemas.microsoft.com/office/drawing/2014/main" id="{3C9112FE-F333-4082-9B0D-BED1D76444AD}"/>
               </a:ext>
             </a:extLst>
           </p:cNvPr>
@@ -6771,7 +6828,7 @@
           <p:cNvPr id="14" name="captura após 5 s">
             <a:extLst xmlns:a="http://schemas.openxmlformats.org/drawingml/2006/main">
               <a:ext uri="{FF2B5EF4-FFF2-40B4-BE49-F238E27FC236}">
-                <a16:creationId xmlns:a16="http://schemas.microsoft.com/office/drawing/2014/main" id="{6760C846-8054-45E1-9D75-D4C965E608FD}"/>
+                <a16:creationId xmlns:a16="http://schemas.microsoft.com/office/drawing/2014/main" id="{4BD344F3-18C8-4CB7-9DD7-0F6F19AC5C6B}"/>
               </a:ext>
             </a:extLst>
           </p:cNvPr>
@@ -6828,7 +6885,7 @@
           <p:cNvPr id="15" name="">
             <a:extLst xmlns:a="http://schemas.openxmlformats.org/drawingml/2006/main">
               <a:ext uri="{FF2B5EF4-FFF2-40B4-BE49-F238E27FC236}">
-                <a16:creationId xmlns:a16="http://schemas.microsoft.com/office/drawing/2014/main" id="{64E404A8-46B2-4702-83AE-94541BAB9CCD}"/>
+                <a16:creationId xmlns:a16="http://schemas.microsoft.com/office/drawing/2014/main" id="{5D2C97AE-50CA-4F0A-BAA3-02EC1621949A}"/>
               </a:ext>
             </a:extLst>
           </p:cNvPr>
@@ -6858,7 +6915,7 @@
           <p:cNvPr id="16" name="">
             <a:extLst xmlns:a="http://schemas.openxmlformats.org/drawingml/2006/main">
               <a:ext uri="{FF2B5EF4-FFF2-40B4-BE49-F238E27FC236}">
-                <a16:creationId xmlns:a16="http://schemas.microsoft.com/office/drawing/2014/main" id="{88655DCD-9E31-4ADC-8B90-3503961E1D3F}"/>
+                <a16:creationId xmlns:a16="http://schemas.microsoft.com/office/drawing/2014/main" id="{7D36EA67-37CC-4D9A-A237-0B8192E0DBE8}"/>
               </a:ext>
             </a:extLst>
           </p:cNvPr>
@@ -6888,7 +6945,7 @@
           <p:cNvPr id="17" name="OCR">
             <a:extLst xmlns:a="http://schemas.openxmlformats.org/drawingml/2006/main">
               <a:ext uri="{FF2B5EF4-FFF2-40B4-BE49-F238E27FC236}">
-                <a16:creationId xmlns:a16="http://schemas.microsoft.com/office/drawing/2014/main" id="{B10DB646-7F9C-4EC9-8D95-A5A84BFA99FD}"/>
+                <a16:creationId xmlns:a16="http://schemas.microsoft.com/office/drawing/2014/main" id="{09E8669C-3B31-4682-B2F3-381173AF07C5}"/>
               </a:ext>
             </a:extLst>
           </p:cNvPr>
@@ -6945,7 +7002,7 @@
           <p:cNvPr id="18" name="texto e palavras-chave">
             <a:extLst xmlns:a="http://schemas.openxmlformats.org/drawingml/2006/main">
               <a:ext uri="{FF2B5EF4-FFF2-40B4-BE49-F238E27FC236}">
-                <a16:creationId xmlns:a16="http://schemas.microsoft.com/office/drawing/2014/main" id="{3C7AF8CE-9422-491A-9F3A-D59400B5B266}"/>
+                <a16:creationId xmlns:a16="http://schemas.microsoft.com/office/drawing/2014/main" id="{2600DE20-FADB-4273-9EC3-D75D2B3E9604}"/>
               </a:ext>
             </a:extLst>
           </p:cNvPr>
@@ -7002,7 +7059,7 @@
           <p:cNvPr id="19" name="">
             <a:extLst xmlns:a="http://schemas.openxmlformats.org/drawingml/2006/main">
               <a:ext uri="{FF2B5EF4-FFF2-40B4-BE49-F238E27FC236}">
-                <a16:creationId xmlns:a16="http://schemas.microsoft.com/office/drawing/2014/main" id="{237BA1A1-0BBC-4F47-9224-4BA88434EB57}"/>
+                <a16:creationId xmlns:a16="http://schemas.microsoft.com/office/drawing/2014/main" id="{B4AC5611-3D39-4061-8CE2-64CD49281635}"/>
               </a:ext>
             </a:extLst>
           </p:cNvPr>
@@ -7032,7 +7089,7 @@
           <p:cNvPr id="20" name="">
             <a:extLst xmlns:a="http://schemas.openxmlformats.org/drawingml/2006/main">
               <a:ext uri="{FF2B5EF4-FFF2-40B4-BE49-F238E27FC236}">
-                <a16:creationId xmlns:a16="http://schemas.microsoft.com/office/drawing/2014/main" id="{74B3880D-2115-44DE-8CEF-ABC4B044E2DC}"/>
+                <a16:creationId xmlns:a16="http://schemas.microsoft.com/office/drawing/2014/main" id="{A470850F-0568-4D29-A07D-0EBD99F4B0CF}"/>
               </a:ext>
             </a:extLst>
           </p:cNvPr>
@@ -7062,7 +7119,7 @@
           <p:cNvPr id="21" name="NLP">
             <a:extLst xmlns:a="http://schemas.openxmlformats.org/drawingml/2006/main">
               <a:ext uri="{FF2B5EF4-FFF2-40B4-BE49-F238E27FC236}">
-                <a16:creationId xmlns:a16="http://schemas.microsoft.com/office/drawing/2014/main" id="{523FD699-12CE-466A-8496-8F932934B1D5}"/>
+                <a16:creationId xmlns:a16="http://schemas.microsoft.com/office/drawing/2014/main" id="{D5F92F9A-1539-41A5-8795-F817619DF854}"/>
               </a:ext>
             </a:extLst>
           </p:cNvPr>
@@ -7119,7 +7176,7 @@
           <p:cNvPr id="22" name="normalização e TF-IDF">
             <a:extLst xmlns:a="http://schemas.openxmlformats.org/drawingml/2006/main">
               <a:ext uri="{FF2B5EF4-FFF2-40B4-BE49-F238E27FC236}">
-                <a16:creationId xmlns:a16="http://schemas.microsoft.com/office/drawing/2014/main" id="{13267C4B-3FA4-481A-B683-8B75963133BC}"/>
+                <a16:creationId xmlns:a16="http://schemas.microsoft.com/office/drawing/2014/main" id="{43B4F3CB-5192-4993-973C-9394E3A0ADC8}"/>
               </a:ext>
             </a:extLst>
           </p:cNvPr>
@@ -7176,7 +7233,7 @@
           <p:cNvPr id="23" name="">
             <a:extLst xmlns:a="http://schemas.openxmlformats.org/drawingml/2006/main">
               <a:ext uri="{FF2B5EF4-FFF2-40B4-BE49-F238E27FC236}">
-                <a16:creationId xmlns:a16="http://schemas.microsoft.com/office/drawing/2014/main" id="{B6F7742C-D7F8-45F8-9663-F75127AF806D}"/>
+                <a16:creationId xmlns:a16="http://schemas.microsoft.com/office/drawing/2014/main" id="{B5A31352-642E-4591-B56C-C6C1F120BC29}"/>
               </a:ext>
             </a:extLst>
           </p:cNvPr>
@@ -7206,7 +7263,7 @@
           <p:cNvPr id="24" name="">
             <a:extLst xmlns:a="http://schemas.openxmlformats.org/drawingml/2006/main">
               <a:ext uri="{FF2B5EF4-FFF2-40B4-BE49-F238E27FC236}">
-                <a16:creationId xmlns:a16="http://schemas.microsoft.com/office/drawing/2014/main" id="{A3510ABC-1B6E-4CBB-9BE5-A6C195BBCFAF}"/>
+                <a16:creationId xmlns:a16="http://schemas.microsoft.com/office/drawing/2014/main" id="{A2117DB6-8535-42DA-8BEF-376A77C9F4CD}"/>
               </a:ext>
             </a:extLst>
           </p:cNvPr>
@@ -7236,7 +7293,7 @@
           <p:cNvPr id="25" name="Clustering">
             <a:extLst xmlns:a="http://schemas.openxmlformats.org/drawingml/2006/main">
               <a:ext uri="{FF2B5EF4-FFF2-40B4-BE49-F238E27FC236}">
-                <a16:creationId xmlns:a16="http://schemas.microsoft.com/office/drawing/2014/main" id="{DD9B7FCF-00F3-46B7-B66D-4FA7549FA05C}"/>
+                <a16:creationId xmlns:a16="http://schemas.microsoft.com/office/drawing/2014/main" id="{6397D630-05FA-4AB7-935B-0D0B29835C11}"/>
               </a:ext>
             </a:extLst>
           </p:cNvPr>
@@ -7293,7 +7350,7 @@
           <p:cNvPr id="26" name="44 grupos semelhantes">
             <a:extLst xmlns:a="http://schemas.openxmlformats.org/drawingml/2006/main">
               <a:ext uri="{FF2B5EF4-FFF2-40B4-BE49-F238E27FC236}">
-                <a16:creationId xmlns:a16="http://schemas.microsoft.com/office/drawing/2014/main" id="{B814FE1A-142C-4B55-BF7C-222F13C5D547}"/>
+                <a16:creationId xmlns:a16="http://schemas.microsoft.com/office/drawing/2014/main" id="{7F9EE295-0885-4032-9535-512819265C9D}"/>
               </a:ext>
             </a:extLst>
           </p:cNvPr>
@@ -7350,7 +7407,7 @@
           <p:cNvPr id="27" name="">
             <a:extLst xmlns:a="http://schemas.openxmlformats.org/drawingml/2006/main">
               <a:ext uri="{FF2B5EF4-FFF2-40B4-BE49-F238E27FC236}">
-                <a16:creationId xmlns:a16="http://schemas.microsoft.com/office/drawing/2014/main" id="{1FFCCC52-F2EC-4E59-9097-C437F5F29527}"/>
+                <a16:creationId xmlns:a16="http://schemas.microsoft.com/office/drawing/2014/main" id="{E03451AA-D79B-4866-AED2-3E653CB94711}"/>
               </a:ext>
             </a:extLst>
           </p:cNvPr>
@@ -7380,7 +7437,7 @@
           <p:cNvPr id="28" name="">
             <a:extLst xmlns:a="http://schemas.openxmlformats.org/drawingml/2006/main">
               <a:ext uri="{FF2B5EF4-FFF2-40B4-BE49-F238E27FC236}">
-                <a16:creationId xmlns:a16="http://schemas.microsoft.com/office/drawing/2014/main" id="{7E59812C-FC02-458B-B420-D898EB418F0E}"/>
+                <a16:creationId xmlns:a16="http://schemas.microsoft.com/office/drawing/2014/main" id="{31C215EC-9509-4CD1-A20E-DC70D32D380F}"/>
               </a:ext>
             </a:extLst>
           </p:cNvPr>
@@ -7410,7 +7467,7 @@
           <p:cNvPr id="29" name="Inspeção">
             <a:extLst xmlns:a="http://schemas.openxmlformats.org/drawingml/2006/main">
               <a:ext uri="{FF2B5EF4-FFF2-40B4-BE49-F238E27FC236}">
-                <a16:creationId xmlns:a16="http://schemas.microsoft.com/office/drawing/2014/main" id="{60BBDE7A-FFA2-4DD5-9DE9-D89DF11DE3D1}"/>
+                <a16:creationId xmlns:a16="http://schemas.microsoft.com/office/drawing/2014/main" id="{FEA165C9-6DBF-4E91-8EBB-07D8ACDF98BD}"/>
               </a:ext>
             </a:extLst>
           </p:cNvPr>
@@ -7467,7 +7524,7 @@
           <p:cNvPr id="30" name="13.082 avisos">
             <a:extLst xmlns:a="http://schemas.openxmlformats.org/drawingml/2006/main">
               <a:ext uri="{FF2B5EF4-FFF2-40B4-BE49-F238E27FC236}">
-                <a16:creationId xmlns:a16="http://schemas.microsoft.com/office/drawing/2014/main" id="{BD837DD0-6BD2-4598-A6D7-542DBC2E9662}"/>
+                <a16:creationId xmlns:a16="http://schemas.microsoft.com/office/drawing/2014/main" id="{DCC20093-1483-4879-AA1E-57104668CEFD}"/>
               </a:ext>
             </a:extLst>
           </p:cNvPr>
@@ -7522,7 +7579,7 @@
     </p:spTree>
     <p:extLst>
       <p:ext uri="{BB962C8B-B14F-4D97-AF65-F5344CB8AC3E}">
-        <p14:creationId xmlns:p14="http://schemas.microsoft.com/office/powerpoint/2010/main" val="1642042206"/>
+        <p14:creationId xmlns:p14="http://schemas.microsoft.com/office/powerpoint/2010/main" val="598179218"/>
       </p:ext>
     </p:extLst>
   </p:cSld>
@@ -7553,7 +7610,7 @@
           <p:cNvPr id="23" name="">
             <a:extLst xmlns:a="http://schemas.openxmlformats.org/drawingml/2006/main">
               <a:ext uri="{FF2B5EF4-FFF2-40B4-BE49-F238E27FC236}">
-                <a16:creationId xmlns:a16="http://schemas.microsoft.com/office/drawing/2014/main" id="{8D4DE92F-DD1B-4EAA-B4AF-8FB63F66267C}"/>
+                <a16:creationId xmlns:a16="http://schemas.microsoft.com/office/drawing/2014/main" id="{5E56C560-128D-4F0E-AFF2-D67FB5F4A195}"/>
               </a:ext>
             </a:extLst>
           </p:cNvPr>
@@ -7583,7 +7640,7 @@
           <p:cNvPr id="2" name="METODOLOGIA">
             <a:extLst xmlns:a="http://schemas.openxmlformats.org/drawingml/2006/main">
               <a:ext uri="{FF2B5EF4-FFF2-40B4-BE49-F238E27FC236}">
-                <a16:creationId xmlns:a16="http://schemas.microsoft.com/office/drawing/2014/main" id="{B8FAC40A-5EA8-49FD-B432-952B985F0747}"/>
+                <a16:creationId xmlns:a16="http://schemas.microsoft.com/office/drawing/2014/main" id="{FEF605E7-39C5-4382-9D3A-C35569397D06}"/>
               </a:ext>
             </a:extLst>
           </p:cNvPr>
@@ -7640,7 +7697,7 @@
           <p:cNvPr id="3" name="Método II: tráfego sob três condições">
             <a:extLst xmlns:a="http://schemas.openxmlformats.org/drawingml/2006/main">
               <a:ext uri="{FF2B5EF4-FFF2-40B4-BE49-F238E27FC236}">
-                <a16:creationId xmlns:a16="http://schemas.microsoft.com/office/drawing/2014/main" id="{4C2AF9B6-67C2-4547-A6C5-B1FB4C0CC6FD}"/>
+                <a16:creationId xmlns:a16="http://schemas.microsoft.com/office/drawing/2014/main" id="{C680B78C-0B19-41A6-B118-7F8D81ABDBC0}"/>
               </a:ext>
             </a:extLst>
           </p:cNvPr>
@@ -7697,7 +7754,7 @@
           <p:cNvPr id="4" name="">
             <a:extLst xmlns:a="http://schemas.openxmlformats.org/drawingml/2006/main">
               <a:ext uri="{FF2B5EF4-FFF2-40B4-BE49-F238E27FC236}">
-                <a16:creationId xmlns:a16="http://schemas.microsoft.com/office/drawing/2014/main" id="{9C368C94-46B3-4904-9E09-C9291A3E2489}"/>
+                <a16:creationId xmlns:a16="http://schemas.microsoft.com/office/drawing/2014/main" id="{1903B130-CEF5-4A65-A674-78557A42EB8E}"/>
               </a:ext>
             </a:extLst>
           </p:cNvPr>
@@ -7727,7 +7784,7 @@
           <p:cNvPr id="5" name="">
             <a:extLst xmlns:a="http://schemas.openxmlformats.org/drawingml/2006/main">
               <a:ext uri="{FF2B5EF4-FFF2-40B4-BE49-F238E27FC236}">
-                <a16:creationId xmlns:a16="http://schemas.microsoft.com/office/drawing/2014/main" id="{42CE292B-B4E9-4BE8-A8CC-ED6F63CC9A79}"/>
+                <a16:creationId xmlns:a16="http://schemas.microsoft.com/office/drawing/2014/main" id="{DBEA7BA6-7E69-4A9E-95F8-4A3C05B7FA8F}"/>
               </a:ext>
             </a:extLst>
           </p:cNvPr>
@@ -7757,7 +7814,7 @@
           <p:cNvPr id="6" name="Nguyen, Backes e Stock (2022), Seção 4.3">
             <a:extLst xmlns:a="http://schemas.openxmlformats.org/drawingml/2006/main">
               <a:ext uri="{FF2B5EF4-FFF2-40B4-BE49-F238E27FC236}">
-                <a16:creationId xmlns:a16="http://schemas.microsoft.com/office/drawing/2014/main" id="{9BA6E6DB-05B5-48C6-AC9E-B5A8D4CC6C44}"/>
+                <a16:creationId xmlns:a16="http://schemas.microsoft.com/office/drawing/2014/main" id="{925A68AB-28BB-4A88-87E1-7E1343559E6D}"/>
               </a:ext>
             </a:extLst>
           </p:cNvPr>
@@ -7769,7 +7826,7 @@
         <p:spPr>
           <a:xfrm xmlns:a="http://schemas.openxmlformats.org/drawingml/2006/main">
             <a:off x="609600" y="6477000"/>
-            <a:ext cx="10096500" cy="228600"/>
+            <a:ext cx="9982200" cy="228600"/>
           </a:xfrm>
           <a:prstGeom xmlns:a="http://schemas.openxmlformats.org/drawingml/2006/main" prst="rect">
             <a:avLst/>
@@ -7786,7 +7843,7 @@
           <a:lstStyle xmlns:a="http://schemas.openxmlformats.org/drawingml/2006/main"/>
           <a:p xmlns:a="http://schemas.openxmlformats.org/drawingml/2006/main">
             <a:pPr algn="l">
-              <a:defRPr sz="1125" b="0">
+              <a:defRPr sz="1200" b="0">
                 <a:solidFill>
                   <a:srgbClr val="596B7A"/>
                 </a:solidFill>
@@ -7796,7 +7853,7 @@
               </a:defRPr>
             </a:pPr>
             <a:r>
-              <a:rPr sz="1125" b="0">
+              <a:rPr sz="1200" b="0">
                 <a:solidFill>
                   <a:srgbClr val="596B7A"/>
                 </a:solidFill>
@@ -7814,7 +7871,7 @@
           <p:cNvPr id="7" name="13 / 23">
             <a:extLst xmlns:a="http://schemas.openxmlformats.org/drawingml/2006/main">
               <a:ext uri="{FF2B5EF4-FFF2-40B4-BE49-F238E27FC236}">
-                <a16:creationId xmlns:a16="http://schemas.microsoft.com/office/drawing/2014/main" id="{AB2CE8DA-7F37-4017-9678-97DDDE3DDE05}"/>
+                <a16:creationId xmlns:a16="http://schemas.microsoft.com/office/drawing/2014/main" id="{856D3AFD-B147-499B-96C0-771B63D01D4D}"/>
               </a:ext>
             </a:extLst>
           </p:cNvPr>
@@ -7843,7 +7900,7 @@
           <a:lstStyle xmlns:a="http://schemas.openxmlformats.org/drawingml/2006/main"/>
           <a:p xmlns:a="http://schemas.openxmlformats.org/drawingml/2006/main">
             <a:pPr algn="r">
-              <a:defRPr sz="1125" b="0">
+              <a:defRPr sz="1200" b="0">
                 <a:solidFill>
                   <a:srgbClr val="596B7A"/>
                 </a:solidFill>
@@ -7853,7 +7910,7 @@
               </a:defRPr>
             </a:pPr>
             <a:r>
-              <a:rPr sz="1125" b="0">
+              <a:rPr sz="1200" b="0">
                 <a:solidFill>
                   <a:srgbClr val="596B7A"/>
                 </a:solidFill>
@@ -7875,13 +7932,13 @@
           <p:nvPr/>
         </p:nvPicPr>
         <p:blipFill>
-          <a:blip xmlns:r="http://schemas.openxmlformats.org/officeDocument/2006/relationships" xmlns:a="http://schemas.openxmlformats.org/drawingml/2006/main" r:embed="R0ba33a3a59404d85"/>
+          <a:blip xmlns:r="http://schemas.openxmlformats.org/officeDocument/2006/relationships" xmlns:a="http://schemas.openxmlformats.org/drawingml/2006/main" r:embed="Rcdae810ea8004d79"/>
           <a:stretch xmlns:a="http://schemas.openxmlformats.org/drawingml/2006/main"/>
         </p:blipFill>
         <p:spPr>
           <a:xfrm xmlns:a="http://schemas.openxmlformats.org/drawingml/2006/main">
-            <a:off x="609600" y="1736360"/>
-            <a:ext cx="10972800" cy="1204055"/>
+            <a:off x="609600" y="1861309"/>
+            <a:ext cx="10972800" cy="954157"/>
           </a:xfrm>
           <a:prstGeom xmlns:a="http://schemas.openxmlformats.org/drawingml/2006/main" prst="rect">
             <a:avLst/>
@@ -7893,7 +7950,7 @@
           <p:cNvPr id="9" name="Figura 4 do artigo: identificação do avi">
             <a:extLst xmlns:a="http://schemas.openxmlformats.org/drawingml/2006/main">
               <a:ext uri="{FF2B5EF4-FFF2-40B4-BE49-F238E27FC236}">
-                <a16:creationId xmlns:a16="http://schemas.microsoft.com/office/drawing/2014/main" id="{E073ED12-6DB0-4D57-8A4F-77032CAF8B6C}"/>
+                <a16:creationId xmlns:a16="http://schemas.microsoft.com/office/drawing/2014/main" id="{F329B957-4E0A-41D4-908A-9D0524F743A8}"/>
               </a:ext>
             </a:extLst>
           </p:cNvPr>
@@ -7950,7 +8007,7 @@
           <p:cNvPr id="10" name="">
             <a:extLst xmlns:a="http://schemas.openxmlformats.org/drawingml/2006/main">
               <a:ext uri="{FF2B5EF4-FFF2-40B4-BE49-F238E27FC236}">
-                <a16:creationId xmlns:a16="http://schemas.microsoft.com/office/drawing/2014/main" id="{33B3F042-7A3A-4095-AF6C-2EDAFF1FF94C}"/>
+                <a16:creationId xmlns:a16="http://schemas.microsoft.com/office/drawing/2014/main" id="{BCFB27DF-275B-487C-8F3A-6A4F43E6326F}"/>
               </a:ext>
             </a:extLst>
           </p:cNvPr>
@@ -7980,7 +8037,7 @@
           <p:cNvPr id="11" name="Tno-consent">
             <a:extLst xmlns:a="http://schemas.openxmlformats.org/drawingml/2006/main">
               <a:ext uri="{FF2B5EF4-FFF2-40B4-BE49-F238E27FC236}">
-                <a16:creationId xmlns:a16="http://schemas.microsoft.com/office/drawing/2014/main" id="{0CB54B01-FF7B-4852-A723-01C9DB8A7E08}"/>
+                <a16:creationId xmlns:a16="http://schemas.microsoft.com/office/drawing/2014/main" id="{99630845-062B-4E08-8289-AA3898442694}"/>
               </a:ext>
             </a:extLst>
           </p:cNvPr>
@@ -8037,7 +8094,7 @@
           <p:cNvPr id="12" name="SEM CONSENTIR">
             <a:extLst xmlns:a="http://schemas.openxmlformats.org/drawingml/2006/main">
               <a:ext uri="{FF2B5EF4-FFF2-40B4-BE49-F238E27FC236}">
-                <a16:creationId xmlns:a16="http://schemas.microsoft.com/office/drawing/2014/main" id="{6EFF57E5-E0CF-4B7F-94A2-23B267C20FBA}"/>
+                <a16:creationId xmlns:a16="http://schemas.microsoft.com/office/drawing/2014/main" id="{8791458D-1C48-456A-A223-0984BB6AA6AC}"/>
               </a:ext>
             </a:extLst>
           </p:cNvPr>
@@ -8094,7 +8151,7 @@
           <p:cNvPr id="13" name="Abrir o app e não interagir.&#10;Registrar o">
             <a:extLst xmlns:a="http://schemas.openxmlformats.org/drawingml/2006/main">
               <a:ext uri="{FF2B5EF4-FFF2-40B4-BE49-F238E27FC236}">
-                <a16:creationId xmlns:a16="http://schemas.microsoft.com/office/drawing/2014/main" id="{3B9B99E2-DC83-4481-B1D1-4783DDE1D8BD}"/>
+                <a16:creationId xmlns:a16="http://schemas.microsoft.com/office/drawing/2014/main" id="{6414B415-3023-46E8-8484-23E027C08133}"/>
               </a:ext>
             </a:extLst>
           </p:cNvPr>
@@ -8197,7 +8254,7 @@
           <p:cNvPr id="14" name="">
             <a:extLst xmlns:a="http://schemas.openxmlformats.org/drawingml/2006/main">
               <a:ext uri="{FF2B5EF4-FFF2-40B4-BE49-F238E27FC236}">
-                <a16:creationId xmlns:a16="http://schemas.microsoft.com/office/drawing/2014/main" id="{FEAE8526-BA7E-443B-B22A-775E75DC5CF2}"/>
+                <a16:creationId xmlns:a16="http://schemas.microsoft.com/office/drawing/2014/main" id="{B285B5BE-B38D-40AA-AE58-1CFDA301E537}"/>
               </a:ext>
             </a:extLst>
           </p:cNvPr>
@@ -8227,7 +8284,7 @@
           <p:cNvPr id="15" name="Tconfirm">
             <a:extLst xmlns:a="http://schemas.openxmlformats.org/drawingml/2006/main">
               <a:ext uri="{FF2B5EF4-FFF2-40B4-BE49-F238E27FC236}">
-                <a16:creationId xmlns:a16="http://schemas.microsoft.com/office/drawing/2014/main" id="{9E517732-85AA-4F66-83DD-68DF986F0BF2}"/>
+                <a16:creationId xmlns:a16="http://schemas.microsoft.com/office/drawing/2014/main" id="{91FFD552-A348-4782-B812-6126CF032893}"/>
               </a:ext>
             </a:extLst>
           </p:cNvPr>
@@ -8284,7 +8341,7 @@
           <p:cNvPr id="16" name="APÓS ACEITAR">
             <a:extLst xmlns:a="http://schemas.openxmlformats.org/drawingml/2006/main">
               <a:ext uri="{FF2B5EF4-FFF2-40B4-BE49-F238E27FC236}">
-                <a16:creationId xmlns:a16="http://schemas.microsoft.com/office/drawing/2014/main" id="{74333B48-72BE-46D0-B994-8C86DC746706}"/>
+                <a16:creationId xmlns:a16="http://schemas.microsoft.com/office/drawing/2014/main" id="{AD68EAD2-2DF4-4C02-80C7-30987AD273AD}"/>
               </a:ext>
             </a:extLst>
           </p:cNvPr>
@@ -8341,7 +8398,7 @@
           <p:cNvPr id="17" name="Acionar a opção de aceitação.&#10;Navegar au">
             <a:extLst xmlns:a="http://schemas.openxmlformats.org/drawingml/2006/main">
               <a:ext uri="{FF2B5EF4-FFF2-40B4-BE49-F238E27FC236}">
-                <a16:creationId xmlns:a16="http://schemas.microsoft.com/office/drawing/2014/main" id="{12B4D659-5CDE-46B2-8A3D-B2C3BB856F15}"/>
+                <a16:creationId xmlns:a16="http://schemas.microsoft.com/office/drawing/2014/main" id="{2ED88B36-A398-4A16-8C1F-696828BE6E1F}"/>
               </a:ext>
             </a:extLst>
           </p:cNvPr>
@@ -8444,7 +8501,7 @@
           <p:cNvPr id="18" name="">
             <a:extLst xmlns:a="http://schemas.openxmlformats.org/drawingml/2006/main">
               <a:ext uri="{FF2B5EF4-FFF2-40B4-BE49-F238E27FC236}">
-                <a16:creationId xmlns:a16="http://schemas.microsoft.com/office/drawing/2014/main" id="{F2482F21-40B1-427D-AC82-A9352A27D635}"/>
+                <a16:creationId xmlns:a16="http://schemas.microsoft.com/office/drawing/2014/main" id="{BB8CF9F6-1CA9-4AF5-B3C4-8347FF403CDB}"/>
               </a:ext>
             </a:extLst>
           </p:cNvPr>
@@ -8474,7 +8531,7 @@
           <p:cNvPr id="19" name="Treject">
             <a:extLst xmlns:a="http://schemas.openxmlformats.org/drawingml/2006/main">
               <a:ext uri="{FF2B5EF4-FFF2-40B4-BE49-F238E27FC236}">
-                <a16:creationId xmlns:a16="http://schemas.microsoft.com/office/drawing/2014/main" id="{A2DE86F1-37D8-40F0-98C3-9EA22C306771}"/>
+                <a16:creationId xmlns:a16="http://schemas.microsoft.com/office/drawing/2014/main" id="{BFF3B865-1E22-489F-87AD-667FA73E29B1}"/>
               </a:ext>
             </a:extLst>
           </p:cNvPr>
@@ -8531,7 +8588,7 @@
           <p:cNvPr id="20" name="APÓS RECUSAR">
             <a:extLst xmlns:a="http://schemas.openxmlformats.org/drawingml/2006/main">
               <a:ext uri="{FF2B5EF4-FFF2-40B4-BE49-F238E27FC236}">
-                <a16:creationId xmlns:a16="http://schemas.microsoft.com/office/drawing/2014/main" id="{D2C80F97-A4D9-4B67-933A-8C5446482CED}"/>
+                <a16:creationId xmlns:a16="http://schemas.microsoft.com/office/drawing/2014/main" id="{07F5EA1F-E71E-4A57-BD15-F907C6F0B55B}"/>
               </a:ext>
             </a:extLst>
           </p:cNvPr>
@@ -8588,7 +8645,7 @@
           <p:cNvPr id="21" name="Acionar a opção de recusa.&#10;Verificar se ">
             <a:extLst xmlns:a="http://schemas.openxmlformats.org/drawingml/2006/main">
               <a:ext uri="{FF2B5EF4-FFF2-40B4-BE49-F238E27FC236}">
-                <a16:creationId xmlns:a16="http://schemas.microsoft.com/office/drawing/2014/main" id="{E1BE40D3-956C-4273-ACC3-4B08CC3CC67C}"/>
+                <a16:creationId xmlns:a16="http://schemas.microsoft.com/office/drawing/2014/main" id="{24C752F8-7EC0-43E3-AE1B-77346208709B}"/>
               </a:ext>
             </a:extLst>
           </p:cNvPr>
@@ -8691,7 +8748,7 @@
           <p:cNvPr id="22" name="Até 150 s por condição. mitmproxy, Objec">
             <a:extLst xmlns:a="http://schemas.openxmlformats.org/drawingml/2006/main">
               <a:ext uri="{FF2B5EF4-FFF2-40B4-BE49-F238E27FC236}">
-                <a16:creationId xmlns:a16="http://schemas.microsoft.com/office/drawing/2014/main" id="{A3803223-E677-4046-A30F-EBD74F607A6D}"/>
+                <a16:creationId xmlns:a16="http://schemas.microsoft.com/office/drawing/2014/main" id="{33AC2628-444C-4507-AF8C-34890262004E}"/>
               </a:ext>
             </a:extLst>
           </p:cNvPr>
@@ -8769,7 +8826,7 @@
     </p:spTree>
     <p:extLst>
       <p:ext uri="{BB962C8B-B14F-4D97-AF65-F5344CB8AC3E}">
-        <p14:creationId xmlns:p14="http://schemas.microsoft.com/office/powerpoint/2010/main" val="880342849"/>
+        <p14:creationId xmlns:p14="http://schemas.microsoft.com/office/powerpoint/2010/main" val="179458500"/>
       </p:ext>
     </p:extLst>
   </p:cSld>
@@ -8800,7 +8857,7 @@
           <p:cNvPr id="12" name="">
             <a:extLst xmlns:a="http://schemas.openxmlformats.org/drawingml/2006/main">
               <a:ext uri="{FF2B5EF4-FFF2-40B4-BE49-F238E27FC236}">
-                <a16:creationId xmlns:a16="http://schemas.microsoft.com/office/drawing/2014/main" id="{41F59EB2-799E-4143-94DD-DC4C8140E76D}"/>
+                <a16:creationId xmlns:a16="http://schemas.microsoft.com/office/drawing/2014/main" id="{6516F060-75BA-4AEB-90AF-E3E5F141C7B2}"/>
               </a:ext>
             </a:extLst>
           </p:cNvPr>
@@ -8830,7 +8887,7 @@
           <p:cNvPr id="2" name="RESULTADOS">
             <a:extLst xmlns:a="http://schemas.openxmlformats.org/drawingml/2006/main">
               <a:ext uri="{FF2B5EF4-FFF2-40B4-BE49-F238E27FC236}">
-                <a16:creationId xmlns:a16="http://schemas.microsoft.com/office/drawing/2014/main" id="{14049F93-15B0-467C-851D-84AD4EE86185}"/>
+                <a16:creationId xmlns:a16="http://schemas.microsoft.com/office/drawing/2014/main" id="{B745EF5B-98F6-447A-836B-014775EAB3A1}"/>
               </a:ext>
             </a:extLst>
           </p:cNvPr>
@@ -8887,7 +8944,7 @@
           <p:cNvPr id="3" name="Quatro mecanismos nos 13.082 avisos">
             <a:extLst xmlns:a="http://schemas.openxmlformats.org/drawingml/2006/main">
               <a:ext uri="{FF2B5EF4-FFF2-40B4-BE49-F238E27FC236}">
-                <a16:creationId xmlns:a16="http://schemas.microsoft.com/office/drawing/2014/main" id="{91DBB9C8-0FB5-4CFA-8F0D-1BC890FAB4CB}"/>
+                <a16:creationId xmlns:a16="http://schemas.microsoft.com/office/drawing/2014/main" id="{5A382B73-B299-419F-AF00-25275EECEED3}"/>
               </a:ext>
             </a:extLst>
           </p:cNvPr>
@@ -8944,7 +9001,7 @@
           <p:cNvPr id="4" name="">
             <a:extLst xmlns:a="http://schemas.openxmlformats.org/drawingml/2006/main">
               <a:ext uri="{FF2B5EF4-FFF2-40B4-BE49-F238E27FC236}">
-                <a16:creationId xmlns:a16="http://schemas.microsoft.com/office/drawing/2014/main" id="{BC829403-EAAD-4D95-BD21-5A53622C47E1}"/>
+                <a16:creationId xmlns:a16="http://schemas.microsoft.com/office/drawing/2014/main" id="{3CDB30E5-CF7C-4469-A78A-40AB669F588D}"/>
               </a:ext>
             </a:extLst>
           </p:cNvPr>
@@ -8974,7 +9031,7 @@
           <p:cNvPr id="5" name="">
             <a:extLst xmlns:a="http://schemas.openxmlformats.org/drawingml/2006/main">
               <a:ext uri="{FF2B5EF4-FFF2-40B4-BE49-F238E27FC236}">
-                <a16:creationId xmlns:a16="http://schemas.microsoft.com/office/drawing/2014/main" id="{E292613C-1024-4D26-81C4-22E638B421AF}"/>
+                <a16:creationId xmlns:a16="http://schemas.microsoft.com/office/drawing/2014/main" id="{B8611881-CFF0-4244-87DD-63AD892746D5}"/>
               </a:ext>
             </a:extLst>
           </p:cNvPr>
@@ -9004,7 +9061,7 @@
           <p:cNvPr id="6" name="Nguyen, Backes e Stock (2022), Seção 4.2">
             <a:extLst xmlns:a="http://schemas.openxmlformats.org/drawingml/2006/main">
               <a:ext uri="{FF2B5EF4-FFF2-40B4-BE49-F238E27FC236}">
-                <a16:creationId xmlns:a16="http://schemas.microsoft.com/office/drawing/2014/main" id="{A4953296-4E7C-4D9A-A608-6E604F6285C5}"/>
+                <a16:creationId xmlns:a16="http://schemas.microsoft.com/office/drawing/2014/main" id="{C732D8C7-EEEB-4049-A5CD-0F527F0477A5}"/>
               </a:ext>
             </a:extLst>
           </p:cNvPr>
@@ -9016,7 +9073,7 @@
         <p:spPr>
           <a:xfrm xmlns:a="http://schemas.openxmlformats.org/drawingml/2006/main">
             <a:off x="609600" y="6477000"/>
-            <a:ext cx="10096500" cy="228600"/>
+            <a:ext cx="9982200" cy="228600"/>
           </a:xfrm>
           <a:prstGeom xmlns:a="http://schemas.openxmlformats.org/drawingml/2006/main" prst="rect">
             <a:avLst/>
@@ -9033,7 +9090,7 @@
           <a:lstStyle xmlns:a="http://schemas.openxmlformats.org/drawingml/2006/main"/>
           <a:p xmlns:a="http://schemas.openxmlformats.org/drawingml/2006/main">
             <a:pPr algn="l">
-              <a:defRPr sz="1125" b="0">
+              <a:defRPr sz="1200" b="0">
                 <a:solidFill>
                   <a:srgbClr val="596B7A"/>
                 </a:solidFill>
@@ -9043,7 +9100,7 @@
               </a:defRPr>
             </a:pPr>
             <a:r>
-              <a:rPr sz="1125" b="0">
+              <a:rPr sz="1200" b="0">
                 <a:solidFill>
                   <a:srgbClr val="596B7A"/>
                 </a:solidFill>
@@ -9061,7 +9118,7 @@
           <p:cNvPr id="7" name="14 / 23">
             <a:extLst xmlns:a="http://schemas.openxmlformats.org/drawingml/2006/main">
               <a:ext uri="{FF2B5EF4-FFF2-40B4-BE49-F238E27FC236}">
-                <a16:creationId xmlns:a16="http://schemas.microsoft.com/office/drawing/2014/main" id="{8082B09E-9192-4858-AB0A-B9A9B7413DA6}"/>
+                <a16:creationId xmlns:a16="http://schemas.microsoft.com/office/drawing/2014/main" id="{8933D48D-B555-46F0-B0CA-6FB187344058}"/>
               </a:ext>
             </a:extLst>
           </p:cNvPr>
@@ -9090,7 +9147,7 @@
           <a:lstStyle xmlns:a="http://schemas.openxmlformats.org/drawingml/2006/main"/>
           <a:p xmlns:a="http://schemas.openxmlformats.org/drawingml/2006/main">
             <a:pPr algn="r">
-              <a:defRPr sz="1125" b="0">
+              <a:defRPr sz="1200" b="0">
                 <a:solidFill>
                   <a:srgbClr val="596B7A"/>
                 </a:solidFill>
@@ -9100,7 +9157,7 @@
               </a:defRPr>
             </a:pPr>
             <a:r>
-              <a:rPr sz="1125" b="0">
+              <a:rPr sz="1200" b="0">
                 <a:solidFill>
                   <a:srgbClr val="596B7A"/>
                 </a:solidFill>
@@ -9122,13 +9179,13 @@
           <p:nvPr/>
         </p:nvPicPr>
         <p:blipFill>
-          <a:blip xmlns:r="http://schemas.openxmlformats.org/officeDocument/2006/relationships" xmlns:a="http://schemas.openxmlformats.org/drawingml/2006/main" r:embed="R28a188ede73e4d22"/>
+          <a:blip xmlns:r="http://schemas.openxmlformats.org/officeDocument/2006/relationships" xmlns:a="http://schemas.openxmlformats.org/drawingml/2006/main" r:embed="R547f17030f8e4e5f"/>
           <a:stretch xmlns:a="http://schemas.openxmlformats.org/drawingml/2006/main"/>
         </p:blipFill>
         <p:spPr>
           <a:xfrm xmlns:a="http://schemas.openxmlformats.org/drawingml/2006/main">
-            <a:off x="609600" y="1971478"/>
-            <a:ext cx="5429250" cy="3096019"/>
+            <a:off x="609600" y="2032639"/>
+            <a:ext cx="5429250" cy="2973697"/>
           </a:xfrm>
           <a:prstGeom xmlns:a="http://schemas.openxmlformats.org/drawingml/2006/main" prst="rect">
             <a:avLst/>
@@ -9140,7 +9197,7 @@
           <p:cNvPr id="9" name="Figura 3 do artigo: exemplos dos quatro ">
             <a:extLst xmlns:a="http://schemas.openxmlformats.org/drawingml/2006/main">
               <a:ext uri="{FF2B5EF4-FFF2-40B4-BE49-F238E27FC236}">
-                <a16:creationId xmlns:a16="http://schemas.microsoft.com/office/drawing/2014/main" id="{42ED3DBE-E709-4F68-8965-576B0B09D355}"/>
+                <a16:creationId xmlns:a16="http://schemas.microsoft.com/office/drawing/2014/main" id="{02C009AF-22D6-4C66-BFCA-2D9B4951BEFD}"/>
               </a:ext>
             </a:extLst>
           </p:cNvPr>
@@ -10051,7 +10108,7 @@
           <p:cNvPr id="11" name="Recusar anúncios personalizados não nece">
             <a:extLst xmlns:a="http://schemas.openxmlformats.org/drawingml/2006/main">
               <a:ext uri="{FF2B5EF4-FFF2-40B4-BE49-F238E27FC236}">
-                <a16:creationId xmlns:a16="http://schemas.microsoft.com/office/drawing/2014/main" id="{AC03D70B-6E29-43E0-8FD0-E298DC646683}"/>
+                <a16:creationId xmlns:a16="http://schemas.microsoft.com/office/drawing/2014/main" id="{5E0C6AA6-AA71-4F31-A2D9-25E6FEF4781F}"/>
               </a:ext>
             </a:extLst>
           </p:cNvPr>
@@ -10106,7 +10163,7 @@
     </p:spTree>
     <p:extLst>
       <p:ext uri="{BB962C8B-B14F-4D97-AF65-F5344CB8AC3E}">
-        <p14:creationId xmlns:p14="http://schemas.microsoft.com/office/powerpoint/2010/main" val="1329796405"/>
+        <p14:creationId xmlns:p14="http://schemas.microsoft.com/office/powerpoint/2010/main" val="1260797123"/>
       </p:ext>
     </p:extLst>
   </p:cSld>
@@ -10137,7 +10194,7 @@
           <p:cNvPr id="19" name="">
             <a:extLst xmlns:a="http://schemas.openxmlformats.org/drawingml/2006/main">
               <a:ext uri="{FF2B5EF4-FFF2-40B4-BE49-F238E27FC236}">
-                <a16:creationId xmlns:a16="http://schemas.microsoft.com/office/drawing/2014/main" id="{B55D9B38-5AF0-4DBE-98B9-C1FF3049FAE9}"/>
+                <a16:creationId xmlns:a16="http://schemas.microsoft.com/office/drawing/2014/main" id="{8903206B-29E6-4F53-A802-B90449B3BFB9}"/>
               </a:ext>
             </a:extLst>
           </p:cNvPr>
@@ -10167,7 +10224,7 @@
           <p:cNvPr id="2" name="RESULTADOS">
             <a:extLst xmlns:a="http://schemas.openxmlformats.org/drawingml/2006/main">
               <a:ext uri="{FF2B5EF4-FFF2-40B4-BE49-F238E27FC236}">
-                <a16:creationId xmlns:a16="http://schemas.microsoft.com/office/drawing/2014/main" id="{FED202B1-92D9-4162-9229-DC2D8B727CC0}"/>
+                <a16:creationId xmlns:a16="http://schemas.microsoft.com/office/drawing/2014/main" id="{5134BD04-4834-4FBC-8182-A992C299835C}"/>
               </a:ext>
             </a:extLst>
           </p:cNvPr>
@@ -10224,7 +10281,7 @@
           <p:cNvPr id="3" name="Resultados: dois conjuntos distintos">
             <a:extLst xmlns:a="http://schemas.openxmlformats.org/drawingml/2006/main">
               <a:ext uri="{FF2B5EF4-FFF2-40B4-BE49-F238E27FC236}">
-                <a16:creationId xmlns:a16="http://schemas.microsoft.com/office/drawing/2014/main" id="{1B212EF1-8FC1-4DD5-B114-8017EE3E4F3A}"/>
+                <a16:creationId xmlns:a16="http://schemas.microsoft.com/office/drawing/2014/main" id="{762500DD-8663-4955-9EE5-ECC52810C7C8}"/>
               </a:ext>
             </a:extLst>
           </p:cNvPr>
@@ -10281,7 +10338,7 @@
           <p:cNvPr id="4" name="">
             <a:extLst xmlns:a="http://schemas.openxmlformats.org/drawingml/2006/main">
               <a:ext uri="{FF2B5EF4-FFF2-40B4-BE49-F238E27FC236}">
-                <a16:creationId xmlns:a16="http://schemas.microsoft.com/office/drawing/2014/main" id="{6ABE43ED-D250-4CE8-941B-C45A575A7446}"/>
+                <a16:creationId xmlns:a16="http://schemas.microsoft.com/office/drawing/2014/main" id="{CF27E8A5-9CFF-4177-880C-CD131C79E684}"/>
               </a:ext>
             </a:extLst>
           </p:cNvPr>
@@ -10311,7 +10368,7 @@
           <p:cNvPr id="5" name="">
             <a:extLst xmlns:a="http://schemas.openxmlformats.org/drawingml/2006/main">
               <a:ext uri="{FF2B5EF4-FFF2-40B4-BE49-F238E27FC236}">
-                <a16:creationId xmlns:a16="http://schemas.microsoft.com/office/drawing/2014/main" id="{F19FFB80-A07B-44C6-AE7D-3D5BFBAA924D}"/>
+                <a16:creationId xmlns:a16="http://schemas.microsoft.com/office/drawing/2014/main" id="{6FCE8907-BED3-4DFD-91B0-5FE84BF6E5D1}"/>
               </a:ext>
             </a:extLst>
           </p:cNvPr>
@@ -10341,7 +10398,7 @@
           <p:cNvPr id="6" name="Nguyen, Backes e Stock (2022), Seções 4.">
             <a:extLst xmlns:a="http://schemas.openxmlformats.org/drawingml/2006/main">
               <a:ext uri="{FF2B5EF4-FFF2-40B4-BE49-F238E27FC236}">
-                <a16:creationId xmlns:a16="http://schemas.microsoft.com/office/drawing/2014/main" id="{CAFBD54F-460D-4E06-93C4-09549FE5A64B}"/>
+                <a16:creationId xmlns:a16="http://schemas.microsoft.com/office/drawing/2014/main" id="{0ECCB2ED-7AB4-4D8A-AAB4-95CBE7887513}"/>
               </a:ext>
             </a:extLst>
           </p:cNvPr>
@@ -10353,7 +10410,7 @@
         <p:spPr>
           <a:xfrm xmlns:a="http://schemas.openxmlformats.org/drawingml/2006/main">
             <a:off x="609600" y="6477000"/>
-            <a:ext cx="10096500" cy="228600"/>
+            <a:ext cx="9982200" cy="228600"/>
           </a:xfrm>
           <a:prstGeom xmlns:a="http://schemas.openxmlformats.org/drawingml/2006/main" prst="rect">
             <a:avLst/>
@@ -10370,7 +10427,7 @@
           <a:lstStyle xmlns:a="http://schemas.openxmlformats.org/drawingml/2006/main"/>
           <a:p xmlns:a="http://schemas.openxmlformats.org/drawingml/2006/main">
             <a:pPr algn="l">
-              <a:defRPr sz="1125" b="0">
+              <a:defRPr sz="1200" b="0">
                 <a:solidFill>
                   <a:srgbClr val="596B7A"/>
                 </a:solidFill>
@@ -10380,7 +10437,7 @@
               </a:defRPr>
             </a:pPr>
             <a:r>
-              <a:rPr sz="1125" b="0">
+              <a:rPr sz="1200" b="0">
                 <a:solidFill>
                   <a:srgbClr val="596B7A"/>
                 </a:solidFill>
@@ -10398,7 +10455,7 @@
           <p:cNvPr id="7" name="15 / 23">
             <a:extLst xmlns:a="http://schemas.openxmlformats.org/drawingml/2006/main">
               <a:ext uri="{FF2B5EF4-FFF2-40B4-BE49-F238E27FC236}">
-                <a16:creationId xmlns:a16="http://schemas.microsoft.com/office/drawing/2014/main" id="{106DC82D-1C2F-41EF-AD93-102F277F52EC}"/>
+                <a16:creationId xmlns:a16="http://schemas.microsoft.com/office/drawing/2014/main" id="{14580234-03A4-496F-B844-A48A83B01D37}"/>
               </a:ext>
             </a:extLst>
           </p:cNvPr>
@@ -10427,7 +10484,7 @@
           <a:lstStyle xmlns:a="http://schemas.openxmlformats.org/drawingml/2006/main"/>
           <a:p xmlns:a="http://schemas.openxmlformats.org/drawingml/2006/main">
             <a:pPr algn="r">
-              <a:defRPr sz="1125" b="0">
+              <a:defRPr sz="1200" b="0">
                 <a:solidFill>
                   <a:srgbClr val="596B7A"/>
                 </a:solidFill>
@@ -10437,7 +10494,7 @@
               </a:defRPr>
             </a:pPr>
             <a:r>
-              <a:rPr sz="1125" b="0">
+              <a:rPr sz="1200" b="0">
                 <a:solidFill>
                   <a:srgbClr val="596B7A"/>
                 </a:solidFill>
@@ -10455,7 +10512,7 @@
           <p:cNvPr id="8" name="239.381 aplicativos analisados">
             <a:extLst xmlns:a="http://schemas.openxmlformats.org/drawingml/2006/main">
               <a:ext uri="{FF2B5EF4-FFF2-40B4-BE49-F238E27FC236}">
-                <a16:creationId xmlns:a16="http://schemas.microsoft.com/office/drawing/2014/main" id="{30F8982A-E6BE-4EFF-96D4-7BF0AE682513}"/>
+                <a16:creationId xmlns:a16="http://schemas.microsoft.com/office/drawing/2014/main" id="{8CD93DF2-65A0-4AE3-A166-597106C0098B}"/>
               </a:ext>
             </a:extLst>
           </p:cNvPr>
@@ -10512,7 +10569,7 @@
           <p:cNvPr id="9" name="">
             <a:extLst xmlns:a="http://schemas.openxmlformats.org/drawingml/2006/main">
               <a:ext uri="{FF2B5EF4-FFF2-40B4-BE49-F238E27FC236}">
-                <a16:creationId xmlns:a16="http://schemas.microsoft.com/office/drawing/2014/main" id="{7D7D33C8-BD20-4F77-8BAE-8FA1C0F6C3BF}"/>
+                <a16:creationId xmlns:a16="http://schemas.microsoft.com/office/drawing/2014/main" id="{94C96A23-910E-411E-84FB-67454E79C86A}"/>
               </a:ext>
             </a:extLst>
           </p:cNvPr>
@@ -10542,7 +10599,7 @@
           <p:cNvPr id="10" name="APPS COM AVISO IDENTIFICADO">
             <a:extLst xmlns:a="http://schemas.openxmlformats.org/drawingml/2006/main">
               <a:ext uri="{FF2B5EF4-FFF2-40B4-BE49-F238E27FC236}">
-                <a16:creationId xmlns:a16="http://schemas.microsoft.com/office/drawing/2014/main" id="{12F66A4C-4880-4854-91E2-4A836DCEA676}"/>
+                <a16:creationId xmlns:a16="http://schemas.microsoft.com/office/drawing/2014/main" id="{27125AEB-609A-48C9-BDAC-318C3799D14D}"/>
               </a:ext>
             </a:extLst>
           </p:cNvPr>
@@ -10599,7 +10656,7 @@
           <p:cNvPr id="11" name="2.688">
             <a:extLst xmlns:a="http://schemas.openxmlformats.org/drawingml/2006/main">
               <a:ext uri="{FF2B5EF4-FFF2-40B4-BE49-F238E27FC236}">
-                <a16:creationId xmlns:a16="http://schemas.microsoft.com/office/drawing/2014/main" id="{DC0F60B1-EF57-46DF-AA79-B5C77002F3A4}"/>
+                <a16:creationId xmlns:a16="http://schemas.microsoft.com/office/drawing/2014/main" id="{A4209FD2-6C42-4871-A591-78573B34761A}"/>
               </a:ext>
             </a:extLst>
           </p:cNvPr>
@@ -10656,7 +10713,7 @@
           <p:cNvPr id="12" name="20,54% dos 13.082 apps com aviso">
             <a:extLst xmlns:a="http://schemas.openxmlformats.org/drawingml/2006/main">
               <a:ext uri="{FF2B5EF4-FFF2-40B4-BE49-F238E27FC236}">
-                <a16:creationId xmlns:a16="http://schemas.microsoft.com/office/drawing/2014/main" id="{E1A01BE6-0937-4FAD-B634-8FD4946EF88A}"/>
+                <a16:creationId xmlns:a16="http://schemas.microsoft.com/office/drawing/2014/main" id="{DDD6C82F-BC1C-4CBA-90B7-297D8ACE43BA}"/>
               </a:ext>
             </a:extLst>
           </p:cNvPr>
@@ -10713,7 +10770,7 @@
           <p:cNvPr id="13" name="Pelo menos uma potencial violação&#10;dos re">
             <a:extLst xmlns:a="http://schemas.openxmlformats.org/drawingml/2006/main">
               <a:ext uri="{FF2B5EF4-FFF2-40B4-BE49-F238E27FC236}">
-                <a16:creationId xmlns:a16="http://schemas.microsoft.com/office/drawing/2014/main" id="{C02EE3B0-3878-4907-B310-F4C9383B9CE3}"/>
+                <a16:creationId xmlns:a16="http://schemas.microsoft.com/office/drawing/2014/main" id="{3AC5897E-F210-40F5-BB5F-21EBB5155093}"/>
               </a:ext>
             </a:extLst>
           </p:cNvPr>
@@ -10793,7 +10850,7 @@
           <p:cNvPr id="14" name="">
             <a:extLst xmlns:a="http://schemas.openxmlformats.org/drawingml/2006/main">
               <a:ext uri="{FF2B5EF4-FFF2-40B4-BE49-F238E27FC236}">
-                <a16:creationId xmlns:a16="http://schemas.microsoft.com/office/drawing/2014/main" id="{5F78C7D2-8EA4-420E-8812-AFB1A105A18E}"/>
+                <a16:creationId xmlns:a16="http://schemas.microsoft.com/office/drawing/2014/main" id="{B53A3FB1-809A-4E2F-8CE6-0936BA0A3E30}"/>
               </a:ext>
             </a:extLst>
           </p:cNvPr>
@@ -10823,7 +10880,7 @@
           <p:cNvPr id="15" name="APPS SEM AVISO IDENTIFICADO">
             <a:extLst xmlns:a="http://schemas.openxmlformats.org/drawingml/2006/main">
               <a:ext uri="{FF2B5EF4-FFF2-40B4-BE49-F238E27FC236}">
-                <a16:creationId xmlns:a16="http://schemas.microsoft.com/office/drawing/2014/main" id="{3A1EDF68-DDC2-42E1-B4C2-0BDA5BB07D50}"/>
+                <a16:creationId xmlns:a16="http://schemas.microsoft.com/office/drawing/2014/main" id="{3DCA82C6-1E95-4050-8883-C2E22D792B4B}"/>
               </a:ext>
             </a:extLst>
           </p:cNvPr>
@@ -10880,7 +10937,7 @@
           <p:cNvPr id="16" name="30.160">
             <a:extLst xmlns:a="http://schemas.openxmlformats.org/drawingml/2006/main">
               <a:ext uri="{FF2B5EF4-FFF2-40B4-BE49-F238E27FC236}">
-                <a16:creationId xmlns:a16="http://schemas.microsoft.com/office/drawing/2014/main" id="{5BF55BC9-F5A6-4078-BA89-5CC1FF2252F6}"/>
+                <a16:creationId xmlns:a16="http://schemas.microsoft.com/office/drawing/2014/main" id="{6D4434D1-E52A-4E26-86BF-564EF6F51E2E}"/>
               </a:ext>
             </a:extLst>
           </p:cNvPr>
@@ -10937,7 +10994,7 @@
           <p:cNvPr id="17" name="Enviaram dados pessoais a&#10;controladores ">
             <a:extLst xmlns:a="http://schemas.openxmlformats.org/drawingml/2006/main">
               <a:ext uri="{FF2B5EF4-FFF2-40B4-BE49-F238E27FC236}">
-                <a16:creationId xmlns:a16="http://schemas.microsoft.com/office/drawing/2014/main" id="{8F131FB7-7E15-4CA7-8E56-2E7728CF1D31}"/>
+                <a16:creationId xmlns:a16="http://schemas.microsoft.com/office/drawing/2014/main" id="{E6EC29BB-E516-4340-80F3-D37F5DEAC80E}"/>
               </a:ext>
             </a:extLst>
           </p:cNvPr>
@@ -11017,7 +11074,7 @@
           <p:cNvPr id="18" name="93,26% dos 32.341 apps que enviaram&#10;dado">
             <a:extLst xmlns:a="http://schemas.openxmlformats.org/drawingml/2006/main">
               <a:ext uri="{FF2B5EF4-FFF2-40B4-BE49-F238E27FC236}">
-                <a16:creationId xmlns:a16="http://schemas.microsoft.com/office/drawing/2014/main" id="{A1E2D254-F950-40F8-A2E8-5096D89FA3C5}"/>
+                <a16:creationId xmlns:a16="http://schemas.microsoft.com/office/drawing/2014/main" id="{5D0DB893-5A5C-4064-B2A4-F4EF6609FB98}"/>
               </a:ext>
             </a:extLst>
           </p:cNvPr>
@@ -11118,7 +11175,7 @@
     </p:spTree>
     <p:extLst>
       <p:ext uri="{BB962C8B-B14F-4D97-AF65-F5344CB8AC3E}">
-        <p14:creationId xmlns:p14="http://schemas.microsoft.com/office/powerpoint/2010/main" val="996655232"/>
+        <p14:creationId xmlns:p14="http://schemas.microsoft.com/office/powerpoint/2010/main" val="202175131"/>
       </p:ext>
     </p:extLst>
   </p:cSld>
@@ -11149,7 +11206,7 @@
           <p:cNvPr id="16" name="">
             <a:extLst xmlns:a="http://schemas.openxmlformats.org/drawingml/2006/main">
               <a:ext uri="{FF2B5EF4-FFF2-40B4-BE49-F238E27FC236}">
-                <a16:creationId xmlns:a16="http://schemas.microsoft.com/office/drawing/2014/main" id="{74F485BD-9AD0-4C94-A826-A2EF10041171}"/>
+                <a16:creationId xmlns:a16="http://schemas.microsoft.com/office/drawing/2014/main" id="{6ED15CCD-E6CF-415A-8F62-C49926A6CED7}"/>
               </a:ext>
             </a:extLst>
           </p:cNvPr>
@@ -11179,7 +11236,7 @@
           <p:cNvPr id="2" name="RESULTADOS">
             <a:extLst xmlns:a="http://schemas.openxmlformats.org/drawingml/2006/main">
               <a:ext uri="{FF2B5EF4-FFF2-40B4-BE49-F238E27FC236}">
-                <a16:creationId xmlns:a16="http://schemas.microsoft.com/office/drawing/2014/main" id="{D3EF6107-6356-4B1B-A7D1-2C79417679F3}"/>
+                <a16:creationId xmlns:a16="http://schemas.microsoft.com/office/drawing/2014/main" id="{14A704C6-AEB0-4A6A-81B7-4D50540E829C}"/>
               </a:ext>
             </a:extLst>
           </p:cNvPr>
@@ -11236,7 +11293,7 @@
           <p:cNvPr id="3" name="Potenciais violações entre apps com avis">
             <a:extLst xmlns:a="http://schemas.openxmlformats.org/drawingml/2006/main">
               <a:ext uri="{FF2B5EF4-FFF2-40B4-BE49-F238E27FC236}">
-                <a16:creationId xmlns:a16="http://schemas.microsoft.com/office/drawing/2014/main" id="{BB0CEC1A-F3D9-4891-AE45-09B07991FB8D}"/>
+                <a16:creationId xmlns:a16="http://schemas.microsoft.com/office/drawing/2014/main" id="{1D5AF94F-8220-42F8-BEB8-814DFCB669A0}"/>
               </a:ext>
             </a:extLst>
           </p:cNvPr>
@@ -11293,7 +11350,7 @@
           <p:cNvPr id="4" name="">
             <a:extLst xmlns:a="http://schemas.openxmlformats.org/drawingml/2006/main">
               <a:ext uri="{FF2B5EF4-FFF2-40B4-BE49-F238E27FC236}">
-                <a16:creationId xmlns:a16="http://schemas.microsoft.com/office/drawing/2014/main" id="{E0202DCA-D551-4441-A135-775C70BCB017}"/>
+                <a16:creationId xmlns:a16="http://schemas.microsoft.com/office/drawing/2014/main" id="{A407DDB2-5224-4130-A775-FA9C6A5164B2}"/>
               </a:ext>
             </a:extLst>
           </p:cNvPr>
@@ -11323,7 +11380,7 @@
           <p:cNvPr id="5" name="">
             <a:extLst xmlns:a="http://schemas.openxmlformats.org/drawingml/2006/main">
               <a:ext uri="{FF2B5EF4-FFF2-40B4-BE49-F238E27FC236}">
-                <a16:creationId xmlns:a16="http://schemas.microsoft.com/office/drawing/2014/main" id="{19655339-C4DE-45A3-8E1D-0A3509208AE5}"/>
+                <a16:creationId xmlns:a16="http://schemas.microsoft.com/office/drawing/2014/main" id="{E254BDB2-EBED-4AD8-8016-31371F5BF328}"/>
               </a:ext>
             </a:extLst>
           </p:cNvPr>
@@ -11353,7 +11410,7 @@
           <p:cNvPr id="6" name="Nguyen, Backes e Stock (2022), Tabela 3 ">
             <a:extLst xmlns:a="http://schemas.openxmlformats.org/drawingml/2006/main">
               <a:ext uri="{FF2B5EF4-FFF2-40B4-BE49-F238E27FC236}">
-                <a16:creationId xmlns:a16="http://schemas.microsoft.com/office/drawing/2014/main" id="{D8650CD4-18A4-479F-A579-12C5D0322DBB}"/>
+                <a16:creationId xmlns:a16="http://schemas.microsoft.com/office/drawing/2014/main" id="{942BD5D6-9B84-4495-AE3B-B0050A8FC2EF}"/>
               </a:ext>
             </a:extLst>
           </p:cNvPr>
@@ -11365,7 +11422,7 @@
         <p:spPr>
           <a:xfrm xmlns:a="http://schemas.openxmlformats.org/drawingml/2006/main">
             <a:off x="609600" y="6477000"/>
-            <a:ext cx="10096500" cy="228600"/>
+            <a:ext cx="9982200" cy="228600"/>
           </a:xfrm>
           <a:prstGeom xmlns:a="http://schemas.openxmlformats.org/drawingml/2006/main" prst="rect">
             <a:avLst/>
@@ -11382,7 +11439,7 @@
           <a:lstStyle xmlns:a="http://schemas.openxmlformats.org/drawingml/2006/main"/>
           <a:p xmlns:a="http://schemas.openxmlformats.org/drawingml/2006/main">
             <a:pPr algn="l">
-              <a:defRPr sz="1125" b="0">
+              <a:defRPr sz="1200" b="0">
                 <a:solidFill>
                   <a:srgbClr val="596B7A"/>
                 </a:solidFill>
@@ -11392,7 +11449,7 @@
               </a:defRPr>
             </a:pPr>
             <a:r>
-              <a:rPr sz="1125" b="0">
+              <a:rPr sz="1200" b="0">
                 <a:solidFill>
                   <a:srgbClr val="596B7A"/>
                 </a:solidFill>
@@ -11410,7 +11467,7 @@
           <p:cNvPr id="7" name="16 / 23">
             <a:extLst xmlns:a="http://schemas.openxmlformats.org/drawingml/2006/main">
               <a:ext uri="{FF2B5EF4-FFF2-40B4-BE49-F238E27FC236}">
-                <a16:creationId xmlns:a16="http://schemas.microsoft.com/office/drawing/2014/main" id="{B5AF86CB-230C-4309-A861-86D253B71E27}"/>
+                <a16:creationId xmlns:a16="http://schemas.microsoft.com/office/drawing/2014/main" id="{562C0D62-2AEF-4284-9966-5477A0B2387F}"/>
               </a:ext>
             </a:extLst>
           </p:cNvPr>
@@ -11439,7 +11496,7 @@
           <a:lstStyle xmlns:a="http://schemas.openxmlformats.org/drawingml/2006/main"/>
           <a:p xmlns:a="http://schemas.openxmlformats.org/drawingml/2006/main">
             <a:pPr algn="r">
-              <a:defRPr sz="1125" b="0">
+              <a:defRPr sz="1200" b="0">
                 <a:solidFill>
                   <a:srgbClr val="596B7A"/>
                 </a:solidFill>
@@ -11449,7 +11506,7 @@
               </a:defRPr>
             </a:pPr>
             <a:r>
-              <a:rPr sz="1125" b="0">
+              <a:rPr sz="1200" b="0">
                 <a:solidFill>
                   <a:srgbClr val="596B7A"/>
                 </a:solidFill>
@@ -12563,7 +12620,7 @@
           <p:cNvPr id="9" name="2.181">
             <a:extLst xmlns:a="http://schemas.openxmlformats.org/drawingml/2006/main">
               <a:ext uri="{FF2B5EF4-FFF2-40B4-BE49-F238E27FC236}">
-                <a16:creationId xmlns:a16="http://schemas.microsoft.com/office/drawing/2014/main" id="{932CAEA8-1A4F-4447-91D0-DD94BDC32425}"/>
+                <a16:creationId xmlns:a16="http://schemas.microsoft.com/office/drawing/2014/main" id="{7E52C91B-229E-46C9-8694-DE650B6A9EAC}"/>
               </a:ext>
             </a:extLst>
           </p:cNvPr>
@@ -12620,7 +12677,7 @@
           <p:cNvPr id="10" name="antes de consentir (16,67%)">
             <a:extLst xmlns:a="http://schemas.openxmlformats.org/drawingml/2006/main">
               <a:ext uri="{FF2B5EF4-FFF2-40B4-BE49-F238E27FC236}">
-                <a16:creationId xmlns:a16="http://schemas.microsoft.com/office/drawing/2014/main" id="{B4A1921A-4DA4-414E-B4BA-EBE7A43BEA1C}"/>
+                <a16:creationId xmlns:a16="http://schemas.microsoft.com/office/drawing/2014/main" id="{66140BF3-2CB4-4C9F-B58B-9AAB5959D1C3}"/>
               </a:ext>
             </a:extLst>
           </p:cNvPr>
@@ -12677,7 +12734,7 @@
           <p:cNvPr id="11" name="1.084">
             <a:extLst xmlns:a="http://schemas.openxmlformats.org/drawingml/2006/main">
               <a:ext uri="{FF2B5EF4-FFF2-40B4-BE49-F238E27FC236}">
-                <a16:creationId xmlns:a16="http://schemas.microsoft.com/office/drawing/2014/main" id="{04FC4705-E661-40A6-BF08-65A25CD98FFD}"/>
+                <a16:creationId xmlns:a16="http://schemas.microsoft.com/office/drawing/2014/main" id="{125BFEA5-2BA9-4B6E-8696-48F8F3459AAA}"/>
               </a:ext>
             </a:extLst>
           </p:cNvPr>
@@ -12734,7 +12791,7 @@
           <p:cNvPr id="12" name="sem opt-out (8,28%)">
             <a:extLst xmlns:a="http://schemas.openxmlformats.org/drawingml/2006/main">
               <a:ext uri="{FF2B5EF4-FFF2-40B4-BE49-F238E27FC236}">
-                <a16:creationId xmlns:a16="http://schemas.microsoft.com/office/drawing/2014/main" id="{0319431E-7032-4E41-803C-DE1330A742F7}"/>
+                <a16:creationId xmlns:a16="http://schemas.microsoft.com/office/drawing/2014/main" id="{B2EC0AD8-D5C7-44DC-AAD2-3D5F4371634C}"/>
               </a:ext>
             </a:extLst>
           </p:cNvPr>
@@ -12791,7 +12848,7 @@
           <p:cNvPr id="13" name="134">
             <a:extLst xmlns:a="http://schemas.openxmlformats.org/drawingml/2006/main">
               <a:ext uri="{FF2B5EF4-FFF2-40B4-BE49-F238E27FC236}">
-                <a16:creationId xmlns:a16="http://schemas.microsoft.com/office/drawing/2014/main" id="{21FFFC06-BDCE-4DD8-9927-B3410219EDCA}"/>
+                <a16:creationId xmlns:a16="http://schemas.microsoft.com/office/drawing/2014/main" id="{F9E3C1E7-2674-44B5-9D33-F31BDD9D0E8E}"/>
               </a:ext>
             </a:extLst>
           </p:cNvPr>
@@ -12848,7 +12905,7 @@
           <p:cNvPr id="14" name="enviam após a recusa">
             <a:extLst xmlns:a="http://schemas.openxmlformats.org/drawingml/2006/main">
               <a:ext uri="{FF2B5EF4-FFF2-40B4-BE49-F238E27FC236}">
-                <a16:creationId xmlns:a16="http://schemas.microsoft.com/office/drawing/2014/main" id="{85377164-62D8-4CF0-B300-9FDB5B6DE699}"/>
+                <a16:creationId xmlns:a16="http://schemas.microsoft.com/office/drawing/2014/main" id="{4C816F9A-4E62-4043-BDE1-66DE9C6926C4}"/>
               </a:ext>
             </a:extLst>
           </p:cNvPr>
@@ -12905,7 +12962,7 @@
           <p:cNvPr id="15" name="Categorias sobrepostas. Tabela: % de cad">
             <a:extLst xmlns:a="http://schemas.openxmlformats.org/drawingml/2006/main">
               <a:ext uri="{FF2B5EF4-FFF2-40B4-BE49-F238E27FC236}">
-                <a16:creationId xmlns:a16="http://schemas.microsoft.com/office/drawing/2014/main" id="{CE0E6F08-CA53-46EF-AC6E-63C0DBB91E01}"/>
+                <a16:creationId xmlns:a16="http://schemas.microsoft.com/office/drawing/2014/main" id="{DEF9EA41-1E1F-44C2-8098-BF2E660CA7E2}"/>
               </a:ext>
             </a:extLst>
           </p:cNvPr>
@@ -12960,7 +13017,7 @@
     </p:spTree>
     <p:extLst>
       <p:ext uri="{BB962C8B-B14F-4D97-AF65-F5344CB8AC3E}">
-        <p14:creationId xmlns:p14="http://schemas.microsoft.com/office/powerpoint/2010/main" val="2042131559"/>
+        <p14:creationId xmlns:p14="http://schemas.microsoft.com/office/powerpoint/2010/main" val="13061198"/>
       </p:ext>
     </p:extLst>
   </p:cSld>
@@ -12991,7 +13048,7 @@
           <p:cNvPr id="16" name="">
             <a:extLst xmlns:a="http://schemas.openxmlformats.org/drawingml/2006/main">
               <a:ext uri="{FF2B5EF4-FFF2-40B4-BE49-F238E27FC236}">
-                <a16:creationId xmlns:a16="http://schemas.microsoft.com/office/drawing/2014/main" id="{AC6F0CA6-225F-4CAB-83CA-62B580536FE5}"/>
+                <a16:creationId xmlns:a16="http://schemas.microsoft.com/office/drawing/2014/main" id="{78A7D088-D45E-418E-BD88-38354257EACF}"/>
               </a:ext>
             </a:extLst>
           </p:cNvPr>
@@ -13021,7 +13078,7 @@
           <p:cNvPr id="2" name="RESULTADOS">
             <a:extLst xmlns:a="http://schemas.openxmlformats.org/drawingml/2006/main">
               <a:ext uri="{FF2B5EF4-FFF2-40B4-BE49-F238E27FC236}">
-                <a16:creationId xmlns:a16="http://schemas.microsoft.com/office/drawing/2014/main" id="{A196C8C4-C31F-400A-A196-0A1B8EFC3311}"/>
+                <a16:creationId xmlns:a16="http://schemas.microsoft.com/office/drawing/2014/main" id="{B3E5D3B8-4B55-47DF-8936-268210615F47}"/>
               </a:ext>
             </a:extLst>
           </p:cNvPr>
@@ -13078,7 +13135,7 @@
           <p:cNvPr id="3" name="Envio sem aviso: destinos e tipo de dado">
             <a:extLst xmlns:a="http://schemas.openxmlformats.org/drawingml/2006/main">
               <a:ext uri="{FF2B5EF4-FFF2-40B4-BE49-F238E27FC236}">
-                <a16:creationId xmlns:a16="http://schemas.microsoft.com/office/drawing/2014/main" id="{DCCC9F5C-6956-473C-BC21-47F9CA3E79F9}"/>
+                <a16:creationId xmlns:a16="http://schemas.microsoft.com/office/drawing/2014/main" id="{A0D15044-86A1-41FD-801C-878CC99F8451}"/>
               </a:ext>
             </a:extLst>
           </p:cNvPr>
@@ -13135,7 +13192,7 @@
           <p:cNvPr id="4" name="">
             <a:extLst xmlns:a="http://schemas.openxmlformats.org/drawingml/2006/main">
               <a:ext uri="{FF2B5EF4-FFF2-40B4-BE49-F238E27FC236}">
-                <a16:creationId xmlns:a16="http://schemas.microsoft.com/office/drawing/2014/main" id="{D482CDB5-5B88-473C-81F8-C887834A5B85}"/>
+                <a16:creationId xmlns:a16="http://schemas.microsoft.com/office/drawing/2014/main" id="{082A7947-547A-4010-8FB0-1BABE4C65DD0}"/>
               </a:ext>
             </a:extLst>
           </p:cNvPr>
@@ -13165,7 +13222,7 @@
           <p:cNvPr id="5" name="">
             <a:extLst xmlns:a="http://schemas.openxmlformats.org/drawingml/2006/main">
               <a:ext uri="{FF2B5EF4-FFF2-40B4-BE49-F238E27FC236}">
-                <a16:creationId xmlns:a16="http://schemas.microsoft.com/office/drawing/2014/main" id="{09B76271-BE7F-4CA8-99C8-15AF66F70C56}"/>
+                <a16:creationId xmlns:a16="http://schemas.microsoft.com/office/drawing/2014/main" id="{5D0070C3-313B-4F67-A6E2-1AA3195E4CEB}"/>
               </a:ext>
             </a:extLst>
           </p:cNvPr>
@@ -13195,7 +13252,7 @@
           <p:cNvPr id="6" name="Nguyen, Backes e Stock (2022), Figura 5,">
             <a:extLst xmlns:a="http://schemas.openxmlformats.org/drawingml/2006/main">
               <a:ext uri="{FF2B5EF4-FFF2-40B4-BE49-F238E27FC236}">
-                <a16:creationId xmlns:a16="http://schemas.microsoft.com/office/drawing/2014/main" id="{455A753C-E177-4220-BB7D-2BA5C7365502}"/>
+                <a16:creationId xmlns:a16="http://schemas.microsoft.com/office/drawing/2014/main" id="{B427BF07-3D7F-46D7-AFC0-A07A450F4A22}"/>
               </a:ext>
             </a:extLst>
           </p:cNvPr>
@@ -13207,7 +13264,7 @@
         <p:spPr>
           <a:xfrm xmlns:a="http://schemas.openxmlformats.org/drawingml/2006/main">
             <a:off x="609600" y="6477000"/>
-            <a:ext cx="10096500" cy="228600"/>
+            <a:ext cx="9982200" cy="228600"/>
           </a:xfrm>
           <a:prstGeom xmlns:a="http://schemas.openxmlformats.org/drawingml/2006/main" prst="rect">
             <a:avLst/>
@@ -13224,7 +13281,7 @@
           <a:lstStyle xmlns:a="http://schemas.openxmlformats.org/drawingml/2006/main"/>
           <a:p xmlns:a="http://schemas.openxmlformats.org/drawingml/2006/main">
             <a:pPr algn="l">
-              <a:defRPr sz="1125" b="0">
+              <a:defRPr sz="1200" b="0">
                 <a:solidFill>
                   <a:srgbClr val="596B7A"/>
                 </a:solidFill>
@@ -13234,7 +13291,7 @@
               </a:defRPr>
             </a:pPr>
             <a:r>
-              <a:rPr sz="1125" b="0">
+              <a:rPr sz="1200" b="0">
                 <a:solidFill>
                   <a:srgbClr val="596B7A"/>
                 </a:solidFill>
@@ -13252,7 +13309,7 @@
           <p:cNvPr id="7" name="17 / 23">
             <a:extLst xmlns:a="http://schemas.openxmlformats.org/drawingml/2006/main">
               <a:ext uri="{FF2B5EF4-FFF2-40B4-BE49-F238E27FC236}">
-                <a16:creationId xmlns:a16="http://schemas.microsoft.com/office/drawing/2014/main" id="{9A14CA18-2D53-4CFE-B3EC-EA8054272AF1}"/>
+                <a16:creationId xmlns:a16="http://schemas.microsoft.com/office/drawing/2014/main" id="{A75760A1-EE7C-4021-8AC3-AD8B47A48849}"/>
               </a:ext>
             </a:extLst>
           </p:cNvPr>
@@ -13281,7 +13338,7 @@
           <a:lstStyle xmlns:a="http://schemas.openxmlformats.org/drawingml/2006/main"/>
           <a:p xmlns:a="http://schemas.openxmlformats.org/drawingml/2006/main">
             <a:pPr algn="r">
-              <a:defRPr sz="1125" b="0">
+              <a:defRPr sz="1200" b="0">
                 <a:solidFill>
                   <a:srgbClr val="596B7A"/>
                 </a:solidFill>
@@ -13291,7 +13348,7 @@
               </a:defRPr>
             </a:pPr>
             <a:r>
-              <a:rPr sz="1125" b="0">
+              <a:rPr sz="1200" b="0">
                 <a:solidFill>
                   <a:srgbClr val="596B7A"/>
                 </a:solidFill>
@@ -13313,13 +13370,13 @@
           <p:nvPr/>
         </p:nvPicPr>
         <p:blipFill>
-          <a:blip xmlns:r="http://schemas.openxmlformats.org/officeDocument/2006/relationships" xmlns:a="http://schemas.openxmlformats.org/drawingml/2006/main" r:embed="R9c8848577bc04e1c"/>
+          <a:blip xmlns:r="http://schemas.openxmlformats.org/officeDocument/2006/relationships" xmlns:a="http://schemas.openxmlformats.org/drawingml/2006/main" r:embed="R14db5c59682d4e2a"/>
           <a:stretch xmlns:a="http://schemas.openxmlformats.org/drawingml/2006/main"/>
         </p:blipFill>
         <p:spPr>
           <a:xfrm xmlns:a="http://schemas.openxmlformats.org/drawingml/2006/main">
-            <a:off x="609600" y="2065676"/>
-            <a:ext cx="7067550" cy="3012398"/>
+            <a:off x="609600" y="2100671"/>
+            <a:ext cx="7067550" cy="2942409"/>
           </a:xfrm>
           <a:prstGeom xmlns:a="http://schemas.openxmlformats.org/drawingml/2006/main" prst="rect">
             <a:avLst/>
@@ -13331,7 +13388,7 @@
           <p:cNvPr id="9" name="Figura 5 do artigo: dez domínios publici">
             <a:extLst xmlns:a="http://schemas.openxmlformats.org/drawingml/2006/main">
               <a:ext uri="{FF2B5EF4-FFF2-40B4-BE49-F238E27FC236}">
-                <a16:creationId xmlns:a16="http://schemas.microsoft.com/office/drawing/2014/main" id="{A0CCE998-810A-4270-B5F8-A0B0E2B7E063}"/>
+                <a16:creationId xmlns:a16="http://schemas.microsoft.com/office/drawing/2014/main" id="{AD592A32-9308-4FD4-B574-0ED3620213DB}"/>
               </a:ext>
             </a:extLst>
           </p:cNvPr>
@@ -13411,7 +13468,7 @@
           <p:cNvPr id="10" name="">
             <a:extLst xmlns:a="http://schemas.openxmlformats.org/drawingml/2006/main">
               <a:ext uri="{FF2B5EF4-FFF2-40B4-BE49-F238E27FC236}">
-                <a16:creationId xmlns:a16="http://schemas.microsoft.com/office/drawing/2014/main" id="{E6F06DE4-D0FE-40B4-A696-E42DABE082C5}"/>
+                <a16:creationId xmlns:a16="http://schemas.microsoft.com/office/drawing/2014/main" id="{36418315-9301-4BE8-B8CA-06B920D95A48}"/>
               </a:ext>
             </a:extLst>
           </p:cNvPr>
@@ -13441,7 +13498,7 @@
           <p:cNvPr id="11" name="14.420">
             <a:extLst xmlns:a="http://schemas.openxmlformats.org/drawingml/2006/main">
               <a:ext uri="{FF2B5EF4-FFF2-40B4-BE49-F238E27FC236}">
-                <a16:creationId xmlns:a16="http://schemas.microsoft.com/office/drawing/2014/main" id="{C8EAE9DA-3B7A-4227-968E-013686229188}"/>
+                <a16:creationId xmlns:a16="http://schemas.microsoft.com/office/drawing/2014/main" id="{74E1AACB-8643-46D4-81B8-A54765351964}"/>
               </a:ext>
             </a:extLst>
           </p:cNvPr>
@@ -13498,7 +13555,7 @@
           <p:cNvPr id="12" name="apps enviaram dados&#10;para facebook.com&#10;(4">
             <a:extLst xmlns:a="http://schemas.openxmlformats.org/drawingml/2006/main">
               <a:ext uri="{FF2B5EF4-FFF2-40B4-BE49-F238E27FC236}">
-                <a16:creationId xmlns:a16="http://schemas.microsoft.com/office/drawing/2014/main" id="{8F84CC78-B518-4142-9480-42B7BA763B27}"/>
+                <a16:creationId xmlns:a16="http://schemas.microsoft.com/office/drawing/2014/main" id="{D2BF67C0-8CF1-4BEA-8EBC-DB4927A6AD7B}"/>
               </a:ext>
             </a:extLst>
           </p:cNvPr>
@@ -13601,7 +13658,7 @@
           <p:cNvPr id="13" name="">
             <a:extLst xmlns:a="http://schemas.openxmlformats.org/drawingml/2006/main">
               <a:ext uri="{FF2B5EF4-FFF2-40B4-BE49-F238E27FC236}">
-                <a16:creationId xmlns:a16="http://schemas.microsoft.com/office/drawing/2014/main" id="{E4874A4E-AF45-4370-AA75-D4E6E28A9303}"/>
+                <a16:creationId xmlns:a16="http://schemas.microsoft.com/office/drawing/2014/main" id="{151A5592-0B9C-4838-BEFD-DBD30E515CD5}"/>
               </a:ext>
             </a:extLst>
           </p:cNvPr>
@@ -13631,7 +13688,7 @@
           <p:cNvPr id="14" name="29.952">
             <a:extLst xmlns:a="http://schemas.openxmlformats.org/drawingml/2006/main">
               <a:ext uri="{FF2B5EF4-FFF2-40B4-BE49-F238E27FC236}">
-                <a16:creationId xmlns:a16="http://schemas.microsoft.com/office/drawing/2014/main" id="{FDECACBB-406D-4265-8B79-501417B42BFE}"/>
+                <a16:creationId xmlns:a16="http://schemas.microsoft.com/office/drawing/2014/main" id="{696FA197-DE76-4AEB-AEE6-6EB2BBAC14B4}"/>
               </a:ext>
             </a:extLst>
           </p:cNvPr>
@@ -13688,7 +13745,7 @@
           <p:cNvPr id="15" name="enviaram o AAID.&#10;99,31% dos 30.160 apps&#10;">
             <a:extLst xmlns:a="http://schemas.openxmlformats.org/drawingml/2006/main">
               <a:ext uri="{FF2B5EF4-FFF2-40B4-BE49-F238E27FC236}">
-                <a16:creationId xmlns:a16="http://schemas.microsoft.com/office/drawing/2014/main" id="{0A0CF09E-1072-468E-A0A2-21CDC420DE0F}"/>
+                <a16:creationId xmlns:a16="http://schemas.microsoft.com/office/drawing/2014/main" id="{C740ECDB-F337-4807-8863-9FEE62892A96}"/>
               </a:ext>
             </a:extLst>
           </p:cNvPr>
@@ -13789,7 +13846,7 @@
     </p:spTree>
     <p:extLst>
       <p:ext uri="{BB962C8B-B14F-4D97-AF65-F5344CB8AC3E}">
-        <p14:creationId xmlns:p14="http://schemas.microsoft.com/office/powerpoint/2010/main" val="2096920396"/>
+        <p14:creationId xmlns:p14="http://schemas.microsoft.com/office/powerpoint/2010/main" val="1121514267"/>
       </p:ext>
     </p:extLst>
   </p:cSld>
@@ -13820,7 +13877,7 @@
           <p:cNvPr id="25" name="">
             <a:extLst xmlns:a="http://schemas.openxmlformats.org/drawingml/2006/main">
               <a:ext uri="{FF2B5EF4-FFF2-40B4-BE49-F238E27FC236}">
-                <a16:creationId xmlns:a16="http://schemas.microsoft.com/office/drawing/2014/main" id="{53CF0B4F-0DBA-4040-A8EF-29D9AE2687FA}"/>
+                <a16:creationId xmlns:a16="http://schemas.microsoft.com/office/drawing/2014/main" id="{CB1E1F3C-035E-4C0E-901B-8874443323BA}"/>
               </a:ext>
             </a:extLst>
           </p:cNvPr>
@@ -13850,7 +13907,7 @@
           <p:cNvPr id="2" name="ANÁLISE DA SEÇÃO 5">
             <a:extLst xmlns:a="http://schemas.openxmlformats.org/drawingml/2006/main">
               <a:ext uri="{FF2B5EF4-FFF2-40B4-BE49-F238E27FC236}">
-                <a16:creationId xmlns:a16="http://schemas.microsoft.com/office/drawing/2014/main" id="{B8D8AA52-9931-47F1-AE57-9B6212E8C850}"/>
+                <a16:creationId xmlns:a16="http://schemas.microsoft.com/office/drawing/2014/main" id="{CD6BCDB9-BADC-461B-BB84-C07ADEF566BD}"/>
               </a:ext>
             </a:extLst>
           </p:cNvPr>
@@ -13907,7 +13964,7 @@
           <p:cNvPr id="3" name="Notificação: respostas e mudanças observ">
             <a:extLst xmlns:a="http://schemas.openxmlformats.org/drawingml/2006/main">
               <a:ext uri="{FF2B5EF4-FFF2-40B4-BE49-F238E27FC236}">
-                <a16:creationId xmlns:a16="http://schemas.microsoft.com/office/drawing/2014/main" id="{64484EB8-36A9-4D73-93ED-A4258121B1B9}"/>
+                <a16:creationId xmlns:a16="http://schemas.microsoft.com/office/drawing/2014/main" id="{8121674E-A67C-4240-AA8E-DBBF8A549408}"/>
               </a:ext>
             </a:extLst>
           </p:cNvPr>
@@ -13964,7 +14021,7 @@
           <p:cNvPr id="4" name="">
             <a:extLst xmlns:a="http://schemas.openxmlformats.org/drawingml/2006/main">
               <a:ext uri="{FF2B5EF4-FFF2-40B4-BE49-F238E27FC236}">
-                <a16:creationId xmlns:a16="http://schemas.microsoft.com/office/drawing/2014/main" id="{37BE5C4D-4408-4798-B1B4-156FE3A3BFCD}"/>
+                <a16:creationId xmlns:a16="http://schemas.microsoft.com/office/drawing/2014/main" id="{14F3AB56-0AB4-446F-A624-3CF55473E06E}"/>
               </a:ext>
             </a:extLst>
           </p:cNvPr>
@@ -13994,7 +14051,7 @@
           <p:cNvPr id="5" name="">
             <a:extLst xmlns:a="http://schemas.openxmlformats.org/drawingml/2006/main">
               <a:ext uri="{FF2B5EF4-FFF2-40B4-BE49-F238E27FC236}">
-                <a16:creationId xmlns:a16="http://schemas.microsoft.com/office/drawing/2014/main" id="{10CA6463-42A4-4840-91D2-09AB730FBFD5}"/>
+                <a16:creationId xmlns:a16="http://schemas.microsoft.com/office/drawing/2014/main" id="{9154DF5E-113F-40D2-BD06-79F6FED733D0}"/>
               </a:ext>
             </a:extLst>
           </p:cNvPr>
@@ -14024,7 +14081,7 @@
           <p:cNvPr id="6" name="Nguyen, Backes e Stock (2022), Seção 5, ">
             <a:extLst xmlns:a="http://schemas.openxmlformats.org/drawingml/2006/main">
               <a:ext uri="{FF2B5EF4-FFF2-40B4-BE49-F238E27FC236}">
-                <a16:creationId xmlns:a16="http://schemas.microsoft.com/office/drawing/2014/main" id="{B2C1BF42-6E81-4B24-ABFD-F2FFB450D060}"/>
+                <a16:creationId xmlns:a16="http://schemas.microsoft.com/office/drawing/2014/main" id="{4D67C8AB-5AC7-41D9-8BF0-9A172BFED0B2}"/>
               </a:ext>
             </a:extLst>
           </p:cNvPr>
@@ -14036,7 +14093,7 @@
         <p:spPr>
           <a:xfrm xmlns:a="http://schemas.openxmlformats.org/drawingml/2006/main">
             <a:off x="609600" y="6477000"/>
-            <a:ext cx="10096500" cy="228600"/>
+            <a:ext cx="9982200" cy="228600"/>
           </a:xfrm>
           <a:prstGeom xmlns:a="http://schemas.openxmlformats.org/drawingml/2006/main" prst="rect">
             <a:avLst/>
@@ -14053,7 +14110,7 @@
           <a:lstStyle xmlns:a="http://schemas.openxmlformats.org/drawingml/2006/main"/>
           <a:p xmlns:a="http://schemas.openxmlformats.org/drawingml/2006/main">
             <a:pPr algn="l">
-              <a:defRPr sz="1125" b="0">
+              <a:defRPr sz="1200" b="0">
                 <a:solidFill>
                   <a:srgbClr val="596B7A"/>
                 </a:solidFill>
@@ -14063,7 +14120,7 @@
               </a:defRPr>
             </a:pPr>
             <a:r>
-              <a:rPr sz="1125" b="0">
+              <a:rPr sz="1200" b="0">
                 <a:solidFill>
                   <a:srgbClr val="596B7A"/>
                 </a:solidFill>
@@ -14081,7 +14138,7 @@
           <p:cNvPr id="7" name="18 / 23">
             <a:extLst xmlns:a="http://schemas.openxmlformats.org/drawingml/2006/main">
               <a:ext uri="{FF2B5EF4-FFF2-40B4-BE49-F238E27FC236}">
-                <a16:creationId xmlns:a16="http://schemas.microsoft.com/office/drawing/2014/main" id="{8313FD87-FADE-480F-8478-87289185D2F0}"/>
+                <a16:creationId xmlns:a16="http://schemas.microsoft.com/office/drawing/2014/main" id="{B65E0616-90BB-4EA1-BAD2-63CD154B4568}"/>
               </a:ext>
             </a:extLst>
           </p:cNvPr>
@@ -14110,7 +14167,7 @@
           <a:lstStyle xmlns:a="http://schemas.openxmlformats.org/drawingml/2006/main"/>
           <a:p xmlns:a="http://schemas.openxmlformats.org/drawingml/2006/main">
             <a:pPr algn="r">
-              <a:defRPr sz="1125" b="0">
+              <a:defRPr sz="1200" b="0">
                 <a:solidFill>
                   <a:srgbClr val="596B7A"/>
                 </a:solidFill>
@@ -14120,7 +14177,7 @@
               </a:defRPr>
             </a:pPr>
             <a:r>
-              <a:rPr sz="1125" b="0">
+              <a:rPr sz="1200" b="0">
                 <a:solidFill>
                   <a:srgbClr val="596B7A"/>
                 </a:solidFill>
@@ -14138,7 +14195,7 @@
           <p:cNvPr id="8" name="1.127">
             <a:extLst xmlns:a="http://schemas.openxmlformats.org/drawingml/2006/main">
               <a:ext uri="{FF2B5EF4-FFF2-40B4-BE49-F238E27FC236}">
-                <a16:creationId xmlns:a16="http://schemas.microsoft.com/office/drawing/2014/main" id="{728803D6-BDFD-45D2-B0DA-33A27E74F860}"/>
+                <a16:creationId xmlns:a16="http://schemas.microsoft.com/office/drawing/2014/main" id="{7C5F3227-0AF1-4DDA-AE62-648941246751}"/>
               </a:ext>
             </a:extLst>
           </p:cNvPr>
@@ -14195,7 +14252,7 @@
           <p:cNvPr id="9" name="desenvolvedores notificados">
             <a:extLst xmlns:a="http://schemas.openxmlformats.org/drawingml/2006/main">
               <a:ext uri="{FF2B5EF4-FFF2-40B4-BE49-F238E27FC236}">
-                <a16:creationId xmlns:a16="http://schemas.microsoft.com/office/drawing/2014/main" id="{383820DC-1939-4695-A086-D851BE042B7D}"/>
+                <a16:creationId xmlns:a16="http://schemas.microsoft.com/office/drawing/2014/main" id="{9E313395-CB9B-495A-8167-08C90F983B70}"/>
               </a:ext>
             </a:extLst>
           </p:cNvPr>
@@ -14252,7 +14309,7 @@
           <p:cNvPr id="10" name="1.859">
             <a:extLst xmlns:a="http://schemas.openxmlformats.org/drawingml/2006/main">
               <a:ext uri="{FF2B5EF4-FFF2-40B4-BE49-F238E27FC236}">
-                <a16:creationId xmlns:a16="http://schemas.microsoft.com/office/drawing/2014/main" id="{7FAAAE4B-FF51-433F-AD06-A07AA458377E}"/>
+                <a16:creationId xmlns:a16="http://schemas.microsoft.com/office/drawing/2014/main" id="{DF7D3A0E-D3AA-4C19-A465-BAF518A59593}"/>
               </a:ext>
             </a:extLst>
           </p:cNvPr>
@@ -14309,7 +14366,7 @@
           <p:cNvPr id="11" name="aplicativos abrangidos">
             <a:extLst xmlns:a="http://schemas.openxmlformats.org/drawingml/2006/main">
               <a:ext uri="{FF2B5EF4-FFF2-40B4-BE49-F238E27FC236}">
-                <a16:creationId xmlns:a16="http://schemas.microsoft.com/office/drawing/2014/main" id="{1E8D894D-312F-40FB-9937-3E4A6A074D4D}"/>
+                <a16:creationId xmlns:a16="http://schemas.microsoft.com/office/drawing/2014/main" id="{D3C5EBBD-6785-4568-8F3C-9EC7AD7D58E6}"/>
               </a:ext>
             </a:extLst>
           </p:cNvPr>
@@ -14366,7 +14423,7 @@
           <p:cNvPr id="12" name="43">
             <a:extLst xmlns:a="http://schemas.openxmlformats.org/drawingml/2006/main">
               <a:ext uri="{FF2B5EF4-FFF2-40B4-BE49-F238E27FC236}">
-                <a16:creationId xmlns:a16="http://schemas.microsoft.com/office/drawing/2014/main" id="{A8E17D1F-712C-4BF2-9153-1C102E1BE34B}"/>
+                <a16:creationId xmlns:a16="http://schemas.microsoft.com/office/drawing/2014/main" id="{C7930209-8BD1-4295-AE98-EA96D4B0B423}"/>
               </a:ext>
             </a:extLst>
           </p:cNvPr>
@@ -14423,7 +14480,7 @@
           <p:cNvPr id="13" name="desenvolvedores responderam">
             <a:extLst xmlns:a="http://schemas.openxmlformats.org/drawingml/2006/main">
               <a:ext uri="{FF2B5EF4-FFF2-40B4-BE49-F238E27FC236}">
-                <a16:creationId xmlns:a16="http://schemas.microsoft.com/office/drawing/2014/main" id="{4A576837-5C32-4CA2-94B0-4537F1510F11}"/>
+                <a16:creationId xmlns:a16="http://schemas.microsoft.com/office/drawing/2014/main" id="{67F56652-7034-4829-A3C4-28E4630291E7}"/>
               </a:ext>
             </a:extLst>
           </p:cNvPr>
@@ -14480,7 +14537,7 @@
           <p:cNvPr id="14" name="">
             <a:extLst xmlns:a="http://schemas.openxmlformats.org/drawingml/2006/main">
               <a:ext uri="{FF2B5EF4-FFF2-40B4-BE49-F238E27FC236}">
-                <a16:creationId xmlns:a16="http://schemas.microsoft.com/office/drawing/2014/main" id="{FAC077D0-DDE2-45B3-B753-FC309D666DF1}"/>
+                <a16:creationId xmlns:a16="http://schemas.microsoft.com/office/drawing/2014/main" id="{5AD70EB2-6123-47F2-9B42-DA9F191DEB25}"/>
               </a:ext>
             </a:extLst>
           </p:cNvPr>
@@ -14510,7 +14567,7 @@
           <p:cNvPr id="15" name="9/14">
             <a:extLst xmlns:a="http://schemas.openxmlformats.org/drawingml/2006/main">
               <a:ext uri="{FF2B5EF4-FFF2-40B4-BE49-F238E27FC236}">
-                <a16:creationId xmlns:a16="http://schemas.microsoft.com/office/drawing/2014/main" id="{976A80E0-55D1-46E5-90F3-C9F9FAD53948}"/>
+                <a16:creationId xmlns:a16="http://schemas.microsoft.com/office/drawing/2014/main" id="{DDC4053E-8CC2-408E-A494-FF768D081475}"/>
               </a:ext>
             </a:extLst>
           </p:cNvPr>
@@ -14567,7 +14624,7 @@
           <p:cNvPr id="16" name="não conheciam os tipos de dado coletados">
             <a:extLst xmlns:a="http://schemas.openxmlformats.org/drawingml/2006/main">
               <a:ext uri="{FF2B5EF4-FFF2-40B4-BE49-F238E27FC236}">
-                <a16:creationId xmlns:a16="http://schemas.microsoft.com/office/drawing/2014/main" id="{E42D3469-F2AB-4553-A85E-7FF697C30837}"/>
+                <a16:creationId xmlns:a16="http://schemas.microsoft.com/office/drawing/2014/main" id="{7AB28E36-2DA6-4821-9CFB-E4784C07128B}"/>
               </a:ext>
             </a:extLst>
           </p:cNvPr>
@@ -14624,7 +14681,7 @@
           <p:cNvPr id="17" name="9/13">
             <a:extLst xmlns:a="http://schemas.openxmlformats.org/drawingml/2006/main">
               <a:ext uri="{FF2B5EF4-FFF2-40B4-BE49-F238E27FC236}">
-                <a16:creationId xmlns:a16="http://schemas.microsoft.com/office/drawing/2014/main" id="{A9E3C397-8691-4874-9D13-A60826D89952}"/>
+                <a16:creationId xmlns:a16="http://schemas.microsoft.com/office/drawing/2014/main" id="{F42AD59C-CF56-4166-8874-09D75E0C277C}"/>
               </a:ext>
             </a:extLst>
           </p:cNvPr>
@@ -14681,7 +14738,7 @@
           <p:cNvPr id="18" name="declararam conhecer os requisitos de con">
             <a:extLst xmlns:a="http://schemas.openxmlformats.org/drawingml/2006/main">
               <a:ext uri="{FF2B5EF4-FFF2-40B4-BE49-F238E27FC236}">
-                <a16:creationId xmlns:a16="http://schemas.microsoft.com/office/drawing/2014/main" id="{43C6748C-4490-495F-AB94-7E4F7AA05D58}"/>
+                <a16:creationId xmlns:a16="http://schemas.microsoft.com/office/drawing/2014/main" id="{7161B4F8-A9BA-4668-8606-FA9367876252}"/>
               </a:ext>
             </a:extLst>
           </p:cNvPr>
@@ -14738,7 +14795,7 @@
           <p:cNvPr id="19" name="6/7">
             <a:extLst xmlns:a="http://schemas.openxmlformats.org/drawingml/2006/main">
               <a:ext uri="{FF2B5EF4-FFF2-40B4-BE49-F238E27FC236}">
-                <a16:creationId xmlns:a16="http://schemas.microsoft.com/office/drawing/2014/main" id="{D4414AF9-29A0-4780-B1CC-B4390CE0D5E0}"/>
+                <a16:creationId xmlns:a16="http://schemas.microsoft.com/office/drawing/2014/main" id="{BC8B45D0-1142-4D93-AF0F-48D4F239AA0B}"/>
               </a:ext>
             </a:extLst>
           </p:cNvPr>
@@ -14795,7 +14852,7 @@
           <p:cNvPr id="20" name="queriam uma ferramenta automatizada de a">
             <a:extLst xmlns:a="http://schemas.openxmlformats.org/drawingml/2006/main">
               <a:ext uri="{FF2B5EF4-FFF2-40B4-BE49-F238E27FC236}">
-                <a16:creationId xmlns:a16="http://schemas.microsoft.com/office/drawing/2014/main" id="{4B4725CB-77F7-47BD-B49F-B5CFE5CEDA38}"/>
+                <a16:creationId xmlns:a16="http://schemas.microsoft.com/office/drawing/2014/main" id="{7F05BCBD-0134-483D-ABE9-5ACAE4AD4D63}"/>
               </a:ext>
             </a:extLst>
           </p:cNvPr>
@@ -14852,7 +14909,7 @@
           <p:cNvPr id="21" name="">
             <a:extLst xmlns:a="http://schemas.openxmlformats.org/drawingml/2006/main">
               <a:ext uri="{FF2B5EF4-FFF2-40B4-BE49-F238E27FC236}">
-                <a16:creationId xmlns:a16="http://schemas.microsoft.com/office/drawing/2014/main" id="{F202A387-2B07-45E3-A0FE-D7452F575FCC}"/>
+                <a16:creationId xmlns:a16="http://schemas.microsoft.com/office/drawing/2014/main" id="{7ACA5040-22CC-431E-8B3B-631C0FEEA8FD}"/>
               </a:ext>
             </a:extLst>
           </p:cNvPr>
@@ -14882,7 +14939,7 @@
           <p:cNvPr id="22" name="147 apps atualizados">
             <a:extLst xmlns:a="http://schemas.openxmlformats.org/drawingml/2006/main">
               <a:ext uri="{FF2B5EF4-FFF2-40B4-BE49-F238E27FC236}">
-                <a16:creationId xmlns:a16="http://schemas.microsoft.com/office/drawing/2014/main" id="{2E05ECEE-3CD7-4CA3-9D44-F76305FEC260}"/>
+                <a16:creationId xmlns:a16="http://schemas.microsoft.com/office/drawing/2014/main" id="{6F622C79-DD02-440B-B40B-2C9A55B055A1}"/>
               </a:ext>
             </a:extLst>
           </p:cNvPr>
@@ -14939,7 +14996,7 @@
           <p:cNvPr id="23" name="63 corrigiram os problemas">
             <a:extLst xmlns:a="http://schemas.openxmlformats.org/drawingml/2006/main">
               <a:ext uri="{FF2B5EF4-FFF2-40B4-BE49-F238E27FC236}">
-                <a16:creationId xmlns:a16="http://schemas.microsoft.com/office/drawing/2014/main" id="{AC189D7B-EB40-4407-8B0E-FA800760975D}"/>
+                <a16:creationId xmlns:a16="http://schemas.microsoft.com/office/drawing/2014/main" id="{131E571C-9339-4C2F-949C-86F4A60A484E}"/>
               </a:ext>
             </a:extLst>
           </p:cNvPr>
@@ -14996,7 +15053,7 @@
           <p:cNvPr id="24" name="84 com potencial violação">
             <a:extLst xmlns:a="http://schemas.openxmlformats.org/drawingml/2006/main">
               <a:ext uri="{FF2B5EF4-FFF2-40B4-BE49-F238E27FC236}">
-                <a16:creationId xmlns:a16="http://schemas.microsoft.com/office/drawing/2014/main" id="{9060F8EF-B169-4033-BE78-C58F958BBA41}"/>
+                <a16:creationId xmlns:a16="http://schemas.microsoft.com/office/drawing/2014/main" id="{86F43B78-5566-4EDA-A1FB-F9BE84159BD8}"/>
               </a:ext>
             </a:extLst>
           </p:cNvPr>
@@ -15051,7 +15108,7 @@
     </p:spTree>
     <p:extLst>
       <p:ext uri="{BB962C8B-B14F-4D97-AF65-F5344CB8AC3E}">
-        <p14:creationId xmlns:p14="http://schemas.microsoft.com/office/powerpoint/2010/main" val="1796425179"/>
+        <p14:creationId xmlns:p14="http://schemas.microsoft.com/office/powerpoint/2010/main" val="620887501"/>
       </p:ext>
     </p:extLst>
   </p:cSld>
@@ -15082,7 +15139,7 @@
           <p:cNvPr id="22" name="">
             <a:extLst xmlns:a="http://schemas.openxmlformats.org/drawingml/2006/main">
               <a:ext uri="{FF2B5EF4-FFF2-40B4-BE49-F238E27FC236}">
-                <a16:creationId xmlns:a16="http://schemas.microsoft.com/office/drawing/2014/main" id="{4401B77E-9FD6-4D8F-9242-AABB7DBBAD77}"/>
+                <a16:creationId xmlns:a16="http://schemas.microsoft.com/office/drawing/2014/main" id="{E4292CB1-B7B4-4DDD-8529-1AC433AF43B9}"/>
               </a:ext>
             </a:extLst>
           </p:cNvPr>
@@ -15112,7 +15169,7 @@
           <p:cNvPr id="2" name="ANÁLISE DA SEÇÃO 6">
             <a:extLst xmlns:a="http://schemas.openxmlformats.org/drawingml/2006/main">
               <a:ext uri="{FF2B5EF4-FFF2-40B4-BE49-F238E27FC236}">
-                <a16:creationId xmlns:a16="http://schemas.microsoft.com/office/drawing/2014/main" id="{0B62CD06-C3F3-4828-AC5C-B9E85B17B81D}"/>
+                <a16:creationId xmlns:a16="http://schemas.microsoft.com/office/drawing/2014/main" id="{8332D20E-C2D9-4520-ABFA-82AB1ABA3EAE}"/>
               </a:ext>
             </a:extLst>
           </p:cNvPr>
@@ -15169,7 +15226,7 @@
           <p:cNvPr id="3" name="Discussão: alcance e implicações dos ach">
             <a:extLst xmlns:a="http://schemas.openxmlformats.org/drawingml/2006/main">
               <a:ext uri="{FF2B5EF4-FFF2-40B4-BE49-F238E27FC236}">
-                <a16:creationId xmlns:a16="http://schemas.microsoft.com/office/drawing/2014/main" id="{33482436-C2A9-458A-81E8-FACEE8CC5315}"/>
+                <a16:creationId xmlns:a16="http://schemas.microsoft.com/office/drawing/2014/main" id="{CE55F430-4A76-4E16-A384-6692A06625AB}"/>
               </a:ext>
             </a:extLst>
           </p:cNvPr>
@@ -15226,7 +15283,7 @@
           <p:cNvPr id="4" name="">
             <a:extLst xmlns:a="http://schemas.openxmlformats.org/drawingml/2006/main">
               <a:ext uri="{FF2B5EF4-FFF2-40B4-BE49-F238E27FC236}">
-                <a16:creationId xmlns:a16="http://schemas.microsoft.com/office/drawing/2014/main" id="{E157FCEA-AE6F-4182-BAFA-71EA40D66182}"/>
+                <a16:creationId xmlns:a16="http://schemas.microsoft.com/office/drawing/2014/main" id="{97152408-C672-4E60-82C4-81B311F599C3}"/>
               </a:ext>
             </a:extLst>
           </p:cNvPr>
@@ -15256,7 +15313,7 @@
           <p:cNvPr id="5" name="">
             <a:extLst xmlns:a="http://schemas.openxmlformats.org/drawingml/2006/main">
               <a:ext uri="{FF2B5EF4-FFF2-40B4-BE49-F238E27FC236}">
-                <a16:creationId xmlns:a16="http://schemas.microsoft.com/office/drawing/2014/main" id="{9442EFE9-07C9-4B09-A739-8D5984761CF7}"/>
+                <a16:creationId xmlns:a16="http://schemas.microsoft.com/office/drawing/2014/main" id="{BD1638C8-DE32-4657-9EF3-F2A40DAC7833}"/>
               </a:ext>
             </a:extLst>
           </p:cNvPr>
@@ -15286,7 +15343,7 @@
           <p:cNvPr id="6" name="Nguyen, Backes e Stock (2022), Seções 6.">
             <a:extLst xmlns:a="http://schemas.openxmlformats.org/drawingml/2006/main">
               <a:ext uri="{FF2B5EF4-FFF2-40B4-BE49-F238E27FC236}">
-                <a16:creationId xmlns:a16="http://schemas.microsoft.com/office/drawing/2014/main" id="{9E77CDF3-8C38-4C39-999D-C63D31F9FE40}"/>
+                <a16:creationId xmlns:a16="http://schemas.microsoft.com/office/drawing/2014/main" id="{F8890959-B1BF-4EBA-895D-1DB4E794F309}"/>
               </a:ext>
             </a:extLst>
           </p:cNvPr>
@@ -15298,7 +15355,7 @@
         <p:spPr>
           <a:xfrm xmlns:a="http://schemas.openxmlformats.org/drawingml/2006/main">
             <a:off x="609600" y="6477000"/>
-            <a:ext cx="10096500" cy="228600"/>
+            <a:ext cx="9982200" cy="228600"/>
           </a:xfrm>
           <a:prstGeom xmlns:a="http://schemas.openxmlformats.org/drawingml/2006/main" prst="rect">
             <a:avLst/>
@@ -15315,7 +15372,7 @@
           <a:lstStyle xmlns:a="http://schemas.openxmlformats.org/drawingml/2006/main"/>
           <a:p xmlns:a="http://schemas.openxmlformats.org/drawingml/2006/main">
             <a:pPr algn="l">
-              <a:defRPr sz="1125" b="0">
+              <a:defRPr sz="1200" b="0">
                 <a:solidFill>
                   <a:srgbClr val="596B7A"/>
                 </a:solidFill>
@@ -15325,7 +15382,7 @@
               </a:defRPr>
             </a:pPr>
             <a:r>
-              <a:rPr sz="1125" b="0">
+              <a:rPr sz="1200" b="0">
                 <a:solidFill>
                   <a:srgbClr val="596B7A"/>
                 </a:solidFill>
@@ -15343,7 +15400,7 @@
           <p:cNvPr id="7" name="19 / 23">
             <a:extLst xmlns:a="http://schemas.openxmlformats.org/drawingml/2006/main">
               <a:ext uri="{FF2B5EF4-FFF2-40B4-BE49-F238E27FC236}">
-                <a16:creationId xmlns:a16="http://schemas.microsoft.com/office/drawing/2014/main" id="{DE99FF24-3BAE-4710-976C-8B8AF4CD6C34}"/>
+                <a16:creationId xmlns:a16="http://schemas.microsoft.com/office/drawing/2014/main" id="{299E9CED-83BB-44F3-AC19-900E5B1B350E}"/>
               </a:ext>
             </a:extLst>
           </p:cNvPr>
@@ -15372,7 +15429,7 @@
           <a:lstStyle xmlns:a="http://schemas.openxmlformats.org/drawingml/2006/main"/>
           <a:p xmlns:a="http://schemas.openxmlformats.org/drawingml/2006/main">
             <a:pPr algn="r">
-              <a:defRPr sz="1125" b="0">
+              <a:defRPr sz="1200" b="0">
                 <a:solidFill>
                   <a:srgbClr val="596B7A"/>
                 </a:solidFill>
@@ -15382,7 +15439,7 @@
               </a:defRPr>
             </a:pPr>
             <a:r>
-              <a:rPr sz="1125" b="0">
+              <a:rPr sz="1200" b="0">
                 <a:solidFill>
                   <a:srgbClr val="596B7A"/>
                 </a:solidFill>
@@ -15400,7 +15457,7 @@
           <p:cNvPr id="8" name="6.1  Alcance das potenciais violações">
             <a:extLst xmlns:a="http://schemas.openxmlformats.org/drawingml/2006/main">
               <a:ext uri="{FF2B5EF4-FFF2-40B4-BE49-F238E27FC236}">
-                <a16:creationId xmlns:a16="http://schemas.microsoft.com/office/drawing/2014/main" id="{29C5559B-BEE3-424B-960C-FB80EEF9A02A}"/>
+                <a16:creationId xmlns:a16="http://schemas.microsoft.com/office/drawing/2014/main" id="{36FB4A1F-9ED6-4644-9517-4BF552B942D9}"/>
               </a:ext>
             </a:extLst>
           </p:cNvPr>
@@ -15457,7 +15514,7 @@
           <p:cNvPr id="9" name="Relaciona os achados empíricos&#10;às prátic">
             <a:extLst xmlns:a="http://schemas.openxmlformats.org/drawingml/2006/main">
               <a:ext uri="{FF2B5EF4-FFF2-40B4-BE49-F238E27FC236}">
-                <a16:creationId xmlns:a16="http://schemas.microsoft.com/office/drawing/2014/main" id="{D8416E1A-BC0A-4EB7-AB3C-ED19EFD9DA50}"/>
+                <a16:creationId xmlns:a16="http://schemas.microsoft.com/office/drawing/2014/main" id="{00ABFDD0-47A3-45B7-801F-EA5B00ED22C1}"/>
               </a:ext>
             </a:extLst>
           </p:cNvPr>
@@ -15537,7 +15594,7 @@
           <p:cNvPr id="10" name="">
             <a:extLst xmlns:a="http://schemas.openxmlformats.org/drawingml/2006/main">
               <a:ext uri="{FF2B5EF4-FFF2-40B4-BE49-F238E27FC236}">
-                <a16:creationId xmlns:a16="http://schemas.microsoft.com/office/drawing/2014/main" id="{0C0409A3-2CEF-4600-8813-AD9A6DC5E476}"/>
+                <a16:creationId xmlns:a16="http://schemas.microsoft.com/office/drawing/2014/main" id="{8655E5B7-5953-4AD5-AEFC-3D09345F11AE}"/>
               </a:ext>
             </a:extLst>
           </p:cNvPr>
@@ -15567,7 +15624,7 @@
           <p:cNvPr id="11" name="6.2  Transparência do tratamento">
             <a:extLst xmlns:a="http://schemas.openxmlformats.org/drawingml/2006/main">
               <a:ext uri="{FF2B5EF4-FFF2-40B4-BE49-F238E27FC236}">
-                <a16:creationId xmlns:a16="http://schemas.microsoft.com/office/drawing/2014/main" id="{09D14DAF-B3CB-4400-BEA7-191D3DCB3099}"/>
+                <a16:creationId xmlns:a16="http://schemas.microsoft.com/office/drawing/2014/main" id="{AB0B2D17-32E1-4058-9EB6-9690317ADCCC}"/>
               </a:ext>
             </a:extLst>
           </p:cNvPr>
@@ -15624,7 +15681,7 @@
           <p:cNvPr id="12" name="Discute a dificuldade de saber&#10;quem rece">
             <a:extLst xmlns:a="http://schemas.openxmlformats.org/drawingml/2006/main">
               <a:ext uri="{FF2B5EF4-FFF2-40B4-BE49-F238E27FC236}">
-                <a16:creationId xmlns:a16="http://schemas.microsoft.com/office/drawing/2014/main" id="{A6BA3B68-A9B2-47D9-8B50-6486FD99BC89}"/>
+                <a16:creationId xmlns:a16="http://schemas.microsoft.com/office/drawing/2014/main" id="{DCF0FC37-E039-4BC8-921E-B74D626F2451}"/>
               </a:ext>
             </a:extLst>
           </p:cNvPr>
@@ -15704,7 +15761,7 @@
           <p:cNvPr id="13" name="">
             <a:extLst xmlns:a="http://schemas.openxmlformats.org/drawingml/2006/main">
               <a:ext uri="{FF2B5EF4-FFF2-40B4-BE49-F238E27FC236}">
-                <a16:creationId xmlns:a16="http://schemas.microsoft.com/office/drawing/2014/main" id="{64990F5F-1BA2-47ED-A169-57CECDF03F42}"/>
+                <a16:creationId xmlns:a16="http://schemas.microsoft.com/office/drawing/2014/main" id="{F87EA44E-6684-45E8-9693-6C5DB427CBC3}"/>
               </a:ext>
             </a:extLst>
           </p:cNvPr>
@@ -15734,7 +15791,7 @@
           <p:cNvPr id="14" name="6.3  Suporte aos desenvolvedores">
             <a:extLst xmlns:a="http://schemas.openxmlformats.org/drawingml/2006/main">
               <a:ext uri="{FF2B5EF4-FFF2-40B4-BE49-F238E27FC236}">
-                <a16:creationId xmlns:a16="http://schemas.microsoft.com/office/drawing/2014/main" id="{961D7986-E5A2-4B41-A363-BAE71DE70269}"/>
+                <a16:creationId xmlns:a16="http://schemas.microsoft.com/office/drawing/2014/main" id="{6CD0ED14-DF05-46E4-BEA7-A93195CAE1A9}"/>
               </a:ext>
             </a:extLst>
           </p:cNvPr>
@@ -15791,7 +15848,7 @@
           <p:cNvPr id="15" name="Defende documentação clara&#10;e ferramentas">
             <a:extLst xmlns:a="http://schemas.openxmlformats.org/drawingml/2006/main">
               <a:ext uri="{FF2B5EF4-FFF2-40B4-BE49-F238E27FC236}">
-                <a16:creationId xmlns:a16="http://schemas.microsoft.com/office/drawing/2014/main" id="{AD8EFFEA-2851-4A8B-988F-EC5EC5BDDDD2}"/>
+                <a16:creationId xmlns:a16="http://schemas.microsoft.com/office/drawing/2014/main" id="{21A41079-5A99-4374-AC6C-8F626F8D8DA4}"/>
               </a:ext>
             </a:extLst>
           </p:cNvPr>
@@ -15871,7 +15928,7 @@
           <p:cNvPr id="16" name="">
             <a:extLst xmlns:a="http://schemas.openxmlformats.org/drawingml/2006/main">
               <a:ext uri="{FF2B5EF4-FFF2-40B4-BE49-F238E27FC236}">
-                <a16:creationId xmlns:a16="http://schemas.microsoft.com/office/drawing/2014/main" id="{6942AB26-DCF5-453B-B655-70787A07C04F}"/>
+                <a16:creationId xmlns:a16="http://schemas.microsoft.com/office/drawing/2014/main" id="{B60DAB8D-C314-4D78-A4BC-61EC7451B0FF}"/>
               </a:ext>
             </a:extLst>
           </p:cNvPr>
@@ -15901,7 +15958,7 @@
           <p:cNvPr id="17" name="EN">
             <a:extLst xmlns:a="http://schemas.openxmlformats.org/drawingml/2006/main">
               <a:ext uri="{FF2B5EF4-FFF2-40B4-BE49-F238E27FC236}">
-                <a16:creationId xmlns:a16="http://schemas.microsoft.com/office/drawing/2014/main" id="{EE7DABB9-0D1B-4CDD-8E52-C8EA5DB02141}"/>
+                <a16:creationId xmlns:a16="http://schemas.microsoft.com/office/drawing/2014/main" id="{C0C44006-C077-40EC-ACF9-77D13D36C4FB}"/>
               </a:ext>
             </a:extLst>
           </p:cNvPr>
@@ -15930,7 +15987,7 @@
           <a:lstStyle xmlns:a="http://schemas.openxmlformats.org/drawingml/2006/main"/>
           <a:p xmlns:a="http://schemas.openxmlformats.org/drawingml/2006/main">
             <a:pPr algn="l">
-              <a:defRPr sz="1125" b="1">
+              <a:defRPr sz="1200" b="1">
                 <a:solidFill>
                   <a:srgbClr val="287967"/>
                 </a:solidFill>
@@ -15940,7 +15997,7 @@
               </a:defRPr>
             </a:pPr>
             <a:r>
-              <a:rPr sz="1125" b="1">
+              <a:rPr sz="1200" b="1">
                 <a:solidFill>
                   <a:srgbClr val="287967"/>
                 </a:solidFill>
@@ -15958,7 +16015,7 @@
           <p:cNvPr id="18" name="“there is a clear need for better inform">
             <a:extLst xmlns:a="http://schemas.openxmlformats.org/drawingml/2006/main">
               <a:ext uri="{FF2B5EF4-FFF2-40B4-BE49-F238E27FC236}">
-                <a16:creationId xmlns:a16="http://schemas.microsoft.com/office/drawing/2014/main" id="{5BAA5A13-096F-4EE8-9410-E962C02B2FC6}"/>
+                <a16:creationId xmlns:a16="http://schemas.microsoft.com/office/drawing/2014/main" id="{1868F7FD-4297-40CC-A416-C657AA04524C}"/>
               </a:ext>
             </a:extLst>
           </p:cNvPr>
@@ -16015,7 +16072,7 @@
           <p:cNvPr id="19" name="PT">
             <a:extLst xmlns:a="http://schemas.openxmlformats.org/drawingml/2006/main">
               <a:ext uri="{FF2B5EF4-FFF2-40B4-BE49-F238E27FC236}">
-                <a16:creationId xmlns:a16="http://schemas.microsoft.com/office/drawing/2014/main" id="{48154AF2-45AC-47C8-9707-7742B4BA2F91}"/>
+                <a16:creationId xmlns:a16="http://schemas.microsoft.com/office/drawing/2014/main" id="{E98ACA2F-9ABC-4227-8282-F6071E2D0DD4}"/>
               </a:ext>
             </a:extLst>
           </p:cNvPr>
@@ -16044,7 +16101,7 @@
           <a:lstStyle xmlns:a="http://schemas.openxmlformats.org/drawingml/2006/main"/>
           <a:p xmlns:a="http://schemas.openxmlformats.org/drawingml/2006/main">
             <a:pPr algn="l">
-              <a:defRPr sz="1125" b="1">
+              <a:defRPr sz="1200" b="1">
                 <a:solidFill>
                   <a:srgbClr val="287967"/>
                 </a:solidFill>
@@ -16054,7 +16111,7 @@
               </a:defRPr>
             </a:pPr>
             <a:r>
-              <a:rPr sz="1125" b="1">
+              <a:rPr sz="1200" b="1">
                 <a:solidFill>
                   <a:srgbClr val="287967"/>
                 </a:solidFill>
@@ -16072,7 +16129,7 @@
           <p:cNvPr id="20" name="Há uma necessidade clara de melhores inf">
             <a:extLst xmlns:a="http://schemas.openxmlformats.org/drawingml/2006/main">
               <a:ext uri="{FF2B5EF4-FFF2-40B4-BE49-F238E27FC236}">
-                <a16:creationId xmlns:a16="http://schemas.microsoft.com/office/drawing/2014/main" id="{465C6B9D-C3A7-45BD-9FC2-E09339694DA3}"/>
+                <a16:creationId xmlns:a16="http://schemas.microsoft.com/office/drawing/2014/main" id="{D230A428-E640-4EB5-A42E-0AC69C8C5B52}"/>
               </a:ext>
             </a:extLst>
           </p:cNvPr>
@@ -16129,7 +16186,7 @@
           <p:cNvPr id="21" name="Análise: os autores discutem também as&#10;d">
             <a:extLst xmlns:a="http://schemas.openxmlformats.org/drawingml/2006/main">
               <a:ext uri="{FF2B5EF4-FFF2-40B4-BE49-F238E27FC236}">
-                <a16:creationId xmlns:a16="http://schemas.microsoft.com/office/drawing/2014/main" id="{7BABFBE6-FB50-4F96-9B7B-5FB91DB41653}"/>
+                <a16:creationId xmlns:a16="http://schemas.microsoft.com/office/drawing/2014/main" id="{30AE8365-C231-442A-9D85-8AFD36F8238D}"/>
               </a:ext>
             </a:extLst>
           </p:cNvPr>
@@ -16230,7 +16287,7 @@
     </p:spTree>
     <p:extLst>
       <p:ext uri="{BB962C8B-B14F-4D97-AF65-F5344CB8AC3E}">
-        <p14:creationId xmlns:p14="http://schemas.microsoft.com/office/powerpoint/2010/main" val="1098770092"/>
+        <p14:creationId xmlns:p14="http://schemas.microsoft.com/office/powerpoint/2010/main" val="1947288870"/>
       </p:ext>
     </p:extLst>
   </p:cSld>
@@ -16258,10 +16315,10 @@
       </p:grpSpPr>
       <p:sp>
         <p:nvSpPr>
-          <p:cNvPr id="24" name="">
-            <a:extLst xmlns:a="http://schemas.openxmlformats.org/drawingml/2006/main">
-              <a:ext uri="{FF2B5EF4-FFF2-40B4-BE49-F238E27FC236}">
-                <a16:creationId xmlns:a16="http://schemas.microsoft.com/office/drawing/2014/main" id="{36D58A84-B97B-4E46-B7A0-76B6BFF3FBD1}"/>
+          <p:cNvPr id="28" name="">
+            <a:extLst xmlns:a="http://schemas.openxmlformats.org/drawingml/2006/main">
+              <a:ext uri="{FF2B5EF4-FFF2-40B4-BE49-F238E27FC236}">
+                <a16:creationId xmlns:a16="http://schemas.microsoft.com/office/drawing/2014/main" id="{8E12FD38-007F-4059-ACD4-00E20AE2ABD9}"/>
               </a:ext>
             </a:extLst>
           </p:cNvPr>
@@ -16291,7 +16348,7 @@
           <p:cNvPr id="2" name="SELEÇÃO">
             <a:extLst xmlns:a="http://schemas.openxmlformats.org/drawingml/2006/main">
               <a:ext uri="{FF2B5EF4-FFF2-40B4-BE49-F238E27FC236}">
-                <a16:creationId xmlns:a16="http://schemas.microsoft.com/office/drawing/2014/main" id="{DB4E902B-ADC1-43FF-BA99-39076580BDE2}"/>
+                <a16:creationId xmlns:a16="http://schemas.microsoft.com/office/drawing/2014/main" id="{3A45C2A1-C09D-4F23-9924-291BD0365223}"/>
               </a:ext>
             </a:extLst>
           </p:cNvPr>
@@ -16348,7 +16405,7 @@
           <p:cNvPr id="3" name="Seleção do artigo no Scopus">
             <a:extLst xmlns:a="http://schemas.openxmlformats.org/drawingml/2006/main">
               <a:ext uri="{FF2B5EF4-FFF2-40B4-BE49-F238E27FC236}">
-                <a16:creationId xmlns:a16="http://schemas.microsoft.com/office/drawing/2014/main" id="{86761131-EEA1-4D78-804D-EF2215967FD7}"/>
+                <a16:creationId xmlns:a16="http://schemas.microsoft.com/office/drawing/2014/main" id="{BC1284B2-25A1-4E1A-95A4-655B8FAE4C7C}"/>
               </a:ext>
             </a:extLst>
           </p:cNvPr>
@@ -16405,7 +16462,7 @@
           <p:cNvPr id="4" name="">
             <a:extLst xmlns:a="http://schemas.openxmlformats.org/drawingml/2006/main">
               <a:ext uri="{FF2B5EF4-FFF2-40B4-BE49-F238E27FC236}">
-                <a16:creationId xmlns:a16="http://schemas.microsoft.com/office/drawing/2014/main" id="{7B81122E-DB11-4C67-B9EB-3710D292CFAF}"/>
+                <a16:creationId xmlns:a16="http://schemas.microsoft.com/office/drawing/2014/main" id="{9A3AEC61-45DE-4EA5-BF22-76E1C9C0238E}"/>
               </a:ext>
             </a:extLst>
           </p:cNvPr>
@@ -16435,7 +16492,7 @@
           <p:cNvPr id="5" name="">
             <a:extLst xmlns:a="http://schemas.openxmlformats.org/drawingml/2006/main">
               <a:ext uri="{FF2B5EF4-FFF2-40B4-BE49-F238E27FC236}">
-                <a16:creationId xmlns:a16="http://schemas.microsoft.com/office/drawing/2014/main" id="{AE63958B-68CF-4FCB-9607-52855BDB163B}"/>
+                <a16:creationId xmlns:a16="http://schemas.microsoft.com/office/drawing/2014/main" id="{A150347F-33D0-4563-8376-D52CFA991F3E}"/>
               </a:ext>
             </a:extLst>
           </p:cNvPr>
@@ -16465,7 +16522,7 @@
           <p:cNvPr id="6" name="Fonte: registro da busca no TCC, 21/09/2">
             <a:extLst xmlns:a="http://schemas.openxmlformats.org/drawingml/2006/main">
               <a:ext uri="{FF2B5EF4-FFF2-40B4-BE49-F238E27FC236}">
-                <a16:creationId xmlns:a16="http://schemas.microsoft.com/office/drawing/2014/main" id="{3C8EAAE0-E42B-413F-828D-CBDEDA90849C}"/>
+                <a16:creationId xmlns:a16="http://schemas.microsoft.com/office/drawing/2014/main" id="{485DE5AB-278F-43DC-A9BC-781C0CE7790F}"/>
               </a:ext>
             </a:extLst>
           </p:cNvPr>
@@ -16477,7 +16534,7 @@
         <p:spPr>
           <a:xfrm xmlns:a="http://schemas.openxmlformats.org/drawingml/2006/main">
             <a:off x="609600" y="6477000"/>
-            <a:ext cx="10096500" cy="228600"/>
+            <a:ext cx="9982200" cy="228600"/>
           </a:xfrm>
           <a:prstGeom xmlns:a="http://schemas.openxmlformats.org/drawingml/2006/main" prst="rect">
             <a:avLst/>
@@ -16494,7 +16551,7 @@
           <a:lstStyle xmlns:a="http://schemas.openxmlformats.org/drawingml/2006/main"/>
           <a:p xmlns:a="http://schemas.openxmlformats.org/drawingml/2006/main">
             <a:pPr algn="l">
-              <a:defRPr sz="1125" b="0">
+              <a:defRPr sz="1200" b="0">
                 <a:solidFill>
                   <a:srgbClr val="596B7A"/>
                 </a:solidFill>
@@ -16504,7 +16561,7 @@
               </a:defRPr>
             </a:pPr>
             <a:r>
-              <a:rPr sz="1125" b="0">
+              <a:rPr sz="1200" b="0">
                 <a:solidFill>
                   <a:srgbClr val="596B7A"/>
                 </a:solidFill>
@@ -16522,7 +16579,7 @@
           <p:cNvPr id="7" name="02 / 23">
             <a:extLst xmlns:a="http://schemas.openxmlformats.org/drawingml/2006/main">
               <a:ext uri="{FF2B5EF4-FFF2-40B4-BE49-F238E27FC236}">
-                <a16:creationId xmlns:a16="http://schemas.microsoft.com/office/drawing/2014/main" id="{8FC66050-A729-4870-B9FF-2F920AF2A5F6}"/>
+                <a16:creationId xmlns:a16="http://schemas.microsoft.com/office/drawing/2014/main" id="{F79F4662-E110-4301-9F67-F7497F8A4C38}"/>
               </a:ext>
             </a:extLst>
           </p:cNvPr>
@@ -16551,7 +16608,7 @@
           <a:lstStyle xmlns:a="http://schemas.openxmlformats.org/drawingml/2006/main"/>
           <a:p xmlns:a="http://schemas.openxmlformats.org/drawingml/2006/main">
             <a:pPr algn="r">
-              <a:defRPr sz="1125" b="0">
+              <a:defRPr sz="1200" b="0">
                 <a:solidFill>
                   <a:srgbClr val="596B7A"/>
                 </a:solidFill>
@@ -16561,7 +16618,7 @@
               </a:defRPr>
             </a:pPr>
             <a:r>
-              <a:rPr sz="1125" b="0">
+              <a:rPr sz="1200" b="0">
                 <a:solidFill>
                   <a:srgbClr val="596B7A"/>
                 </a:solidFill>
@@ -16579,7 +16636,7 @@
           <p:cNvPr id="8" name="Busca: “third-party tracking”">
             <a:extLst xmlns:a="http://schemas.openxmlformats.org/drawingml/2006/main">
               <a:ext uri="{FF2B5EF4-FFF2-40B4-BE49-F238E27FC236}">
-                <a16:creationId xmlns:a16="http://schemas.microsoft.com/office/drawing/2014/main" id="{CD96B95D-6F58-4768-A1F4-96DEEC975710}"/>
+                <a16:creationId xmlns:a16="http://schemas.microsoft.com/office/drawing/2014/main" id="{D05B8A6A-5BDC-47EB-BFB1-6D868D1807C7}"/>
               </a:ext>
             </a:extLst>
           </p:cNvPr>
@@ -16633,10 +16690,10 @@
       </p:sp>
       <p:sp>
         <p:nvSpPr>
-          <p:cNvPr id="9" name="Campo: título, resumo e palavras-chave">
-            <a:extLst xmlns:a="http://schemas.openxmlformats.org/drawingml/2006/main">
-              <a:ext uri="{FF2B5EF4-FFF2-40B4-BE49-F238E27FC236}">
-                <a16:creationId xmlns:a16="http://schemas.microsoft.com/office/drawing/2014/main" id="{D8541D47-76B1-4410-ABEB-C6567845BC0A}"/>
+          <p:cNvPr id="9" name="CAPES / CAFe (IDP) → Scopus · Campo: tít">
+            <a:extLst xmlns:a="http://schemas.openxmlformats.org/drawingml/2006/main">
+              <a:ext uri="{FF2B5EF4-FFF2-40B4-BE49-F238E27FC236}">
+                <a16:creationId xmlns:a16="http://schemas.microsoft.com/office/drawing/2014/main" id="{31C4C1C2-470C-48F7-89CF-650062CC33BC}"/>
               </a:ext>
             </a:extLst>
           </p:cNvPr>
@@ -16648,7 +16705,7 @@
         <p:spPr>
           <a:xfrm xmlns:a="http://schemas.openxmlformats.org/drawingml/2006/main">
             <a:off x="609600" y="2047875"/>
-            <a:ext cx="9525000" cy="266700"/>
+            <a:ext cx="10972800" cy="266700"/>
           </a:xfrm>
           <a:prstGeom xmlns:a="http://schemas.openxmlformats.org/drawingml/2006/main" prst="rect">
             <a:avLst/>
@@ -16683,27 +16740,27 @@
                 <a:ea typeface="Arial"/>
                 <a:cs typeface="Arial"/>
               </a:rPr>
-              <a:t>Campo: título, resumo e palavras-chave</a:t>
+              <a:t>CAPES / CAFe (IDP) → Scopus · Campo: título, resumo e palavras-chave</a:t>
             </a:r>
           </a:p>
         </p:txBody>
       </p:sp>
       <p:pic>
         <p:nvPicPr>
-          <p:cNvPr id="33" name=""/>
+          <p:cNvPr id="37" name=""/>
           <p:cNvPicPr>
             <a:picLocks xmlns:a="http://schemas.openxmlformats.org/drawingml/2006/main" noChangeAspect="1"/>
           </p:cNvPicPr>
           <p:nvPr/>
         </p:nvPicPr>
         <p:blipFill>
-          <a:blip xmlns:r="http://schemas.openxmlformats.org/officeDocument/2006/relationships" xmlns:a="http://schemas.openxmlformats.org/drawingml/2006/main" r:embed="R5c4a9351fbc741f2"/>
+          <a:blip xmlns:r="http://schemas.openxmlformats.org/officeDocument/2006/relationships" xmlns:a="http://schemas.openxmlformats.org/drawingml/2006/main" r:embed="Rb91f88ac693440c2"/>
           <a:stretch xmlns:a="http://schemas.openxmlformats.org/drawingml/2006/main"/>
         </p:blipFill>
         <p:spPr>
           <a:xfrm xmlns:a="http://schemas.openxmlformats.org/drawingml/2006/main">
-            <a:off x="990545" y="2524125"/>
-            <a:ext cx="2552810" cy="1476375"/>
+            <a:off x="609600" y="2449449"/>
+            <a:ext cx="2514600" cy="1454277"/>
           </a:xfrm>
           <a:prstGeom xmlns:a="http://schemas.openxmlformats.org/drawingml/2006/main" prst="rect">
             <a:avLst/>
@@ -16712,20 +16769,20 @@
       </p:pic>
       <p:pic>
         <p:nvPicPr>
-          <p:cNvPr id="34" name=""/>
+          <p:cNvPr id="38" name=""/>
           <p:cNvPicPr>
             <a:picLocks xmlns:a="http://schemas.openxmlformats.org/drawingml/2006/main" noChangeAspect="1"/>
           </p:cNvPicPr>
           <p:nvPr/>
         </p:nvPicPr>
         <p:blipFill>
-          <a:blip xmlns:r="http://schemas.openxmlformats.org/officeDocument/2006/relationships" xmlns:a="http://schemas.openxmlformats.org/drawingml/2006/main" r:embed="R2534e25832074b7c"/>
+          <a:blip xmlns:r="http://schemas.openxmlformats.org/officeDocument/2006/relationships" xmlns:a="http://schemas.openxmlformats.org/drawingml/2006/main" r:embed="Rc76bacf0ab6349d3"/>
           <a:stretch xmlns:a="http://schemas.openxmlformats.org/drawingml/2006/main"/>
         </p:blipFill>
         <p:spPr>
           <a:xfrm xmlns:a="http://schemas.openxmlformats.org/drawingml/2006/main">
-            <a:off x="4819595" y="2524125"/>
-            <a:ext cx="2552810" cy="1476375"/>
+            <a:off x="3429000" y="2449449"/>
+            <a:ext cx="2514600" cy="1454277"/>
           </a:xfrm>
           <a:prstGeom xmlns:a="http://schemas.openxmlformats.org/drawingml/2006/main" prst="rect">
             <a:avLst/>
@@ -16734,44 +16791,66 @@
       </p:pic>
       <p:pic>
         <p:nvPicPr>
-          <p:cNvPr id="35" name=""/>
+          <p:cNvPr id="39" name=""/>
           <p:cNvPicPr>
             <a:picLocks xmlns:a="http://schemas.openxmlformats.org/drawingml/2006/main" noChangeAspect="1"/>
           </p:cNvPicPr>
           <p:nvPr/>
         </p:nvPicPr>
         <p:blipFill>
-          <a:blip xmlns:r="http://schemas.openxmlformats.org/officeDocument/2006/relationships" xmlns:a="http://schemas.openxmlformats.org/drawingml/2006/main" r:embed="R485fef7ec8c0421e"/>
+          <a:blip xmlns:r="http://schemas.openxmlformats.org/officeDocument/2006/relationships" xmlns:a="http://schemas.openxmlformats.org/drawingml/2006/main" r:embed="R39167ffc3f4f42c7"/>
           <a:stretch xmlns:a="http://schemas.openxmlformats.org/drawingml/2006/main"/>
         </p:blipFill>
         <p:spPr>
           <a:xfrm xmlns:a="http://schemas.openxmlformats.org/drawingml/2006/main">
-            <a:off x="8648645" y="2524125"/>
-            <a:ext cx="2552810" cy="1476375"/>
+            <a:off x="6248400" y="2449449"/>
+            <a:ext cx="2514600" cy="1454277"/>
           </a:xfrm>
           <a:prstGeom xmlns:a="http://schemas.openxmlformats.org/drawingml/2006/main" prst="rect">
             <a:avLst/>
           </a:prstGeom>
         </p:spPr>
       </p:pic>
-      <p:sp>
-        <p:nvSpPr>
-          <p:cNvPr id="13" name="131">
-            <a:extLst xmlns:a="http://schemas.openxmlformats.org/drawingml/2006/main">
-              <a:ext uri="{FF2B5EF4-FFF2-40B4-BE49-F238E27FC236}">
-                <a16:creationId xmlns:a16="http://schemas.microsoft.com/office/drawing/2014/main" id="{54F09458-D046-454F-840B-2E580167E3DA}"/>
-              </a:ext>
-            </a:extLst>
-          </p:cNvPr>
-          <p:cNvSpPr>
-            <a:spLocks xmlns:a="http://schemas.openxmlformats.org/drawingml/2006/main" noGrp="1"/>
-          </p:cNvSpPr>
-          <p:nvPr/>
-        </p:nvSpPr>
-        <p:spPr>
-          <a:xfrm xmlns:a="http://schemas.openxmlformats.org/drawingml/2006/main">
-            <a:off x="609600" y="4162425"/>
-            <a:ext cx="1047750" cy="647700"/>
+      <p:pic>
+        <p:nvPicPr>
+          <p:cNvPr id="40" name=""/>
+          <p:cNvPicPr>
+            <a:picLocks xmlns:a="http://schemas.openxmlformats.org/drawingml/2006/main" noChangeAspect="1"/>
+          </p:cNvPicPr>
+          <p:nvPr/>
+        </p:nvPicPr>
+        <p:blipFill>
+          <a:blip xmlns:r="http://schemas.openxmlformats.org/officeDocument/2006/relationships" xmlns:a="http://schemas.openxmlformats.org/drawingml/2006/main" r:embed="Ra7a87f65b3f54958"/>
+          <a:stretch xmlns:a="http://schemas.openxmlformats.org/drawingml/2006/main"/>
+        </p:blipFill>
+        <p:spPr>
+          <a:xfrm xmlns:a="http://schemas.openxmlformats.org/drawingml/2006/main">
+            <a:off x="9067800" y="2449449"/>
+            <a:ext cx="2514600" cy="1454277"/>
+          </a:xfrm>
+          <a:prstGeom xmlns:a="http://schemas.openxmlformats.org/drawingml/2006/main" prst="rect">
+            <a:avLst/>
+          </a:prstGeom>
+        </p:spPr>
+      </p:pic>
+      <p:sp>
+        <p:nvSpPr>
+          <p:cNvPr id="14" name="131">
+            <a:extLst xmlns:a="http://schemas.openxmlformats.org/drawingml/2006/main">
+              <a:ext uri="{FF2B5EF4-FFF2-40B4-BE49-F238E27FC236}">
+                <a16:creationId xmlns:a16="http://schemas.microsoft.com/office/drawing/2014/main" id="{5A3A1C52-5F07-4E59-A714-724955DC8296}"/>
+              </a:ext>
+            </a:extLst>
+          </p:cNvPr>
+          <p:cNvSpPr>
+            <a:spLocks xmlns:a="http://schemas.openxmlformats.org/drawingml/2006/main" noGrp="1"/>
+          </p:cNvSpPr>
+          <p:nvPr/>
+        </p:nvSpPr>
+        <p:spPr>
+          <a:xfrm xmlns:a="http://schemas.openxmlformats.org/drawingml/2006/main">
+            <a:off x="609600" y="4057650"/>
+            <a:ext cx="2514600" cy="590550"/>
           </a:xfrm>
           <a:prstGeom xmlns:a="http://schemas.openxmlformats.org/drawingml/2006/main" prst="rect">
             <a:avLst/>
@@ -16788,7 +16867,7 @@
           <a:lstStyle xmlns:a="http://schemas.openxmlformats.org/drawingml/2006/main"/>
           <a:p xmlns:a="http://schemas.openxmlformats.org/drawingml/2006/main">
             <a:pPr algn="l">
-              <a:defRPr sz="3750" b="1">
+              <a:defRPr sz="3450" b="1">
                 <a:solidFill>
                   <a:srgbClr val="174875"/>
                 </a:solidFill>
@@ -16798,7 +16877,7 @@
               </a:defRPr>
             </a:pPr>
             <a:r>
-              <a:rPr sz="3750" b="1">
+              <a:rPr sz="3450" b="1">
                 <a:solidFill>
                   <a:srgbClr val="174875"/>
                 </a:solidFill>
@@ -16813,22 +16892,22 @@
       </p:sp>
       <p:sp>
         <p:nvSpPr>
-          <p:cNvPr id="14" name="expressão exata,&#10;sem filtros">
-            <a:extLst xmlns:a="http://schemas.openxmlformats.org/drawingml/2006/main">
-              <a:ext uri="{FF2B5EF4-FFF2-40B4-BE49-F238E27FC236}">
-                <a16:creationId xmlns:a16="http://schemas.microsoft.com/office/drawing/2014/main" id="{D664609C-5870-4BCB-8711-06FD1D150FD8}"/>
-              </a:ext>
-            </a:extLst>
-          </p:cNvPr>
-          <p:cNvSpPr>
-            <a:spLocks xmlns:a="http://schemas.openxmlformats.org/drawingml/2006/main" noGrp="1"/>
-          </p:cNvSpPr>
-          <p:nvPr/>
-        </p:nvSpPr>
-        <p:spPr>
-          <a:xfrm xmlns:a="http://schemas.openxmlformats.org/drawingml/2006/main">
-            <a:off x="1743075" y="4267200"/>
-            <a:ext cx="2200275" cy="723900"/>
+          <p:cNvPr id="15" name="expressão exata,&#10;sem filtros">
+            <a:extLst xmlns:a="http://schemas.openxmlformats.org/drawingml/2006/main">
+              <a:ext uri="{FF2B5EF4-FFF2-40B4-BE49-F238E27FC236}">
+                <a16:creationId xmlns:a16="http://schemas.microsoft.com/office/drawing/2014/main" id="{59AF683A-49A4-447A-B0E9-91A12D6DE203}"/>
+              </a:ext>
+            </a:extLst>
+          </p:cNvPr>
+          <p:cNvSpPr>
+            <a:spLocks xmlns:a="http://schemas.openxmlformats.org/drawingml/2006/main" noGrp="1"/>
+          </p:cNvSpPr>
+          <p:nvPr/>
+        </p:nvSpPr>
+        <p:spPr>
+          <a:xfrm xmlns:a="http://schemas.openxmlformats.org/drawingml/2006/main">
+            <a:off x="609600" y="4676775"/>
+            <a:ext cx="2514600" cy="638175"/>
           </a:xfrm>
           <a:prstGeom xmlns:a="http://schemas.openxmlformats.org/drawingml/2006/main" prst="rect">
             <a:avLst/>
@@ -16845,7 +16924,7 @@
           <a:lstStyle xmlns:a="http://schemas.openxmlformats.org/drawingml/2006/main"/>
           <a:p xmlns:a="http://schemas.openxmlformats.org/drawingml/2006/main">
             <a:pPr algn="l">
-              <a:defRPr sz="1725" b="0">
+              <a:defRPr sz="1575" b="0">
                 <a:solidFill>
                   <a:srgbClr val="24384A"/>
                 </a:solidFill>
@@ -16855,7 +16934,7 @@
               </a:defRPr>
             </a:pPr>
             <a:r>
-              <a:rPr sz="1725" b="0">
+              <a:rPr sz="1575" b="0">
                 <a:solidFill>
                   <a:srgbClr val="24384A"/>
                 </a:solidFill>
@@ -16868,7 +16947,7 @@
           </a:p>
           <a:p xmlns:a="http://schemas.openxmlformats.org/drawingml/2006/main">
             <a:pPr algn="l">
-              <a:defRPr sz="1725" b="0">
+              <a:defRPr sz="1575" b="0">
                 <a:solidFill>
                   <a:srgbClr val="24384A"/>
                 </a:solidFill>
@@ -16878,7 +16957,7 @@
               </a:defRPr>
             </a:pPr>
             <a:r>
-              <a:rPr sz="1725" b="0">
+              <a:rPr sz="1575" b="0">
                 <a:solidFill>
                   <a:srgbClr val="24384A"/>
                 </a:solidFill>
@@ -16893,22 +16972,22 @@
       </p:sp>
       <p:sp>
         <p:nvSpPr>
-          <p:cNvPr id="15" name="">
-            <a:extLst xmlns:a="http://schemas.openxmlformats.org/drawingml/2006/main">
-              <a:ext uri="{FF2B5EF4-FFF2-40B4-BE49-F238E27FC236}">
-                <a16:creationId xmlns:a16="http://schemas.microsoft.com/office/drawing/2014/main" id="{30991134-4F2A-479E-BD84-DF858F55A2C0}"/>
-              </a:ext>
-            </a:extLst>
-          </p:cNvPr>
-          <p:cNvSpPr>
-            <a:spLocks xmlns:a="http://schemas.openxmlformats.org/drawingml/2006/main" noGrp="1"/>
-          </p:cNvSpPr>
-          <p:nvPr/>
-        </p:nvSpPr>
-        <p:spPr>
-          <a:xfrm xmlns:a="http://schemas.openxmlformats.org/drawingml/2006/main">
-            <a:off x="4067175" y="4438650"/>
-            <a:ext cx="257175" cy="152400"/>
+          <p:cNvPr id="16" name="">
+            <a:extLst xmlns:a="http://schemas.openxmlformats.org/drawingml/2006/main">
+              <a:ext uri="{FF2B5EF4-FFF2-40B4-BE49-F238E27FC236}">
+                <a16:creationId xmlns:a16="http://schemas.microsoft.com/office/drawing/2014/main" id="{8CED4206-9127-4E24-B7C9-8B83A2408250}"/>
+              </a:ext>
+            </a:extLst>
+          </p:cNvPr>
+          <p:cNvSpPr>
+            <a:spLocks xmlns:a="http://schemas.openxmlformats.org/drawingml/2006/main" noGrp="1"/>
+          </p:cNvSpPr>
+          <p:nvPr/>
+        </p:nvSpPr>
+        <p:spPr>
+          <a:xfrm xmlns:a="http://schemas.openxmlformats.org/drawingml/2006/main">
+            <a:off x="3200400" y="4238625"/>
+            <a:ext cx="152400" cy="152400"/>
           </a:xfrm>
           <a:prstGeom xmlns:a="http://schemas.openxmlformats.org/drawingml/2006/main" prst="rightArrow">
             <a:avLst/>
@@ -16923,22 +17002,22 @@
       </p:sp>
       <p:sp>
         <p:nvSpPr>
-          <p:cNvPr id="16" name="70">
-            <a:extLst xmlns:a="http://schemas.openxmlformats.org/drawingml/2006/main">
-              <a:ext uri="{FF2B5EF4-FFF2-40B4-BE49-F238E27FC236}">
-                <a16:creationId xmlns:a16="http://schemas.microsoft.com/office/drawing/2014/main" id="{BDF01D04-973E-44CC-8B05-E25BD4884B21}"/>
-              </a:ext>
-            </a:extLst>
-          </p:cNvPr>
-          <p:cNvSpPr>
-            <a:spLocks xmlns:a="http://schemas.openxmlformats.org/drawingml/2006/main" noGrp="1"/>
-          </p:cNvSpPr>
-          <p:nvPr/>
-        </p:nvSpPr>
-        <p:spPr>
-          <a:xfrm xmlns:a="http://schemas.openxmlformats.org/drawingml/2006/main">
-            <a:off x="4438650" y="4162425"/>
-            <a:ext cx="1047750" cy="647700"/>
+          <p:cNvPr id="17" name="70">
+            <a:extLst xmlns:a="http://schemas.openxmlformats.org/drawingml/2006/main">
+              <a:ext uri="{FF2B5EF4-FFF2-40B4-BE49-F238E27FC236}">
+                <a16:creationId xmlns:a16="http://schemas.microsoft.com/office/drawing/2014/main" id="{6DED8C98-5F9C-4C78-84A1-2888B47EF198}"/>
+              </a:ext>
+            </a:extLst>
+          </p:cNvPr>
+          <p:cNvSpPr>
+            <a:spLocks xmlns:a="http://schemas.openxmlformats.org/drawingml/2006/main" noGrp="1"/>
+          </p:cNvSpPr>
+          <p:nvPr/>
+        </p:nvSpPr>
+        <p:spPr>
+          <a:xfrm xmlns:a="http://schemas.openxmlformats.org/drawingml/2006/main">
+            <a:off x="3429000" y="4057650"/>
+            <a:ext cx="2514600" cy="590550"/>
           </a:xfrm>
           <a:prstGeom xmlns:a="http://schemas.openxmlformats.org/drawingml/2006/main" prst="rect">
             <a:avLst/>
@@ -16955,7 +17034,7 @@
           <a:lstStyle xmlns:a="http://schemas.openxmlformats.org/drawingml/2006/main"/>
           <a:p xmlns:a="http://schemas.openxmlformats.org/drawingml/2006/main">
             <a:pPr algn="l">
-              <a:defRPr sz="3750" b="1">
+              <a:defRPr sz="3450" b="1">
                 <a:solidFill>
                   <a:srgbClr val="174875"/>
                 </a:solidFill>
@@ -16965,7 +17044,7 @@
               </a:defRPr>
             </a:pPr>
             <a:r>
-              <a:rPr sz="3750" b="1">
+              <a:rPr sz="3450" b="1">
                 <a:solidFill>
                   <a:srgbClr val="174875"/>
                 </a:solidFill>
@@ -16980,22 +17059,22 @@
       </p:sp>
       <p:sp>
         <p:nvSpPr>
-          <p:cNvPr id="17" name="2018–2026, Computação,&#10;artigos e conferê">
-            <a:extLst xmlns:a="http://schemas.openxmlformats.org/drawingml/2006/main">
-              <a:ext uri="{FF2B5EF4-FFF2-40B4-BE49-F238E27FC236}">
-                <a16:creationId xmlns:a16="http://schemas.microsoft.com/office/drawing/2014/main" id="{DD4B284D-9733-4404-B909-A32793DA939C}"/>
-              </a:ext>
-            </a:extLst>
-          </p:cNvPr>
-          <p:cNvSpPr>
-            <a:spLocks xmlns:a="http://schemas.openxmlformats.org/drawingml/2006/main" noGrp="1"/>
-          </p:cNvSpPr>
-          <p:nvPr/>
-        </p:nvSpPr>
-        <p:spPr>
-          <a:xfrm xmlns:a="http://schemas.openxmlformats.org/drawingml/2006/main">
-            <a:off x="5572125" y="4267200"/>
-            <a:ext cx="2200275" cy="723900"/>
+          <p:cNvPr id="18" name="2018–2026, Computação,&#10;artigos e conferê">
+            <a:extLst xmlns:a="http://schemas.openxmlformats.org/drawingml/2006/main">
+              <a:ext uri="{FF2B5EF4-FFF2-40B4-BE49-F238E27FC236}">
+                <a16:creationId xmlns:a16="http://schemas.microsoft.com/office/drawing/2014/main" id="{F2EE81C8-DB48-4437-814C-EB089625CB96}"/>
+              </a:ext>
+            </a:extLst>
+          </p:cNvPr>
+          <p:cNvSpPr>
+            <a:spLocks xmlns:a="http://schemas.openxmlformats.org/drawingml/2006/main" noGrp="1"/>
+          </p:cNvSpPr>
+          <p:nvPr/>
+        </p:nvSpPr>
+        <p:spPr>
+          <a:xfrm xmlns:a="http://schemas.openxmlformats.org/drawingml/2006/main">
+            <a:off x="3429000" y="4676775"/>
+            <a:ext cx="2514600" cy="638175"/>
           </a:xfrm>
           <a:prstGeom xmlns:a="http://schemas.openxmlformats.org/drawingml/2006/main" prst="rect">
             <a:avLst/>
@@ -17012,7 +17091,7 @@
           <a:lstStyle xmlns:a="http://schemas.openxmlformats.org/drawingml/2006/main"/>
           <a:p xmlns:a="http://schemas.openxmlformats.org/drawingml/2006/main">
             <a:pPr algn="l">
-              <a:defRPr sz="1725" b="0">
+              <a:defRPr sz="1575" b="0">
                 <a:solidFill>
                   <a:srgbClr val="24384A"/>
                 </a:solidFill>
@@ -17022,7 +17101,7 @@
               </a:defRPr>
             </a:pPr>
             <a:r>
-              <a:rPr sz="1725" b="0">
+              <a:rPr sz="1575" b="0">
                 <a:solidFill>
                   <a:srgbClr val="24384A"/>
                 </a:solidFill>
@@ -17035,7 +17114,7 @@
           </a:p>
           <a:p xmlns:a="http://schemas.openxmlformats.org/drawingml/2006/main">
             <a:pPr algn="l">
-              <a:defRPr sz="1725" b="0">
+              <a:defRPr sz="1575" b="0">
                 <a:solidFill>
                   <a:srgbClr val="24384A"/>
                 </a:solidFill>
@@ -17045,7 +17124,7 @@
               </a:defRPr>
             </a:pPr>
             <a:r>
-              <a:rPr sz="1725" b="0">
+              <a:rPr sz="1575" b="0">
                 <a:solidFill>
                   <a:srgbClr val="24384A"/>
                 </a:solidFill>
@@ -17060,22 +17139,22 @@
       </p:sp>
       <p:sp>
         <p:nvSpPr>
-          <p:cNvPr id="18" name="">
-            <a:extLst xmlns:a="http://schemas.openxmlformats.org/drawingml/2006/main">
-              <a:ext uri="{FF2B5EF4-FFF2-40B4-BE49-F238E27FC236}">
-                <a16:creationId xmlns:a16="http://schemas.microsoft.com/office/drawing/2014/main" id="{C9652FDC-4BC8-4B6E-80A6-14B271C51C01}"/>
-              </a:ext>
-            </a:extLst>
-          </p:cNvPr>
-          <p:cNvSpPr>
-            <a:spLocks xmlns:a="http://schemas.openxmlformats.org/drawingml/2006/main" noGrp="1"/>
-          </p:cNvSpPr>
-          <p:nvPr/>
-        </p:nvSpPr>
-        <p:spPr>
-          <a:xfrm xmlns:a="http://schemas.openxmlformats.org/drawingml/2006/main">
-            <a:off x="7896225" y="4438650"/>
-            <a:ext cx="257175" cy="152400"/>
+          <p:cNvPr id="19" name="">
+            <a:extLst xmlns:a="http://schemas.openxmlformats.org/drawingml/2006/main">
+              <a:ext uri="{FF2B5EF4-FFF2-40B4-BE49-F238E27FC236}">
+                <a16:creationId xmlns:a16="http://schemas.microsoft.com/office/drawing/2014/main" id="{3F36F9F6-BCD8-4839-ABC5-2B31AF7EF7F2}"/>
+              </a:ext>
+            </a:extLst>
+          </p:cNvPr>
+          <p:cNvSpPr>
+            <a:spLocks xmlns:a="http://schemas.openxmlformats.org/drawingml/2006/main" noGrp="1"/>
+          </p:cNvSpPr>
+          <p:nvPr/>
+        </p:nvSpPr>
+        <p:spPr>
+          <a:xfrm xmlns:a="http://schemas.openxmlformats.org/drawingml/2006/main">
+            <a:off x="6019800" y="4238625"/>
+            <a:ext cx="152400" cy="152400"/>
           </a:xfrm>
           <a:prstGeom xmlns:a="http://schemas.openxmlformats.org/drawingml/2006/main" prst="rightArrow">
             <a:avLst/>
@@ -17090,22 +17169,22 @@
       </p:sp>
       <p:sp>
         <p:nvSpPr>
-          <p:cNvPr id="19" name="5">
-            <a:extLst xmlns:a="http://schemas.openxmlformats.org/drawingml/2006/main">
-              <a:ext uri="{FF2B5EF4-FFF2-40B4-BE49-F238E27FC236}">
-                <a16:creationId xmlns:a16="http://schemas.microsoft.com/office/drawing/2014/main" id="{DFED3BF3-B35F-403B-A11D-1B44DE83C499}"/>
-              </a:ext>
-            </a:extLst>
-          </p:cNvPr>
-          <p:cNvSpPr>
-            <a:spLocks xmlns:a="http://schemas.openxmlformats.org/drawingml/2006/main" noGrp="1"/>
-          </p:cNvSpPr>
-          <p:nvPr/>
-        </p:nvSpPr>
-        <p:spPr>
-          <a:xfrm xmlns:a="http://schemas.openxmlformats.org/drawingml/2006/main">
-            <a:off x="8267700" y="4162425"/>
-            <a:ext cx="1047750" cy="647700"/>
+          <p:cNvPr id="20" name="39">
+            <a:extLst xmlns:a="http://schemas.openxmlformats.org/drawingml/2006/main">
+              <a:ext uri="{FF2B5EF4-FFF2-40B4-BE49-F238E27FC236}">
+                <a16:creationId xmlns:a16="http://schemas.microsoft.com/office/drawing/2014/main" id="{FDBA6F72-D71A-46CF-B48D-E1219B76A369}"/>
+              </a:ext>
+            </a:extLst>
+          </p:cNvPr>
+          <p:cNvSpPr>
+            <a:spLocks xmlns:a="http://schemas.openxmlformats.org/drawingml/2006/main" noGrp="1"/>
+          </p:cNvSpPr>
+          <p:nvPr/>
+        </p:nvSpPr>
+        <p:spPr>
+          <a:xfrm xmlns:a="http://schemas.openxmlformats.org/drawingml/2006/main">
+            <a:off x="6248400" y="4057650"/>
+            <a:ext cx="2514600" cy="590550"/>
           </a:xfrm>
           <a:prstGeom xmlns:a="http://schemas.openxmlformats.org/drawingml/2006/main" prst="rect">
             <a:avLst/>
@@ -17122,7 +17201,7 @@
           <a:lstStyle xmlns:a="http://schemas.openxmlformats.org/drawingml/2006/main"/>
           <a:p xmlns:a="http://schemas.openxmlformats.org/drawingml/2006/main">
             <a:pPr algn="l">
-              <a:defRPr sz="3750" b="1">
+              <a:defRPr sz="3450" b="1">
                 <a:solidFill>
                   <a:srgbClr val="174875"/>
                 </a:solidFill>
@@ -17132,7 +17211,7 @@
               </a:defRPr>
             </a:pPr>
             <a:r>
-              <a:rPr sz="3750" b="1">
+              <a:rPr sz="3450" b="1">
                 <a:solidFill>
                   <a:srgbClr val="174875"/>
                 </a:solidFill>
@@ -17140,29 +17219,29 @@
                 <a:ea typeface="Arial"/>
                 <a:cs typeface="Arial"/>
               </a:rPr>
-              <a:t>5</a:t>
-            </a:r>
-          </a:p>
-        </p:txBody>
-      </p:sp>
-      <p:sp>
-        <p:nvSpPr>
-          <p:cNvPr id="20" name="palavras-chave específicas,&#10;período 2018">
-            <a:extLst xmlns:a="http://schemas.openxmlformats.org/drawingml/2006/main">
-              <a:ext uri="{FF2B5EF4-FFF2-40B4-BE49-F238E27FC236}">
-                <a16:creationId xmlns:a16="http://schemas.microsoft.com/office/drawing/2014/main" id="{25EAC06A-E7B0-4C21-AC85-4CC8732AE822}"/>
-              </a:ext>
-            </a:extLst>
-          </p:cNvPr>
-          <p:cNvSpPr>
-            <a:spLocks xmlns:a="http://schemas.openxmlformats.org/drawingml/2006/main" noGrp="1"/>
-          </p:cNvSpPr>
-          <p:nvPr/>
-        </p:nvSpPr>
-        <p:spPr>
-          <a:xfrm xmlns:a="http://schemas.openxmlformats.org/drawingml/2006/main">
-            <a:off x="9401175" y="4267200"/>
-            <a:ext cx="2200275" cy="723900"/>
+              <a:t>39</a:t>
+            </a:r>
+          </a:p>
+        </p:txBody>
+      </p:sp>
+      <p:sp>
+        <p:nvSpPr>
+          <p:cNvPr id="21" name="palavras-chave&#10;Third Parties e&#10;Third-par">
+            <a:extLst xmlns:a="http://schemas.openxmlformats.org/drawingml/2006/main">
+              <a:ext uri="{FF2B5EF4-FFF2-40B4-BE49-F238E27FC236}">
+                <a16:creationId xmlns:a16="http://schemas.microsoft.com/office/drawing/2014/main" id="{418CB510-13A0-43AD-9E92-6A0041AFD339}"/>
+              </a:ext>
+            </a:extLst>
+          </p:cNvPr>
+          <p:cNvSpPr>
+            <a:spLocks xmlns:a="http://schemas.openxmlformats.org/drawingml/2006/main" noGrp="1"/>
+          </p:cNvSpPr>
+          <p:nvPr/>
+        </p:nvSpPr>
+        <p:spPr>
+          <a:xfrm xmlns:a="http://schemas.openxmlformats.org/drawingml/2006/main">
+            <a:off x="6248400" y="4676775"/>
+            <a:ext cx="2514600" cy="638175"/>
           </a:xfrm>
           <a:prstGeom xmlns:a="http://schemas.openxmlformats.org/drawingml/2006/main" prst="rect">
             <a:avLst/>
@@ -17179,7 +17258,7 @@
           <a:lstStyle xmlns:a="http://schemas.openxmlformats.org/drawingml/2006/main"/>
           <a:p xmlns:a="http://schemas.openxmlformats.org/drawingml/2006/main">
             <a:pPr algn="l">
-              <a:defRPr sz="1725" b="0">
+              <a:defRPr sz="1575" b="0">
                 <a:solidFill>
                   <a:srgbClr val="24384A"/>
                 </a:solidFill>
@@ -17189,7 +17268,7 @@
               </a:defRPr>
             </a:pPr>
             <a:r>
-              <a:rPr sz="1725" b="0">
+              <a:rPr sz="1575" b="0">
                 <a:solidFill>
                   <a:srgbClr val="24384A"/>
                 </a:solidFill>
@@ -17197,12 +17276,12 @@
                 <a:ea typeface="Arial"/>
                 <a:cs typeface="Arial"/>
               </a:rPr>
-              <a:t>palavras-chave específicas,</a:t>
-            </a:r>
-          </a:p>
-          <a:p xmlns:a="http://schemas.openxmlformats.org/drawingml/2006/main">
-            <a:pPr algn="l">
-              <a:defRPr sz="1725" b="0">
+              <a:t>palavras-chave</a:t>
+            </a:r>
+          </a:p>
+          <a:p xmlns:a="http://schemas.openxmlformats.org/drawingml/2006/main">
+            <a:pPr algn="l">
+              <a:defRPr sz="1575" b="0">
                 <a:solidFill>
                   <a:srgbClr val="24384A"/>
                 </a:solidFill>
@@ -17212,7 +17291,7 @@
               </a:defRPr>
             </a:pPr>
             <a:r>
-              <a:rPr sz="1725" b="0">
+              <a:rPr sz="1575" b="0">
                 <a:solidFill>
                   <a:srgbClr val="24384A"/>
                 </a:solidFill>
@@ -17220,6 +17299,196 @@
                 <a:ea typeface="Arial"/>
                 <a:cs typeface="Arial"/>
               </a:rPr>
+              <a:t>Third Parties e</a:t>
+            </a:r>
+          </a:p>
+          <a:p xmlns:a="http://schemas.openxmlformats.org/drawingml/2006/main">
+            <a:pPr algn="l">
+              <a:defRPr sz="1575" b="0">
+                <a:solidFill>
+                  <a:srgbClr val="24384A"/>
+                </a:solidFill>
+                <a:latin typeface="Arial"/>
+                <a:ea typeface="Arial"/>
+                <a:cs typeface="Arial"/>
+              </a:defRPr>
+            </a:pPr>
+            <a:r>
+              <a:rPr sz="1575" b="0">
+                <a:solidFill>
+                  <a:srgbClr val="24384A"/>
+                </a:solidFill>
+                <a:latin typeface="Arial"/>
+                <a:ea typeface="Arial"/>
+                <a:cs typeface="Arial"/>
+              </a:rPr>
+              <a:t>Third-party Tracking</a:t>
+            </a:r>
+          </a:p>
+        </p:txBody>
+      </p:sp>
+      <p:sp>
+        <p:nvSpPr>
+          <p:cNvPr id="22" name="">
+            <a:extLst xmlns:a="http://schemas.openxmlformats.org/drawingml/2006/main">
+              <a:ext uri="{FF2B5EF4-FFF2-40B4-BE49-F238E27FC236}">
+                <a16:creationId xmlns:a16="http://schemas.microsoft.com/office/drawing/2014/main" id="{C1727B5A-B227-4F53-A072-514EBB3B1256}"/>
+              </a:ext>
+            </a:extLst>
+          </p:cNvPr>
+          <p:cNvSpPr>
+            <a:spLocks xmlns:a="http://schemas.openxmlformats.org/drawingml/2006/main" noGrp="1"/>
+          </p:cNvSpPr>
+          <p:nvPr/>
+        </p:nvSpPr>
+        <p:spPr>
+          <a:xfrm xmlns:a="http://schemas.openxmlformats.org/drawingml/2006/main">
+            <a:off x="8839200" y="4238625"/>
+            <a:ext cx="152400" cy="152400"/>
+          </a:xfrm>
+          <a:prstGeom xmlns:a="http://schemas.openxmlformats.org/drawingml/2006/main" prst="rightArrow">
+            <a:avLst/>
+          </a:prstGeom>
+          <a:solidFill xmlns:a="http://schemas.openxmlformats.org/drawingml/2006/main">
+            <a:srgbClr val="174875"/>
+          </a:solidFill>
+          <a:ln xmlns:a="http://schemas.openxmlformats.org/drawingml/2006/main" w="0">
+            <a:noFill/>
+          </a:ln>
+        </p:spPr>
+      </p:sp>
+      <p:sp>
+        <p:nvSpPr>
+          <p:cNvPr id="23" name="5">
+            <a:extLst xmlns:a="http://schemas.openxmlformats.org/drawingml/2006/main">
+              <a:ext uri="{FF2B5EF4-FFF2-40B4-BE49-F238E27FC236}">
+                <a16:creationId xmlns:a16="http://schemas.microsoft.com/office/drawing/2014/main" id="{93A0E7DE-2017-4DEB-AE1E-8FA29379D637}"/>
+              </a:ext>
+            </a:extLst>
+          </p:cNvPr>
+          <p:cNvSpPr>
+            <a:spLocks xmlns:a="http://schemas.openxmlformats.org/drawingml/2006/main" noGrp="1"/>
+          </p:cNvSpPr>
+          <p:nvPr/>
+        </p:nvSpPr>
+        <p:spPr>
+          <a:xfrm xmlns:a="http://schemas.openxmlformats.org/drawingml/2006/main">
+            <a:off x="9067800" y="4057650"/>
+            <a:ext cx="2514600" cy="590550"/>
+          </a:xfrm>
+          <a:prstGeom xmlns:a="http://schemas.openxmlformats.org/drawingml/2006/main" prst="rect">
+            <a:avLst/>
+          </a:prstGeom>
+          <a:noFill xmlns:a="http://schemas.openxmlformats.org/drawingml/2006/main"/>
+          <a:ln xmlns:a="http://schemas.openxmlformats.org/drawingml/2006/main" w="0">
+            <a:noFill/>
+          </a:ln>
+        </p:spPr>
+        <p:txBody>
+          <a:bodyPr xmlns:a="http://schemas.openxmlformats.org/drawingml/2006/main" wrap="square" lIns="0" tIns="0" rIns="0" bIns="0" anchor="t">
+            <a:noAutofit/>
+          </a:bodyPr>
+          <a:lstStyle xmlns:a="http://schemas.openxmlformats.org/drawingml/2006/main"/>
+          <a:p xmlns:a="http://schemas.openxmlformats.org/drawingml/2006/main">
+            <a:pPr algn="l">
+              <a:defRPr sz="3450" b="1">
+                <a:solidFill>
+                  <a:srgbClr val="174875"/>
+                </a:solidFill>
+                <a:latin typeface="Arial"/>
+                <a:ea typeface="Arial"/>
+                <a:cs typeface="Arial"/>
+              </a:defRPr>
+            </a:pPr>
+            <a:r>
+              <a:rPr sz="3450" b="1">
+                <a:solidFill>
+                  <a:srgbClr val="174875"/>
+                </a:solidFill>
+                <a:latin typeface="Arial"/>
+                <a:ea typeface="Arial"/>
+                <a:cs typeface="Arial"/>
+              </a:rPr>
+              <a:t>5</a:t>
+            </a:r>
+          </a:p>
+        </p:txBody>
+      </p:sp>
+      <p:sp>
+        <p:nvSpPr>
+          <p:cNvPr id="24" name="+ termo consent na busca,&#10;período 2018–2">
+            <a:extLst xmlns:a="http://schemas.openxmlformats.org/drawingml/2006/main">
+              <a:ext uri="{FF2B5EF4-FFF2-40B4-BE49-F238E27FC236}">
+                <a16:creationId xmlns:a16="http://schemas.microsoft.com/office/drawing/2014/main" id="{4B7F8B09-0531-4567-AE4E-3DD0585CD9D5}"/>
+              </a:ext>
+            </a:extLst>
+          </p:cNvPr>
+          <p:cNvSpPr>
+            <a:spLocks xmlns:a="http://schemas.openxmlformats.org/drawingml/2006/main" noGrp="1"/>
+          </p:cNvSpPr>
+          <p:nvPr/>
+        </p:nvSpPr>
+        <p:spPr>
+          <a:xfrm xmlns:a="http://schemas.openxmlformats.org/drawingml/2006/main">
+            <a:off x="9067800" y="4676775"/>
+            <a:ext cx="2514600" cy="638175"/>
+          </a:xfrm>
+          <a:prstGeom xmlns:a="http://schemas.openxmlformats.org/drawingml/2006/main" prst="rect">
+            <a:avLst/>
+          </a:prstGeom>
+          <a:noFill xmlns:a="http://schemas.openxmlformats.org/drawingml/2006/main"/>
+          <a:ln xmlns:a="http://schemas.openxmlformats.org/drawingml/2006/main" w="0">
+            <a:noFill/>
+          </a:ln>
+        </p:spPr>
+        <p:txBody>
+          <a:bodyPr xmlns:a="http://schemas.openxmlformats.org/drawingml/2006/main" wrap="square" lIns="0" tIns="0" rIns="0" bIns="0" anchor="t">
+            <a:noAutofit/>
+          </a:bodyPr>
+          <a:lstStyle xmlns:a="http://schemas.openxmlformats.org/drawingml/2006/main"/>
+          <a:p xmlns:a="http://schemas.openxmlformats.org/drawingml/2006/main">
+            <a:pPr algn="l">
+              <a:defRPr sz="1575" b="0">
+                <a:solidFill>
+                  <a:srgbClr val="24384A"/>
+                </a:solidFill>
+                <a:latin typeface="Arial"/>
+                <a:ea typeface="Arial"/>
+                <a:cs typeface="Arial"/>
+              </a:defRPr>
+            </a:pPr>
+            <a:r>
+              <a:rPr sz="1575" b="0">
+                <a:solidFill>
+                  <a:srgbClr val="24384A"/>
+                </a:solidFill>
+                <a:latin typeface="Arial"/>
+                <a:ea typeface="Arial"/>
+                <a:cs typeface="Arial"/>
+              </a:rPr>
+              <a:t>+ termo consent na busca,</a:t>
+            </a:r>
+          </a:p>
+          <a:p xmlns:a="http://schemas.openxmlformats.org/drawingml/2006/main">
+            <a:pPr algn="l">
+              <a:defRPr sz="1575" b="0">
+                <a:solidFill>
+                  <a:srgbClr val="24384A"/>
+                </a:solidFill>
+                <a:latin typeface="Arial"/>
+                <a:ea typeface="Arial"/>
+                <a:cs typeface="Arial"/>
+              </a:defRPr>
+            </a:pPr>
+            <a:r>
+              <a:rPr sz="1575" b="0">
+                <a:solidFill>
+                  <a:srgbClr val="24384A"/>
+                </a:solidFill>
+                <a:latin typeface="Arial"/>
+                <a:ea typeface="Arial"/>
+                <a:cs typeface="Arial"/>
+              </a:rPr>
               <a:t>período 2018–2025</a:t>
             </a:r>
           </a:p>
@@ -17227,21 +17496,21 @@
       </p:sp>
       <p:sp>
         <p:nvSpPr>
-          <p:cNvPr id="21" name="">
-            <a:extLst xmlns:a="http://schemas.openxmlformats.org/drawingml/2006/main">
-              <a:ext uri="{FF2B5EF4-FFF2-40B4-BE49-F238E27FC236}">
-                <a16:creationId xmlns:a16="http://schemas.microsoft.com/office/drawing/2014/main" id="{7EE08E11-FC58-4B22-9541-3E99E789EF6B}"/>
-              </a:ext>
-            </a:extLst>
-          </p:cNvPr>
-          <p:cNvSpPr>
-            <a:spLocks xmlns:a="http://schemas.openxmlformats.org/drawingml/2006/main" noGrp="1"/>
-          </p:cNvSpPr>
-          <p:nvPr/>
-        </p:nvSpPr>
-        <p:spPr>
-          <a:xfrm xmlns:a="http://schemas.openxmlformats.org/drawingml/2006/main">
-            <a:off x="609600" y="5257800"/>
+          <p:cNvPr id="25" name="">
+            <a:extLst xmlns:a="http://schemas.openxmlformats.org/drawingml/2006/main">
+              <a:ext uri="{FF2B5EF4-FFF2-40B4-BE49-F238E27FC236}">
+                <a16:creationId xmlns:a16="http://schemas.microsoft.com/office/drawing/2014/main" id="{67742D04-1F1D-45F1-9FCB-136342528BB2}"/>
+              </a:ext>
+            </a:extLst>
+          </p:cNvPr>
+          <p:cNvSpPr>
+            <a:spLocks xmlns:a="http://schemas.openxmlformats.org/drawingml/2006/main" noGrp="1"/>
+          </p:cNvSpPr>
+          <p:nvPr/>
+        </p:nvSpPr>
+        <p:spPr>
+          <a:xfrm xmlns:a="http://schemas.openxmlformats.org/drawingml/2006/main">
+            <a:off x="609600" y="5410200"/>
             <a:ext cx="10972800" cy="9525"/>
           </a:xfrm>
           <a:prstGeom xmlns:a="http://schemas.openxmlformats.org/drawingml/2006/main" prst="rect">
@@ -17257,10 +17526,10 @@
       </p:sp>
       <p:sp>
         <p:nvSpPr>
-          <p:cNvPr id="22" name="1 artigo selecionado">
-            <a:extLst xmlns:a="http://schemas.openxmlformats.org/drawingml/2006/main">
-              <a:ext uri="{FF2B5EF4-FFF2-40B4-BE49-F238E27FC236}">
-                <a16:creationId xmlns:a16="http://schemas.microsoft.com/office/drawing/2014/main" id="{2FC481BD-67E6-4C83-828E-27B3017F5227}"/>
+          <p:cNvPr id="26" name="1 artigo selecionado">
+            <a:extLst xmlns:a="http://schemas.openxmlformats.org/drawingml/2006/main">
+              <a:ext uri="{FF2B5EF4-FFF2-40B4-BE49-F238E27FC236}">
+                <a16:creationId xmlns:a16="http://schemas.microsoft.com/office/drawing/2014/main" id="{1FE5FE75-C50F-49DB-868D-29C2250DEC93}"/>
               </a:ext>
             </a:extLst>
           </p:cNvPr>
@@ -17314,22 +17583,22 @@
       </p:sp>
       <p:sp>
         <p:nvSpPr>
-          <p:cNvPr id="23" name="Leitura de títulos e resumos. Prioridade">
-            <a:extLst xmlns:a="http://schemas.openxmlformats.org/drawingml/2006/main">
-              <a:ext uri="{FF2B5EF4-FFF2-40B4-BE49-F238E27FC236}">
-                <a16:creationId xmlns:a16="http://schemas.microsoft.com/office/drawing/2014/main" id="{9BA87AF0-11D8-4126-AE0C-64CE7A9011F2}"/>
-              </a:ext>
-            </a:extLst>
-          </p:cNvPr>
-          <p:cNvSpPr>
-            <a:spLocks xmlns:a="http://schemas.openxmlformats.org/drawingml/2006/main" noGrp="1"/>
-          </p:cNvSpPr>
-          <p:nvPr/>
-        </p:nvSpPr>
-        <p:spPr>
-          <a:xfrm xmlns:a="http://schemas.openxmlformats.org/drawingml/2006/main">
-            <a:off x="4286250" y="5514975"/>
-            <a:ext cx="7296150" cy="666750"/>
+          <p:cNvPr id="27" name="O termo consent delimita o recorte do TC">
+            <a:extLst xmlns:a="http://schemas.openxmlformats.org/drawingml/2006/main">
+              <a:ext uri="{FF2B5EF4-FFF2-40B4-BE49-F238E27FC236}">
+                <a16:creationId xmlns:a16="http://schemas.microsoft.com/office/drawing/2014/main" id="{755C04B3-76E5-41D2-9EB8-CF72462A3C35}"/>
+              </a:ext>
+            </a:extLst>
+          </p:cNvPr>
+          <p:cNvSpPr>
+            <a:spLocks xmlns:a="http://schemas.openxmlformats.org/drawingml/2006/main" noGrp="1"/>
+          </p:cNvSpPr>
+          <p:nvPr/>
+        </p:nvSpPr>
+        <p:spPr>
+          <a:xfrm xmlns:a="http://schemas.openxmlformats.org/drawingml/2006/main">
+            <a:off x="4286250" y="5572125"/>
+            <a:ext cx="7296150" cy="638175"/>
           </a:xfrm>
           <a:prstGeom xmlns:a="http://schemas.openxmlformats.org/drawingml/2006/main" prst="rect">
             <a:avLst/>
@@ -17364,7 +17633,7 @@
                 <a:ea typeface="Arial"/>
                 <a:cs typeface="Arial"/>
               </a:rPr>
-              <a:t>Leitura de títulos e resumos. Prioridade para Android,</a:t>
+              <a:t>O termo consent delimita o recorte do TCC.</a:t>
             </a:r>
           </a:p>
           <a:p xmlns:a="http://schemas.openxmlformats.org/drawingml/2006/main">
@@ -17387,7 +17656,7 @@
                 <a:ea typeface="Arial"/>
                 <a:cs typeface="Arial"/>
               </a:rPr>
-              <a:t>consentimento, escala do estudo e relação com o TCC.</a:t>
+              <a:t>Depois, leitura de títulos e resumos dos finalistas.</a:t>
             </a:r>
           </a:p>
         </p:txBody>
@@ -17395,7 +17664,7 @@
     </p:spTree>
     <p:extLst>
       <p:ext uri="{BB962C8B-B14F-4D97-AF65-F5344CB8AC3E}">
-        <p14:creationId xmlns:p14="http://schemas.microsoft.com/office/powerpoint/2010/main" val="394030122"/>
+        <p14:creationId xmlns:p14="http://schemas.microsoft.com/office/powerpoint/2010/main" val="143248623"/>
       </p:ext>
     </p:extLst>
   </p:cSld>
@@ -17426,7 +17695,7 @@
           <p:cNvPr id="20" name="">
             <a:extLst xmlns:a="http://schemas.openxmlformats.org/drawingml/2006/main">
               <a:ext uri="{FF2B5EF4-FFF2-40B4-BE49-F238E27FC236}">
-                <a16:creationId xmlns:a16="http://schemas.microsoft.com/office/drawing/2014/main" id="{7BA34C11-0E6B-4582-8B8D-6AE6AAB7D42F}"/>
+                <a16:creationId xmlns:a16="http://schemas.microsoft.com/office/drawing/2014/main" id="{DC3CE4BA-7E83-47D3-A29A-FE29D579F86A}"/>
               </a:ext>
             </a:extLst>
           </p:cNvPr>
@@ -17456,7 +17725,7 @@
           <p:cNvPr id="2" name="ANÁLISE METODOLÓGICA">
             <a:extLst xmlns:a="http://schemas.openxmlformats.org/drawingml/2006/main">
               <a:ext uri="{FF2B5EF4-FFF2-40B4-BE49-F238E27FC236}">
-                <a16:creationId xmlns:a16="http://schemas.microsoft.com/office/drawing/2014/main" id="{E249576C-6A53-45DD-AD00-C3A20B50FE91}"/>
+                <a16:creationId xmlns:a16="http://schemas.microsoft.com/office/drawing/2014/main" id="{367AF933-6DDC-446C-B30A-9E376A634EFE}"/>
               </a:ext>
             </a:extLst>
           </p:cNvPr>
@@ -17513,7 +17782,7 @@
           <p:cNvPr id="3" name="Limites da evidência e da generalização">
             <a:extLst xmlns:a="http://schemas.openxmlformats.org/drawingml/2006/main">
               <a:ext uri="{FF2B5EF4-FFF2-40B4-BE49-F238E27FC236}">
-                <a16:creationId xmlns:a16="http://schemas.microsoft.com/office/drawing/2014/main" id="{BABD8FDB-CCC8-4A9F-B8D2-215DFC1C9A2B}"/>
+                <a16:creationId xmlns:a16="http://schemas.microsoft.com/office/drawing/2014/main" id="{8F94D8E2-C335-40DC-8CE4-0C9B52F5C368}"/>
               </a:ext>
             </a:extLst>
           </p:cNvPr>
@@ -17570,7 +17839,7 @@
           <p:cNvPr id="4" name="">
             <a:extLst xmlns:a="http://schemas.openxmlformats.org/drawingml/2006/main">
               <a:ext uri="{FF2B5EF4-FFF2-40B4-BE49-F238E27FC236}">
-                <a16:creationId xmlns:a16="http://schemas.microsoft.com/office/drawing/2014/main" id="{6E7D9547-DF65-4FAD-BEC5-89690EC8B5A3}"/>
+                <a16:creationId xmlns:a16="http://schemas.microsoft.com/office/drawing/2014/main" id="{05731468-8770-48AB-BDAA-16CEBE7224F3}"/>
               </a:ext>
             </a:extLst>
           </p:cNvPr>
@@ -17600,7 +17869,7 @@
           <p:cNvPr id="5" name="">
             <a:extLst xmlns:a="http://schemas.openxmlformats.org/drawingml/2006/main">
               <a:ext uri="{FF2B5EF4-FFF2-40B4-BE49-F238E27FC236}">
-                <a16:creationId xmlns:a16="http://schemas.microsoft.com/office/drawing/2014/main" id="{95C7C60F-61C1-4ACF-8685-A5E86602FD43}"/>
+                <a16:creationId xmlns:a16="http://schemas.microsoft.com/office/drawing/2014/main" id="{97EA538B-A19C-4838-B6E5-BB4A79F181A4}"/>
               </a:ext>
             </a:extLst>
           </p:cNvPr>
@@ -17630,7 +17899,7 @@
           <p:cNvPr id="6" name="Nguyen, Backes e Stock (2022), Seções 4.">
             <a:extLst xmlns:a="http://schemas.openxmlformats.org/drawingml/2006/main">
               <a:ext uri="{FF2B5EF4-FFF2-40B4-BE49-F238E27FC236}">
-                <a16:creationId xmlns:a16="http://schemas.microsoft.com/office/drawing/2014/main" id="{447A5118-7A8F-4235-8262-E5A2E7A6943F}"/>
+                <a16:creationId xmlns:a16="http://schemas.microsoft.com/office/drawing/2014/main" id="{113A5A6B-91CE-433D-8EE0-958FA4239B8B}"/>
               </a:ext>
             </a:extLst>
           </p:cNvPr>
@@ -17642,7 +17911,7 @@
         <p:spPr>
           <a:xfrm xmlns:a="http://schemas.openxmlformats.org/drawingml/2006/main">
             <a:off x="609600" y="6477000"/>
-            <a:ext cx="10096500" cy="228600"/>
+            <a:ext cx="9982200" cy="228600"/>
           </a:xfrm>
           <a:prstGeom xmlns:a="http://schemas.openxmlformats.org/drawingml/2006/main" prst="rect">
             <a:avLst/>
@@ -17659,7 +17928,7 @@
           <a:lstStyle xmlns:a="http://schemas.openxmlformats.org/drawingml/2006/main"/>
           <a:p xmlns:a="http://schemas.openxmlformats.org/drawingml/2006/main">
             <a:pPr algn="l">
-              <a:defRPr sz="1125" b="0">
+              <a:defRPr sz="1200" b="0">
                 <a:solidFill>
                   <a:srgbClr val="596B7A"/>
                 </a:solidFill>
@@ -17669,7 +17938,7 @@
               </a:defRPr>
             </a:pPr>
             <a:r>
-              <a:rPr sz="1125" b="0">
+              <a:rPr sz="1200" b="0">
                 <a:solidFill>
                   <a:srgbClr val="596B7A"/>
                 </a:solidFill>
@@ -17687,7 +17956,7 @@
           <p:cNvPr id="7" name="20 / 23">
             <a:extLst xmlns:a="http://schemas.openxmlformats.org/drawingml/2006/main">
               <a:ext uri="{FF2B5EF4-FFF2-40B4-BE49-F238E27FC236}">
-                <a16:creationId xmlns:a16="http://schemas.microsoft.com/office/drawing/2014/main" id="{62D36516-2313-4013-8EAF-389E1E73CF91}"/>
+                <a16:creationId xmlns:a16="http://schemas.microsoft.com/office/drawing/2014/main" id="{E05E1810-F5C1-40ED-83CC-37EC421933FB}"/>
               </a:ext>
             </a:extLst>
           </p:cNvPr>
@@ -17716,7 +17985,7 @@
           <a:lstStyle xmlns:a="http://schemas.openxmlformats.org/drawingml/2006/main"/>
           <a:p xmlns:a="http://schemas.openxmlformats.org/drawingml/2006/main">
             <a:pPr algn="r">
-              <a:defRPr sz="1125" b="0">
+              <a:defRPr sz="1200" b="0">
                 <a:solidFill>
                   <a:srgbClr val="596B7A"/>
                 </a:solidFill>
@@ -17726,7 +17995,7 @@
               </a:defRPr>
             </a:pPr>
             <a:r>
-              <a:rPr sz="1125" b="0">
+              <a:rPr sz="1200" b="0">
                 <a:solidFill>
                   <a:srgbClr val="596B7A"/>
                 </a:solidFill>
@@ -17744,7 +18013,7 @@
           <p:cNvPr id="8" name="CORPUS">
             <a:extLst xmlns:a="http://schemas.openxmlformats.org/drawingml/2006/main">
               <a:ext uri="{FF2B5EF4-FFF2-40B4-BE49-F238E27FC236}">
-                <a16:creationId xmlns:a16="http://schemas.microsoft.com/office/drawing/2014/main" id="{127DE0BF-4409-4EE0-93F8-9642432158B3}"/>
+                <a16:creationId xmlns:a16="http://schemas.microsoft.com/office/drawing/2014/main" id="{D304B653-2BCB-4423-9025-545EAA1F2D76}"/>
               </a:ext>
             </a:extLst>
           </p:cNvPr>
@@ -17801,7 +18070,7 @@
           <p:cNvPr id="9" name="Somente aplicativos gratuitos que atendi">
             <a:extLst xmlns:a="http://schemas.openxmlformats.org/drawingml/2006/main">
               <a:ext uri="{FF2B5EF4-FFF2-40B4-BE49-F238E27FC236}">
-                <a16:creationId xmlns:a16="http://schemas.microsoft.com/office/drawing/2014/main" id="{97ED2B93-01AD-4B93-86CD-E7B1A59A39BB}"/>
+                <a16:creationId xmlns:a16="http://schemas.microsoft.com/office/drawing/2014/main" id="{5C70E821-6225-4A6D-ADF8-43C4F9300849}"/>
               </a:ext>
             </a:extLst>
           </p:cNvPr>
@@ -17881,7 +18150,7 @@
           <p:cNvPr id="10" name="">
             <a:extLst xmlns:a="http://schemas.openxmlformats.org/drawingml/2006/main">
               <a:ext uri="{FF2B5EF4-FFF2-40B4-BE49-F238E27FC236}">
-                <a16:creationId xmlns:a16="http://schemas.microsoft.com/office/drawing/2014/main" id="{75109FC3-0FA5-4F39-94A9-702182476731}"/>
+                <a16:creationId xmlns:a16="http://schemas.microsoft.com/office/drawing/2014/main" id="{C9E294D5-B68F-4AE3-B811-4BAF50BEB211}"/>
               </a:ext>
             </a:extLst>
           </p:cNvPr>
@@ -17911,7 +18180,7 @@
           <p:cNvPr id="11" name="EXECUÇÃO">
             <a:extLst xmlns:a="http://schemas.openxmlformats.org/drawingml/2006/main">
               <a:ext uri="{FF2B5EF4-FFF2-40B4-BE49-F238E27FC236}">
-                <a16:creationId xmlns:a16="http://schemas.microsoft.com/office/drawing/2014/main" id="{87458310-251F-4E1D-80B2-27AA5FF30950}"/>
+                <a16:creationId xmlns:a16="http://schemas.microsoft.com/office/drawing/2014/main" id="{969E4ED0-CDCF-4249-9556-D27FB72E076C}"/>
               </a:ext>
             </a:extLst>
           </p:cNvPr>
@@ -17968,7 +18237,7 @@
           <p:cNvPr id="12" name="11.591 apps não puderam ser analisados p">
             <a:extLst xmlns:a="http://schemas.openxmlformats.org/drawingml/2006/main">
               <a:ext uri="{FF2B5EF4-FFF2-40B4-BE49-F238E27FC236}">
-                <a16:creationId xmlns:a16="http://schemas.microsoft.com/office/drawing/2014/main" id="{1C8A193F-51B5-40B0-BD1B-DFCD9F06C22F}"/>
+                <a16:creationId xmlns:a16="http://schemas.microsoft.com/office/drawing/2014/main" id="{656B6269-89A9-417F-9BEF-46A49E77DCC0}"/>
               </a:ext>
             </a:extLst>
           </p:cNvPr>
@@ -18048,7 +18317,7 @@
           <p:cNvPr id="13" name="">
             <a:extLst xmlns:a="http://schemas.openxmlformats.org/drawingml/2006/main">
               <a:ext uri="{FF2B5EF4-FFF2-40B4-BE49-F238E27FC236}">
-                <a16:creationId xmlns:a16="http://schemas.microsoft.com/office/drawing/2014/main" id="{404DAD1D-4788-4695-9CD6-1252E1A7CEC5}"/>
+                <a16:creationId xmlns:a16="http://schemas.microsoft.com/office/drawing/2014/main" id="{8A8A70D7-8426-463B-B115-F81693FD086E}"/>
               </a:ext>
             </a:extLst>
           </p:cNvPr>
@@ -18078,7 +18347,7 @@
           <p:cNvPr id="14" name="IDIOMA E OCR">
             <a:extLst xmlns:a="http://schemas.openxmlformats.org/drawingml/2006/main">
               <a:ext uri="{FF2B5EF4-FFF2-40B4-BE49-F238E27FC236}">
-                <a16:creationId xmlns:a16="http://schemas.microsoft.com/office/drawing/2014/main" id="{06C85EB6-9F65-4064-A5CB-4A06595FA646}"/>
+                <a16:creationId xmlns:a16="http://schemas.microsoft.com/office/drawing/2014/main" id="{29F9511B-F38E-4ED0-A061-933FC73A1B6A}"/>
               </a:ext>
             </a:extLst>
           </p:cNvPr>
@@ -18135,7 +18404,7 @@
           <p:cNvPr id="15" name="1.996 interfaces relacionadas à privacid">
             <a:extLst xmlns:a="http://schemas.openxmlformats.org/drawingml/2006/main">
               <a:ext uri="{FF2B5EF4-FFF2-40B4-BE49-F238E27FC236}">
-                <a16:creationId xmlns:a16="http://schemas.microsoft.com/office/drawing/2014/main" id="{362A3349-2423-4E7F-AF10-C5A6147B66FD}"/>
+                <a16:creationId xmlns:a16="http://schemas.microsoft.com/office/drawing/2014/main" id="{FC7CD597-836C-4658-BBB5-0F9FF8BFC5A8}"/>
               </a:ext>
             </a:extLst>
           </p:cNvPr>
@@ -18215,7 +18484,7 @@
           <p:cNvPr id="16" name="">
             <a:extLst xmlns:a="http://schemas.openxmlformats.org/drawingml/2006/main">
               <a:ext uri="{FF2B5EF4-FFF2-40B4-BE49-F238E27FC236}">
-                <a16:creationId xmlns:a16="http://schemas.microsoft.com/office/drawing/2014/main" id="{4E3579DB-8B45-4C72-8978-317B56B47CD5}"/>
+                <a16:creationId xmlns:a16="http://schemas.microsoft.com/office/drawing/2014/main" id="{EBE3A2D3-9C32-4DAA-B638-75348F8A95EE}"/>
               </a:ext>
             </a:extLst>
           </p:cNvPr>
@@ -18245,7 +18514,7 @@
           <p:cNvPr id="17" name="OBSERVAÇÃO">
             <a:extLst xmlns:a="http://schemas.openxmlformats.org/drawingml/2006/main">
               <a:ext uri="{FF2B5EF4-FFF2-40B4-BE49-F238E27FC236}">
-                <a16:creationId xmlns:a16="http://schemas.microsoft.com/office/drawing/2014/main" id="{DFAD5E0D-2A05-48B8-A0E2-D6BF886C4E19}"/>
+                <a16:creationId xmlns:a16="http://schemas.microsoft.com/office/drawing/2014/main" id="{00F2C874-AD55-4818-A7AE-06D8E7684A80}"/>
               </a:ext>
             </a:extLst>
           </p:cNvPr>
@@ -18302,7 +18571,7 @@
           <p:cNvPr id="18" name="Execuções de até 150 s e foco em 45 domí">
             <a:extLst xmlns:a="http://schemas.openxmlformats.org/drawingml/2006/main">
               <a:ext uri="{FF2B5EF4-FFF2-40B4-BE49-F238E27FC236}">
-                <a16:creationId xmlns:a16="http://schemas.microsoft.com/office/drawing/2014/main" id="{39AD9246-1DC1-477D-B74C-0AEF80C2E72D}"/>
+                <a16:creationId xmlns:a16="http://schemas.microsoft.com/office/drawing/2014/main" id="{821185B2-15F6-4355-AEEA-9CBC31FF8862}"/>
               </a:ext>
             </a:extLst>
           </p:cNvPr>
@@ -18382,7 +18651,7 @@
           <p:cNvPr id="19" name="Análise do seminário: uma falha não obse">
             <a:extLst xmlns:a="http://schemas.openxmlformats.org/drawingml/2006/main">
               <a:ext uri="{FF2B5EF4-FFF2-40B4-BE49-F238E27FC236}">
-                <a16:creationId xmlns:a16="http://schemas.microsoft.com/office/drawing/2014/main" id="{FFB28A5C-33F3-44C1-9E2A-C33E494AE275}"/>
+                <a16:creationId xmlns:a16="http://schemas.microsoft.com/office/drawing/2014/main" id="{CB51858C-AE8D-4597-9D3C-A88F962C607B}"/>
               </a:ext>
             </a:extLst>
           </p:cNvPr>
@@ -18437,7 +18706,7 @@
     </p:spTree>
     <p:extLst>
       <p:ext uri="{BB962C8B-B14F-4D97-AF65-F5344CB8AC3E}">
-        <p14:creationId xmlns:p14="http://schemas.microsoft.com/office/powerpoint/2010/main" val="1893639348"/>
+        <p14:creationId xmlns:p14="http://schemas.microsoft.com/office/powerpoint/2010/main" val="1757707378"/>
       </p:ext>
     </p:extLst>
   </p:cSld>
@@ -18468,7 +18737,7 @@
           <p:cNvPr id="19" name="">
             <a:extLst xmlns:a="http://schemas.openxmlformats.org/drawingml/2006/main">
               <a:ext uri="{FF2B5EF4-FFF2-40B4-BE49-F238E27FC236}">
-                <a16:creationId xmlns:a16="http://schemas.microsoft.com/office/drawing/2014/main" id="{B2098F3A-78DC-4840-A513-EC2642D19CFB}"/>
+                <a16:creationId xmlns:a16="http://schemas.microsoft.com/office/drawing/2014/main" id="{9F713F29-D56D-493E-A179-0C4C5ADFCE36}"/>
               </a:ext>
             </a:extLst>
           </p:cNvPr>
@@ -18498,7 +18767,7 @@
           <p:cNvPr id="2" name="ANÁLISE DA SEÇÃO 8">
             <a:extLst xmlns:a="http://schemas.openxmlformats.org/drawingml/2006/main">
               <a:ext uri="{FF2B5EF4-FFF2-40B4-BE49-F238E27FC236}">
-                <a16:creationId xmlns:a16="http://schemas.microsoft.com/office/drawing/2014/main" id="{17AEACE6-19B1-4092-AC36-702BE181A6D8}"/>
+                <a16:creationId xmlns:a16="http://schemas.microsoft.com/office/drawing/2014/main" id="{03515970-1174-49FB-ACBC-DFE094CF97AF}"/>
               </a:ext>
             </a:extLst>
           </p:cNvPr>
@@ -18555,7 +18824,7 @@
           <p:cNvPr id="3" name="Conclusão: retomada do objetivo e dos nú">
             <a:extLst xmlns:a="http://schemas.openxmlformats.org/drawingml/2006/main">
               <a:ext uri="{FF2B5EF4-FFF2-40B4-BE49-F238E27FC236}">
-                <a16:creationId xmlns:a16="http://schemas.microsoft.com/office/drawing/2014/main" id="{0637AE2F-B8D9-4CE4-87BD-7131BFD839DD}"/>
+                <a16:creationId xmlns:a16="http://schemas.microsoft.com/office/drawing/2014/main" id="{691F28FB-0B2C-48BF-AF3B-EBCCB24BC699}"/>
               </a:ext>
             </a:extLst>
           </p:cNvPr>
@@ -18612,7 +18881,7 @@
           <p:cNvPr id="4" name="">
             <a:extLst xmlns:a="http://schemas.openxmlformats.org/drawingml/2006/main">
               <a:ext uri="{FF2B5EF4-FFF2-40B4-BE49-F238E27FC236}">
-                <a16:creationId xmlns:a16="http://schemas.microsoft.com/office/drawing/2014/main" id="{4D276B0E-9A00-43D0-A923-59771263F4EB}"/>
+                <a16:creationId xmlns:a16="http://schemas.microsoft.com/office/drawing/2014/main" id="{2ED09F42-E7A3-4391-B234-F3839B4E2800}"/>
               </a:ext>
             </a:extLst>
           </p:cNvPr>
@@ -18642,7 +18911,7 @@
           <p:cNvPr id="5" name="">
             <a:extLst xmlns:a="http://schemas.openxmlformats.org/drawingml/2006/main">
               <a:ext uri="{FF2B5EF4-FFF2-40B4-BE49-F238E27FC236}">
-                <a16:creationId xmlns:a16="http://schemas.microsoft.com/office/drawing/2014/main" id="{3EAEBFA1-80CB-475A-9523-874FFE8CF677}"/>
+                <a16:creationId xmlns:a16="http://schemas.microsoft.com/office/drawing/2014/main" id="{FAC09205-4D55-4A9E-BE52-87AA28A6A53C}"/>
               </a:ext>
             </a:extLst>
           </p:cNvPr>
@@ -18672,7 +18941,7 @@
           <p:cNvPr id="6" name="Nguyen, Backes e Stock (2022), Seção 8, ">
             <a:extLst xmlns:a="http://schemas.openxmlformats.org/drawingml/2006/main">
               <a:ext uri="{FF2B5EF4-FFF2-40B4-BE49-F238E27FC236}">
-                <a16:creationId xmlns:a16="http://schemas.microsoft.com/office/drawing/2014/main" id="{96C4B19E-DFCE-44D4-89F3-5D4AC3568C4B}"/>
+                <a16:creationId xmlns:a16="http://schemas.microsoft.com/office/drawing/2014/main" id="{B05EBD99-C39B-43A8-924D-70F887A72F45}"/>
               </a:ext>
             </a:extLst>
           </p:cNvPr>
@@ -18684,7 +18953,7 @@
         <p:spPr>
           <a:xfrm xmlns:a="http://schemas.openxmlformats.org/drawingml/2006/main">
             <a:off x="609600" y="6477000"/>
-            <a:ext cx="10096500" cy="228600"/>
+            <a:ext cx="9982200" cy="228600"/>
           </a:xfrm>
           <a:prstGeom xmlns:a="http://schemas.openxmlformats.org/drawingml/2006/main" prst="rect">
             <a:avLst/>
@@ -18701,7 +18970,7 @@
           <a:lstStyle xmlns:a="http://schemas.openxmlformats.org/drawingml/2006/main"/>
           <a:p xmlns:a="http://schemas.openxmlformats.org/drawingml/2006/main">
             <a:pPr algn="l">
-              <a:defRPr sz="1125" b="0">
+              <a:defRPr sz="1200" b="0">
                 <a:solidFill>
                   <a:srgbClr val="596B7A"/>
                 </a:solidFill>
@@ -18711,7 +18980,7 @@
               </a:defRPr>
             </a:pPr>
             <a:r>
-              <a:rPr sz="1125" b="0">
+              <a:rPr sz="1200" b="0">
                 <a:solidFill>
                   <a:srgbClr val="596B7A"/>
                 </a:solidFill>
@@ -18729,7 +18998,7 @@
           <p:cNvPr id="7" name="21 / 23">
             <a:extLst xmlns:a="http://schemas.openxmlformats.org/drawingml/2006/main">
               <a:ext uri="{FF2B5EF4-FFF2-40B4-BE49-F238E27FC236}">
-                <a16:creationId xmlns:a16="http://schemas.microsoft.com/office/drawing/2014/main" id="{5C8E7AE7-B917-4C92-B554-73B1C5C394CD}"/>
+                <a16:creationId xmlns:a16="http://schemas.microsoft.com/office/drawing/2014/main" id="{E55742A4-1A6E-4E6C-AE13-04E47160D527}"/>
               </a:ext>
             </a:extLst>
           </p:cNvPr>
@@ -18758,7 +19027,7 @@
           <a:lstStyle xmlns:a="http://schemas.openxmlformats.org/drawingml/2006/main"/>
           <a:p xmlns:a="http://schemas.openxmlformats.org/drawingml/2006/main">
             <a:pPr algn="r">
-              <a:defRPr sz="1125" b="0">
+              <a:defRPr sz="1200" b="0">
                 <a:solidFill>
                   <a:srgbClr val="596B7A"/>
                 </a:solidFill>
@@ -18768,7 +19037,7 @@
               </a:defRPr>
             </a:pPr>
             <a:r>
-              <a:rPr sz="1125" b="0">
+              <a:rPr sz="1200" b="0">
                 <a:solidFill>
                   <a:srgbClr val="596B7A"/>
                 </a:solidFill>
@@ -18790,13 +19059,13 @@
           <p:nvPr/>
         </p:nvPicPr>
         <p:blipFill>
-          <a:blip xmlns:r="http://schemas.openxmlformats.org/officeDocument/2006/relationships" xmlns:a="http://schemas.openxmlformats.org/drawingml/2006/main" r:embed="R6ba4ee96d8a74861"/>
+          <a:blip xmlns:r="http://schemas.openxmlformats.org/officeDocument/2006/relationships" xmlns:a="http://schemas.openxmlformats.org/drawingml/2006/main" r:embed="Rce0c0dabff9a4525"/>
           <a:stretch xmlns:a="http://schemas.openxmlformats.org/drawingml/2006/main"/>
         </p:blipFill>
         <p:spPr>
           <a:xfrm xmlns:a="http://schemas.openxmlformats.org/drawingml/2006/main">
-            <a:off x="609600" y="1728924"/>
-            <a:ext cx="4267200" cy="3762103"/>
+            <a:off x="609600" y="1727897"/>
+            <a:ext cx="4267200" cy="3764156"/>
           </a:xfrm>
           <a:prstGeom xmlns:a="http://schemas.openxmlformats.org/drawingml/2006/main" prst="rect">
             <a:avLst/>
@@ -18808,7 +19077,7 @@
           <p:cNvPr id="9" name="Seção 8 do artigo, reproduzida integralm">
             <a:extLst xmlns:a="http://schemas.openxmlformats.org/drawingml/2006/main">
               <a:ext uri="{FF2B5EF4-FFF2-40B4-BE49-F238E27FC236}">
-                <a16:creationId xmlns:a16="http://schemas.microsoft.com/office/drawing/2014/main" id="{C3D18B39-BC9C-4BA5-B29C-0EDCBF5FFBD3}"/>
+                <a16:creationId xmlns:a16="http://schemas.microsoft.com/office/drawing/2014/main" id="{FE87E140-C8ED-4922-9758-38956558C417}"/>
               </a:ext>
             </a:extLst>
           </p:cNvPr>
@@ -18865,7 +19134,7 @@
           <p:cNvPr id="10" name="EN">
             <a:extLst xmlns:a="http://schemas.openxmlformats.org/drawingml/2006/main">
               <a:ext uri="{FF2B5EF4-FFF2-40B4-BE49-F238E27FC236}">
-                <a16:creationId xmlns:a16="http://schemas.microsoft.com/office/drawing/2014/main" id="{A9C94A0B-A3D2-4EB0-AA7F-74BFA5B40645}"/>
+                <a16:creationId xmlns:a16="http://schemas.microsoft.com/office/drawing/2014/main" id="{00FE8499-35C4-408C-9F32-DD9279C0C6A4}"/>
               </a:ext>
             </a:extLst>
           </p:cNvPr>
@@ -18894,7 +19163,7 @@
           <a:lstStyle xmlns:a="http://schemas.openxmlformats.org/drawingml/2006/main"/>
           <a:p xmlns:a="http://schemas.openxmlformats.org/drawingml/2006/main">
             <a:pPr algn="l">
-              <a:defRPr sz="1125" b="1">
+              <a:defRPr sz="1200" b="1">
                 <a:solidFill>
                   <a:srgbClr val="174875"/>
                 </a:solidFill>
@@ -18904,7 +19173,7 @@
               </a:defRPr>
             </a:pPr>
             <a:r>
-              <a:rPr sz="1125" b="1">
+              <a:rPr sz="1200" b="1">
                 <a:solidFill>
                   <a:srgbClr val="174875"/>
                 </a:solidFill>
@@ -18922,7 +19191,7 @@
           <p:cNvPr id="11" name="“we performed a systematic study into co">
             <a:extLst xmlns:a="http://schemas.openxmlformats.org/drawingml/2006/main">
               <a:ext uri="{FF2B5EF4-FFF2-40B4-BE49-F238E27FC236}">
-                <a16:creationId xmlns:a16="http://schemas.microsoft.com/office/drawing/2014/main" id="{810D7C08-401C-4E73-921B-C22BE949E7BC}"/>
+                <a16:creationId xmlns:a16="http://schemas.microsoft.com/office/drawing/2014/main" id="{FA1FACDC-02CE-40F6-8106-51AB2AC0F773}"/>
               </a:ext>
             </a:extLst>
           </p:cNvPr>
@@ -18979,7 +19248,7 @@
           <p:cNvPr id="12" name="PT">
             <a:extLst xmlns:a="http://schemas.openxmlformats.org/drawingml/2006/main">
               <a:ext uri="{FF2B5EF4-FFF2-40B4-BE49-F238E27FC236}">
-                <a16:creationId xmlns:a16="http://schemas.microsoft.com/office/drawing/2014/main" id="{7D5358BF-C862-4C7F-A1C9-DA8F3E301660}"/>
+                <a16:creationId xmlns:a16="http://schemas.microsoft.com/office/drawing/2014/main" id="{4E613578-9550-4826-A3AE-96F9F4F05FAE}"/>
               </a:ext>
             </a:extLst>
           </p:cNvPr>
@@ -19008,7 +19277,7 @@
           <a:lstStyle xmlns:a="http://schemas.openxmlformats.org/drawingml/2006/main"/>
           <a:p xmlns:a="http://schemas.openxmlformats.org/drawingml/2006/main">
             <a:pPr algn="l">
-              <a:defRPr sz="1125" b="1">
+              <a:defRPr sz="1200" b="1">
                 <a:solidFill>
                   <a:srgbClr val="174875"/>
                 </a:solidFill>
@@ -19018,7 +19287,7 @@
               </a:defRPr>
             </a:pPr>
             <a:r>
-              <a:rPr sz="1125" b="1">
+              <a:rPr sz="1200" b="1">
                 <a:solidFill>
                   <a:srgbClr val="174875"/>
                 </a:solidFill>
@@ -19036,7 +19305,7 @@
           <p:cNvPr id="13" name="Realizamos um estudo sistemático dos avi">
             <a:extLst xmlns:a="http://schemas.openxmlformats.org/drawingml/2006/main">
               <a:ext uri="{FF2B5EF4-FFF2-40B4-BE49-F238E27FC236}">
-                <a16:creationId xmlns:a16="http://schemas.microsoft.com/office/drawing/2014/main" id="{5F368096-4B11-45AA-AE6B-F26E1219549A}"/>
+                <a16:creationId xmlns:a16="http://schemas.microsoft.com/office/drawing/2014/main" id="{95BBB27C-1B03-4A03-A97A-62258FD68752}"/>
               </a:ext>
             </a:extLst>
           </p:cNvPr>
@@ -19093,7 +19362,7 @@
           <p:cNvPr id="14" name="">
             <a:extLst xmlns:a="http://schemas.openxmlformats.org/drawingml/2006/main">
               <a:ext uri="{FF2B5EF4-FFF2-40B4-BE49-F238E27FC236}">
-                <a16:creationId xmlns:a16="http://schemas.microsoft.com/office/drawing/2014/main" id="{6BA97425-C25B-450B-A527-B425EF5A563B}"/>
+                <a16:creationId xmlns:a16="http://schemas.microsoft.com/office/drawing/2014/main" id="{2E4147A4-D759-462F-ABEE-6C4E17562457}"/>
               </a:ext>
             </a:extLst>
           </p:cNvPr>
@@ -19123,7 +19392,7 @@
           <p:cNvPr id="15" name="30.160">
             <a:extLst xmlns:a="http://schemas.openxmlformats.org/drawingml/2006/main">
               <a:ext uri="{FF2B5EF4-FFF2-40B4-BE49-F238E27FC236}">
-                <a16:creationId xmlns:a16="http://schemas.microsoft.com/office/drawing/2014/main" id="{528BFB61-BE5A-45AE-88F2-BCFCF770B2F1}"/>
+                <a16:creationId xmlns:a16="http://schemas.microsoft.com/office/drawing/2014/main" id="{1B222748-B760-4D11-8955-12ADF687EACC}"/>
               </a:ext>
             </a:extLst>
           </p:cNvPr>
@@ -19180,7 +19449,7 @@
           <p:cNvPr id="16" name="apps sem aviso que&#10;enviaram dados">
             <a:extLst xmlns:a="http://schemas.openxmlformats.org/drawingml/2006/main">
               <a:ext uri="{FF2B5EF4-FFF2-40B4-BE49-F238E27FC236}">
-                <a16:creationId xmlns:a16="http://schemas.microsoft.com/office/drawing/2014/main" id="{117DC15B-3CFE-48E2-AE69-01AF2FFB257D}"/>
+                <a16:creationId xmlns:a16="http://schemas.microsoft.com/office/drawing/2014/main" id="{8371651B-0AA9-4DF2-B7DB-D8CBD81D990B}"/>
               </a:ext>
             </a:extLst>
           </p:cNvPr>
@@ -19260,7 +19529,7 @@
           <p:cNvPr id="17" name="2.688 (20,54%)">
             <a:extLst xmlns:a="http://schemas.openxmlformats.org/drawingml/2006/main">
               <a:ext uri="{FF2B5EF4-FFF2-40B4-BE49-F238E27FC236}">
-                <a16:creationId xmlns:a16="http://schemas.microsoft.com/office/drawing/2014/main" id="{5430658D-1F14-46DE-BC6E-89E2B0C53D97}"/>
+                <a16:creationId xmlns:a16="http://schemas.microsoft.com/office/drawing/2014/main" id="{3A2EC320-ED25-4986-87CF-4434598AAB8F}"/>
               </a:ext>
             </a:extLst>
           </p:cNvPr>
@@ -19317,7 +19586,7 @@
           <p:cNvPr id="18" name="dos 13.082 apps com aviso,&#10;com potencial">
             <a:extLst xmlns:a="http://schemas.openxmlformats.org/drawingml/2006/main">
               <a:ext uri="{FF2B5EF4-FFF2-40B4-BE49-F238E27FC236}">
-                <a16:creationId xmlns:a16="http://schemas.microsoft.com/office/drawing/2014/main" id="{9B1D243D-8264-40C5-A82B-C9810EAF7E19}"/>
+                <a16:creationId xmlns:a16="http://schemas.microsoft.com/office/drawing/2014/main" id="{A23B370F-A335-4552-9246-8226AD60E888}"/>
               </a:ext>
             </a:extLst>
           </p:cNvPr>
@@ -19395,7 +19664,7 @@
     </p:spTree>
     <p:extLst>
       <p:ext uri="{BB962C8B-B14F-4D97-AF65-F5344CB8AC3E}">
-        <p14:creationId xmlns:p14="http://schemas.microsoft.com/office/powerpoint/2010/main" val="853030406"/>
+        <p14:creationId xmlns:p14="http://schemas.microsoft.com/office/powerpoint/2010/main" val="1414628752"/>
       </p:ext>
     </p:extLst>
   </p:cSld>
@@ -19426,7 +19695,7 @@
           <p:cNvPr id="20" name="">
             <a:extLst xmlns:a="http://schemas.openxmlformats.org/drawingml/2006/main">
               <a:ext uri="{FF2B5EF4-FFF2-40B4-BE49-F238E27FC236}">
-                <a16:creationId xmlns:a16="http://schemas.microsoft.com/office/drawing/2014/main" id="{65E12884-5742-4F93-83C5-2DAF5105B3D2}"/>
+                <a16:creationId xmlns:a16="http://schemas.microsoft.com/office/drawing/2014/main" id="{2A936CBF-4443-4BB7-867D-9813F64CFB6E}"/>
               </a:ext>
             </a:extLst>
           </p:cNvPr>
@@ -19456,7 +19725,7 @@
           <p:cNvPr id="2" name="ANÁLISE DA SEÇÃO 8">
             <a:extLst xmlns:a="http://schemas.openxmlformats.org/drawingml/2006/main">
               <a:ext uri="{FF2B5EF4-FFF2-40B4-BE49-F238E27FC236}">
-                <a16:creationId xmlns:a16="http://schemas.microsoft.com/office/drawing/2014/main" id="{35BE1372-B7CF-4D54-9ADD-C7B0C5C7566A}"/>
+                <a16:creationId xmlns:a16="http://schemas.microsoft.com/office/drawing/2014/main" id="{8D8C3370-7B85-47CD-B6B6-E6D67F43EA0E}"/>
               </a:ext>
             </a:extLst>
           </p:cNvPr>
@@ -19513,7 +19782,7 @@
           <p:cNvPr id="3" name="Conclusão: transparência, suporte e caut">
             <a:extLst xmlns:a="http://schemas.openxmlformats.org/drawingml/2006/main">
               <a:ext uri="{FF2B5EF4-FFF2-40B4-BE49-F238E27FC236}">
-                <a16:creationId xmlns:a16="http://schemas.microsoft.com/office/drawing/2014/main" id="{5056431F-8543-4A00-AAB5-D77167BCE887}"/>
+                <a16:creationId xmlns:a16="http://schemas.microsoft.com/office/drawing/2014/main" id="{08AFA02B-F2B9-4A58-A19B-1C192332D57A}"/>
               </a:ext>
             </a:extLst>
           </p:cNvPr>
@@ -19570,7 +19839,7 @@
           <p:cNvPr id="4" name="">
             <a:extLst xmlns:a="http://schemas.openxmlformats.org/drawingml/2006/main">
               <a:ext uri="{FF2B5EF4-FFF2-40B4-BE49-F238E27FC236}">
-                <a16:creationId xmlns:a16="http://schemas.microsoft.com/office/drawing/2014/main" id="{DB2C7315-1F34-43FB-AD5C-BD68E063610D}"/>
+                <a16:creationId xmlns:a16="http://schemas.microsoft.com/office/drawing/2014/main" id="{0CA17AD4-5699-48E6-816B-32991C9E63B2}"/>
               </a:ext>
             </a:extLst>
           </p:cNvPr>
@@ -19600,7 +19869,7 @@
           <p:cNvPr id="5" name="">
             <a:extLst xmlns:a="http://schemas.openxmlformats.org/drawingml/2006/main">
               <a:ext uri="{FF2B5EF4-FFF2-40B4-BE49-F238E27FC236}">
-                <a16:creationId xmlns:a16="http://schemas.microsoft.com/office/drawing/2014/main" id="{345CA1A9-0435-4B28-BDA5-7124388BE38C}"/>
+                <a16:creationId xmlns:a16="http://schemas.microsoft.com/office/drawing/2014/main" id="{01A71CAA-1CC7-41CC-9900-7C81473CF82D}"/>
               </a:ext>
             </a:extLst>
           </p:cNvPr>
@@ -19630,7 +19899,7 @@
           <p:cNvPr id="6" name="Nguyen, Backes e Stock (2022), Abstract,">
             <a:extLst xmlns:a="http://schemas.openxmlformats.org/drawingml/2006/main">
               <a:ext uri="{FF2B5EF4-FFF2-40B4-BE49-F238E27FC236}">
-                <a16:creationId xmlns:a16="http://schemas.microsoft.com/office/drawing/2014/main" id="{0AF4DB65-F06E-463B-B67E-7EB5A6724124}"/>
+                <a16:creationId xmlns:a16="http://schemas.microsoft.com/office/drawing/2014/main" id="{94F3A2C0-04BE-4BC7-A1BF-2005C7CFF442}"/>
               </a:ext>
             </a:extLst>
           </p:cNvPr>
@@ -19642,7 +19911,7 @@
         <p:spPr>
           <a:xfrm xmlns:a="http://schemas.openxmlformats.org/drawingml/2006/main">
             <a:off x="609600" y="6477000"/>
-            <a:ext cx="10096500" cy="228600"/>
+            <a:ext cx="9982200" cy="228600"/>
           </a:xfrm>
           <a:prstGeom xmlns:a="http://schemas.openxmlformats.org/drawingml/2006/main" prst="rect">
             <a:avLst/>
@@ -19659,7 +19928,7 @@
           <a:lstStyle xmlns:a="http://schemas.openxmlformats.org/drawingml/2006/main"/>
           <a:p xmlns:a="http://schemas.openxmlformats.org/drawingml/2006/main">
             <a:pPr algn="l">
-              <a:defRPr sz="1125" b="0">
+              <a:defRPr sz="1200" b="0">
                 <a:solidFill>
                   <a:srgbClr val="596B7A"/>
                 </a:solidFill>
@@ -19669,7 +19938,7 @@
               </a:defRPr>
             </a:pPr>
             <a:r>
-              <a:rPr sz="1125" b="0">
+              <a:rPr sz="1200" b="0">
                 <a:solidFill>
                   <a:srgbClr val="596B7A"/>
                 </a:solidFill>
@@ -19687,7 +19956,7 @@
           <p:cNvPr id="7" name="22 / 23">
             <a:extLst xmlns:a="http://schemas.openxmlformats.org/drawingml/2006/main">
               <a:ext uri="{FF2B5EF4-FFF2-40B4-BE49-F238E27FC236}">
-                <a16:creationId xmlns:a16="http://schemas.microsoft.com/office/drawing/2014/main" id="{BC1984B1-39E9-4B6C-BE57-8BD7D5971F0D}"/>
+                <a16:creationId xmlns:a16="http://schemas.microsoft.com/office/drawing/2014/main" id="{BC8E5CD3-0D4F-4666-9985-F3A29DCB508A}"/>
               </a:ext>
             </a:extLst>
           </p:cNvPr>
@@ -19716,7 +19985,7 @@
           <a:lstStyle xmlns:a="http://schemas.openxmlformats.org/drawingml/2006/main"/>
           <a:p xmlns:a="http://schemas.openxmlformats.org/drawingml/2006/main">
             <a:pPr algn="r">
-              <a:defRPr sz="1125" b="0">
+              <a:defRPr sz="1200" b="0">
                 <a:solidFill>
                   <a:srgbClr val="596B7A"/>
                 </a:solidFill>
@@ -19726,7 +19995,7 @@
               </a:defRPr>
             </a:pPr>
             <a:r>
-              <a:rPr sz="1125" b="0">
+              <a:rPr sz="1200" b="0">
                 <a:solidFill>
                   <a:srgbClr val="596B7A"/>
                 </a:solidFill>
@@ -19744,7 +20013,7 @@
           <p:cNvPr id="8" name="EN">
             <a:extLst xmlns:a="http://schemas.openxmlformats.org/drawingml/2006/main">
               <a:ext uri="{FF2B5EF4-FFF2-40B4-BE49-F238E27FC236}">
-                <a16:creationId xmlns:a16="http://schemas.microsoft.com/office/drawing/2014/main" id="{9F9E50CC-0BE4-4663-B926-5382DF25E8BE}"/>
+                <a16:creationId xmlns:a16="http://schemas.microsoft.com/office/drawing/2014/main" id="{0C8E0C05-6F6A-41A3-A87F-518B5D81DC2C}"/>
               </a:ext>
             </a:extLst>
           </p:cNvPr>
@@ -19773,7 +20042,7 @@
           <a:lstStyle xmlns:a="http://schemas.openxmlformats.org/drawingml/2006/main"/>
           <a:p xmlns:a="http://schemas.openxmlformats.org/drawingml/2006/main">
             <a:pPr algn="l">
-              <a:defRPr sz="1125" b="1">
+              <a:defRPr sz="1200" b="1">
                 <a:solidFill>
                   <a:srgbClr val="287967"/>
                 </a:solidFill>
@@ -19783,7 +20052,7 @@
               </a:defRPr>
             </a:pPr>
             <a:r>
-              <a:rPr sz="1125" b="1">
+              <a:rPr sz="1200" b="1">
                 <a:solidFill>
                   <a:srgbClr val="287967"/>
                 </a:solidFill>
@@ -19801,7 +20070,7 @@
           <p:cNvPr id="9" name="“Our study showed the urgent need for mo">
             <a:extLst xmlns:a="http://schemas.openxmlformats.org/drawingml/2006/main">
               <a:ext uri="{FF2B5EF4-FFF2-40B4-BE49-F238E27FC236}">
-                <a16:creationId xmlns:a16="http://schemas.microsoft.com/office/drawing/2014/main" id="{62FFA6F4-A8D4-4899-81AF-0D5CA85BE61C}"/>
+                <a16:creationId xmlns:a16="http://schemas.microsoft.com/office/drawing/2014/main" id="{4B6CB3E8-F5C7-460A-B916-BAE7CEF089D7}"/>
               </a:ext>
             </a:extLst>
           </p:cNvPr>
@@ -19858,7 +20127,7 @@
           <p:cNvPr id="10" name="PT">
             <a:extLst xmlns:a="http://schemas.openxmlformats.org/drawingml/2006/main">
               <a:ext uri="{FF2B5EF4-FFF2-40B4-BE49-F238E27FC236}">
-                <a16:creationId xmlns:a16="http://schemas.microsoft.com/office/drawing/2014/main" id="{E9C09381-5BD9-4BFB-9750-42DA34F6E0E0}"/>
+                <a16:creationId xmlns:a16="http://schemas.microsoft.com/office/drawing/2014/main" id="{4E8F7D0E-5079-4D6E-903E-029061321B1D}"/>
               </a:ext>
             </a:extLst>
           </p:cNvPr>
@@ -19887,7 +20156,7 @@
           <a:lstStyle xmlns:a="http://schemas.openxmlformats.org/drawingml/2006/main"/>
           <a:p xmlns:a="http://schemas.openxmlformats.org/drawingml/2006/main">
             <a:pPr algn="l">
-              <a:defRPr sz="1125" b="1">
+              <a:defRPr sz="1200" b="1">
                 <a:solidFill>
                   <a:srgbClr val="287967"/>
                 </a:solidFill>
@@ -19897,7 +20166,7 @@
               </a:defRPr>
             </a:pPr>
             <a:r>
-              <a:rPr sz="1125" b="1">
+              <a:rPr sz="1200" b="1">
                 <a:solidFill>
                   <a:srgbClr val="287967"/>
                 </a:solidFill>
@@ -19915,7 +20184,7 @@
           <p:cNvPr id="11" name="Nosso estudo mostrou a necessidade urgen">
             <a:extLst xmlns:a="http://schemas.openxmlformats.org/drawingml/2006/main">
               <a:ext uri="{FF2B5EF4-FFF2-40B4-BE49-F238E27FC236}">
-                <a16:creationId xmlns:a16="http://schemas.microsoft.com/office/drawing/2014/main" id="{D9445AB7-9DBB-481F-86D2-BC91F2B65BB6}"/>
+                <a16:creationId xmlns:a16="http://schemas.microsoft.com/office/drawing/2014/main" id="{FF4149AC-99EA-4313-9891-EB4F4877C8D8}"/>
               </a:ext>
             </a:extLst>
           </p:cNvPr>
@@ -19972,7 +20241,7 @@
           <p:cNvPr id="12" name="">
             <a:extLst xmlns:a="http://schemas.openxmlformats.org/drawingml/2006/main">
               <a:ext uri="{FF2B5EF4-FFF2-40B4-BE49-F238E27FC236}">
-                <a16:creationId xmlns:a16="http://schemas.microsoft.com/office/drawing/2014/main" id="{8BD1ADF3-2517-4C59-9709-AD9BB1342E8B}"/>
+                <a16:creationId xmlns:a16="http://schemas.microsoft.com/office/drawing/2014/main" id="{22E0E060-D385-4041-9C7A-614D03DF7275}"/>
               </a:ext>
             </a:extLst>
           </p:cNvPr>
@@ -20002,7 +20271,7 @@
           <p:cNvPr id="13" name="ABSTRACT">
             <a:extLst xmlns:a="http://schemas.openxmlformats.org/drawingml/2006/main">
               <a:ext uri="{FF2B5EF4-FFF2-40B4-BE49-F238E27FC236}">
-                <a16:creationId xmlns:a16="http://schemas.microsoft.com/office/drawing/2014/main" id="{FDD826E9-41AA-4F9B-8762-E29C300F45CC}"/>
+                <a16:creationId xmlns:a16="http://schemas.microsoft.com/office/drawing/2014/main" id="{B92BD595-0089-444B-BF6A-6DE920C2C558}"/>
               </a:ext>
             </a:extLst>
           </p:cNvPr>
@@ -20059,7 +20328,7 @@
           <p:cNvPr id="14" name="EN  “apps violate”">
             <a:extLst xmlns:a="http://schemas.openxmlformats.org/drawingml/2006/main">
               <a:ext uri="{FF2B5EF4-FFF2-40B4-BE49-F238E27FC236}">
-                <a16:creationId xmlns:a16="http://schemas.microsoft.com/office/drawing/2014/main" id="{2B0E9D44-9396-49AD-9195-BF5D5962A8E1}"/>
+                <a16:creationId xmlns:a16="http://schemas.microsoft.com/office/drawing/2014/main" id="{C6AA197C-7220-4F24-9497-E1BAC8DFCBA5}"/>
               </a:ext>
             </a:extLst>
           </p:cNvPr>
@@ -20116,7 +20385,7 @@
           <p:cNvPr id="15" name="PT  aplicativos violam">
             <a:extLst xmlns:a="http://schemas.openxmlformats.org/drawingml/2006/main">
               <a:ext uri="{FF2B5EF4-FFF2-40B4-BE49-F238E27FC236}">
-                <a16:creationId xmlns:a16="http://schemas.microsoft.com/office/drawing/2014/main" id="{7D3F5D75-D0EE-4AB2-980F-72FE1D7249CD}"/>
+                <a16:creationId xmlns:a16="http://schemas.microsoft.com/office/drawing/2014/main" id="{9C6EDB22-383C-4432-8BBD-BC1EAF97D2C6}"/>
               </a:ext>
             </a:extLst>
           </p:cNvPr>
@@ -20173,7 +20442,7 @@
           <p:cNvPr id="16" name="CONCLUSION">
             <a:extLst xmlns:a="http://schemas.openxmlformats.org/drawingml/2006/main">
               <a:ext uri="{FF2B5EF4-FFF2-40B4-BE49-F238E27FC236}">
-                <a16:creationId xmlns:a16="http://schemas.microsoft.com/office/drawing/2014/main" id="{9805F545-1F7E-494A-A429-88D80D57D759}"/>
+                <a16:creationId xmlns:a16="http://schemas.microsoft.com/office/drawing/2014/main" id="{717E9592-B880-49F6-85DA-147E528362C3}"/>
               </a:ext>
             </a:extLst>
           </p:cNvPr>
@@ -20230,7 +20499,7 @@
           <p:cNvPr id="17" name="EN  “apps potentially violate”">
             <a:extLst xmlns:a="http://schemas.openxmlformats.org/drawingml/2006/main">
               <a:ext uri="{FF2B5EF4-FFF2-40B4-BE49-F238E27FC236}">
-                <a16:creationId xmlns:a16="http://schemas.microsoft.com/office/drawing/2014/main" id="{1F3799FA-71F2-4C6B-BA69-7C65521FAB16}"/>
+                <a16:creationId xmlns:a16="http://schemas.microsoft.com/office/drawing/2014/main" id="{CBD9AA35-9368-42DE-B54E-6FCBBB10FDA3}"/>
               </a:ext>
             </a:extLst>
           </p:cNvPr>
@@ -20287,7 +20556,7 @@
           <p:cNvPr id="18" name="PT  aplicativos potencialmente violam">
             <a:extLst xmlns:a="http://schemas.openxmlformats.org/drawingml/2006/main">
               <a:ext uri="{FF2B5EF4-FFF2-40B4-BE49-F238E27FC236}">
-                <a16:creationId xmlns:a16="http://schemas.microsoft.com/office/drawing/2014/main" id="{D6493568-19D7-452E-87AE-CC5ABC34BEDB}"/>
+                <a16:creationId xmlns:a16="http://schemas.microsoft.com/office/drawing/2014/main" id="{B8A7CA61-22F4-4377-9A3B-3EAD35C31DBF}"/>
               </a:ext>
             </a:extLst>
           </p:cNvPr>
@@ -20344,7 +20613,7 @@
           <p:cNvPr id="19" name="Análise do seminário: “potentially” expl">
             <a:extLst xmlns:a="http://schemas.openxmlformats.org/drawingml/2006/main">
               <a:ext uri="{FF2B5EF4-FFF2-40B4-BE49-F238E27FC236}">
-                <a16:creationId xmlns:a16="http://schemas.microsoft.com/office/drawing/2014/main" id="{5250573B-B9EC-4180-941E-7AB840FE4331}"/>
+                <a16:creationId xmlns:a16="http://schemas.microsoft.com/office/drawing/2014/main" id="{9DB6FD89-4B21-433D-B264-70B646708D7D}"/>
               </a:ext>
             </a:extLst>
           </p:cNvPr>
@@ -20399,7 +20668,7 @@
     </p:spTree>
     <p:extLst>
       <p:ext uri="{BB962C8B-B14F-4D97-AF65-F5344CB8AC3E}">
-        <p14:creationId xmlns:p14="http://schemas.microsoft.com/office/powerpoint/2010/main" val="1796457553"/>
+        <p14:creationId xmlns:p14="http://schemas.microsoft.com/office/powerpoint/2010/main" val="1320093411"/>
       </p:ext>
     </p:extLst>
   </p:cSld>
@@ -20430,7 +20699,7 @@
           <p:cNvPr id="18" name="">
             <a:extLst xmlns:a="http://schemas.openxmlformats.org/drawingml/2006/main">
               <a:ext uri="{FF2B5EF4-FFF2-40B4-BE49-F238E27FC236}">
-                <a16:creationId xmlns:a16="http://schemas.microsoft.com/office/drawing/2014/main" id="{A12630D6-E6DA-4DE8-91B1-2518437B6B2A}"/>
+                <a16:creationId xmlns:a16="http://schemas.microsoft.com/office/drawing/2014/main" id="{A9E846A9-B289-481E-9465-B278728762CF}"/>
               </a:ext>
             </a:extLst>
           </p:cNvPr>
@@ -20460,7 +20729,7 @@
           <p:cNvPr id="2" name="APLICAÇÃO AO PROJETO">
             <a:extLst xmlns:a="http://schemas.openxmlformats.org/drawingml/2006/main">
               <a:ext uri="{FF2B5EF4-FFF2-40B4-BE49-F238E27FC236}">
-                <a16:creationId xmlns:a16="http://schemas.microsoft.com/office/drawing/2014/main" id="{810283CA-8C6F-43B6-9B8B-27DB5CBBE522}"/>
+                <a16:creationId xmlns:a16="http://schemas.microsoft.com/office/drawing/2014/main" id="{8F29018B-C5DC-4DEC-B2AE-F9FEBA6E8D7D}"/>
               </a:ext>
             </a:extLst>
           </p:cNvPr>
@@ -20517,7 +20786,7 @@
           <p:cNvPr id="3" name="Contribuições para o meu TCC">
             <a:extLst xmlns:a="http://schemas.openxmlformats.org/drawingml/2006/main">
               <a:ext uri="{FF2B5EF4-FFF2-40B4-BE49-F238E27FC236}">
-                <a16:creationId xmlns:a16="http://schemas.microsoft.com/office/drawing/2014/main" id="{FE6972CA-FFBD-4D1C-A7BE-AC4B58CF7B6F}"/>
+                <a16:creationId xmlns:a16="http://schemas.microsoft.com/office/drawing/2014/main" id="{19D4E716-F836-46D9-B81C-BA27C14CC7AF}"/>
               </a:ext>
             </a:extLst>
           </p:cNvPr>
@@ -20574,7 +20843,7 @@
           <p:cNvPr id="4" name="">
             <a:extLst xmlns:a="http://schemas.openxmlformats.org/drawingml/2006/main">
               <a:ext uri="{FF2B5EF4-FFF2-40B4-BE49-F238E27FC236}">
-                <a16:creationId xmlns:a16="http://schemas.microsoft.com/office/drawing/2014/main" id="{40836EF4-28ED-4501-BA16-AEEDDE930E8F}"/>
+                <a16:creationId xmlns:a16="http://schemas.microsoft.com/office/drawing/2014/main" id="{0C5C1F3F-C222-4444-99F3-99BB402EF452}"/>
               </a:ext>
             </a:extLst>
           </p:cNvPr>
@@ -20604,7 +20873,7 @@
           <p:cNvPr id="5" name="">
             <a:extLst xmlns:a="http://schemas.openxmlformats.org/drawingml/2006/main">
               <a:ext uri="{FF2B5EF4-FFF2-40B4-BE49-F238E27FC236}">
-                <a16:creationId xmlns:a16="http://schemas.microsoft.com/office/drawing/2014/main" id="{EFF5E4D3-7065-4E1A-A5DA-BAED1FBF6DC7}"/>
+                <a16:creationId xmlns:a16="http://schemas.microsoft.com/office/drawing/2014/main" id="{F3D957EF-34C4-462E-9739-185E101FE468}"/>
               </a:ext>
             </a:extLst>
           </p:cNvPr>
@@ -20634,7 +20903,7 @@
           <p:cNvPr id="6" name="Fontes: artigo de Nguyen et al. (2022) e">
             <a:extLst xmlns:a="http://schemas.openxmlformats.org/drawingml/2006/main">
               <a:ext uri="{FF2B5EF4-FFF2-40B4-BE49-F238E27FC236}">
-                <a16:creationId xmlns:a16="http://schemas.microsoft.com/office/drawing/2014/main" id="{465AFB4D-829D-443D-A85E-76A2D5C08BF9}"/>
+                <a16:creationId xmlns:a16="http://schemas.microsoft.com/office/drawing/2014/main" id="{885640DB-8830-45ED-85E4-5871A0D481E6}"/>
               </a:ext>
             </a:extLst>
           </p:cNvPr>
@@ -20646,7 +20915,7 @@
         <p:spPr>
           <a:xfrm xmlns:a="http://schemas.openxmlformats.org/drawingml/2006/main">
             <a:off x="609600" y="6477000"/>
-            <a:ext cx="10096500" cy="228600"/>
+            <a:ext cx="9982200" cy="228600"/>
           </a:xfrm>
           <a:prstGeom xmlns:a="http://schemas.openxmlformats.org/drawingml/2006/main" prst="rect">
             <a:avLst/>
@@ -20663,7 +20932,7 @@
           <a:lstStyle xmlns:a="http://schemas.openxmlformats.org/drawingml/2006/main"/>
           <a:p xmlns:a="http://schemas.openxmlformats.org/drawingml/2006/main">
             <a:pPr algn="l">
-              <a:defRPr sz="1125" b="0">
+              <a:defRPr sz="1200" b="0">
                 <a:solidFill>
                   <a:srgbClr val="596B7A"/>
                 </a:solidFill>
@@ -20673,7 +20942,7 @@
               </a:defRPr>
             </a:pPr>
             <a:r>
-              <a:rPr sz="1125" b="0">
+              <a:rPr sz="1200" b="0">
                 <a:solidFill>
                   <a:srgbClr val="596B7A"/>
                 </a:solidFill>
@@ -20691,7 +20960,7 @@
           <p:cNvPr id="7" name="23 / 23">
             <a:extLst xmlns:a="http://schemas.openxmlformats.org/drawingml/2006/main">
               <a:ext uri="{FF2B5EF4-FFF2-40B4-BE49-F238E27FC236}">
-                <a16:creationId xmlns:a16="http://schemas.microsoft.com/office/drawing/2014/main" id="{24256ACC-CA0E-4F54-85AD-B94DC52A3A31}"/>
+                <a16:creationId xmlns:a16="http://schemas.microsoft.com/office/drawing/2014/main" id="{34420174-6E87-4928-9823-5322CCBE234A}"/>
               </a:ext>
             </a:extLst>
           </p:cNvPr>
@@ -20720,7 +20989,7 @@
           <a:lstStyle xmlns:a="http://schemas.openxmlformats.org/drawingml/2006/main"/>
           <a:p xmlns:a="http://schemas.openxmlformats.org/drawingml/2006/main">
             <a:pPr algn="r">
-              <a:defRPr sz="1125" b="0">
+              <a:defRPr sz="1200" b="0">
                 <a:solidFill>
                   <a:srgbClr val="596B7A"/>
                 </a:solidFill>
@@ -20730,7 +20999,7 @@
               </a:defRPr>
             </a:pPr>
             <a:r>
-              <a:rPr sz="1125" b="0">
+              <a:rPr sz="1200" b="0">
                 <a:solidFill>
                   <a:srgbClr val="596B7A"/>
                 </a:solidFill>
@@ -20748,7 +21017,7 @@
           <p:cNvPr id="8" name="MÉTODO">
             <a:extLst xmlns:a="http://schemas.openxmlformats.org/drawingml/2006/main">
               <a:ext uri="{FF2B5EF4-FFF2-40B4-BE49-F238E27FC236}">
-                <a16:creationId xmlns:a16="http://schemas.microsoft.com/office/drawing/2014/main" id="{987BE798-94DB-44C8-BE57-8D860CC44425}"/>
+                <a16:creationId xmlns:a16="http://schemas.microsoft.com/office/drawing/2014/main" id="{FDC5789C-07BA-48B0-B181-C9797AE47C72}"/>
               </a:ext>
             </a:extLst>
           </p:cNvPr>
@@ -20805,7 +21074,7 @@
           <p:cNvPr id="9" name="Relacionar as interfaces e declarações d">
             <a:extLst xmlns:a="http://schemas.openxmlformats.org/drawingml/2006/main">
               <a:ext uri="{FF2B5EF4-FFF2-40B4-BE49-F238E27FC236}">
-                <a16:creationId xmlns:a16="http://schemas.microsoft.com/office/drawing/2014/main" id="{D7D62BD1-3873-4A3B-8279-A19B19032CCA}"/>
+                <a16:creationId xmlns:a16="http://schemas.microsoft.com/office/drawing/2014/main" id="{6ACFB781-6F7C-435A-9C11-7D650957E1A2}"/>
               </a:ext>
             </a:extLst>
           </p:cNvPr>
@@ -20885,7 +21154,7 @@
           <p:cNvPr id="10" name="">
             <a:extLst xmlns:a="http://schemas.openxmlformats.org/drawingml/2006/main">
               <a:ext uri="{FF2B5EF4-FFF2-40B4-BE49-F238E27FC236}">
-                <a16:creationId xmlns:a16="http://schemas.microsoft.com/office/drawing/2014/main" id="{9B4EFF40-3D8F-4C56-A00D-678EDA7305AE}"/>
+                <a16:creationId xmlns:a16="http://schemas.microsoft.com/office/drawing/2014/main" id="{C73381B7-A084-4D2D-9749-160E8F28BBE6}"/>
               </a:ext>
             </a:extLst>
           </p:cNvPr>
@@ -20915,7 +21184,7 @@
           <p:cNvPr id="11" name="ESCRITA">
             <a:extLst xmlns:a="http://schemas.openxmlformats.org/drawingml/2006/main">
               <a:ext uri="{FF2B5EF4-FFF2-40B4-BE49-F238E27FC236}">
-                <a16:creationId xmlns:a16="http://schemas.microsoft.com/office/drawing/2014/main" id="{7ED1CD50-8770-438E-B664-DFEF18AB2224}"/>
+                <a16:creationId xmlns:a16="http://schemas.microsoft.com/office/drawing/2014/main" id="{2C3CFED0-3A0B-434C-B1D0-29DC6505D5C8}"/>
               </a:ext>
             </a:extLst>
           </p:cNvPr>
@@ -20972,7 +21241,7 @@
           <p:cNvPr id="12" name="Informar perdas da análise, limitações e">
             <a:extLst xmlns:a="http://schemas.openxmlformats.org/drawingml/2006/main">
               <a:ext uri="{FF2B5EF4-FFF2-40B4-BE49-F238E27FC236}">
-                <a16:creationId xmlns:a16="http://schemas.microsoft.com/office/drawing/2014/main" id="{FA5DD38D-A5CC-4336-91D2-E71963A2E052}"/>
+                <a16:creationId xmlns:a16="http://schemas.microsoft.com/office/drawing/2014/main" id="{94827551-5B51-4276-A756-2B87478C216A}"/>
               </a:ext>
             </a:extLst>
           </p:cNvPr>
@@ -21052,7 +21321,7 @@
           <p:cNvPr id="13" name="">
             <a:extLst xmlns:a="http://schemas.openxmlformats.org/drawingml/2006/main">
               <a:ext uri="{FF2B5EF4-FFF2-40B4-BE49-F238E27FC236}">
-                <a16:creationId xmlns:a16="http://schemas.microsoft.com/office/drawing/2014/main" id="{FBFBC8BF-BF10-4144-AE46-DAD9442F83BA}"/>
+                <a16:creationId xmlns:a16="http://schemas.microsoft.com/office/drawing/2014/main" id="{9382DFB9-99C5-42DE-AB8B-C3548D2E24C6}"/>
               </a:ext>
             </a:extLst>
           </p:cNvPr>
@@ -21082,7 +21351,7 @@
           <p:cNvPr id="14" name="RECORTE">
             <a:extLst xmlns:a="http://schemas.openxmlformats.org/drawingml/2006/main">
               <a:ext uri="{FF2B5EF4-FFF2-40B4-BE49-F238E27FC236}">
-                <a16:creationId xmlns:a16="http://schemas.microsoft.com/office/drawing/2014/main" id="{D69F150C-A379-479D-B5A6-4E2B40DEF97F}"/>
+                <a16:creationId xmlns:a16="http://schemas.microsoft.com/office/drawing/2014/main" id="{C39A6B6F-BF66-43E9-BDE3-367A89ADE55E}"/>
               </a:ext>
             </a:extLst>
           </p:cNvPr>
@@ -21139,7 +21408,7 @@
           <p:cNvPr id="15" name="Investigar aplicativos governamentais br">
             <a:extLst xmlns:a="http://schemas.openxmlformats.org/drawingml/2006/main">
               <a:ext uri="{FF2B5EF4-FFF2-40B4-BE49-F238E27FC236}">
-                <a16:creationId xmlns:a16="http://schemas.microsoft.com/office/drawing/2014/main" id="{42DF2115-5100-4980-95A6-ABA531F14DCA}"/>
+                <a16:creationId xmlns:a16="http://schemas.microsoft.com/office/drawing/2014/main" id="{57C8DE73-D7CE-439A-B117-3F2F292671A4}"/>
               </a:ext>
             </a:extLst>
           </p:cNvPr>
@@ -21219,7 +21488,7 @@
           <p:cNvPr id="16" name="">
             <a:extLst xmlns:a="http://schemas.openxmlformats.org/drawingml/2006/main">
               <a:ext uri="{FF2B5EF4-FFF2-40B4-BE49-F238E27FC236}">
-                <a16:creationId xmlns:a16="http://schemas.microsoft.com/office/drawing/2014/main" id="{E75D68F0-1924-4712-A54D-8A2F386BA183}"/>
+                <a16:creationId xmlns:a16="http://schemas.microsoft.com/office/drawing/2014/main" id="{9256CCCA-0313-4510-9AB4-C92B8BB687A1}"/>
               </a:ext>
             </a:extLst>
           </p:cNvPr>
@@ -21249,7 +21518,7 @@
           <p:cNvPr id="17" name="Que dados os apps governamentais enviam ">
             <a:extLst xmlns:a="http://schemas.openxmlformats.org/drawingml/2006/main">
               <a:ext uri="{FF2B5EF4-FFF2-40B4-BE49-F238E27FC236}">
-                <a16:creationId xmlns:a16="http://schemas.microsoft.com/office/drawing/2014/main" id="{EFC49491-FF9B-4722-874C-5F2A156FA121}"/>
+                <a16:creationId xmlns:a16="http://schemas.microsoft.com/office/drawing/2014/main" id="{2EE396FE-9E6A-4248-8D9B-86DFB3C4F88E}"/>
               </a:ext>
             </a:extLst>
           </p:cNvPr>
@@ -21327,7 +21596,7 @@
     </p:spTree>
     <p:extLst>
       <p:ext uri="{BB962C8B-B14F-4D97-AF65-F5344CB8AC3E}">
-        <p14:creationId xmlns:p14="http://schemas.microsoft.com/office/powerpoint/2010/main" val="694015968"/>
+        <p14:creationId xmlns:p14="http://schemas.microsoft.com/office/powerpoint/2010/main" val="1009302349"/>
       </p:ext>
     </p:extLst>
   </p:cSld>
@@ -21358,7 +21627,7 @@
           <p:cNvPr id="10" name="">
             <a:extLst xmlns:a="http://schemas.openxmlformats.org/drawingml/2006/main">
               <a:ext uri="{FF2B5EF4-FFF2-40B4-BE49-F238E27FC236}">
-                <a16:creationId xmlns:a16="http://schemas.microsoft.com/office/drawing/2014/main" id="{76D6A911-C830-49C7-9B99-55220AE61C2B}"/>
+                <a16:creationId xmlns:a16="http://schemas.microsoft.com/office/drawing/2014/main" id="{5B3B1B59-A487-4A91-90A7-1BE578210DA9}"/>
               </a:ext>
             </a:extLst>
           </p:cNvPr>
@@ -21388,7 +21657,7 @@
           <p:cNvPr id="2" name="APOIO: SELEÇÃO">
             <a:extLst xmlns:a="http://schemas.openxmlformats.org/drawingml/2006/main">
               <a:ext uri="{FF2B5EF4-FFF2-40B4-BE49-F238E27FC236}">
-                <a16:creationId xmlns:a16="http://schemas.microsoft.com/office/drawing/2014/main" id="{B1DB46F5-7790-4CC3-BEEA-512F65F25E4D}"/>
+                <a16:creationId xmlns:a16="http://schemas.microsoft.com/office/drawing/2014/main" id="{3B710465-2369-4F61-AE25-E2FBB1F09C09}"/>
               </a:ext>
             </a:extLst>
           </p:cNvPr>
@@ -21445,7 +21714,7 @@
           <p:cNvPr id="3" name="Os cinco finalistas da seleção">
             <a:extLst xmlns:a="http://schemas.openxmlformats.org/drawingml/2006/main">
               <a:ext uri="{FF2B5EF4-FFF2-40B4-BE49-F238E27FC236}">
-                <a16:creationId xmlns:a16="http://schemas.microsoft.com/office/drawing/2014/main" id="{991BD424-A571-446E-B3D4-54EF093915EC}"/>
+                <a16:creationId xmlns:a16="http://schemas.microsoft.com/office/drawing/2014/main" id="{D0251A63-5D98-4CED-BE0F-8B71D6C9E9CB}"/>
               </a:ext>
             </a:extLst>
           </p:cNvPr>
@@ -21502,7 +21771,7 @@
           <p:cNvPr id="4" name="">
             <a:extLst xmlns:a="http://schemas.openxmlformats.org/drawingml/2006/main">
               <a:ext uri="{FF2B5EF4-FFF2-40B4-BE49-F238E27FC236}">
-                <a16:creationId xmlns:a16="http://schemas.microsoft.com/office/drawing/2014/main" id="{80C325B8-C96A-4A41-8922-92AD92A939E3}"/>
+                <a16:creationId xmlns:a16="http://schemas.microsoft.com/office/drawing/2014/main" id="{C2B7B68D-8670-4736-9BAE-A6AC0B007210}"/>
               </a:ext>
             </a:extLst>
           </p:cNvPr>
@@ -21532,7 +21801,7 @@
           <p:cNvPr id="5" name="">
             <a:extLst xmlns:a="http://schemas.openxmlformats.org/drawingml/2006/main">
               <a:ext uri="{FF2B5EF4-FFF2-40B4-BE49-F238E27FC236}">
-                <a16:creationId xmlns:a16="http://schemas.microsoft.com/office/drawing/2014/main" id="{302F1935-A882-4766-A3D3-75935D031CF1}"/>
+                <a16:creationId xmlns:a16="http://schemas.microsoft.com/office/drawing/2014/main" id="{DD2B15D9-65B3-46A6-B03E-C10F5D71E840}"/>
               </a:ext>
             </a:extLst>
           </p:cNvPr>
@@ -21559,10 +21828,10 @@
       </p:sp>
       <p:sp>
         <p:nvSpPr>
-          <p:cNvPr id="6" name="Fonte: registro de busca do TCC, Scopus ">
-            <a:extLst xmlns:a="http://schemas.openxmlformats.org/drawingml/2006/main">
-              <a:ext uri="{FF2B5EF4-FFF2-40B4-BE49-F238E27FC236}">
-                <a16:creationId xmlns:a16="http://schemas.microsoft.com/office/drawing/2014/main" id="{D83EB5C6-AA41-4434-A2AE-4D8FDC297D0F}"/>
+          <p:cNvPr id="6" name="Fontes: Scopus via CAPES/CAFe (21/09/202">
+            <a:extLst xmlns:a="http://schemas.openxmlformats.org/drawingml/2006/main">
+              <a:ext uri="{FF2B5EF4-FFF2-40B4-BE49-F238E27FC236}">
+                <a16:creationId xmlns:a16="http://schemas.microsoft.com/office/drawing/2014/main" id="{D7C4EEC7-C425-464D-87D7-56A245A8A1EF}"/>
               </a:ext>
             </a:extLst>
           </p:cNvPr>
@@ -21574,7 +21843,7 @@
         <p:spPr>
           <a:xfrm xmlns:a="http://schemas.openxmlformats.org/drawingml/2006/main">
             <a:off x="609600" y="6477000"/>
-            <a:ext cx="10096500" cy="228600"/>
+            <a:ext cx="9982200" cy="228600"/>
           </a:xfrm>
           <a:prstGeom xmlns:a="http://schemas.openxmlformats.org/drawingml/2006/main" prst="rect">
             <a:avLst/>
@@ -21591,7 +21860,7 @@
           <a:lstStyle xmlns:a="http://schemas.openxmlformats.org/drawingml/2006/main"/>
           <a:p xmlns:a="http://schemas.openxmlformats.org/drawingml/2006/main">
             <a:pPr algn="l">
-              <a:defRPr sz="1125" b="0">
+              <a:defRPr sz="1200" b="0">
                 <a:solidFill>
                   <a:srgbClr val="596B7A"/>
                 </a:solidFill>
@@ -21601,7 +21870,7 @@
               </a:defRPr>
             </a:pPr>
             <a:r>
-              <a:rPr sz="1125" b="0">
+              <a:rPr sz="1200" b="0">
                 <a:solidFill>
                   <a:srgbClr val="596B7A"/>
                 </a:solidFill>
@@ -21609,7 +21878,7 @@
                 <a:ea typeface="Arial"/>
                 <a:cs typeface="Arial"/>
               </a:rPr>
-              <a:t>Fonte: registro de busca do TCC, Scopus via CAPES/CAFe, 21/09/2026. Citações na data registrada.</a:t>
+              <a:t>Fontes: Scopus via CAPES/CAFe (21/09/2026) e ICORE2026, registro SOUPS (22/09/2026).</a:t>
             </a:r>
           </a:p>
         </p:txBody>
@@ -21619,7 +21888,7 @@
           <p:cNvPr id="7" name="APOIO 1">
             <a:extLst xmlns:a="http://schemas.openxmlformats.org/drawingml/2006/main">
               <a:ext uri="{FF2B5EF4-FFF2-40B4-BE49-F238E27FC236}">
-                <a16:creationId xmlns:a16="http://schemas.microsoft.com/office/drawing/2014/main" id="{488E4215-E99E-4719-8EF8-75023A6914F2}"/>
+                <a16:creationId xmlns:a16="http://schemas.microsoft.com/office/drawing/2014/main" id="{AE48465F-A078-42AA-B9AC-81AF0B2C7FE8}"/>
               </a:ext>
             </a:extLst>
           </p:cNvPr>
@@ -21648,7 +21917,7 @@
           <a:lstStyle xmlns:a="http://schemas.openxmlformats.org/drawingml/2006/main"/>
           <a:p xmlns:a="http://schemas.openxmlformats.org/drawingml/2006/main">
             <a:pPr algn="r">
-              <a:defRPr sz="1125" b="0">
+              <a:defRPr sz="1200" b="0">
                 <a:solidFill>
                   <a:srgbClr val="596B7A"/>
                 </a:solidFill>
@@ -21658,7 +21927,7 @@
               </a:defRPr>
             </a:pPr>
             <a:r>
-              <a:rPr sz="1125" b="0">
+              <a:rPr sz="1200" b="0">
                 <a:solidFill>
                   <a:srgbClr val="596B7A"/>
                 </a:solidFill>
@@ -21679,7 +21948,7 @@
         </p:nvGraphicFramePr>
         <p:xfrm>
           <a:off xmlns:a="http://schemas.openxmlformats.org/drawingml/2006/main" x="609600" y="1790700"/>
-          <a:ext xmlns:a="http://schemas.openxmlformats.org/drawingml/2006/main" cx="10972800" cy="3657600"/>
+          <a:ext xmlns:a="http://schemas.openxmlformats.org/drawingml/2006/main" cx="10972800" cy="3886200"/>
         </p:xfrm>
         <a:graphic xmlns:a="http://schemas.openxmlformats.org/drawingml/2006/main">
           <a:graphicData uri="http://schemas.openxmlformats.org/drawingml/2006/table">
@@ -21691,17 +21960,17 @@
                 <a:gridCol w="1095375"/>
                 <a:gridCol w="3057525"/>
               </a:tblGrid>
-              <a:tr h="609600">
+              <a:tr h="647700">
                 <a:tc>
                   <a:txBody>
-                    <a:bodyPr wrap="square" lIns="114300" tIns="95250" rIns="114300" bIns="95250">
+                    <a:bodyPr wrap="square" lIns="114300" tIns="57150" rIns="114300" bIns="57150">
                       <a:noAutofit/>
                     </a:bodyPr>
                     <a:lstStyle/>
                     <a:p>
                       <a:pPr algn="l"/>
                       <a:r>
-                        <a:rPr sz="1650" b="1">
+                        <a:rPr sz="1575" b="1">
                           <a:solidFill>
                             <a:srgbClr val="FFFFFF"/>
                           </a:solidFill>
@@ -21745,14 +22014,14 @@
                 </a:tc>
                 <a:tc>
                   <a:txBody>
-                    <a:bodyPr wrap="square" lIns="114300" tIns="95250" rIns="114300" bIns="95250">
+                    <a:bodyPr wrap="square" lIns="114300" tIns="57150" rIns="114300" bIns="57150">
                       <a:noAutofit/>
                     </a:bodyPr>
                     <a:lstStyle/>
                     <a:p>
                       <a:pPr algn="ctr"/>
                       <a:r>
-                        <a:rPr sz="1650" b="1">
+                        <a:rPr sz="1575" b="1">
                           <a:solidFill>
                             <a:srgbClr val="FFFFFF"/>
                           </a:solidFill>
@@ -21796,14 +22065,14 @@
                 </a:tc>
                 <a:tc>
                   <a:txBody>
-                    <a:bodyPr wrap="square" lIns="114300" tIns="95250" rIns="114300" bIns="95250">
+                    <a:bodyPr wrap="square" lIns="114300" tIns="57150" rIns="114300" bIns="57150">
                       <a:noAutofit/>
                     </a:bodyPr>
                     <a:lstStyle/>
                     <a:p>
                       <a:pPr algn="ctr"/>
                       <a:r>
-                        <a:rPr sz="1650" b="1">
+                        <a:rPr sz="1575" b="1">
                           <a:solidFill>
                             <a:srgbClr val="FFFFFF"/>
                           </a:solidFill>
@@ -21847,14 +22116,14 @@
                 </a:tc>
                 <a:tc>
                   <a:txBody>
-                    <a:bodyPr wrap="square" lIns="114300" tIns="95250" rIns="114300" bIns="95250">
+                    <a:bodyPr wrap="square" lIns="114300" tIns="57150" rIns="114300" bIns="57150">
                       <a:noAutofit/>
                     </a:bodyPr>
                     <a:lstStyle/>
                     <a:p>
                       <a:pPr algn="ctr"/>
                       <a:r>
-                        <a:rPr sz="1650" b="1">
+                        <a:rPr sz="1575" b="1">
                           <a:solidFill>
                             <a:srgbClr val="FFFFFF"/>
                           </a:solidFill>
@@ -21897,17 +22166,17 @@
                   </a:tcPr>
                 </a:tc>
               </a:tr>
-              <a:tr h="609600">
+              <a:tr h="647700">
                 <a:tc>
                   <a:txBody>
-                    <a:bodyPr wrap="square" lIns="114300" tIns="95250" rIns="114300" bIns="95250">
+                    <a:bodyPr wrap="square" lIns="114300" tIns="57150" rIns="114300" bIns="57150">
                       <a:noAutofit/>
                     </a:bodyPr>
                     <a:lstStyle/>
                     <a:p>
                       <a:pPr algn="l"/>
                       <a:r>
-                        <a:rPr sz="1650" b="0">
+                        <a:rPr sz="1575" b="0">
                           <a:solidFill>
                             <a:srgbClr val="24384A"/>
                           </a:solidFill>
@@ -21951,14 +22220,14 @@
                 </a:tc>
                 <a:tc>
                   <a:txBody>
-                    <a:bodyPr wrap="square" lIns="114300" tIns="95250" rIns="114300" bIns="95250">
+                    <a:bodyPr wrap="square" lIns="114300" tIns="57150" rIns="114300" bIns="57150">
                       <a:noAutofit/>
                     </a:bodyPr>
                     <a:lstStyle/>
                     <a:p>
                       <a:pPr algn="ctr"/>
                       <a:r>
-                        <a:rPr sz="1650" b="0">
+                        <a:rPr sz="1575" b="0">
                           <a:solidFill>
                             <a:srgbClr val="24384A"/>
                           </a:solidFill>
@@ -22002,14 +22271,14 @@
                 </a:tc>
                 <a:tc>
                   <a:txBody>
-                    <a:bodyPr wrap="square" lIns="114300" tIns="95250" rIns="114300" bIns="95250">
+                    <a:bodyPr wrap="square" lIns="114300" tIns="57150" rIns="114300" bIns="57150">
                       <a:noAutofit/>
                     </a:bodyPr>
                     <a:lstStyle/>
                     <a:p>
                       <a:pPr algn="ctr"/>
                       <a:r>
-                        <a:rPr sz="1650" b="0">
+                        <a:rPr sz="1575" b="0">
                           <a:solidFill>
                             <a:srgbClr val="24384A"/>
                           </a:solidFill>
@@ -22053,14 +22322,14 @@
                 </a:tc>
                 <a:tc>
                   <a:txBody>
-                    <a:bodyPr wrap="square" lIns="114300" tIns="95250" rIns="114300" bIns="95250">
+                    <a:bodyPr wrap="square" lIns="114300" tIns="57150" rIns="114300" bIns="57150">
                       <a:noAutofit/>
                     </a:bodyPr>
                     <a:lstStyle/>
                     <a:p>
                       <a:pPr algn="ctr"/>
                       <a:r>
-                        <a:rPr sz="1650" b="0">
+                        <a:rPr sz="1575" b="0">
                           <a:solidFill>
                             <a:srgbClr val="24384A"/>
                           </a:solidFill>
@@ -22103,17 +22372,17 @@
                   </a:tcPr>
                 </a:tc>
               </a:tr>
-              <a:tr h="609600">
+              <a:tr h="647700">
                 <a:tc>
                   <a:txBody>
-                    <a:bodyPr wrap="square" lIns="114300" tIns="95250" rIns="114300" bIns="95250">
+                    <a:bodyPr wrap="square" lIns="114300" tIns="57150" rIns="114300" bIns="57150">
                       <a:noAutofit/>
                     </a:bodyPr>
                     <a:lstStyle/>
                     <a:p>
                       <a:pPr algn="l"/>
                       <a:r>
-                        <a:rPr sz="1650" b="0">
+                        <a:rPr sz="1575" b="0">
                           <a:solidFill>
                             <a:srgbClr val="24384A"/>
                           </a:solidFill>
@@ -22157,14 +22426,14 @@
                 </a:tc>
                 <a:tc>
                   <a:txBody>
-                    <a:bodyPr wrap="square" lIns="114300" tIns="95250" rIns="114300" bIns="95250">
+                    <a:bodyPr wrap="square" lIns="114300" tIns="57150" rIns="114300" bIns="57150">
                       <a:noAutofit/>
                     </a:bodyPr>
                     <a:lstStyle/>
                     <a:p>
                       <a:pPr algn="ctr"/>
                       <a:r>
-                        <a:rPr sz="1650" b="0">
+                        <a:rPr sz="1575" b="0">
                           <a:solidFill>
                             <a:srgbClr val="24384A"/>
                           </a:solidFill>
@@ -22208,14 +22477,14 @@
                 </a:tc>
                 <a:tc>
                   <a:txBody>
-                    <a:bodyPr wrap="square" lIns="114300" tIns="95250" rIns="114300" bIns="95250">
+                    <a:bodyPr wrap="square" lIns="114300" tIns="57150" rIns="114300" bIns="57150">
                       <a:noAutofit/>
                     </a:bodyPr>
                     <a:lstStyle/>
                     <a:p>
                       <a:pPr algn="ctr"/>
                       <a:r>
-                        <a:rPr sz="1650" b="0">
+                        <a:rPr sz="1575" b="0">
                           <a:solidFill>
                             <a:srgbClr val="24384A"/>
                           </a:solidFill>
@@ -22259,14 +22528,14 @@
                 </a:tc>
                 <a:tc>
                   <a:txBody>
-                    <a:bodyPr wrap="square" lIns="114300" tIns="95250" rIns="114300" bIns="95250">
+                    <a:bodyPr wrap="square" lIns="114300" tIns="57150" rIns="114300" bIns="57150">
                       <a:noAutofit/>
                     </a:bodyPr>
                     <a:lstStyle/>
                     <a:p>
                       <a:pPr algn="ctr"/>
                       <a:r>
-                        <a:rPr sz="1650" b="0">
+                        <a:rPr sz="1575" b="0">
                           <a:solidFill>
                             <a:srgbClr val="24384A"/>
                           </a:solidFill>
@@ -22274,7 +22543,7 @@
                           <a:ea typeface="Arial"/>
                           <a:cs typeface="Arial"/>
                         </a:rPr>
-                        <a:t>Menor prioridade na seleção</a:t>
+                        <a:t>Veículo ICORE A (2026)</a:t>
                       </a:r>
                     </a:p>
                   </a:txBody>
@@ -22309,17 +22578,17 @@
                   </a:tcPr>
                 </a:tc>
               </a:tr>
-              <a:tr h="609600">
+              <a:tr h="647700">
                 <a:tc>
                   <a:txBody>
-                    <a:bodyPr wrap="square" lIns="114300" tIns="95250" rIns="114300" bIns="95250">
+                    <a:bodyPr wrap="square" lIns="114300" tIns="57150" rIns="114300" bIns="57150">
                       <a:noAutofit/>
                     </a:bodyPr>
                     <a:lstStyle/>
                     <a:p>
                       <a:pPr algn="l"/>
                       <a:r>
-                        <a:rPr sz="1650" b="0">
+                        <a:rPr sz="1575" b="0">
                           <a:solidFill>
                             <a:srgbClr val="24384A"/>
                           </a:solidFill>
@@ -22333,7 +22602,7 @@
                     <a:p>
                       <a:pPr algn="l"/>
                       <a:r>
-                        <a:rPr sz="1650" b="0">
+                        <a:rPr sz="1575" b="0">
                           <a:solidFill>
                             <a:srgbClr val="24384A"/>
                           </a:solidFill>
@@ -22377,14 +22646,14 @@
                 </a:tc>
                 <a:tc>
                   <a:txBody>
-                    <a:bodyPr wrap="square" lIns="114300" tIns="95250" rIns="114300" bIns="95250">
+                    <a:bodyPr wrap="square" lIns="114300" tIns="57150" rIns="114300" bIns="57150">
                       <a:noAutofit/>
                     </a:bodyPr>
                     <a:lstStyle/>
                     <a:p>
                       <a:pPr algn="ctr"/>
                       <a:r>
-                        <a:rPr sz="1650" b="0">
+                        <a:rPr sz="1575" b="0">
                           <a:solidFill>
                             <a:srgbClr val="24384A"/>
                           </a:solidFill>
@@ -22428,14 +22697,14 @@
                 </a:tc>
                 <a:tc>
                   <a:txBody>
-                    <a:bodyPr wrap="square" lIns="114300" tIns="95250" rIns="114300" bIns="95250">
+                    <a:bodyPr wrap="square" lIns="114300" tIns="57150" rIns="114300" bIns="57150">
                       <a:noAutofit/>
                     </a:bodyPr>
                     <a:lstStyle/>
                     <a:p>
                       <a:pPr algn="ctr"/>
                       <a:r>
-                        <a:rPr sz="1650" b="0">
+                        <a:rPr sz="1575" b="0">
                           <a:solidFill>
                             <a:srgbClr val="24384A"/>
                           </a:solidFill>
@@ -22479,14 +22748,14 @@
                 </a:tc>
                 <a:tc>
                   <a:txBody>
-                    <a:bodyPr wrap="square" lIns="114300" tIns="95250" rIns="114300" bIns="95250">
+                    <a:bodyPr wrap="square" lIns="114300" tIns="57150" rIns="114300" bIns="57150">
                       <a:noAutofit/>
                     </a:bodyPr>
                     <a:lstStyle/>
                     <a:p>
                       <a:pPr algn="ctr"/>
                       <a:r>
-                        <a:rPr sz="1650" b="0">
+                        <a:rPr sz="1575" b="0">
                           <a:solidFill>
                             <a:srgbClr val="24384A"/>
                           </a:solidFill>
@@ -22529,17 +22798,17 @@
                   </a:tcPr>
                 </a:tc>
               </a:tr>
-              <a:tr h="609600">
+              <a:tr h="647700">
                 <a:tc>
                   <a:txBody>
-                    <a:bodyPr wrap="square" lIns="114300" tIns="95250" rIns="114300" bIns="95250">
+                    <a:bodyPr wrap="square" lIns="114300" tIns="57150" rIns="114300" bIns="57150">
                       <a:noAutofit/>
                     </a:bodyPr>
                     <a:lstStyle/>
                     <a:p>
                       <a:pPr algn="l"/>
                       <a:r>
-                        <a:rPr sz="1650" b="0">
+                        <a:rPr sz="1575" b="0">
                           <a:solidFill>
                             <a:srgbClr val="24384A"/>
                           </a:solidFill>
@@ -22583,14 +22852,14 @@
                 </a:tc>
                 <a:tc>
                   <a:txBody>
-                    <a:bodyPr wrap="square" lIns="114300" tIns="95250" rIns="114300" bIns="95250">
+                    <a:bodyPr wrap="square" lIns="114300" tIns="57150" rIns="114300" bIns="57150">
                       <a:noAutofit/>
                     </a:bodyPr>
                     <a:lstStyle/>
                     <a:p>
                       <a:pPr algn="ctr"/>
                       <a:r>
-                        <a:rPr sz="1650" b="0">
+                        <a:rPr sz="1575" b="0">
                           <a:solidFill>
                             <a:srgbClr val="24384A"/>
                           </a:solidFill>
@@ -22604,7 +22873,7 @@
                     <a:p>
                       <a:pPr algn="ctr"/>
                       <a:r>
-                        <a:rPr sz="1650" b="0">
+                        <a:rPr sz="1575" b="0">
                           <a:solidFill>
                             <a:srgbClr val="24384A"/>
                           </a:solidFill>
@@ -22648,14 +22917,14 @@
                 </a:tc>
                 <a:tc>
                   <a:txBody>
-                    <a:bodyPr wrap="square" lIns="114300" tIns="95250" rIns="114300" bIns="95250">
+                    <a:bodyPr wrap="square" lIns="114300" tIns="57150" rIns="114300" bIns="57150">
                       <a:noAutofit/>
                     </a:bodyPr>
                     <a:lstStyle/>
                     <a:p>
                       <a:pPr algn="ctr"/>
                       <a:r>
-                        <a:rPr sz="1650" b="0">
+                        <a:rPr sz="1575" b="0">
                           <a:solidFill>
                             <a:srgbClr val="24384A"/>
                           </a:solidFill>
@@ -22699,14 +22968,14 @@
                 </a:tc>
                 <a:tc>
                   <a:txBody>
-                    <a:bodyPr wrap="square" lIns="114300" tIns="95250" rIns="114300" bIns="95250">
+                    <a:bodyPr wrap="square" lIns="114300" tIns="57150" rIns="114300" bIns="57150">
                       <a:noAutofit/>
                     </a:bodyPr>
                     <a:lstStyle/>
                     <a:p>
                       <a:pPr algn="ctr"/>
                       <a:r>
-                        <a:rPr sz="1650" b="0">
+                        <a:rPr sz="1575" b="0">
                           <a:solidFill>
                             <a:srgbClr val="24384A"/>
                           </a:solidFill>
@@ -22749,17 +23018,17 @@
                   </a:tcPr>
                 </a:tc>
               </a:tr>
-              <a:tr h="609600">
+              <a:tr h="647700">
                 <a:tc>
                   <a:txBody>
-                    <a:bodyPr wrap="square" lIns="114300" tIns="95250" rIns="114300" bIns="95250">
+                    <a:bodyPr wrap="square" lIns="114300" tIns="57150" rIns="114300" bIns="57150">
                       <a:noAutofit/>
                     </a:bodyPr>
                     <a:lstStyle/>
                     <a:p>
                       <a:pPr algn="l"/>
                       <a:r>
-                        <a:rPr sz="1650" b="0">
+                        <a:rPr sz="1575" b="0">
                           <a:solidFill>
                             <a:srgbClr val="24384A"/>
                           </a:solidFill>
@@ -22767,7 +23036,21 @@
                           <a:ea typeface="Arial"/>
                           <a:cs typeface="Arial"/>
                         </a:rPr>
-                        <a:t>WhisperTest</a:t>
+                        <a:t>Cookie Banners: Potential Legal</a:t>
+                      </a:r>
+                    </a:p>
+                    <a:p>
+                      <a:pPr algn="l"/>
+                      <a:r>
+                        <a:rPr sz="1575" b="0">
+                          <a:solidFill>
+                            <a:srgbClr val="24384A"/>
+                          </a:solidFill>
+                          <a:latin typeface="Arial"/>
+                          <a:ea typeface="Arial"/>
+                          <a:cs typeface="Arial"/>
+                        </a:rPr>
+                        <a:t>Violations in EU vs US Websites</a:t>
                       </a:r>
                     </a:p>
                   </a:txBody>
@@ -22803,14 +23086,14 @@
                 </a:tc>
                 <a:tc>
                   <a:txBody>
-                    <a:bodyPr wrap="square" lIns="114300" tIns="95250" rIns="114300" bIns="95250">
+                    <a:bodyPr wrap="square" lIns="114300" tIns="57150" rIns="114300" bIns="57150">
                       <a:noAutofit/>
                     </a:bodyPr>
                     <a:lstStyle/>
                     <a:p>
                       <a:pPr algn="ctr"/>
                       <a:r>
-                        <a:rPr sz="1650" b="0">
+                        <a:rPr sz="1575" b="0">
                           <a:solidFill>
                             <a:srgbClr val="24384A"/>
                           </a:solidFill>
@@ -22818,7 +23101,7 @@
                           <a:ea typeface="Arial"/>
                           <a:cs typeface="Arial"/>
                         </a:rPr>
-                        <a:t>CCS / 2025</a:t>
+                        <a:t>LNCS / 2025</a:t>
                       </a:r>
                     </a:p>
                   </a:txBody>
@@ -22854,14 +23137,14 @@
                 </a:tc>
                 <a:tc>
                   <a:txBody>
-                    <a:bodyPr wrap="square" lIns="114300" tIns="95250" rIns="114300" bIns="95250">
+                    <a:bodyPr wrap="square" lIns="114300" tIns="57150" rIns="114300" bIns="57150">
                       <a:noAutofit/>
                     </a:bodyPr>
                     <a:lstStyle/>
                     <a:p>
                       <a:pPr algn="ctr"/>
                       <a:r>
-                        <a:rPr sz="1650" b="0">
+                        <a:rPr sz="1575" b="0">
                           <a:solidFill>
                             <a:srgbClr val="24384A"/>
                           </a:solidFill>
@@ -22905,14 +23188,14 @@
                 </a:tc>
                 <a:tc>
                   <a:txBody>
-                    <a:bodyPr wrap="square" lIns="114300" tIns="95250" rIns="114300" bIns="95250">
+                    <a:bodyPr wrap="square" lIns="114300" tIns="57150" rIns="114300" bIns="57150">
                       <a:noAutofit/>
                     </a:bodyPr>
                     <a:lstStyle/>
                     <a:p>
                       <a:pPr algn="ctr"/>
                       <a:r>
-                        <a:rPr sz="1650" b="0">
+                        <a:rPr sz="1575" b="0">
                           <a:solidFill>
                             <a:srgbClr val="24384A"/>
                           </a:solidFill>
@@ -22920,7 +23203,7 @@
                           <a:ea typeface="Arial"/>
                           <a:cs typeface="Arial"/>
                         </a:rPr>
-                        <a:t>Recorte iOS</a:t>
+                        <a:t>Recorte web</a:t>
                       </a:r>
                     </a:p>
                   </a:txBody>
@@ -22964,7 +23247,7 @@
           <p:cNvPr id="9" name="Citações e classificação complementam a ">
             <a:extLst xmlns:a="http://schemas.openxmlformats.org/drawingml/2006/main">
               <a:ext uri="{FF2B5EF4-FFF2-40B4-BE49-F238E27FC236}">
-                <a16:creationId xmlns:a16="http://schemas.microsoft.com/office/drawing/2014/main" id="{A1A22BA3-0165-448D-9F2B-8AA38C525601}"/>
+                <a16:creationId xmlns:a16="http://schemas.microsoft.com/office/drawing/2014/main" id="{4447C0CF-07A3-4863-BFAF-1549BC8B1FE3}"/>
               </a:ext>
             </a:extLst>
           </p:cNvPr>
@@ -23019,7 +23302,7 @@
     </p:spTree>
     <p:extLst>
       <p:ext uri="{BB962C8B-B14F-4D97-AF65-F5344CB8AC3E}">
-        <p14:creationId xmlns:p14="http://schemas.microsoft.com/office/powerpoint/2010/main" val="1747210580"/>
+        <p14:creationId xmlns:p14="http://schemas.microsoft.com/office/powerpoint/2010/main" val="275537605"/>
       </p:ext>
     </p:extLst>
   </p:cSld>
@@ -23050,7 +23333,7 @@
           <p:cNvPr id="15" name="">
             <a:extLst xmlns:a="http://schemas.openxmlformats.org/drawingml/2006/main">
               <a:ext uri="{FF2B5EF4-FFF2-40B4-BE49-F238E27FC236}">
-                <a16:creationId xmlns:a16="http://schemas.microsoft.com/office/drawing/2014/main" id="{60304AC3-359F-4232-8A59-EE01F2AE9816}"/>
+                <a16:creationId xmlns:a16="http://schemas.microsoft.com/office/drawing/2014/main" id="{4DB3A64F-35C9-4253-A5EA-A595A4624B0C}"/>
               </a:ext>
             </a:extLst>
           </p:cNvPr>
@@ -23080,7 +23363,7 @@
           <p:cNvPr id="2" name="APOIO: FONTES">
             <a:extLst xmlns:a="http://schemas.openxmlformats.org/drawingml/2006/main">
               <a:ext uri="{FF2B5EF4-FFF2-40B4-BE49-F238E27FC236}">
-                <a16:creationId xmlns:a16="http://schemas.microsoft.com/office/drawing/2014/main" id="{A0BF9D0D-7656-4E04-A8B8-0828A9AF9AEB}"/>
+                <a16:creationId xmlns:a16="http://schemas.microsoft.com/office/drawing/2014/main" id="{E409EF4B-F774-414D-AE62-A1373783B9F1}"/>
               </a:ext>
             </a:extLst>
           </p:cNvPr>
@@ -23137,7 +23420,7 @@
           <p:cNvPr id="3" name="Referências e rastreabilidade">
             <a:extLst xmlns:a="http://schemas.openxmlformats.org/drawingml/2006/main">
               <a:ext uri="{FF2B5EF4-FFF2-40B4-BE49-F238E27FC236}">
-                <a16:creationId xmlns:a16="http://schemas.microsoft.com/office/drawing/2014/main" id="{A17595E3-7049-43B4-8A70-175A11BA8EAE}"/>
+                <a16:creationId xmlns:a16="http://schemas.microsoft.com/office/drawing/2014/main" id="{C14278F9-1088-453F-A4F0-F95E4BD79EF2}"/>
               </a:ext>
             </a:extLst>
           </p:cNvPr>
@@ -23194,7 +23477,7 @@
           <p:cNvPr id="4" name="">
             <a:extLst xmlns:a="http://schemas.openxmlformats.org/drawingml/2006/main">
               <a:ext uri="{FF2B5EF4-FFF2-40B4-BE49-F238E27FC236}">
-                <a16:creationId xmlns:a16="http://schemas.microsoft.com/office/drawing/2014/main" id="{11FD6CA9-CDF7-4A9E-B061-64204F4867E2}"/>
+                <a16:creationId xmlns:a16="http://schemas.microsoft.com/office/drawing/2014/main" id="{C67EE91E-D6FD-4CC8-AA4C-03168C633177}"/>
               </a:ext>
             </a:extLst>
           </p:cNvPr>
@@ -23224,7 +23507,7 @@
           <p:cNvPr id="5" name="">
             <a:extLst xmlns:a="http://schemas.openxmlformats.org/drawingml/2006/main">
               <a:ext uri="{FF2B5EF4-FFF2-40B4-BE49-F238E27FC236}">
-                <a16:creationId xmlns:a16="http://schemas.microsoft.com/office/drawing/2014/main" id="{7BA3E91D-B8E8-4CEE-BBCE-64A9717D4A47}"/>
+                <a16:creationId xmlns:a16="http://schemas.microsoft.com/office/drawing/2014/main" id="{35BF7F96-9E6F-4AD1-B2B0-60FA2E13EBDF}"/>
               </a:ext>
             </a:extLst>
           </p:cNvPr>
@@ -23251,10 +23534,10 @@
       </p:sp>
       <p:sp>
         <p:nvSpPr>
-          <p:cNvPr id="6" name="As páginas indicadas nos slides seguem a">
-            <a:extLst xmlns:a="http://schemas.openxmlformats.org/drawingml/2006/main">
-              <a:ext uri="{FF2B5EF4-FFF2-40B4-BE49-F238E27FC236}">
-                <a16:creationId xmlns:a16="http://schemas.microsoft.com/office/drawing/2014/main" id="{B87E4882-76B9-4571-8CAA-B990EA462634}"/>
+          <p:cNvPr id="6" name="Páginas dos slides: contagem interna do ">
+            <a:extLst xmlns:a="http://schemas.openxmlformats.org/drawingml/2006/main">
+              <a:ext uri="{FF2B5EF4-FFF2-40B4-BE49-F238E27FC236}">
+                <a16:creationId xmlns:a16="http://schemas.microsoft.com/office/drawing/2014/main" id="{CDC9B96D-EA90-4C3C-BF56-33820656819D}"/>
               </a:ext>
             </a:extLst>
           </p:cNvPr>
@@ -23266,7 +23549,7 @@
         <p:spPr>
           <a:xfrm xmlns:a="http://schemas.openxmlformats.org/drawingml/2006/main">
             <a:off x="609600" y="6477000"/>
-            <a:ext cx="10096500" cy="228600"/>
+            <a:ext cx="9982200" cy="228600"/>
           </a:xfrm>
           <a:prstGeom xmlns:a="http://schemas.openxmlformats.org/drawingml/2006/main" prst="rect">
             <a:avLst/>
@@ -23283,7 +23566,7 @@
           <a:lstStyle xmlns:a="http://schemas.openxmlformats.org/drawingml/2006/main"/>
           <a:p xmlns:a="http://schemas.openxmlformats.org/drawingml/2006/main">
             <a:pPr algn="l">
-              <a:defRPr sz="1125" b="0">
+              <a:defRPr sz="1200" b="0">
                 <a:solidFill>
                   <a:srgbClr val="596B7A"/>
                 </a:solidFill>
@@ -23293,7 +23576,7 @@
               </a:defRPr>
             </a:pPr>
             <a:r>
-              <a:rPr sz="1125" b="0">
+              <a:rPr sz="1200" b="0">
                 <a:solidFill>
                   <a:srgbClr val="596B7A"/>
                 </a:solidFill>
@@ -23301,7 +23584,7 @@
                 <a:ea typeface="Arial"/>
                 <a:cs typeface="Arial"/>
               </a:rPr>
-              <a:t>As páginas indicadas nos slides seguem a numeração do PDF do artigo fornecido, de 1 a 15.</a:t>
+              <a:t>Páginas dos slides: contagem interna do PDF ACM 3548606.3560564, de 1 a 15 (anais: p. 2369–2383).</a:t>
             </a:r>
           </a:p>
         </p:txBody>
@@ -23311,7 +23594,7 @@
           <p:cNvPr id="7" name="APOIO 2">
             <a:extLst xmlns:a="http://schemas.openxmlformats.org/drawingml/2006/main">
               <a:ext uri="{FF2B5EF4-FFF2-40B4-BE49-F238E27FC236}">
-                <a16:creationId xmlns:a16="http://schemas.microsoft.com/office/drawing/2014/main" id="{9086619C-400E-4222-AC17-F91531F1B3D3}"/>
+                <a16:creationId xmlns:a16="http://schemas.microsoft.com/office/drawing/2014/main" id="{2763D525-BAB5-4AD8-8B3A-022A203BA439}"/>
               </a:ext>
             </a:extLst>
           </p:cNvPr>
@@ -23340,7 +23623,7 @@
           <a:lstStyle xmlns:a="http://schemas.openxmlformats.org/drawingml/2006/main"/>
           <a:p xmlns:a="http://schemas.openxmlformats.org/drawingml/2006/main">
             <a:pPr algn="r">
-              <a:defRPr sz="1125" b="0">
+              <a:defRPr sz="1200" b="0">
                 <a:solidFill>
                   <a:srgbClr val="596B7A"/>
                 </a:solidFill>
@@ -23350,7 +23633,7 @@
               </a:defRPr>
             </a:pPr>
             <a:r>
-              <a:rPr sz="1125" b="0">
+              <a:rPr sz="1200" b="0">
                 <a:solidFill>
                   <a:srgbClr val="596B7A"/>
                 </a:solidFill>
@@ -23368,7 +23651,7 @@
           <p:cNvPr id="8" name="ARTIGO ANALISADO">
             <a:extLst xmlns:a="http://schemas.openxmlformats.org/drawingml/2006/main">
               <a:ext uri="{FF2B5EF4-FFF2-40B4-BE49-F238E27FC236}">
-                <a16:creationId xmlns:a16="http://schemas.microsoft.com/office/drawing/2014/main" id="{3A76430D-D9C5-405F-AB06-B2C98053EF8D}"/>
+                <a16:creationId xmlns:a16="http://schemas.microsoft.com/office/drawing/2014/main" id="{811CE3DC-8FBE-4C86-A09F-98E3000A8554}"/>
               </a:ext>
             </a:extLst>
           </p:cNvPr>
@@ -23425,7 +23708,7 @@
           <p:cNvPr id="9" name="NGUYEN, Trung Tin; BACKES, Michael; STOC">
             <a:extLst xmlns:a="http://schemas.openxmlformats.org/drawingml/2006/main">
               <a:ext uri="{FF2B5EF4-FFF2-40B4-BE49-F238E27FC236}">
-                <a16:creationId xmlns:a16="http://schemas.microsoft.com/office/drawing/2014/main" id="{9FAC6DFA-C359-449A-AA84-BED55381FC04}"/>
+                <a16:creationId xmlns:a16="http://schemas.microsoft.com/office/drawing/2014/main" id="{BDC6A57E-17B4-452D-87F7-75AC42E9405C}"/>
               </a:ext>
             </a:extLst>
           </p:cNvPr>
@@ -23528,7 +23811,7 @@
           <p:cNvPr id="10" name="https://doi.org/10.1145/3548606.3560564">
             <a:extLst xmlns:a="http://schemas.openxmlformats.org/drawingml/2006/main">
               <a:ext uri="{FF2B5EF4-FFF2-40B4-BE49-F238E27FC236}">
-                <a16:creationId xmlns:a16="http://schemas.microsoft.com/office/drawing/2014/main" id="{F69EB03E-C102-498F-BBEC-EC8713E07833}"/>
+                <a16:creationId xmlns:a16="http://schemas.microsoft.com/office/drawing/2014/main" id="{7229A963-6A3B-48CE-939B-0613839A3723}"/>
               </a:ext>
             </a:extLst>
           </p:cNvPr>
@@ -23585,18 +23868,18 @@
           <p:cNvPr id="11" name="PROJETO E REGISTRO DA SELEÇÃO">
             <a:extLst xmlns:a="http://schemas.openxmlformats.org/drawingml/2006/main">
               <a:ext uri="{FF2B5EF4-FFF2-40B4-BE49-F238E27FC236}">
-                <a16:creationId xmlns:a16="http://schemas.microsoft.com/office/drawing/2014/main" id="{A719DE27-1651-4EB8-BF9B-F266D6C1653D}"/>
-              </a:ext>
-            </a:extLst>
-          </p:cNvPr>
-          <p:cNvSpPr>
-            <a:spLocks xmlns:a="http://schemas.openxmlformats.org/drawingml/2006/main" noGrp="1"/>
-          </p:cNvSpPr>
-          <p:nvPr/>
-        </p:nvSpPr>
-        <p:spPr>
-          <a:xfrm xmlns:a="http://schemas.openxmlformats.org/drawingml/2006/main">
-            <a:off x="609600" y="3781425"/>
+                <a16:creationId xmlns:a16="http://schemas.microsoft.com/office/drawing/2014/main" id="{4253C281-35B6-4F4F-9F50-D291D5F5D234}"/>
+              </a:ext>
+            </a:extLst>
+          </p:cNvPr>
+          <p:cNvSpPr>
+            <a:spLocks xmlns:a="http://schemas.openxmlformats.org/drawingml/2006/main" noGrp="1"/>
+          </p:cNvSpPr>
+          <p:nvPr/>
+        </p:nvSpPr>
+        <p:spPr>
+          <a:xfrm xmlns:a="http://schemas.openxmlformats.org/drawingml/2006/main">
+            <a:off x="609600" y="3648075"/>
             <a:ext cx="10477500" cy="266700"/>
           </a:xfrm>
           <a:prstGeom xmlns:a="http://schemas.openxmlformats.org/drawingml/2006/main" prst="rect">
@@ -23642,19 +23925,19 @@
           <p:cNvPr id="12" name="github.com/ClaudioAMF1/TCC&#10;Proposta N3, ">
             <a:extLst xmlns:a="http://schemas.openxmlformats.org/drawingml/2006/main">
               <a:ext uri="{FF2B5EF4-FFF2-40B4-BE49-F238E27FC236}">
-                <a16:creationId xmlns:a16="http://schemas.microsoft.com/office/drawing/2014/main" id="{374F73A1-7814-4549-AA2A-6C83DB5ED591}"/>
-              </a:ext>
-            </a:extLst>
-          </p:cNvPr>
-          <p:cNvSpPr>
-            <a:spLocks xmlns:a="http://schemas.openxmlformats.org/drawingml/2006/main" noGrp="1"/>
-          </p:cNvSpPr>
-          <p:nvPr/>
-        </p:nvSpPr>
-        <p:spPr>
-          <a:xfrm xmlns:a="http://schemas.openxmlformats.org/drawingml/2006/main">
-            <a:off x="609600" y="4152900"/>
-            <a:ext cx="10972800" cy="676275"/>
+                <a16:creationId xmlns:a16="http://schemas.microsoft.com/office/drawing/2014/main" id="{D32836BB-9A17-4751-90A5-DFF9F8481691}"/>
+              </a:ext>
+            </a:extLst>
+          </p:cNvPr>
+          <p:cNvSpPr>
+            <a:spLocks xmlns:a="http://schemas.openxmlformats.org/drawingml/2006/main" noGrp="1"/>
+          </p:cNvSpPr>
+          <p:nvPr/>
+        </p:nvSpPr>
+        <p:spPr>
+          <a:xfrm xmlns:a="http://schemas.openxmlformats.org/drawingml/2006/main">
+            <a:off x="609600" y="4000500"/>
+            <a:ext cx="10972800" cy="647700"/>
           </a:xfrm>
           <a:prstGeom xmlns:a="http://schemas.openxmlformats.org/drawingml/2006/main" prst="rect">
             <a:avLst/>
@@ -23722,18 +24005,18 @@
           <p:cNvPr id="13" name="MÉTRICAS E CLASSIFICAÇÃO">
             <a:extLst xmlns:a="http://schemas.openxmlformats.org/drawingml/2006/main">
               <a:ext uri="{FF2B5EF4-FFF2-40B4-BE49-F238E27FC236}">
-                <a16:creationId xmlns:a16="http://schemas.microsoft.com/office/drawing/2014/main" id="{506835C1-9403-45CB-8C3B-211A6514AEF3}"/>
-              </a:ext>
-            </a:extLst>
-          </p:cNvPr>
-          <p:cNvSpPr>
-            <a:spLocks xmlns:a="http://schemas.openxmlformats.org/drawingml/2006/main" noGrp="1"/>
-          </p:cNvSpPr>
-          <p:nvPr/>
-        </p:nvSpPr>
-        <p:spPr>
-          <a:xfrm xmlns:a="http://schemas.openxmlformats.org/drawingml/2006/main">
-            <a:off x="609600" y="5162550"/>
+                <a16:creationId xmlns:a16="http://schemas.microsoft.com/office/drawing/2014/main" id="{EB70A217-7E9D-478C-AA50-40CD6FAA0D31}"/>
+              </a:ext>
+            </a:extLst>
+          </p:cNvPr>
+          <p:cNvSpPr>
+            <a:spLocks xmlns:a="http://schemas.openxmlformats.org/drawingml/2006/main" noGrp="1"/>
+          </p:cNvSpPr>
+          <p:nvPr/>
+        </p:nvSpPr>
+        <p:spPr>
+          <a:xfrm xmlns:a="http://schemas.openxmlformats.org/drawingml/2006/main">
+            <a:off x="609600" y="4933950"/>
             <a:ext cx="10477500" cy="266700"/>
           </a:xfrm>
           <a:prstGeom xmlns:a="http://schemas.openxmlformats.org/drawingml/2006/main" prst="rect">
@@ -23776,22 +24059,22 @@
       </p:sp>
       <p:sp>
         <p:nvSpPr>
-          <p:cNvPr id="14" name="ICORE Conference Portal, registro CCS, e">
-            <a:extLst xmlns:a="http://schemas.openxmlformats.org/drawingml/2006/main">
-              <a:ext uri="{FF2B5EF4-FFF2-40B4-BE49-F238E27FC236}">
-                <a16:creationId xmlns:a16="http://schemas.microsoft.com/office/drawing/2014/main" id="{F8E18381-3DE9-49FA-A3CD-2A69ED6442C4}"/>
-              </a:ext>
-            </a:extLst>
-          </p:cNvPr>
-          <p:cNvSpPr>
-            <a:spLocks xmlns:a="http://schemas.openxmlformats.org/drawingml/2006/main" noGrp="1"/>
-          </p:cNvSpPr>
-          <p:nvPr/>
-        </p:nvSpPr>
-        <p:spPr>
-          <a:xfrm xmlns:a="http://schemas.openxmlformats.org/drawingml/2006/main">
-            <a:off x="609600" y="5448300"/>
-            <a:ext cx="10972800" cy="781050"/>
+          <p:cNvPr id="14" name="Google Scholar Metrics, Computer Securit">
+            <a:extLst xmlns:a="http://schemas.openxmlformats.org/drawingml/2006/main">
+              <a:ext uri="{FF2B5EF4-FFF2-40B4-BE49-F238E27FC236}">
+                <a16:creationId xmlns:a16="http://schemas.microsoft.com/office/drawing/2014/main" id="{F51F3866-ECB4-421C-A5F1-611C546A3378}"/>
+              </a:ext>
+            </a:extLst>
+          </p:cNvPr>
+          <p:cNvSpPr>
+            <a:spLocks xmlns:a="http://schemas.openxmlformats.org/drawingml/2006/main" noGrp="1"/>
+          </p:cNvSpPr>
+          <p:nvPr/>
+        </p:nvSpPr>
+        <p:spPr>
+          <a:xfrm xmlns:a="http://schemas.openxmlformats.org/drawingml/2006/main">
+            <a:off x="609600" y="5267325"/>
+            <a:ext cx="10972800" cy="1028700"/>
           </a:xfrm>
           <a:prstGeom xmlns:a="http://schemas.openxmlformats.org/drawingml/2006/main" prst="rect">
             <a:avLst/>
@@ -23808,7 +24091,7 @@
           <a:lstStyle xmlns:a="http://schemas.openxmlformats.org/drawingml/2006/main"/>
           <a:p xmlns:a="http://schemas.openxmlformats.org/drawingml/2006/main">
             <a:pPr algn="l">
-              <a:defRPr sz="1725" b="0">
+              <a:defRPr sz="1575" b="0">
                 <a:solidFill>
                   <a:srgbClr val="24384A"/>
                 </a:solidFill>
@@ -23818,7 +24101,7 @@
               </a:defRPr>
             </a:pPr>
             <a:r>
-              <a:rPr sz="1725" b="0">
+              <a:rPr sz="1575" b="0">
                 <a:solidFill>
                   <a:srgbClr val="24384A"/>
                 </a:solidFill>
@@ -23826,12 +24109,12 @@
                 <a:ea typeface="Arial"/>
                 <a:cs typeface="Arial"/>
               </a:rPr>
-              <a:t>ICORE Conference Portal, registro CCS, edição 2026. Consulta: 22/09/2026.</a:t>
-            </a:r>
-          </a:p>
-          <a:p xmlns:a="http://schemas.openxmlformats.org/drawingml/2006/main">
-            <a:pPr algn="l">
-              <a:defRPr sz="1725" b="0">
+              <a:t>Google Scholar Metrics, Computer Security &amp; Cryptography. Consulta: 17/09/2026.</a:t>
+            </a:r>
+          </a:p>
+          <a:p xmlns:a="http://schemas.openxmlformats.org/drawingml/2006/main">
+            <a:pPr algn="l">
+              <a:defRPr sz="1575" b="0">
                 <a:solidFill>
                   <a:srgbClr val="24384A"/>
                 </a:solidFill>
@@ -23841,7 +24124,7 @@
               </a:defRPr>
             </a:pPr>
             <a:r>
-              <a:rPr sz="1725" b="0">
+              <a:rPr sz="1575" b="0">
                 <a:solidFill>
                   <a:srgbClr val="24384A"/>
                 </a:solidFill>
@@ -23849,30 +24132,53 @@
                 <a:ea typeface="Arial"/>
                 <a:cs typeface="Arial"/>
               </a:rPr>
+              <a:t>ICORE Conference Portal, registro CCS, edição 2026. Consulta: 17/09/2026.</a:t>
+            </a:r>
+          </a:p>
+          <a:p xmlns:a="http://schemas.openxmlformats.org/drawingml/2006/main">
+            <a:pPr algn="l">
+              <a:defRPr sz="1575" b="0">
+                <a:solidFill>
+                  <a:srgbClr val="24384A"/>
+                </a:solidFill>
+                <a:latin typeface="Arial"/>
+                <a:ea typeface="Arial"/>
+                <a:cs typeface="Arial"/>
+              </a:defRPr>
+            </a:pPr>
+            <a:r>
+              <a:rPr sz="1575" b="0">
+                <a:solidFill>
+                  <a:srgbClr val="24384A"/>
+                </a:solidFill>
+                <a:latin typeface="Arial"/>
+                <a:ea typeface="Arial"/>
+                <a:cs typeface="Arial"/>
+              </a:rPr>
+              <a:t>CAPES. Relatório Qualis Eventos, Computação, quadriênio 2017–2020, p. 9.</a:t>
+            </a:r>
+          </a:p>
+          <a:p xmlns:a="http://schemas.openxmlformats.org/drawingml/2006/main">
+            <a:pPr algn="l">
+              <a:defRPr sz="1575" b="0">
+                <a:solidFill>
+                  <a:srgbClr val="24384A"/>
+                </a:solidFill>
+                <a:latin typeface="Arial"/>
+                <a:ea typeface="Arial"/>
+                <a:cs typeface="Arial"/>
+              </a:defRPr>
+            </a:pPr>
+            <a:r>
+              <a:rPr sz="1575" b="0">
+                <a:solidFill>
+                  <a:srgbClr val="24384A"/>
+                </a:solidFill>
+                <a:latin typeface="Arial"/>
+                <a:ea typeface="Arial"/>
+                <a:cs typeface="Arial"/>
+              </a:rPr>
               <a:t>CAPES. Documento técnico do Qualis Periódicos. Brasília, 2023.</a:t>
-            </a:r>
-          </a:p>
-          <a:p xmlns:a="http://schemas.openxmlformats.org/drawingml/2006/main">
-            <a:pPr algn="l">
-              <a:defRPr sz="1725" b="0">
-                <a:solidFill>
-                  <a:srgbClr val="24384A"/>
-                </a:solidFill>
-                <a:latin typeface="Arial"/>
-                <a:ea typeface="Arial"/>
-                <a:cs typeface="Arial"/>
-              </a:defRPr>
-            </a:pPr>
-            <a:r>
-              <a:rPr sz="1725" b="0">
-                <a:solidFill>
-                  <a:srgbClr val="24384A"/>
-                </a:solidFill>
-                <a:latin typeface="Arial"/>
-                <a:ea typeface="Arial"/>
-                <a:cs typeface="Arial"/>
-              </a:rPr>
-              <a:t>h5 e mediana: valores do material original, sem nova confirmação na fonte.</a:t>
             </a:r>
           </a:p>
         </p:txBody>
@@ -23880,7 +24186,7 @@
     </p:spTree>
     <p:extLst>
       <p:ext uri="{BB962C8B-B14F-4D97-AF65-F5344CB8AC3E}">
-        <p14:creationId xmlns:p14="http://schemas.microsoft.com/office/powerpoint/2010/main" val="2044674672"/>
+        <p14:creationId xmlns:p14="http://schemas.microsoft.com/office/powerpoint/2010/main" val="1850473603"/>
       </p:ext>
     </p:extLst>
   </p:cSld>
@@ -23908,10 +24214,10 @@
       </p:grpSpPr>
       <p:sp>
         <p:nvSpPr>
-          <p:cNvPr id="17" name="">
-            <a:extLst xmlns:a="http://schemas.openxmlformats.org/drawingml/2006/main">
-              <a:ext uri="{FF2B5EF4-FFF2-40B4-BE49-F238E27FC236}">
-                <a16:creationId xmlns:a16="http://schemas.microsoft.com/office/drawing/2014/main" id="{0576DA79-4951-4732-963A-4C3CB3FF8E1D}"/>
+          <p:cNvPr id="18" name="">
+            <a:extLst xmlns:a="http://schemas.openxmlformats.org/drawingml/2006/main">
+              <a:ext uri="{FF2B5EF4-FFF2-40B4-BE49-F238E27FC236}">
+                <a16:creationId xmlns:a16="http://schemas.microsoft.com/office/drawing/2014/main" id="{0A0FBF10-1B4A-4C86-9134-82886FCE94AB}"/>
               </a:ext>
             </a:extLst>
           </p:cNvPr>
@@ -23941,7 +24247,7 @@
           <p:cNvPr id="2" name="SELEÇÃO">
             <a:extLst xmlns:a="http://schemas.openxmlformats.org/drawingml/2006/main">
               <a:ext uri="{FF2B5EF4-FFF2-40B4-BE49-F238E27FC236}">
-                <a16:creationId xmlns:a16="http://schemas.microsoft.com/office/drawing/2014/main" id="{4A65CBBA-0B84-4844-BBE4-92B631BCEF70}"/>
+                <a16:creationId xmlns:a16="http://schemas.microsoft.com/office/drawing/2014/main" id="{3840F412-6664-43B8-B16E-81ADA6F027ED}"/>
               </a:ext>
             </a:extLst>
           </p:cNvPr>
@@ -23998,7 +24304,7 @@
           <p:cNvPr id="3" name="Originalidade e relevância para o TCC">
             <a:extLst xmlns:a="http://schemas.openxmlformats.org/drawingml/2006/main">
               <a:ext uri="{FF2B5EF4-FFF2-40B4-BE49-F238E27FC236}">
-                <a16:creationId xmlns:a16="http://schemas.microsoft.com/office/drawing/2014/main" id="{1FB6A8D1-17CE-42E5-A6B4-B494F680AA59}"/>
+                <a16:creationId xmlns:a16="http://schemas.microsoft.com/office/drawing/2014/main" id="{E70CA4DA-C215-4F89-879C-052A10269867}"/>
               </a:ext>
             </a:extLst>
           </p:cNvPr>
@@ -24055,7 +24361,7 @@
           <p:cNvPr id="4" name="">
             <a:extLst xmlns:a="http://schemas.openxmlformats.org/drawingml/2006/main">
               <a:ext uri="{FF2B5EF4-FFF2-40B4-BE49-F238E27FC236}">
-                <a16:creationId xmlns:a16="http://schemas.microsoft.com/office/drawing/2014/main" id="{52F6A787-220A-4E5A-92FE-FD362538A217}"/>
+                <a16:creationId xmlns:a16="http://schemas.microsoft.com/office/drawing/2014/main" id="{CAAE4655-9588-4A02-9E96-0F4705E4CF65}"/>
               </a:ext>
             </a:extLst>
           </p:cNvPr>
@@ -24085,7 +24391,7 @@
           <p:cNvPr id="5" name="">
             <a:extLst xmlns:a="http://schemas.openxmlformats.org/drawingml/2006/main">
               <a:ext uri="{FF2B5EF4-FFF2-40B4-BE49-F238E27FC236}">
-                <a16:creationId xmlns:a16="http://schemas.microsoft.com/office/drawing/2014/main" id="{74E4677E-FA99-40D4-B606-AB2F9257CF12}"/>
+                <a16:creationId xmlns:a16="http://schemas.microsoft.com/office/drawing/2014/main" id="{23BB625E-194C-4237-804D-6CE957E49111}"/>
               </a:ext>
             </a:extLst>
           </p:cNvPr>
@@ -24115,7 +24421,7 @@
           <p:cNvPr id="6" name="Nguyen, Backes e Stock (2022), p. 1–2. C">
             <a:extLst xmlns:a="http://schemas.openxmlformats.org/drawingml/2006/main">
               <a:ext uri="{FF2B5EF4-FFF2-40B4-BE49-F238E27FC236}">
-                <a16:creationId xmlns:a16="http://schemas.microsoft.com/office/drawing/2014/main" id="{5F74794E-FBA1-496F-BE67-CB9E549B2711}"/>
+                <a16:creationId xmlns:a16="http://schemas.microsoft.com/office/drawing/2014/main" id="{EBFDEE43-E058-44B4-845D-DF6C41EA7CE8}"/>
               </a:ext>
             </a:extLst>
           </p:cNvPr>
@@ -24127,7 +24433,7 @@
         <p:spPr>
           <a:xfrm xmlns:a="http://schemas.openxmlformats.org/drawingml/2006/main">
             <a:off x="609600" y="6477000"/>
-            <a:ext cx="10096500" cy="228600"/>
+            <a:ext cx="9982200" cy="228600"/>
           </a:xfrm>
           <a:prstGeom xmlns:a="http://schemas.openxmlformats.org/drawingml/2006/main" prst="rect">
             <a:avLst/>
@@ -24144,7 +24450,7 @@
           <a:lstStyle xmlns:a="http://schemas.openxmlformats.org/drawingml/2006/main"/>
           <a:p xmlns:a="http://schemas.openxmlformats.org/drawingml/2006/main">
             <a:pPr algn="l">
-              <a:defRPr sz="1125" b="0">
+              <a:defRPr sz="1200" b="0">
                 <a:solidFill>
                   <a:srgbClr val="596B7A"/>
                 </a:solidFill>
@@ -24154,7 +24460,7 @@
               </a:defRPr>
             </a:pPr>
             <a:r>
-              <a:rPr sz="1125" b="0">
+              <a:rPr sz="1200" b="0">
                 <a:solidFill>
                   <a:srgbClr val="596B7A"/>
                 </a:solidFill>
@@ -24172,7 +24478,7 @@
           <p:cNvPr id="7" name="03 / 23">
             <a:extLst xmlns:a="http://schemas.openxmlformats.org/drawingml/2006/main">
               <a:ext uri="{FF2B5EF4-FFF2-40B4-BE49-F238E27FC236}">
-                <a16:creationId xmlns:a16="http://schemas.microsoft.com/office/drawing/2014/main" id="{AE89BE7D-1100-4DE2-AF57-5B7436ED7FD7}"/>
+                <a16:creationId xmlns:a16="http://schemas.microsoft.com/office/drawing/2014/main" id="{CBD9ADCA-2575-4EC0-B6D7-5E81A67D554B}"/>
               </a:ext>
             </a:extLst>
           </p:cNvPr>
@@ -24201,7 +24507,7 @@
           <a:lstStyle xmlns:a="http://schemas.openxmlformats.org/drawingml/2006/main"/>
           <a:p xmlns:a="http://schemas.openxmlformats.org/drawingml/2006/main">
             <a:pPr algn="r">
-              <a:defRPr sz="1125" b="0">
+              <a:defRPr sz="1200" b="0">
                 <a:solidFill>
                   <a:srgbClr val="596B7A"/>
                 </a:solidFill>
@@ -24211,7 +24517,7 @@
               </a:defRPr>
             </a:pPr>
             <a:r>
-              <a:rPr sz="1125" b="0">
+              <a:rPr sz="1200" b="0">
                 <a:solidFill>
                   <a:srgbClr val="596B7A"/>
                 </a:solidFill>
@@ -24226,20 +24532,20 @@
       </p:sp>
       <p:pic>
         <p:nvPicPr>
-          <p:cNvPr id="24" name=""/>
+          <p:cNvPr id="25" name=""/>
           <p:cNvPicPr>
             <a:picLocks xmlns:a="http://schemas.openxmlformats.org/drawingml/2006/main" noChangeAspect="1"/>
           </p:cNvPicPr>
           <p:nvPr/>
         </p:nvPicPr>
         <p:blipFill>
-          <a:blip xmlns:r="http://schemas.openxmlformats.org/officeDocument/2006/relationships" xmlns:a="http://schemas.openxmlformats.org/drawingml/2006/main" r:embed="Rc2f3ec27ba8a4f0f"/>
+          <a:blip xmlns:r="http://schemas.openxmlformats.org/officeDocument/2006/relationships" xmlns:a="http://schemas.openxmlformats.org/drawingml/2006/main" r:embed="R7310ba10151e4108"/>
           <a:stretch xmlns:a="http://schemas.openxmlformats.org/drawingml/2006/main"/>
         </p:blipFill>
         <p:spPr>
           <a:xfrm xmlns:a="http://schemas.openxmlformats.org/drawingml/2006/main">
-            <a:off x="609600" y="1935113"/>
-            <a:ext cx="6553200" cy="825600"/>
+            <a:off x="803289" y="1666875"/>
+            <a:ext cx="6165822" cy="1362075"/>
           </a:xfrm>
           <a:prstGeom xmlns:a="http://schemas.openxmlformats.org/drawingml/2006/main" prst="rect">
             <a:avLst/>
@@ -24251,7 +24557,7 @@
           <p:cNvPr id="9" name="239.381">
             <a:extLst xmlns:a="http://schemas.openxmlformats.org/drawingml/2006/main">
               <a:ext uri="{FF2B5EF4-FFF2-40B4-BE49-F238E27FC236}">
-                <a16:creationId xmlns:a16="http://schemas.microsoft.com/office/drawing/2014/main" id="{FCBCC5C6-F9F9-46B8-905A-71813D024C38}"/>
+                <a16:creationId xmlns:a16="http://schemas.microsoft.com/office/drawing/2014/main" id="{3B26C001-2E8E-4F4A-8B82-B3BEBA5DCAD5}"/>
               </a:ext>
             </a:extLst>
           </p:cNvPr>
@@ -24308,7 +24614,7 @@
           <p:cNvPr id="10" name="aplicativos Android analisados">
             <a:extLst xmlns:a="http://schemas.openxmlformats.org/drawingml/2006/main">
               <a:ext uri="{FF2B5EF4-FFF2-40B4-BE49-F238E27FC236}">
-                <a16:creationId xmlns:a16="http://schemas.microsoft.com/office/drawing/2014/main" id="{3480B985-68A6-43DD-A730-96682934B338}"/>
+                <a16:creationId xmlns:a16="http://schemas.microsoft.com/office/drawing/2014/main" id="{DEF6EC97-834A-461A-8082-53EB8894E0E9}"/>
               </a:ext>
             </a:extLst>
           </p:cNvPr>
@@ -24365,7 +24671,7 @@
           <p:cNvPr id="11" name="">
             <a:extLst xmlns:a="http://schemas.openxmlformats.org/drawingml/2006/main">
               <a:ext uri="{FF2B5EF4-FFF2-40B4-BE49-F238E27FC236}">
-                <a16:creationId xmlns:a16="http://schemas.microsoft.com/office/drawing/2014/main" id="{C48FB892-27A4-4E84-AF86-5D2837702B4D}"/>
+                <a16:creationId xmlns:a16="http://schemas.microsoft.com/office/drawing/2014/main" id="{26D8C6F5-15EA-417C-8F04-9178C9DA30B7}"/>
               </a:ext>
             </a:extLst>
           </p:cNvPr>
@@ -24395,7 +24701,7 @@
           <p:cNvPr id="12" name="PESQUISA ORIGINAL">
             <a:extLst xmlns:a="http://schemas.openxmlformats.org/drawingml/2006/main">
               <a:ext uri="{FF2B5EF4-FFF2-40B4-BE49-F238E27FC236}">
-                <a16:creationId xmlns:a16="http://schemas.microsoft.com/office/drawing/2014/main" id="{176096D1-B007-4225-83AA-133826AF97E2}"/>
+                <a16:creationId xmlns:a16="http://schemas.microsoft.com/office/drawing/2014/main" id="{928008ED-2FD6-41FC-AE43-57370B6D112B}"/>
               </a:ext>
             </a:extLst>
           </p:cNvPr>
@@ -24452,7 +24758,7 @@
           <p:cNvPr id="13" name="Os autores constroem um corpus de avisos">
             <a:extLst xmlns:a="http://schemas.openxmlformats.org/drawingml/2006/main">
               <a:ext uri="{FF2B5EF4-FFF2-40B4-BE49-F238E27FC236}">
-                <a16:creationId xmlns:a16="http://schemas.microsoft.com/office/drawing/2014/main" id="{6B6ECE3D-8D1D-4FA2-88FB-357C95CFA09E}"/>
+                <a16:creationId xmlns:a16="http://schemas.microsoft.com/office/drawing/2014/main" id="{A74F4B28-4E4A-4282-9571-97D73602254E}"/>
               </a:ext>
             </a:extLst>
           </p:cNvPr>
@@ -24555,7 +24861,7 @@
           <p:cNvPr id="14" name="RELAÇÃO COM O TCC">
             <a:extLst xmlns:a="http://schemas.openxmlformats.org/drawingml/2006/main">
               <a:ext uri="{FF2B5EF4-FFF2-40B4-BE49-F238E27FC236}">
-                <a16:creationId xmlns:a16="http://schemas.microsoft.com/office/drawing/2014/main" id="{CA669FAC-E2F5-46CB-AFDE-16FC6F1D96E8}"/>
+                <a16:creationId xmlns:a16="http://schemas.microsoft.com/office/drawing/2014/main" id="{1DBF3382-6C32-4D43-8896-E9B2DDA99410}"/>
               </a:ext>
             </a:extLst>
           </p:cNvPr>
@@ -24612,7 +24918,7 @@
           <p:cNvPr id="15" name="O TCC investiga rastreamento de terceiro">
             <a:extLst xmlns:a="http://schemas.openxmlformats.org/drawingml/2006/main">
               <a:ext uri="{FF2B5EF4-FFF2-40B4-BE49-F238E27FC236}">
-                <a16:creationId xmlns:a16="http://schemas.microsoft.com/office/drawing/2014/main" id="{E71E4146-5D29-48C2-ACAA-AF9E87C6C1D5}"/>
+                <a16:creationId xmlns:a16="http://schemas.microsoft.com/office/drawing/2014/main" id="{F1217C52-6BA0-4E66-856B-957F8BDD0A99}"/>
               </a:ext>
             </a:extLst>
           </p:cNvPr>
@@ -24715,19 +25021,19 @@
           <p:cNvPr id="16" name="Contribuição central: comparar as escolh">
             <a:extLst xmlns:a="http://schemas.openxmlformats.org/drawingml/2006/main">
               <a:ext uri="{FF2B5EF4-FFF2-40B4-BE49-F238E27FC236}">
-                <a16:creationId xmlns:a16="http://schemas.microsoft.com/office/drawing/2014/main" id="{5A790C4B-3345-476A-8203-CE26D72DE806}"/>
-              </a:ext>
-            </a:extLst>
-          </p:cNvPr>
-          <p:cNvSpPr>
-            <a:spLocks xmlns:a="http://schemas.openxmlformats.org/drawingml/2006/main" noGrp="1"/>
-          </p:cNvSpPr>
-          <p:nvPr/>
-        </p:nvSpPr>
-        <p:spPr>
-          <a:xfrm xmlns:a="http://schemas.openxmlformats.org/drawingml/2006/main">
-            <a:off x="609600" y="5676900"/>
-            <a:ext cx="10972800" cy="466725"/>
+                <a16:creationId xmlns:a16="http://schemas.microsoft.com/office/drawing/2014/main" id="{77075456-20DC-4C1F-99BB-B9B7B140B670}"/>
+              </a:ext>
+            </a:extLst>
+          </p:cNvPr>
+          <p:cNvSpPr>
+            <a:spLocks xmlns:a="http://schemas.openxmlformats.org/drawingml/2006/main" noGrp="1"/>
+          </p:cNvSpPr>
+          <p:nvPr/>
+        </p:nvSpPr>
+        <p:spPr>
+          <a:xfrm xmlns:a="http://schemas.openxmlformats.org/drawingml/2006/main">
+            <a:off x="609600" y="5391150"/>
+            <a:ext cx="10972800" cy="457200"/>
           </a:xfrm>
           <a:prstGeom xmlns:a="http://schemas.openxmlformats.org/drawingml/2006/main" prst="rect">
             <a:avLst/>
@@ -24767,10 +25073,67 @@
           </a:p>
         </p:txBody>
       </p:sp>
+      <p:sp>
+        <p:nvSpPr>
+          <p:cNvPr id="17" name="Citações em 17/09/2026: 42 na ACM Digita">
+            <a:extLst xmlns:a="http://schemas.openxmlformats.org/drawingml/2006/main">
+              <a:ext uri="{FF2B5EF4-FFF2-40B4-BE49-F238E27FC236}">
+                <a16:creationId xmlns:a16="http://schemas.microsoft.com/office/drawing/2014/main" id="{DF51BF14-F848-4EA0-928E-0CB8BDEFD6F8}"/>
+              </a:ext>
+            </a:extLst>
+          </p:cNvPr>
+          <p:cNvSpPr>
+            <a:spLocks xmlns:a="http://schemas.openxmlformats.org/drawingml/2006/main" noGrp="1"/>
+          </p:cNvSpPr>
+          <p:nvPr/>
+        </p:nvSpPr>
+        <p:spPr>
+          <a:xfrm xmlns:a="http://schemas.openxmlformats.org/drawingml/2006/main">
+            <a:off x="609600" y="5991225"/>
+            <a:ext cx="10972800" cy="266700"/>
+          </a:xfrm>
+          <a:prstGeom xmlns:a="http://schemas.openxmlformats.org/drawingml/2006/main" prst="rect">
+            <a:avLst/>
+          </a:prstGeom>
+          <a:noFill xmlns:a="http://schemas.openxmlformats.org/drawingml/2006/main"/>
+          <a:ln xmlns:a="http://schemas.openxmlformats.org/drawingml/2006/main" w="0">
+            <a:noFill/>
+          </a:ln>
+        </p:spPr>
+        <p:txBody>
+          <a:bodyPr xmlns:a="http://schemas.openxmlformats.org/drawingml/2006/main" wrap="square" lIns="0" tIns="0" rIns="0" bIns="0" anchor="t">
+            <a:noAutofit/>
+          </a:bodyPr>
+          <a:lstStyle xmlns:a="http://schemas.openxmlformats.org/drawingml/2006/main"/>
+          <a:p xmlns:a="http://schemas.openxmlformats.org/drawingml/2006/main">
+            <a:pPr algn="l">
+              <a:defRPr sz="1575" b="0">
+                <a:solidFill>
+                  <a:srgbClr val="596B7A"/>
+                </a:solidFill>
+                <a:latin typeface="Arial"/>
+                <a:ea typeface="Arial"/>
+                <a:cs typeface="Arial"/>
+              </a:defRPr>
+            </a:pPr>
+            <a:r>
+              <a:rPr sz="1575" b="0">
+                <a:solidFill>
+                  <a:srgbClr val="596B7A"/>
+                </a:solidFill>
+                <a:latin typeface="Arial"/>
+                <a:ea typeface="Arial"/>
+                <a:cs typeface="Arial"/>
+              </a:rPr>
+              <a:t>Citações em 17/09/2026: 42 na ACM Digital Library · 52 no Scopus · 99 no Google Acadêmico</a:t>
+            </a:r>
+          </a:p>
+        </p:txBody>
+      </p:sp>
     </p:spTree>
     <p:extLst>
       <p:ext uri="{BB962C8B-B14F-4D97-AF65-F5344CB8AC3E}">
-        <p14:creationId xmlns:p14="http://schemas.microsoft.com/office/powerpoint/2010/main" val="526765497"/>
+        <p14:creationId xmlns:p14="http://schemas.microsoft.com/office/powerpoint/2010/main" val="63077981"/>
       </p:ext>
     </p:extLst>
   </p:cSld>
@@ -24798,10 +25161,10 @@
       </p:grpSpPr>
       <p:sp>
         <p:nvSpPr>
-          <p:cNvPr id="21" name="">
-            <a:extLst xmlns:a="http://schemas.openxmlformats.org/drawingml/2006/main">
-              <a:ext uri="{FF2B5EF4-FFF2-40B4-BE49-F238E27FC236}">
-                <a16:creationId xmlns:a16="http://schemas.microsoft.com/office/drawing/2014/main" id="{2FD3E228-6F76-4CF7-8E39-298550B92E9F}"/>
+          <p:cNvPr id="22" name="">
+            <a:extLst xmlns:a="http://schemas.openxmlformats.org/drawingml/2006/main">
+              <a:ext uri="{FF2B5EF4-FFF2-40B4-BE49-F238E27FC236}">
+                <a16:creationId xmlns:a16="http://schemas.microsoft.com/office/drawing/2014/main" id="{C979F3C9-0693-4A89-A51D-DA1431A0D20D}"/>
               </a:ext>
             </a:extLst>
           </p:cNvPr>
@@ -24831,7 +25194,7 @@
           <p:cNvPr id="2" name="MÉTRICAS">
             <a:extLst xmlns:a="http://schemas.openxmlformats.org/drawingml/2006/main">
               <a:ext uri="{FF2B5EF4-FFF2-40B4-BE49-F238E27FC236}">
-                <a16:creationId xmlns:a16="http://schemas.microsoft.com/office/drawing/2014/main" id="{F66A5BF6-28F5-4F5E-BBA0-0040845F2F71}"/>
+                <a16:creationId xmlns:a16="http://schemas.microsoft.com/office/drawing/2014/main" id="{2605E8EB-EC3F-459E-B2B9-B74F65D7087E}"/>
               </a:ext>
             </a:extLst>
           </p:cNvPr>
@@ -24885,10 +25248,10 @@
       </p:sp>
       <p:sp>
         <p:nvSpPr>
-          <p:cNvPr id="3" name="Métricas do veículo e limite do enquadra">
-            <a:extLst xmlns:a="http://schemas.openxmlformats.org/drawingml/2006/main">
-              <a:ext uri="{FF2B5EF4-FFF2-40B4-BE49-F238E27FC236}">
-                <a16:creationId xmlns:a16="http://schemas.microsoft.com/office/drawing/2014/main" id="{A49C3522-8B02-4FB8-AD09-8AEED16524A6}"/>
+          <p:cNvPr id="3" name="Métricas do veículo: ACM CCS">
+            <a:extLst xmlns:a="http://schemas.openxmlformats.org/drawingml/2006/main">
+              <a:ext uri="{FF2B5EF4-FFF2-40B4-BE49-F238E27FC236}">
+                <a16:creationId xmlns:a16="http://schemas.microsoft.com/office/drawing/2014/main" id="{2AE5F3FD-4AD1-4161-93B2-4E5197078B2E}"/>
               </a:ext>
             </a:extLst>
           </p:cNvPr>
@@ -24935,7 +25298,7 @@
                 <a:ea typeface="Arial"/>
                 <a:cs typeface="Arial"/>
               </a:rPr>
-              <a:t>Métricas do veículo e limite do enquadramento</a:t>
+              <a:t>Métricas do veículo: ACM CCS</a:t>
             </a:r>
           </a:p>
         </p:txBody>
@@ -24945,7 +25308,7 @@
           <p:cNvPr id="4" name="">
             <a:extLst xmlns:a="http://schemas.openxmlformats.org/drawingml/2006/main">
               <a:ext uri="{FF2B5EF4-FFF2-40B4-BE49-F238E27FC236}">
-                <a16:creationId xmlns:a16="http://schemas.microsoft.com/office/drawing/2014/main" id="{744FBB49-8C44-44B0-BE59-DC72A91F26F0}"/>
+                <a16:creationId xmlns:a16="http://schemas.microsoft.com/office/drawing/2014/main" id="{A69FB34C-A4DD-43F3-B5D9-1D5C2AC15245}"/>
               </a:ext>
             </a:extLst>
           </p:cNvPr>
@@ -24975,7 +25338,7 @@
           <p:cNvPr id="5" name="">
             <a:extLst xmlns:a="http://schemas.openxmlformats.org/drawingml/2006/main">
               <a:ext uri="{FF2B5EF4-FFF2-40B4-BE49-F238E27FC236}">
-                <a16:creationId xmlns:a16="http://schemas.microsoft.com/office/drawing/2014/main" id="{E7388A50-654E-4298-B688-7F7D5EB3B68D}"/>
+                <a16:creationId xmlns:a16="http://schemas.microsoft.com/office/drawing/2014/main" id="{97463ED5-E569-4795-A70D-B38F5F6E633B}"/>
               </a:ext>
             </a:extLst>
           </p:cNvPr>
@@ -25002,10 +25365,10 @@
       </p:sp>
       <p:sp>
         <p:nvSpPr>
-          <p:cNvPr id="6" name="Fontes: levantamento anterior do seminár">
-            <a:extLst xmlns:a="http://schemas.openxmlformats.org/drawingml/2006/main">
-              <a:ext uri="{FF2B5EF4-FFF2-40B4-BE49-F238E27FC236}">
-                <a16:creationId xmlns:a16="http://schemas.microsoft.com/office/drawing/2014/main" id="{A3B82F83-7D33-43D2-A8E2-5626B4E22B63}"/>
+          <p:cNvPr id="6" name="Fontes: Google Scholar Metrics e ICORE, ">
+            <a:extLst xmlns:a="http://schemas.openxmlformats.org/drawingml/2006/main">
+              <a:ext uri="{FF2B5EF4-FFF2-40B4-BE49-F238E27FC236}">
+                <a16:creationId xmlns:a16="http://schemas.microsoft.com/office/drawing/2014/main" id="{FD18C375-7242-4628-8AC0-B8B53DED8263}"/>
               </a:ext>
             </a:extLst>
           </p:cNvPr>
@@ -25017,7 +25380,7 @@
         <p:spPr>
           <a:xfrm xmlns:a="http://schemas.openxmlformats.org/drawingml/2006/main">
             <a:off x="609600" y="6477000"/>
-            <a:ext cx="10096500" cy="228600"/>
+            <a:ext cx="9982200" cy="228600"/>
           </a:xfrm>
           <a:prstGeom xmlns:a="http://schemas.openxmlformats.org/drawingml/2006/main" prst="rect">
             <a:avLst/>
@@ -25034,7 +25397,7 @@
           <a:lstStyle xmlns:a="http://schemas.openxmlformats.org/drawingml/2006/main"/>
           <a:p xmlns:a="http://schemas.openxmlformats.org/drawingml/2006/main">
             <a:pPr algn="l">
-              <a:defRPr sz="1125" b="0">
+              <a:defRPr sz="1200" b="0">
                 <a:solidFill>
                   <a:srgbClr val="596B7A"/>
                 </a:solidFill>
@@ -25044,7 +25407,7 @@
               </a:defRPr>
             </a:pPr>
             <a:r>
-              <a:rPr sz="1125" b="0">
+              <a:rPr sz="1200" b="0">
                 <a:solidFill>
                   <a:srgbClr val="596B7A"/>
                 </a:solidFill>
@@ -25052,7 +25415,7 @@
                 <a:ea typeface="Arial"/>
                 <a:cs typeface="Arial"/>
               </a:rPr>
-              <a:t>Fontes: levantamento anterior do seminário, ICORE 2026 e documento técnico da CAPES (2023).</a:t>
+              <a:t>Fontes: Google Scholar Metrics e ICORE, consulta em 17/09/2026; CAPES, Qualis Eventos Computação 2017–2020.</a:t>
             </a:r>
           </a:p>
         </p:txBody>
@@ -25062,7 +25425,7 @@
           <p:cNvPr id="7" name="04 / 23">
             <a:extLst xmlns:a="http://schemas.openxmlformats.org/drawingml/2006/main">
               <a:ext uri="{FF2B5EF4-FFF2-40B4-BE49-F238E27FC236}">
-                <a16:creationId xmlns:a16="http://schemas.microsoft.com/office/drawing/2014/main" id="{7DB8185B-3775-455F-9A70-BCFC93067904}"/>
+                <a16:creationId xmlns:a16="http://schemas.microsoft.com/office/drawing/2014/main" id="{9CE030FF-9B99-4C80-B7BD-EF9B9D016E3A}"/>
               </a:ext>
             </a:extLst>
           </p:cNvPr>
@@ -25091,7 +25454,7 @@
           <a:lstStyle xmlns:a="http://schemas.openxmlformats.org/drawingml/2006/main"/>
           <a:p xmlns:a="http://schemas.openxmlformats.org/drawingml/2006/main">
             <a:pPr algn="r">
-              <a:defRPr sz="1125" b="0">
+              <a:defRPr sz="1200" b="0">
                 <a:solidFill>
                   <a:srgbClr val="596B7A"/>
                 </a:solidFill>
@@ -25101,7 +25464,7 @@
               </a:defRPr>
             </a:pPr>
             <a:r>
-              <a:rPr sz="1125" b="0">
+              <a:rPr sz="1200" b="0">
                 <a:solidFill>
                   <a:srgbClr val="596B7A"/>
                 </a:solidFill>
@@ -25119,7 +25482,7 @@
           <p:cNvPr id="8" name="GOOGLE SCHOLAR METRICS">
             <a:extLst xmlns:a="http://schemas.openxmlformats.org/drawingml/2006/main">
               <a:ext uri="{FF2B5EF4-FFF2-40B4-BE49-F238E27FC236}">
-                <a16:creationId xmlns:a16="http://schemas.microsoft.com/office/drawing/2014/main" id="{7422842A-3B61-4969-9BB9-D5CEFFDFC79A}"/>
+                <a16:creationId xmlns:a16="http://schemas.microsoft.com/office/drawing/2014/main" id="{24C21F61-DD78-4F69-98AE-107EF2E4F86D}"/>
               </a:ext>
             </a:extLst>
           </p:cNvPr>
@@ -25176,7 +25539,7 @@
           <p:cNvPr id="9" name="90">
             <a:extLst xmlns:a="http://schemas.openxmlformats.org/drawingml/2006/main">
               <a:ext uri="{FF2B5EF4-FFF2-40B4-BE49-F238E27FC236}">
-                <a16:creationId xmlns:a16="http://schemas.microsoft.com/office/drawing/2014/main" id="{A19E8055-53CD-4BC8-A9C7-C24C32358936}"/>
+                <a16:creationId xmlns:a16="http://schemas.microsoft.com/office/drawing/2014/main" id="{7B36245D-B156-45CC-BF56-CFEAE72E084A}"/>
               </a:ext>
             </a:extLst>
           </p:cNvPr>
@@ -25233,7 +25596,7 @@
           <p:cNvPr id="10" name="índice h5&#10;mediana h5: 146">
             <a:extLst xmlns:a="http://schemas.openxmlformats.org/drawingml/2006/main">
               <a:ext uri="{FF2B5EF4-FFF2-40B4-BE49-F238E27FC236}">
-                <a16:creationId xmlns:a16="http://schemas.microsoft.com/office/drawing/2014/main" id="{AB40F23D-3123-4A7C-ABD9-06B69ADFB638}"/>
+                <a16:creationId xmlns:a16="http://schemas.microsoft.com/office/drawing/2014/main" id="{404E61CD-5F42-4CD7-A9E3-09C50DF2AF3F}"/>
               </a:ext>
             </a:extLst>
           </p:cNvPr>
@@ -25310,22 +25673,22 @@
       </p:sp>
       <p:sp>
         <p:nvSpPr>
-          <p:cNvPr id="11" name="Valores registrados no material fornecid">
-            <a:extLst xmlns:a="http://schemas.openxmlformats.org/drawingml/2006/main">
-              <a:ext uri="{FF2B5EF4-FFF2-40B4-BE49-F238E27FC236}">
-                <a16:creationId xmlns:a16="http://schemas.microsoft.com/office/drawing/2014/main" id="{2A274971-655A-4B04-964D-6234E3920E83}"/>
-              </a:ext>
-            </a:extLst>
-          </p:cNvPr>
-          <p:cNvSpPr>
-            <a:spLocks xmlns:a="http://schemas.openxmlformats.org/drawingml/2006/main" noGrp="1"/>
-          </p:cNvSpPr>
-          <p:nvPr/>
-        </p:nvSpPr>
-        <p:spPr>
-          <a:xfrm xmlns:a="http://schemas.openxmlformats.org/drawingml/2006/main">
-            <a:off x="609600" y="3943350"/>
-            <a:ext cx="5048250" cy="609600"/>
+          <p:cNvPr id="11" name="Computer Security &amp; Cryptography: posiçã">
+            <a:extLst xmlns:a="http://schemas.openxmlformats.org/drawingml/2006/main">
+              <a:ext uri="{FF2B5EF4-FFF2-40B4-BE49-F238E27FC236}">
+                <a16:creationId xmlns:a16="http://schemas.microsoft.com/office/drawing/2014/main" id="{098655A0-045E-4F8A-B2F8-362EA56E02E6}"/>
+              </a:ext>
+            </a:extLst>
+          </p:cNvPr>
+          <p:cNvSpPr>
+            <a:spLocks xmlns:a="http://schemas.openxmlformats.org/drawingml/2006/main" noGrp="1"/>
+          </p:cNvSpPr>
+          <p:nvPr/>
+        </p:nvSpPr>
+        <p:spPr>
+          <a:xfrm xmlns:a="http://schemas.openxmlformats.org/drawingml/2006/main">
+            <a:off x="609600" y="3905250"/>
+            <a:ext cx="5238750" cy="762000"/>
           </a:xfrm>
           <a:prstGeom xmlns:a="http://schemas.openxmlformats.org/drawingml/2006/main" prst="rect">
             <a:avLst/>
@@ -25360,7 +25723,7 @@
                 <a:ea typeface="Arial"/>
                 <a:cs typeface="Arial"/>
               </a:rPr>
-              <a:t>Valores registrados no material fornecido.</a:t>
+              <a:t>Computer Security &amp; Cryptography: posição 5.</a:t>
             </a:r>
           </a:p>
           <a:p xmlns:a="http://schemas.openxmlformats.org/drawingml/2006/main">
@@ -25383,7 +25746,30 @@
                 <a:ea typeface="Arial"/>
                 <a:cs typeface="Arial"/>
               </a:rPr>
-              <a:t>Sem nova confirmação no Google Scholar.</a:t>
+              <a:t>Entre as conferências da lista, é a 3ª.</a:t>
+            </a:r>
+          </a:p>
+          <a:p xmlns:a="http://schemas.openxmlformats.org/drawingml/2006/main">
+            <a:pPr algn="l">
+              <a:defRPr sz="1575" b="0">
+                <a:solidFill>
+                  <a:srgbClr val="596B7A"/>
+                </a:solidFill>
+                <a:latin typeface="Arial"/>
+                <a:ea typeface="Arial"/>
+                <a:cs typeface="Arial"/>
+              </a:defRPr>
+            </a:pPr>
+            <a:r>
+              <a:rPr sz="1575" b="0">
+                <a:solidFill>
+                  <a:srgbClr val="596B7A"/>
+                </a:solidFill>
+                <a:latin typeface="Arial"/>
+                <a:ea typeface="Arial"/>
+                <a:cs typeface="Arial"/>
+              </a:rPr>
+              <a:t>Consulta: 17/09/2026.</a:t>
             </a:r>
           </a:p>
         </p:txBody>
@@ -25393,7 +25779,7 @@
           <p:cNvPr id="12" name="">
             <a:extLst xmlns:a="http://schemas.openxmlformats.org/drawingml/2006/main">
               <a:ext uri="{FF2B5EF4-FFF2-40B4-BE49-F238E27FC236}">
-                <a16:creationId xmlns:a16="http://schemas.microsoft.com/office/drawing/2014/main" id="{A7FDFF75-31A6-42F0-9D46-567DBE407587}"/>
+                <a16:creationId xmlns:a16="http://schemas.microsoft.com/office/drawing/2014/main" id="{FA73947F-7723-48E6-B162-DCA22CCD91A8}"/>
               </a:ext>
             </a:extLst>
           </p:cNvPr>
@@ -25423,7 +25809,7 @@
           <p:cNvPr id="13" name="ICORE CONFERENCE PORTAL">
             <a:extLst xmlns:a="http://schemas.openxmlformats.org/drawingml/2006/main">
               <a:ext uri="{FF2B5EF4-FFF2-40B4-BE49-F238E27FC236}">
-                <a16:creationId xmlns:a16="http://schemas.microsoft.com/office/drawing/2014/main" id="{79A26528-7AD9-49FF-99CB-5401193D9DDD}"/>
+                <a16:creationId xmlns:a16="http://schemas.microsoft.com/office/drawing/2014/main" id="{214D63C0-9F32-450B-90C6-88EC2971F5A8}"/>
               </a:ext>
             </a:extLst>
           </p:cNvPr>
@@ -25480,7 +25866,7 @@
           <p:cNvPr id="14" name="A*">
             <a:extLst xmlns:a="http://schemas.openxmlformats.org/drawingml/2006/main">
               <a:ext uri="{FF2B5EF4-FFF2-40B4-BE49-F238E27FC236}">
-                <a16:creationId xmlns:a16="http://schemas.microsoft.com/office/drawing/2014/main" id="{3018ED3A-E0D4-4744-947B-DCEEDD9A177C}"/>
+                <a16:creationId xmlns:a16="http://schemas.microsoft.com/office/drawing/2014/main" id="{AC3F8C12-7DB1-4DD6-BBC8-8295EB601905}"/>
               </a:ext>
             </a:extLst>
           </p:cNvPr>
@@ -25537,7 +25923,7 @@
           <p:cNvPr id="15" name="ACM CCS&#10;classificação ICORE 2026">
             <a:extLst xmlns:a="http://schemas.openxmlformats.org/drawingml/2006/main">
               <a:ext uri="{FF2B5EF4-FFF2-40B4-BE49-F238E27FC236}">
-                <a16:creationId xmlns:a16="http://schemas.microsoft.com/office/drawing/2014/main" id="{89299F3E-4DDD-4A9E-A1F3-544C6EDE5211}"/>
+                <a16:creationId xmlns:a16="http://schemas.microsoft.com/office/drawing/2014/main" id="{5469CF75-6C9D-43CB-B808-DD8725BF7AEC}"/>
               </a:ext>
             </a:extLst>
           </p:cNvPr>
@@ -25614,10 +26000,10 @@
       </p:sp>
       <p:sp>
         <p:nvSpPr>
-          <p:cNvPr id="16" name="Classificação conferida no portal.&#10;Consu">
-            <a:extLst xmlns:a="http://schemas.openxmlformats.org/drawingml/2006/main">
-              <a:ext uri="{FF2B5EF4-FFF2-40B4-BE49-F238E27FC236}">
-                <a16:creationId xmlns:a16="http://schemas.microsoft.com/office/drawing/2014/main" id="{2F7AAF65-0C3D-4F5C-B8A6-76F40E37F19A}"/>
+          <p:cNvPr id="16" name="Classificação registrada no portal.&#10;Cons">
+            <a:extLst xmlns:a="http://schemas.openxmlformats.org/drawingml/2006/main">
+              <a:ext uri="{FF2B5EF4-FFF2-40B4-BE49-F238E27FC236}">
+                <a16:creationId xmlns:a16="http://schemas.microsoft.com/office/drawing/2014/main" id="{BDE3C33A-E66A-4814-B8B7-04FDBB89F211}"/>
               </a:ext>
             </a:extLst>
           </p:cNvPr>
@@ -25664,7 +26050,7 @@
                 <a:ea typeface="Arial"/>
                 <a:cs typeface="Arial"/>
               </a:rPr>
-              <a:t>Classificação conferida no portal.</a:t>
+              <a:t>Classificação registrada no portal.</a:t>
             </a:r>
           </a:p>
           <a:p xmlns:a="http://schemas.openxmlformats.org/drawingml/2006/main">
@@ -25687,7 +26073,7 @@
                 <a:ea typeface="Arial"/>
                 <a:cs typeface="Arial"/>
               </a:rPr>
-              <a:t>Consulta: 22/09/2026.</a:t>
+              <a:t>Consulta: 17/09/2026.</a:t>
             </a:r>
           </a:p>
         </p:txBody>
@@ -25697,7 +26083,7 @@
           <p:cNvPr id="17" name="">
             <a:extLst xmlns:a="http://schemas.openxmlformats.org/drawingml/2006/main">
               <a:ext uri="{FF2B5EF4-FFF2-40B4-BE49-F238E27FC236}">
-                <a16:creationId xmlns:a16="http://schemas.microsoft.com/office/drawing/2014/main" id="{3F19DF53-1DCB-4F91-8DF7-CD3CCA3B1285}"/>
+                <a16:creationId xmlns:a16="http://schemas.microsoft.com/office/drawing/2014/main" id="{B009D361-FDF6-40E2-94DF-29815F8AF216}"/>
               </a:ext>
             </a:extLst>
           </p:cNvPr>
@@ -25724,10 +26110,10 @@
       </p:sp>
       <p:sp>
         <p:nvSpPr>
-          <p:cNvPr id="18" name="QUALIS PERIÓDICOS CORRESPONDENTE AO h5">
-            <a:extLst xmlns:a="http://schemas.openxmlformats.org/drawingml/2006/main">
-              <a:ext uri="{FF2B5EF4-FFF2-40B4-BE49-F238E27FC236}">
-                <a16:creationId xmlns:a16="http://schemas.microsoft.com/office/drawing/2014/main" id="{045C46D4-44C0-42E1-8E07-CC993362DDAE}"/>
+          <p:cNvPr id="18" name="QUALIS CAPES">
+            <a:extLst xmlns:a="http://schemas.openxmlformats.org/drawingml/2006/main">
+              <a:ext uri="{FF2B5EF4-FFF2-40B4-BE49-F238E27FC236}">
+                <a16:creationId xmlns:a16="http://schemas.microsoft.com/office/drawing/2014/main" id="{6E358437-CCA6-432C-9F91-A545B42317B1}"/>
               </a:ext>
             </a:extLst>
           </p:cNvPr>
@@ -25739,7 +26125,7 @@
         <p:spPr>
           <a:xfrm xmlns:a="http://schemas.openxmlformats.org/drawingml/2006/main">
             <a:off x="609600" y="5095875"/>
-            <a:ext cx="10972800" cy="266700"/>
+            <a:ext cx="4286250" cy="266700"/>
           </a:xfrm>
           <a:prstGeom xmlns:a="http://schemas.openxmlformats.org/drawingml/2006/main" prst="rect">
             <a:avLst/>
@@ -25774,29 +26160,29 @@
                 <a:ea typeface="Arial"/>
                 <a:cs typeface="Arial"/>
               </a:rPr>
-              <a:t>QUALIS PERIÓDICOS CORRESPONDENTE AO h5</a:t>
-            </a:r>
-          </a:p>
-        </p:txBody>
-      </p:sp>
-      <p:sp>
-        <p:nvSpPr>
-          <p:cNvPr id="19" name="Não determinável com os dados disponívei">
-            <a:extLst xmlns:a="http://schemas.openxmlformats.org/drawingml/2006/main">
-              <a:ext uri="{FF2B5EF4-FFF2-40B4-BE49-F238E27FC236}">
-                <a16:creationId xmlns:a16="http://schemas.microsoft.com/office/drawing/2014/main" id="{25F402B3-49F4-4D70-8152-C0CDE0E5A400}"/>
-              </a:ext>
-            </a:extLst>
-          </p:cNvPr>
-          <p:cNvSpPr>
-            <a:spLocks xmlns:a="http://schemas.openxmlformats.org/drawingml/2006/main" noGrp="1"/>
-          </p:cNvSpPr>
-          <p:nvPr/>
-        </p:nvSpPr>
-        <p:spPr>
-          <a:xfrm xmlns:a="http://schemas.openxmlformats.org/drawingml/2006/main">
-            <a:off x="609600" y="5467350"/>
-            <a:ext cx="10820400" cy="361950"/>
+              <a:t>QUALIS CAPES</a:t>
+            </a:r>
+          </a:p>
+        </p:txBody>
+      </p:sp>
+      <p:sp>
+        <p:nvSpPr>
+          <p:cNvPr id="19" name="A1">
+            <a:extLst xmlns:a="http://schemas.openxmlformats.org/drawingml/2006/main">
+              <a:ext uri="{FF2B5EF4-FFF2-40B4-BE49-F238E27FC236}">
+                <a16:creationId xmlns:a16="http://schemas.microsoft.com/office/drawing/2014/main" id="{55A6507A-E6CC-444E-A176-17D42CBD7A20}"/>
+              </a:ext>
+            </a:extLst>
+          </p:cNvPr>
+          <p:cNvSpPr>
+            <a:spLocks xmlns:a="http://schemas.openxmlformats.org/drawingml/2006/main" noGrp="1"/>
+          </p:cNvSpPr>
+          <p:nvPr/>
+        </p:nvSpPr>
+        <p:spPr>
+          <a:xfrm xmlns:a="http://schemas.openxmlformats.org/drawingml/2006/main">
+            <a:off x="609600" y="5476875"/>
+            <a:ext cx="1104900" cy="695325"/>
           </a:xfrm>
           <a:prstGeom xmlns:a="http://schemas.openxmlformats.org/drawingml/2006/main" prst="rect">
             <a:avLst/>
@@ -25813,47 +26199,47 @@
           <a:lstStyle xmlns:a="http://schemas.openxmlformats.org/drawingml/2006/main"/>
           <a:p xmlns:a="http://schemas.openxmlformats.org/drawingml/2006/main">
             <a:pPr algn="l">
-              <a:defRPr sz="2175" b="1">
-                <a:solidFill>
-                  <a:srgbClr val="12324F"/>
-                </a:solidFill>
-                <a:latin typeface="Arial"/>
-                <a:ea typeface="Arial"/>
-                <a:cs typeface="Arial"/>
-              </a:defRPr>
-            </a:pPr>
-            <a:r>
-              <a:rPr sz="2175" b="1">
-                <a:solidFill>
-                  <a:srgbClr val="12324F"/>
-                </a:solidFill>
-                <a:latin typeface="Arial"/>
-                <a:ea typeface="Arial"/>
-                <a:cs typeface="Arial"/>
-              </a:rPr>
-              <a:t>Não determinável com os dados disponíveis.</a:t>
-            </a:r>
-          </a:p>
-        </p:txBody>
-      </p:sp>
-      <p:sp>
-        <p:nvSpPr>
-          <p:cNvPr id="20" name="A1 exige percentil ≥ 87,5. O h5 bruto e ">
-            <a:extLst xmlns:a="http://schemas.openxmlformats.org/drawingml/2006/main">
-              <a:ext uri="{FF2B5EF4-FFF2-40B4-BE49-F238E27FC236}">
-                <a16:creationId xmlns:a16="http://schemas.microsoft.com/office/drawing/2014/main" id="{EC5D8985-B9E2-42B7-9A73-3704F13429CF}"/>
-              </a:ext>
-            </a:extLst>
-          </p:cNvPr>
-          <p:cNvSpPr>
-            <a:spLocks xmlns:a="http://schemas.openxmlformats.org/drawingml/2006/main" noGrp="1"/>
-          </p:cNvSpPr>
-          <p:nvPr/>
-        </p:nvSpPr>
-        <p:spPr>
-          <a:xfrm xmlns:a="http://schemas.openxmlformats.org/drawingml/2006/main">
-            <a:off x="609600" y="5895975"/>
-            <a:ext cx="10972800" cy="304800"/>
+              <a:defRPr sz="4125" b="1">
+                <a:solidFill>
+                  <a:srgbClr val="174875"/>
+                </a:solidFill>
+                <a:latin typeface="Arial"/>
+                <a:ea typeface="Arial"/>
+                <a:cs typeface="Arial"/>
+              </a:defRPr>
+            </a:pPr>
+            <a:r>
+              <a:rPr sz="4125" b="1">
+                <a:solidFill>
+                  <a:srgbClr val="174875"/>
+                </a:solidFill>
+                <a:latin typeface="Arial"/>
+                <a:ea typeface="Arial"/>
+                <a:cs typeface="Arial"/>
+              </a:rPr>
+              <a:t>A1</a:t>
+            </a:r>
+          </a:p>
+        </p:txBody>
+      </p:sp>
+      <p:sp>
+        <p:nvSpPr>
+          <p:cNvPr id="20" name="Qualis Eventos da Computação, quadriênio">
+            <a:extLst xmlns:a="http://schemas.openxmlformats.org/drawingml/2006/main">
+              <a:ext uri="{FF2B5EF4-FFF2-40B4-BE49-F238E27FC236}">
+                <a16:creationId xmlns:a16="http://schemas.microsoft.com/office/drawing/2014/main" id="{47C8B70A-B5F0-4324-BFED-2E4D39477ADB}"/>
+              </a:ext>
+            </a:extLst>
+          </p:cNvPr>
+          <p:cNvSpPr>
+            <a:spLocks xmlns:a="http://schemas.openxmlformats.org/drawingml/2006/main" noGrp="1"/>
+          </p:cNvSpPr>
+          <p:nvPr/>
+        </p:nvSpPr>
+        <p:spPr>
+          <a:xfrm xmlns:a="http://schemas.openxmlformats.org/drawingml/2006/main">
+            <a:off x="1857375" y="5353050"/>
+            <a:ext cx="9725025" cy="552450"/>
           </a:xfrm>
           <a:prstGeom xmlns:a="http://schemas.openxmlformats.org/drawingml/2006/main" prst="rect">
             <a:avLst/>
@@ -25870,7 +26256,7 @@
           <a:lstStyle xmlns:a="http://schemas.openxmlformats.org/drawingml/2006/main"/>
           <a:p xmlns:a="http://schemas.openxmlformats.org/drawingml/2006/main">
             <a:pPr algn="l">
-              <a:defRPr sz="1650" b="0">
+              <a:defRPr sz="1725" b="0">
                 <a:solidFill>
                   <a:srgbClr val="24384A"/>
                 </a:solidFill>
@@ -25880,7 +26266,7 @@
               </a:defRPr>
             </a:pPr>
             <a:r>
-              <a:rPr sz="1650" b="0">
+              <a:rPr sz="1725" b="0">
                 <a:solidFill>
                   <a:srgbClr val="24384A"/>
                 </a:solidFill>
@@ -25888,15 +26274,60 @@
                 <a:ea typeface="Arial"/>
                 <a:cs typeface="Arial"/>
               </a:rPr>
-              <a:t>A1 exige percentil ≥ 87,5. O h5 bruto e a posição em uma lista truncada não bastam para calculá-lo.</a:t>
-            </a:r>
-          </a:p>
-        </p:txBody>
-      </p:sp>
+              <a:t>Qualis Eventos da Computação, quadriênio 2017–2020, p. 9.</a:t>
+            </a:r>
+          </a:p>
+          <a:p xmlns:a="http://schemas.openxmlformats.org/drawingml/2006/main">
+            <a:pPr algn="l">
+              <a:defRPr sz="1725" b="0">
+                <a:solidFill>
+                  <a:srgbClr val="24384A"/>
+                </a:solidFill>
+                <a:latin typeface="Arial"/>
+                <a:ea typeface="Arial"/>
+                <a:cs typeface="Arial"/>
+              </a:defRPr>
+            </a:pPr>
+            <a:r>
+              <a:rPr sz="1725" b="0">
+                <a:solidFill>
+                  <a:srgbClr val="24384A"/>
+                </a:solidFill>
+                <a:latin typeface="Arial"/>
+                <a:ea typeface="Arial"/>
+                <a:cs typeface="Arial"/>
+              </a:rPr>
+              <a:t>A sigla CCS identifica o veículo do artigo.</a:t>
+            </a:r>
+          </a:p>
+        </p:txBody>
+      </p:sp>
+      <p:pic>
+        <p:nvPicPr>
+          <p:cNvPr id="42" name=""/>
+          <p:cNvPicPr>
+            <a:picLocks xmlns:a="http://schemas.openxmlformats.org/drawingml/2006/main" noChangeAspect="1"/>
+          </p:cNvPicPr>
+          <p:nvPr/>
+        </p:nvPicPr>
+        <p:blipFill>
+          <a:blip xmlns:r="http://schemas.openxmlformats.org/officeDocument/2006/relationships" xmlns:a="http://schemas.openxmlformats.org/drawingml/2006/main" r:embed="R23f44abec6be4f5b"/>
+          <a:stretch xmlns:a="http://schemas.openxmlformats.org/drawingml/2006/main"/>
+        </p:blipFill>
+        <p:spPr>
+          <a:xfrm xmlns:a="http://schemas.openxmlformats.org/drawingml/2006/main">
+            <a:off x="1871951" y="5962650"/>
+            <a:ext cx="9695873" cy="323850"/>
+          </a:xfrm>
+          <a:prstGeom xmlns:a="http://schemas.openxmlformats.org/drawingml/2006/main" prst="rect">
+            <a:avLst/>
+          </a:prstGeom>
+        </p:spPr>
+      </p:pic>
     </p:spTree>
     <p:extLst>
       <p:ext uri="{BB962C8B-B14F-4D97-AF65-F5344CB8AC3E}">
-        <p14:creationId xmlns:p14="http://schemas.microsoft.com/office/powerpoint/2010/main" val="1429786041"/>
+        <p14:creationId xmlns:p14="http://schemas.microsoft.com/office/powerpoint/2010/main" val="769236556"/>
       </p:ext>
     </p:extLst>
   </p:cSld>
@@ -25927,7 +26358,7 @@
           <p:cNvPr id="11" name="">
             <a:extLst xmlns:a="http://schemas.openxmlformats.org/drawingml/2006/main">
               <a:ext uri="{FF2B5EF4-FFF2-40B4-BE49-F238E27FC236}">
-                <a16:creationId xmlns:a16="http://schemas.microsoft.com/office/drawing/2014/main" id="{DE8B2171-12A3-4ADD-8C01-F8F4FC05E539}"/>
+                <a16:creationId xmlns:a16="http://schemas.microsoft.com/office/drawing/2014/main" id="{36343368-B28E-4913-9C8D-9EAA719D1302}"/>
               </a:ext>
             </a:extLst>
           </p:cNvPr>
@@ -25957,7 +26388,7 @@
           <p:cNvPr id="2" name="ESTRUTURA">
             <a:extLst xmlns:a="http://schemas.openxmlformats.org/drawingml/2006/main">
               <a:ext uri="{FF2B5EF4-FFF2-40B4-BE49-F238E27FC236}">
-                <a16:creationId xmlns:a16="http://schemas.microsoft.com/office/drawing/2014/main" id="{8110F456-C87A-4FA5-8FDB-C668FEA35650}"/>
+                <a16:creationId xmlns:a16="http://schemas.microsoft.com/office/drawing/2014/main" id="{C2E72982-1A33-45CE-8BA2-D38DF1FF6500}"/>
               </a:ext>
             </a:extLst>
           </p:cNvPr>
@@ -26014,7 +26445,7 @@
           <p:cNvPr id="3" name="Como o artigo organiza o argumento">
             <a:extLst xmlns:a="http://schemas.openxmlformats.org/drawingml/2006/main">
               <a:ext uri="{FF2B5EF4-FFF2-40B4-BE49-F238E27FC236}">
-                <a16:creationId xmlns:a16="http://schemas.microsoft.com/office/drawing/2014/main" id="{5289FE70-5A92-4713-8745-AE78E8B85BFA}"/>
+                <a16:creationId xmlns:a16="http://schemas.microsoft.com/office/drawing/2014/main" id="{D90FEB43-0FBC-490F-90C6-887D473CD12B}"/>
               </a:ext>
             </a:extLst>
           </p:cNvPr>
@@ -26071,7 +26502,7 @@
           <p:cNvPr id="4" name="">
             <a:extLst xmlns:a="http://schemas.openxmlformats.org/drawingml/2006/main">
               <a:ext uri="{FF2B5EF4-FFF2-40B4-BE49-F238E27FC236}">
-                <a16:creationId xmlns:a16="http://schemas.microsoft.com/office/drawing/2014/main" id="{98418F75-739B-47F7-B790-DECDEFDDEA4E}"/>
+                <a16:creationId xmlns:a16="http://schemas.microsoft.com/office/drawing/2014/main" id="{EB59BC38-B31D-44B6-9B91-7A0E6C4E33C3}"/>
               </a:ext>
             </a:extLst>
           </p:cNvPr>
@@ -26101,7 +26532,7 @@
           <p:cNvPr id="5" name="">
             <a:extLst xmlns:a="http://schemas.openxmlformats.org/drawingml/2006/main">
               <a:ext uri="{FF2B5EF4-FFF2-40B4-BE49-F238E27FC236}">
-                <a16:creationId xmlns:a16="http://schemas.microsoft.com/office/drawing/2014/main" id="{D2493FA7-D7CB-4747-8CF9-9B70C108654A}"/>
+                <a16:creationId xmlns:a16="http://schemas.microsoft.com/office/drawing/2014/main" id="{6E3B4F34-7F08-4B41-9277-E9C009C6BC0E}"/>
               </a:ext>
             </a:extLst>
           </p:cNvPr>
@@ -26131,7 +26562,7 @@
           <p:cNvPr id="6" name="Nguyen, Backes e Stock (2022), p. 1–13. ">
             <a:extLst xmlns:a="http://schemas.openxmlformats.org/drawingml/2006/main">
               <a:ext uri="{FF2B5EF4-FFF2-40B4-BE49-F238E27FC236}">
-                <a16:creationId xmlns:a16="http://schemas.microsoft.com/office/drawing/2014/main" id="{7A03D2D7-B687-44C7-AF2E-6EBB12F5A903}"/>
+                <a16:creationId xmlns:a16="http://schemas.microsoft.com/office/drawing/2014/main" id="{E4136794-21B8-4B98-AD2A-7D8EA3C7DF0B}"/>
               </a:ext>
             </a:extLst>
           </p:cNvPr>
@@ -26143,7 +26574,7 @@
         <p:spPr>
           <a:xfrm xmlns:a="http://schemas.openxmlformats.org/drawingml/2006/main">
             <a:off x="609600" y="6477000"/>
-            <a:ext cx="10096500" cy="228600"/>
+            <a:ext cx="9982200" cy="228600"/>
           </a:xfrm>
           <a:prstGeom xmlns:a="http://schemas.openxmlformats.org/drawingml/2006/main" prst="rect">
             <a:avLst/>
@@ -26160,7 +26591,7 @@
           <a:lstStyle xmlns:a="http://schemas.openxmlformats.org/drawingml/2006/main"/>
           <a:p xmlns:a="http://schemas.openxmlformats.org/drawingml/2006/main">
             <a:pPr algn="l">
-              <a:defRPr sz="1125" b="0">
+              <a:defRPr sz="1200" b="0">
                 <a:solidFill>
                   <a:srgbClr val="596B7A"/>
                 </a:solidFill>
@@ -26170,7 +26601,7 @@
               </a:defRPr>
             </a:pPr>
             <a:r>
-              <a:rPr sz="1125" b="0">
+              <a:rPr sz="1200" b="0">
                 <a:solidFill>
                   <a:srgbClr val="596B7A"/>
                 </a:solidFill>
@@ -26188,7 +26619,7 @@
           <p:cNvPr id="7" name="05 / 23">
             <a:extLst xmlns:a="http://schemas.openxmlformats.org/drawingml/2006/main">
               <a:ext uri="{FF2B5EF4-FFF2-40B4-BE49-F238E27FC236}">
-                <a16:creationId xmlns:a16="http://schemas.microsoft.com/office/drawing/2014/main" id="{679C4E4F-11F9-4972-830C-8ABB83FAFD3A}"/>
+                <a16:creationId xmlns:a16="http://schemas.microsoft.com/office/drawing/2014/main" id="{FD974EA3-4D4F-4F42-AE9E-65B7C0592809}"/>
               </a:ext>
             </a:extLst>
           </p:cNvPr>
@@ -26217,7 +26648,7 @@
           <a:lstStyle xmlns:a="http://schemas.openxmlformats.org/drawingml/2006/main"/>
           <a:p xmlns:a="http://schemas.openxmlformats.org/drawingml/2006/main">
             <a:pPr algn="r">
-              <a:defRPr sz="1125" b="0">
+              <a:defRPr sz="1200" b="0">
                 <a:solidFill>
                   <a:srgbClr val="596B7A"/>
                 </a:solidFill>
@@ -26227,7 +26658,7 @@
               </a:defRPr>
             </a:pPr>
             <a:r>
-              <a:rPr sz="1125" b="0">
+              <a:rPr sz="1200" b="0">
                 <a:solidFill>
                   <a:srgbClr val="596B7A"/>
                 </a:solidFill>
@@ -27099,7 +27530,7 @@
           <p:cNvPr id="9" name="A Seção 3 apresenta o método. A Seção 4 ">
             <a:extLst xmlns:a="http://schemas.openxmlformats.org/drawingml/2006/main">
               <a:ext uri="{FF2B5EF4-FFF2-40B4-BE49-F238E27FC236}">
-                <a16:creationId xmlns:a16="http://schemas.microsoft.com/office/drawing/2014/main" id="{A1EA64D5-61CC-4A5A-A4C8-9FF322567587}"/>
+                <a16:creationId xmlns:a16="http://schemas.microsoft.com/office/drawing/2014/main" id="{B7C221C5-B3B6-4A7A-B43E-8EEE6580E66E}"/>
               </a:ext>
             </a:extLst>
           </p:cNvPr>
@@ -27156,7 +27587,7 @@
           <p:cNvPr id="10" name="A revisão detalhada de trabalhos relacio">
             <a:extLst xmlns:a="http://schemas.openxmlformats.org/drawingml/2006/main">
               <a:ext uri="{FF2B5EF4-FFF2-40B4-BE49-F238E27FC236}">
-                <a16:creationId xmlns:a16="http://schemas.microsoft.com/office/drawing/2014/main" id="{E934E033-B142-4568-AE26-D9F2716EA886}"/>
+                <a16:creationId xmlns:a16="http://schemas.microsoft.com/office/drawing/2014/main" id="{1E8CB4A9-8314-44D2-9D24-7B24C61983A5}"/>
               </a:ext>
             </a:extLst>
           </p:cNvPr>
@@ -27211,7 +27642,7 @@
     </p:spTree>
     <p:extLst>
       <p:ext uri="{BB962C8B-B14F-4D97-AF65-F5344CB8AC3E}">
-        <p14:creationId xmlns:p14="http://schemas.microsoft.com/office/powerpoint/2010/main" val="1513635872"/>
+        <p14:creationId xmlns:p14="http://schemas.microsoft.com/office/powerpoint/2010/main" val="1424236277"/>
       </p:ext>
     </p:extLst>
   </p:cSld>
@@ -27242,7 +27673,7 @@
           <p:cNvPr id="25" name="">
             <a:extLst xmlns:a="http://schemas.openxmlformats.org/drawingml/2006/main">
               <a:ext uri="{FF2B5EF4-FFF2-40B4-BE49-F238E27FC236}">
-                <a16:creationId xmlns:a16="http://schemas.microsoft.com/office/drawing/2014/main" id="{D2D9058E-AAAA-4FC8-9EDA-88EB1218CF93}"/>
+                <a16:creationId xmlns:a16="http://schemas.microsoft.com/office/drawing/2014/main" id="{3B392D1C-FD1F-4765-83BF-6615FCD670D8}"/>
               </a:ext>
             </a:extLst>
           </p:cNvPr>
@@ -27272,7 +27703,7 @@
           <p:cNvPr id="2" name="ANÁLISE DO ABSTRACT">
             <a:extLst xmlns:a="http://schemas.openxmlformats.org/drawingml/2006/main">
               <a:ext uri="{FF2B5EF4-FFF2-40B4-BE49-F238E27FC236}">
-                <a16:creationId xmlns:a16="http://schemas.microsoft.com/office/drawing/2014/main" id="{D323966A-7BC2-430B-BE95-5D13FB28A50C}"/>
+                <a16:creationId xmlns:a16="http://schemas.microsoft.com/office/drawing/2014/main" id="{E994C503-9226-4B7B-AC1C-BE28DD81FB9F}"/>
               </a:ext>
             </a:extLst>
           </p:cNvPr>
@@ -27329,7 +27760,7 @@
           <p:cNvPr id="3" name="Resumo: contexto, lacuna e objetivo">
             <a:extLst xmlns:a="http://schemas.openxmlformats.org/drawingml/2006/main">
               <a:ext uri="{FF2B5EF4-FFF2-40B4-BE49-F238E27FC236}">
-                <a16:creationId xmlns:a16="http://schemas.microsoft.com/office/drawing/2014/main" id="{3C67B7E0-59E1-4742-AA8C-23162423DEF1}"/>
+                <a16:creationId xmlns:a16="http://schemas.microsoft.com/office/drawing/2014/main" id="{11AE3A62-EDFC-4665-97DB-A15FB7E89E2B}"/>
               </a:ext>
             </a:extLst>
           </p:cNvPr>
@@ -27386,7 +27817,7 @@
           <p:cNvPr id="4" name="">
             <a:extLst xmlns:a="http://schemas.openxmlformats.org/drawingml/2006/main">
               <a:ext uri="{FF2B5EF4-FFF2-40B4-BE49-F238E27FC236}">
-                <a16:creationId xmlns:a16="http://schemas.microsoft.com/office/drawing/2014/main" id="{9482CA78-4AD5-4997-A2EC-5606CD517382}"/>
+                <a16:creationId xmlns:a16="http://schemas.microsoft.com/office/drawing/2014/main" id="{863CD8A2-43CD-47A4-AC49-DDCDC7BE2D02}"/>
               </a:ext>
             </a:extLst>
           </p:cNvPr>
@@ -27416,7 +27847,7 @@
           <p:cNvPr id="5" name="">
             <a:extLst xmlns:a="http://schemas.openxmlformats.org/drawingml/2006/main">
               <a:ext uri="{FF2B5EF4-FFF2-40B4-BE49-F238E27FC236}">
-                <a16:creationId xmlns:a16="http://schemas.microsoft.com/office/drawing/2014/main" id="{70EC031B-658E-4093-BBC9-F77AC2E5F8B0}"/>
+                <a16:creationId xmlns:a16="http://schemas.microsoft.com/office/drawing/2014/main" id="{A6A89FB5-2E2F-4226-9544-8A8A520455B3}"/>
               </a:ext>
             </a:extLst>
           </p:cNvPr>
@@ -27446,7 +27877,7 @@
           <p:cNvPr id="6" name="Nguyen, Backes e Stock (2022), Abstract,">
             <a:extLst xmlns:a="http://schemas.openxmlformats.org/drawingml/2006/main">
               <a:ext uri="{FF2B5EF4-FFF2-40B4-BE49-F238E27FC236}">
-                <a16:creationId xmlns:a16="http://schemas.microsoft.com/office/drawing/2014/main" id="{3E2DC0BF-F28C-4E3A-BA51-3F7EEBAB096B}"/>
+                <a16:creationId xmlns:a16="http://schemas.microsoft.com/office/drawing/2014/main" id="{65C89E5D-35DE-4D7A-8EFC-22CD5A3A3F62}"/>
               </a:ext>
             </a:extLst>
           </p:cNvPr>
@@ -27458,7 +27889,7 @@
         <p:spPr>
           <a:xfrm xmlns:a="http://schemas.openxmlformats.org/drawingml/2006/main">
             <a:off x="609600" y="6477000"/>
-            <a:ext cx="10096500" cy="228600"/>
+            <a:ext cx="9982200" cy="228600"/>
           </a:xfrm>
           <a:prstGeom xmlns:a="http://schemas.openxmlformats.org/drawingml/2006/main" prst="rect">
             <a:avLst/>
@@ -27475,7 +27906,7 @@
           <a:lstStyle xmlns:a="http://schemas.openxmlformats.org/drawingml/2006/main"/>
           <a:p xmlns:a="http://schemas.openxmlformats.org/drawingml/2006/main">
             <a:pPr algn="l">
-              <a:defRPr sz="1125" b="0">
+              <a:defRPr sz="1200" b="0">
                 <a:solidFill>
                   <a:srgbClr val="596B7A"/>
                 </a:solidFill>
@@ -27485,7 +27916,7 @@
               </a:defRPr>
             </a:pPr>
             <a:r>
-              <a:rPr sz="1125" b="0">
+              <a:rPr sz="1200" b="0">
                 <a:solidFill>
                   <a:srgbClr val="596B7A"/>
                 </a:solidFill>
@@ -27503,7 +27934,7 @@
           <p:cNvPr id="7" name="06 / 23">
             <a:extLst xmlns:a="http://schemas.openxmlformats.org/drawingml/2006/main">
               <a:ext uri="{FF2B5EF4-FFF2-40B4-BE49-F238E27FC236}">
-                <a16:creationId xmlns:a16="http://schemas.microsoft.com/office/drawing/2014/main" id="{5A6CA8DD-4891-4E3F-8743-AFCD8736C42A}"/>
+                <a16:creationId xmlns:a16="http://schemas.microsoft.com/office/drawing/2014/main" id="{F3A4FA85-CFE8-4799-982F-A2EC1677CB2E}"/>
               </a:ext>
             </a:extLst>
           </p:cNvPr>
@@ -27532,7 +27963,7 @@
           <a:lstStyle xmlns:a="http://schemas.openxmlformats.org/drawingml/2006/main"/>
           <a:p xmlns:a="http://schemas.openxmlformats.org/drawingml/2006/main">
             <a:pPr algn="r">
-              <a:defRPr sz="1125" b="0">
+              <a:defRPr sz="1200" b="0">
                 <a:solidFill>
                   <a:srgbClr val="596B7A"/>
                 </a:solidFill>
@@ -27542,7 +27973,7 @@
               </a:defRPr>
             </a:pPr>
             <a:r>
-              <a:rPr sz="1125" b="0">
+              <a:rPr sz="1200" b="0">
                 <a:solidFill>
                   <a:srgbClr val="596B7A"/>
                 </a:solidFill>
@@ -27560,7 +27991,7 @@
           <p:cNvPr id="8" name="CONTEXTO">
             <a:extLst xmlns:a="http://schemas.openxmlformats.org/drawingml/2006/main">
               <a:ext uri="{FF2B5EF4-FFF2-40B4-BE49-F238E27FC236}">
-                <a16:creationId xmlns:a16="http://schemas.microsoft.com/office/drawing/2014/main" id="{0F5C8D64-24C0-4E4A-831E-C0C11BDF5B55}"/>
+                <a16:creationId xmlns:a16="http://schemas.microsoft.com/office/drawing/2014/main" id="{1F8E3D19-092B-4BAC-A0FC-4EC67BF3A900}"/>
               </a:ext>
             </a:extLst>
           </p:cNvPr>
@@ -27617,7 +28048,7 @@
           <p:cNvPr id="9" name="EN">
             <a:extLst xmlns:a="http://schemas.openxmlformats.org/drawingml/2006/main">
               <a:ext uri="{FF2B5EF4-FFF2-40B4-BE49-F238E27FC236}">
-                <a16:creationId xmlns:a16="http://schemas.microsoft.com/office/drawing/2014/main" id="{7D9B2A07-BC0E-479C-8545-F497C3044DB0}"/>
+                <a16:creationId xmlns:a16="http://schemas.microsoft.com/office/drawing/2014/main" id="{BD23F619-AFB6-4E59-9255-2DDE772B0B98}"/>
               </a:ext>
             </a:extLst>
           </p:cNvPr>
@@ -27646,7 +28077,7 @@
           <a:lstStyle xmlns:a="http://schemas.openxmlformats.org/drawingml/2006/main"/>
           <a:p xmlns:a="http://schemas.openxmlformats.org/drawingml/2006/main">
             <a:pPr algn="l">
-              <a:defRPr sz="1125" b="1">
+              <a:defRPr sz="1200" b="1">
                 <a:solidFill>
                   <a:srgbClr val="AC4C45"/>
                 </a:solidFill>
@@ -27656,7 +28087,7 @@
               </a:defRPr>
             </a:pPr>
             <a:r>
-              <a:rPr sz="1125" b="1">
+              <a:rPr sz="1200" b="1">
                 <a:solidFill>
                   <a:srgbClr val="AC4C45"/>
                 </a:solidFill>
@@ -27674,7 +28105,7 @@
           <p:cNvPr id="10" name="“freely given, specific, informed, and u">
             <a:extLst xmlns:a="http://schemas.openxmlformats.org/drawingml/2006/main">
               <a:ext uri="{FF2B5EF4-FFF2-40B4-BE49-F238E27FC236}">
-                <a16:creationId xmlns:a16="http://schemas.microsoft.com/office/drawing/2014/main" id="{29B43614-D20E-44D3-BBF3-86075DB7100E}"/>
+                <a16:creationId xmlns:a16="http://schemas.microsoft.com/office/drawing/2014/main" id="{41E289B7-5944-4E7A-A294-C3E489F793A2}"/>
               </a:ext>
             </a:extLst>
           </p:cNvPr>
@@ -27731,7 +28162,7 @@
           <p:cNvPr id="11" name="PT">
             <a:extLst xmlns:a="http://schemas.openxmlformats.org/drawingml/2006/main">
               <a:ext uri="{FF2B5EF4-FFF2-40B4-BE49-F238E27FC236}">
-                <a16:creationId xmlns:a16="http://schemas.microsoft.com/office/drawing/2014/main" id="{59352A91-B134-458B-AA5A-BF2B57BDCB0D}"/>
+                <a16:creationId xmlns:a16="http://schemas.microsoft.com/office/drawing/2014/main" id="{A39A31C8-4FE5-4C75-8C8F-FC732BC406E4}"/>
               </a:ext>
             </a:extLst>
           </p:cNvPr>
@@ -27760,7 +28191,7 @@
           <a:lstStyle xmlns:a="http://schemas.openxmlformats.org/drawingml/2006/main"/>
           <a:p xmlns:a="http://schemas.openxmlformats.org/drawingml/2006/main">
             <a:pPr algn="l">
-              <a:defRPr sz="1125" b="1">
+              <a:defRPr sz="1200" b="1">
                 <a:solidFill>
                   <a:srgbClr val="AC4C45"/>
                 </a:solidFill>
@@ -27770,7 +28201,7 @@
               </a:defRPr>
             </a:pPr>
             <a:r>
-              <a:rPr sz="1125" b="1">
+              <a:rPr sz="1200" b="1">
                 <a:solidFill>
                   <a:srgbClr val="AC4C45"/>
                 </a:solidFill>
@@ -27788,7 +28219,7 @@
           <p:cNvPr id="12" name="Livre, específico, informado e inequívoc">
             <a:extLst xmlns:a="http://schemas.openxmlformats.org/drawingml/2006/main">
               <a:ext uri="{FF2B5EF4-FFF2-40B4-BE49-F238E27FC236}">
-                <a16:creationId xmlns:a16="http://schemas.microsoft.com/office/drawing/2014/main" id="{6FF4D476-9409-4006-AAD5-5603F27BDBF8}"/>
+                <a16:creationId xmlns:a16="http://schemas.microsoft.com/office/drawing/2014/main" id="{0E4DBE66-1187-4F2D-A197-CF211EBB585C}"/>
               </a:ext>
             </a:extLst>
           </p:cNvPr>
@@ -27845,7 +28276,7 @@
           <p:cNvPr id="13" name="">
             <a:extLst xmlns:a="http://schemas.openxmlformats.org/drawingml/2006/main">
               <a:ext uri="{FF2B5EF4-FFF2-40B4-BE49-F238E27FC236}">
-                <a16:creationId xmlns:a16="http://schemas.microsoft.com/office/drawing/2014/main" id="{62456A48-6C18-4609-AA13-A13882399FC8}"/>
+                <a16:creationId xmlns:a16="http://schemas.microsoft.com/office/drawing/2014/main" id="{DA45AFE3-FE89-4124-88F4-30E4E5F0B820}"/>
               </a:ext>
             </a:extLst>
           </p:cNvPr>
@@ -27875,7 +28306,7 @@
           <p:cNvPr id="14" name="LACUNA">
             <a:extLst xmlns:a="http://schemas.openxmlformats.org/drawingml/2006/main">
               <a:ext uri="{FF2B5EF4-FFF2-40B4-BE49-F238E27FC236}">
-                <a16:creationId xmlns:a16="http://schemas.microsoft.com/office/drawing/2014/main" id="{6EFF6CDB-696C-4124-B2BE-BFA138392947}"/>
+                <a16:creationId xmlns:a16="http://schemas.microsoft.com/office/drawing/2014/main" id="{520FE5D7-F817-407C-A641-817C55F2BF3D}"/>
               </a:ext>
             </a:extLst>
           </p:cNvPr>
@@ -27932,7 +28363,7 @@
           <p:cNvPr id="15" name="EN">
             <a:extLst xmlns:a="http://schemas.openxmlformats.org/drawingml/2006/main">
               <a:ext uri="{FF2B5EF4-FFF2-40B4-BE49-F238E27FC236}">
-                <a16:creationId xmlns:a16="http://schemas.microsoft.com/office/drawing/2014/main" id="{2BB6C5F0-6DA2-45A1-AEDB-BB5720A8C83E}"/>
+                <a16:creationId xmlns:a16="http://schemas.microsoft.com/office/drawing/2014/main" id="{1B6306C1-4D3C-4117-BAF7-9DDC6CA11302}"/>
               </a:ext>
             </a:extLst>
           </p:cNvPr>
@@ -27961,7 +28392,7 @@
           <a:lstStyle xmlns:a="http://schemas.openxmlformats.org/drawingml/2006/main"/>
           <a:p xmlns:a="http://schemas.openxmlformats.org/drawingml/2006/main">
             <a:pPr algn="l">
-              <a:defRPr sz="1125" b="1">
+              <a:defRPr sz="1200" b="1">
                 <a:solidFill>
                   <a:srgbClr val="95652D"/>
                 </a:solidFill>
@@ -27971,7 +28402,7 @@
               </a:defRPr>
             </a:pPr>
             <a:r>
-              <a:rPr sz="1125" b="1">
+              <a:rPr sz="1200" b="1">
                 <a:solidFill>
                   <a:srgbClr val="95652D"/>
                 </a:solidFill>
@@ -27989,7 +28420,7 @@
           <p:cNvPr id="16" name="“no research has systematically studied ">
             <a:extLst xmlns:a="http://schemas.openxmlformats.org/drawingml/2006/main">
               <a:ext uri="{FF2B5EF4-FFF2-40B4-BE49-F238E27FC236}">
-                <a16:creationId xmlns:a16="http://schemas.microsoft.com/office/drawing/2014/main" id="{DF494DE6-4F03-4F73-8BE0-2B199D92E832}"/>
+                <a16:creationId xmlns:a16="http://schemas.microsoft.com/office/drawing/2014/main" id="{938DEB37-4DF0-4819-8346-4FF0B7212403}"/>
               </a:ext>
             </a:extLst>
           </p:cNvPr>
@@ -28046,7 +28477,7 @@
           <p:cNvPr id="17" name="PT">
             <a:extLst xmlns:a="http://schemas.openxmlformats.org/drawingml/2006/main">
               <a:ext uri="{FF2B5EF4-FFF2-40B4-BE49-F238E27FC236}">
-                <a16:creationId xmlns:a16="http://schemas.microsoft.com/office/drawing/2014/main" id="{1C01A1E7-AADC-4F8A-B426-5CBE4F7B336A}"/>
+                <a16:creationId xmlns:a16="http://schemas.microsoft.com/office/drawing/2014/main" id="{049143A2-6818-4ACE-9814-87AB0500C9C0}"/>
               </a:ext>
             </a:extLst>
           </p:cNvPr>
@@ -28075,7 +28506,7 @@
           <a:lstStyle xmlns:a="http://schemas.openxmlformats.org/drawingml/2006/main"/>
           <a:p xmlns:a="http://schemas.openxmlformats.org/drawingml/2006/main">
             <a:pPr algn="l">
-              <a:defRPr sz="1125" b="1">
+              <a:defRPr sz="1200" b="1">
                 <a:solidFill>
                   <a:srgbClr val="95652D"/>
                 </a:solidFill>
@@ -28085,7 +28516,7 @@
               </a:defRPr>
             </a:pPr>
             <a:r>
-              <a:rPr sz="1125" b="1">
+              <a:rPr sz="1200" b="1">
                 <a:solidFill>
                   <a:srgbClr val="95652D"/>
                 </a:solidFill>
@@ -28103,7 +28534,7 @@
           <p:cNvPr id="18" name="Nenhuma pesquisa havia estudado sistemat">
             <a:extLst xmlns:a="http://schemas.openxmlformats.org/drawingml/2006/main">
               <a:ext uri="{FF2B5EF4-FFF2-40B4-BE49-F238E27FC236}">
-                <a16:creationId xmlns:a16="http://schemas.microsoft.com/office/drawing/2014/main" id="{3EADC7D4-C6A3-4156-A37D-BA1841478BB8}"/>
+                <a16:creationId xmlns:a16="http://schemas.microsoft.com/office/drawing/2014/main" id="{DE9679F9-F374-4C84-A869-A6A96FCF5BDB}"/>
               </a:ext>
             </a:extLst>
           </p:cNvPr>
@@ -28160,7 +28591,7 @@
           <p:cNvPr id="19" name="">
             <a:extLst xmlns:a="http://schemas.openxmlformats.org/drawingml/2006/main">
               <a:ext uri="{FF2B5EF4-FFF2-40B4-BE49-F238E27FC236}">
-                <a16:creationId xmlns:a16="http://schemas.microsoft.com/office/drawing/2014/main" id="{1835550E-77E7-4672-AC0D-C623BC5F48AD}"/>
+                <a16:creationId xmlns:a16="http://schemas.microsoft.com/office/drawing/2014/main" id="{3944C9B8-D780-4824-AE81-3F6C237D7ECF}"/>
               </a:ext>
             </a:extLst>
           </p:cNvPr>
@@ -28190,7 +28621,7 @@
           <p:cNvPr id="20" name="OBJETIVO">
             <a:extLst xmlns:a="http://schemas.openxmlformats.org/drawingml/2006/main">
               <a:ext uri="{FF2B5EF4-FFF2-40B4-BE49-F238E27FC236}">
-                <a16:creationId xmlns:a16="http://schemas.microsoft.com/office/drawing/2014/main" id="{D6651DC4-7885-4C20-8F0D-C0299CF6344E}"/>
+                <a16:creationId xmlns:a16="http://schemas.microsoft.com/office/drawing/2014/main" id="{7198A0B5-71B2-40D8-A56C-9B2456507C86}"/>
               </a:ext>
             </a:extLst>
           </p:cNvPr>
@@ -28247,7 +28678,7 @@
           <p:cNvPr id="21" name="EN">
             <a:extLst xmlns:a="http://schemas.openxmlformats.org/drawingml/2006/main">
               <a:ext uri="{FF2B5EF4-FFF2-40B4-BE49-F238E27FC236}">
-                <a16:creationId xmlns:a16="http://schemas.microsoft.com/office/drawing/2014/main" id="{84945248-84A2-45EA-B770-F5C844AEDC50}"/>
+                <a16:creationId xmlns:a16="http://schemas.microsoft.com/office/drawing/2014/main" id="{471573A0-8E42-4C99-9F8A-5A292380085C}"/>
               </a:ext>
             </a:extLst>
           </p:cNvPr>
@@ -28276,7 +28707,7 @@
           <a:lstStyle xmlns:a="http://schemas.openxmlformats.org/drawingml/2006/main"/>
           <a:p xmlns:a="http://schemas.openxmlformats.org/drawingml/2006/main">
             <a:pPr algn="l">
-              <a:defRPr sz="1125" b="1">
+              <a:defRPr sz="1200" b="1">
                 <a:solidFill>
                   <a:srgbClr val="174875"/>
                 </a:solidFill>
@@ -28286,7 +28717,7 @@
               </a:defRPr>
             </a:pPr>
             <a:r>
-              <a:rPr sz="1125" b="1">
+              <a:rPr sz="1200" b="1">
                 <a:solidFill>
                   <a:srgbClr val="174875"/>
                 </a:solidFill>
@@ -28304,7 +28735,7 @@
           <p:cNvPr id="22" name="“we perform the first large-scale study ">
             <a:extLst xmlns:a="http://schemas.openxmlformats.org/drawingml/2006/main">
               <a:ext uri="{FF2B5EF4-FFF2-40B4-BE49-F238E27FC236}">
-                <a16:creationId xmlns:a16="http://schemas.microsoft.com/office/drawing/2014/main" id="{C6EC4880-9B68-4098-8121-A75844302BB5}"/>
+                <a16:creationId xmlns:a16="http://schemas.microsoft.com/office/drawing/2014/main" id="{82877A5C-B6F3-4464-ACD7-150E9CD5A8FD}"/>
               </a:ext>
             </a:extLst>
           </p:cNvPr>
@@ -28361,7 +28792,7 @@
           <p:cNvPr id="23" name="PT">
             <a:extLst xmlns:a="http://schemas.openxmlformats.org/drawingml/2006/main">
               <a:ext uri="{FF2B5EF4-FFF2-40B4-BE49-F238E27FC236}">
-                <a16:creationId xmlns:a16="http://schemas.microsoft.com/office/drawing/2014/main" id="{8D7E8990-D977-4465-92D8-089AEE60E78E}"/>
+                <a16:creationId xmlns:a16="http://schemas.microsoft.com/office/drawing/2014/main" id="{9EA91FE0-DE61-415C-BBDC-B06A837F43D6}"/>
               </a:ext>
             </a:extLst>
           </p:cNvPr>
@@ -28390,7 +28821,7 @@
           <a:lstStyle xmlns:a="http://schemas.openxmlformats.org/drawingml/2006/main"/>
           <a:p xmlns:a="http://schemas.openxmlformats.org/drawingml/2006/main">
             <a:pPr algn="l">
-              <a:defRPr sz="1125" b="1">
+              <a:defRPr sz="1200" b="1">
                 <a:solidFill>
                   <a:srgbClr val="174875"/>
                 </a:solidFill>
@@ -28400,7 +28831,7 @@
               </a:defRPr>
             </a:pPr>
             <a:r>
-              <a:rPr sz="1125" b="1">
+              <a:rPr sz="1200" b="1">
                 <a:solidFill>
                   <a:srgbClr val="174875"/>
                 </a:solidFill>
@@ -28418,7 +28849,7 @@
           <p:cNvPr id="24" name="Realizamos o primeiro estudo em larga es">
             <a:extLst xmlns:a="http://schemas.openxmlformats.org/drawingml/2006/main">
               <a:ext uri="{FF2B5EF4-FFF2-40B4-BE49-F238E27FC236}">
-                <a16:creationId xmlns:a16="http://schemas.microsoft.com/office/drawing/2014/main" id="{5268615D-961E-47D4-852D-1C16B8889816}"/>
+                <a16:creationId xmlns:a16="http://schemas.microsoft.com/office/drawing/2014/main" id="{825986D6-2DC6-46BE-AD76-91C17ECA97D5}"/>
               </a:ext>
             </a:extLst>
           </p:cNvPr>
@@ -28473,7 +28904,7 @@
     </p:spTree>
     <p:extLst>
       <p:ext uri="{BB962C8B-B14F-4D97-AF65-F5344CB8AC3E}">
-        <p14:creationId xmlns:p14="http://schemas.microsoft.com/office/powerpoint/2010/main" val="506448930"/>
+        <p14:creationId xmlns:p14="http://schemas.microsoft.com/office/powerpoint/2010/main" val="994505604"/>
       </p:ext>
     </p:extLst>
   </p:cSld>
@@ -28504,7 +28935,7 @@
           <p:cNvPr id="26" name="">
             <a:extLst xmlns:a="http://schemas.openxmlformats.org/drawingml/2006/main">
               <a:ext uri="{FF2B5EF4-FFF2-40B4-BE49-F238E27FC236}">
-                <a16:creationId xmlns:a16="http://schemas.microsoft.com/office/drawing/2014/main" id="{E80CFCD4-8037-4C64-B6C8-D7C68D9D69B5}"/>
+                <a16:creationId xmlns:a16="http://schemas.microsoft.com/office/drawing/2014/main" id="{E11B3252-804B-4B23-8CD2-F0AECF684474}"/>
               </a:ext>
             </a:extLst>
           </p:cNvPr>
@@ -28534,7 +28965,7 @@
           <p:cNvPr id="2" name="ANÁLISE DO ABSTRACT">
             <a:extLst xmlns:a="http://schemas.openxmlformats.org/drawingml/2006/main">
               <a:ext uri="{FF2B5EF4-FFF2-40B4-BE49-F238E27FC236}">
-                <a16:creationId xmlns:a16="http://schemas.microsoft.com/office/drawing/2014/main" id="{A98AFC48-AF20-42E2-8891-7AA80040F230}"/>
+                <a16:creationId xmlns:a16="http://schemas.microsoft.com/office/drawing/2014/main" id="{8E00AC70-D5B5-4AF0-B29A-2E933865A7F1}"/>
               </a:ext>
             </a:extLst>
           </p:cNvPr>
@@ -28591,7 +29022,7 @@
           <p:cNvPr id="3" name="Resumo: método, resultado e implicação">
             <a:extLst xmlns:a="http://schemas.openxmlformats.org/drawingml/2006/main">
               <a:ext uri="{FF2B5EF4-FFF2-40B4-BE49-F238E27FC236}">
-                <a16:creationId xmlns:a16="http://schemas.microsoft.com/office/drawing/2014/main" id="{5A7C4485-6100-44C8-A3C6-E5692A2BFC9C}"/>
+                <a16:creationId xmlns:a16="http://schemas.microsoft.com/office/drawing/2014/main" id="{0E5AD0ED-DA4D-4447-A331-DE52DFDD7464}"/>
               </a:ext>
             </a:extLst>
           </p:cNvPr>
@@ -28648,7 +29079,7 @@
           <p:cNvPr id="4" name="">
             <a:extLst xmlns:a="http://schemas.openxmlformats.org/drawingml/2006/main">
               <a:ext uri="{FF2B5EF4-FFF2-40B4-BE49-F238E27FC236}">
-                <a16:creationId xmlns:a16="http://schemas.microsoft.com/office/drawing/2014/main" id="{C1A0B52B-D0E9-4DBC-B9D5-F7AF47DB6A42}"/>
+                <a16:creationId xmlns:a16="http://schemas.microsoft.com/office/drawing/2014/main" id="{54BAFEC2-81F9-40BA-98A5-8DC02D4B5174}"/>
               </a:ext>
             </a:extLst>
           </p:cNvPr>
@@ -28678,7 +29109,7 @@
           <p:cNvPr id="5" name="">
             <a:extLst xmlns:a="http://schemas.openxmlformats.org/drawingml/2006/main">
               <a:ext uri="{FF2B5EF4-FFF2-40B4-BE49-F238E27FC236}">
-                <a16:creationId xmlns:a16="http://schemas.microsoft.com/office/drawing/2014/main" id="{44F01569-6F35-4DFE-AA30-481A339C92D0}"/>
+                <a16:creationId xmlns:a16="http://schemas.microsoft.com/office/drawing/2014/main" id="{2A09903B-3A1D-443D-8D43-CA2683D8026C}"/>
               </a:ext>
             </a:extLst>
           </p:cNvPr>
@@ -28708,7 +29139,7 @@
           <p:cNvPr id="6" name="Nguyen, Backes e Stock (2022), Abstract,">
             <a:extLst xmlns:a="http://schemas.openxmlformats.org/drawingml/2006/main">
               <a:ext uri="{FF2B5EF4-FFF2-40B4-BE49-F238E27FC236}">
-                <a16:creationId xmlns:a16="http://schemas.microsoft.com/office/drawing/2014/main" id="{542554F6-1FF0-4D94-B28A-F4E997864958}"/>
+                <a16:creationId xmlns:a16="http://schemas.microsoft.com/office/drawing/2014/main" id="{D7399315-B4B6-4B3C-A0B2-E3F5824ED474}"/>
               </a:ext>
             </a:extLst>
           </p:cNvPr>
@@ -28720,7 +29151,7 @@
         <p:spPr>
           <a:xfrm xmlns:a="http://schemas.openxmlformats.org/drawingml/2006/main">
             <a:off x="609600" y="6477000"/>
-            <a:ext cx="10096500" cy="228600"/>
+            <a:ext cx="9982200" cy="228600"/>
           </a:xfrm>
           <a:prstGeom xmlns:a="http://schemas.openxmlformats.org/drawingml/2006/main" prst="rect">
             <a:avLst/>
@@ -28737,7 +29168,7 @@
           <a:lstStyle xmlns:a="http://schemas.openxmlformats.org/drawingml/2006/main"/>
           <a:p xmlns:a="http://schemas.openxmlformats.org/drawingml/2006/main">
             <a:pPr algn="l">
-              <a:defRPr sz="1125" b="0">
+              <a:defRPr sz="1200" b="0">
                 <a:solidFill>
                   <a:srgbClr val="596B7A"/>
                 </a:solidFill>
@@ -28747,7 +29178,7 @@
               </a:defRPr>
             </a:pPr>
             <a:r>
-              <a:rPr sz="1125" b="0">
+              <a:rPr sz="1200" b="0">
                 <a:solidFill>
                   <a:srgbClr val="596B7A"/>
                 </a:solidFill>
@@ -28765,7 +29196,7 @@
           <p:cNvPr id="7" name="07 / 23">
             <a:extLst xmlns:a="http://schemas.openxmlformats.org/drawingml/2006/main">
               <a:ext uri="{FF2B5EF4-FFF2-40B4-BE49-F238E27FC236}">
-                <a16:creationId xmlns:a16="http://schemas.microsoft.com/office/drawing/2014/main" id="{D7809F7B-8780-4559-9855-303E58D51C28}"/>
+                <a16:creationId xmlns:a16="http://schemas.microsoft.com/office/drawing/2014/main" id="{ED815924-4AF5-4B64-B2E7-B9F398A5A682}"/>
               </a:ext>
             </a:extLst>
           </p:cNvPr>
@@ -28794,7 +29225,7 @@
           <a:lstStyle xmlns:a="http://schemas.openxmlformats.org/drawingml/2006/main"/>
           <a:p xmlns:a="http://schemas.openxmlformats.org/drawingml/2006/main">
             <a:pPr algn="r">
-              <a:defRPr sz="1125" b="0">
+              <a:defRPr sz="1200" b="0">
                 <a:solidFill>
                   <a:srgbClr val="596B7A"/>
                 </a:solidFill>
@@ -28804,7 +29235,7 @@
               </a:defRPr>
             </a:pPr>
             <a:r>
-              <a:rPr sz="1125" b="0">
+              <a:rPr sz="1200" b="0">
                 <a:solidFill>
                   <a:srgbClr val="596B7A"/>
                 </a:solidFill>
@@ -28822,7 +29253,7 @@
           <p:cNvPr id="8" name="MÉTODO">
             <a:extLst xmlns:a="http://schemas.openxmlformats.org/drawingml/2006/main">
               <a:ext uri="{FF2B5EF4-FFF2-40B4-BE49-F238E27FC236}">
-                <a16:creationId xmlns:a16="http://schemas.microsoft.com/office/drawing/2014/main" id="{83DEC657-5741-4801-A125-AAC49397DE22}"/>
+                <a16:creationId xmlns:a16="http://schemas.microsoft.com/office/drawing/2014/main" id="{0759BE27-7D5C-41E5-8080-1C45FF53940C}"/>
               </a:ext>
             </a:extLst>
           </p:cNvPr>
@@ -28879,7 +29310,7 @@
           <p:cNvPr id="9" name="EN">
             <a:extLst xmlns:a="http://schemas.openxmlformats.org/drawingml/2006/main">
               <a:ext uri="{FF2B5EF4-FFF2-40B4-BE49-F238E27FC236}">
-                <a16:creationId xmlns:a16="http://schemas.microsoft.com/office/drawing/2014/main" id="{52AC6742-D3C8-4A7C-BF02-2FB7DAF9738E}"/>
+                <a16:creationId xmlns:a16="http://schemas.microsoft.com/office/drawing/2014/main" id="{F76F2768-CFD7-44BC-9B2A-1B16C7CD3A19}"/>
               </a:ext>
             </a:extLst>
           </p:cNvPr>
@@ -28908,7 +29339,7 @@
           <a:lstStyle xmlns:a="http://schemas.openxmlformats.org/drawingml/2006/main"/>
           <a:p xmlns:a="http://schemas.openxmlformats.org/drawingml/2006/main">
             <a:pPr algn="l">
-              <a:defRPr sz="1125" b="1">
+              <a:defRPr sz="1200" b="1">
                 <a:solidFill>
                   <a:srgbClr val="287967"/>
                 </a:solidFill>
@@ -28918,7 +29349,7 @@
               </a:defRPr>
             </a:pPr>
             <a:r>
-              <a:rPr sz="1125" b="1">
+              <a:rPr sz="1200" b="1">
                 <a:solidFill>
                   <a:srgbClr val="287967"/>
                 </a:solidFill>
@@ -28936,7 +29367,7 @@
           <p:cNvPr id="10" name="“a mostly automated and scalable approac">
             <a:extLst xmlns:a="http://schemas.openxmlformats.org/drawingml/2006/main">
               <a:ext uri="{FF2B5EF4-FFF2-40B4-BE49-F238E27FC236}">
-                <a16:creationId xmlns:a16="http://schemas.microsoft.com/office/drawing/2014/main" id="{7442F5D9-3FD4-446F-87E8-B381D61FD95D}"/>
+                <a16:creationId xmlns:a16="http://schemas.microsoft.com/office/drawing/2014/main" id="{D32373CB-4413-4C51-A5F3-FADA80EBFF01}"/>
               </a:ext>
             </a:extLst>
           </p:cNvPr>
@@ -28993,7 +29424,7 @@
           <p:cNvPr id="11" name="PT">
             <a:extLst xmlns:a="http://schemas.openxmlformats.org/drawingml/2006/main">
               <a:ext uri="{FF2B5EF4-FFF2-40B4-BE49-F238E27FC236}">
-                <a16:creationId xmlns:a16="http://schemas.microsoft.com/office/drawing/2014/main" id="{CCCC6F1A-EBED-498B-A446-37C5E952DD0F}"/>
+                <a16:creationId xmlns:a16="http://schemas.microsoft.com/office/drawing/2014/main" id="{50D46FFF-4548-4F6E-AEDA-6539EFC315A4}"/>
               </a:ext>
             </a:extLst>
           </p:cNvPr>
@@ -29022,7 +29453,7 @@
           <a:lstStyle xmlns:a="http://schemas.openxmlformats.org/drawingml/2006/main"/>
           <a:p xmlns:a="http://schemas.openxmlformats.org/drawingml/2006/main">
             <a:pPr algn="l">
-              <a:defRPr sz="1125" b="1">
+              <a:defRPr sz="1200" b="1">
                 <a:solidFill>
                   <a:srgbClr val="287967"/>
                 </a:solidFill>
@@ -29032,7 +29463,7 @@
               </a:defRPr>
             </a:pPr>
             <a:r>
-              <a:rPr sz="1125" b="1">
+              <a:rPr sz="1200" b="1">
                 <a:solidFill>
                   <a:srgbClr val="287967"/>
                 </a:solidFill>
@@ -29050,7 +29481,7 @@
           <p:cNvPr id="12" name="Uma abordagem majoritariamente automatiz">
             <a:extLst xmlns:a="http://schemas.openxmlformats.org/drawingml/2006/main">
               <a:ext uri="{FF2B5EF4-FFF2-40B4-BE49-F238E27FC236}">
-                <a16:creationId xmlns:a16="http://schemas.microsoft.com/office/drawing/2014/main" id="{371995B6-868B-41E5-9DB7-64645BB7DD41}"/>
+                <a16:creationId xmlns:a16="http://schemas.microsoft.com/office/drawing/2014/main" id="{2B8DABE0-CF69-4E4A-AFC7-D830320CE3DD}"/>
               </a:ext>
             </a:extLst>
           </p:cNvPr>
@@ -29107,7 +29538,7 @@
           <p:cNvPr id="13" name="">
             <a:extLst xmlns:a="http://schemas.openxmlformats.org/drawingml/2006/main">
               <a:ext uri="{FF2B5EF4-FFF2-40B4-BE49-F238E27FC236}">
-                <a16:creationId xmlns:a16="http://schemas.microsoft.com/office/drawing/2014/main" id="{F1F9454A-1E81-43EC-BEEB-400E2261FE58}"/>
+                <a16:creationId xmlns:a16="http://schemas.microsoft.com/office/drawing/2014/main" id="{3BC11570-2A3B-4990-96F4-1F41B1712E4F}"/>
               </a:ext>
             </a:extLst>
           </p:cNvPr>
@@ -29137,7 +29568,7 @@
           <p:cNvPr id="14" name="RESULTADO">
             <a:extLst xmlns:a="http://schemas.openxmlformats.org/drawingml/2006/main">
               <a:ext uri="{FF2B5EF4-FFF2-40B4-BE49-F238E27FC236}">
-                <a16:creationId xmlns:a16="http://schemas.microsoft.com/office/drawing/2014/main" id="{9770D8E4-50F5-4B33-A3DD-87FAC15DDC3C}"/>
+                <a16:creationId xmlns:a16="http://schemas.microsoft.com/office/drawing/2014/main" id="{36C5CCFA-530B-4FEB-A2BB-D2A552DD4DCE}"/>
               </a:ext>
             </a:extLst>
           </p:cNvPr>
@@ -29194,7 +29625,7 @@
           <p:cNvPr id="15" name="EN">
             <a:extLst xmlns:a="http://schemas.openxmlformats.org/drawingml/2006/main">
               <a:ext uri="{FF2B5EF4-FFF2-40B4-BE49-F238E27FC236}">
-                <a16:creationId xmlns:a16="http://schemas.microsoft.com/office/drawing/2014/main" id="{CED82B23-8212-4E7F-B361-4F655661CCDC}"/>
+                <a16:creationId xmlns:a16="http://schemas.microsoft.com/office/drawing/2014/main" id="{C86FFB92-4FAA-4906-8B37-4D9E6A2431AF}"/>
               </a:ext>
             </a:extLst>
           </p:cNvPr>
@@ -29223,7 +29654,7 @@
           <a:lstStyle xmlns:a="http://schemas.openxmlformats.org/drawingml/2006/main"/>
           <a:p xmlns:a="http://schemas.openxmlformats.org/drawingml/2006/main">
             <a:pPr algn="l">
-              <a:defRPr sz="1125" b="1">
+              <a:defRPr sz="1200" b="1">
                 <a:solidFill>
                   <a:srgbClr val="AC4C45"/>
                 </a:solidFill>
@@ -29233,7 +29664,7 @@
               </a:defRPr>
             </a:pPr>
             <a:r>
-              <a:rPr sz="1125" b="1">
+              <a:rPr sz="1200" b="1">
                 <a:solidFill>
                   <a:srgbClr val="AC4C45"/>
                 </a:solidFill>
@@ -29251,7 +29682,7 @@
           <p:cNvPr id="16" name="“we identify 2,688 (20.54%) apps violate">
             <a:extLst xmlns:a="http://schemas.openxmlformats.org/drawingml/2006/main">
               <a:ext uri="{FF2B5EF4-FFF2-40B4-BE49-F238E27FC236}">
-                <a16:creationId xmlns:a16="http://schemas.microsoft.com/office/drawing/2014/main" id="{AF622F57-1699-4272-881E-2B5559DDA259}"/>
+                <a16:creationId xmlns:a16="http://schemas.microsoft.com/office/drawing/2014/main" id="{7E977E6D-52F4-4F97-BB74-BE57E52989CA}"/>
               </a:ext>
             </a:extLst>
           </p:cNvPr>
@@ -29308,7 +29739,7 @@
           <p:cNvPr id="17" name="PT">
             <a:extLst xmlns:a="http://schemas.openxmlformats.org/drawingml/2006/main">
               <a:ext uri="{FF2B5EF4-FFF2-40B4-BE49-F238E27FC236}">
-                <a16:creationId xmlns:a16="http://schemas.microsoft.com/office/drawing/2014/main" id="{D29AEC07-1C20-402A-B08C-6773A9F5DEA1}"/>
+                <a16:creationId xmlns:a16="http://schemas.microsoft.com/office/drawing/2014/main" id="{6DC6343F-5271-476A-BC44-703CC5291514}"/>
               </a:ext>
             </a:extLst>
           </p:cNvPr>
@@ -29337,7 +29768,7 @@
           <a:lstStyle xmlns:a="http://schemas.openxmlformats.org/drawingml/2006/main"/>
           <a:p xmlns:a="http://schemas.openxmlformats.org/drawingml/2006/main">
             <a:pPr algn="l">
-              <a:defRPr sz="1125" b="1">
+              <a:defRPr sz="1200" b="1">
                 <a:solidFill>
                   <a:srgbClr val="AC4C45"/>
                 </a:solidFill>
@@ -29347,7 +29778,7 @@
               </a:defRPr>
             </a:pPr>
             <a:r>
-              <a:rPr sz="1125" b="1">
+              <a:rPr sz="1200" b="1">
                 <a:solidFill>
                   <a:srgbClr val="AC4C45"/>
                 </a:solidFill>
@@ -29365,7 +29796,7 @@
           <p:cNvPr id="18" name="Identificamos 2.688 aplicativos (20,54%)">
             <a:extLst xmlns:a="http://schemas.openxmlformats.org/drawingml/2006/main">
               <a:ext uri="{FF2B5EF4-FFF2-40B4-BE49-F238E27FC236}">
-                <a16:creationId xmlns:a16="http://schemas.microsoft.com/office/drawing/2014/main" id="{B03E23C3-BE4B-4864-942A-687CFB3B138F}"/>
+                <a16:creationId xmlns:a16="http://schemas.microsoft.com/office/drawing/2014/main" id="{9D2033E3-FCEF-47FF-9364-2D613B90ADD0}"/>
               </a:ext>
             </a:extLst>
           </p:cNvPr>
@@ -29422,7 +29853,7 @@
           <p:cNvPr id="19" name="">
             <a:extLst xmlns:a="http://schemas.openxmlformats.org/drawingml/2006/main">
               <a:ext uri="{FF2B5EF4-FFF2-40B4-BE49-F238E27FC236}">
-                <a16:creationId xmlns:a16="http://schemas.microsoft.com/office/drawing/2014/main" id="{EAEB82BC-FC6D-4B9D-87B6-8EAD6DB09B06}"/>
+                <a16:creationId xmlns:a16="http://schemas.microsoft.com/office/drawing/2014/main" id="{2E1C427A-54B7-4643-B74A-92ED7DD57C47}"/>
               </a:ext>
             </a:extLst>
           </p:cNvPr>
@@ -29452,7 +29883,7 @@
           <p:cNvPr id="20" name="IMPLICAÇÃO">
             <a:extLst xmlns:a="http://schemas.openxmlformats.org/drawingml/2006/main">
               <a:ext uri="{FF2B5EF4-FFF2-40B4-BE49-F238E27FC236}">
-                <a16:creationId xmlns:a16="http://schemas.microsoft.com/office/drawing/2014/main" id="{C81C3319-6FF0-4604-ADAC-76CA82A7C5D4}"/>
+                <a16:creationId xmlns:a16="http://schemas.microsoft.com/office/drawing/2014/main" id="{BC8AC5F2-611B-4BFA-9DCD-998C991524B6}"/>
               </a:ext>
             </a:extLst>
           </p:cNvPr>
@@ -29509,7 +29940,7 @@
           <p:cNvPr id="21" name="EN">
             <a:extLst xmlns:a="http://schemas.openxmlformats.org/drawingml/2006/main">
               <a:ext uri="{FF2B5EF4-FFF2-40B4-BE49-F238E27FC236}">
-                <a16:creationId xmlns:a16="http://schemas.microsoft.com/office/drawing/2014/main" id="{8FC57FF8-37D3-4433-8A4E-FC7E9E893452}"/>
+                <a16:creationId xmlns:a16="http://schemas.microsoft.com/office/drawing/2014/main" id="{DA214321-D73A-4539-B5E7-AC91021D2C17}"/>
               </a:ext>
             </a:extLst>
           </p:cNvPr>
@@ -29538,7 +29969,7 @@
           <a:lstStyle xmlns:a="http://schemas.openxmlformats.org/drawingml/2006/main"/>
           <a:p xmlns:a="http://schemas.openxmlformats.org/drawingml/2006/main">
             <a:pPr algn="l">
-              <a:defRPr sz="1125" b="1">
+              <a:defRPr sz="1200" b="1">
                 <a:solidFill>
                   <a:srgbClr val="69558B"/>
                 </a:solidFill>
@@ -29548,7 +29979,7 @@
               </a:defRPr>
             </a:pPr>
             <a:r>
-              <a:rPr sz="1125" b="1">
+              <a:rPr sz="1200" b="1">
                 <a:solidFill>
                   <a:srgbClr val="69558B"/>
                 </a:solidFill>
@@ -29566,7 +29997,7 @@
           <p:cNvPr id="22" name="“more transparent processing of personal">
             <a:extLst xmlns:a="http://schemas.openxmlformats.org/drawingml/2006/main">
               <a:ext uri="{FF2B5EF4-FFF2-40B4-BE49-F238E27FC236}">
-                <a16:creationId xmlns:a16="http://schemas.microsoft.com/office/drawing/2014/main" id="{3E35D21D-3DAD-45CE-861B-9C4C0603D88E}"/>
+                <a16:creationId xmlns:a16="http://schemas.microsoft.com/office/drawing/2014/main" id="{375AA09E-DBF8-4B69-9FF7-F0912D98E64A}"/>
               </a:ext>
             </a:extLst>
           </p:cNvPr>
@@ -29623,7 +30054,7 @@
           <p:cNvPr id="23" name="PT">
             <a:extLst xmlns:a="http://schemas.openxmlformats.org/drawingml/2006/main">
               <a:ext uri="{FF2B5EF4-FFF2-40B4-BE49-F238E27FC236}">
-                <a16:creationId xmlns:a16="http://schemas.microsoft.com/office/drawing/2014/main" id="{85FBBF16-2E28-4EEB-9C60-185BEFD81C26}"/>
+                <a16:creationId xmlns:a16="http://schemas.microsoft.com/office/drawing/2014/main" id="{E94640B7-CA84-473F-A55F-C8E4416A7836}"/>
               </a:ext>
             </a:extLst>
           </p:cNvPr>
@@ -29652,7 +30083,7 @@
           <a:lstStyle xmlns:a="http://schemas.openxmlformats.org/drawingml/2006/main"/>
           <a:p xmlns:a="http://schemas.openxmlformats.org/drawingml/2006/main">
             <a:pPr algn="l">
-              <a:defRPr sz="1125" b="1">
+              <a:defRPr sz="1200" b="1">
                 <a:solidFill>
                   <a:srgbClr val="69558B"/>
                 </a:solidFill>
@@ -29662,7 +30093,7 @@
               </a:defRPr>
             </a:pPr>
             <a:r>
-              <a:rPr sz="1125" b="1">
+              <a:rPr sz="1200" b="1">
                 <a:solidFill>
                   <a:srgbClr val="69558B"/>
                 </a:solidFill>
@@ -29680,7 +30111,7 @@
           <p:cNvPr id="24" name="Maior transparência no tratamento de dad">
             <a:extLst xmlns:a="http://schemas.openxmlformats.org/drawingml/2006/main">
               <a:ext uri="{FF2B5EF4-FFF2-40B4-BE49-F238E27FC236}">
-                <a16:creationId xmlns:a16="http://schemas.microsoft.com/office/drawing/2014/main" id="{126037DC-26F5-4ABF-8066-1C45B96B38C9}"/>
+                <a16:creationId xmlns:a16="http://schemas.microsoft.com/office/drawing/2014/main" id="{9957EEF5-6DE4-4F61-994E-8A72FFC5FC09}"/>
               </a:ext>
             </a:extLst>
           </p:cNvPr>
@@ -29737,7 +30168,7 @@
           <p:cNvPr id="25" name="Leitura do seminário: o resumo antecipa ">
             <a:extLst xmlns:a="http://schemas.openxmlformats.org/drawingml/2006/main">
               <a:ext uri="{FF2B5EF4-FFF2-40B4-BE49-F238E27FC236}">
-                <a16:creationId xmlns:a16="http://schemas.microsoft.com/office/drawing/2014/main" id="{4B1F9DB7-C0FC-4AED-A171-8AD6E8F0DB38}"/>
+                <a16:creationId xmlns:a16="http://schemas.microsoft.com/office/drawing/2014/main" id="{DAD5697F-67A9-4A5D-96E8-81F0C07505A3}"/>
               </a:ext>
             </a:extLst>
           </p:cNvPr>
@@ -29792,7 +30223,7 @@
     </p:spTree>
     <p:extLst>
       <p:ext uri="{BB962C8B-B14F-4D97-AF65-F5344CB8AC3E}">
-        <p14:creationId xmlns:p14="http://schemas.microsoft.com/office/powerpoint/2010/main" val="1123129101"/>
+        <p14:creationId xmlns:p14="http://schemas.microsoft.com/office/powerpoint/2010/main" val="2085325094"/>
       </p:ext>
     </p:extLst>
   </p:cSld>
@@ -29823,7 +30254,7 @@
           <p:cNvPr id="26" name="">
             <a:extLst xmlns:a="http://schemas.openxmlformats.org/drawingml/2006/main">
               <a:ext uri="{FF2B5EF4-FFF2-40B4-BE49-F238E27FC236}">
-                <a16:creationId xmlns:a16="http://schemas.microsoft.com/office/drawing/2014/main" id="{E8D19B7C-9605-4F0F-91A2-5AADDF209356}"/>
+                <a16:creationId xmlns:a16="http://schemas.microsoft.com/office/drawing/2014/main" id="{32F196C5-1AFC-4B84-82E1-510C3EC51D1A}"/>
               </a:ext>
             </a:extLst>
           </p:cNvPr>
@@ -29853,7 +30284,7 @@
           <p:cNvPr id="2" name="ANÁLISE DA INTRODUÇÃO">
             <a:extLst xmlns:a="http://schemas.openxmlformats.org/drawingml/2006/main">
               <a:ext uri="{FF2B5EF4-FFF2-40B4-BE49-F238E27FC236}">
-                <a16:creationId xmlns:a16="http://schemas.microsoft.com/office/drawing/2014/main" id="{602B8990-CF93-4D0B-AF3F-D5F7127682CE}"/>
+                <a16:creationId xmlns:a16="http://schemas.microsoft.com/office/drawing/2014/main" id="{4890CE3E-D1B3-4A87-9106-A496497D4EBC}"/>
               </a:ext>
             </a:extLst>
           </p:cNvPr>
@@ -29910,7 +30341,7 @@
           <p:cNvPr id="3" name="Introdução: três perguntas de pesquisa">
             <a:extLst xmlns:a="http://schemas.openxmlformats.org/drawingml/2006/main">
               <a:ext uri="{FF2B5EF4-FFF2-40B4-BE49-F238E27FC236}">
-                <a16:creationId xmlns:a16="http://schemas.microsoft.com/office/drawing/2014/main" id="{EF67F439-83F9-45AD-B4F4-9203CCE46E3F}"/>
+                <a16:creationId xmlns:a16="http://schemas.microsoft.com/office/drawing/2014/main" id="{18222539-1C79-4E45-AB33-4021ADE2E86D}"/>
               </a:ext>
             </a:extLst>
           </p:cNvPr>
@@ -29967,7 +30398,7 @@
           <p:cNvPr id="4" name="">
             <a:extLst xmlns:a="http://schemas.openxmlformats.org/drawingml/2006/main">
               <a:ext uri="{FF2B5EF4-FFF2-40B4-BE49-F238E27FC236}">
-                <a16:creationId xmlns:a16="http://schemas.microsoft.com/office/drawing/2014/main" id="{698AA6B2-D9CD-4350-BE6F-16E49CD44137}"/>
+                <a16:creationId xmlns:a16="http://schemas.microsoft.com/office/drawing/2014/main" id="{5E199AFF-8C92-4EFB-80CB-12E4E86DC2D5}"/>
               </a:ext>
             </a:extLst>
           </p:cNvPr>
@@ -29997,7 +30428,7 @@
           <p:cNvPr id="5" name="">
             <a:extLst xmlns:a="http://schemas.openxmlformats.org/drawingml/2006/main">
               <a:ext uri="{FF2B5EF4-FFF2-40B4-BE49-F238E27FC236}">
-                <a16:creationId xmlns:a16="http://schemas.microsoft.com/office/drawing/2014/main" id="{81389891-175A-4B3E-B51D-EF9188E7F8FB}"/>
+                <a16:creationId xmlns:a16="http://schemas.microsoft.com/office/drawing/2014/main" id="{E3017BDB-A301-4792-BCF0-392444619E11}"/>
               </a:ext>
             </a:extLst>
           </p:cNvPr>
@@ -30027,7 +30458,7 @@
           <p:cNvPr id="6" name="Nguyen, Backes e Stock (2022), Seção 1, ">
             <a:extLst xmlns:a="http://schemas.openxmlformats.org/drawingml/2006/main">
               <a:ext uri="{FF2B5EF4-FFF2-40B4-BE49-F238E27FC236}">
-                <a16:creationId xmlns:a16="http://schemas.microsoft.com/office/drawing/2014/main" id="{13E010DC-3D67-48B5-81EA-C08967A98BC3}"/>
+                <a16:creationId xmlns:a16="http://schemas.microsoft.com/office/drawing/2014/main" id="{9179C3EA-A2E5-4BA0-A521-59AD9B679A91}"/>
               </a:ext>
             </a:extLst>
           </p:cNvPr>
@@ -30039,7 +30470,7 @@
         <p:spPr>
           <a:xfrm xmlns:a="http://schemas.openxmlformats.org/drawingml/2006/main">
             <a:off x="609600" y="6477000"/>
-            <a:ext cx="10096500" cy="228600"/>
+            <a:ext cx="9982200" cy="228600"/>
           </a:xfrm>
           <a:prstGeom xmlns:a="http://schemas.openxmlformats.org/drawingml/2006/main" prst="rect">
             <a:avLst/>
@@ -30056,7 +30487,7 @@
           <a:lstStyle xmlns:a="http://schemas.openxmlformats.org/drawingml/2006/main"/>
           <a:p xmlns:a="http://schemas.openxmlformats.org/drawingml/2006/main">
             <a:pPr algn="l">
-              <a:defRPr sz="1125" b="0">
+              <a:defRPr sz="1200" b="0">
                 <a:solidFill>
                   <a:srgbClr val="596B7A"/>
                 </a:solidFill>
@@ -30066,7 +30497,7 @@
               </a:defRPr>
             </a:pPr>
             <a:r>
-              <a:rPr sz="1125" b="0">
+              <a:rPr sz="1200" b="0">
                 <a:solidFill>
                   <a:srgbClr val="596B7A"/>
                 </a:solidFill>
@@ -30074,7 +30505,7 @@
                 <a:ea typeface="Arial"/>
                 <a:cs typeface="Arial"/>
               </a:rPr>
-              <a:t>Nguyen, Backes e Stock (2022), Seção 1, p. 2. A redação original da segunda pergunta foi preservada.</a:t>
+              <a:t>Nguyen, Backes e Stock (2022), Seção 1, p. 2 do PDF ACM. EN: perguntas de pesquisa literais.</a:t>
             </a:r>
           </a:p>
         </p:txBody>
@@ -30084,7 +30515,7 @@
           <p:cNvPr id="7" name="08 / 23">
             <a:extLst xmlns:a="http://schemas.openxmlformats.org/drawingml/2006/main">
               <a:ext uri="{FF2B5EF4-FFF2-40B4-BE49-F238E27FC236}">
-                <a16:creationId xmlns:a16="http://schemas.microsoft.com/office/drawing/2014/main" id="{15048CE7-9418-4109-B219-0D465765F43D}"/>
+                <a16:creationId xmlns:a16="http://schemas.microsoft.com/office/drawing/2014/main" id="{E94148D8-9203-4A56-8DBC-3F270DE7DE7A}"/>
               </a:ext>
             </a:extLst>
           </p:cNvPr>
@@ -30113,7 +30544,7 @@
           <a:lstStyle xmlns:a="http://schemas.openxmlformats.org/drawingml/2006/main"/>
           <a:p xmlns:a="http://schemas.openxmlformats.org/drawingml/2006/main">
             <a:pPr algn="r">
-              <a:defRPr sz="1125" b="0">
+              <a:defRPr sz="1200" b="0">
                 <a:solidFill>
                   <a:srgbClr val="596B7A"/>
                 </a:solidFill>
@@ -30123,7 +30554,7 @@
               </a:defRPr>
             </a:pPr>
             <a:r>
-              <a:rPr sz="1125" b="0">
+              <a:rPr sz="1200" b="0">
                 <a:solidFill>
                   <a:srgbClr val="596B7A"/>
                 </a:solidFill>
@@ -30141,7 +30572,7 @@
           <p:cNvPr id="8" name="01">
             <a:extLst xmlns:a="http://schemas.openxmlformats.org/drawingml/2006/main">
               <a:ext uri="{FF2B5EF4-FFF2-40B4-BE49-F238E27FC236}">
-                <a16:creationId xmlns:a16="http://schemas.microsoft.com/office/drawing/2014/main" id="{AA0F5590-F5AD-49F7-A5AC-EEFB1533AC67}"/>
+                <a16:creationId xmlns:a16="http://schemas.microsoft.com/office/drawing/2014/main" id="{56F0317A-A140-4EC9-8A63-3B4348EAD8B5}"/>
               </a:ext>
             </a:extLst>
           </p:cNvPr>
@@ -30198,7 +30629,7 @@
           <p:cNvPr id="9" name="EN">
             <a:extLst xmlns:a="http://schemas.openxmlformats.org/drawingml/2006/main">
               <a:ext uri="{FF2B5EF4-FFF2-40B4-BE49-F238E27FC236}">
-                <a16:creationId xmlns:a16="http://schemas.microsoft.com/office/drawing/2014/main" id="{F9B619A4-8410-455D-8BFA-2493EE7973DA}"/>
+                <a16:creationId xmlns:a16="http://schemas.microsoft.com/office/drawing/2014/main" id="{3088068B-E4E1-43D6-AB3A-F9444DEF2E9B}"/>
               </a:ext>
             </a:extLst>
           </p:cNvPr>
@@ -30227,7 +30658,7 @@
           <a:lstStyle xmlns:a="http://schemas.openxmlformats.org/drawingml/2006/main"/>
           <a:p xmlns:a="http://schemas.openxmlformats.org/drawingml/2006/main">
             <a:pPr algn="l">
-              <a:defRPr sz="1125" b="1">
+              <a:defRPr sz="1200" b="1">
                 <a:solidFill>
                   <a:srgbClr val="174875"/>
                 </a:solidFill>
@@ -30237,7 +30668,7 @@
               </a:defRPr>
             </a:pPr>
             <a:r>
-              <a:rPr sz="1125" b="1">
+              <a:rPr sz="1200" b="1">
                 <a:solidFill>
                   <a:srgbClr val="174875"/>
                 </a:solidFill>
@@ -30255,7 +30686,7 @@
           <p:cNvPr id="10" name="“Do mobile apps implement any form of co">
             <a:extLst xmlns:a="http://schemas.openxmlformats.org/drawingml/2006/main">
               <a:ext uri="{FF2B5EF4-FFF2-40B4-BE49-F238E27FC236}">
-                <a16:creationId xmlns:a16="http://schemas.microsoft.com/office/drawing/2014/main" id="{8701ED80-3E8D-418A-95EB-1796295D7A14}"/>
+                <a16:creationId xmlns:a16="http://schemas.microsoft.com/office/drawing/2014/main" id="{49A7389E-9F6B-4E94-A4DD-B04633DF79D2}"/>
               </a:ext>
             </a:extLst>
           </p:cNvPr>
@@ -30312,7 +30743,7 @@
           <p:cNvPr id="11" name="PT">
             <a:extLst xmlns:a="http://schemas.openxmlformats.org/drawingml/2006/main">
               <a:ext uri="{FF2B5EF4-FFF2-40B4-BE49-F238E27FC236}">
-                <a16:creationId xmlns:a16="http://schemas.microsoft.com/office/drawing/2014/main" id="{02E7BFF8-66F0-4FC6-901E-97B709AB9665}"/>
+                <a16:creationId xmlns:a16="http://schemas.microsoft.com/office/drawing/2014/main" id="{363868EC-DD02-4881-88A7-DCF222A991A0}"/>
               </a:ext>
             </a:extLst>
           </p:cNvPr>
@@ -30341,7 +30772,7 @@
           <a:lstStyle xmlns:a="http://schemas.openxmlformats.org/drawingml/2006/main"/>
           <a:p xmlns:a="http://schemas.openxmlformats.org/drawingml/2006/main">
             <a:pPr algn="l">
-              <a:defRPr sz="1125" b="1">
+              <a:defRPr sz="1200" b="1">
                 <a:solidFill>
                   <a:srgbClr val="174875"/>
                 </a:solidFill>
@@ -30351,7 +30782,7 @@
               </a:defRPr>
             </a:pPr>
             <a:r>
-              <a:rPr sz="1125" b="1">
+              <a:rPr sz="1200" b="1">
                 <a:solidFill>
                   <a:srgbClr val="174875"/>
                 </a:solidFill>
@@ -30369,7 +30800,7 @@
           <p:cNvPr id="12" name="Os aplicativos móveis implementam avisos">
             <a:extLst xmlns:a="http://schemas.openxmlformats.org/drawingml/2006/main">
               <a:ext uri="{FF2B5EF4-FFF2-40B4-BE49-F238E27FC236}">
-                <a16:creationId xmlns:a16="http://schemas.microsoft.com/office/drawing/2014/main" id="{7C06F701-AC80-4CD9-B9A3-697C74B38E04}"/>
+                <a16:creationId xmlns:a16="http://schemas.microsoft.com/office/drawing/2014/main" id="{C2C65C7B-D36F-40A2-B57B-407F4D390E04}"/>
               </a:ext>
             </a:extLst>
           </p:cNvPr>
@@ -30426,7 +30857,7 @@
           <p:cNvPr id="13" name="">
             <a:extLst xmlns:a="http://schemas.openxmlformats.org/drawingml/2006/main">
               <a:ext uri="{FF2B5EF4-FFF2-40B4-BE49-F238E27FC236}">
-                <a16:creationId xmlns:a16="http://schemas.microsoft.com/office/drawing/2014/main" id="{A9D2D625-25BA-483C-B0C9-3D44751FDC33}"/>
+                <a16:creationId xmlns:a16="http://schemas.microsoft.com/office/drawing/2014/main" id="{21E84379-FCDF-4044-A0F3-1E48C969CD5E}"/>
               </a:ext>
             </a:extLst>
           </p:cNvPr>
@@ -30456,7 +30887,7 @@
           <p:cNvPr id="14" name="02">
             <a:extLst xmlns:a="http://schemas.openxmlformats.org/drawingml/2006/main">
               <a:ext uri="{FF2B5EF4-FFF2-40B4-BE49-F238E27FC236}">
-                <a16:creationId xmlns:a16="http://schemas.microsoft.com/office/drawing/2014/main" id="{A4BF9439-2382-41BF-8E6C-86B15F1A2630}"/>
+                <a16:creationId xmlns:a16="http://schemas.microsoft.com/office/drawing/2014/main" id="{0343878E-3C80-4199-9253-AA1A3F0710DE}"/>
               </a:ext>
             </a:extLst>
           </p:cNvPr>
@@ -30513,7 +30944,7 @@
           <p:cNvPr id="15" name="EN">
             <a:extLst xmlns:a="http://schemas.openxmlformats.org/drawingml/2006/main">
               <a:ext uri="{FF2B5EF4-FFF2-40B4-BE49-F238E27FC236}">
-                <a16:creationId xmlns:a16="http://schemas.microsoft.com/office/drawing/2014/main" id="{0D992ACE-2D3F-44B8-AD03-3070F184ADCE}"/>
+                <a16:creationId xmlns:a16="http://schemas.microsoft.com/office/drawing/2014/main" id="{60032223-AA5F-493A-B1D4-91955342D0C2}"/>
               </a:ext>
             </a:extLst>
           </p:cNvPr>
@@ -30542,7 +30973,7 @@
           <a:lstStyle xmlns:a="http://schemas.openxmlformats.org/drawingml/2006/main"/>
           <a:p xmlns:a="http://schemas.openxmlformats.org/drawingml/2006/main">
             <a:pPr algn="l">
-              <a:defRPr sz="1125" b="1">
+              <a:defRPr sz="1200" b="1">
                 <a:solidFill>
                   <a:srgbClr val="174875"/>
                 </a:solidFill>
@@ -30552,7 +30983,7 @@
               </a:defRPr>
             </a:pPr>
             <a:r>
-              <a:rPr sz="1125" b="1">
+              <a:rPr sz="1200" b="1">
                 <a:solidFill>
                   <a:srgbClr val="174875"/>
                 </a:solidFill>
@@ -30567,10 +30998,10 @@
       </p:sp>
       <p:sp>
         <p:nvSpPr>
-          <p:cNvPr id="16" name="“Do these implemented consent notices ca">
-            <a:extLst xmlns:a="http://schemas.openxmlformats.org/drawingml/2006/main">
-              <a:ext uri="{FF2B5EF4-FFF2-40B4-BE49-F238E27FC236}">
-                <a16:creationId xmlns:a16="http://schemas.microsoft.com/office/drawing/2014/main" id="{F4365930-0AA3-4795-A663-5D651ADF3BB2}"/>
+          <p:cNvPr id="16" name="“Can these implemented consent notices b">
+            <a:extLst xmlns:a="http://schemas.openxmlformats.org/drawingml/2006/main">
+              <a:ext uri="{FF2B5EF4-FFF2-40B4-BE49-F238E27FC236}">
+                <a16:creationId xmlns:a16="http://schemas.microsoft.com/office/drawing/2014/main" id="{E4741653-6D35-4ADC-924E-F2D834F7D304}"/>
               </a:ext>
             </a:extLst>
           </p:cNvPr>
@@ -30617,7 +31048,7 @@
                 <a:ea typeface="Arial"/>
                 <a:cs typeface="Arial"/>
               </a:rPr>
-              <a:t>“Do these implemented consent notices can be legally justified under GDPR?”</a:t>
+              <a:t>“Can these implemented consent notices be legally justified under GDPR?”</a:t>
             </a:r>
           </a:p>
         </p:txBody>
@@ -30627,7 +31058,7 @@
           <p:cNvPr id="17" name="PT">
             <a:extLst xmlns:a="http://schemas.openxmlformats.org/drawingml/2006/main">
               <a:ext uri="{FF2B5EF4-FFF2-40B4-BE49-F238E27FC236}">
-                <a16:creationId xmlns:a16="http://schemas.microsoft.com/office/drawing/2014/main" id="{16C86F0A-B125-4524-9BAC-AD09DF4DBA39}"/>
+                <a16:creationId xmlns:a16="http://schemas.microsoft.com/office/drawing/2014/main" id="{C7E812A2-00F1-424E-8E76-D72C51892FBE}"/>
               </a:ext>
             </a:extLst>
           </p:cNvPr>
@@ -30656,7 +31087,7 @@
           <a:lstStyle xmlns:a="http://schemas.openxmlformats.org/drawingml/2006/main"/>
           <a:p xmlns:a="http://schemas.openxmlformats.org/drawingml/2006/main">
             <a:pPr algn="l">
-              <a:defRPr sz="1125" b="1">
+              <a:defRPr sz="1200" b="1">
                 <a:solidFill>
                   <a:srgbClr val="174875"/>
                 </a:solidFill>
@@ -30666,7 +31097,7 @@
               </a:defRPr>
             </a:pPr>
             <a:r>
-              <a:rPr sz="1125" b="1">
+              <a:rPr sz="1200" b="1">
                 <a:solidFill>
                   <a:srgbClr val="174875"/>
                 </a:solidFill>
@@ -30684,7 +31115,7 @@
           <p:cNvPr id="18" name="Esses avisos de consentimento podem ser ">
             <a:extLst xmlns:a="http://schemas.openxmlformats.org/drawingml/2006/main">
               <a:ext uri="{FF2B5EF4-FFF2-40B4-BE49-F238E27FC236}">
-                <a16:creationId xmlns:a16="http://schemas.microsoft.com/office/drawing/2014/main" id="{73E477EE-161B-41CE-A69B-BF8ACC359294}"/>
+                <a16:creationId xmlns:a16="http://schemas.microsoft.com/office/drawing/2014/main" id="{9F580B80-2507-4F7D-BADD-FFCA3781E42F}"/>
               </a:ext>
             </a:extLst>
           </p:cNvPr>
@@ -30741,7 +31172,7 @@
           <p:cNvPr id="19" name="">
             <a:extLst xmlns:a="http://schemas.openxmlformats.org/drawingml/2006/main">
               <a:ext uri="{FF2B5EF4-FFF2-40B4-BE49-F238E27FC236}">
-                <a16:creationId xmlns:a16="http://schemas.microsoft.com/office/drawing/2014/main" id="{9452CB2D-43FD-4861-9396-FB945D058791}"/>
+                <a16:creationId xmlns:a16="http://schemas.microsoft.com/office/drawing/2014/main" id="{BA9C9255-A1B9-48F2-B971-F9BAA80A00DF}"/>
               </a:ext>
             </a:extLst>
           </p:cNvPr>
@@ -30771,7 +31202,7 @@
           <p:cNvPr id="20" name="03">
             <a:extLst xmlns:a="http://schemas.openxmlformats.org/drawingml/2006/main">
               <a:ext uri="{FF2B5EF4-FFF2-40B4-BE49-F238E27FC236}">
-                <a16:creationId xmlns:a16="http://schemas.microsoft.com/office/drawing/2014/main" id="{144B5C77-A5FD-4DE0-8424-45D65FA2EB68}"/>
+                <a16:creationId xmlns:a16="http://schemas.microsoft.com/office/drawing/2014/main" id="{6048074F-2EB2-44FB-8070-8820FDB7E4EC}"/>
               </a:ext>
             </a:extLst>
           </p:cNvPr>
@@ -30828,7 +31259,7 @@
           <p:cNvPr id="21" name="EN">
             <a:extLst xmlns:a="http://schemas.openxmlformats.org/drawingml/2006/main">
               <a:ext uri="{FF2B5EF4-FFF2-40B4-BE49-F238E27FC236}">
-                <a16:creationId xmlns:a16="http://schemas.microsoft.com/office/drawing/2014/main" id="{F141B53F-915C-4F28-B149-862E2348401A}"/>
+                <a16:creationId xmlns:a16="http://schemas.microsoft.com/office/drawing/2014/main" id="{6B64D363-9671-4052-A644-F192B9A1DDCB}"/>
               </a:ext>
             </a:extLst>
           </p:cNvPr>
@@ -30857,7 +31288,7 @@
           <a:lstStyle xmlns:a="http://schemas.openxmlformats.org/drawingml/2006/main"/>
           <a:p xmlns:a="http://schemas.openxmlformats.org/drawingml/2006/main">
             <a:pPr algn="l">
-              <a:defRPr sz="1125" b="1">
+              <a:defRPr sz="1200" b="1">
                 <a:solidFill>
                   <a:srgbClr val="174875"/>
                 </a:solidFill>
@@ -30867,7 +31298,7 @@
               </a:defRPr>
             </a:pPr>
             <a:r>
-              <a:rPr sz="1125" b="1">
+              <a:rPr sz="1200" b="1">
                 <a:solidFill>
                   <a:srgbClr val="174875"/>
                 </a:solidFill>
@@ -30885,7 +31316,7 @@
           <p:cNvPr id="22" name="“Are developers aware of the GDPR consen">
             <a:extLst xmlns:a="http://schemas.openxmlformats.org/drawingml/2006/main">
               <a:ext uri="{FF2B5EF4-FFF2-40B4-BE49-F238E27FC236}">
-                <a16:creationId xmlns:a16="http://schemas.microsoft.com/office/drawing/2014/main" id="{8B2C20B5-CFCD-476C-B58E-B5A91C2EF3F4}"/>
+                <a16:creationId xmlns:a16="http://schemas.microsoft.com/office/drawing/2014/main" id="{91DB4778-AF0C-4C1D-ACEF-2CB335A59659}"/>
               </a:ext>
             </a:extLst>
           </p:cNvPr>
@@ -30942,7 +31373,7 @@
           <p:cNvPr id="23" name="PT">
             <a:extLst xmlns:a="http://schemas.openxmlformats.org/drawingml/2006/main">
               <a:ext uri="{FF2B5EF4-FFF2-40B4-BE49-F238E27FC236}">
-                <a16:creationId xmlns:a16="http://schemas.microsoft.com/office/drawing/2014/main" id="{E0750647-3ABA-4401-A36D-AD94A254D9A4}"/>
+                <a16:creationId xmlns:a16="http://schemas.microsoft.com/office/drawing/2014/main" id="{2CC8439B-D43C-46C1-BB7B-D867753712D0}"/>
               </a:ext>
             </a:extLst>
           </p:cNvPr>
@@ -30971,7 +31402,7 @@
           <a:lstStyle xmlns:a="http://schemas.openxmlformats.org/drawingml/2006/main"/>
           <a:p xmlns:a="http://schemas.openxmlformats.org/drawingml/2006/main">
             <a:pPr algn="l">
-              <a:defRPr sz="1125" b="1">
+              <a:defRPr sz="1200" b="1">
                 <a:solidFill>
                   <a:srgbClr val="174875"/>
                 </a:solidFill>
@@ -30981,7 +31412,7 @@
               </a:defRPr>
             </a:pPr>
             <a:r>
-              <a:rPr sz="1125" b="1">
+              <a:rPr sz="1200" b="1">
                 <a:solidFill>
                   <a:srgbClr val="174875"/>
                 </a:solidFill>
@@ -30999,7 +31430,7 @@
           <p:cNvPr id="24" name="Os desenvolvedores conhecem os requisito">
             <a:extLst xmlns:a="http://schemas.openxmlformats.org/drawingml/2006/main">
               <a:ext uri="{FF2B5EF4-FFF2-40B4-BE49-F238E27FC236}">
-                <a16:creationId xmlns:a16="http://schemas.microsoft.com/office/drawing/2014/main" id="{D20D0051-CF5D-40FD-B39B-B09B16F631FA}"/>
+                <a16:creationId xmlns:a16="http://schemas.microsoft.com/office/drawing/2014/main" id="{B9E11603-D685-4C02-9CED-1C628D4725ED}"/>
               </a:ext>
             </a:extLst>
           </p:cNvPr>
@@ -31056,7 +31487,7 @@
           <p:cNvPr id="25" name="Análise do seminário: as perguntas orien">
             <a:extLst xmlns:a="http://schemas.openxmlformats.org/drawingml/2006/main">
               <a:ext uri="{FF2B5EF4-FFF2-40B4-BE49-F238E27FC236}">
-                <a16:creationId xmlns:a16="http://schemas.microsoft.com/office/drawing/2014/main" id="{5EE48D05-642D-4B47-9A3F-3CB07C699A97}"/>
+                <a16:creationId xmlns:a16="http://schemas.microsoft.com/office/drawing/2014/main" id="{53C70638-91E8-4F92-BB05-9C6682B008DC}"/>
               </a:ext>
             </a:extLst>
           </p:cNvPr>
@@ -31111,7 +31542,7 @@
     </p:spTree>
     <p:extLst>
       <p:ext uri="{BB962C8B-B14F-4D97-AF65-F5344CB8AC3E}">
-        <p14:creationId xmlns:p14="http://schemas.microsoft.com/office/powerpoint/2010/main" val="268594329"/>
+        <p14:creationId xmlns:p14="http://schemas.microsoft.com/office/powerpoint/2010/main" val="69417606"/>
       </p:ext>
     </p:extLst>
   </p:cSld>
@@ -31142,7 +31573,7 @@
           <p:cNvPr id="21" name="">
             <a:extLst xmlns:a="http://schemas.openxmlformats.org/drawingml/2006/main">
               <a:ext uri="{FF2B5EF4-FFF2-40B4-BE49-F238E27FC236}">
-                <a16:creationId xmlns:a16="http://schemas.microsoft.com/office/drawing/2014/main" id="{07DBE386-AAC1-476F-AE32-5DF5175392CA}"/>
+                <a16:creationId xmlns:a16="http://schemas.microsoft.com/office/drawing/2014/main" id="{85BDB4A2-946D-41C9-8C7C-55783DC01987}"/>
               </a:ext>
             </a:extLst>
           </p:cNvPr>
@@ -31172,7 +31603,7 @@
           <p:cNvPr id="2" name="ANÁLISE VISUAL DA INTRODUÇÃO">
             <a:extLst xmlns:a="http://schemas.openxmlformats.org/drawingml/2006/main">
               <a:ext uri="{FF2B5EF4-FFF2-40B4-BE49-F238E27FC236}">
-                <a16:creationId xmlns:a16="http://schemas.microsoft.com/office/drawing/2014/main" id="{898AFB8D-B64F-419A-AA4F-3F7707EF1EE5}"/>
+                <a16:creationId xmlns:a16="http://schemas.microsoft.com/office/drawing/2014/main" id="{A4B46455-7DE4-41C4-B1F6-6168C05BA7B8}"/>
               </a:ext>
             </a:extLst>
           </p:cNvPr>
@@ -31229,7 +31660,7 @@
           <p:cNvPr id="3" name="Figura 1: avisos com confirmação única">
             <a:extLst xmlns:a="http://schemas.openxmlformats.org/drawingml/2006/main">
               <a:ext uri="{FF2B5EF4-FFF2-40B4-BE49-F238E27FC236}">
-                <a16:creationId xmlns:a16="http://schemas.microsoft.com/office/drawing/2014/main" id="{44CCB4A5-6E89-44CD-8DAC-EFDD27EB4B35}"/>
+                <a16:creationId xmlns:a16="http://schemas.microsoft.com/office/drawing/2014/main" id="{AB859D72-061B-4B75-AA8A-3B217A05FD94}"/>
               </a:ext>
             </a:extLst>
           </p:cNvPr>
@@ -31286,7 +31717,7 @@
           <p:cNvPr id="4" name="">
             <a:extLst xmlns:a="http://schemas.openxmlformats.org/drawingml/2006/main">
               <a:ext uri="{FF2B5EF4-FFF2-40B4-BE49-F238E27FC236}">
-                <a16:creationId xmlns:a16="http://schemas.microsoft.com/office/drawing/2014/main" id="{CD4EF06A-747A-4BE7-A3BE-6E8635897E51}"/>
+                <a16:creationId xmlns:a16="http://schemas.microsoft.com/office/drawing/2014/main" id="{5A63AA22-5050-4BB7-9509-72EFE955DC99}"/>
               </a:ext>
             </a:extLst>
           </p:cNvPr>
@@ -31316,7 +31747,7 @@
           <p:cNvPr id="5" name="">
             <a:extLst xmlns:a="http://schemas.openxmlformats.org/drawingml/2006/main">
               <a:ext uri="{FF2B5EF4-FFF2-40B4-BE49-F238E27FC236}">
-                <a16:creationId xmlns:a16="http://schemas.microsoft.com/office/drawing/2014/main" id="{D2A2B7D9-FC5D-4E34-9569-E1AD24BA9075}"/>
+                <a16:creationId xmlns:a16="http://schemas.microsoft.com/office/drawing/2014/main" id="{37A79E4B-5DEE-47EA-AC09-7AD033044E77}"/>
               </a:ext>
             </a:extLst>
           </p:cNvPr>
@@ -31346,7 +31777,7 @@
           <p:cNvPr id="6" name="Nguyen, Backes e Stock (2022), Figura 1 ">
             <a:extLst xmlns:a="http://schemas.openxmlformats.org/drawingml/2006/main">
               <a:ext uri="{FF2B5EF4-FFF2-40B4-BE49-F238E27FC236}">
-                <a16:creationId xmlns:a16="http://schemas.microsoft.com/office/drawing/2014/main" id="{C78DCBBB-066D-48B8-88D0-4DB3E17347E4}"/>
+                <a16:creationId xmlns:a16="http://schemas.microsoft.com/office/drawing/2014/main" id="{76054320-3075-40DB-9145-28B1F528E288}"/>
               </a:ext>
             </a:extLst>
           </p:cNvPr>
@@ -31358,7 +31789,7 @@
         <p:spPr>
           <a:xfrm xmlns:a="http://schemas.openxmlformats.org/drawingml/2006/main">
             <a:off x="609600" y="6477000"/>
-            <a:ext cx="10096500" cy="228600"/>
+            <a:ext cx="9982200" cy="228600"/>
           </a:xfrm>
           <a:prstGeom xmlns:a="http://schemas.openxmlformats.org/drawingml/2006/main" prst="rect">
             <a:avLst/>
@@ -31375,7 +31806,7 @@
           <a:lstStyle xmlns:a="http://schemas.openxmlformats.org/drawingml/2006/main"/>
           <a:p xmlns:a="http://schemas.openxmlformats.org/drawingml/2006/main">
             <a:pPr algn="l">
-              <a:defRPr sz="1125" b="0">
+              <a:defRPr sz="1200" b="0">
                 <a:solidFill>
                   <a:srgbClr val="596B7A"/>
                 </a:solidFill>
@@ -31385,7 +31816,7 @@
               </a:defRPr>
             </a:pPr>
             <a:r>
-              <a:rPr sz="1125" b="0">
+              <a:rPr sz="1200" b="0">
                 <a:solidFill>
                   <a:srgbClr val="596B7A"/>
                 </a:solidFill>
@@ -31403,7 +31834,7 @@
           <p:cNvPr id="7" name="09 / 23">
             <a:extLst xmlns:a="http://schemas.openxmlformats.org/drawingml/2006/main">
               <a:ext uri="{FF2B5EF4-FFF2-40B4-BE49-F238E27FC236}">
-                <a16:creationId xmlns:a16="http://schemas.microsoft.com/office/drawing/2014/main" id="{3E28AB4A-4049-4936-8131-D1BE5C1A28D0}"/>
+                <a16:creationId xmlns:a16="http://schemas.microsoft.com/office/drawing/2014/main" id="{19684502-738D-428F-B513-E010DEEEB1E8}"/>
               </a:ext>
             </a:extLst>
           </p:cNvPr>
@@ -31432,7 +31863,7 @@
           <a:lstStyle xmlns:a="http://schemas.openxmlformats.org/drawingml/2006/main"/>
           <a:p xmlns:a="http://schemas.openxmlformats.org/drawingml/2006/main">
             <a:pPr algn="r">
-              <a:defRPr sz="1125" b="0">
+              <a:defRPr sz="1200" b="0">
                 <a:solidFill>
                   <a:srgbClr val="596B7A"/>
                 </a:solidFill>
@@ -31442,7 +31873,7 @@
               </a:defRPr>
             </a:pPr>
             <a:r>
-              <a:rPr sz="1125" b="0">
+              <a:rPr sz="1200" b="0">
                 <a:solidFill>
                   <a:srgbClr val="596B7A"/>
                 </a:solidFill>
@@ -31464,7 +31895,7 @@
           <p:nvPr/>
         </p:nvPicPr>
         <p:blipFill>
-          <a:blip xmlns:r="http://schemas.openxmlformats.org/officeDocument/2006/relationships" xmlns:a="http://schemas.openxmlformats.org/drawingml/2006/main" r:embed="R627b0606e94249db"/>
+          <a:blip xmlns:r="http://schemas.openxmlformats.org/officeDocument/2006/relationships" xmlns:a="http://schemas.openxmlformats.org/drawingml/2006/main" r:embed="R1f7d6cc1310a431f"/>
           <a:stretch xmlns:a="http://schemas.openxmlformats.org/drawingml/2006/main"/>
         </p:blipFill>
         <p:spPr>
@@ -31482,7 +31913,7 @@
           <p:cNvPr id="9" name="(a)">
             <a:extLst xmlns:a="http://schemas.openxmlformats.org/drawingml/2006/main">
               <a:ext uri="{FF2B5EF4-FFF2-40B4-BE49-F238E27FC236}">
-                <a16:creationId xmlns:a16="http://schemas.microsoft.com/office/drawing/2014/main" id="{C919E411-1C44-478A-AA11-F6F8542F288A}"/>
+                <a16:creationId xmlns:a16="http://schemas.microsoft.com/office/drawing/2014/main" id="{9EDB0C3A-5464-411A-80E7-758929C01B56}"/>
               </a:ext>
             </a:extLst>
           </p:cNvPr>
@@ -31543,7 +31974,7 @@
           <p:nvPr/>
         </p:nvPicPr>
         <p:blipFill>
-          <a:blip xmlns:r="http://schemas.openxmlformats.org/officeDocument/2006/relationships" xmlns:a="http://schemas.openxmlformats.org/drawingml/2006/main" r:embed="R1455f18cc6bf4bb1"/>
+          <a:blip xmlns:r="http://schemas.openxmlformats.org/officeDocument/2006/relationships" xmlns:a="http://schemas.openxmlformats.org/drawingml/2006/main" r:embed="R54cd3d95c85f4e4e"/>
           <a:stretch xmlns:a="http://schemas.openxmlformats.org/drawingml/2006/main"/>
         </p:blipFill>
         <p:spPr>
@@ -31561,7 +31992,7 @@
           <p:cNvPr id="11" name="(b)">
             <a:extLst xmlns:a="http://schemas.openxmlformats.org/drawingml/2006/main">
               <a:ext uri="{FF2B5EF4-FFF2-40B4-BE49-F238E27FC236}">
-                <a16:creationId xmlns:a16="http://schemas.microsoft.com/office/drawing/2014/main" id="{0D8C69EA-23DB-4D3F-B258-9F625A1AA71A}"/>
+                <a16:creationId xmlns:a16="http://schemas.microsoft.com/office/drawing/2014/main" id="{BB4A6EB5-DF48-4E55-9979-189D1FA5A472}"/>
               </a:ext>
             </a:extLst>
           </p:cNvPr>
@@ -31622,7 +32053,7 @@
           <p:nvPr/>
         </p:nvPicPr>
         <p:blipFill>
-          <a:blip xmlns:r="http://schemas.openxmlformats.org/officeDocument/2006/relationships" xmlns:a="http://schemas.openxmlformats.org/drawingml/2006/main" r:embed="R557d8637287a4240"/>
+          <a:blip xmlns:r="http://schemas.openxmlformats.org/officeDocument/2006/relationships" xmlns:a="http://schemas.openxmlformats.org/drawingml/2006/main" r:embed="Ra4c392fca68e4abe"/>
           <a:stretch xmlns:a="http://schemas.openxmlformats.org/drawingml/2006/main"/>
         </p:blipFill>
         <p:spPr>
@@ -31640,7 +32071,7 @@
           <p:cNvPr id="13" name="(c)">
             <a:extLst xmlns:a="http://schemas.openxmlformats.org/drawingml/2006/main">
               <a:ext uri="{FF2B5EF4-FFF2-40B4-BE49-F238E27FC236}">
-                <a16:creationId xmlns:a16="http://schemas.microsoft.com/office/drawing/2014/main" id="{0D02300D-71DD-426F-962E-48A1AB59AA55}"/>
+                <a16:creationId xmlns:a16="http://schemas.microsoft.com/office/drawing/2014/main" id="{18695BF9-2746-4828-B8EB-34764A61E577}"/>
               </a:ext>
             </a:extLst>
           </p:cNvPr>
@@ -31697,7 +32128,7 @@
           <p:cNvPr id="14" name="EN">
             <a:extLst xmlns:a="http://schemas.openxmlformats.org/drawingml/2006/main">
               <a:ext uri="{FF2B5EF4-FFF2-40B4-BE49-F238E27FC236}">
-                <a16:creationId xmlns:a16="http://schemas.microsoft.com/office/drawing/2014/main" id="{963671FF-61CB-44F0-925A-681620B6096A}"/>
+                <a16:creationId xmlns:a16="http://schemas.microsoft.com/office/drawing/2014/main" id="{858B79DC-057C-435E-B4F9-2B9D5651A6C4}"/>
               </a:ext>
             </a:extLst>
           </p:cNvPr>
@@ -31726,7 +32157,7 @@
           <a:lstStyle xmlns:a="http://schemas.openxmlformats.org/drawingml/2006/main"/>
           <a:p xmlns:a="http://schemas.openxmlformats.org/drawingml/2006/main">
             <a:pPr algn="l">
-              <a:defRPr sz="1125" b="1">
+              <a:defRPr sz="1200" b="1">
                 <a:solidFill>
                   <a:srgbClr val="174875"/>
                 </a:solidFill>
@@ -31736,7 +32167,7 @@
               </a:defRPr>
             </a:pPr>
             <a:r>
-              <a:rPr sz="1125" b="1">
+              <a:rPr sz="1200" b="1">
                 <a:solidFill>
                   <a:srgbClr val="174875"/>
                 </a:solidFill>
@@ -31754,7 +32185,7 @@
           <p:cNvPr id="15" name="“confirmation-only notices that feature ">
             <a:extLst xmlns:a="http://schemas.openxmlformats.org/drawingml/2006/main">
               <a:ext uri="{FF2B5EF4-FFF2-40B4-BE49-F238E27FC236}">
-                <a16:creationId xmlns:a16="http://schemas.microsoft.com/office/drawing/2014/main" id="{68533697-7D29-4D7D-933B-96BD8C439B25}"/>
+                <a16:creationId xmlns:a16="http://schemas.microsoft.com/office/drawing/2014/main" id="{FCBECF6F-75CE-4B3D-AC4D-F568176FE915}"/>
               </a:ext>
             </a:extLst>
           </p:cNvPr>
@@ -31811,7 +32242,7 @@
           <p:cNvPr id="16" name="PT">
             <a:extLst xmlns:a="http://schemas.openxmlformats.org/drawingml/2006/main">
               <a:ext uri="{FF2B5EF4-FFF2-40B4-BE49-F238E27FC236}">
-                <a16:creationId xmlns:a16="http://schemas.microsoft.com/office/drawing/2014/main" id="{5A54EABC-C1B0-458F-B458-5CC714B36EB9}"/>
+                <a16:creationId xmlns:a16="http://schemas.microsoft.com/office/drawing/2014/main" id="{B8E54F29-EF2B-49D0-9CF6-A7B39F690DD3}"/>
               </a:ext>
             </a:extLst>
           </p:cNvPr>
@@ -31840,7 +32271,7 @@
           <a:lstStyle xmlns:a="http://schemas.openxmlformats.org/drawingml/2006/main"/>
           <a:p xmlns:a="http://schemas.openxmlformats.org/drawingml/2006/main">
             <a:pPr algn="l">
-              <a:defRPr sz="1125" b="1">
+              <a:defRPr sz="1200" b="1">
                 <a:solidFill>
                   <a:srgbClr val="174875"/>
                 </a:solidFill>
@@ -31850,7 +32281,7 @@
               </a:defRPr>
             </a:pPr>
             <a:r>
-              <a:rPr sz="1125" b="1">
+              <a:rPr sz="1200" b="1">
                 <a:solidFill>
                   <a:srgbClr val="174875"/>
                 </a:solidFill>
@@ -31868,7 +32299,7 @@
           <p:cNvPr id="17" name="Avisos apenas de confirmação, com um bot">
             <a:extLst xmlns:a="http://schemas.openxmlformats.org/drawingml/2006/main">
               <a:ext uri="{FF2B5EF4-FFF2-40B4-BE49-F238E27FC236}">
-                <a16:creationId xmlns:a16="http://schemas.microsoft.com/office/drawing/2014/main" id="{66FF10F7-D57F-462A-90EE-5D755411112A}"/>
+                <a16:creationId xmlns:a16="http://schemas.microsoft.com/office/drawing/2014/main" id="{00C1F81E-34E5-45E4-8367-675C725A31CE}"/>
               </a:ext>
             </a:extLst>
           </p:cNvPr>
@@ -31925,7 +32356,7 @@
           <p:cNvPr id="18" name="">
             <a:extLst xmlns:a="http://schemas.openxmlformats.org/drawingml/2006/main">
               <a:ext uri="{FF2B5EF4-FFF2-40B4-BE49-F238E27FC236}">
-                <a16:creationId xmlns:a16="http://schemas.microsoft.com/office/drawing/2014/main" id="{5F4E82AB-CD54-43F9-995C-4859E792E439}"/>
+                <a16:creationId xmlns:a16="http://schemas.microsoft.com/office/drawing/2014/main" id="{2B214D9C-2532-44F7-A0AD-0D6A595398E8}"/>
               </a:ext>
             </a:extLst>
           </p:cNvPr>
@@ -31955,7 +32386,7 @@
           <p:cNvPr id="19" name="ANÁLISE DO SEMINÁRIO">
             <a:extLst xmlns:a="http://schemas.openxmlformats.org/drawingml/2006/main">
               <a:ext uri="{FF2B5EF4-FFF2-40B4-BE49-F238E27FC236}">
-                <a16:creationId xmlns:a16="http://schemas.microsoft.com/office/drawing/2014/main" id="{BBE7EDE6-8051-4637-A374-10C6596579C9}"/>
+                <a16:creationId xmlns:a16="http://schemas.microsoft.com/office/drawing/2014/main" id="{B470511C-B57A-432D-BDB0-6F5386B566AA}"/>
               </a:ext>
             </a:extLst>
           </p:cNvPr>
@@ -32012,7 +32443,7 @@
           <p:cNvPr id="20" name="A interface mostra como avançar,&#10;mas não">
             <a:extLst xmlns:a="http://schemas.openxmlformats.org/drawingml/2006/main">
               <a:ext uri="{FF2B5EF4-FFF2-40B4-BE49-F238E27FC236}">
-                <a16:creationId xmlns:a16="http://schemas.microsoft.com/office/drawing/2014/main" id="{18997F4A-ED57-469F-8599-572D34C87B26}"/>
+                <a16:creationId xmlns:a16="http://schemas.microsoft.com/office/drawing/2014/main" id="{6C9262F5-7D3E-4CC0-BA23-E6B209DC7173}"/>
               </a:ext>
             </a:extLst>
           </p:cNvPr>
@@ -32113,7 +32544,7 @@
     </p:spTree>
     <p:extLst>
       <p:ext uri="{BB962C8B-B14F-4D97-AF65-F5344CB8AC3E}">
-        <p14:creationId xmlns:p14="http://schemas.microsoft.com/office/powerpoint/2010/main" val="960964054"/>
+        <p14:creationId xmlns:p14="http://schemas.microsoft.com/office/powerpoint/2010/main" val="412204481"/>
       </p:ext>
     </p:extLst>
   </p:cSld>

--- a/seminario/apresentacao/seminario-analise-de-artigo.pptx
+++ b/seminario/apresentacao/seminario-analise-de-artigo.pptx
@@ -2,37 +2,37 @@
 <file path=ppt/presentation.xml><?xml version="1.0" encoding="utf-8"?>
 <p:presentation xmlns:p="http://schemas.openxmlformats.org/presentationml/2006/main">
   <p:sldMasterIdLst>
-    <p:sldMasterId xmlns:r="http://schemas.openxmlformats.org/officeDocument/2006/relationships" id="2147483648" r:id="R5a19ecd223484bb5"/>
+    <p:sldMasterId xmlns:r="http://schemas.openxmlformats.org/officeDocument/2006/relationships" id="2147483648" r:id="Re4ab5222c0644d1b"/>
   </p:sldMasterIdLst>
   <p:notesMasterIdLst>
-    <p:notesMasterId xmlns:r="http://schemas.openxmlformats.org/officeDocument/2006/relationships" r:id="R2bc6db7ad54e481e"/>
+    <p:notesMasterId xmlns:r="http://schemas.openxmlformats.org/officeDocument/2006/relationships" r:id="Rccc5fa9f101a45f1"/>
   </p:notesMasterIdLst>
   <p:sldIdLst>
-    <p:sldId xmlns:r="http://schemas.openxmlformats.org/officeDocument/2006/relationships" id="256" r:id="Rb05aff36f8e34a2c"/>
-    <p:sldId xmlns:r="http://schemas.openxmlformats.org/officeDocument/2006/relationships" id="257" r:id="R051c1e3475094152"/>
-    <p:sldId xmlns:r="http://schemas.openxmlformats.org/officeDocument/2006/relationships" id="258" r:id="Rd157c712f76c4f1e"/>
-    <p:sldId xmlns:r="http://schemas.openxmlformats.org/officeDocument/2006/relationships" id="259" r:id="R817ce8f62e50446e"/>
-    <p:sldId xmlns:r="http://schemas.openxmlformats.org/officeDocument/2006/relationships" id="260" r:id="R92100f3024cc47a8"/>
-    <p:sldId xmlns:r="http://schemas.openxmlformats.org/officeDocument/2006/relationships" id="261" r:id="Ra97e7f92c4cf4fe9"/>
-    <p:sldId xmlns:r="http://schemas.openxmlformats.org/officeDocument/2006/relationships" id="262" r:id="R419ac86e95f24da7"/>
-    <p:sldId xmlns:r="http://schemas.openxmlformats.org/officeDocument/2006/relationships" id="263" r:id="Rd4887e760ac64684"/>
-    <p:sldId xmlns:r="http://schemas.openxmlformats.org/officeDocument/2006/relationships" id="264" r:id="R56d2193e673e401a"/>
-    <p:sldId xmlns:r="http://schemas.openxmlformats.org/officeDocument/2006/relationships" id="265" r:id="R0bb51f564c8b42d6"/>
-    <p:sldId xmlns:r="http://schemas.openxmlformats.org/officeDocument/2006/relationships" id="266" r:id="R6bb06802ecab4252"/>
-    <p:sldId xmlns:r="http://schemas.openxmlformats.org/officeDocument/2006/relationships" id="267" r:id="R262f037b9b29421e"/>
-    <p:sldId xmlns:r="http://schemas.openxmlformats.org/officeDocument/2006/relationships" id="268" r:id="Rccd48055365c4034"/>
-    <p:sldId xmlns:r="http://schemas.openxmlformats.org/officeDocument/2006/relationships" id="269" r:id="R6a02434fd64e4ff7"/>
-    <p:sldId xmlns:r="http://schemas.openxmlformats.org/officeDocument/2006/relationships" id="270" r:id="Rcf7d7ae996544b83"/>
-    <p:sldId xmlns:r="http://schemas.openxmlformats.org/officeDocument/2006/relationships" id="271" r:id="Rd15231d696fc477e"/>
-    <p:sldId xmlns:r="http://schemas.openxmlformats.org/officeDocument/2006/relationships" id="272" r:id="R264c0bdc164e411d"/>
-    <p:sldId xmlns:r="http://schemas.openxmlformats.org/officeDocument/2006/relationships" id="273" r:id="R0ccf93dba9fb4af1"/>
-    <p:sldId xmlns:r="http://schemas.openxmlformats.org/officeDocument/2006/relationships" id="274" r:id="Rc404867da6cb4e4d"/>
-    <p:sldId xmlns:r="http://schemas.openxmlformats.org/officeDocument/2006/relationships" id="275" r:id="Re1cc48383c2a40a1"/>
-    <p:sldId xmlns:r="http://schemas.openxmlformats.org/officeDocument/2006/relationships" id="276" r:id="R339cab2d039a4401"/>
-    <p:sldId xmlns:r="http://schemas.openxmlformats.org/officeDocument/2006/relationships" id="277" r:id="Rb243fb680794469d"/>
-    <p:sldId xmlns:r="http://schemas.openxmlformats.org/officeDocument/2006/relationships" id="278" r:id="R4eddd8ee9c9e4807"/>
-    <p:sldId xmlns:r="http://schemas.openxmlformats.org/officeDocument/2006/relationships" id="279" r:id="R690320385de64f8b"/>
-    <p:sldId xmlns:r="http://schemas.openxmlformats.org/officeDocument/2006/relationships" id="280" r:id="R02a6eccc923f4528"/>
+    <p:sldId xmlns:r="http://schemas.openxmlformats.org/officeDocument/2006/relationships" id="256" r:id="Rda373d23d197469c"/>
+    <p:sldId xmlns:r="http://schemas.openxmlformats.org/officeDocument/2006/relationships" id="257" r:id="R45356b48f77c4c65"/>
+    <p:sldId xmlns:r="http://schemas.openxmlformats.org/officeDocument/2006/relationships" id="258" r:id="R50ca950d42984063"/>
+    <p:sldId xmlns:r="http://schemas.openxmlformats.org/officeDocument/2006/relationships" id="259" r:id="R5fdb6139c9324f93"/>
+    <p:sldId xmlns:r="http://schemas.openxmlformats.org/officeDocument/2006/relationships" id="260" r:id="R41835390f7de436c"/>
+    <p:sldId xmlns:r="http://schemas.openxmlformats.org/officeDocument/2006/relationships" id="261" r:id="R1619ae2d7a5b4b39"/>
+    <p:sldId xmlns:r="http://schemas.openxmlformats.org/officeDocument/2006/relationships" id="262" r:id="Rf92173408e1349f6"/>
+    <p:sldId xmlns:r="http://schemas.openxmlformats.org/officeDocument/2006/relationships" id="263" r:id="R3b0667f8103f42f4"/>
+    <p:sldId xmlns:r="http://schemas.openxmlformats.org/officeDocument/2006/relationships" id="264" r:id="Rc4f66faaf5824957"/>
+    <p:sldId xmlns:r="http://schemas.openxmlformats.org/officeDocument/2006/relationships" id="265" r:id="R6b39357b9d504289"/>
+    <p:sldId xmlns:r="http://schemas.openxmlformats.org/officeDocument/2006/relationships" id="266" r:id="Rfc0eea783e7a42c8"/>
+    <p:sldId xmlns:r="http://schemas.openxmlformats.org/officeDocument/2006/relationships" id="267" r:id="Rbff3b31b82464818"/>
+    <p:sldId xmlns:r="http://schemas.openxmlformats.org/officeDocument/2006/relationships" id="268" r:id="R496b27de0bc846c4"/>
+    <p:sldId xmlns:r="http://schemas.openxmlformats.org/officeDocument/2006/relationships" id="269" r:id="Rcfa0d4328a8f4553"/>
+    <p:sldId xmlns:r="http://schemas.openxmlformats.org/officeDocument/2006/relationships" id="270" r:id="Rb7913d62a65b4d36"/>
+    <p:sldId xmlns:r="http://schemas.openxmlformats.org/officeDocument/2006/relationships" id="271" r:id="R23ab3d97c02a4115"/>
+    <p:sldId xmlns:r="http://schemas.openxmlformats.org/officeDocument/2006/relationships" id="272" r:id="Rf7e1524315be4ace"/>
+    <p:sldId xmlns:r="http://schemas.openxmlformats.org/officeDocument/2006/relationships" id="273" r:id="Rfd287c23ad7a4c78"/>
+    <p:sldId xmlns:r="http://schemas.openxmlformats.org/officeDocument/2006/relationships" id="274" r:id="Rb886cc92560645d3"/>
+    <p:sldId xmlns:r="http://schemas.openxmlformats.org/officeDocument/2006/relationships" id="275" r:id="R282e4940cef848e9"/>
+    <p:sldId xmlns:r="http://schemas.openxmlformats.org/officeDocument/2006/relationships" id="276" r:id="Re4d8b090892749d3"/>
+    <p:sldId xmlns:r="http://schemas.openxmlformats.org/officeDocument/2006/relationships" id="277" r:id="R3538ae9152f643de"/>
+    <p:sldId xmlns:r="http://schemas.openxmlformats.org/officeDocument/2006/relationships" id="278" r:id="R0095e8aec2a54e62"/>
+    <p:sldId xmlns:r="http://schemas.openxmlformats.org/officeDocument/2006/relationships" id="279" r:id="R3242b2dd4e9c474f"/>
+    <p:sldId xmlns:r="http://schemas.openxmlformats.org/officeDocument/2006/relationships" id="280" r:id="Rbb1fd1d98ae54627"/>
   </p:sldIdLst>
   <p:sldSz cx="12192000" cy="6858000"/>
   <p:notesSz cx="6858000" cy="9144000"/>
@@ -222,16 +222,16 @@
         <a:srgbClr val="96607D"/>
       </a:folHlink>
     </a:clrScheme>
-    <a:fontScheme name="Office">
+    <a:fontScheme name="">
       <a:majorFont>
-        <a:latin typeface="Calibri Light"/>
-        <a:ea typeface="Calibri Light"/>
-        <a:cs typeface="Calibri Light"/>
+        <a:latin typeface="Aptos"/>
+        <a:ea typeface=""/>
+        <a:cs typeface=""/>
       </a:majorFont>
       <a:minorFont>
-        <a:latin typeface="Calibri"/>
-        <a:ea typeface="Calibri"/>
-        <a:cs typeface="Calibri"/>
+        <a:latin typeface="Aptos"/>
+        <a:ea typeface=""/>
+        <a:cs typeface=""/>
       </a:minorFont>
     </a:fontScheme>
     <a:fmtScheme name="ChatGPT">
@@ -856,7 +856,7 @@
           </a:p>
           <a:p xmlns:a="http://schemas.openxmlformats.org/drawingml/2006/main">
             <a:r>
-              <a:t>As condições são execuções separadas. Entre elas, a equipe desinstala o app e remove seus dados para exibir novamente o aviso. Tno-consent mede sem interação, Tconfirm mede após aceitar e Treject após recusar. Cada execução dura até 150 segundos. O estudo instrumenta TLS com mitmproxy, usa Objection contra pinning e DroidBot para eventos de interface. Os apps sem aviso também passam por análise de tráfego.</a:t>
+              <a:t>As condições são execuções separadas. Entre elas, a equipe desinstala o app e remove seus dados para exibir novamente o aviso. Tno-consent mede sem interação, Tconfirm mede após aceitar e Treject após recusar, quando o aviso oferece esse caminho. Cada execução dura até 150 segundos. O estudo instrumenta TLS com mitmproxy, usa Objection contra pinning e DroidBot para eventos de interface. Os apps sem aviso também passam por análise de tráfego.</a:t>
             </a:r>
           </a:p>
           <a:p xmlns:a="http://schemas.openxmlformats.org/drawingml/2006/main">
@@ -951,7 +951,7 @@
           </a:p>
           <a:p xmlns:a="http://schemas.openxmlformats.org/drawingml/2006/main">
             <a:r>
-              <a:t>As categorias descrevem as opções da interface. Quase 44% dos avisos são de confirmação única. A recusa de personalização, presente em cerca de 30%, não necessariamente bloqueia o rastreamento. Os percentuais do artigo foram mantidos; por arredondamento, sua soma difere ligeiramente de 100%. Todas as contagens somam os 13.082 avisos.</a:t>
+              <a:t>Esta seção apresenta evidências para a primeira pergunta: quais avisos existem e quais são suas características? As categorias descrevem as opções da interface. Quase 44% dos avisos são de confirmação única. A recusa de personalização, presente em cerca de 30%, não necessariamente bloqueia o rastreamento. Os percentuais do artigo foram mantidos; por arredondamento, sua soma difere ligeiramente de 100%. Todas as contagens somam os 13.082 avisos.</a:t>
             </a:r>
           </a:p>
           <a:p xmlns:a="http://schemas.openxmlformats.org/drawingml/2006/main">
@@ -1141,7 +1141,7 @@
           </a:p>
           <a:p xmlns:a="http://schemas.openxmlformats.org/drawingml/2006/main">
             <a:r>
-              <a:t>Os percentuais da tabela usam o total de cada coluna. No total de 13.082 apps, 2.181 correspondem a 16,67% e 1.084 a 8,28%, conforme o artigo. Os 134 continuaram enviando dados após a recusa. As categorias se sobrepõem: um mesmo app pode aparecer em mais de uma coluna, portanto não se somam para obter o total de 2.688. A divisão 1.084/13.082 é aproximadamente 8,29% pelo arredondamento usual; o artigo informa 8,28%, preservado no slide por fidelidade à fonte.</a:t>
+              <a:t>A tabela organiza as evidências para a segunda pergunta, aplicando os critérios definidos na fundamentação. Os percentuais da tabela usam o total de cada coluna. No total de 13.082 apps, 2.181 correspondem a 16,67% e 1.084 a 8,28%, conforme o artigo. Os 134 continuaram enviando dados após a recusa. As categorias se sobrepõem: um mesmo app pode aparecer em mais de uma coluna, portanto não se somam para obter o total de 2.688. A divisão 1.084/13.082 é aproximadamente 8,29% pelo arredondamento usual; o artigo informa 8,28%, preservado no slide por fidelidade à fonte.</a:t>
             </a:r>
           </a:p>
           <a:p xmlns:a="http://schemas.openxmlformats.org/drawingml/2006/main">
@@ -1331,7 +1331,7 @@
           </a:p>
           <a:p xmlns:a="http://schemas.openxmlformats.org/drawingml/2006/main">
             <a:r>
-              <a:t>Após excluir apps removidos ou atualizados desde a coleta, os autores notificaram 1.127 desenvolvedores responsáveis por 1.859 apps. Houve 43 respondentes, mas nem todos responderam a cada questão. Por isso, as frações são 9/14, 9/13 e 6/7. Entre 266 apps cujos desenvolvedores acessaram algum relatório, 147 foram atualizados. Desses, 63 corrigiram o problema e 84 ainda apresentavam pelo menos uma potencial violação. Isso não prova causalidade da notificação.</a:t>
+              <a:t>A seção responde à terceira pergunta, sobre o conhecimento dos desenvolvedores, e acompanha mudanças nas implementações. As respostas descrevem os participantes, sem representar automaticamente todos os desenvolvedores. Após excluir apps removidos ou atualizados desde a coleta, os autores notificaram 1.127 desenvolvedores responsáveis por 1.859 apps. Houve 43 respondentes, mas nem todos responderam a cada questão. Por isso, as frações são 9/14, 9/13 e 6/7. Entre 266 apps cujos desenvolvedores acessaram algum relatório, 147 foram atualizados. Desses, 63 corrigiram o problema e 84 ainda apresentavam pelo menos uma potencial violação. Isso não prova causalidade da notificação.</a:t>
             </a:r>
           </a:p>
           <a:p xmlns:a="http://schemas.openxmlformats.org/drawingml/2006/main">
@@ -2091,7 +2091,7 @@
           </a:p>
           <a:p xmlns:a="http://schemas.openxmlformats.org/drawingml/2006/main">
             <a:r>
-              <a:t>As traduções em português são do apresentador. Todas as figuras foram extraídas do PDF da ACM fornecido nesta revisão. Os dados do projeto e da busca são identificados separadamente das conclusões dos autores. As consultas de métricas em 17/09/2026 são documentadas pelas capturas; o print do relatório CAPES é de 22/09/2026. Qualis Eventos e Qualis Periódicos são identificados separadamente, sem conversão inferida do h5.</a:t>
+              <a:t>As traduções em português são do apresentador. Todas as figuras foram extraídas do PDF da ACM fornecido nesta revisão. Os dados do projeto e da busca são identificados separadamente das conclusões dos autores. As consultas de métricas em 17/09/2026 são documentadas pelas capturas; a planilha e o relatório CAPES 2021–2024 foram baixados da Sucupira em 28/09/2026. Qualis Eventos e Qualis Periódicos são identificados separadamente, sem conversão inferida do h5.</a:t>
             </a:r>
           </a:p>
           <a:p xmlns:a="http://schemas.openxmlformats.org/drawingml/2006/main">
@@ -2101,7 +2101,7 @@
           </a:p>
           <a:p xmlns:a="http://schemas.openxmlformats.org/drawingml/2006/main">
             <a:r>
-              <a:t>Fontes: Artigo ACM fornecido: https://doi.org/10.1145/3548606.3560564. Repositório: https://github.com/ClaudioAMF1/TCC. Google Scholar Metrics: Computer Security &amp; Cryptography, captura 06 em seminario/pesquisa/metricas/. ICORE, CCS: https://portal.core.edu.au/conf-ranks/12/. ICORE, SOUPS: https://portal.core.edu.au/conf-ranks/2167/ (consulta em 22/09/2026). CAPES Eventos: https://www.gov.br/capes/pt-br/centrais-de-conteudo/documentos/avaliacao/09012022_RELATORIOQUALISEVENTOS20172020COMPUTACAO.PDF/@@display-file/file. CAPES Periódicos: https://www.gov.br/capes/pt-br/centrais-de-conteudo/documentos/avaliacao/avaliacao-quadrienal-2017/DocumentotcnicoQualisPeridicosfinal.pdf.</a:t>
+              <a:t>Fontes: Artigo ACM fornecido: https://doi.org/10.1145/3548606.3560564. Repositório: https://github.com/ClaudioAMF1/TCC. Google Scholar Metrics: Computer Security &amp; Cryptography, captura 06 em seminario/pesquisa/metricas/. ICORE, CCS: https://portal.core.edu.au/conf-ranks/12/. ICORE, SOUPS: https://portal.core.edu.au/conf-ranks/2167/ (consulta em 22/09/2026). CAPES Eventos: https://sucupira-legado.capes.gov.br/sucupira/public/consultas/coleta/qualisEventos/listaQualisEventos.xhtml. Classificação de trabalho em anais 2025, área COMPUTAÇÃO, planilha linha 90 e relatório p. 1–2. Consulta: 28/09/2026. CAPES Periódicos: https://www.gov.br/capes/pt-br/centrais-de-conteudo/documentos/avaliacao/avaliacao-quadrienal-2017/DocumentotcnicoQualisPeridicosfinal.pdf.</a:t>
             </a:r>
           </a:p>
           <a:p xmlns:a="http://schemas.openxmlformats.org/drawingml/2006/main">
@@ -2281,7 +2281,7 @@
           </a:p>
           <a:p xmlns:a="http://schemas.openxmlformats.org/drawingml/2006/main">
             <a:r>
-              <a:t>O CCS tem h5 90 e mediana h5 146 no registro fornecido. Aparece em quinto na subárea e em terceiro entre suas conferências. O portal ICORE registra A* na edição 2026. O relatório oficial da CAPES lista CCS como A1 no Qualis Eventos da Computação 2017–2020. Esse registro refere-se ao ACM CCS, e não ao AsiaCCS. O enunciado usa a expressão Qualis Periódicos correspondente ao h5. Aqui a comprovação disponível é de Qualis Eventos: os sistemas e os períodos não são equivalentes. A posição numa lista de 20 itens não demonstra o percentil em um universo maior, e não usamos um universo hipotético de 40 veículos para derivar A1. O A1 apresentado é o estrato documental da conferência.</a:t>
+              <a:t>O h5 é 90 e a mediana h5 é 146 na consulta registrada. O ICORE informa A* na edição 2026. A classificação A1 agora está comprovada na planilha oficial do Qualis Eventos 2021–2024, período que inclui 2022. O recorte no slide vem da página 6 do relatório oficial e coincide com a linha 90 da planilha. O relatório esclarece que a classificação foi elaborada em 2025. Ele usa h5 e avaliação qualitativa, mas o h5 registrado em setembro de 2026 não é a mesma edição do indicador usada pela comissão. Qualis Eventos permanece distinto de Qualis Periódicos.</a:t>
             </a:r>
           </a:p>
           <a:p xmlns:a="http://schemas.openxmlformats.org/drawingml/2006/main">
@@ -2291,7 +2291,7 @@
           </a:p>
           <a:p xmlns:a="http://schemas.openxmlformats.org/drawingml/2006/main">
             <a:r>
-              <a:t>Fontes: Google Scholar Metrics, Computer Security &amp; Cryptography; ICORE: https://portal.core.edu.au/conf-ranks/12/. Consultas registradas em 17/09/2026 nas capturas 06 e 09. CAPES: Relatório Qualis Eventos Computação 2017–2020, p. 9, captura 07. Relatório: https://www.gov.br/capes/pt-br/centrais-de-conteudo/documentos/avaliacao/09012022_RELATORIOQUALISEVENTOS20172020COMPUTACAO.PDF/@@display-file/file.</a:t>
+              <a:t>Fontes: CAPES/Sucupira: https://sucupira-legado.capes.gov.br/sucupira/public/consultas/coleta/qualisEventos/listaQualisEventos.xhtml. Evento de classificação: Classificação de trabalho em anais 2025; Área: COMPUTAÇÃO. Planilha oficial, linha 90: CCS, ACM Symposium on Computer and Communications Security, A1. Relatório da Comissão de Qualis Eventos, p. 1: quadriênio 2021–2024; p. 2: critérios; p. 6: CCS, A1. Consulta e download: 28/09/2026. Google Scholar e ICORE: registros de 17/09/2026.</a:t>
             </a:r>
           </a:p>
           <a:p xmlns:a="http://schemas.openxmlformats.org/drawingml/2006/main">
@@ -2471,7 +2471,7 @@
           </a:p>
           <a:p xmlns:a="http://schemas.openxmlformats.org/drawingml/2006/main">
             <a:r>
-              <a:t>O resumo começa pelo padrão de consentimento usado no estudo. Em seguida, delimita a lacuna na análise sistemática das interfaces e apresenta o objetivo. A afirmação de pioneirismo pertence aos autores e se refere ao recorte e ao momento da publicação. As cores apenas distinguem as funções argumentativas.</a:t>
+              <a:t>GDPR é a sigla em inglês para Regulamento Geral de Proteção de Dados da União Europeia. No artigo, o rastreamento de terceiros envolve serviços externos ao aplicativo. O resumo começa pelo padrão de consentimento usado no estudo. Em seguida, delimita a lacuna na análise sistemática das interfaces e apresenta o objetivo. A afirmação de pioneirismo pertence aos autores e se refere ao recorte e ao momento da publicação. As cores apenas distinguem as funções argumentativas.</a:t>
             </a:r>
           </a:p>
           <a:p xmlns:a="http://schemas.openxmlformats.org/drawingml/2006/main">
@@ -2839,7 +2839,7 @@
   </p:cSld>
   <p:clrMap bg1="lt1" tx1="dk1" bg2="lt2" tx2="dk2" accent1="accent1" accent2="accent2" accent3="accent3" accent4="accent4" accent5="accent5" accent6="accent6" hlink="hlink" folHlink="folHlink"/>
   <p:sldLayoutIdLst>
-    <p:sldLayoutId xmlns:r="http://schemas.openxmlformats.org/officeDocument/2006/relationships" id="2147483649" r:id="Re9e05cb1c3c544ed"/>
+    <p:sldLayoutId xmlns:r="http://schemas.openxmlformats.org/officeDocument/2006/relationships" id="2147483649" r:id="Rf778cc5e57ba4207"/>
   </p:sldLayoutIdLst>
   <p:txStyles>
     <p:titleStyle>
@@ -3162,16 +3162,16 @@
         <a:srgbClr val="96607D"/>
       </a:folHlink>
     </a:clrScheme>
-    <a:fontScheme name="Office">
+    <a:fontScheme name="">
       <a:majorFont>
-        <a:latin typeface="Calibri Light"/>
-        <a:ea typeface="Calibri Light"/>
-        <a:cs typeface="Calibri Light"/>
+        <a:latin typeface="Aptos"/>
+        <a:ea typeface=""/>
+        <a:cs typeface=""/>
       </a:majorFont>
       <a:minorFont>
-        <a:latin typeface="Calibri"/>
-        <a:ea typeface="Calibri"/>
-        <a:cs typeface="Calibri"/>
+        <a:latin typeface="Aptos"/>
+        <a:ea typeface=""/>
+        <a:cs typeface=""/>
       </a:minorFont>
     </a:fontScheme>
     <a:fmtScheme name="ChatGPT">
@@ -3390,7 +3390,7 @@
           <p:cNvPr id="13" name="">
             <a:extLst xmlns:a="http://schemas.openxmlformats.org/drawingml/2006/main">
               <a:ext uri="{FF2B5EF4-FFF2-40B4-BE49-F238E27FC236}">
-                <a16:creationId xmlns:a16="http://schemas.microsoft.com/office/drawing/2014/main" id="{FEA57A68-05A1-4710-9450-DE8375EBB935}"/>
+                <a16:creationId xmlns:a16="http://schemas.microsoft.com/office/drawing/2014/main" id="{490CFA38-1539-4817-9F4F-F1418041BE71}"/>
               </a:ext>
             </a:extLst>
           </p:cNvPr>
@@ -3420,7 +3420,7 @@
           <p:cNvPr id="2" name="ANÁLISE DE ARTIGO CIENTÍFICO">
             <a:extLst xmlns:a="http://schemas.openxmlformats.org/drawingml/2006/main">
               <a:ext uri="{FF2B5EF4-FFF2-40B4-BE49-F238E27FC236}">
-                <a16:creationId xmlns:a16="http://schemas.microsoft.com/office/drawing/2014/main" id="{18ABBCD0-B840-46A1-9EB0-1E3967A909F3}"/>
+                <a16:creationId xmlns:a16="http://schemas.microsoft.com/office/drawing/2014/main" id="{FDD5CD12-49CE-43E9-9C76-FB65129F7EB2}"/>
               </a:ext>
             </a:extLst>
           </p:cNvPr>
@@ -3477,7 +3477,7 @@
           <p:cNvPr id="3" name="Freely Given Consent?">
             <a:extLst xmlns:a="http://schemas.openxmlformats.org/drawingml/2006/main">
               <a:ext uri="{FF2B5EF4-FFF2-40B4-BE49-F238E27FC236}">
-                <a16:creationId xmlns:a16="http://schemas.microsoft.com/office/drawing/2014/main" id="{E7EDB540-E51C-4D81-9DF9-918F6E363906}"/>
+                <a16:creationId xmlns:a16="http://schemas.microsoft.com/office/drawing/2014/main" id="{140028CA-FB9B-41D0-925D-6EA9A5057BD4}"/>
               </a:ext>
             </a:extLst>
           </p:cNvPr>
@@ -3534,7 +3534,7 @@
           <p:cNvPr id="4" name="Studying Consent Notice of Third-Party T">
             <a:extLst xmlns:a="http://schemas.openxmlformats.org/drawingml/2006/main">
               <a:ext uri="{FF2B5EF4-FFF2-40B4-BE49-F238E27FC236}">
-                <a16:creationId xmlns:a16="http://schemas.microsoft.com/office/drawing/2014/main" id="{17174CA9-6B9D-4304-A57C-62D48AD51A63}"/>
+                <a16:creationId xmlns:a16="http://schemas.microsoft.com/office/drawing/2014/main" id="{3F1CA7D5-5ECD-4949-827A-C10D597552B7}"/>
               </a:ext>
             </a:extLst>
           </p:cNvPr>
@@ -3614,7 +3614,7 @@
           <p:cNvPr id="5" name="PT">
             <a:extLst xmlns:a="http://schemas.openxmlformats.org/drawingml/2006/main">
               <a:ext uri="{FF2B5EF4-FFF2-40B4-BE49-F238E27FC236}">
-                <a16:creationId xmlns:a16="http://schemas.microsoft.com/office/drawing/2014/main" id="{E93624F6-136D-4750-9149-31CD6A03E2AE}"/>
+                <a16:creationId xmlns:a16="http://schemas.microsoft.com/office/drawing/2014/main" id="{7273A1EB-B304-44EA-9D1F-722138FE2E2E}"/>
               </a:ext>
             </a:extLst>
           </p:cNvPr>
@@ -3671,7 +3671,7 @@
           <p:cNvPr id="6" name="Consentimento dado livremente? Estudo do">
             <a:extLst xmlns:a="http://schemas.openxmlformats.org/drawingml/2006/main">
               <a:ext uri="{FF2B5EF4-FFF2-40B4-BE49-F238E27FC236}">
-                <a16:creationId xmlns:a16="http://schemas.microsoft.com/office/drawing/2014/main" id="{4CEE16DC-6C12-4F61-B397-5E63205E56D3}"/>
+                <a16:creationId xmlns:a16="http://schemas.microsoft.com/office/drawing/2014/main" id="{89A97001-706D-441F-9DA0-39F398BC5CA7}"/>
               </a:ext>
             </a:extLst>
           </p:cNvPr>
@@ -3751,7 +3751,7 @@
           <p:cNvPr id="7" name="">
             <a:extLst xmlns:a="http://schemas.openxmlformats.org/drawingml/2006/main">
               <a:ext uri="{FF2B5EF4-FFF2-40B4-BE49-F238E27FC236}">
-                <a16:creationId xmlns:a16="http://schemas.microsoft.com/office/drawing/2014/main" id="{AECF129C-5ED1-422E-9E07-4D542F28BB08}"/>
+                <a16:creationId xmlns:a16="http://schemas.microsoft.com/office/drawing/2014/main" id="{F5245925-E796-45DA-AD15-1ADBFD70239A}"/>
               </a:ext>
             </a:extLst>
           </p:cNvPr>
@@ -3781,7 +3781,7 @@
           <p:cNvPr id="8" name="Trung Tin Nguyen, Michael Backes e Ben S">
             <a:extLst xmlns:a="http://schemas.openxmlformats.org/drawingml/2006/main">
               <a:ext uri="{FF2B5EF4-FFF2-40B4-BE49-F238E27FC236}">
-                <a16:creationId xmlns:a16="http://schemas.microsoft.com/office/drawing/2014/main" id="{C68643F6-66C9-43BE-9286-BED809BF7135}"/>
+                <a16:creationId xmlns:a16="http://schemas.microsoft.com/office/drawing/2014/main" id="{D3AF4EE8-A034-473F-8B74-5385629E033A}"/>
               </a:ext>
             </a:extLst>
           </p:cNvPr>
@@ -3838,7 +3838,7 @@
           <p:cNvPr id="9" name="ACM CCS 2022, p. 2369–2383. DOI: 10.1145">
             <a:extLst xmlns:a="http://schemas.openxmlformats.org/drawingml/2006/main">
               <a:ext uri="{FF2B5EF4-FFF2-40B4-BE49-F238E27FC236}">
-                <a16:creationId xmlns:a16="http://schemas.microsoft.com/office/drawing/2014/main" id="{B991ABE2-0776-4FEC-B17C-7C7865E1B816}"/>
+                <a16:creationId xmlns:a16="http://schemas.microsoft.com/office/drawing/2014/main" id="{0CB89FF0-2950-456A-BDB2-3BF8CE48D282}"/>
               </a:ext>
             </a:extLst>
           </p:cNvPr>
@@ -3895,7 +3895,7 @@
           <p:cNvPr id="10" name="Claudio Meireles">
             <a:extLst xmlns:a="http://schemas.openxmlformats.org/drawingml/2006/main">
               <a:ext uri="{FF2B5EF4-FFF2-40B4-BE49-F238E27FC236}">
-                <a16:creationId xmlns:a16="http://schemas.microsoft.com/office/drawing/2014/main" id="{A9E6D3A5-A677-450B-A0CF-B7A911FAD44C}"/>
+                <a16:creationId xmlns:a16="http://schemas.microsoft.com/office/drawing/2014/main" id="{6F32C597-F004-4B0B-918C-1FF263894313}"/>
               </a:ext>
             </a:extLst>
           </p:cNvPr>
@@ -3952,7 +3952,7 @@
           <p:cNvPr id="11" name="Projeto Capstone I · IDP · 29/09/2026">
             <a:extLst xmlns:a="http://schemas.openxmlformats.org/drawingml/2006/main">
               <a:ext uri="{FF2B5EF4-FFF2-40B4-BE49-F238E27FC236}">
-                <a16:creationId xmlns:a16="http://schemas.microsoft.com/office/drawing/2014/main" id="{23A2781B-CEC9-4C4E-8B9E-245367F80C66}"/>
+                <a16:creationId xmlns:a16="http://schemas.microsoft.com/office/drawing/2014/main" id="{A660C991-9212-420F-A167-AA1509D480D8}"/>
               </a:ext>
             </a:extLst>
           </p:cNvPr>
@@ -4009,7 +4009,7 @@
           <p:cNvPr id="12" name="01 / 23">
             <a:extLst xmlns:a="http://schemas.openxmlformats.org/drawingml/2006/main">
               <a:ext uri="{FF2B5EF4-FFF2-40B4-BE49-F238E27FC236}">
-                <a16:creationId xmlns:a16="http://schemas.microsoft.com/office/drawing/2014/main" id="{A61CC503-700A-445D-84B0-62D90F8C0967}"/>
+                <a16:creationId xmlns:a16="http://schemas.microsoft.com/office/drawing/2014/main" id="{D6AB57DA-3A94-44CB-B0BA-2362666A64D4}"/>
               </a:ext>
             </a:extLst>
           </p:cNvPr>
@@ -4064,7 +4064,7 @@
     </p:spTree>
     <p:extLst>
       <p:ext uri="{BB962C8B-B14F-4D97-AF65-F5344CB8AC3E}">
-        <p14:creationId xmlns:p14="http://schemas.microsoft.com/office/powerpoint/2010/main" val="634229451"/>
+        <p14:creationId xmlns:p14="http://schemas.microsoft.com/office/powerpoint/2010/main" val="972569737"/>
       </p:ext>
     </p:extLst>
   </p:cSld>
@@ -4095,7 +4095,7 @@
           <p:cNvPr id="20" name="">
             <a:extLst xmlns:a="http://schemas.openxmlformats.org/drawingml/2006/main">
               <a:ext uri="{FF2B5EF4-FFF2-40B4-BE49-F238E27FC236}">
-                <a16:creationId xmlns:a16="http://schemas.microsoft.com/office/drawing/2014/main" id="{22F7B65F-A0CB-4B69-A225-61DE15893DCE}"/>
+                <a16:creationId xmlns:a16="http://schemas.microsoft.com/office/drawing/2014/main" id="{F2666A00-BBB1-4F73-9AF5-72AFE9ED2B1F}"/>
               </a:ext>
             </a:extLst>
           </p:cNvPr>
@@ -4125,7 +4125,7 @@
           <p:cNvPr id="2" name="ANÁLISE VISUAL DA INTRODUÇÃO">
             <a:extLst xmlns:a="http://schemas.openxmlformats.org/drawingml/2006/main">
               <a:ext uri="{FF2B5EF4-FFF2-40B4-BE49-F238E27FC236}">
-                <a16:creationId xmlns:a16="http://schemas.microsoft.com/office/drawing/2014/main" id="{33AC7AE4-4BA8-4A64-B36C-BAD8F7536E4B}"/>
+                <a16:creationId xmlns:a16="http://schemas.microsoft.com/office/drawing/2014/main" id="{AC5D6685-E491-4225-8BEE-40568EB499A2}"/>
               </a:ext>
             </a:extLst>
           </p:cNvPr>
@@ -4182,7 +4182,7 @@
           <p:cNvPr id="3" name="Figura 1: recusa e escolhas mais complex">
             <a:extLst xmlns:a="http://schemas.openxmlformats.org/drawingml/2006/main">
               <a:ext uri="{FF2B5EF4-FFF2-40B4-BE49-F238E27FC236}">
-                <a16:creationId xmlns:a16="http://schemas.microsoft.com/office/drawing/2014/main" id="{FB8CF019-6F52-4840-87C3-1E195DAE92BC}"/>
+                <a16:creationId xmlns:a16="http://schemas.microsoft.com/office/drawing/2014/main" id="{98AC3608-8779-4C92-ADC4-7A20EA135253}"/>
               </a:ext>
             </a:extLst>
           </p:cNvPr>
@@ -4239,7 +4239,7 @@
           <p:cNvPr id="4" name="">
             <a:extLst xmlns:a="http://schemas.openxmlformats.org/drawingml/2006/main">
               <a:ext uri="{FF2B5EF4-FFF2-40B4-BE49-F238E27FC236}">
-                <a16:creationId xmlns:a16="http://schemas.microsoft.com/office/drawing/2014/main" id="{8524D9B9-CF45-43EA-A539-47C023914023}"/>
+                <a16:creationId xmlns:a16="http://schemas.microsoft.com/office/drawing/2014/main" id="{3051DDE1-80D3-4ECE-8F9E-E05E697521BA}"/>
               </a:ext>
             </a:extLst>
           </p:cNvPr>
@@ -4269,7 +4269,7 @@
           <p:cNvPr id="5" name="">
             <a:extLst xmlns:a="http://schemas.openxmlformats.org/drawingml/2006/main">
               <a:ext uri="{FF2B5EF4-FFF2-40B4-BE49-F238E27FC236}">
-                <a16:creationId xmlns:a16="http://schemas.microsoft.com/office/drawing/2014/main" id="{D3F2BB14-3303-4DC1-A820-FD5AE1EBD1E4}"/>
+                <a16:creationId xmlns:a16="http://schemas.microsoft.com/office/drawing/2014/main" id="{BFD58318-8C8F-4DBF-BDA2-3BE60911E11C}"/>
               </a:ext>
             </a:extLst>
           </p:cNvPr>
@@ -4299,7 +4299,7 @@
           <p:cNvPr id="6" name="Nguyen, Backes e Stock (2022), Figura 1 ">
             <a:extLst xmlns:a="http://schemas.openxmlformats.org/drawingml/2006/main">
               <a:ext uri="{FF2B5EF4-FFF2-40B4-BE49-F238E27FC236}">
-                <a16:creationId xmlns:a16="http://schemas.microsoft.com/office/drawing/2014/main" id="{723B631E-6913-413D-BCA2-739668D70179}"/>
+                <a16:creationId xmlns:a16="http://schemas.microsoft.com/office/drawing/2014/main" id="{053E2F1B-17EF-4E73-90A2-BF52D3C15B11}"/>
               </a:ext>
             </a:extLst>
           </p:cNvPr>
@@ -4356,7 +4356,7 @@
           <p:cNvPr id="7" name="10 / 23">
             <a:extLst xmlns:a="http://schemas.openxmlformats.org/drawingml/2006/main">
               <a:ext uri="{FF2B5EF4-FFF2-40B4-BE49-F238E27FC236}">
-                <a16:creationId xmlns:a16="http://schemas.microsoft.com/office/drawing/2014/main" id="{EB78F7EE-EE6A-4FDD-BD60-4AA5CC3CCEE4}"/>
+                <a16:creationId xmlns:a16="http://schemas.microsoft.com/office/drawing/2014/main" id="{A0CEA681-39A7-4F1B-BCF9-7A8E4881E7BB}"/>
               </a:ext>
             </a:extLst>
           </p:cNvPr>
@@ -4417,7 +4417,7 @@
           <p:nvPr/>
         </p:nvPicPr>
         <p:blipFill>
-          <a:blip xmlns:r="http://schemas.openxmlformats.org/officeDocument/2006/relationships" xmlns:a="http://schemas.openxmlformats.org/drawingml/2006/main" r:embed="Rabccc4ab4c914566"/>
+          <a:blip xmlns:r="http://schemas.openxmlformats.org/officeDocument/2006/relationships" xmlns:a="http://schemas.openxmlformats.org/drawingml/2006/main" r:embed="R9e9624f223d2476b"/>
           <a:stretch xmlns:a="http://schemas.openxmlformats.org/drawingml/2006/main"/>
         </p:blipFill>
         <p:spPr>
@@ -4435,7 +4435,7 @@
           <p:cNvPr id="9" name="(d)">
             <a:extLst xmlns:a="http://schemas.openxmlformats.org/drawingml/2006/main">
               <a:ext uri="{FF2B5EF4-FFF2-40B4-BE49-F238E27FC236}">
-                <a16:creationId xmlns:a16="http://schemas.microsoft.com/office/drawing/2014/main" id="{37A2D73C-6453-4462-B774-BBA7561BD3B6}"/>
+                <a16:creationId xmlns:a16="http://schemas.microsoft.com/office/drawing/2014/main" id="{46AF3057-0AE8-49C1-9D6A-F289B5E74FD6}"/>
               </a:ext>
             </a:extLst>
           </p:cNvPr>
@@ -4496,7 +4496,7 @@
           <p:nvPr/>
         </p:nvPicPr>
         <p:blipFill>
-          <a:blip xmlns:r="http://schemas.openxmlformats.org/officeDocument/2006/relationships" xmlns:a="http://schemas.openxmlformats.org/drawingml/2006/main" r:embed="R21feb75d04d445b8"/>
+          <a:blip xmlns:r="http://schemas.openxmlformats.org/officeDocument/2006/relationships" xmlns:a="http://schemas.openxmlformats.org/drawingml/2006/main" r:embed="R8292f32e217641c6"/>
           <a:stretch xmlns:a="http://schemas.openxmlformats.org/drawingml/2006/main"/>
         </p:blipFill>
         <p:spPr>
@@ -4514,7 +4514,7 @@
           <p:cNvPr id="11" name="(e)">
             <a:extLst xmlns:a="http://schemas.openxmlformats.org/drawingml/2006/main">
               <a:ext uri="{FF2B5EF4-FFF2-40B4-BE49-F238E27FC236}">
-                <a16:creationId xmlns:a16="http://schemas.microsoft.com/office/drawing/2014/main" id="{9856D1F9-8ADC-4F25-8D79-9EBB076A510B}"/>
+                <a16:creationId xmlns:a16="http://schemas.microsoft.com/office/drawing/2014/main" id="{D92C3257-3698-49F2-89E0-2BE52D30CA03}"/>
               </a:ext>
             </a:extLst>
           </p:cNvPr>
@@ -4575,7 +4575,7 @@
           <p:nvPr/>
         </p:nvPicPr>
         <p:blipFill>
-          <a:blip xmlns:r="http://schemas.openxmlformats.org/officeDocument/2006/relationships" xmlns:a="http://schemas.openxmlformats.org/drawingml/2006/main" r:embed="R1cd72a1422ab46a6"/>
+          <a:blip xmlns:r="http://schemas.openxmlformats.org/officeDocument/2006/relationships" xmlns:a="http://schemas.openxmlformats.org/drawingml/2006/main" r:embed="R62f26e9df52041a7"/>
           <a:stretch xmlns:a="http://schemas.openxmlformats.org/drawingml/2006/main"/>
         </p:blipFill>
         <p:spPr>
@@ -4593,7 +4593,7 @@
           <p:cNvPr id="13" name="(f)">
             <a:extLst xmlns:a="http://schemas.openxmlformats.org/drawingml/2006/main">
               <a:ext uri="{FF2B5EF4-FFF2-40B4-BE49-F238E27FC236}">
-                <a16:creationId xmlns:a16="http://schemas.microsoft.com/office/drawing/2014/main" id="{CF488BD7-3F48-4DA4-95E4-FD853347924F}"/>
+                <a16:creationId xmlns:a16="http://schemas.microsoft.com/office/drawing/2014/main" id="{0ACC720C-B58A-4305-9462-101481B3FDAA}"/>
               </a:ext>
             </a:extLst>
           </p:cNvPr>
@@ -4650,7 +4650,7 @@
           <p:cNvPr id="14" name="EN">
             <a:extLst xmlns:a="http://schemas.openxmlformats.org/drawingml/2006/main">
               <a:ext uri="{FF2B5EF4-FFF2-40B4-BE49-F238E27FC236}">
-                <a16:creationId xmlns:a16="http://schemas.microsoft.com/office/drawing/2014/main" id="{F80B7720-BC04-43E7-B30A-C0E049AE978F}"/>
+                <a16:creationId xmlns:a16="http://schemas.microsoft.com/office/drawing/2014/main" id="{4BD0D7BA-940C-4C44-911E-07E7FFDBC813}"/>
               </a:ext>
             </a:extLst>
           </p:cNvPr>
@@ -4707,7 +4707,7 @@
           <p:cNvPr id="15" name="“the consent dialog in Figure 1 (f) show">
             <a:extLst xmlns:a="http://schemas.openxmlformats.org/drawingml/2006/main">
               <a:ext uri="{FF2B5EF4-FFF2-40B4-BE49-F238E27FC236}">
-                <a16:creationId xmlns:a16="http://schemas.microsoft.com/office/drawing/2014/main" id="{69B6036F-92C2-4F38-9497-19418609BCD2}"/>
+                <a16:creationId xmlns:a16="http://schemas.microsoft.com/office/drawing/2014/main" id="{5B05E793-BB58-4F66-BC22-A36C99440F12}"/>
               </a:ext>
             </a:extLst>
           </p:cNvPr>
@@ -4764,7 +4764,7 @@
           <p:cNvPr id="16" name="PT">
             <a:extLst xmlns:a="http://schemas.openxmlformats.org/drawingml/2006/main">
               <a:ext uri="{FF2B5EF4-FFF2-40B4-BE49-F238E27FC236}">
-                <a16:creationId xmlns:a16="http://schemas.microsoft.com/office/drawing/2014/main" id="{5248491C-1B56-4D3A-98B3-A89A49CD8133}"/>
+                <a16:creationId xmlns:a16="http://schemas.microsoft.com/office/drawing/2014/main" id="{7119F553-6348-4956-A824-465D4CE8DF3F}"/>
               </a:ext>
             </a:extLst>
           </p:cNvPr>
@@ -4821,7 +4821,7 @@
           <p:cNvPr id="17" name="O diálogo da Figura 1(f) mostra mecanism">
             <a:extLst xmlns:a="http://schemas.openxmlformats.org/drawingml/2006/main">
               <a:ext uri="{FF2B5EF4-FFF2-40B4-BE49-F238E27FC236}">
-                <a16:creationId xmlns:a16="http://schemas.microsoft.com/office/drawing/2014/main" id="{6EA63739-C709-4C6D-A7E1-93DFF4676848}"/>
+                <a16:creationId xmlns:a16="http://schemas.microsoft.com/office/drawing/2014/main" id="{B36E6EEF-46EE-445A-81B0-A2A74A04FA82}"/>
               </a:ext>
             </a:extLst>
           </p:cNvPr>
@@ -4878,7 +4878,7 @@
           <p:cNvPr id="18" name="ANÁLISE DO SEMINÁRIO">
             <a:extLst xmlns:a="http://schemas.openxmlformats.org/drawingml/2006/main">
               <a:ext uri="{FF2B5EF4-FFF2-40B4-BE49-F238E27FC236}">
-                <a16:creationId xmlns:a16="http://schemas.microsoft.com/office/drawing/2014/main" id="{A675C256-CF0D-4F8F-AC7A-BCC1BC8B7CF5}"/>
+                <a16:creationId xmlns:a16="http://schemas.microsoft.com/office/drawing/2014/main" id="{848E0164-C00C-470F-87E6-FF17B43FE75A}"/>
               </a:ext>
             </a:extLst>
           </p:cNvPr>
@@ -4935,7 +4935,7 @@
           <p:cNvPr id="19" name="As opções visíveis precisam ser&#10;confront">
             <a:extLst xmlns:a="http://schemas.openxmlformats.org/drawingml/2006/main">
               <a:ext uri="{FF2B5EF4-FFF2-40B4-BE49-F238E27FC236}">
-                <a16:creationId xmlns:a16="http://schemas.microsoft.com/office/drawing/2014/main" id="{9043EF93-2301-49D5-A362-FCF197D720D8}"/>
+                <a16:creationId xmlns:a16="http://schemas.microsoft.com/office/drawing/2014/main" id="{5337209B-E1BF-4CD0-800C-D5D978502000}"/>
               </a:ext>
             </a:extLst>
           </p:cNvPr>
@@ -5036,7 +5036,7 @@
     </p:spTree>
     <p:extLst>
       <p:ext uri="{BB962C8B-B14F-4D97-AF65-F5344CB8AC3E}">
-        <p14:creationId xmlns:p14="http://schemas.microsoft.com/office/powerpoint/2010/main" val="569919866"/>
+        <p14:creationId xmlns:p14="http://schemas.microsoft.com/office/powerpoint/2010/main" val="236519176"/>
       </p:ext>
     </p:extLst>
   </p:cSld>
@@ -5067,7 +5067,7 @@
           <p:cNvPr id="13" name="">
             <a:extLst xmlns:a="http://schemas.openxmlformats.org/drawingml/2006/main">
               <a:ext uri="{FF2B5EF4-FFF2-40B4-BE49-F238E27FC236}">
-                <a16:creationId xmlns:a16="http://schemas.microsoft.com/office/drawing/2014/main" id="{04082747-7CBA-4934-B3BB-A58C57F31474}"/>
+                <a16:creationId xmlns:a16="http://schemas.microsoft.com/office/drawing/2014/main" id="{D1940017-4E25-4FB8-812C-16D98FD83936}"/>
               </a:ext>
             </a:extLst>
           </p:cNvPr>
@@ -5097,7 +5097,7 @@
           <p:cNvPr id="2" name="ANÁLISE DA FUNDAMENTAÇÃO">
             <a:extLst xmlns:a="http://schemas.openxmlformats.org/drawingml/2006/main">
               <a:ext uri="{FF2B5EF4-FFF2-40B4-BE49-F238E27FC236}">
-                <a16:creationId xmlns:a16="http://schemas.microsoft.com/office/drawing/2014/main" id="{4B4CD703-8EC6-450C-BED6-D713F8171DFE}"/>
+                <a16:creationId xmlns:a16="http://schemas.microsoft.com/office/drawing/2014/main" id="{EDD06CB2-556B-4CC8-8973-2A74C4223FCF}"/>
               </a:ext>
             </a:extLst>
           </p:cNvPr>
@@ -5154,7 +5154,7 @@
           <p:cNvPr id="3" name="Marco jurídico: critérios usados no estu">
             <a:extLst xmlns:a="http://schemas.openxmlformats.org/drawingml/2006/main">
               <a:ext uri="{FF2B5EF4-FFF2-40B4-BE49-F238E27FC236}">
-                <a16:creationId xmlns:a16="http://schemas.microsoft.com/office/drawing/2014/main" id="{9F0116E4-A5DB-4F65-973A-8E1EB0D6667D}"/>
+                <a16:creationId xmlns:a16="http://schemas.microsoft.com/office/drawing/2014/main" id="{85C69946-B3F0-4D6A-AA8A-A90AB1CE58B3}"/>
               </a:ext>
             </a:extLst>
           </p:cNvPr>
@@ -5211,7 +5211,7 @@
           <p:cNvPr id="4" name="">
             <a:extLst xmlns:a="http://schemas.openxmlformats.org/drawingml/2006/main">
               <a:ext uri="{FF2B5EF4-FFF2-40B4-BE49-F238E27FC236}">
-                <a16:creationId xmlns:a16="http://schemas.microsoft.com/office/drawing/2014/main" id="{30348539-28A7-4E22-8968-ADCDC1FC349B}"/>
+                <a16:creationId xmlns:a16="http://schemas.microsoft.com/office/drawing/2014/main" id="{D728A761-01F0-4E66-B135-84DAB58E814E}"/>
               </a:ext>
             </a:extLst>
           </p:cNvPr>
@@ -5241,7 +5241,7 @@
           <p:cNvPr id="5" name="">
             <a:extLst xmlns:a="http://schemas.openxmlformats.org/drawingml/2006/main">
               <a:ext uri="{FF2B5EF4-FFF2-40B4-BE49-F238E27FC236}">
-                <a16:creationId xmlns:a16="http://schemas.microsoft.com/office/drawing/2014/main" id="{13C241D2-A069-4E38-B2A1-6C2EE7381320}"/>
+                <a16:creationId xmlns:a16="http://schemas.microsoft.com/office/drawing/2014/main" id="{2908B8FD-3DD3-4A82-BCD2-3B180C5A0129}"/>
               </a:ext>
             </a:extLst>
           </p:cNvPr>
@@ -5271,7 +5271,7 @@
           <p:cNvPr id="6" name="Nguyen, Backes e Stock (2022), Seção 2, ">
             <a:extLst xmlns:a="http://schemas.openxmlformats.org/drawingml/2006/main">
               <a:ext uri="{FF2B5EF4-FFF2-40B4-BE49-F238E27FC236}">
-                <a16:creationId xmlns:a16="http://schemas.microsoft.com/office/drawing/2014/main" id="{566EF3A9-AEA3-4B5C-8637-1E450324A398}"/>
+                <a16:creationId xmlns:a16="http://schemas.microsoft.com/office/drawing/2014/main" id="{2A5F5159-F44C-4CFA-9DF3-69AC7EBF2780}"/>
               </a:ext>
             </a:extLst>
           </p:cNvPr>
@@ -5318,7 +5318,7 @@
                 <a:ea typeface="Arial"/>
                 <a:cs typeface="Arial"/>
               </a:rPr>
-              <a:t>Nguyen, Backes e Stock (2022), Seção 2, p. 3–4. Síntese da análise dos autores, não avaliação jurídica independente.</a:t>
+              <a:t>Nguyen, Backes e Stock (2022), Seção 2, p. 3–4; citação da nota 1, p. 2–3. Critérios e ressalva dos autores.</a:t>
             </a:r>
           </a:p>
         </p:txBody>
@@ -5328,7 +5328,7 @@
           <p:cNvPr id="7" name="11 / 23">
             <a:extLst xmlns:a="http://schemas.openxmlformats.org/drawingml/2006/main">
               <a:ext uri="{FF2B5EF4-FFF2-40B4-BE49-F238E27FC236}">
-                <a16:creationId xmlns:a16="http://schemas.microsoft.com/office/drawing/2014/main" id="{EE9EA350-4229-4683-8648-8FF509194862}"/>
+                <a16:creationId xmlns:a16="http://schemas.microsoft.com/office/drawing/2014/main" id="{3B618ECF-511D-4C8F-A94D-67C124B12814}"/>
               </a:ext>
             </a:extLst>
           </p:cNvPr>
@@ -5927,7 +5927,7 @@
           <p:cNvPr id="9" name="EN">
             <a:extLst xmlns:a="http://schemas.openxmlformats.org/drawingml/2006/main">
               <a:ext uri="{FF2B5EF4-FFF2-40B4-BE49-F238E27FC236}">
-                <a16:creationId xmlns:a16="http://schemas.microsoft.com/office/drawing/2014/main" id="{DE5B3F42-247A-4847-9DA6-68053D98CE5D}"/>
+                <a16:creationId xmlns:a16="http://schemas.microsoft.com/office/drawing/2014/main" id="{017D0D9D-059C-4F5E-9007-87D4F28330B9}"/>
               </a:ext>
             </a:extLst>
           </p:cNvPr>
@@ -5984,7 +5984,7 @@
           <p:cNvPr id="10" name="“only a judicial ruling can provide lega">
             <a:extLst xmlns:a="http://schemas.openxmlformats.org/drawingml/2006/main">
               <a:ext uri="{FF2B5EF4-FFF2-40B4-BE49-F238E27FC236}">
-                <a16:creationId xmlns:a16="http://schemas.microsoft.com/office/drawing/2014/main" id="{65711CDD-FF3E-4553-A1CB-EAE0C4E99535}"/>
+                <a16:creationId xmlns:a16="http://schemas.microsoft.com/office/drawing/2014/main" id="{A225A4E7-6850-487A-BF6B-2774EFE143C6}"/>
               </a:ext>
             </a:extLst>
           </p:cNvPr>
@@ -6041,7 +6041,7 @@
           <p:cNvPr id="11" name="PT">
             <a:extLst xmlns:a="http://schemas.openxmlformats.org/drawingml/2006/main">
               <a:ext uri="{FF2B5EF4-FFF2-40B4-BE49-F238E27FC236}">
-                <a16:creationId xmlns:a16="http://schemas.microsoft.com/office/drawing/2014/main" id="{8AE9CC72-3A9F-4094-A5EF-651FC07C00EC}"/>
+                <a16:creationId xmlns:a16="http://schemas.microsoft.com/office/drawing/2014/main" id="{069C15C1-13DF-4F69-92B3-A9CBA479C520}"/>
               </a:ext>
             </a:extLst>
           </p:cNvPr>
@@ -6098,7 +6098,7 @@
           <p:cNvPr id="12" name="Somente uma decisão judicial pode propor">
             <a:extLst xmlns:a="http://schemas.openxmlformats.org/drawingml/2006/main">
               <a:ext uri="{FF2B5EF4-FFF2-40B4-BE49-F238E27FC236}">
-                <a16:creationId xmlns:a16="http://schemas.microsoft.com/office/drawing/2014/main" id="{D42B8899-87DF-4535-B616-6B83026023B9}"/>
+                <a16:creationId xmlns:a16="http://schemas.microsoft.com/office/drawing/2014/main" id="{3E59D68F-D70C-49FB-80E3-DB1D672E2A94}"/>
               </a:ext>
             </a:extLst>
           </p:cNvPr>
@@ -6153,7 +6153,7 @@
     </p:spTree>
     <p:extLst>
       <p:ext uri="{BB962C8B-B14F-4D97-AF65-F5344CB8AC3E}">
-        <p14:creationId xmlns:p14="http://schemas.microsoft.com/office/powerpoint/2010/main" val="1262260964"/>
+        <p14:creationId xmlns:p14="http://schemas.microsoft.com/office/powerpoint/2010/main" val="1904828299"/>
       </p:ext>
     </p:extLst>
   </p:cSld>
@@ -6184,7 +6184,7 @@
           <p:cNvPr id="31" name="">
             <a:extLst xmlns:a="http://schemas.openxmlformats.org/drawingml/2006/main">
               <a:ext uri="{FF2B5EF4-FFF2-40B4-BE49-F238E27FC236}">
-                <a16:creationId xmlns:a16="http://schemas.microsoft.com/office/drawing/2014/main" id="{A1958DEA-E683-4372-ABD3-E2DCDEFE243D}"/>
+                <a16:creationId xmlns:a16="http://schemas.microsoft.com/office/drawing/2014/main" id="{4A605B04-4658-453E-8B16-56817ED1B21D}"/>
               </a:ext>
             </a:extLst>
           </p:cNvPr>
@@ -6214,7 +6214,7 @@
           <p:cNvPr id="2" name="METODOLOGIA">
             <a:extLst xmlns:a="http://schemas.openxmlformats.org/drawingml/2006/main">
               <a:ext uri="{FF2B5EF4-FFF2-40B4-BE49-F238E27FC236}">
-                <a16:creationId xmlns:a16="http://schemas.microsoft.com/office/drawing/2014/main" id="{CCBE2055-3A53-42B8-A28C-45C364B9B0AF}"/>
+                <a16:creationId xmlns:a16="http://schemas.microsoft.com/office/drawing/2014/main" id="{557BFED9-9B21-4FE1-9C2F-7F8A9B8EA7E5}"/>
               </a:ext>
             </a:extLst>
           </p:cNvPr>
@@ -6271,7 +6271,7 @@
           <p:cNvPr id="3" name="Método I: identificação dos avisos">
             <a:extLst xmlns:a="http://schemas.openxmlformats.org/drawingml/2006/main">
               <a:ext uri="{FF2B5EF4-FFF2-40B4-BE49-F238E27FC236}">
-                <a16:creationId xmlns:a16="http://schemas.microsoft.com/office/drawing/2014/main" id="{2279FCF7-A712-4B86-8A81-B0086C20BD45}"/>
+                <a16:creationId xmlns:a16="http://schemas.microsoft.com/office/drawing/2014/main" id="{97F291F7-F7C6-4820-BA6C-229E79E2D83B}"/>
               </a:ext>
             </a:extLst>
           </p:cNvPr>
@@ -6328,7 +6328,7 @@
           <p:cNvPr id="4" name="">
             <a:extLst xmlns:a="http://schemas.openxmlformats.org/drawingml/2006/main">
               <a:ext uri="{FF2B5EF4-FFF2-40B4-BE49-F238E27FC236}">
-                <a16:creationId xmlns:a16="http://schemas.microsoft.com/office/drawing/2014/main" id="{4258C0D3-914B-49F5-ADE3-AA8C408050F6}"/>
+                <a16:creationId xmlns:a16="http://schemas.microsoft.com/office/drawing/2014/main" id="{8E588312-8F3C-4122-9A46-2DAA6EA8CAAF}"/>
               </a:ext>
             </a:extLst>
           </p:cNvPr>
@@ -6358,7 +6358,7 @@
           <p:cNvPr id="5" name="">
             <a:extLst xmlns:a="http://schemas.openxmlformats.org/drawingml/2006/main">
               <a:ext uri="{FF2B5EF4-FFF2-40B4-BE49-F238E27FC236}">
-                <a16:creationId xmlns:a16="http://schemas.microsoft.com/office/drawing/2014/main" id="{C248C8AE-0ACE-4F71-A194-2A58C597A400}"/>
+                <a16:creationId xmlns:a16="http://schemas.microsoft.com/office/drawing/2014/main" id="{9E5591A6-8154-4CC5-B468-032855DD7907}"/>
               </a:ext>
             </a:extLst>
           </p:cNvPr>
@@ -6388,7 +6388,7 @@
           <p:cNvPr id="6" name="Nguyen, Backes e Stock (2022), Seções 3,">
             <a:extLst xmlns:a="http://schemas.openxmlformats.org/drawingml/2006/main">
               <a:ext uri="{FF2B5EF4-FFF2-40B4-BE49-F238E27FC236}">
-                <a16:creationId xmlns:a16="http://schemas.microsoft.com/office/drawing/2014/main" id="{B27AC270-B3F2-45AD-B83E-15E31EB35531}"/>
+                <a16:creationId xmlns:a16="http://schemas.microsoft.com/office/drawing/2014/main" id="{54E87FC5-1167-47DB-A7B6-C8E0512D3F11}"/>
               </a:ext>
             </a:extLst>
           </p:cNvPr>
@@ -6445,7 +6445,7 @@
           <p:cNvPr id="7" name="12 / 23">
             <a:extLst xmlns:a="http://schemas.openxmlformats.org/drawingml/2006/main">
               <a:ext uri="{FF2B5EF4-FFF2-40B4-BE49-F238E27FC236}">
-                <a16:creationId xmlns:a16="http://schemas.microsoft.com/office/drawing/2014/main" id="{344ED782-AC42-4058-973F-DE63806DBF6D}"/>
+                <a16:creationId xmlns:a16="http://schemas.microsoft.com/office/drawing/2014/main" id="{E414BF8D-810B-4816-97F3-0AE949D42507}"/>
               </a:ext>
             </a:extLst>
           </p:cNvPr>
@@ -6506,7 +6506,7 @@
           <p:nvPr/>
         </p:nvPicPr>
         <p:blipFill>
-          <a:blip xmlns:r="http://schemas.openxmlformats.org/officeDocument/2006/relationships" xmlns:a="http://schemas.openxmlformats.org/drawingml/2006/main" r:embed="R42bbba3d76c340a0"/>
+          <a:blip xmlns:r="http://schemas.openxmlformats.org/officeDocument/2006/relationships" xmlns:a="http://schemas.openxmlformats.org/drawingml/2006/main" r:embed="R921cd49305ba4f55"/>
           <a:stretch xmlns:a="http://schemas.openxmlformats.org/drawingml/2006/main"/>
         </p:blipFill>
         <p:spPr>
@@ -6524,7 +6524,7 @@
           <p:cNvPr id="9" name="Figura 2 do artigo: corpus e resultados ">
             <a:extLst xmlns:a="http://schemas.openxmlformats.org/drawingml/2006/main">
               <a:ext uri="{FF2B5EF4-FFF2-40B4-BE49-F238E27FC236}">
-                <a16:creationId xmlns:a16="http://schemas.microsoft.com/office/drawing/2014/main" id="{7ED4BAE8-5102-40E0-A179-8B4F017D9E8A}"/>
+                <a16:creationId xmlns:a16="http://schemas.microsoft.com/office/drawing/2014/main" id="{72B0D0CC-7E12-4C55-A045-3C1B597919C5}"/>
               </a:ext>
             </a:extLst>
           </p:cNvPr>
@@ -6581,7 +6581,7 @@
           <p:cNvPr id="10" name="CRITÉRIOS DO CORPUS">
             <a:extLst xmlns:a="http://schemas.openxmlformats.org/drawingml/2006/main">
               <a:ext uri="{FF2B5EF4-FFF2-40B4-BE49-F238E27FC236}">
-                <a16:creationId xmlns:a16="http://schemas.microsoft.com/office/drawing/2014/main" id="{523B5D89-46CD-459C-AE31-539D4A7E1D17}"/>
+                <a16:creationId xmlns:a16="http://schemas.microsoft.com/office/drawing/2014/main" id="{0F1C2323-E4E5-4FA8-83B4-FF4607CE7726}"/>
               </a:ext>
             </a:extLst>
           </p:cNvPr>
@@ -6638,7 +6638,7 @@
           <p:cNvPr id="11" name="Apps gratuitos, ao menos 10.000 download">
             <a:extLst xmlns:a="http://schemas.openxmlformats.org/drawingml/2006/main">
               <a:ext uri="{FF2B5EF4-FFF2-40B4-BE49-F238E27FC236}">
-                <a16:creationId xmlns:a16="http://schemas.microsoft.com/office/drawing/2014/main" id="{BDFBD43B-5D19-415C-BF35-477EE9D1D2C5}"/>
+                <a16:creationId xmlns:a16="http://schemas.microsoft.com/office/drawing/2014/main" id="{B82B4AAF-2CFC-4309-BEC3-D4119C6279C4}"/>
               </a:ext>
             </a:extLst>
           </p:cNvPr>
@@ -6731,7 +6731,7 @@
                 <a:ea typeface="Arial"/>
                 <a:cs typeface="Arial"/>
               </a:rPr>
-              <a:t>Coleta: out/2021 a mar/2022, em país do EEE.</a:t>
+              <a:t>Coleta: out/2021 a mar/2022, no Espaço Econômico Europeu (EEE).</a:t>
             </a:r>
           </a:p>
         </p:txBody>
@@ -6741,7 +6741,7 @@
           <p:cNvPr id="12" name="">
             <a:extLst xmlns:a="http://schemas.openxmlformats.org/drawingml/2006/main">
               <a:ext uri="{FF2B5EF4-FFF2-40B4-BE49-F238E27FC236}">
-                <a16:creationId xmlns:a16="http://schemas.microsoft.com/office/drawing/2014/main" id="{A7B636BF-3A4E-4F85-8F6B-417C24F707D7}"/>
+                <a16:creationId xmlns:a16="http://schemas.microsoft.com/office/drawing/2014/main" id="{AAE783F2-85CF-414F-8298-2CC0D2EC296C}"/>
               </a:ext>
             </a:extLst>
           </p:cNvPr>
@@ -6768,10 +6768,10 @@
       </p:sp>
       <p:sp>
         <p:nvSpPr>
-          <p:cNvPr id="13" name="Screenshots">
-            <a:extLst xmlns:a="http://schemas.openxmlformats.org/drawingml/2006/main">
-              <a:ext uri="{FF2B5EF4-FFF2-40B4-BE49-F238E27FC236}">
-                <a16:creationId xmlns:a16="http://schemas.microsoft.com/office/drawing/2014/main" id="{3C9112FE-F333-4082-9B0D-BED1D76444AD}"/>
+          <p:cNvPr id="13" name="Capturas de tela">
+            <a:extLst xmlns:a="http://schemas.openxmlformats.org/drawingml/2006/main">
+              <a:ext uri="{FF2B5EF4-FFF2-40B4-BE49-F238E27FC236}">
+                <a16:creationId xmlns:a16="http://schemas.microsoft.com/office/drawing/2014/main" id="{846347A9-2D31-471D-B9A5-8910FCFFA405}"/>
               </a:ext>
             </a:extLst>
           </p:cNvPr>
@@ -6818,7 +6818,7 @@
                 <a:ea typeface="Arial"/>
                 <a:cs typeface="Arial"/>
               </a:rPr>
-              <a:t>Screenshots</a:t>
+              <a:t>Capturas de tela</a:t>
             </a:r>
           </a:p>
         </p:txBody>
@@ -6828,7 +6828,7 @@
           <p:cNvPr id="14" name="captura após 5 s">
             <a:extLst xmlns:a="http://schemas.openxmlformats.org/drawingml/2006/main">
               <a:ext uri="{FF2B5EF4-FFF2-40B4-BE49-F238E27FC236}">
-                <a16:creationId xmlns:a16="http://schemas.microsoft.com/office/drawing/2014/main" id="{4BD344F3-18C8-4CB7-9DD7-0F6F19AC5C6B}"/>
+                <a16:creationId xmlns:a16="http://schemas.microsoft.com/office/drawing/2014/main" id="{9326E99A-5FB1-4665-A43D-A9BBB33B81DB}"/>
               </a:ext>
             </a:extLst>
           </p:cNvPr>
@@ -6885,7 +6885,7 @@
           <p:cNvPr id="15" name="">
             <a:extLst xmlns:a="http://schemas.openxmlformats.org/drawingml/2006/main">
               <a:ext uri="{FF2B5EF4-FFF2-40B4-BE49-F238E27FC236}">
-                <a16:creationId xmlns:a16="http://schemas.microsoft.com/office/drawing/2014/main" id="{5D2C97AE-50CA-4F0A-BAA3-02EC1621949A}"/>
+                <a16:creationId xmlns:a16="http://schemas.microsoft.com/office/drawing/2014/main" id="{AE5D6565-0104-4B2C-B09C-B56B9B4237FF}"/>
               </a:ext>
             </a:extLst>
           </p:cNvPr>
@@ -6915,7 +6915,7 @@
           <p:cNvPr id="16" name="">
             <a:extLst xmlns:a="http://schemas.openxmlformats.org/drawingml/2006/main">
               <a:ext uri="{FF2B5EF4-FFF2-40B4-BE49-F238E27FC236}">
-                <a16:creationId xmlns:a16="http://schemas.microsoft.com/office/drawing/2014/main" id="{7D36EA67-37CC-4D9A-A237-0B8192E0DBE8}"/>
+                <a16:creationId xmlns:a16="http://schemas.microsoft.com/office/drawing/2014/main" id="{CCE7A8C9-758A-4F8A-8EDD-F5F946BCB63F}"/>
               </a:ext>
             </a:extLst>
           </p:cNvPr>
@@ -6945,7 +6945,7 @@
           <p:cNvPr id="17" name="OCR">
             <a:extLst xmlns:a="http://schemas.openxmlformats.org/drawingml/2006/main">
               <a:ext uri="{FF2B5EF4-FFF2-40B4-BE49-F238E27FC236}">
-                <a16:creationId xmlns:a16="http://schemas.microsoft.com/office/drawing/2014/main" id="{09E8669C-3B31-4682-B2F3-381173AF07C5}"/>
+                <a16:creationId xmlns:a16="http://schemas.microsoft.com/office/drawing/2014/main" id="{F26990E3-2AAD-4AD4-B718-FD92822A81EC}"/>
               </a:ext>
             </a:extLst>
           </p:cNvPr>
@@ -6999,10 +6999,10 @@
       </p:sp>
       <p:sp>
         <p:nvSpPr>
-          <p:cNvPr id="18" name="texto e palavras-chave">
-            <a:extLst xmlns:a="http://schemas.openxmlformats.org/drawingml/2006/main">
-              <a:ext uri="{FF2B5EF4-FFF2-40B4-BE49-F238E27FC236}">
-                <a16:creationId xmlns:a16="http://schemas.microsoft.com/office/drawing/2014/main" id="{2600DE20-FADB-4273-9EC3-D75D2B3E9604}"/>
+          <p:cNvPr id="18" name="reconhecimento de texto">
+            <a:extLst xmlns:a="http://schemas.openxmlformats.org/drawingml/2006/main">
+              <a:ext uri="{FF2B5EF4-FFF2-40B4-BE49-F238E27FC236}">
+                <a16:creationId xmlns:a16="http://schemas.microsoft.com/office/drawing/2014/main" id="{434D775D-3CF7-43B6-838E-1CA1D19CD8C4}"/>
               </a:ext>
             </a:extLst>
           </p:cNvPr>
@@ -7049,7 +7049,7 @@
                 <a:ea typeface="Arial"/>
                 <a:cs typeface="Arial"/>
               </a:rPr>
-              <a:t>texto e palavras-chave</a:t>
+              <a:t>reconhecimento de texto</a:t>
             </a:r>
           </a:p>
         </p:txBody>
@@ -7059,7 +7059,7 @@
           <p:cNvPr id="19" name="">
             <a:extLst xmlns:a="http://schemas.openxmlformats.org/drawingml/2006/main">
               <a:ext uri="{FF2B5EF4-FFF2-40B4-BE49-F238E27FC236}">
-                <a16:creationId xmlns:a16="http://schemas.microsoft.com/office/drawing/2014/main" id="{B4AC5611-3D39-4061-8CE2-64CD49281635}"/>
+                <a16:creationId xmlns:a16="http://schemas.microsoft.com/office/drawing/2014/main" id="{D22D7C47-70AC-4220-81A2-1462049EA005}"/>
               </a:ext>
             </a:extLst>
           </p:cNvPr>
@@ -7089,7 +7089,7 @@
           <p:cNvPr id="20" name="">
             <a:extLst xmlns:a="http://schemas.openxmlformats.org/drawingml/2006/main">
               <a:ext uri="{FF2B5EF4-FFF2-40B4-BE49-F238E27FC236}">
-                <a16:creationId xmlns:a16="http://schemas.microsoft.com/office/drawing/2014/main" id="{A470850F-0568-4D29-A07D-0EBD99F4B0CF}"/>
+                <a16:creationId xmlns:a16="http://schemas.microsoft.com/office/drawing/2014/main" id="{8109AB4F-7FC8-4244-AE34-1D381F040763}"/>
               </a:ext>
             </a:extLst>
           </p:cNvPr>
@@ -7119,7 +7119,7 @@
           <p:cNvPr id="21" name="NLP">
             <a:extLst xmlns:a="http://schemas.openxmlformats.org/drawingml/2006/main">
               <a:ext uri="{FF2B5EF4-FFF2-40B4-BE49-F238E27FC236}">
-                <a16:creationId xmlns:a16="http://schemas.microsoft.com/office/drawing/2014/main" id="{D5F92F9A-1539-41A5-8795-F817619DF854}"/>
+                <a16:creationId xmlns:a16="http://schemas.microsoft.com/office/drawing/2014/main" id="{F184A923-B92A-4C26-B147-E55CE4E985A7}"/>
               </a:ext>
             </a:extLst>
           </p:cNvPr>
@@ -7173,10 +7173,10 @@
       </p:sp>
       <p:sp>
         <p:nvSpPr>
-          <p:cNvPr id="22" name="normalização e TF-IDF">
-            <a:extLst xmlns:a="http://schemas.openxmlformats.org/drawingml/2006/main">
-              <a:ext uri="{FF2B5EF4-FFF2-40B4-BE49-F238E27FC236}">
-                <a16:creationId xmlns:a16="http://schemas.microsoft.com/office/drawing/2014/main" id="{43B4F3CB-5192-4993-973C-9394E3A0ADC8}"/>
+          <p:cNvPr id="22" name="processamento de&#10;linguagem natural">
+            <a:extLst xmlns:a="http://schemas.openxmlformats.org/drawingml/2006/main">
+              <a:ext uri="{FF2B5EF4-FFF2-40B4-BE49-F238E27FC236}">
+                <a16:creationId xmlns:a16="http://schemas.microsoft.com/office/drawing/2014/main" id="{B280BDFE-3BB7-477B-B6EE-B6A708DB73F5}"/>
               </a:ext>
             </a:extLst>
           </p:cNvPr>
@@ -7223,7 +7223,30 @@
                 <a:ea typeface="Arial"/>
                 <a:cs typeface="Arial"/>
               </a:rPr>
-              <a:t>normalização e TF-IDF</a:t>
+              <a:t>processamento de</a:t>
+            </a:r>
+          </a:p>
+          <a:p xmlns:a="http://schemas.openxmlformats.org/drawingml/2006/main">
+            <a:pPr algn="ctr">
+              <a:defRPr sz="1350" b="0">
+                <a:solidFill>
+                  <a:srgbClr val="596B7A"/>
+                </a:solidFill>
+                <a:latin typeface="Arial"/>
+                <a:ea typeface="Arial"/>
+                <a:cs typeface="Arial"/>
+              </a:defRPr>
+            </a:pPr>
+            <a:r>
+              <a:rPr sz="1350" b="0">
+                <a:solidFill>
+                  <a:srgbClr val="596B7A"/>
+                </a:solidFill>
+                <a:latin typeface="Arial"/>
+                <a:ea typeface="Arial"/>
+                <a:cs typeface="Arial"/>
+              </a:rPr>
+              <a:t>linguagem natural</a:t>
             </a:r>
           </a:p>
         </p:txBody>
@@ -7233,7 +7256,7 @@
           <p:cNvPr id="23" name="">
             <a:extLst xmlns:a="http://schemas.openxmlformats.org/drawingml/2006/main">
               <a:ext uri="{FF2B5EF4-FFF2-40B4-BE49-F238E27FC236}">
-                <a16:creationId xmlns:a16="http://schemas.microsoft.com/office/drawing/2014/main" id="{B5A31352-642E-4591-B56C-C6C1F120BC29}"/>
+                <a16:creationId xmlns:a16="http://schemas.microsoft.com/office/drawing/2014/main" id="{09728845-63BE-467A-9930-356ACBCEE4AE}"/>
               </a:ext>
             </a:extLst>
           </p:cNvPr>
@@ -7263,7 +7286,7 @@
           <p:cNvPr id="24" name="">
             <a:extLst xmlns:a="http://schemas.openxmlformats.org/drawingml/2006/main">
               <a:ext uri="{FF2B5EF4-FFF2-40B4-BE49-F238E27FC236}">
-                <a16:creationId xmlns:a16="http://schemas.microsoft.com/office/drawing/2014/main" id="{A2117DB6-8535-42DA-8BEF-376A77C9F4CD}"/>
+                <a16:creationId xmlns:a16="http://schemas.microsoft.com/office/drawing/2014/main" id="{45F71B75-FA0D-4079-97AC-D9B39F12B4AF}"/>
               </a:ext>
             </a:extLst>
           </p:cNvPr>
@@ -7293,7 +7316,7 @@
           <p:cNvPr id="25" name="Clustering">
             <a:extLst xmlns:a="http://schemas.openxmlformats.org/drawingml/2006/main">
               <a:ext uri="{FF2B5EF4-FFF2-40B4-BE49-F238E27FC236}">
-                <a16:creationId xmlns:a16="http://schemas.microsoft.com/office/drawing/2014/main" id="{6397D630-05FA-4AB7-935B-0D0B29835C11}"/>
+                <a16:creationId xmlns:a16="http://schemas.microsoft.com/office/drawing/2014/main" id="{28C58D89-CE0E-44F2-B640-C8AB2D0AC78C}"/>
               </a:ext>
             </a:extLst>
           </p:cNvPr>
@@ -7347,10 +7370,10 @@
       </p:sp>
       <p:sp>
         <p:nvSpPr>
-          <p:cNvPr id="26" name="44 grupos semelhantes">
-            <a:extLst xmlns:a="http://schemas.openxmlformats.org/drawingml/2006/main">
-              <a:ext uri="{FF2B5EF4-FFF2-40B4-BE49-F238E27FC236}">
-                <a16:creationId xmlns:a16="http://schemas.microsoft.com/office/drawing/2014/main" id="{7F9EE295-0885-4032-9535-512819265C9D}"/>
+          <p:cNvPr id="26" name="agrupamento por&#10;semelhança: 44 grupos">
+            <a:extLst xmlns:a="http://schemas.openxmlformats.org/drawingml/2006/main">
+              <a:ext uri="{FF2B5EF4-FFF2-40B4-BE49-F238E27FC236}">
+                <a16:creationId xmlns:a16="http://schemas.microsoft.com/office/drawing/2014/main" id="{9ECE5EDF-ECA1-4C34-B4AE-FF05F4FF23B2}"/>
               </a:ext>
             </a:extLst>
           </p:cNvPr>
@@ -7397,7 +7420,30 @@
                 <a:ea typeface="Arial"/>
                 <a:cs typeface="Arial"/>
               </a:rPr>
-              <a:t>44 grupos semelhantes</a:t>
+              <a:t>agrupamento por</a:t>
+            </a:r>
+          </a:p>
+          <a:p xmlns:a="http://schemas.openxmlformats.org/drawingml/2006/main">
+            <a:pPr algn="ctr">
+              <a:defRPr sz="1350" b="0">
+                <a:solidFill>
+                  <a:srgbClr val="596B7A"/>
+                </a:solidFill>
+                <a:latin typeface="Arial"/>
+                <a:ea typeface="Arial"/>
+                <a:cs typeface="Arial"/>
+              </a:defRPr>
+            </a:pPr>
+            <a:r>
+              <a:rPr sz="1350" b="0">
+                <a:solidFill>
+                  <a:srgbClr val="596B7A"/>
+                </a:solidFill>
+                <a:latin typeface="Arial"/>
+                <a:ea typeface="Arial"/>
+                <a:cs typeface="Arial"/>
+              </a:rPr>
+              <a:t>semelhança: 44 grupos</a:t>
             </a:r>
           </a:p>
         </p:txBody>
@@ -7407,7 +7453,7 @@
           <p:cNvPr id="27" name="">
             <a:extLst xmlns:a="http://schemas.openxmlformats.org/drawingml/2006/main">
               <a:ext uri="{FF2B5EF4-FFF2-40B4-BE49-F238E27FC236}">
-                <a16:creationId xmlns:a16="http://schemas.microsoft.com/office/drawing/2014/main" id="{E03451AA-D79B-4866-AED2-3E653CB94711}"/>
+                <a16:creationId xmlns:a16="http://schemas.microsoft.com/office/drawing/2014/main" id="{0FEC00BE-DF67-4BB7-8B4F-03AF75534BDC}"/>
               </a:ext>
             </a:extLst>
           </p:cNvPr>
@@ -7437,7 +7483,7 @@
           <p:cNvPr id="28" name="">
             <a:extLst xmlns:a="http://schemas.openxmlformats.org/drawingml/2006/main">
               <a:ext uri="{FF2B5EF4-FFF2-40B4-BE49-F238E27FC236}">
-                <a16:creationId xmlns:a16="http://schemas.microsoft.com/office/drawing/2014/main" id="{31C215EC-9509-4CD1-A20E-DC70D32D380F}"/>
+                <a16:creationId xmlns:a16="http://schemas.microsoft.com/office/drawing/2014/main" id="{EAFBA797-F1C6-4E1C-B6F1-FA09FF2BCD82}"/>
               </a:ext>
             </a:extLst>
           </p:cNvPr>
@@ -7467,7 +7513,7 @@
           <p:cNvPr id="29" name="Inspeção">
             <a:extLst xmlns:a="http://schemas.openxmlformats.org/drawingml/2006/main">
               <a:ext uri="{FF2B5EF4-FFF2-40B4-BE49-F238E27FC236}">
-                <a16:creationId xmlns:a16="http://schemas.microsoft.com/office/drawing/2014/main" id="{FEA165C9-6DBF-4E91-8EBB-07D8ACDF98BD}"/>
+                <a16:creationId xmlns:a16="http://schemas.microsoft.com/office/drawing/2014/main" id="{3A7B5EE8-4A39-4A51-B1E2-2098D8F72DB1}"/>
               </a:ext>
             </a:extLst>
           </p:cNvPr>
@@ -7524,7 +7570,7 @@
           <p:cNvPr id="30" name="13.082 avisos">
             <a:extLst xmlns:a="http://schemas.openxmlformats.org/drawingml/2006/main">
               <a:ext uri="{FF2B5EF4-FFF2-40B4-BE49-F238E27FC236}">
-                <a16:creationId xmlns:a16="http://schemas.microsoft.com/office/drawing/2014/main" id="{DCC20093-1483-4879-AA1E-57104668CEFD}"/>
+                <a16:creationId xmlns:a16="http://schemas.microsoft.com/office/drawing/2014/main" id="{AB021D2B-7AB6-4716-93A1-376BCCF3C6E7}"/>
               </a:ext>
             </a:extLst>
           </p:cNvPr>
@@ -7579,7 +7625,7 @@
     </p:spTree>
     <p:extLst>
       <p:ext uri="{BB962C8B-B14F-4D97-AF65-F5344CB8AC3E}">
-        <p14:creationId xmlns:p14="http://schemas.microsoft.com/office/powerpoint/2010/main" val="598179218"/>
+        <p14:creationId xmlns:p14="http://schemas.microsoft.com/office/powerpoint/2010/main" val="51001593"/>
       </p:ext>
     </p:extLst>
   </p:cSld>
@@ -7610,7 +7656,7 @@
           <p:cNvPr id="23" name="">
             <a:extLst xmlns:a="http://schemas.openxmlformats.org/drawingml/2006/main">
               <a:ext uri="{FF2B5EF4-FFF2-40B4-BE49-F238E27FC236}">
-                <a16:creationId xmlns:a16="http://schemas.microsoft.com/office/drawing/2014/main" id="{5E56C560-128D-4F0E-AFF2-D67FB5F4A195}"/>
+                <a16:creationId xmlns:a16="http://schemas.microsoft.com/office/drawing/2014/main" id="{605B8D78-BF93-4152-8A40-04328FF69A55}"/>
               </a:ext>
             </a:extLst>
           </p:cNvPr>
@@ -7640,7 +7686,7 @@
           <p:cNvPr id="2" name="METODOLOGIA">
             <a:extLst xmlns:a="http://schemas.openxmlformats.org/drawingml/2006/main">
               <a:ext uri="{FF2B5EF4-FFF2-40B4-BE49-F238E27FC236}">
-                <a16:creationId xmlns:a16="http://schemas.microsoft.com/office/drawing/2014/main" id="{FEF605E7-39C5-4382-9D3A-C35569397D06}"/>
+                <a16:creationId xmlns:a16="http://schemas.microsoft.com/office/drawing/2014/main" id="{5B91BBFA-5D27-4BE5-A1A6-70C1ADCA3138}"/>
               </a:ext>
             </a:extLst>
           </p:cNvPr>
@@ -7697,7 +7743,7 @@
           <p:cNvPr id="3" name="Método II: tráfego sob três condições">
             <a:extLst xmlns:a="http://schemas.openxmlformats.org/drawingml/2006/main">
               <a:ext uri="{FF2B5EF4-FFF2-40B4-BE49-F238E27FC236}">
-                <a16:creationId xmlns:a16="http://schemas.microsoft.com/office/drawing/2014/main" id="{C680B78C-0B19-41A6-B118-7F8D81ABDBC0}"/>
+                <a16:creationId xmlns:a16="http://schemas.microsoft.com/office/drawing/2014/main" id="{2CC01E1E-2E29-40F7-9EAE-FD35623F8BFD}"/>
               </a:ext>
             </a:extLst>
           </p:cNvPr>
@@ -7754,7 +7800,7 @@
           <p:cNvPr id="4" name="">
             <a:extLst xmlns:a="http://schemas.openxmlformats.org/drawingml/2006/main">
               <a:ext uri="{FF2B5EF4-FFF2-40B4-BE49-F238E27FC236}">
-                <a16:creationId xmlns:a16="http://schemas.microsoft.com/office/drawing/2014/main" id="{1903B130-CEF5-4A65-A674-78557A42EB8E}"/>
+                <a16:creationId xmlns:a16="http://schemas.microsoft.com/office/drawing/2014/main" id="{5137B842-3D6A-4009-A9B2-FC7034712213}"/>
               </a:ext>
             </a:extLst>
           </p:cNvPr>
@@ -7784,7 +7830,7 @@
           <p:cNvPr id="5" name="">
             <a:extLst xmlns:a="http://schemas.openxmlformats.org/drawingml/2006/main">
               <a:ext uri="{FF2B5EF4-FFF2-40B4-BE49-F238E27FC236}">
-                <a16:creationId xmlns:a16="http://schemas.microsoft.com/office/drawing/2014/main" id="{DBEA7BA6-7E69-4A9E-95F8-4A3C05B7FA8F}"/>
+                <a16:creationId xmlns:a16="http://schemas.microsoft.com/office/drawing/2014/main" id="{D181616E-A0CF-494E-A2A0-A0F70EACDB59}"/>
               </a:ext>
             </a:extLst>
           </p:cNvPr>
@@ -7814,7 +7860,7 @@
           <p:cNvPr id="6" name="Nguyen, Backes e Stock (2022), Seção 4.3">
             <a:extLst xmlns:a="http://schemas.openxmlformats.org/drawingml/2006/main">
               <a:ext uri="{FF2B5EF4-FFF2-40B4-BE49-F238E27FC236}">
-                <a16:creationId xmlns:a16="http://schemas.microsoft.com/office/drawing/2014/main" id="{925A68AB-28BB-4A88-87E1-7E1343559E6D}"/>
+                <a16:creationId xmlns:a16="http://schemas.microsoft.com/office/drawing/2014/main" id="{C36B505F-9E5A-44B4-8CF9-777C77304FEA}"/>
               </a:ext>
             </a:extLst>
           </p:cNvPr>
@@ -7871,7 +7917,7 @@
           <p:cNvPr id="7" name="13 / 23">
             <a:extLst xmlns:a="http://schemas.openxmlformats.org/drawingml/2006/main">
               <a:ext uri="{FF2B5EF4-FFF2-40B4-BE49-F238E27FC236}">
-                <a16:creationId xmlns:a16="http://schemas.microsoft.com/office/drawing/2014/main" id="{856D3AFD-B147-499B-96C0-771B63D01D4D}"/>
+                <a16:creationId xmlns:a16="http://schemas.microsoft.com/office/drawing/2014/main" id="{9D8696A2-81F6-41BC-B6D6-FE63F5847FD5}"/>
               </a:ext>
             </a:extLst>
           </p:cNvPr>
@@ -7932,7 +7978,7 @@
           <p:nvPr/>
         </p:nvPicPr>
         <p:blipFill>
-          <a:blip xmlns:r="http://schemas.openxmlformats.org/officeDocument/2006/relationships" xmlns:a="http://schemas.openxmlformats.org/drawingml/2006/main" r:embed="Rcdae810ea8004d79"/>
+          <a:blip xmlns:r="http://schemas.openxmlformats.org/officeDocument/2006/relationships" xmlns:a="http://schemas.openxmlformats.org/drawingml/2006/main" r:embed="R11c547413aed4496"/>
           <a:stretch xmlns:a="http://schemas.openxmlformats.org/drawingml/2006/main"/>
         </p:blipFill>
         <p:spPr>
@@ -7950,7 +7996,7 @@
           <p:cNvPr id="9" name="Figura 4 do artigo: identificação do avi">
             <a:extLst xmlns:a="http://schemas.openxmlformats.org/drawingml/2006/main">
               <a:ext uri="{FF2B5EF4-FFF2-40B4-BE49-F238E27FC236}">
-                <a16:creationId xmlns:a16="http://schemas.microsoft.com/office/drawing/2014/main" id="{F329B957-4E0A-41D4-908A-9D0524F743A8}"/>
+                <a16:creationId xmlns:a16="http://schemas.microsoft.com/office/drawing/2014/main" id="{21AF3312-C453-450B-A8DB-ADD43A44D6B6}"/>
               </a:ext>
             </a:extLst>
           </p:cNvPr>
@@ -8007,7 +8053,7 @@
           <p:cNvPr id="10" name="">
             <a:extLst xmlns:a="http://schemas.openxmlformats.org/drawingml/2006/main">
               <a:ext uri="{FF2B5EF4-FFF2-40B4-BE49-F238E27FC236}">
-                <a16:creationId xmlns:a16="http://schemas.microsoft.com/office/drawing/2014/main" id="{BCFB27DF-275B-487C-8F3A-6A4F43E6326F}"/>
+                <a16:creationId xmlns:a16="http://schemas.microsoft.com/office/drawing/2014/main" id="{58C62E64-7538-4CA2-A00C-3115B7E173AF}"/>
               </a:ext>
             </a:extLst>
           </p:cNvPr>
@@ -8037,7 +8083,7 @@
           <p:cNvPr id="11" name="Tno-consent">
             <a:extLst xmlns:a="http://schemas.openxmlformats.org/drawingml/2006/main">
               <a:ext uri="{FF2B5EF4-FFF2-40B4-BE49-F238E27FC236}">
-                <a16:creationId xmlns:a16="http://schemas.microsoft.com/office/drawing/2014/main" id="{99630845-062B-4E08-8289-AA3898442694}"/>
+                <a16:creationId xmlns:a16="http://schemas.microsoft.com/office/drawing/2014/main" id="{060C20FA-9E29-4B4E-ADCB-45BEA42D502E}"/>
               </a:ext>
             </a:extLst>
           </p:cNvPr>
@@ -8094,7 +8140,7 @@
           <p:cNvPr id="12" name="SEM CONSENTIR">
             <a:extLst xmlns:a="http://schemas.openxmlformats.org/drawingml/2006/main">
               <a:ext uri="{FF2B5EF4-FFF2-40B4-BE49-F238E27FC236}">
-                <a16:creationId xmlns:a16="http://schemas.microsoft.com/office/drawing/2014/main" id="{8791458D-1C48-456A-A223-0984BB6AA6AC}"/>
+                <a16:creationId xmlns:a16="http://schemas.microsoft.com/office/drawing/2014/main" id="{D11DA864-E9C3-41D3-9549-8457834BCDAE}"/>
               </a:ext>
             </a:extLst>
           </p:cNvPr>
@@ -8151,7 +8197,7 @@
           <p:cNvPr id="13" name="Abrir o app e não interagir.&#10;Registrar o">
             <a:extLst xmlns:a="http://schemas.openxmlformats.org/drawingml/2006/main">
               <a:ext uri="{FF2B5EF4-FFF2-40B4-BE49-F238E27FC236}">
-                <a16:creationId xmlns:a16="http://schemas.microsoft.com/office/drawing/2014/main" id="{6414B415-3023-46E8-8484-23E027C08133}"/>
+                <a16:creationId xmlns:a16="http://schemas.microsoft.com/office/drawing/2014/main" id="{C9319FED-97C4-45B8-9A48-912B85FC9BA0}"/>
               </a:ext>
             </a:extLst>
           </p:cNvPr>
@@ -8254,7 +8300,7 @@
           <p:cNvPr id="14" name="">
             <a:extLst xmlns:a="http://schemas.openxmlformats.org/drawingml/2006/main">
               <a:ext uri="{FF2B5EF4-FFF2-40B4-BE49-F238E27FC236}">
-                <a16:creationId xmlns:a16="http://schemas.microsoft.com/office/drawing/2014/main" id="{B285B5BE-B38D-40AA-AE58-1CFDA301E537}"/>
+                <a16:creationId xmlns:a16="http://schemas.microsoft.com/office/drawing/2014/main" id="{1A0D8855-B648-4D62-AF87-023C0F9FDB91}"/>
               </a:ext>
             </a:extLst>
           </p:cNvPr>
@@ -8284,7 +8330,7 @@
           <p:cNvPr id="15" name="Tconfirm">
             <a:extLst xmlns:a="http://schemas.openxmlformats.org/drawingml/2006/main">
               <a:ext uri="{FF2B5EF4-FFF2-40B4-BE49-F238E27FC236}">
-                <a16:creationId xmlns:a16="http://schemas.microsoft.com/office/drawing/2014/main" id="{91FFD552-A348-4782-B812-6126CF032893}"/>
+                <a16:creationId xmlns:a16="http://schemas.microsoft.com/office/drawing/2014/main" id="{21E45EFF-E2B4-4EA0-A912-6100D4D2339E}"/>
               </a:ext>
             </a:extLst>
           </p:cNvPr>
@@ -8341,7 +8387,7 @@
           <p:cNvPr id="16" name="APÓS ACEITAR">
             <a:extLst xmlns:a="http://schemas.openxmlformats.org/drawingml/2006/main">
               <a:ext uri="{FF2B5EF4-FFF2-40B4-BE49-F238E27FC236}">
-                <a16:creationId xmlns:a16="http://schemas.microsoft.com/office/drawing/2014/main" id="{AD68EAD2-2DF4-4C02-80C7-30987AD273AD}"/>
+                <a16:creationId xmlns:a16="http://schemas.microsoft.com/office/drawing/2014/main" id="{0AD35479-1EF8-4F78-B886-A37969B79347}"/>
               </a:ext>
             </a:extLst>
           </p:cNvPr>
@@ -8398,7 +8444,7 @@
           <p:cNvPr id="17" name="Acionar a opção de aceitação.&#10;Navegar au">
             <a:extLst xmlns:a="http://schemas.openxmlformats.org/drawingml/2006/main">
               <a:ext uri="{FF2B5EF4-FFF2-40B4-BE49-F238E27FC236}">
-                <a16:creationId xmlns:a16="http://schemas.microsoft.com/office/drawing/2014/main" id="{2ED88B36-A398-4A16-8C1F-696828BE6E1F}"/>
+                <a16:creationId xmlns:a16="http://schemas.microsoft.com/office/drawing/2014/main" id="{33AB5DD6-E60E-4EE1-B555-23512673A4C6}"/>
               </a:ext>
             </a:extLst>
           </p:cNvPr>
@@ -8501,7 +8547,7 @@
           <p:cNvPr id="18" name="">
             <a:extLst xmlns:a="http://schemas.openxmlformats.org/drawingml/2006/main">
               <a:ext uri="{FF2B5EF4-FFF2-40B4-BE49-F238E27FC236}">
-                <a16:creationId xmlns:a16="http://schemas.microsoft.com/office/drawing/2014/main" id="{BB8CF9F6-1CA9-4AF5-B3C4-8347FF403CDB}"/>
+                <a16:creationId xmlns:a16="http://schemas.microsoft.com/office/drawing/2014/main" id="{A8D8B5F0-D03C-4E07-9BF8-23AB2AF74CFF}"/>
               </a:ext>
             </a:extLst>
           </p:cNvPr>
@@ -8531,7 +8577,7 @@
           <p:cNvPr id="19" name="Treject">
             <a:extLst xmlns:a="http://schemas.openxmlformats.org/drawingml/2006/main">
               <a:ext uri="{FF2B5EF4-FFF2-40B4-BE49-F238E27FC236}">
-                <a16:creationId xmlns:a16="http://schemas.microsoft.com/office/drawing/2014/main" id="{BFF3B865-1E22-489F-87AD-667FA73E29B1}"/>
+                <a16:creationId xmlns:a16="http://schemas.microsoft.com/office/drawing/2014/main" id="{69133F27-AB24-4381-8992-FE1F8510B611}"/>
               </a:ext>
             </a:extLst>
           </p:cNvPr>
@@ -8588,7 +8634,7 @@
           <p:cNvPr id="20" name="APÓS RECUSAR">
             <a:extLst xmlns:a="http://schemas.openxmlformats.org/drawingml/2006/main">
               <a:ext uri="{FF2B5EF4-FFF2-40B4-BE49-F238E27FC236}">
-                <a16:creationId xmlns:a16="http://schemas.microsoft.com/office/drawing/2014/main" id="{07F5EA1F-E71E-4A57-BD15-F907C6F0B55B}"/>
+                <a16:creationId xmlns:a16="http://schemas.microsoft.com/office/drawing/2014/main" id="{4B30D404-1470-4F69-91C7-8DE6675352CF}"/>
               </a:ext>
             </a:extLst>
           </p:cNvPr>
@@ -8642,10 +8688,10 @@
       </p:sp>
       <p:sp>
         <p:nvSpPr>
-          <p:cNvPr id="21" name="Acionar a opção de recusa.&#10;Verificar se ">
-            <a:extLst xmlns:a="http://schemas.openxmlformats.org/drawingml/2006/main">
-              <a:ext uri="{FF2B5EF4-FFF2-40B4-BE49-F238E27FC236}">
-                <a16:creationId xmlns:a16="http://schemas.microsoft.com/office/drawing/2014/main" id="{24C752F8-7EC0-43E3-AE1B-77346208709B}"/>
+          <p:cNvPr id="21" name="Se houver opção, recusar.&#10;Verificar se o">
+            <a:extLst xmlns:a="http://schemas.openxmlformats.org/drawingml/2006/main">
+              <a:ext uri="{FF2B5EF4-FFF2-40B4-BE49-F238E27FC236}">
+                <a16:creationId xmlns:a16="http://schemas.microsoft.com/office/drawing/2014/main" id="{824B7488-2ACE-47D8-8679-8BDC0AD92749}"/>
               </a:ext>
             </a:extLst>
           </p:cNvPr>
@@ -8692,7 +8738,7 @@
                 <a:ea typeface="Arial"/>
                 <a:cs typeface="Arial"/>
               </a:rPr>
-              <a:t>Acionar a opção de recusa.</a:t>
+              <a:t>Se houver opção, recusar.</a:t>
             </a:r>
           </a:p>
           <a:p xmlns:a="http://schemas.openxmlformats.org/drawingml/2006/main">
@@ -8745,10 +8791,10 @@
       </p:sp>
       <p:sp>
         <p:nvSpPr>
-          <p:cNvPr id="22" name="Até 150 s por condição. mitmproxy, Objec">
-            <a:extLst xmlns:a="http://schemas.openxmlformats.org/drawingml/2006/main">
-              <a:ext uri="{FF2B5EF4-FFF2-40B4-BE49-F238E27FC236}">
-                <a16:creationId xmlns:a16="http://schemas.microsoft.com/office/drawing/2014/main" id="{33AC2628-444C-4507-AF8C-34890262004E}"/>
+          <p:cNvPr id="22" name="Até 150 s por condição, com foco em 45 d">
+            <a:extLst xmlns:a="http://schemas.openxmlformats.org/drawingml/2006/main">
+              <a:ext uri="{FF2B5EF4-FFF2-40B4-BE49-F238E27FC236}">
+                <a16:creationId xmlns:a16="http://schemas.microsoft.com/office/drawing/2014/main" id="{F78B2762-A718-49C6-846C-964A844B35DC}"/>
               </a:ext>
             </a:extLst>
           </p:cNvPr>
@@ -8795,7 +8841,7 @@
                 <a:ea typeface="Arial"/>
                 <a:cs typeface="Arial"/>
               </a:rPr>
-              <a:t>Até 150 s por condição. mitmproxy, Objection e DroidBot. Busca de dados pessoais</a:t>
+              <a:t>Até 150 s por condição, com foco em 45 domínios de controladores publicitários.</a:t>
             </a:r>
           </a:p>
           <a:p xmlns:a="http://schemas.openxmlformats.org/drawingml/2006/main">
@@ -8818,7 +8864,7 @@
                 <a:ea typeface="Arial"/>
                 <a:cs typeface="Arial"/>
               </a:rPr>
-              <a:t>em fluxos de saída para uma lista de 45 domínios de controladores publicitários.</a:t>
+              <a:t>A comparação verifica se o envio de dados acompanha a escolha na interface.</a:t>
             </a:r>
           </a:p>
         </p:txBody>
@@ -8826,7 +8872,7 @@
     </p:spTree>
     <p:extLst>
       <p:ext uri="{BB962C8B-B14F-4D97-AF65-F5344CB8AC3E}">
-        <p14:creationId xmlns:p14="http://schemas.microsoft.com/office/powerpoint/2010/main" val="179458500"/>
+        <p14:creationId xmlns:p14="http://schemas.microsoft.com/office/powerpoint/2010/main" val="1867519034"/>
       </p:ext>
     </p:extLst>
   </p:cSld>
@@ -8857,7 +8903,7 @@
           <p:cNvPr id="12" name="">
             <a:extLst xmlns:a="http://schemas.openxmlformats.org/drawingml/2006/main">
               <a:ext uri="{FF2B5EF4-FFF2-40B4-BE49-F238E27FC236}">
-                <a16:creationId xmlns:a16="http://schemas.microsoft.com/office/drawing/2014/main" id="{6516F060-75BA-4AEB-90AF-E3E5F141C7B2}"/>
+                <a16:creationId xmlns:a16="http://schemas.microsoft.com/office/drawing/2014/main" id="{0E9086AA-92E1-4049-B87A-6EDC9F58A5F2}"/>
               </a:ext>
             </a:extLst>
           </p:cNvPr>
@@ -8884,10 +8930,10 @@
       </p:sp>
       <p:sp>
         <p:nvSpPr>
-          <p:cNvPr id="2" name="RESULTADOS">
-            <a:extLst xmlns:a="http://schemas.openxmlformats.org/drawingml/2006/main">
-              <a:ext uri="{FF2B5EF4-FFF2-40B4-BE49-F238E27FC236}">
-                <a16:creationId xmlns:a16="http://schemas.microsoft.com/office/drawing/2014/main" id="{B745EF5B-98F6-447A-836B-014775EAB3A1}"/>
+          <p:cNvPr id="2" name="RESULTADOS: RESPOSTA À PERGUNTA 1">
+            <a:extLst xmlns:a="http://schemas.openxmlformats.org/drawingml/2006/main">
+              <a:ext uri="{FF2B5EF4-FFF2-40B4-BE49-F238E27FC236}">
+                <a16:creationId xmlns:a16="http://schemas.microsoft.com/office/drawing/2014/main" id="{6F3261AE-351B-4173-AF2B-FDD756C3B4C5}"/>
               </a:ext>
             </a:extLst>
           </p:cNvPr>
@@ -8934,7 +8980,7 @@
                 <a:ea typeface="Arial"/>
                 <a:cs typeface="Arial"/>
               </a:rPr>
-              <a:t>RESULTADOS</a:t>
+              <a:t>RESULTADOS: RESPOSTA À PERGUNTA 1</a:t>
             </a:r>
           </a:p>
         </p:txBody>
@@ -8944,7 +8990,7 @@
           <p:cNvPr id="3" name="Quatro mecanismos nos 13.082 avisos">
             <a:extLst xmlns:a="http://schemas.openxmlformats.org/drawingml/2006/main">
               <a:ext uri="{FF2B5EF4-FFF2-40B4-BE49-F238E27FC236}">
-                <a16:creationId xmlns:a16="http://schemas.microsoft.com/office/drawing/2014/main" id="{5A382B73-B299-419F-AF00-25275EECEED3}"/>
+                <a16:creationId xmlns:a16="http://schemas.microsoft.com/office/drawing/2014/main" id="{C3FEB9E9-16B7-4CD1-8CF1-CB500877BDBD}"/>
               </a:ext>
             </a:extLst>
           </p:cNvPr>
@@ -9001,7 +9047,7 @@
           <p:cNvPr id="4" name="">
             <a:extLst xmlns:a="http://schemas.openxmlformats.org/drawingml/2006/main">
               <a:ext uri="{FF2B5EF4-FFF2-40B4-BE49-F238E27FC236}">
-                <a16:creationId xmlns:a16="http://schemas.microsoft.com/office/drawing/2014/main" id="{3CDB30E5-CF7C-4469-A78A-40AB669F588D}"/>
+                <a16:creationId xmlns:a16="http://schemas.microsoft.com/office/drawing/2014/main" id="{49492511-A328-4DCC-8578-A0813F0ED72E}"/>
               </a:ext>
             </a:extLst>
           </p:cNvPr>
@@ -9031,7 +9077,7 @@
           <p:cNvPr id="5" name="">
             <a:extLst xmlns:a="http://schemas.openxmlformats.org/drawingml/2006/main">
               <a:ext uri="{FF2B5EF4-FFF2-40B4-BE49-F238E27FC236}">
-                <a16:creationId xmlns:a16="http://schemas.microsoft.com/office/drawing/2014/main" id="{B8611881-CFF0-4244-87DD-63AD892746D5}"/>
+                <a16:creationId xmlns:a16="http://schemas.microsoft.com/office/drawing/2014/main" id="{7A244B09-9849-46F8-A226-F97ECF842BE5}"/>
               </a:ext>
             </a:extLst>
           </p:cNvPr>
@@ -9061,7 +9107,7 @@
           <p:cNvPr id="6" name="Nguyen, Backes e Stock (2022), Seção 4.2">
             <a:extLst xmlns:a="http://schemas.openxmlformats.org/drawingml/2006/main">
               <a:ext uri="{FF2B5EF4-FFF2-40B4-BE49-F238E27FC236}">
-                <a16:creationId xmlns:a16="http://schemas.microsoft.com/office/drawing/2014/main" id="{C732D8C7-EEEB-4049-A5CD-0F527F0477A5}"/>
+                <a16:creationId xmlns:a16="http://schemas.microsoft.com/office/drawing/2014/main" id="{2D3C5D46-7173-44C4-B771-EEDBD1FDFE91}"/>
               </a:ext>
             </a:extLst>
           </p:cNvPr>
@@ -9118,7 +9164,7 @@
           <p:cNvPr id="7" name="14 / 23">
             <a:extLst xmlns:a="http://schemas.openxmlformats.org/drawingml/2006/main">
               <a:ext uri="{FF2B5EF4-FFF2-40B4-BE49-F238E27FC236}">
-                <a16:creationId xmlns:a16="http://schemas.microsoft.com/office/drawing/2014/main" id="{8933D48D-B555-46F0-B0CA-6FB187344058}"/>
+                <a16:creationId xmlns:a16="http://schemas.microsoft.com/office/drawing/2014/main" id="{1AA2CA9F-D1CF-4B86-9316-778C074233A1}"/>
               </a:ext>
             </a:extLst>
           </p:cNvPr>
@@ -9179,7 +9225,7 @@
           <p:nvPr/>
         </p:nvPicPr>
         <p:blipFill>
-          <a:blip xmlns:r="http://schemas.openxmlformats.org/officeDocument/2006/relationships" xmlns:a="http://schemas.openxmlformats.org/drawingml/2006/main" r:embed="R547f17030f8e4e5f"/>
+          <a:blip xmlns:r="http://schemas.openxmlformats.org/officeDocument/2006/relationships" xmlns:a="http://schemas.openxmlformats.org/drawingml/2006/main" r:embed="R75a7fa5bc38a4805"/>
           <a:stretch xmlns:a="http://schemas.openxmlformats.org/drawingml/2006/main"/>
         </p:blipFill>
         <p:spPr>
@@ -9197,7 +9243,7 @@
           <p:cNvPr id="9" name="Figura 3 do artigo: exemplos dos quatro ">
             <a:extLst xmlns:a="http://schemas.openxmlformats.org/drawingml/2006/main">
               <a:ext uri="{FF2B5EF4-FFF2-40B4-BE49-F238E27FC236}">
-                <a16:creationId xmlns:a16="http://schemas.microsoft.com/office/drawing/2014/main" id="{02C009AF-22D6-4C66-BFCA-2D9B4951BEFD}"/>
+                <a16:creationId xmlns:a16="http://schemas.microsoft.com/office/drawing/2014/main" id="{A0638C12-B8E6-4614-9A3E-54A5EEB93FA4}"/>
               </a:ext>
             </a:extLst>
           </p:cNvPr>
@@ -10108,7 +10154,7 @@
           <p:cNvPr id="11" name="Recusar anúncios personalizados não nece">
             <a:extLst xmlns:a="http://schemas.openxmlformats.org/drawingml/2006/main">
               <a:ext uri="{FF2B5EF4-FFF2-40B4-BE49-F238E27FC236}">
-                <a16:creationId xmlns:a16="http://schemas.microsoft.com/office/drawing/2014/main" id="{5E0C6AA6-AA71-4F31-A2D9-25E6FEF4781F}"/>
+                <a16:creationId xmlns:a16="http://schemas.microsoft.com/office/drawing/2014/main" id="{E66C6C21-03EE-44CA-B660-D95A8C757874}"/>
               </a:ext>
             </a:extLst>
           </p:cNvPr>
@@ -10163,7 +10209,7 @@
     </p:spTree>
     <p:extLst>
       <p:ext uri="{BB962C8B-B14F-4D97-AF65-F5344CB8AC3E}">
-        <p14:creationId xmlns:p14="http://schemas.microsoft.com/office/powerpoint/2010/main" val="1260797123"/>
+        <p14:creationId xmlns:p14="http://schemas.microsoft.com/office/powerpoint/2010/main" val="261408967"/>
       </p:ext>
     </p:extLst>
   </p:cSld>
@@ -10194,7 +10240,7 @@
           <p:cNvPr id="19" name="">
             <a:extLst xmlns:a="http://schemas.openxmlformats.org/drawingml/2006/main">
               <a:ext uri="{FF2B5EF4-FFF2-40B4-BE49-F238E27FC236}">
-                <a16:creationId xmlns:a16="http://schemas.microsoft.com/office/drawing/2014/main" id="{8903206B-29E6-4F53-A802-B90449B3BFB9}"/>
+                <a16:creationId xmlns:a16="http://schemas.microsoft.com/office/drawing/2014/main" id="{73A553D1-9353-4858-9F8C-977138A9DB58}"/>
               </a:ext>
             </a:extLst>
           </p:cNvPr>
@@ -10221,10 +10267,10 @@
       </p:sp>
       <p:sp>
         <p:nvSpPr>
-          <p:cNvPr id="2" name="RESULTADOS">
-            <a:extLst xmlns:a="http://schemas.openxmlformats.org/drawingml/2006/main">
-              <a:ext uri="{FF2B5EF4-FFF2-40B4-BE49-F238E27FC236}">
-                <a16:creationId xmlns:a16="http://schemas.microsoft.com/office/drawing/2014/main" id="{5134BD04-4834-4FBC-8182-A992C299835C}"/>
+          <p:cNvPr id="2" name="RESULTADOS: EVIDÊNCIAS PARA A PERGUNTA 2">
+            <a:extLst xmlns:a="http://schemas.openxmlformats.org/drawingml/2006/main">
+              <a:ext uri="{FF2B5EF4-FFF2-40B4-BE49-F238E27FC236}">
+                <a16:creationId xmlns:a16="http://schemas.microsoft.com/office/drawing/2014/main" id="{D1F4963F-BD94-448A-9D3C-7E15B8D2AB14}"/>
               </a:ext>
             </a:extLst>
           </p:cNvPr>
@@ -10271,7 +10317,7 @@
                 <a:ea typeface="Arial"/>
                 <a:cs typeface="Arial"/>
               </a:rPr>
-              <a:t>RESULTADOS</a:t>
+              <a:t>RESULTADOS: EVIDÊNCIAS PARA A PERGUNTA 2</a:t>
             </a:r>
           </a:p>
         </p:txBody>
@@ -10281,7 +10327,7 @@
           <p:cNvPr id="3" name="Resultados: dois conjuntos distintos">
             <a:extLst xmlns:a="http://schemas.openxmlformats.org/drawingml/2006/main">
               <a:ext uri="{FF2B5EF4-FFF2-40B4-BE49-F238E27FC236}">
-                <a16:creationId xmlns:a16="http://schemas.microsoft.com/office/drawing/2014/main" id="{762500DD-8663-4955-9EE5-ECC52810C7C8}"/>
+                <a16:creationId xmlns:a16="http://schemas.microsoft.com/office/drawing/2014/main" id="{295AD339-95BA-478F-929C-CB5826B0A787}"/>
               </a:ext>
             </a:extLst>
           </p:cNvPr>
@@ -10338,7 +10384,7 @@
           <p:cNvPr id="4" name="">
             <a:extLst xmlns:a="http://schemas.openxmlformats.org/drawingml/2006/main">
               <a:ext uri="{FF2B5EF4-FFF2-40B4-BE49-F238E27FC236}">
-                <a16:creationId xmlns:a16="http://schemas.microsoft.com/office/drawing/2014/main" id="{CF27E8A5-9CFF-4177-880C-CD131C79E684}"/>
+                <a16:creationId xmlns:a16="http://schemas.microsoft.com/office/drawing/2014/main" id="{AC8ABF5E-4FBE-4C19-9AFC-A02E2C9A0242}"/>
               </a:ext>
             </a:extLst>
           </p:cNvPr>
@@ -10368,7 +10414,7 @@
           <p:cNvPr id="5" name="">
             <a:extLst xmlns:a="http://schemas.openxmlformats.org/drawingml/2006/main">
               <a:ext uri="{FF2B5EF4-FFF2-40B4-BE49-F238E27FC236}">
-                <a16:creationId xmlns:a16="http://schemas.microsoft.com/office/drawing/2014/main" id="{6FCE8907-BED3-4DFD-91B0-5FE84BF6E5D1}"/>
+                <a16:creationId xmlns:a16="http://schemas.microsoft.com/office/drawing/2014/main" id="{5CE735FC-C446-4EFF-8709-89B5866545F9}"/>
               </a:ext>
             </a:extLst>
           </p:cNvPr>
@@ -10398,7 +10444,7 @@
           <p:cNvPr id="6" name="Nguyen, Backes e Stock (2022), Seções 4.">
             <a:extLst xmlns:a="http://schemas.openxmlformats.org/drawingml/2006/main">
               <a:ext uri="{FF2B5EF4-FFF2-40B4-BE49-F238E27FC236}">
-                <a16:creationId xmlns:a16="http://schemas.microsoft.com/office/drawing/2014/main" id="{0ECCB2ED-7AB4-4D8A-AAB4-95CBE7887513}"/>
+                <a16:creationId xmlns:a16="http://schemas.microsoft.com/office/drawing/2014/main" id="{3B4479E7-1C8A-4DDB-ACCD-093FF98869CA}"/>
               </a:ext>
             </a:extLst>
           </p:cNvPr>
@@ -10455,7 +10501,7 @@
           <p:cNvPr id="7" name="15 / 23">
             <a:extLst xmlns:a="http://schemas.openxmlformats.org/drawingml/2006/main">
               <a:ext uri="{FF2B5EF4-FFF2-40B4-BE49-F238E27FC236}">
-                <a16:creationId xmlns:a16="http://schemas.microsoft.com/office/drawing/2014/main" id="{14580234-03A4-496F-B844-A48A83B01D37}"/>
+                <a16:creationId xmlns:a16="http://schemas.microsoft.com/office/drawing/2014/main" id="{A4FA8A35-8197-45EF-86D5-CA5785EFE34A}"/>
               </a:ext>
             </a:extLst>
           </p:cNvPr>
@@ -10512,7 +10558,7 @@
           <p:cNvPr id="8" name="239.381 aplicativos analisados">
             <a:extLst xmlns:a="http://schemas.openxmlformats.org/drawingml/2006/main">
               <a:ext uri="{FF2B5EF4-FFF2-40B4-BE49-F238E27FC236}">
-                <a16:creationId xmlns:a16="http://schemas.microsoft.com/office/drawing/2014/main" id="{8CD93DF2-65A0-4AE3-A166-597106C0098B}"/>
+                <a16:creationId xmlns:a16="http://schemas.microsoft.com/office/drawing/2014/main" id="{BC7EA066-FBB8-4915-A2F4-95615B76C723}"/>
               </a:ext>
             </a:extLst>
           </p:cNvPr>
@@ -10569,7 +10615,7 @@
           <p:cNvPr id="9" name="">
             <a:extLst xmlns:a="http://schemas.openxmlformats.org/drawingml/2006/main">
               <a:ext uri="{FF2B5EF4-FFF2-40B4-BE49-F238E27FC236}">
-                <a16:creationId xmlns:a16="http://schemas.microsoft.com/office/drawing/2014/main" id="{94C96A23-910E-411E-84FB-67454E79C86A}"/>
+                <a16:creationId xmlns:a16="http://schemas.microsoft.com/office/drawing/2014/main" id="{81A0BFE9-0CF1-4D0C-8B95-E3B730F699DF}"/>
               </a:ext>
             </a:extLst>
           </p:cNvPr>
@@ -10599,7 +10645,7 @@
           <p:cNvPr id="10" name="APPS COM AVISO IDENTIFICADO">
             <a:extLst xmlns:a="http://schemas.openxmlformats.org/drawingml/2006/main">
               <a:ext uri="{FF2B5EF4-FFF2-40B4-BE49-F238E27FC236}">
-                <a16:creationId xmlns:a16="http://schemas.microsoft.com/office/drawing/2014/main" id="{27125AEB-609A-48C9-BDAC-318C3799D14D}"/>
+                <a16:creationId xmlns:a16="http://schemas.microsoft.com/office/drawing/2014/main" id="{A38D2205-5C82-47D4-ADFE-1B1B94A454C9}"/>
               </a:ext>
             </a:extLst>
           </p:cNvPr>
@@ -10656,7 +10702,7 @@
           <p:cNvPr id="11" name="2.688">
             <a:extLst xmlns:a="http://schemas.openxmlformats.org/drawingml/2006/main">
               <a:ext uri="{FF2B5EF4-FFF2-40B4-BE49-F238E27FC236}">
-                <a16:creationId xmlns:a16="http://schemas.microsoft.com/office/drawing/2014/main" id="{A4209FD2-6C42-4871-A591-78573B34761A}"/>
+                <a16:creationId xmlns:a16="http://schemas.microsoft.com/office/drawing/2014/main" id="{DBF3D2F2-5DDC-41B0-B8F1-484EE78D70AA}"/>
               </a:ext>
             </a:extLst>
           </p:cNvPr>
@@ -10713,7 +10759,7 @@
           <p:cNvPr id="12" name="20,54% dos 13.082 apps com aviso">
             <a:extLst xmlns:a="http://schemas.openxmlformats.org/drawingml/2006/main">
               <a:ext uri="{FF2B5EF4-FFF2-40B4-BE49-F238E27FC236}">
-                <a16:creationId xmlns:a16="http://schemas.microsoft.com/office/drawing/2014/main" id="{DDD6C82F-BC1C-4CBA-90B7-297D8ACE43BA}"/>
+                <a16:creationId xmlns:a16="http://schemas.microsoft.com/office/drawing/2014/main" id="{1DD472D2-1630-4D6C-B20B-62E0DBC993EC}"/>
               </a:ext>
             </a:extLst>
           </p:cNvPr>
@@ -10770,7 +10816,7 @@
           <p:cNvPr id="13" name="Pelo menos uma potencial violação&#10;dos re">
             <a:extLst xmlns:a="http://schemas.openxmlformats.org/drawingml/2006/main">
               <a:ext uri="{FF2B5EF4-FFF2-40B4-BE49-F238E27FC236}">
-                <a16:creationId xmlns:a16="http://schemas.microsoft.com/office/drawing/2014/main" id="{3AC5897E-F210-40F5-BB5F-21EBB5155093}"/>
+                <a16:creationId xmlns:a16="http://schemas.microsoft.com/office/drawing/2014/main" id="{76EEA075-E64E-4EDB-B417-3632B1A67036}"/>
               </a:ext>
             </a:extLst>
           </p:cNvPr>
@@ -10850,7 +10896,7 @@
           <p:cNvPr id="14" name="">
             <a:extLst xmlns:a="http://schemas.openxmlformats.org/drawingml/2006/main">
               <a:ext uri="{FF2B5EF4-FFF2-40B4-BE49-F238E27FC236}">
-                <a16:creationId xmlns:a16="http://schemas.microsoft.com/office/drawing/2014/main" id="{B53A3FB1-809A-4E2F-8CE6-0936BA0A3E30}"/>
+                <a16:creationId xmlns:a16="http://schemas.microsoft.com/office/drawing/2014/main" id="{A981771A-4114-46AB-8CD2-5510CAC85DFF}"/>
               </a:ext>
             </a:extLst>
           </p:cNvPr>
@@ -10880,7 +10926,7 @@
           <p:cNvPr id="15" name="APPS SEM AVISO IDENTIFICADO">
             <a:extLst xmlns:a="http://schemas.openxmlformats.org/drawingml/2006/main">
               <a:ext uri="{FF2B5EF4-FFF2-40B4-BE49-F238E27FC236}">
-                <a16:creationId xmlns:a16="http://schemas.microsoft.com/office/drawing/2014/main" id="{3DCA82C6-1E95-4050-8883-C2E22D792B4B}"/>
+                <a16:creationId xmlns:a16="http://schemas.microsoft.com/office/drawing/2014/main" id="{431BE203-7604-4E3D-9A12-13D99AFBB81B}"/>
               </a:ext>
             </a:extLst>
           </p:cNvPr>
@@ -10937,7 +10983,7 @@
           <p:cNvPr id="16" name="30.160">
             <a:extLst xmlns:a="http://schemas.openxmlformats.org/drawingml/2006/main">
               <a:ext uri="{FF2B5EF4-FFF2-40B4-BE49-F238E27FC236}">
-                <a16:creationId xmlns:a16="http://schemas.microsoft.com/office/drawing/2014/main" id="{6D4434D1-E52A-4E26-86BF-564EF6F51E2E}"/>
+                <a16:creationId xmlns:a16="http://schemas.microsoft.com/office/drawing/2014/main" id="{064DDC9F-5785-462B-916B-A7881D4F2CA6}"/>
               </a:ext>
             </a:extLst>
           </p:cNvPr>
@@ -10994,7 +11040,7 @@
           <p:cNvPr id="17" name="Enviaram dados pessoais a&#10;controladores ">
             <a:extLst xmlns:a="http://schemas.openxmlformats.org/drawingml/2006/main">
               <a:ext uri="{FF2B5EF4-FFF2-40B4-BE49-F238E27FC236}">
-                <a16:creationId xmlns:a16="http://schemas.microsoft.com/office/drawing/2014/main" id="{E6EC29BB-E516-4340-80F3-D37F5DEAC80E}"/>
+                <a16:creationId xmlns:a16="http://schemas.microsoft.com/office/drawing/2014/main" id="{3528B86F-5404-4E14-9BFD-EDAB9C535062}"/>
               </a:ext>
             </a:extLst>
           </p:cNvPr>
@@ -11074,7 +11120,7 @@
           <p:cNvPr id="18" name="93,26% dos 32.341 apps que enviaram&#10;dado">
             <a:extLst xmlns:a="http://schemas.openxmlformats.org/drawingml/2006/main">
               <a:ext uri="{FF2B5EF4-FFF2-40B4-BE49-F238E27FC236}">
-                <a16:creationId xmlns:a16="http://schemas.microsoft.com/office/drawing/2014/main" id="{5D0DB893-5A5C-4064-B2A4-F4EF6609FB98}"/>
+                <a16:creationId xmlns:a16="http://schemas.microsoft.com/office/drawing/2014/main" id="{4582DA7F-203E-4012-9475-B8AC1F3F0EC6}"/>
               </a:ext>
             </a:extLst>
           </p:cNvPr>
@@ -11175,7 +11221,7 @@
     </p:spTree>
     <p:extLst>
       <p:ext uri="{BB962C8B-B14F-4D97-AF65-F5344CB8AC3E}">
-        <p14:creationId xmlns:p14="http://schemas.microsoft.com/office/powerpoint/2010/main" val="202175131"/>
+        <p14:creationId xmlns:p14="http://schemas.microsoft.com/office/powerpoint/2010/main" val="153455315"/>
       </p:ext>
     </p:extLst>
   </p:cSld>
@@ -11206,7 +11252,7 @@
           <p:cNvPr id="16" name="">
             <a:extLst xmlns:a="http://schemas.openxmlformats.org/drawingml/2006/main">
               <a:ext uri="{FF2B5EF4-FFF2-40B4-BE49-F238E27FC236}">
-                <a16:creationId xmlns:a16="http://schemas.microsoft.com/office/drawing/2014/main" id="{6ED15CCD-E6CF-415A-8F62-C49926A6CED7}"/>
+                <a16:creationId xmlns:a16="http://schemas.microsoft.com/office/drawing/2014/main" id="{19D8E1E3-0FBF-47CB-82BE-E3495DAE94D7}"/>
               </a:ext>
             </a:extLst>
           </p:cNvPr>
@@ -11233,10 +11279,10 @@
       </p:sp>
       <p:sp>
         <p:nvSpPr>
-          <p:cNvPr id="2" name="RESULTADOS">
-            <a:extLst xmlns:a="http://schemas.openxmlformats.org/drawingml/2006/main">
-              <a:ext uri="{FF2B5EF4-FFF2-40B4-BE49-F238E27FC236}">
-                <a16:creationId xmlns:a16="http://schemas.microsoft.com/office/drawing/2014/main" id="{14A704C6-AEB0-4A6A-81B7-4D50540E829C}"/>
+          <p:cNvPr id="2" name="RESULTADOS: EVIDÊNCIAS PARA A PERGUNTA 2">
+            <a:extLst xmlns:a="http://schemas.openxmlformats.org/drawingml/2006/main">
+              <a:ext uri="{FF2B5EF4-FFF2-40B4-BE49-F238E27FC236}">
+                <a16:creationId xmlns:a16="http://schemas.microsoft.com/office/drawing/2014/main" id="{446F76EB-6469-4E40-A5E7-A323016DA5E0}"/>
               </a:ext>
             </a:extLst>
           </p:cNvPr>
@@ -11283,7 +11329,7 @@
                 <a:ea typeface="Arial"/>
                 <a:cs typeface="Arial"/>
               </a:rPr>
-              <a:t>RESULTADOS</a:t>
+              <a:t>RESULTADOS: EVIDÊNCIAS PARA A PERGUNTA 2</a:t>
             </a:r>
           </a:p>
         </p:txBody>
@@ -11293,7 +11339,7 @@
           <p:cNvPr id="3" name="Potenciais violações entre apps com avis">
             <a:extLst xmlns:a="http://schemas.openxmlformats.org/drawingml/2006/main">
               <a:ext uri="{FF2B5EF4-FFF2-40B4-BE49-F238E27FC236}">
-                <a16:creationId xmlns:a16="http://schemas.microsoft.com/office/drawing/2014/main" id="{1D5AF94F-8220-42F8-BEB8-814DFCB669A0}"/>
+                <a16:creationId xmlns:a16="http://schemas.microsoft.com/office/drawing/2014/main" id="{893DD9C4-257C-47FB-899A-310A8EA060C6}"/>
               </a:ext>
             </a:extLst>
           </p:cNvPr>
@@ -11350,7 +11396,7 @@
           <p:cNvPr id="4" name="">
             <a:extLst xmlns:a="http://schemas.openxmlformats.org/drawingml/2006/main">
               <a:ext uri="{FF2B5EF4-FFF2-40B4-BE49-F238E27FC236}">
-                <a16:creationId xmlns:a16="http://schemas.microsoft.com/office/drawing/2014/main" id="{A407DDB2-5224-4130-A775-FA9C6A5164B2}"/>
+                <a16:creationId xmlns:a16="http://schemas.microsoft.com/office/drawing/2014/main" id="{F438C0B1-1C04-4D46-BCAF-2E7DE5CEFB4B}"/>
               </a:ext>
             </a:extLst>
           </p:cNvPr>
@@ -11380,7 +11426,7 @@
           <p:cNvPr id="5" name="">
             <a:extLst xmlns:a="http://schemas.openxmlformats.org/drawingml/2006/main">
               <a:ext uri="{FF2B5EF4-FFF2-40B4-BE49-F238E27FC236}">
-                <a16:creationId xmlns:a16="http://schemas.microsoft.com/office/drawing/2014/main" id="{E254BDB2-EBED-4AD8-8016-31371F5BF328}"/>
+                <a16:creationId xmlns:a16="http://schemas.microsoft.com/office/drawing/2014/main" id="{CEC19141-8380-487B-812A-6A789B47E2DF}"/>
               </a:ext>
             </a:extLst>
           </p:cNvPr>
@@ -11410,7 +11456,7 @@
           <p:cNvPr id="6" name="Nguyen, Backes e Stock (2022), Tabela 3 ">
             <a:extLst xmlns:a="http://schemas.openxmlformats.org/drawingml/2006/main">
               <a:ext uri="{FF2B5EF4-FFF2-40B4-BE49-F238E27FC236}">
-                <a16:creationId xmlns:a16="http://schemas.microsoft.com/office/drawing/2014/main" id="{942BD5D6-9B84-4495-AE3B-B0050A8FC2EF}"/>
+                <a16:creationId xmlns:a16="http://schemas.microsoft.com/office/drawing/2014/main" id="{207B3243-6D3A-406D-8079-E71BCB5B283A}"/>
               </a:ext>
             </a:extLst>
           </p:cNvPr>
@@ -11467,7 +11513,7 @@
           <p:cNvPr id="7" name="16 / 23">
             <a:extLst xmlns:a="http://schemas.openxmlformats.org/drawingml/2006/main">
               <a:ext uri="{FF2B5EF4-FFF2-40B4-BE49-F238E27FC236}">
-                <a16:creationId xmlns:a16="http://schemas.microsoft.com/office/drawing/2014/main" id="{562C0D62-2AEF-4284-9966-5477A0B2387F}"/>
+                <a16:creationId xmlns:a16="http://schemas.microsoft.com/office/drawing/2014/main" id="{ABD77542-63D8-4334-8F07-CDA1FDD7B69A}"/>
               </a:ext>
             </a:extLst>
           </p:cNvPr>
@@ -12620,7 +12666,7 @@
           <p:cNvPr id="9" name="2.181">
             <a:extLst xmlns:a="http://schemas.openxmlformats.org/drawingml/2006/main">
               <a:ext uri="{FF2B5EF4-FFF2-40B4-BE49-F238E27FC236}">
-                <a16:creationId xmlns:a16="http://schemas.microsoft.com/office/drawing/2014/main" id="{7E52C91B-229E-46C9-8694-DE650B6A9EAC}"/>
+                <a16:creationId xmlns:a16="http://schemas.microsoft.com/office/drawing/2014/main" id="{99373119-37F3-43DC-9DB9-9F5849B1DC03}"/>
               </a:ext>
             </a:extLst>
           </p:cNvPr>
@@ -12677,7 +12723,7 @@
           <p:cNvPr id="10" name="antes de consentir (16,67%)">
             <a:extLst xmlns:a="http://schemas.openxmlformats.org/drawingml/2006/main">
               <a:ext uri="{FF2B5EF4-FFF2-40B4-BE49-F238E27FC236}">
-                <a16:creationId xmlns:a16="http://schemas.microsoft.com/office/drawing/2014/main" id="{66140BF3-2CB4-4C9F-B58B-9AAB5959D1C3}"/>
+                <a16:creationId xmlns:a16="http://schemas.microsoft.com/office/drawing/2014/main" id="{FB8F73ED-8881-4EAA-A08B-D4579C5E9DB5}"/>
               </a:ext>
             </a:extLst>
           </p:cNvPr>
@@ -12734,7 +12780,7 @@
           <p:cNvPr id="11" name="1.084">
             <a:extLst xmlns:a="http://schemas.openxmlformats.org/drawingml/2006/main">
               <a:ext uri="{FF2B5EF4-FFF2-40B4-BE49-F238E27FC236}">
-                <a16:creationId xmlns:a16="http://schemas.microsoft.com/office/drawing/2014/main" id="{125BFEA5-2BA9-4B6E-8696-48F8F3459AAA}"/>
+                <a16:creationId xmlns:a16="http://schemas.microsoft.com/office/drawing/2014/main" id="{6B23BFD6-88B0-4720-A8F4-CC2B36EAEAB6}"/>
               </a:ext>
             </a:extLst>
           </p:cNvPr>
@@ -12791,7 +12837,7 @@
           <p:cNvPr id="12" name="sem opt-out (8,28%)">
             <a:extLst xmlns:a="http://schemas.openxmlformats.org/drawingml/2006/main">
               <a:ext uri="{FF2B5EF4-FFF2-40B4-BE49-F238E27FC236}">
-                <a16:creationId xmlns:a16="http://schemas.microsoft.com/office/drawing/2014/main" id="{B2EC0AD8-D5C7-44DC-AAD2-3D5F4371634C}"/>
+                <a16:creationId xmlns:a16="http://schemas.microsoft.com/office/drawing/2014/main" id="{0D10DA60-0A4A-4BD7-9F04-3B134890D10F}"/>
               </a:ext>
             </a:extLst>
           </p:cNvPr>
@@ -12848,7 +12894,7 @@
           <p:cNvPr id="13" name="134">
             <a:extLst xmlns:a="http://schemas.openxmlformats.org/drawingml/2006/main">
               <a:ext uri="{FF2B5EF4-FFF2-40B4-BE49-F238E27FC236}">
-                <a16:creationId xmlns:a16="http://schemas.microsoft.com/office/drawing/2014/main" id="{F9E3C1E7-2674-44B5-9D33-F31BDD9D0E8E}"/>
+                <a16:creationId xmlns:a16="http://schemas.microsoft.com/office/drawing/2014/main" id="{9165FBAC-ECD1-442D-B68A-585A474402A7}"/>
               </a:ext>
             </a:extLst>
           </p:cNvPr>
@@ -12905,7 +12951,7 @@
           <p:cNvPr id="14" name="enviam após a recusa">
             <a:extLst xmlns:a="http://schemas.openxmlformats.org/drawingml/2006/main">
               <a:ext uri="{FF2B5EF4-FFF2-40B4-BE49-F238E27FC236}">
-                <a16:creationId xmlns:a16="http://schemas.microsoft.com/office/drawing/2014/main" id="{4C816F9A-4E62-4043-BDE1-66DE9C6926C4}"/>
+                <a16:creationId xmlns:a16="http://schemas.microsoft.com/office/drawing/2014/main" id="{06E5798B-E5B3-4ECF-895B-89E275378110}"/>
               </a:ext>
             </a:extLst>
           </p:cNvPr>
@@ -12962,7 +13008,7 @@
           <p:cNvPr id="15" name="Categorias sobrepostas. Tabela: % de cad">
             <a:extLst xmlns:a="http://schemas.openxmlformats.org/drawingml/2006/main">
               <a:ext uri="{FF2B5EF4-FFF2-40B4-BE49-F238E27FC236}">
-                <a16:creationId xmlns:a16="http://schemas.microsoft.com/office/drawing/2014/main" id="{DEF9EA41-1E1F-44C2-8098-BF2E660CA7E2}"/>
+                <a16:creationId xmlns:a16="http://schemas.microsoft.com/office/drawing/2014/main" id="{7D75F9B9-1E1F-470E-AB31-DA505AA04E9D}"/>
               </a:ext>
             </a:extLst>
           </p:cNvPr>
@@ -13017,7 +13063,7 @@
     </p:spTree>
     <p:extLst>
       <p:ext uri="{BB962C8B-B14F-4D97-AF65-F5344CB8AC3E}">
-        <p14:creationId xmlns:p14="http://schemas.microsoft.com/office/powerpoint/2010/main" val="13061198"/>
+        <p14:creationId xmlns:p14="http://schemas.microsoft.com/office/powerpoint/2010/main" val="115839935"/>
       </p:ext>
     </p:extLst>
   </p:cSld>
@@ -13048,7 +13094,7 @@
           <p:cNvPr id="16" name="">
             <a:extLst xmlns:a="http://schemas.openxmlformats.org/drawingml/2006/main">
               <a:ext uri="{FF2B5EF4-FFF2-40B4-BE49-F238E27FC236}">
-                <a16:creationId xmlns:a16="http://schemas.microsoft.com/office/drawing/2014/main" id="{78A7D088-D45E-418E-BD88-38354257EACF}"/>
+                <a16:creationId xmlns:a16="http://schemas.microsoft.com/office/drawing/2014/main" id="{79043D2C-DF4D-44BB-B371-1E551B7F1EAE}"/>
               </a:ext>
             </a:extLst>
           </p:cNvPr>
@@ -13075,10 +13121,10 @@
       </p:sp>
       <p:sp>
         <p:nvSpPr>
-          <p:cNvPr id="2" name="RESULTADOS">
-            <a:extLst xmlns:a="http://schemas.openxmlformats.org/drawingml/2006/main">
-              <a:ext uri="{FF2B5EF4-FFF2-40B4-BE49-F238E27FC236}">
-                <a16:creationId xmlns:a16="http://schemas.microsoft.com/office/drawing/2014/main" id="{B3E5D3B8-4B55-47DF-8936-268210615F47}"/>
+          <p:cNvPr id="2" name="RESULTADOS: EVIDÊNCIAS PARA A PERGUNTA 2">
+            <a:extLst xmlns:a="http://schemas.openxmlformats.org/drawingml/2006/main">
+              <a:ext uri="{FF2B5EF4-FFF2-40B4-BE49-F238E27FC236}">
+                <a16:creationId xmlns:a16="http://schemas.microsoft.com/office/drawing/2014/main" id="{FD6235C3-3B10-4AC9-9B10-2344D3126FAB}"/>
               </a:ext>
             </a:extLst>
           </p:cNvPr>
@@ -13125,7 +13171,7 @@
                 <a:ea typeface="Arial"/>
                 <a:cs typeface="Arial"/>
               </a:rPr>
-              <a:t>RESULTADOS</a:t>
+              <a:t>RESULTADOS: EVIDÊNCIAS PARA A PERGUNTA 2</a:t>
             </a:r>
           </a:p>
         </p:txBody>
@@ -13135,7 +13181,7 @@
           <p:cNvPr id="3" name="Envio sem aviso: destinos e tipo de dado">
             <a:extLst xmlns:a="http://schemas.openxmlformats.org/drawingml/2006/main">
               <a:ext uri="{FF2B5EF4-FFF2-40B4-BE49-F238E27FC236}">
-                <a16:creationId xmlns:a16="http://schemas.microsoft.com/office/drawing/2014/main" id="{A0D15044-86A1-41FD-801C-878CC99F8451}"/>
+                <a16:creationId xmlns:a16="http://schemas.microsoft.com/office/drawing/2014/main" id="{44B1E6B6-42E5-49D0-914C-862A652C0895}"/>
               </a:ext>
             </a:extLst>
           </p:cNvPr>
@@ -13192,7 +13238,7 @@
           <p:cNvPr id="4" name="">
             <a:extLst xmlns:a="http://schemas.openxmlformats.org/drawingml/2006/main">
               <a:ext uri="{FF2B5EF4-FFF2-40B4-BE49-F238E27FC236}">
-                <a16:creationId xmlns:a16="http://schemas.microsoft.com/office/drawing/2014/main" id="{082A7947-547A-4010-8FB0-1BABE4C65DD0}"/>
+                <a16:creationId xmlns:a16="http://schemas.microsoft.com/office/drawing/2014/main" id="{4A53BEAF-6932-48C6-ADD3-C5FD6F99627A}"/>
               </a:ext>
             </a:extLst>
           </p:cNvPr>
@@ -13222,7 +13268,7 @@
           <p:cNvPr id="5" name="">
             <a:extLst xmlns:a="http://schemas.openxmlformats.org/drawingml/2006/main">
               <a:ext uri="{FF2B5EF4-FFF2-40B4-BE49-F238E27FC236}">
-                <a16:creationId xmlns:a16="http://schemas.microsoft.com/office/drawing/2014/main" id="{5D0070C3-313B-4F67-A6E2-1AA3195E4CEB}"/>
+                <a16:creationId xmlns:a16="http://schemas.microsoft.com/office/drawing/2014/main" id="{2001B17A-A9F0-49B1-B35A-8EBD6C6549AB}"/>
               </a:ext>
             </a:extLst>
           </p:cNvPr>
@@ -13252,7 +13298,7 @@
           <p:cNvPr id="6" name="Nguyen, Backes e Stock (2022), Figura 5,">
             <a:extLst xmlns:a="http://schemas.openxmlformats.org/drawingml/2006/main">
               <a:ext uri="{FF2B5EF4-FFF2-40B4-BE49-F238E27FC236}">
-                <a16:creationId xmlns:a16="http://schemas.microsoft.com/office/drawing/2014/main" id="{B427BF07-3D7F-46D7-AFC0-A07A450F4A22}"/>
+                <a16:creationId xmlns:a16="http://schemas.microsoft.com/office/drawing/2014/main" id="{AD74BCFC-92EC-4FE3-B80E-8DFE32B6189F}"/>
               </a:ext>
             </a:extLst>
           </p:cNvPr>
@@ -13309,7 +13355,7 @@
           <p:cNvPr id="7" name="17 / 23">
             <a:extLst xmlns:a="http://schemas.openxmlformats.org/drawingml/2006/main">
               <a:ext uri="{FF2B5EF4-FFF2-40B4-BE49-F238E27FC236}">
-                <a16:creationId xmlns:a16="http://schemas.microsoft.com/office/drawing/2014/main" id="{A75760A1-EE7C-4021-8AC3-AD8B47A48849}"/>
+                <a16:creationId xmlns:a16="http://schemas.microsoft.com/office/drawing/2014/main" id="{9DBD9892-B2DE-46F9-A5C2-EEE5D42431A4}"/>
               </a:ext>
             </a:extLst>
           </p:cNvPr>
@@ -13370,7 +13416,7 @@
           <p:nvPr/>
         </p:nvPicPr>
         <p:blipFill>
-          <a:blip xmlns:r="http://schemas.openxmlformats.org/officeDocument/2006/relationships" xmlns:a="http://schemas.openxmlformats.org/drawingml/2006/main" r:embed="R14db5c59682d4e2a"/>
+          <a:blip xmlns:r="http://schemas.openxmlformats.org/officeDocument/2006/relationships" xmlns:a="http://schemas.openxmlformats.org/drawingml/2006/main" r:embed="Re7fd406c784c4c15"/>
           <a:stretch xmlns:a="http://schemas.openxmlformats.org/drawingml/2006/main"/>
         </p:blipFill>
         <p:spPr>
@@ -13388,7 +13434,7 @@
           <p:cNvPr id="9" name="Figura 5 do artigo: dez domínios publici">
             <a:extLst xmlns:a="http://schemas.openxmlformats.org/drawingml/2006/main">
               <a:ext uri="{FF2B5EF4-FFF2-40B4-BE49-F238E27FC236}">
-                <a16:creationId xmlns:a16="http://schemas.microsoft.com/office/drawing/2014/main" id="{AD592A32-9308-4FD4-B574-0ED3620213DB}"/>
+                <a16:creationId xmlns:a16="http://schemas.microsoft.com/office/drawing/2014/main" id="{476BE210-F05E-4A33-BE6A-4FED1FC86D33}"/>
               </a:ext>
             </a:extLst>
           </p:cNvPr>
@@ -13468,7 +13514,7 @@
           <p:cNvPr id="10" name="">
             <a:extLst xmlns:a="http://schemas.openxmlformats.org/drawingml/2006/main">
               <a:ext uri="{FF2B5EF4-FFF2-40B4-BE49-F238E27FC236}">
-                <a16:creationId xmlns:a16="http://schemas.microsoft.com/office/drawing/2014/main" id="{36418315-9301-4BE8-B8CA-06B920D95A48}"/>
+                <a16:creationId xmlns:a16="http://schemas.microsoft.com/office/drawing/2014/main" id="{90EECC60-7C73-4273-A0A7-65485A52D4FD}"/>
               </a:ext>
             </a:extLst>
           </p:cNvPr>
@@ -13498,7 +13544,7 @@
           <p:cNvPr id="11" name="14.420">
             <a:extLst xmlns:a="http://schemas.openxmlformats.org/drawingml/2006/main">
               <a:ext uri="{FF2B5EF4-FFF2-40B4-BE49-F238E27FC236}">
-                <a16:creationId xmlns:a16="http://schemas.microsoft.com/office/drawing/2014/main" id="{74E1AACB-8643-46D4-81B8-A54765351964}"/>
+                <a16:creationId xmlns:a16="http://schemas.microsoft.com/office/drawing/2014/main" id="{61F5D775-A077-4153-A02D-D95ECA9CD34E}"/>
               </a:ext>
             </a:extLst>
           </p:cNvPr>
@@ -13555,7 +13601,7 @@
           <p:cNvPr id="12" name="apps enviaram dados&#10;para facebook.com&#10;(4">
             <a:extLst xmlns:a="http://schemas.openxmlformats.org/drawingml/2006/main">
               <a:ext uri="{FF2B5EF4-FFF2-40B4-BE49-F238E27FC236}">
-                <a16:creationId xmlns:a16="http://schemas.microsoft.com/office/drawing/2014/main" id="{D2BF67C0-8CF1-4BEA-8EBC-DB4927A6AD7B}"/>
+                <a16:creationId xmlns:a16="http://schemas.microsoft.com/office/drawing/2014/main" id="{195F180F-D045-4B59-91E0-8F89011B0985}"/>
               </a:ext>
             </a:extLst>
           </p:cNvPr>
@@ -13658,7 +13704,7 @@
           <p:cNvPr id="13" name="">
             <a:extLst xmlns:a="http://schemas.openxmlformats.org/drawingml/2006/main">
               <a:ext uri="{FF2B5EF4-FFF2-40B4-BE49-F238E27FC236}">
-                <a16:creationId xmlns:a16="http://schemas.microsoft.com/office/drawing/2014/main" id="{151A5592-0B9C-4838-BEFD-DBD30E515CD5}"/>
+                <a16:creationId xmlns:a16="http://schemas.microsoft.com/office/drawing/2014/main" id="{029AC74E-72C8-48F9-B83C-D99E2A1E3D94}"/>
               </a:ext>
             </a:extLst>
           </p:cNvPr>
@@ -13688,19 +13734,19 @@
           <p:cNvPr id="14" name="29.952">
             <a:extLst xmlns:a="http://schemas.openxmlformats.org/drawingml/2006/main">
               <a:ext uri="{FF2B5EF4-FFF2-40B4-BE49-F238E27FC236}">
-                <a16:creationId xmlns:a16="http://schemas.microsoft.com/office/drawing/2014/main" id="{696FA197-DE76-4AEB-AEE6-6EB2BBAC14B4}"/>
-              </a:ext>
-            </a:extLst>
-          </p:cNvPr>
-          <p:cNvSpPr>
-            <a:spLocks xmlns:a="http://schemas.openxmlformats.org/drawingml/2006/main" noGrp="1"/>
-          </p:cNvSpPr>
-          <p:nvPr/>
-        </p:nvSpPr>
-        <p:spPr>
-          <a:xfrm xmlns:a="http://schemas.openxmlformats.org/drawingml/2006/main">
-            <a:off x="8448675" y="4343400"/>
-            <a:ext cx="3133725" cy="790575"/>
+                <a16:creationId xmlns:a16="http://schemas.microsoft.com/office/drawing/2014/main" id="{EA2308F9-1D13-49D8-A44B-AEAFEDFE7D26}"/>
+              </a:ext>
+            </a:extLst>
+          </p:cNvPr>
+          <p:cNvSpPr>
+            <a:spLocks xmlns:a="http://schemas.openxmlformats.org/drawingml/2006/main" noGrp="1"/>
+          </p:cNvSpPr>
+          <p:nvPr/>
+        </p:nvSpPr>
+        <p:spPr>
+          <a:xfrm xmlns:a="http://schemas.openxmlformats.org/drawingml/2006/main">
+            <a:off x="8448675" y="4267200"/>
+            <a:ext cx="3133725" cy="695325"/>
           </a:xfrm>
           <a:prstGeom xmlns:a="http://schemas.openxmlformats.org/drawingml/2006/main" prst="rect">
             <a:avLst/>
@@ -13742,22 +13788,22 @@
       </p:sp>
       <p:sp>
         <p:nvSpPr>
-          <p:cNvPr id="15" name="enviaram o AAID.&#10;99,31% dos 30.160 apps&#10;">
-            <a:extLst xmlns:a="http://schemas.openxmlformats.org/drawingml/2006/main">
-              <a:ext uri="{FF2B5EF4-FFF2-40B4-BE49-F238E27FC236}">
-                <a16:creationId xmlns:a16="http://schemas.microsoft.com/office/drawing/2014/main" id="{C740ECDB-F337-4807-8863-9FEE62892A96}"/>
-              </a:ext>
-            </a:extLst>
-          </p:cNvPr>
-          <p:cNvSpPr>
-            <a:spLocks xmlns:a="http://schemas.openxmlformats.org/drawingml/2006/main" noGrp="1"/>
-          </p:cNvSpPr>
-          <p:nvPr/>
-        </p:nvSpPr>
-        <p:spPr>
-          <a:xfrm xmlns:a="http://schemas.openxmlformats.org/drawingml/2006/main">
-            <a:off x="8448675" y="5210175"/>
-            <a:ext cx="3133725" cy="866775"/>
+          <p:cNvPr id="15" name="enviaram o identificador&#10;publicitário do">
+            <a:extLst xmlns:a="http://schemas.openxmlformats.org/drawingml/2006/main">
+              <a:ext uri="{FF2B5EF4-FFF2-40B4-BE49-F238E27FC236}">
+                <a16:creationId xmlns:a16="http://schemas.microsoft.com/office/drawing/2014/main" id="{874B5C5A-0E91-485A-A7D7-3FD93F73B134}"/>
+              </a:ext>
+            </a:extLst>
+          </p:cNvPr>
+          <p:cNvSpPr>
+            <a:spLocks xmlns:a="http://schemas.openxmlformats.org/drawingml/2006/main" noGrp="1"/>
+          </p:cNvSpPr>
+          <p:nvPr/>
+        </p:nvSpPr>
+        <p:spPr>
+          <a:xfrm xmlns:a="http://schemas.openxmlformats.org/drawingml/2006/main">
+            <a:off x="8448675" y="5038725"/>
+            <a:ext cx="3133725" cy="1200150"/>
           </a:xfrm>
           <a:prstGeom xmlns:a="http://schemas.openxmlformats.org/drawingml/2006/main" prst="rect">
             <a:avLst/>
@@ -13774,7 +13820,7 @@
           <a:lstStyle xmlns:a="http://schemas.openxmlformats.org/drawingml/2006/main"/>
           <a:p xmlns:a="http://schemas.openxmlformats.org/drawingml/2006/main">
             <a:pPr algn="l">
-              <a:defRPr sz="1950" b="0">
+              <a:defRPr sz="1725" b="0">
                 <a:solidFill>
                   <a:srgbClr val="24384A"/>
                 </a:solidFill>
@@ -13784,7 +13830,7 @@
               </a:defRPr>
             </a:pPr>
             <a:r>
-              <a:rPr sz="1950" b="0">
+              <a:rPr sz="1725" b="0">
                 <a:solidFill>
                   <a:srgbClr val="24384A"/>
                 </a:solidFill>
@@ -13792,12 +13838,12 @@
                 <a:ea typeface="Arial"/>
                 <a:cs typeface="Arial"/>
               </a:rPr>
-              <a:t>enviaram o AAID.</a:t>
-            </a:r>
-          </a:p>
-          <a:p xmlns:a="http://schemas.openxmlformats.org/drawingml/2006/main">
-            <a:pPr algn="l">
-              <a:defRPr sz="1950" b="0">
+              <a:t>enviaram o identificador</a:t>
+            </a:r>
+          </a:p>
+          <a:p xmlns:a="http://schemas.openxmlformats.org/drawingml/2006/main">
+            <a:pPr algn="l">
+              <a:defRPr sz="1725" b="0">
                 <a:solidFill>
                   <a:srgbClr val="24384A"/>
                 </a:solidFill>
@@ -13807,7 +13853,7 @@
               </a:defRPr>
             </a:pPr>
             <a:r>
-              <a:rPr sz="1950" b="0">
+              <a:rPr sz="1725" b="0">
                 <a:solidFill>
                   <a:srgbClr val="24384A"/>
                 </a:solidFill>
@@ -13815,12 +13861,35 @@
                 <a:ea typeface="Arial"/>
                 <a:cs typeface="Arial"/>
               </a:rPr>
+              <a:t>publicitário do Android (AAID).</a:t>
+            </a:r>
+          </a:p>
+          <a:p xmlns:a="http://schemas.openxmlformats.org/drawingml/2006/main">
+            <a:pPr algn="l">
+              <a:defRPr sz="1725" b="0">
+                <a:solidFill>
+                  <a:srgbClr val="24384A"/>
+                </a:solidFill>
+                <a:latin typeface="Arial"/>
+                <a:ea typeface="Arial"/>
+                <a:cs typeface="Arial"/>
+              </a:defRPr>
+            </a:pPr>
+            <a:r>
+              <a:rPr sz="1725" b="0">
+                <a:solidFill>
+                  <a:srgbClr val="24384A"/>
+                </a:solidFill>
+                <a:latin typeface="Arial"/>
+                <a:ea typeface="Arial"/>
+                <a:cs typeface="Arial"/>
+              </a:rPr>
               <a:t>99,31% dos 30.160 apps</a:t>
             </a:r>
           </a:p>
           <a:p xmlns:a="http://schemas.openxmlformats.org/drawingml/2006/main">
             <a:pPr algn="l">
-              <a:defRPr sz="1950" b="0">
+              <a:defRPr sz="1725" b="0">
                 <a:solidFill>
                   <a:srgbClr val="24384A"/>
                 </a:solidFill>
@@ -13830,7 +13899,7 @@
               </a:defRPr>
             </a:pPr>
             <a:r>
-              <a:rPr sz="1950" b="0">
+              <a:rPr sz="1725" b="0">
                 <a:solidFill>
                   <a:srgbClr val="24384A"/>
                 </a:solidFill>
@@ -13846,7 +13915,7 @@
     </p:spTree>
     <p:extLst>
       <p:ext uri="{BB962C8B-B14F-4D97-AF65-F5344CB8AC3E}">
-        <p14:creationId xmlns:p14="http://schemas.microsoft.com/office/powerpoint/2010/main" val="1121514267"/>
+        <p14:creationId xmlns:p14="http://schemas.microsoft.com/office/powerpoint/2010/main" val="275387639"/>
       </p:ext>
     </p:extLst>
   </p:cSld>
@@ -13877,7 +13946,7 @@
           <p:cNvPr id="25" name="">
             <a:extLst xmlns:a="http://schemas.openxmlformats.org/drawingml/2006/main">
               <a:ext uri="{FF2B5EF4-FFF2-40B4-BE49-F238E27FC236}">
-                <a16:creationId xmlns:a16="http://schemas.microsoft.com/office/drawing/2014/main" id="{CB1E1F3C-035E-4C0E-901B-8874443323BA}"/>
+                <a16:creationId xmlns:a16="http://schemas.microsoft.com/office/drawing/2014/main" id="{99100D02-73C3-4C43-B41E-454E8D9C8370}"/>
               </a:ext>
             </a:extLst>
           </p:cNvPr>
@@ -13904,10 +13973,10 @@
       </p:sp>
       <p:sp>
         <p:nvSpPr>
-          <p:cNvPr id="2" name="ANÁLISE DA SEÇÃO 5">
-            <a:extLst xmlns:a="http://schemas.openxmlformats.org/drawingml/2006/main">
-              <a:ext uri="{FF2B5EF4-FFF2-40B4-BE49-F238E27FC236}">
-                <a16:creationId xmlns:a16="http://schemas.microsoft.com/office/drawing/2014/main" id="{CD6BCDB9-BADC-461B-BB84-C07ADEF566BD}"/>
+          <p:cNvPr id="2" name="SEÇÃO 5: RESPOSTA À PERGUNTA 3">
+            <a:extLst xmlns:a="http://schemas.openxmlformats.org/drawingml/2006/main">
+              <a:ext uri="{FF2B5EF4-FFF2-40B4-BE49-F238E27FC236}">
+                <a16:creationId xmlns:a16="http://schemas.microsoft.com/office/drawing/2014/main" id="{94DF40E1-2CEB-4C90-A5D4-0D5F084690D9}"/>
               </a:ext>
             </a:extLst>
           </p:cNvPr>
@@ -13954,7 +14023,7 @@
                 <a:ea typeface="Arial"/>
                 <a:cs typeface="Arial"/>
               </a:rPr>
-              <a:t>ANÁLISE DA SEÇÃO 5</a:t>
+              <a:t>SEÇÃO 5: RESPOSTA À PERGUNTA 3</a:t>
             </a:r>
           </a:p>
         </p:txBody>
@@ -13964,7 +14033,7 @@
           <p:cNvPr id="3" name="Notificação: respostas e mudanças observ">
             <a:extLst xmlns:a="http://schemas.openxmlformats.org/drawingml/2006/main">
               <a:ext uri="{FF2B5EF4-FFF2-40B4-BE49-F238E27FC236}">
-                <a16:creationId xmlns:a16="http://schemas.microsoft.com/office/drawing/2014/main" id="{8121674E-A67C-4240-AA8E-DBBF8A549408}"/>
+                <a16:creationId xmlns:a16="http://schemas.microsoft.com/office/drawing/2014/main" id="{F2333F80-D491-49D2-9FE5-57DE9FA2D7D1}"/>
               </a:ext>
             </a:extLst>
           </p:cNvPr>
@@ -14021,7 +14090,7 @@
           <p:cNvPr id="4" name="">
             <a:extLst xmlns:a="http://schemas.openxmlformats.org/drawingml/2006/main">
               <a:ext uri="{FF2B5EF4-FFF2-40B4-BE49-F238E27FC236}">
-                <a16:creationId xmlns:a16="http://schemas.microsoft.com/office/drawing/2014/main" id="{14F3AB56-0AB4-446F-A624-3CF55473E06E}"/>
+                <a16:creationId xmlns:a16="http://schemas.microsoft.com/office/drawing/2014/main" id="{61712B08-59CD-425B-9496-FAE9C15A4445}"/>
               </a:ext>
             </a:extLst>
           </p:cNvPr>
@@ -14051,7 +14120,7 @@
           <p:cNvPr id="5" name="">
             <a:extLst xmlns:a="http://schemas.openxmlformats.org/drawingml/2006/main">
               <a:ext uri="{FF2B5EF4-FFF2-40B4-BE49-F238E27FC236}">
-                <a16:creationId xmlns:a16="http://schemas.microsoft.com/office/drawing/2014/main" id="{9154DF5E-113F-40D2-BD06-79F6FED733D0}"/>
+                <a16:creationId xmlns:a16="http://schemas.microsoft.com/office/drawing/2014/main" id="{D71CF591-C376-467A-A217-B5211CB6A50C}"/>
               </a:ext>
             </a:extLst>
           </p:cNvPr>
@@ -14081,7 +14150,7 @@
           <p:cNvPr id="6" name="Nguyen, Backes e Stock (2022), Seção 5, ">
             <a:extLst xmlns:a="http://schemas.openxmlformats.org/drawingml/2006/main">
               <a:ext uri="{FF2B5EF4-FFF2-40B4-BE49-F238E27FC236}">
-                <a16:creationId xmlns:a16="http://schemas.microsoft.com/office/drawing/2014/main" id="{4D67C8AB-5AC7-41D9-8BF0-9A172BFED0B2}"/>
+                <a16:creationId xmlns:a16="http://schemas.microsoft.com/office/drawing/2014/main" id="{23C8BC37-6079-420B-9F7E-7C34CF0CB192}"/>
               </a:ext>
             </a:extLst>
           </p:cNvPr>
@@ -14138,7 +14207,7 @@
           <p:cNvPr id="7" name="18 / 23">
             <a:extLst xmlns:a="http://schemas.openxmlformats.org/drawingml/2006/main">
               <a:ext uri="{FF2B5EF4-FFF2-40B4-BE49-F238E27FC236}">
-                <a16:creationId xmlns:a16="http://schemas.microsoft.com/office/drawing/2014/main" id="{B65E0616-90BB-4EA1-BAD2-63CD154B4568}"/>
+                <a16:creationId xmlns:a16="http://schemas.microsoft.com/office/drawing/2014/main" id="{2A108D72-3427-4DF0-B04E-747E364CB43E}"/>
               </a:ext>
             </a:extLst>
           </p:cNvPr>
@@ -14195,7 +14264,7 @@
           <p:cNvPr id="8" name="1.127">
             <a:extLst xmlns:a="http://schemas.openxmlformats.org/drawingml/2006/main">
               <a:ext uri="{FF2B5EF4-FFF2-40B4-BE49-F238E27FC236}">
-                <a16:creationId xmlns:a16="http://schemas.microsoft.com/office/drawing/2014/main" id="{7C5F3227-0AF1-4DDA-AE62-648941246751}"/>
+                <a16:creationId xmlns:a16="http://schemas.microsoft.com/office/drawing/2014/main" id="{9ABB5690-8C2E-465E-A693-523762B9F8F7}"/>
               </a:ext>
             </a:extLst>
           </p:cNvPr>
@@ -14252,7 +14321,7 @@
           <p:cNvPr id="9" name="desenvolvedores notificados">
             <a:extLst xmlns:a="http://schemas.openxmlformats.org/drawingml/2006/main">
               <a:ext uri="{FF2B5EF4-FFF2-40B4-BE49-F238E27FC236}">
-                <a16:creationId xmlns:a16="http://schemas.microsoft.com/office/drawing/2014/main" id="{9E313395-CB9B-495A-8167-08C90F983B70}"/>
+                <a16:creationId xmlns:a16="http://schemas.microsoft.com/office/drawing/2014/main" id="{43FFAB82-AA4C-4EB3-9CCB-5A4BB5B26C3D}"/>
               </a:ext>
             </a:extLst>
           </p:cNvPr>
@@ -14309,7 +14378,7 @@
           <p:cNvPr id="10" name="1.859">
             <a:extLst xmlns:a="http://schemas.openxmlformats.org/drawingml/2006/main">
               <a:ext uri="{FF2B5EF4-FFF2-40B4-BE49-F238E27FC236}">
-                <a16:creationId xmlns:a16="http://schemas.microsoft.com/office/drawing/2014/main" id="{DF7D3A0E-D3AA-4C19-A465-BAF518A59593}"/>
+                <a16:creationId xmlns:a16="http://schemas.microsoft.com/office/drawing/2014/main" id="{C2D37600-4F7B-4454-B7A7-32589ED95C78}"/>
               </a:ext>
             </a:extLst>
           </p:cNvPr>
@@ -14366,7 +14435,7 @@
           <p:cNvPr id="11" name="aplicativos abrangidos">
             <a:extLst xmlns:a="http://schemas.openxmlformats.org/drawingml/2006/main">
               <a:ext uri="{FF2B5EF4-FFF2-40B4-BE49-F238E27FC236}">
-                <a16:creationId xmlns:a16="http://schemas.microsoft.com/office/drawing/2014/main" id="{D3C5EBBD-6785-4568-8F3C-9EC7AD7D58E6}"/>
+                <a16:creationId xmlns:a16="http://schemas.microsoft.com/office/drawing/2014/main" id="{F8CDA88C-7D89-4DF1-809B-293F2CEED2E5}"/>
               </a:ext>
             </a:extLst>
           </p:cNvPr>
@@ -14423,7 +14492,7 @@
           <p:cNvPr id="12" name="43">
             <a:extLst xmlns:a="http://schemas.openxmlformats.org/drawingml/2006/main">
               <a:ext uri="{FF2B5EF4-FFF2-40B4-BE49-F238E27FC236}">
-                <a16:creationId xmlns:a16="http://schemas.microsoft.com/office/drawing/2014/main" id="{C7930209-8BD1-4295-AE98-EA96D4B0B423}"/>
+                <a16:creationId xmlns:a16="http://schemas.microsoft.com/office/drawing/2014/main" id="{A8D76446-E66A-4116-A5D3-2FCAB99A5A2C}"/>
               </a:ext>
             </a:extLst>
           </p:cNvPr>
@@ -14480,7 +14549,7 @@
           <p:cNvPr id="13" name="desenvolvedores responderam">
             <a:extLst xmlns:a="http://schemas.openxmlformats.org/drawingml/2006/main">
               <a:ext uri="{FF2B5EF4-FFF2-40B4-BE49-F238E27FC236}">
-                <a16:creationId xmlns:a16="http://schemas.microsoft.com/office/drawing/2014/main" id="{67F56652-7034-4829-A3C4-28E4630291E7}"/>
+                <a16:creationId xmlns:a16="http://schemas.microsoft.com/office/drawing/2014/main" id="{65C924DE-189A-463A-B06A-8A80D3755ADB}"/>
               </a:ext>
             </a:extLst>
           </p:cNvPr>
@@ -14537,7 +14606,7 @@
           <p:cNvPr id="14" name="">
             <a:extLst xmlns:a="http://schemas.openxmlformats.org/drawingml/2006/main">
               <a:ext uri="{FF2B5EF4-FFF2-40B4-BE49-F238E27FC236}">
-                <a16:creationId xmlns:a16="http://schemas.microsoft.com/office/drawing/2014/main" id="{5AD70EB2-6123-47F2-9B42-DA9F191DEB25}"/>
+                <a16:creationId xmlns:a16="http://schemas.microsoft.com/office/drawing/2014/main" id="{2235295A-9906-4830-8783-84D33B34CC33}"/>
               </a:ext>
             </a:extLst>
           </p:cNvPr>
@@ -14567,7 +14636,7 @@
           <p:cNvPr id="15" name="9/14">
             <a:extLst xmlns:a="http://schemas.openxmlformats.org/drawingml/2006/main">
               <a:ext uri="{FF2B5EF4-FFF2-40B4-BE49-F238E27FC236}">
-                <a16:creationId xmlns:a16="http://schemas.microsoft.com/office/drawing/2014/main" id="{DDC4053E-8CC2-408E-A494-FF768D081475}"/>
+                <a16:creationId xmlns:a16="http://schemas.microsoft.com/office/drawing/2014/main" id="{155BAFB3-40FC-47C0-8EAB-4A3A7398D9CA}"/>
               </a:ext>
             </a:extLst>
           </p:cNvPr>
@@ -14624,7 +14693,7 @@
           <p:cNvPr id="16" name="não conheciam os tipos de dado coletados">
             <a:extLst xmlns:a="http://schemas.openxmlformats.org/drawingml/2006/main">
               <a:ext uri="{FF2B5EF4-FFF2-40B4-BE49-F238E27FC236}">
-                <a16:creationId xmlns:a16="http://schemas.microsoft.com/office/drawing/2014/main" id="{7AB28E36-2DA6-4821-9CFB-E4784C07128B}"/>
+                <a16:creationId xmlns:a16="http://schemas.microsoft.com/office/drawing/2014/main" id="{C1136908-0810-4126-8EC1-8C1E6579CAD4}"/>
               </a:ext>
             </a:extLst>
           </p:cNvPr>
@@ -14681,7 +14750,7 @@
           <p:cNvPr id="17" name="9/13">
             <a:extLst xmlns:a="http://schemas.openxmlformats.org/drawingml/2006/main">
               <a:ext uri="{FF2B5EF4-FFF2-40B4-BE49-F238E27FC236}">
-                <a16:creationId xmlns:a16="http://schemas.microsoft.com/office/drawing/2014/main" id="{F42AD59C-CF56-4166-8874-09D75E0C277C}"/>
+                <a16:creationId xmlns:a16="http://schemas.microsoft.com/office/drawing/2014/main" id="{50B0B6DC-B4F0-424A-B871-D9D954BC001C}"/>
               </a:ext>
             </a:extLst>
           </p:cNvPr>
@@ -14738,7 +14807,7 @@
           <p:cNvPr id="18" name="declararam conhecer os requisitos de con">
             <a:extLst xmlns:a="http://schemas.openxmlformats.org/drawingml/2006/main">
               <a:ext uri="{FF2B5EF4-FFF2-40B4-BE49-F238E27FC236}">
-                <a16:creationId xmlns:a16="http://schemas.microsoft.com/office/drawing/2014/main" id="{7161B4F8-A9BA-4668-8606-FA9367876252}"/>
+                <a16:creationId xmlns:a16="http://schemas.microsoft.com/office/drawing/2014/main" id="{BB8C9CC3-CD0A-435D-A83F-76DB56D9CA2B}"/>
               </a:ext>
             </a:extLst>
           </p:cNvPr>
@@ -14795,7 +14864,7 @@
           <p:cNvPr id="19" name="6/7">
             <a:extLst xmlns:a="http://schemas.openxmlformats.org/drawingml/2006/main">
               <a:ext uri="{FF2B5EF4-FFF2-40B4-BE49-F238E27FC236}">
-                <a16:creationId xmlns:a16="http://schemas.microsoft.com/office/drawing/2014/main" id="{BC8B45D0-1142-4D93-AF0F-48D4F239AA0B}"/>
+                <a16:creationId xmlns:a16="http://schemas.microsoft.com/office/drawing/2014/main" id="{8285CC02-3699-4BB1-8E03-6D33D4B433DA}"/>
               </a:ext>
             </a:extLst>
           </p:cNvPr>
@@ -14852,7 +14921,7 @@
           <p:cNvPr id="20" name="queriam uma ferramenta automatizada de a">
             <a:extLst xmlns:a="http://schemas.openxmlformats.org/drawingml/2006/main">
               <a:ext uri="{FF2B5EF4-FFF2-40B4-BE49-F238E27FC236}">
-                <a16:creationId xmlns:a16="http://schemas.microsoft.com/office/drawing/2014/main" id="{7F05BCBD-0134-483D-ABE9-5ACAE4AD4D63}"/>
+                <a16:creationId xmlns:a16="http://schemas.microsoft.com/office/drawing/2014/main" id="{09A7C9D4-49B4-42DA-B856-1EC50593FBEF}"/>
               </a:ext>
             </a:extLst>
           </p:cNvPr>
@@ -14909,7 +14978,7 @@
           <p:cNvPr id="21" name="">
             <a:extLst xmlns:a="http://schemas.openxmlformats.org/drawingml/2006/main">
               <a:ext uri="{FF2B5EF4-FFF2-40B4-BE49-F238E27FC236}">
-                <a16:creationId xmlns:a16="http://schemas.microsoft.com/office/drawing/2014/main" id="{7ACA5040-22CC-431E-8B3B-631C0FEEA8FD}"/>
+                <a16:creationId xmlns:a16="http://schemas.microsoft.com/office/drawing/2014/main" id="{6A630AC0-145D-41D3-B105-00C2A1B4600E}"/>
               </a:ext>
             </a:extLst>
           </p:cNvPr>
@@ -14939,7 +15008,7 @@
           <p:cNvPr id="22" name="147 apps atualizados">
             <a:extLst xmlns:a="http://schemas.openxmlformats.org/drawingml/2006/main">
               <a:ext uri="{FF2B5EF4-FFF2-40B4-BE49-F238E27FC236}">
-                <a16:creationId xmlns:a16="http://schemas.microsoft.com/office/drawing/2014/main" id="{6F622C79-DD02-440B-B40B-2C9A55B055A1}"/>
+                <a16:creationId xmlns:a16="http://schemas.microsoft.com/office/drawing/2014/main" id="{2F44A21F-9202-4E4B-A068-51CCD7D8D254}"/>
               </a:ext>
             </a:extLst>
           </p:cNvPr>
@@ -14996,7 +15065,7 @@
           <p:cNvPr id="23" name="63 corrigiram os problemas">
             <a:extLst xmlns:a="http://schemas.openxmlformats.org/drawingml/2006/main">
               <a:ext uri="{FF2B5EF4-FFF2-40B4-BE49-F238E27FC236}">
-                <a16:creationId xmlns:a16="http://schemas.microsoft.com/office/drawing/2014/main" id="{131E571C-9339-4C2F-949C-86F4A60A484E}"/>
+                <a16:creationId xmlns:a16="http://schemas.microsoft.com/office/drawing/2014/main" id="{D80CDE03-47D0-4406-B622-01D6D6266662}"/>
               </a:ext>
             </a:extLst>
           </p:cNvPr>
@@ -15053,7 +15122,7 @@
           <p:cNvPr id="24" name="84 com potencial violação">
             <a:extLst xmlns:a="http://schemas.openxmlformats.org/drawingml/2006/main">
               <a:ext uri="{FF2B5EF4-FFF2-40B4-BE49-F238E27FC236}">
-                <a16:creationId xmlns:a16="http://schemas.microsoft.com/office/drawing/2014/main" id="{86F43B78-5566-4EDA-A1FB-F9BE84159BD8}"/>
+                <a16:creationId xmlns:a16="http://schemas.microsoft.com/office/drawing/2014/main" id="{330BAC67-057C-4681-A475-B6E58F3BF71A}"/>
               </a:ext>
             </a:extLst>
           </p:cNvPr>
@@ -15108,7 +15177,7 @@
     </p:spTree>
     <p:extLst>
       <p:ext uri="{BB962C8B-B14F-4D97-AF65-F5344CB8AC3E}">
-        <p14:creationId xmlns:p14="http://schemas.microsoft.com/office/powerpoint/2010/main" val="620887501"/>
+        <p14:creationId xmlns:p14="http://schemas.microsoft.com/office/powerpoint/2010/main" val="191557179"/>
       </p:ext>
     </p:extLst>
   </p:cSld>
@@ -15139,7 +15208,7 @@
           <p:cNvPr id="22" name="">
             <a:extLst xmlns:a="http://schemas.openxmlformats.org/drawingml/2006/main">
               <a:ext uri="{FF2B5EF4-FFF2-40B4-BE49-F238E27FC236}">
-                <a16:creationId xmlns:a16="http://schemas.microsoft.com/office/drawing/2014/main" id="{E4292CB1-B7B4-4DDD-8529-1AC433AF43B9}"/>
+                <a16:creationId xmlns:a16="http://schemas.microsoft.com/office/drawing/2014/main" id="{327D9DDA-8816-4049-BDA0-8A377B089C58}"/>
               </a:ext>
             </a:extLst>
           </p:cNvPr>
@@ -15169,7 +15238,7 @@
           <p:cNvPr id="2" name="ANÁLISE DA SEÇÃO 6">
             <a:extLst xmlns:a="http://schemas.openxmlformats.org/drawingml/2006/main">
               <a:ext uri="{FF2B5EF4-FFF2-40B4-BE49-F238E27FC236}">
-                <a16:creationId xmlns:a16="http://schemas.microsoft.com/office/drawing/2014/main" id="{8332D20E-C2D9-4520-ABFA-82AB1ABA3EAE}"/>
+                <a16:creationId xmlns:a16="http://schemas.microsoft.com/office/drawing/2014/main" id="{8972E00D-EFEF-438B-8B24-E80638926CED}"/>
               </a:ext>
             </a:extLst>
           </p:cNvPr>
@@ -15226,7 +15295,7 @@
           <p:cNvPr id="3" name="Discussão: alcance e implicações dos ach">
             <a:extLst xmlns:a="http://schemas.openxmlformats.org/drawingml/2006/main">
               <a:ext uri="{FF2B5EF4-FFF2-40B4-BE49-F238E27FC236}">
-                <a16:creationId xmlns:a16="http://schemas.microsoft.com/office/drawing/2014/main" id="{CE55F430-4A76-4E16-A384-6692A06625AB}"/>
+                <a16:creationId xmlns:a16="http://schemas.microsoft.com/office/drawing/2014/main" id="{2A70DB26-2E39-4C94-970E-F4FD2E41FF95}"/>
               </a:ext>
             </a:extLst>
           </p:cNvPr>
@@ -15283,7 +15352,7 @@
           <p:cNvPr id="4" name="">
             <a:extLst xmlns:a="http://schemas.openxmlformats.org/drawingml/2006/main">
               <a:ext uri="{FF2B5EF4-FFF2-40B4-BE49-F238E27FC236}">
-                <a16:creationId xmlns:a16="http://schemas.microsoft.com/office/drawing/2014/main" id="{97152408-C672-4E60-82C4-81B311F599C3}"/>
+                <a16:creationId xmlns:a16="http://schemas.microsoft.com/office/drawing/2014/main" id="{81E5E0E2-1E0E-465E-B81D-1AF449892806}"/>
               </a:ext>
             </a:extLst>
           </p:cNvPr>
@@ -15313,7 +15382,7 @@
           <p:cNvPr id="5" name="">
             <a:extLst xmlns:a="http://schemas.openxmlformats.org/drawingml/2006/main">
               <a:ext uri="{FF2B5EF4-FFF2-40B4-BE49-F238E27FC236}">
-                <a16:creationId xmlns:a16="http://schemas.microsoft.com/office/drawing/2014/main" id="{BD1638C8-DE32-4657-9EF3-F2A40DAC7833}"/>
+                <a16:creationId xmlns:a16="http://schemas.microsoft.com/office/drawing/2014/main" id="{949D6D15-027D-4246-933B-448283266EFE}"/>
               </a:ext>
             </a:extLst>
           </p:cNvPr>
@@ -15343,7 +15412,7 @@
           <p:cNvPr id="6" name="Nguyen, Backes e Stock (2022), Seções 6.">
             <a:extLst xmlns:a="http://schemas.openxmlformats.org/drawingml/2006/main">
               <a:ext uri="{FF2B5EF4-FFF2-40B4-BE49-F238E27FC236}">
-                <a16:creationId xmlns:a16="http://schemas.microsoft.com/office/drawing/2014/main" id="{F8890959-B1BF-4EBA-895D-1DB4E794F309}"/>
+                <a16:creationId xmlns:a16="http://schemas.microsoft.com/office/drawing/2014/main" id="{A353FDBB-3C73-4D08-AD9A-C33D65F76EC1}"/>
               </a:ext>
             </a:extLst>
           </p:cNvPr>
@@ -15400,7 +15469,7 @@
           <p:cNvPr id="7" name="19 / 23">
             <a:extLst xmlns:a="http://schemas.openxmlformats.org/drawingml/2006/main">
               <a:ext uri="{FF2B5EF4-FFF2-40B4-BE49-F238E27FC236}">
-                <a16:creationId xmlns:a16="http://schemas.microsoft.com/office/drawing/2014/main" id="{299E9CED-83BB-44F3-AC19-900E5B1B350E}"/>
+                <a16:creationId xmlns:a16="http://schemas.microsoft.com/office/drawing/2014/main" id="{AF421531-C6C6-4925-8EB3-B42222A65B61}"/>
               </a:ext>
             </a:extLst>
           </p:cNvPr>
@@ -15457,7 +15526,7 @@
           <p:cNvPr id="8" name="6.1  Alcance das potenciais violações">
             <a:extLst xmlns:a="http://schemas.openxmlformats.org/drawingml/2006/main">
               <a:ext uri="{FF2B5EF4-FFF2-40B4-BE49-F238E27FC236}">
-                <a16:creationId xmlns:a16="http://schemas.microsoft.com/office/drawing/2014/main" id="{36FB4A1F-9ED6-4644-9517-4BF552B942D9}"/>
+                <a16:creationId xmlns:a16="http://schemas.microsoft.com/office/drawing/2014/main" id="{19536961-FCB9-42EF-869F-4F0DCC763355}"/>
               </a:ext>
             </a:extLst>
           </p:cNvPr>
@@ -15514,7 +15583,7 @@
           <p:cNvPr id="9" name="Relaciona os achados empíricos&#10;às prátic">
             <a:extLst xmlns:a="http://schemas.openxmlformats.org/drawingml/2006/main">
               <a:ext uri="{FF2B5EF4-FFF2-40B4-BE49-F238E27FC236}">
-                <a16:creationId xmlns:a16="http://schemas.microsoft.com/office/drawing/2014/main" id="{00ABFDD0-47A3-45B7-801F-EA5B00ED22C1}"/>
+                <a16:creationId xmlns:a16="http://schemas.microsoft.com/office/drawing/2014/main" id="{29046424-8495-4727-87A4-6EC501982EC1}"/>
               </a:ext>
             </a:extLst>
           </p:cNvPr>
@@ -15594,7 +15663,7 @@
           <p:cNvPr id="10" name="">
             <a:extLst xmlns:a="http://schemas.openxmlformats.org/drawingml/2006/main">
               <a:ext uri="{FF2B5EF4-FFF2-40B4-BE49-F238E27FC236}">
-                <a16:creationId xmlns:a16="http://schemas.microsoft.com/office/drawing/2014/main" id="{8655E5B7-5953-4AD5-AEFC-3D09345F11AE}"/>
+                <a16:creationId xmlns:a16="http://schemas.microsoft.com/office/drawing/2014/main" id="{3B3998EA-75F2-40F9-B833-D6E1F88B0494}"/>
               </a:ext>
             </a:extLst>
           </p:cNvPr>
@@ -15624,7 +15693,7 @@
           <p:cNvPr id="11" name="6.2  Transparência do tratamento">
             <a:extLst xmlns:a="http://schemas.openxmlformats.org/drawingml/2006/main">
               <a:ext uri="{FF2B5EF4-FFF2-40B4-BE49-F238E27FC236}">
-                <a16:creationId xmlns:a16="http://schemas.microsoft.com/office/drawing/2014/main" id="{AB0B2D17-32E1-4058-9EB6-9690317ADCCC}"/>
+                <a16:creationId xmlns:a16="http://schemas.microsoft.com/office/drawing/2014/main" id="{6B0FFBC1-492D-4F2C-9BDC-4B70F97DF19D}"/>
               </a:ext>
             </a:extLst>
           </p:cNvPr>
@@ -15681,7 +15750,7 @@
           <p:cNvPr id="12" name="Discute a dificuldade de saber&#10;quem rece">
             <a:extLst xmlns:a="http://schemas.openxmlformats.org/drawingml/2006/main">
               <a:ext uri="{FF2B5EF4-FFF2-40B4-BE49-F238E27FC236}">
-                <a16:creationId xmlns:a16="http://schemas.microsoft.com/office/drawing/2014/main" id="{DCF0FC37-E039-4BC8-921E-B74D626F2451}"/>
+                <a16:creationId xmlns:a16="http://schemas.microsoft.com/office/drawing/2014/main" id="{2EFEFE40-F710-4A51-9522-E2DDC48C89EF}"/>
               </a:ext>
             </a:extLst>
           </p:cNvPr>
@@ -15761,7 +15830,7 @@
           <p:cNvPr id="13" name="">
             <a:extLst xmlns:a="http://schemas.openxmlformats.org/drawingml/2006/main">
               <a:ext uri="{FF2B5EF4-FFF2-40B4-BE49-F238E27FC236}">
-                <a16:creationId xmlns:a16="http://schemas.microsoft.com/office/drawing/2014/main" id="{F87EA44E-6684-45E8-9693-6C5DB427CBC3}"/>
+                <a16:creationId xmlns:a16="http://schemas.microsoft.com/office/drawing/2014/main" id="{784F1476-0A10-4BBE-90D2-4B05EC2775F4}"/>
               </a:ext>
             </a:extLst>
           </p:cNvPr>
@@ -15791,7 +15860,7 @@
           <p:cNvPr id="14" name="6.3  Suporte aos desenvolvedores">
             <a:extLst xmlns:a="http://schemas.openxmlformats.org/drawingml/2006/main">
               <a:ext uri="{FF2B5EF4-FFF2-40B4-BE49-F238E27FC236}">
-                <a16:creationId xmlns:a16="http://schemas.microsoft.com/office/drawing/2014/main" id="{6CD0ED14-DF05-46E4-BEA7-A93195CAE1A9}"/>
+                <a16:creationId xmlns:a16="http://schemas.microsoft.com/office/drawing/2014/main" id="{1EB4C9EE-A268-4B4C-A851-FF510E8B3329}"/>
               </a:ext>
             </a:extLst>
           </p:cNvPr>
@@ -15848,7 +15917,7 @@
           <p:cNvPr id="15" name="Defende documentação clara&#10;e ferramentas">
             <a:extLst xmlns:a="http://schemas.openxmlformats.org/drawingml/2006/main">
               <a:ext uri="{FF2B5EF4-FFF2-40B4-BE49-F238E27FC236}">
-                <a16:creationId xmlns:a16="http://schemas.microsoft.com/office/drawing/2014/main" id="{21A41079-5A99-4374-AC6C-8F626F8D8DA4}"/>
+                <a16:creationId xmlns:a16="http://schemas.microsoft.com/office/drawing/2014/main" id="{0D3A2C61-1D1A-455E-A784-4DED4BAEF0FB}"/>
               </a:ext>
             </a:extLst>
           </p:cNvPr>
@@ -15928,7 +15997,7 @@
           <p:cNvPr id="16" name="">
             <a:extLst xmlns:a="http://schemas.openxmlformats.org/drawingml/2006/main">
               <a:ext uri="{FF2B5EF4-FFF2-40B4-BE49-F238E27FC236}">
-                <a16:creationId xmlns:a16="http://schemas.microsoft.com/office/drawing/2014/main" id="{B60DAB8D-C314-4D78-A4BC-61EC7451B0FF}"/>
+                <a16:creationId xmlns:a16="http://schemas.microsoft.com/office/drawing/2014/main" id="{B0D3A798-FEAE-4772-8129-C99D3A5B9CDA}"/>
               </a:ext>
             </a:extLst>
           </p:cNvPr>
@@ -15958,7 +16027,7 @@
           <p:cNvPr id="17" name="EN">
             <a:extLst xmlns:a="http://schemas.openxmlformats.org/drawingml/2006/main">
               <a:ext uri="{FF2B5EF4-FFF2-40B4-BE49-F238E27FC236}">
-                <a16:creationId xmlns:a16="http://schemas.microsoft.com/office/drawing/2014/main" id="{C0C44006-C077-40EC-ACF9-77D13D36C4FB}"/>
+                <a16:creationId xmlns:a16="http://schemas.microsoft.com/office/drawing/2014/main" id="{E845AFD1-0F3C-46DA-9EC7-6A1AFE96056B}"/>
               </a:ext>
             </a:extLst>
           </p:cNvPr>
@@ -16015,7 +16084,7 @@
           <p:cNvPr id="18" name="“there is a clear need for better inform">
             <a:extLst xmlns:a="http://schemas.openxmlformats.org/drawingml/2006/main">
               <a:ext uri="{FF2B5EF4-FFF2-40B4-BE49-F238E27FC236}">
-                <a16:creationId xmlns:a16="http://schemas.microsoft.com/office/drawing/2014/main" id="{1868F7FD-4297-40CC-A416-C657AA04524C}"/>
+                <a16:creationId xmlns:a16="http://schemas.microsoft.com/office/drawing/2014/main" id="{BA267943-19FC-43F6-AFEC-FD1E1172A291}"/>
               </a:ext>
             </a:extLst>
           </p:cNvPr>
@@ -16072,7 +16141,7 @@
           <p:cNvPr id="19" name="PT">
             <a:extLst xmlns:a="http://schemas.openxmlformats.org/drawingml/2006/main">
               <a:ext uri="{FF2B5EF4-FFF2-40B4-BE49-F238E27FC236}">
-                <a16:creationId xmlns:a16="http://schemas.microsoft.com/office/drawing/2014/main" id="{E98ACA2F-9ABC-4227-8282-F6071E2D0DD4}"/>
+                <a16:creationId xmlns:a16="http://schemas.microsoft.com/office/drawing/2014/main" id="{E009C666-AA9D-4C8C-852B-2A4E04DCCD86}"/>
               </a:ext>
             </a:extLst>
           </p:cNvPr>
@@ -16129,7 +16198,7 @@
           <p:cNvPr id="20" name="Há uma necessidade clara de melhores inf">
             <a:extLst xmlns:a="http://schemas.openxmlformats.org/drawingml/2006/main">
               <a:ext uri="{FF2B5EF4-FFF2-40B4-BE49-F238E27FC236}">
-                <a16:creationId xmlns:a16="http://schemas.microsoft.com/office/drawing/2014/main" id="{D230A428-E640-4EB5-A42E-0AC69C8C5B52}"/>
+                <a16:creationId xmlns:a16="http://schemas.microsoft.com/office/drawing/2014/main" id="{01C1B801-EAEC-4B16-86B3-57CBC72C1805}"/>
               </a:ext>
             </a:extLst>
           </p:cNvPr>
@@ -16186,7 +16255,7 @@
           <p:cNvPr id="21" name="Análise: os autores discutem também as&#10;d">
             <a:extLst xmlns:a="http://schemas.openxmlformats.org/drawingml/2006/main">
               <a:ext uri="{FF2B5EF4-FFF2-40B4-BE49-F238E27FC236}">
-                <a16:creationId xmlns:a16="http://schemas.microsoft.com/office/drawing/2014/main" id="{30AE8365-C231-442A-9D85-8AFD36F8238D}"/>
+                <a16:creationId xmlns:a16="http://schemas.microsoft.com/office/drawing/2014/main" id="{B72FFAF1-8341-4984-ACAD-7C7BB77B73AC}"/>
               </a:ext>
             </a:extLst>
           </p:cNvPr>
@@ -16287,7 +16356,7 @@
     </p:spTree>
     <p:extLst>
       <p:ext uri="{BB962C8B-B14F-4D97-AF65-F5344CB8AC3E}">
-        <p14:creationId xmlns:p14="http://schemas.microsoft.com/office/powerpoint/2010/main" val="1947288870"/>
+        <p14:creationId xmlns:p14="http://schemas.microsoft.com/office/powerpoint/2010/main" val="1416419486"/>
       </p:ext>
     </p:extLst>
   </p:cSld>
@@ -16318,7 +16387,7 @@
           <p:cNvPr id="28" name="">
             <a:extLst xmlns:a="http://schemas.openxmlformats.org/drawingml/2006/main">
               <a:ext uri="{FF2B5EF4-FFF2-40B4-BE49-F238E27FC236}">
-                <a16:creationId xmlns:a16="http://schemas.microsoft.com/office/drawing/2014/main" id="{8E12FD38-007F-4059-ACD4-00E20AE2ABD9}"/>
+                <a16:creationId xmlns:a16="http://schemas.microsoft.com/office/drawing/2014/main" id="{E8790434-CDDC-4FF3-B773-DFD1D0E0E07F}"/>
               </a:ext>
             </a:extLst>
           </p:cNvPr>
@@ -16348,7 +16417,7 @@
           <p:cNvPr id="2" name="SELEÇÃO">
             <a:extLst xmlns:a="http://schemas.openxmlformats.org/drawingml/2006/main">
               <a:ext uri="{FF2B5EF4-FFF2-40B4-BE49-F238E27FC236}">
-                <a16:creationId xmlns:a16="http://schemas.microsoft.com/office/drawing/2014/main" id="{3A45C2A1-C09D-4F23-9924-291BD0365223}"/>
+                <a16:creationId xmlns:a16="http://schemas.microsoft.com/office/drawing/2014/main" id="{E2DC25A8-5B72-4D04-B7B9-5446FBA8CD66}"/>
               </a:ext>
             </a:extLst>
           </p:cNvPr>
@@ -16405,7 +16474,7 @@
           <p:cNvPr id="3" name="Seleção do artigo no Scopus">
             <a:extLst xmlns:a="http://schemas.openxmlformats.org/drawingml/2006/main">
               <a:ext uri="{FF2B5EF4-FFF2-40B4-BE49-F238E27FC236}">
-                <a16:creationId xmlns:a16="http://schemas.microsoft.com/office/drawing/2014/main" id="{BC1284B2-25A1-4E1A-95A4-655B8FAE4C7C}"/>
+                <a16:creationId xmlns:a16="http://schemas.microsoft.com/office/drawing/2014/main" id="{813779D1-2C07-419A-91FC-3C25AD85A93C}"/>
               </a:ext>
             </a:extLst>
           </p:cNvPr>
@@ -16462,7 +16531,7 @@
           <p:cNvPr id="4" name="">
             <a:extLst xmlns:a="http://schemas.openxmlformats.org/drawingml/2006/main">
               <a:ext uri="{FF2B5EF4-FFF2-40B4-BE49-F238E27FC236}">
-                <a16:creationId xmlns:a16="http://schemas.microsoft.com/office/drawing/2014/main" id="{9A3AEC61-45DE-4EA5-BF22-76E1C9C0238E}"/>
+                <a16:creationId xmlns:a16="http://schemas.microsoft.com/office/drawing/2014/main" id="{F6B9BE53-A224-476E-9D5C-B8A2A43D0639}"/>
               </a:ext>
             </a:extLst>
           </p:cNvPr>
@@ -16492,7 +16561,7 @@
           <p:cNvPr id="5" name="">
             <a:extLst xmlns:a="http://schemas.openxmlformats.org/drawingml/2006/main">
               <a:ext uri="{FF2B5EF4-FFF2-40B4-BE49-F238E27FC236}">
-                <a16:creationId xmlns:a16="http://schemas.microsoft.com/office/drawing/2014/main" id="{A150347F-33D0-4563-8376-D52CFA991F3E}"/>
+                <a16:creationId xmlns:a16="http://schemas.microsoft.com/office/drawing/2014/main" id="{1B43D21F-54B4-4044-83F3-6569282B7E86}"/>
               </a:ext>
             </a:extLst>
           </p:cNvPr>
@@ -16522,7 +16591,7 @@
           <p:cNvPr id="6" name="Fonte: registro da busca no TCC, 21/09/2">
             <a:extLst xmlns:a="http://schemas.openxmlformats.org/drawingml/2006/main">
               <a:ext uri="{FF2B5EF4-FFF2-40B4-BE49-F238E27FC236}">
-                <a16:creationId xmlns:a16="http://schemas.microsoft.com/office/drawing/2014/main" id="{485DE5AB-278F-43DC-A9BC-781C0CE7790F}"/>
+                <a16:creationId xmlns:a16="http://schemas.microsoft.com/office/drawing/2014/main" id="{1C944BC0-5CB4-4E3D-B341-DE6157BA7F35}"/>
               </a:ext>
             </a:extLst>
           </p:cNvPr>
@@ -16579,7 +16648,7 @@
           <p:cNvPr id="7" name="02 / 23">
             <a:extLst xmlns:a="http://schemas.openxmlformats.org/drawingml/2006/main">
               <a:ext uri="{FF2B5EF4-FFF2-40B4-BE49-F238E27FC236}">
-                <a16:creationId xmlns:a16="http://schemas.microsoft.com/office/drawing/2014/main" id="{F79F4662-E110-4301-9F67-F7497F8A4C38}"/>
+                <a16:creationId xmlns:a16="http://schemas.microsoft.com/office/drawing/2014/main" id="{3C00645C-8A2A-40DF-8C36-C682C13D03A3}"/>
               </a:ext>
             </a:extLst>
           </p:cNvPr>
@@ -16636,7 +16705,7 @@
           <p:cNvPr id="8" name="Busca: “third-party tracking”">
             <a:extLst xmlns:a="http://schemas.openxmlformats.org/drawingml/2006/main">
               <a:ext uri="{FF2B5EF4-FFF2-40B4-BE49-F238E27FC236}">
-                <a16:creationId xmlns:a16="http://schemas.microsoft.com/office/drawing/2014/main" id="{D05B8A6A-5BDC-47EB-BFB1-6D868D1807C7}"/>
+                <a16:creationId xmlns:a16="http://schemas.microsoft.com/office/drawing/2014/main" id="{C2FED849-477A-418D-9B24-08EFFF145B12}"/>
               </a:ext>
             </a:extLst>
           </p:cNvPr>
@@ -16693,7 +16762,7 @@
           <p:cNvPr id="9" name="CAPES / CAFe (IDP) → Scopus · Campo: tít">
             <a:extLst xmlns:a="http://schemas.openxmlformats.org/drawingml/2006/main">
               <a:ext uri="{FF2B5EF4-FFF2-40B4-BE49-F238E27FC236}">
-                <a16:creationId xmlns:a16="http://schemas.microsoft.com/office/drawing/2014/main" id="{31C4C1C2-470C-48F7-89CF-650062CC33BC}"/>
+                <a16:creationId xmlns:a16="http://schemas.microsoft.com/office/drawing/2014/main" id="{6A6F6DFC-8295-4561-927B-96E6A9878620}"/>
               </a:ext>
             </a:extLst>
           </p:cNvPr>
@@ -16754,7 +16823,7 @@
           <p:nvPr/>
         </p:nvPicPr>
         <p:blipFill>
-          <a:blip xmlns:r="http://schemas.openxmlformats.org/officeDocument/2006/relationships" xmlns:a="http://schemas.openxmlformats.org/drawingml/2006/main" r:embed="Rb91f88ac693440c2"/>
+          <a:blip xmlns:r="http://schemas.openxmlformats.org/officeDocument/2006/relationships" xmlns:a="http://schemas.openxmlformats.org/drawingml/2006/main" r:embed="Ra012af651c3740dc"/>
           <a:stretch xmlns:a="http://schemas.openxmlformats.org/drawingml/2006/main"/>
         </p:blipFill>
         <p:spPr>
@@ -16776,7 +16845,7 @@
           <p:nvPr/>
         </p:nvPicPr>
         <p:blipFill>
-          <a:blip xmlns:r="http://schemas.openxmlformats.org/officeDocument/2006/relationships" xmlns:a="http://schemas.openxmlformats.org/drawingml/2006/main" r:embed="Rc76bacf0ab6349d3"/>
+          <a:blip xmlns:r="http://schemas.openxmlformats.org/officeDocument/2006/relationships" xmlns:a="http://schemas.openxmlformats.org/drawingml/2006/main" r:embed="Ra8ba26ad515e4b0e"/>
           <a:stretch xmlns:a="http://schemas.openxmlformats.org/drawingml/2006/main"/>
         </p:blipFill>
         <p:spPr>
@@ -16798,7 +16867,7 @@
           <p:nvPr/>
         </p:nvPicPr>
         <p:blipFill>
-          <a:blip xmlns:r="http://schemas.openxmlformats.org/officeDocument/2006/relationships" xmlns:a="http://schemas.openxmlformats.org/drawingml/2006/main" r:embed="R39167ffc3f4f42c7"/>
+          <a:blip xmlns:r="http://schemas.openxmlformats.org/officeDocument/2006/relationships" xmlns:a="http://schemas.openxmlformats.org/drawingml/2006/main" r:embed="Red807158090a44f2"/>
           <a:stretch xmlns:a="http://schemas.openxmlformats.org/drawingml/2006/main"/>
         </p:blipFill>
         <p:spPr>
@@ -16820,7 +16889,7 @@
           <p:nvPr/>
         </p:nvPicPr>
         <p:blipFill>
-          <a:blip xmlns:r="http://schemas.openxmlformats.org/officeDocument/2006/relationships" xmlns:a="http://schemas.openxmlformats.org/drawingml/2006/main" r:embed="Ra7a87f65b3f54958"/>
+          <a:blip xmlns:r="http://schemas.openxmlformats.org/officeDocument/2006/relationships" xmlns:a="http://schemas.openxmlformats.org/drawingml/2006/main" r:embed="R1a91ad69f12049e5"/>
           <a:stretch xmlns:a="http://schemas.openxmlformats.org/drawingml/2006/main"/>
         </p:blipFill>
         <p:spPr>
@@ -16838,7 +16907,7 @@
           <p:cNvPr id="14" name="131">
             <a:extLst xmlns:a="http://schemas.openxmlformats.org/drawingml/2006/main">
               <a:ext uri="{FF2B5EF4-FFF2-40B4-BE49-F238E27FC236}">
-                <a16:creationId xmlns:a16="http://schemas.microsoft.com/office/drawing/2014/main" id="{5A3A1C52-5F07-4E59-A714-724955DC8296}"/>
+                <a16:creationId xmlns:a16="http://schemas.microsoft.com/office/drawing/2014/main" id="{ED556128-302F-4D19-AF55-FE171A2F3D69}"/>
               </a:ext>
             </a:extLst>
           </p:cNvPr>
@@ -16892,10 +16961,10 @@
       </p:sp>
       <p:sp>
         <p:nvSpPr>
-          <p:cNvPr id="15" name="expressão exata,&#10;sem filtros">
-            <a:extLst xmlns:a="http://schemas.openxmlformats.org/drawingml/2006/main">
-              <a:ext uri="{FF2B5EF4-FFF2-40B4-BE49-F238E27FC236}">
-                <a16:creationId xmlns:a16="http://schemas.microsoft.com/office/drawing/2014/main" id="{59AF683A-49A4-447A-B0E9-91A12D6DE203}"/>
+          <p:cNvPr id="15" name="frase entre aspas,&#10;sem filtros">
+            <a:extLst xmlns:a="http://schemas.openxmlformats.org/drawingml/2006/main">
+              <a:ext uri="{FF2B5EF4-FFF2-40B4-BE49-F238E27FC236}">
+                <a16:creationId xmlns:a16="http://schemas.microsoft.com/office/drawing/2014/main" id="{A504700C-E039-42AC-A096-617CF0851421}"/>
               </a:ext>
             </a:extLst>
           </p:cNvPr>
@@ -16942,7 +17011,7 @@
                 <a:ea typeface="Arial"/>
                 <a:cs typeface="Arial"/>
               </a:rPr>
-              <a:t>expressão exata,</a:t>
+              <a:t>frase entre aspas,</a:t>
             </a:r>
           </a:p>
           <a:p xmlns:a="http://schemas.openxmlformats.org/drawingml/2006/main">
@@ -16975,7 +17044,7 @@
           <p:cNvPr id="16" name="">
             <a:extLst xmlns:a="http://schemas.openxmlformats.org/drawingml/2006/main">
               <a:ext uri="{FF2B5EF4-FFF2-40B4-BE49-F238E27FC236}">
-                <a16:creationId xmlns:a16="http://schemas.microsoft.com/office/drawing/2014/main" id="{8CED4206-9127-4E24-B7C9-8B83A2408250}"/>
+                <a16:creationId xmlns:a16="http://schemas.microsoft.com/office/drawing/2014/main" id="{ADB66A87-4A34-4317-ADBC-93A8358D8582}"/>
               </a:ext>
             </a:extLst>
           </p:cNvPr>
@@ -17005,7 +17074,7 @@
           <p:cNvPr id="17" name="70">
             <a:extLst xmlns:a="http://schemas.openxmlformats.org/drawingml/2006/main">
               <a:ext uri="{FF2B5EF4-FFF2-40B4-BE49-F238E27FC236}">
-                <a16:creationId xmlns:a16="http://schemas.microsoft.com/office/drawing/2014/main" id="{6DED8C98-5F9C-4C78-84A1-2888B47EF198}"/>
+                <a16:creationId xmlns:a16="http://schemas.microsoft.com/office/drawing/2014/main" id="{49D60611-8354-4A40-99F1-D93C11C7CF9F}"/>
               </a:ext>
             </a:extLst>
           </p:cNvPr>
@@ -17062,7 +17131,7 @@
           <p:cNvPr id="18" name="2018–2026, Computação,&#10;artigos e conferê">
             <a:extLst xmlns:a="http://schemas.openxmlformats.org/drawingml/2006/main">
               <a:ext uri="{FF2B5EF4-FFF2-40B4-BE49-F238E27FC236}">
-                <a16:creationId xmlns:a16="http://schemas.microsoft.com/office/drawing/2014/main" id="{F2EE81C8-DB48-4437-814C-EB089625CB96}"/>
+                <a16:creationId xmlns:a16="http://schemas.microsoft.com/office/drawing/2014/main" id="{FB16EC49-6E78-4D2C-8968-FCE1EE43661B}"/>
               </a:ext>
             </a:extLst>
           </p:cNvPr>
@@ -17142,7 +17211,7 @@
           <p:cNvPr id="19" name="">
             <a:extLst xmlns:a="http://schemas.openxmlformats.org/drawingml/2006/main">
               <a:ext uri="{FF2B5EF4-FFF2-40B4-BE49-F238E27FC236}">
-                <a16:creationId xmlns:a16="http://schemas.microsoft.com/office/drawing/2014/main" id="{3F36F9F6-BCD8-4839-ABC5-2B31AF7EF7F2}"/>
+                <a16:creationId xmlns:a16="http://schemas.microsoft.com/office/drawing/2014/main" id="{1A0E4B1A-F65D-4D2D-B4C7-8EF34EEB6540}"/>
               </a:ext>
             </a:extLst>
           </p:cNvPr>
@@ -17172,7 +17241,7 @@
           <p:cNvPr id="20" name="39">
             <a:extLst xmlns:a="http://schemas.openxmlformats.org/drawingml/2006/main">
               <a:ext uri="{FF2B5EF4-FFF2-40B4-BE49-F238E27FC236}">
-                <a16:creationId xmlns:a16="http://schemas.microsoft.com/office/drawing/2014/main" id="{FDBA6F72-D71A-46CF-B48D-E1219B76A369}"/>
+                <a16:creationId xmlns:a16="http://schemas.microsoft.com/office/drawing/2014/main" id="{47B902EC-D828-4077-88FC-6C4DDCFCFF08}"/>
               </a:ext>
             </a:extLst>
           </p:cNvPr>
@@ -17229,7 +17298,7 @@
           <p:cNvPr id="21" name="palavras-chave&#10;Third Parties e&#10;Third-par">
             <a:extLst xmlns:a="http://schemas.openxmlformats.org/drawingml/2006/main">
               <a:ext uri="{FF2B5EF4-FFF2-40B4-BE49-F238E27FC236}">
-                <a16:creationId xmlns:a16="http://schemas.microsoft.com/office/drawing/2014/main" id="{418CB510-13A0-43AD-9E92-6A0041AFD339}"/>
+                <a16:creationId xmlns:a16="http://schemas.microsoft.com/office/drawing/2014/main" id="{F5AB2780-83B1-4F70-95DD-C2D64C46DC4D}"/>
               </a:ext>
             </a:extLst>
           </p:cNvPr>
@@ -17332,7 +17401,7 @@
           <p:cNvPr id="22" name="">
             <a:extLst xmlns:a="http://schemas.openxmlformats.org/drawingml/2006/main">
               <a:ext uri="{FF2B5EF4-FFF2-40B4-BE49-F238E27FC236}">
-                <a16:creationId xmlns:a16="http://schemas.microsoft.com/office/drawing/2014/main" id="{C1727B5A-B227-4F53-A072-514EBB3B1256}"/>
+                <a16:creationId xmlns:a16="http://schemas.microsoft.com/office/drawing/2014/main" id="{0BD2C656-BF1E-41B5-8F8F-A1ACA8D5EA04}"/>
               </a:ext>
             </a:extLst>
           </p:cNvPr>
@@ -17362,7 +17431,7 @@
           <p:cNvPr id="23" name="5">
             <a:extLst xmlns:a="http://schemas.openxmlformats.org/drawingml/2006/main">
               <a:ext uri="{FF2B5EF4-FFF2-40B4-BE49-F238E27FC236}">
-                <a16:creationId xmlns:a16="http://schemas.microsoft.com/office/drawing/2014/main" id="{93A0E7DE-2017-4DEB-AE1E-8FA29379D637}"/>
+                <a16:creationId xmlns:a16="http://schemas.microsoft.com/office/drawing/2014/main" id="{1D5E07E9-696D-4CE1-A307-166544E2D693}"/>
               </a:ext>
             </a:extLst>
           </p:cNvPr>
@@ -17419,7 +17488,7 @@
           <p:cNvPr id="24" name="+ termo consent na busca,&#10;período 2018–2">
             <a:extLst xmlns:a="http://schemas.openxmlformats.org/drawingml/2006/main">
               <a:ext uri="{FF2B5EF4-FFF2-40B4-BE49-F238E27FC236}">
-                <a16:creationId xmlns:a16="http://schemas.microsoft.com/office/drawing/2014/main" id="{4B7F8B09-0531-4567-AE4E-3DD0585CD9D5}"/>
+                <a16:creationId xmlns:a16="http://schemas.microsoft.com/office/drawing/2014/main" id="{D311843B-BD0C-4FD3-8824-C4849440B126}"/>
               </a:ext>
             </a:extLst>
           </p:cNvPr>
@@ -17499,7 +17568,7 @@
           <p:cNvPr id="25" name="">
             <a:extLst xmlns:a="http://schemas.openxmlformats.org/drawingml/2006/main">
               <a:ext uri="{FF2B5EF4-FFF2-40B4-BE49-F238E27FC236}">
-                <a16:creationId xmlns:a16="http://schemas.microsoft.com/office/drawing/2014/main" id="{67742D04-1F1D-45F1-9FCB-136342528BB2}"/>
+                <a16:creationId xmlns:a16="http://schemas.microsoft.com/office/drawing/2014/main" id="{9E912FB5-36FC-408D-8275-D4DB768C6180}"/>
               </a:ext>
             </a:extLst>
           </p:cNvPr>
@@ -17529,7 +17598,7 @@
           <p:cNvPr id="26" name="1 artigo selecionado">
             <a:extLst xmlns:a="http://schemas.openxmlformats.org/drawingml/2006/main">
               <a:ext uri="{FF2B5EF4-FFF2-40B4-BE49-F238E27FC236}">
-                <a16:creationId xmlns:a16="http://schemas.microsoft.com/office/drawing/2014/main" id="{1FE5FE75-C50F-49DB-868D-29C2250DEC93}"/>
+                <a16:creationId xmlns:a16="http://schemas.microsoft.com/office/drawing/2014/main" id="{1BE4B7F0-77D2-4E57-B731-B2D39A1EBAAC}"/>
               </a:ext>
             </a:extLst>
           </p:cNvPr>
@@ -17583,10 +17652,10 @@
       </p:sp>
       <p:sp>
         <p:nvSpPr>
-          <p:cNvPr id="27" name="O termo consent delimita o recorte do TC">
-            <a:extLst xmlns:a="http://schemas.openxmlformats.org/drawingml/2006/main">
-              <a:ext uri="{FF2B5EF4-FFF2-40B4-BE49-F238E27FC236}">
-                <a16:creationId xmlns:a16="http://schemas.microsoft.com/office/drawing/2014/main" id="{755C04B3-76E5-41D2-9EB8-CF72462A3C35}"/>
+          <p:cNvPr id="27" name="Consent delimita o aspecto analisado par">
+            <a:extLst xmlns:a="http://schemas.openxmlformats.org/drawingml/2006/main">
+              <a:ext uri="{FF2B5EF4-FFF2-40B4-BE49-F238E27FC236}">
+                <a16:creationId xmlns:a16="http://schemas.microsoft.com/office/drawing/2014/main" id="{4C167829-D02E-4786-AFD0-99F41A8A502C}"/>
               </a:ext>
             </a:extLst>
           </p:cNvPr>
@@ -17633,7 +17702,7 @@
                 <a:ea typeface="Arial"/>
                 <a:cs typeface="Arial"/>
               </a:rPr>
-              <a:t>O termo consent delimita o recorte do TCC.</a:t>
+              <a:t>Consent delimita o aspecto analisado para o TCC.</a:t>
             </a:r>
           </a:p>
           <a:p xmlns:a="http://schemas.openxmlformats.org/drawingml/2006/main">
@@ -17664,7 +17733,7 @@
     </p:spTree>
     <p:extLst>
       <p:ext uri="{BB962C8B-B14F-4D97-AF65-F5344CB8AC3E}">
-        <p14:creationId xmlns:p14="http://schemas.microsoft.com/office/powerpoint/2010/main" val="143248623"/>
+        <p14:creationId xmlns:p14="http://schemas.microsoft.com/office/powerpoint/2010/main" val="1701717666"/>
       </p:ext>
     </p:extLst>
   </p:cSld>
@@ -17695,7 +17764,7 @@
           <p:cNvPr id="20" name="">
             <a:extLst xmlns:a="http://schemas.openxmlformats.org/drawingml/2006/main">
               <a:ext uri="{FF2B5EF4-FFF2-40B4-BE49-F238E27FC236}">
-                <a16:creationId xmlns:a16="http://schemas.microsoft.com/office/drawing/2014/main" id="{DC3CE4BA-7E83-47D3-A29A-FE29D579F86A}"/>
+                <a16:creationId xmlns:a16="http://schemas.microsoft.com/office/drawing/2014/main" id="{6DA9F88B-FE3E-497B-A76E-08C5F9E70354}"/>
               </a:ext>
             </a:extLst>
           </p:cNvPr>
@@ -17725,7 +17794,7 @@
           <p:cNvPr id="2" name="ANÁLISE METODOLÓGICA">
             <a:extLst xmlns:a="http://schemas.openxmlformats.org/drawingml/2006/main">
               <a:ext uri="{FF2B5EF4-FFF2-40B4-BE49-F238E27FC236}">
-                <a16:creationId xmlns:a16="http://schemas.microsoft.com/office/drawing/2014/main" id="{367AF933-6DDC-446C-B30A-9E376A634EFE}"/>
+                <a16:creationId xmlns:a16="http://schemas.microsoft.com/office/drawing/2014/main" id="{183F08A2-AAEB-4017-A865-9CBF992FDF11}"/>
               </a:ext>
             </a:extLst>
           </p:cNvPr>
@@ -17782,7 +17851,7 @@
           <p:cNvPr id="3" name="Limites da evidência e da generalização">
             <a:extLst xmlns:a="http://schemas.openxmlformats.org/drawingml/2006/main">
               <a:ext uri="{FF2B5EF4-FFF2-40B4-BE49-F238E27FC236}">
-                <a16:creationId xmlns:a16="http://schemas.microsoft.com/office/drawing/2014/main" id="{8F94D8E2-C335-40DC-8CE4-0C9B52F5C368}"/>
+                <a16:creationId xmlns:a16="http://schemas.microsoft.com/office/drawing/2014/main" id="{E2024A74-7707-4B18-B5C3-F89CCA620E74}"/>
               </a:ext>
             </a:extLst>
           </p:cNvPr>
@@ -17839,7 +17908,7 @@
           <p:cNvPr id="4" name="">
             <a:extLst xmlns:a="http://schemas.openxmlformats.org/drawingml/2006/main">
               <a:ext uri="{FF2B5EF4-FFF2-40B4-BE49-F238E27FC236}">
-                <a16:creationId xmlns:a16="http://schemas.microsoft.com/office/drawing/2014/main" id="{05731468-8770-48AB-BDAA-16CEBE7224F3}"/>
+                <a16:creationId xmlns:a16="http://schemas.microsoft.com/office/drawing/2014/main" id="{C8A3F601-6D5F-4B3D-8497-0AAD227186E8}"/>
               </a:ext>
             </a:extLst>
           </p:cNvPr>
@@ -17869,7 +17938,7 @@
           <p:cNvPr id="5" name="">
             <a:extLst xmlns:a="http://schemas.openxmlformats.org/drawingml/2006/main">
               <a:ext uri="{FF2B5EF4-FFF2-40B4-BE49-F238E27FC236}">
-                <a16:creationId xmlns:a16="http://schemas.microsoft.com/office/drawing/2014/main" id="{97EA538B-A19C-4838-B6E5-BB4A79F181A4}"/>
+                <a16:creationId xmlns:a16="http://schemas.microsoft.com/office/drawing/2014/main" id="{AD375425-6DF0-4B95-B846-31F4EEBC6A10}"/>
               </a:ext>
             </a:extLst>
           </p:cNvPr>
@@ -17899,7 +17968,7 @@
           <p:cNvPr id="6" name="Nguyen, Backes e Stock (2022), Seções 4.">
             <a:extLst xmlns:a="http://schemas.openxmlformats.org/drawingml/2006/main">
               <a:ext uri="{FF2B5EF4-FFF2-40B4-BE49-F238E27FC236}">
-                <a16:creationId xmlns:a16="http://schemas.microsoft.com/office/drawing/2014/main" id="{113A5A6B-91CE-433D-8EE0-958FA4239B8B}"/>
+                <a16:creationId xmlns:a16="http://schemas.microsoft.com/office/drawing/2014/main" id="{5F827E4C-AF98-4A00-99AA-355A6046C6B8}"/>
               </a:ext>
             </a:extLst>
           </p:cNvPr>
@@ -17956,7 +18025,7 @@
           <p:cNvPr id="7" name="20 / 23">
             <a:extLst xmlns:a="http://schemas.openxmlformats.org/drawingml/2006/main">
               <a:ext uri="{FF2B5EF4-FFF2-40B4-BE49-F238E27FC236}">
-                <a16:creationId xmlns:a16="http://schemas.microsoft.com/office/drawing/2014/main" id="{E05E1810-F5C1-40ED-83CC-37EC421933FB}"/>
+                <a16:creationId xmlns:a16="http://schemas.microsoft.com/office/drawing/2014/main" id="{4A3E592A-0E64-4C51-A847-C3FFCBAF90E7}"/>
               </a:ext>
             </a:extLst>
           </p:cNvPr>
@@ -18013,7 +18082,7 @@
           <p:cNvPr id="8" name="CORPUS">
             <a:extLst xmlns:a="http://schemas.openxmlformats.org/drawingml/2006/main">
               <a:ext uri="{FF2B5EF4-FFF2-40B4-BE49-F238E27FC236}">
-                <a16:creationId xmlns:a16="http://schemas.microsoft.com/office/drawing/2014/main" id="{D304B653-2BCB-4423-9025-545EAA1F2D76}"/>
+                <a16:creationId xmlns:a16="http://schemas.microsoft.com/office/drawing/2014/main" id="{BDC8E591-4A29-4E79-AB34-EF52FFD90AE2}"/>
               </a:ext>
             </a:extLst>
           </p:cNvPr>
@@ -18070,7 +18139,7 @@
           <p:cNvPr id="9" name="Somente aplicativos gratuitos que atendi">
             <a:extLst xmlns:a="http://schemas.openxmlformats.org/drawingml/2006/main">
               <a:ext uri="{FF2B5EF4-FFF2-40B4-BE49-F238E27FC236}">
-                <a16:creationId xmlns:a16="http://schemas.microsoft.com/office/drawing/2014/main" id="{5C70E821-6225-4A6D-ADF8-43C4F9300849}"/>
+                <a16:creationId xmlns:a16="http://schemas.microsoft.com/office/drawing/2014/main" id="{4695400B-0B46-4EA8-80F0-CA5979EC11D0}"/>
               </a:ext>
             </a:extLst>
           </p:cNvPr>
@@ -18150,7 +18219,7 @@
           <p:cNvPr id="10" name="">
             <a:extLst xmlns:a="http://schemas.openxmlformats.org/drawingml/2006/main">
               <a:ext uri="{FF2B5EF4-FFF2-40B4-BE49-F238E27FC236}">
-                <a16:creationId xmlns:a16="http://schemas.microsoft.com/office/drawing/2014/main" id="{C9E294D5-B68F-4AE3-B811-4BAF50BEB211}"/>
+                <a16:creationId xmlns:a16="http://schemas.microsoft.com/office/drawing/2014/main" id="{A8606D0B-57B9-49ED-81A1-560FEE54F1D3}"/>
               </a:ext>
             </a:extLst>
           </p:cNvPr>
@@ -18180,7 +18249,7 @@
           <p:cNvPr id="11" name="EXECUÇÃO">
             <a:extLst xmlns:a="http://schemas.openxmlformats.org/drawingml/2006/main">
               <a:ext uri="{FF2B5EF4-FFF2-40B4-BE49-F238E27FC236}">
-                <a16:creationId xmlns:a16="http://schemas.microsoft.com/office/drawing/2014/main" id="{969E4ED0-CDCF-4249-9556-D27FB72E076C}"/>
+                <a16:creationId xmlns:a16="http://schemas.microsoft.com/office/drawing/2014/main" id="{3A566CDF-96B3-46DD-B63A-389725930293}"/>
               </a:ext>
             </a:extLst>
           </p:cNvPr>
@@ -18237,7 +18306,7 @@
           <p:cNvPr id="12" name="11.591 apps não puderam ser analisados p">
             <a:extLst xmlns:a="http://schemas.openxmlformats.org/drawingml/2006/main">
               <a:ext uri="{FF2B5EF4-FFF2-40B4-BE49-F238E27FC236}">
-                <a16:creationId xmlns:a16="http://schemas.microsoft.com/office/drawing/2014/main" id="{656B6269-89A9-417F-9BEF-46A49E77DCC0}"/>
+                <a16:creationId xmlns:a16="http://schemas.microsoft.com/office/drawing/2014/main" id="{B9E156D7-D0D3-48B8-934B-6E65CB840679}"/>
               </a:ext>
             </a:extLst>
           </p:cNvPr>
@@ -18317,7 +18386,7 @@
           <p:cNvPr id="13" name="">
             <a:extLst xmlns:a="http://schemas.openxmlformats.org/drawingml/2006/main">
               <a:ext uri="{FF2B5EF4-FFF2-40B4-BE49-F238E27FC236}">
-                <a16:creationId xmlns:a16="http://schemas.microsoft.com/office/drawing/2014/main" id="{8A8A70D7-8426-463B-B115-F81693FD086E}"/>
+                <a16:creationId xmlns:a16="http://schemas.microsoft.com/office/drawing/2014/main" id="{C7A831AF-606D-4B82-8A54-0F93CB6A19C1}"/>
               </a:ext>
             </a:extLst>
           </p:cNvPr>
@@ -18347,7 +18416,7 @@
           <p:cNvPr id="14" name="IDIOMA E OCR">
             <a:extLst xmlns:a="http://schemas.openxmlformats.org/drawingml/2006/main">
               <a:ext uri="{FF2B5EF4-FFF2-40B4-BE49-F238E27FC236}">
-                <a16:creationId xmlns:a16="http://schemas.microsoft.com/office/drawing/2014/main" id="{29F9511B-F38E-4ED0-A061-933FC73A1B6A}"/>
+                <a16:creationId xmlns:a16="http://schemas.microsoft.com/office/drawing/2014/main" id="{3FB913AE-05FB-46E2-9D4F-2A23FAE39A8D}"/>
               </a:ext>
             </a:extLst>
           </p:cNvPr>
@@ -18404,7 +18473,7 @@
           <p:cNvPr id="15" name="1.996 interfaces relacionadas à privacid">
             <a:extLst xmlns:a="http://schemas.openxmlformats.org/drawingml/2006/main">
               <a:ext uri="{FF2B5EF4-FFF2-40B4-BE49-F238E27FC236}">
-                <a16:creationId xmlns:a16="http://schemas.microsoft.com/office/drawing/2014/main" id="{FC7CD597-836C-4658-BBB5-0F9FF8BFC5A8}"/>
+                <a16:creationId xmlns:a16="http://schemas.microsoft.com/office/drawing/2014/main" id="{734B8C83-2520-4253-966F-85F83ECF5718}"/>
               </a:ext>
             </a:extLst>
           </p:cNvPr>
@@ -18484,7 +18553,7 @@
           <p:cNvPr id="16" name="">
             <a:extLst xmlns:a="http://schemas.openxmlformats.org/drawingml/2006/main">
               <a:ext uri="{FF2B5EF4-FFF2-40B4-BE49-F238E27FC236}">
-                <a16:creationId xmlns:a16="http://schemas.microsoft.com/office/drawing/2014/main" id="{EBE3A2D3-9C32-4DAA-B638-75348F8A95EE}"/>
+                <a16:creationId xmlns:a16="http://schemas.microsoft.com/office/drawing/2014/main" id="{F8638523-8FD9-484B-8437-1DCF48E39819}"/>
               </a:ext>
             </a:extLst>
           </p:cNvPr>
@@ -18514,7 +18583,7 @@
           <p:cNvPr id="17" name="OBSERVAÇÃO">
             <a:extLst xmlns:a="http://schemas.openxmlformats.org/drawingml/2006/main">
               <a:ext uri="{FF2B5EF4-FFF2-40B4-BE49-F238E27FC236}">
-                <a16:creationId xmlns:a16="http://schemas.microsoft.com/office/drawing/2014/main" id="{00F2C874-AD55-4818-A7AE-06D8E7684A80}"/>
+                <a16:creationId xmlns:a16="http://schemas.microsoft.com/office/drawing/2014/main" id="{C2769975-EA35-453E-B143-2C3C57F6702B}"/>
               </a:ext>
             </a:extLst>
           </p:cNvPr>
@@ -18571,7 +18640,7 @@
           <p:cNvPr id="18" name="Execuções de até 150 s e foco em 45 domí">
             <a:extLst xmlns:a="http://schemas.openxmlformats.org/drawingml/2006/main">
               <a:ext uri="{FF2B5EF4-FFF2-40B4-BE49-F238E27FC236}">
-                <a16:creationId xmlns:a16="http://schemas.microsoft.com/office/drawing/2014/main" id="{821185B2-15F6-4355-AEEA-9CBC31FF8862}"/>
+                <a16:creationId xmlns:a16="http://schemas.microsoft.com/office/drawing/2014/main" id="{3767B76D-DA80-47E6-B703-F5C8E3F18B47}"/>
               </a:ext>
             </a:extLst>
           </p:cNvPr>
@@ -18651,7 +18720,7 @@
           <p:cNvPr id="19" name="Análise do seminário: uma falha não obse">
             <a:extLst xmlns:a="http://schemas.openxmlformats.org/drawingml/2006/main">
               <a:ext uri="{FF2B5EF4-FFF2-40B4-BE49-F238E27FC236}">
-                <a16:creationId xmlns:a16="http://schemas.microsoft.com/office/drawing/2014/main" id="{CB51858C-AE8D-4597-9D3C-A88F962C607B}"/>
+                <a16:creationId xmlns:a16="http://schemas.microsoft.com/office/drawing/2014/main" id="{0520765C-E7B8-4107-AB3F-973F0595B527}"/>
               </a:ext>
             </a:extLst>
           </p:cNvPr>
@@ -18706,7 +18775,7 @@
     </p:spTree>
     <p:extLst>
       <p:ext uri="{BB962C8B-B14F-4D97-AF65-F5344CB8AC3E}">
-        <p14:creationId xmlns:p14="http://schemas.microsoft.com/office/powerpoint/2010/main" val="1757707378"/>
+        <p14:creationId xmlns:p14="http://schemas.microsoft.com/office/powerpoint/2010/main" val="1610572545"/>
       </p:ext>
     </p:extLst>
   </p:cSld>
@@ -18737,7 +18806,7 @@
           <p:cNvPr id="19" name="">
             <a:extLst xmlns:a="http://schemas.openxmlformats.org/drawingml/2006/main">
               <a:ext uri="{FF2B5EF4-FFF2-40B4-BE49-F238E27FC236}">
-                <a16:creationId xmlns:a16="http://schemas.microsoft.com/office/drawing/2014/main" id="{9F713F29-D56D-493E-A179-0C4C5ADFCE36}"/>
+                <a16:creationId xmlns:a16="http://schemas.microsoft.com/office/drawing/2014/main" id="{E93E5FA4-FC6A-46F8-B760-9D44C61C7AA9}"/>
               </a:ext>
             </a:extLst>
           </p:cNvPr>
@@ -18767,7 +18836,7 @@
           <p:cNvPr id="2" name="ANÁLISE DA SEÇÃO 8">
             <a:extLst xmlns:a="http://schemas.openxmlformats.org/drawingml/2006/main">
               <a:ext uri="{FF2B5EF4-FFF2-40B4-BE49-F238E27FC236}">
-                <a16:creationId xmlns:a16="http://schemas.microsoft.com/office/drawing/2014/main" id="{03515970-1174-49FB-ACBC-DFE094CF97AF}"/>
+                <a16:creationId xmlns:a16="http://schemas.microsoft.com/office/drawing/2014/main" id="{19126533-2EC4-42AD-BA8D-FC23E7FC3B07}"/>
               </a:ext>
             </a:extLst>
           </p:cNvPr>
@@ -18824,7 +18893,7 @@
           <p:cNvPr id="3" name="Conclusão: retomada do objetivo e dos nú">
             <a:extLst xmlns:a="http://schemas.openxmlformats.org/drawingml/2006/main">
               <a:ext uri="{FF2B5EF4-FFF2-40B4-BE49-F238E27FC236}">
-                <a16:creationId xmlns:a16="http://schemas.microsoft.com/office/drawing/2014/main" id="{691F28FB-0B2C-48BF-AF3B-EBCCB24BC699}"/>
+                <a16:creationId xmlns:a16="http://schemas.microsoft.com/office/drawing/2014/main" id="{50C54A69-E316-40A1-B52A-AFF2563FA27C}"/>
               </a:ext>
             </a:extLst>
           </p:cNvPr>
@@ -18881,7 +18950,7 @@
           <p:cNvPr id="4" name="">
             <a:extLst xmlns:a="http://schemas.openxmlformats.org/drawingml/2006/main">
               <a:ext uri="{FF2B5EF4-FFF2-40B4-BE49-F238E27FC236}">
-                <a16:creationId xmlns:a16="http://schemas.microsoft.com/office/drawing/2014/main" id="{2ED09F42-E7A3-4391-B234-F3839B4E2800}"/>
+                <a16:creationId xmlns:a16="http://schemas.microsoft.com/office/drawing/2014/main" id="{B1D062E5-7F1E-43FE-A173-836DD745B4DE}"/>
               </a:ext>
             </a:extLst>
           </p:cNvPr>
@@ -18911,7 +18980,7 @@
           <p:cNvPr id="5" name="">
             <a:extLst xmlns:a="http://schemas.openxmlformats.org/drawingml/2006/main">
               <a:ext uri="{FF2B5EF4-FFF2-40B4-BE49-F238E27FC236}">
-                <a16:creationId xmlns:a16="http://schemas.microsoft.com/office/drawing/2014/main" id="{FAC09205-4D55-4A9E-BE52-87AA28A6A53C}"/>
+                <a16:creationId xmlns:a16="http://schemas.microsoft.com/office/drawing/2014/main" id="{28FB664F-B7A7-48B6-9A4B-1F45FE29DB70}"/>
               </a:ext>
             </a:extLst>
           </p:cNvPr>
@@ -18941,7 +19010,7 @@
           <p:cNvPr id="6" name="Nguyen, Backes e Stock (2022), Seção 8, ">
             <a:extLst xmlns:a="http://schemas.openxmlformats.org/drawingml/2006/main">
               <a:ext uri="{FF2B5EF4-FFF2-40B4-BE49-F238E27FC236}">
-                <a16:creationId xmlns:a16="http://schemas.microsoft.com/office/drawing/2014/main" id="{B05EBD99-C39B-43A8-924D-70F887A72F45}"/>
+                <a16:creationId xmlns:a16="http://schemas.microsoft.com/office/drawing/2014/main" id="{1EC389C5-5E98-48FE-93F8-04C2BFACFBDF}"/>
               </a:ext>
             </a:extLst>
           </p:cNvPr>
@@ -18998,7 +19067,7 @@
           <p:cNvPr id="7" name="21 / 23">
             <a:extLst xmlns:a="http://schemas.openxmlformats.org/drawingml/2006/main">
               <a:ext uri="{FF2B5EF4-FFF2-40B4-BE49-F238E27FC236}">
-                <a16:creationId xmlns:a16="http://schemas.microsoft.com/office/drawing/2014/main" id="{E55742A4-1A6E-4E6C-AE13-04E47160D527}"/>
+                <a16:creationId xmlns:a16="http://schemas.microsoft.com/office/drawing/2014/main" id="{A692DA4A-880A-4DBA-B8F2-1772241713C3}"/>
               </a:ext>
             </a:extLst>
           </p:cNvPr>
@@ -19059,7 +19128,7 @@
           <p:nvPr/>
         </p:nvPicPr>
         <p:blipFill>
-          <a:blip xmlns:r="http://schemas.openxmlformats.org/officeDocument/2006/relationships" xmlns:a="http://schemas.openxmlformats.org/drawingml/2006/main" r:embed="Rce0c0dabff9a4525"/>
+          <a:blip xmlns:r="http://schemas.openxmlformats.org/officeDocument/2006/relationships" xmlns:a="http://schemas.openxmlformats.org/drawingml/2006/main" r:embed="R572fa5a25a994f55"/>
           <a:stretch xmlns:a="http://schemas.openxmlformats.org/drawingml/2006/main"/>
         </p:blipFill>
         <p:spPr>
@@ -19077,7 +19146,7 @@
           <p:cNvPr id="9" name="Seção 8 do artigo, reproduzida integralm">
             <a:extLst xmlns:a="http://schemas.openxmlformats.org/drawingml/2006/main">
               <a:ext uri="{FF2B5EF4-FFF2-40B4-BE49-F238E27FC236}">
-                <a16:creationId xmlns:a16="http://schemas.microsoft.com/office/drawing/2014/main" id="{FE87E140-C8ED-4922-9758-38956558C417}"/>
+                <a16:creationId xmlns:a16="http://schemas.microsoft.com/office/drawing/2014/main" id="{EA56A8EA-5ACD-422D-B056-B7D330AC719D}"/>
               </a:ext>
             </a:extLst>
           </p:cNvPr>
@@ -19134,7 +19203,7 @@
           <p:cNvPr id="10" name="EN">
             <a:extLst xmlns:a="http://schemas.openxmlformats.org/drawingml/2006/main">
               <a:ext uri="{FF2B5EF4-FFF2-40B4-BE49-F238E27FC236}">
-                <a16:creationId xmlns:a16="http://schemas.microsoft.com/office/drawing/2014/main" id="{00FE8499-35C4-408C-9F32-DD9279C0C6A4}"/>
+                <a16:creationId xmlns:a16="http://schemas.microsoft.com/office/drawing/2014/main" id="{4BA4C7FE-4E39-496F-8730-213FA636C924}"/>
               </a:ext>
             </a:extLst>
           </p:cNvPr>
@@ -19191,7 +19260,7 @@
           <p:cNvPr id="11" name="“we performed a systematic study into co">
             <a:extLst xmlns:a="http://schemas.openxmlformats.org/drawingml/2006/main">
               <a:ext uri="{FF2B5EF4-FFF2-40B4-BE49-F238E27FC236}">
-                <a16:creationId xmlns:a16="http://schemas.microsoft.com/office/drawing/2014/main" id="{FA1FACDC-02CE-40F6-8106-51AB2AC0F773}"/>
+                <a16:creationId xmlns:a16="http://schemas.microsoft.com/office/drawing/2014/main" id="{C3ED219F-33D9-444E-8364-BF89685BC909}"/>
               </a:ext>
             </a:extLst>
           </p:cNvPr>
@@ -19248,7 +19317,7 @@
           <p:cNvPr id="12" name="PT">
             <a:extLst xmlns:a="http://schemas.openxmlformats.org/drawingml/2006/main">
               <a:ext uri="{FF2B5EF4-FFF2-40B4-BE49-F238E27FC236}">
-                <a16:creationId xmlns:a16="http://schemas.microsoft.com/office/drawing/2014/main" id="{4E613578-9550-4826-A3AE-96F9F4F05FAE}"/>
+                <a16:creationId xmlns:a16="http://schemas.microsoft.com/office/drawing/2014/main" id="{AB703EF2-4F64-40C4-850F-8B587DB5A97A}"/>
               </a:ext>
             </a:extLst>
           </p:cNvPr>
@@ -19305,7 +19374,7 @@
           <p:cNvPr id="13" name="Realizamos um estudo sistemático dos avi">
             <a:extLst xmlns:a="http://schemas.openxmlformats.org/drawingml/2006/main">
               <a:ext uri="{FF2B5EF4-FFF2-40B4-BE49-F238E27FC236}">
-                <a16:creationId xmlns:a16="http://schemas.microsoft.com/office/drawing/2014/main" id="{95BBB27C-1B03-4A03-A97A-62258FD68752}"/>
+                <a16:creationId xmlns:a16="http://schemas.microsoft.com/office/drawing/2014/main" id="{0873B924-8B57-4552-8CBF-E66F2BB1961B}"/>
               </a:ext>
             </a:extLst>
           </p:cNvPr>
@@ -19362,7 +19431,7 @@
           <p:cNvPr id="14" name="">
             <a:extLst xmlns:a="http://schemas.openxmlformats.org/drawingml/2006/main">
               <a:ext uri="{FF2B5EF4-FFF2-40B4-BE49-F238E27FC236}">
-                <a16:creationId xmlns:a16="http://schemas.microsoft.com/office/drawing/2014/main" id="{2E4147A4-D759-462F-ABEE-6C4E17562457}"/>
+                <a16:creationId xmlns:a16="http://schemas.microsoft.com/office/drawing/2014/main" id="{606011F4-056C-49CF-9DEB-8A74C7474F5A}"/>
               </a:ext>
             </a:extLst>
           </p:cNvPr>
@@ -19392,7 +19461,7 @@
           <p:cNvPr id="15" name="30.160">
             <a:extLst xmlns:a="http://schemas.openxmlformats.org/drawingml/2006/main">
               <a:ext uri="{FF2B5EF4-FFF2-40B4-BE49-F238E27FC236}">
-                <a16:creationId xmlns:a16="http://schemas.microsoft.com/office/drawing/2014/main" id="{1B222748-B760-4D11-8955-12ADF687EACC}"/>
+                <a16:creationId xmlns:a16="http://schemas.microsoft.com/office/drawing/2014/main" id="{B701385C-0D68-48B2-B7B1-883AB6FCA681}"/>
               </a:ext>
             </a:extLst>
           </p:cNvPr>
@@ -19449,7 +19518,7 @@
           <p:cNvPr id="16" name="apps sem aviso que&#10;enviaram dados">
             <a:extLst xmlns:a="http://schemas.openxmlformats.org/drawingml/2006/main">
               <a:ext uri="{FF2B5EF4-FFF2-40B4-BE49-F238E27FC236}">
-                <a16:creationId xmlns:a16="http://schemas.microsoft.com/office/drawing/2014/main" id="{8371651B-0AA9-4DF2-B7DB-D8CBD81D990B}"/>
+                <a16:creationId xmlns:a16="http://schemas.microsoft.com/office/drawing/2014/main" id="{A834C251-8136-4FE2-9A00-DA98660195BF}"/>
               </a:ext>
             </a:extLst>
           </p:cNvPr>
@@ -19529,7 +19598,7 @@
           <p:cNvPr id="17" name="2.688 (20,54%)">
             <a:extLst xmlns:a="http://schemas.openxmlformats.org/drawingml/2006/main">
               <a:ext uri="{FF2B5EF4-FFF2-40B4-BE49-F238E27FC236}">
-                <a16:creationId xmlns:a16="http://schemas.microsoft.com/office/drawing/2014/main" id="{3A2EC320-ED25-4986-87CF-4434598AAB8F}"/>
+                <a16:creationId xmlns:a16="http://schemas.microsoft.com/office/drawing/2014/main" id="{74561AFA-9FCD-48CC-B8FE-6E9A023CA14B}"/>
               </a:ext>
             </a:extLst>
           </p:cNvPr>
@@ -19586,7 +19655,7 @@
           <p:cNvPr id="18" name="dos 13.082 apps com aviso,&#10;com potencial">
             <a:extLst xmlns:a="http://schemas.openxmlformats.org/drawingml/2006/main">
               <a:ext uri="{FF2B5EF4-FFF2-40B4-BE49-F238E27FC236}">
-                <a16:creationId xmlns:a16="http://schemas.microsoft.com/office/drawing/2014/main" id="{A23B370F-A335-4552-9246-8226AD60E888}"/>
+                <a16:creationId xmlns:a16="http://schemas.microsoft.com/office/drawing/2014/main" id="{1092C222-CDF8-4D4E-95A9-45BC4CF9843D}"/>
               </a:ext>
             </a:extLst>
           </p:cNvPr>
@@ -19664,7 +19733,7 @@
     </p:spTree>
     <p:extLst>
       <p:ext uri="{BB962C8B-B14F-4D97-AF65-F5344CB8AC3E}">
-        <p14:creationId xmlns:p14="http://schemas.microsoft.com/office/powerpoint/2010/main" val="1414628752"/>
+        <p14:creationId xmlns:p14="http://schemas.microsoft.com/office/powerpoint/2010/main" val="1261623168"/>
       </p:ext>
     </p:extLst>
   </p:cSld>
@@ -19695,7 +19764,7 @@
           <p:cNvPr id="20" name="">
             <a:extLst xmlns:a="http://schemas.openxmlformats.org/drawingml/2006/main">
               <a:ext uri="{FF2B5EF4-FFF2-40B4-BE49-F238E27FC236}">
-                <a16:creationId xmlns:a16="http://schemas.microsoft.com/office/drawing/2014/main" id="{2A936CBF-4443-4BB7-867D-9813F64CFB6E}"/>
+                <a16:creationId xmlns:a16="http://schemas.microsoft.com/office/drawing/2014/main" id="{3E66ABFB-6C76-48E7-ABA6-AB1DA1F428C6}"/>
               </a:ext>
             </a:extLst>
           </p:cNvPr>
@@ -19725,7 +19794,7 @@
           <p:cNvPr id="2" name="ANÁLISE DA SEÇÃO 8">
             <a:extLst xmlns:a="http://schemas.openxmlformats.org/drawingml/2006/main">
               <a:ext uri="{FF2B5EF4-FFF2-40B4-BE49-F238E27FC236}">
-                <a16:creationId xmlns:a16="http://schemas.microsoft.com/office/drawing/2014/main" id="{8D8C3370-7B85-47CD-B6B6-E6D67F43EA0E}"/>
+                <a16:creationId xmlns:a16="http://schemas.microsoft.com/office/drawing/2014/main" id="{018FD4D6-9F1C-4598-A99A-F815301DECF3}"/>
               </a:ext>
             </a:extLst>
           </p:cNvPr>
@@ -19782,7 +19851,7 @@
           <p:cNvPr id="3" name="Conclusão: transparência, suporte e caut">
             <a:extLst xmlns:a="http://schemas.openxmlformats.org/drawingml/2006/main">
               <a:ext uri="{FF2B5EF4-FFF2-40B4-BE49-F238E27FC236}">
-                <a16:creationId xmlns:a16="http://schemas.microsoft.com/office/drawing/2014/main" id="{08AFA02B-F2B9-4A58-A19B-1C192332D57A}"/>
+                <a16:creationId xmlns:a16="http://schemas.microsoft.com/office/drawing/2014/main" id="{3E2153A0-3AAF-434D-B98E-1603B75E2FC6}"/>
               </a:ext>
             </a:extLst>
           </p:cNvPr>
@@ -19839,7 +19908,7 @@
           <p:cNvPr id="4" name="">
             <a:extLst xmlns:a="http://schemas.openxmlformats.org/drawingml/2006/main">
               <a:ext uri="{FF2B5EF4-FFF2-40B4-BE49-F238E27FC236}">
-                <a16:creationId xmlns:a16="http://schemas.microsoft.com/office/drawing/2014/main" id="{0CA17AD4-5699-48E6-816B-32991C9E63B2}"/>
+                <a16:creationId xmlns:a16="http://schemas.microsoft.com/office/drawing/2014/main" id="{C393C677-51C1-4B93-8C3D-A601BD68C4A0}"/>
               </a:ext>
             </a:extLst>
           </p:cNvPr>
@@ -19869,7 +19938,7 @@
           <p:cNvPr id="5" name="">
             <a:extLst xmlns:a="http://schemas.openxmlformats.org/drawingml/2006/main">
               <a:ext uri="{FF2B5EF4-FFF2-40B4-BE49-F238E27FC236}">
-                <a16:creationId xmlns:a16="http://schemas.microsoft.com/office/drawing/2014/main" id="{01A71CAA-1CC7-41CC-9900-7C81473CF82D}"/>
+                <a16:creationId xmlns:a16="http://schemas.microsoft.com/office/drawing/2014/main" id="{BC262B17-621A-4624-84F8-42EFA898646F}"/>
               </a:ext>
             </a:extLst>
           </p:cNvPr>
@@ -19899,7 +19968,7 @@
           <p:cNvPr id="6" name="Nguyen, Backes e Stock (2022), Abstract,">
             <a:extLst xmlns:a="http://schemas.openxmlformats.org/drawingml/2006/main">
               <a:ext uri="{FF2B5EF4-FFF2-40B4-BE49-F238E27FC236}">
-                <a16:creationId xmlns:a16="http://schemas.microsoft.com/office/drawing/2014/main" id="{94F3A2C0-04BE-4BC7-A1BF-2005C7CFF442}"/>
+                <a16:creationId xmlns:a16="http://schemas.microsoft.com/office/drawing/2014/main" id="{71D9E55D-37B3-49E0-8EE2-799B400236ED}"/>
               </a:ext>
             </a:extLst>
           </p:cNvPr>
@@ -19956,7 +20025,7 @@
           <p:cNvPr id="7" name="22 / 23">
             <a:extLst xmlns:a="http://schemas.openxmlformats.org/drawingml/2006/main">
               <a:ext uri="{FF2B5EF4-FFF2-40B4-BE49-F238E27FC236}">
-                <a16:creationId xmlns:a16="http://schemas.microsoft.com/office/drawing/2014/main" id="{BC8E5CD3-0D4F-4666-9985-F3A29DCB508A}"/>
+                <a16:creationId xmlns:a16="http://schemas.microsoft.com/office/drawing/2014/main" id="{97F17288-0888-467F-807E-45929B7B224B}"/>
               </a:ext>
             </a:extLst>
           </p:cNvPr>
@@ -20013,7 +20082,7 @@
           <p:cNvPr id="8" name="EN">
             <a:extLst xmlns:a="http://schemas.openxmlformats.org/drawingml/2006/main">
               <a:ext uri="{FF2B5EF4-FFF2-40B4-BE49-F238E27FC236}">
-                <a16:creationId xmlns:a16="http://schemas.microsoft.com/office/drawing/2014/main" id="{0C8E0C05-6F6A-41A3-A87F-518B5D81DC2C}"/>
+                <a16:creationId xmlns:a16="http://schemas.microsoft.com/office/drawing/2014/main" id="{F4B6627A-6864-4582-BAC4-CAE9F7533977}"/>
               </a:ext>
             </a:extLst>
           </p:cNvPr>
@@ -20070,7 +20139,7 @@
           <p:cNvPr id="9" name="“Our study showed the urgent need for mo">
             <a:extLst xmlns:a="http://schemas.openxmlformats.org/drawingml/2006/main">
               <a:ext uri="{FF2B5EF4-FFF2-40B4-BE49-F238E27FC236}">
-                <a16:creationId xmlns:a16="http://schemas.microsoft.com/office/drawing/2014/main" id="{4B6CB3E8-F5C7-460A-B916-BAE7CEF089D7}"/>
+                <a16:creationId xmlns:a16="http://schemas.microsoft.com/office/drawing/2014/main" id="{CEF5311B-C839-48D8-B3CB-E2C5EF0AB97B}"/>
               </a:ext>
             </a:extLst>
           </p:cNvPr>
@@ -20127,7 +20196,7 @@
           <p:cNvPr id="10" name="PT">
             <a:extLst xmlns:a="http://schemas.openxmlformats.org/drawingml/2006/main">
               <a:ext uri="{FF2B5EF4-FFF2-40B4-BE49-F238E27FC236}">
-                <a16:creationId xmlns:a16="http://schemas.microsoft.com/office/drawing/2014/main" id="{4E8F7D0E-5079-4D6E-903E-029061321B1D}"/>
+                <a16:creationId xmlns:a16="http://schemas.microsoft.com/office/drawing/2014/main" id="{D30ABBD3-6934-4FA0-838E-6922234B9D71}"/>
               </a:ext>
             </a:extLst>
           </p:cNvPr>
@@ -20184,7 +20253,7 @@
           <p:cNvPr id="11" name="Nosso estudo mostrou a necessidade urgen">
             <a:extLst xmlns:a="http://schemas.openxmlformats.org/drawingml/2006/main">
               <a:ext uri="{FF2B5EF4-FFF2-40B4-BE49-F238E27FC236}">
-                <a16:creationId xmlns:a16="http://schemas.microsoft.com/office/drawing/2014/main" id="{FF4149AC-99EA-4313-9891-EB4F4877C8D8}"/>
+                <a16:creationId xmlns:a16="http://schemas.microsoft.com/office/drawing/2014/main" id="{19465716-C18A-445D-BD63-D9B48385AA82}"/>
               </a:ext>
             </a:extLst>
           </p:cNvPr>
@@ -20241,7 +20310,7 @@
           <p:cNvPr id="12" name="">
             <a:extLst xmlns:a="http://schemas.openxmlformats.org/drawingml/2006/main">
               <a:ext uri="{FF2B5EF4-FFF2-40B4-BE49-F238E27FC236}">
-                <a16:creationId xmlns:a16="http://schemas.microsoft.com/office/drawing/2014/main" id="{22E0E060-D385-4041-9C7A-614D03DF7275}"/>
+                <a16:creationId xmlns:a16="http://schemas.microsoft.com/office/drawing/2014/main" id="{F8CF8C0F-7F44-4F9B-94C5-5F2EBE85BFCD}"/>
               </a:ext>
             </a:extLst>
           </p:cNvPr>
@@ -20271,7 +20340,7 @@
           <p:cNvPr id="13" name="ABSTRACT">
             <a:extLst xmlns:a="http://schemas.openxmlformats.org/drawingml/2006/main">
               <a:ext uri="{FF2B5EF4-FFF2-40B4-BE49-F238E27FC236}">
-                <a16:creationId xmlns:a16="http://schemas.microsoft.com/office/drawing/2014/main" id="{B92BD595-0089-444B-BF6A-6DE920C2C558}"/>
+                <a16:creationId xmlns:a16="http://schemas.microsoft.com/office/drawing/2014/main" id="{192C9E6B-9577-4C66-833D-FA200AD5953A}"/>
               </a:ext>
             </a:extLst>
           </p:cNvPr>
@@ -20328,7 +20397,7 @@
           <p:cNvPr id="14" name="EN  “apps violate”">
             <a:extLst xmlns:a="http://schemas.openxmlformats.org/drawingml/2006/main">
               <a:ext uri="{FF2B5EF4-FFF2-40B4-BE49-F238E27FC236}">
-                <a16:creationId xmlns:a16="http://schemas.microsoft.com/office/drawing/2014/main" id="{C6AA197C-7220-4F24-9497-E1BAC8DFCBA5}"/>
+                <a16:creationId xmlns:a16="http://schemas.microsoft.com/office/drawing/2014/main" id="{58A6A5F8-0E7D-43F1-950E-837952220AC2}"/>
               </a:ext>
             </a:extLst>
           </p:cNvPr>
@@ -20385,7 +20454,7 @@
           <p:cNvPr id="15" name="PT  aplicativos violam">
             <a:extLst xmlns:a="http://schemas.openxmlformats.org/drawingml/2006/main">
               <a:ext uri="{FF2B5EF4-FFF2-40B4-BE49-F238E27FC236}">
-                <a16:creationId xmlns:a16="http://schemas.microsoft.com/office/drawing/2014/main" id="{9C6EDB22-383C-4432-8BBD-BC1EAF97D2C6}"/>
+                <a16:creationId xmlns:a16="http://schemas.microsoft.com/office/drawing/2014/main" id="{18448069-E63B-47BE-8ADC-1C441A940553}"/>
               </a:ext>
             </a:extLst>
           </p:cNvPr>
@@ -20442,7 +20511,7 @@
           <p:cNvPr id="16" name="CONCLUSION">
             <a:extLst xmlns:a="http://schemas.openxmlformats.org/drawingml/2006/main">
               <a:ext uri="{FF2B5EF4-FFF2-40B4-BE49-F238E27FC236}">
-                <a16:creationId xmlns:a16="http://schemas.microsoft.com/office/drawing/2014/main" id="{717E9592-B880-49F6-85DA-147E528362C3}"/>
+                <a16:creationId xmlns:a16="http://schemas.microsoft.com/office/drawing/2014/main" id="{5372C517-5941-4C1B-8DF7-47AB20A68EB9}"/>
               </a:ext>
             </a:extLst>
           </p:cNvPr>
@@ -20499,7 +20568,7 @@
           <p:cNvPr id="17" name="EN  “apps potentially violate”">
             <a:extLst xmlns:a="http://schemas.openxmlformats.org/drawingml/2006/main">
               <a:ext uri="{FF2B5EF4-FFF2-40B4-BE49-F238E27FC236}">
-                <a16:creationId xmlns:a16="http://schemas.microsoft.com/office/drawing/2014/main" id="{CBD9AA35-9368-42DE-B54E-6FCBBB10FDA3}"/>
+                <a16:creationId xmlns:a16="http://schemas.microsoft.com/office/drawing/2014/main" id="{DB03AC1F-30DC-4472-8811-9E75C8C9493A}"/>
               </a:ext>
             </a:extLst>
           </p:cNvPr>
@@ -20556,7 +20625,7 @@
           <p:cNvPr id="18" name="PT  aplicativos potencialmente violam">
             <a:extLst xmlns:a="http://schemas.openxmlformats.org/drawingml/2006/main">
               <a:ext uri="{FF2B5EF4-FFF2-40B4-BE49-F238E27FC236}">
-                <a16:creationId xmlns:a16="http://schemas.microsoft.com/office/drawing/2014/main" id="{B8A7CA61-22F4-4377-9A3B-3EAD35C31DBF}"/>
+                <a16:creationId xmlns:a16="http://schemas.microsoft.com/office/drawing/2014/main" id="{08221B71-40FE-491B-ADF8-9A79E14F654B}"/>
               </a:ext>
             </a:extLst>
           </p:cNvPr>
@@ -20613,7 +20682,7 @@
           <p:cNvPr id="19" name="Análise do seminário: “potentially” expl">
             <a:extLst xmlns:a="http://schemas.openxmlformats.org/drawingml/2006/main">
               <a:ext uri="{FF2B5EF4-FFF2-40B4-BE49-F238E27FC236}">
-                <a16:creationId xmlns:a16="http://schemas.microsoft.com/office/drawing/2014/main" id="{9DB6FD89-4B21-433D-B264-70B646708D7D}"/>
+                <a16:creationId xmlns:a16="http://schemas.microsoft.com/office/drawing/2014/main" id="{AD61CFAA-AEA9-479D-BFAA-878E79062081}"/>
               </a:ext>
             </a:extLst>
           </p:cNvPr>
@@ -20668,7 +20737,7 @@
     </p:spTree>
     <p:extLst>
       <p:ext uri="{BB962C8B-B14F-4D97-AF65-F5344CB8AC3E}">
-        <p14:creationId xmlns:p14="http://schemas.microsoft.com/office/powerpoint/2010/main" val="1320093411"/>
+        <p14:creationId xmlns:p14="http://schemas.microsoft.com/office/powerpoint/2010/main" val="2074659549"/>
       </p:ext>
     </p:extLst>
   </p:cSld>
@@ -20699,7 +20768,7 @@
           <p:cNvPr id="18" name="">
             <a:extLst xmlns:a="http://schemas.openxmlformats.org/drawingml/2006/main">
               <a:ext uri="{FF2B5EF4-FFF2-40B4-BE49-F238E27FC236}">
-                <a16:creationId xmlns:a16="http://schemas.microsoft.com/office/drawing/2014/main" id="{A9E846A9-B289-481E-9465-B278728762CF}"/>
+                <a16:creationId xmlns:a16="http://schemas.microsoft.com/office/drawing/2014/main" id="{3CEF2252-BD3A-4390-B12F-4FB1BC7E2B73}"/>
               </a:ext>
             </a:extLst>
           </p:cNvPr>
@@ -20729,7 +20798,7 @@
           <p:cNvPr id="2" name="APLICAÇÃO AO PROJETO">
             <a:extLst xmlns:a="http://schemas.openxmlformats.org/drawingml/2006/main">
               <a:ext uri="{FF2B5EF4-FFF2-40B4-BE49-F238E27FC236}">
-                <a16:creationId xmlns:a16="http://schemas.microsoft.com/office/drawing/2014/main" id="{8F29018B-C5DC-4DEC-B2AE-F9FEBA6E8D7D}"/>
+                <a16:creationId xmlns:a16="http://schemas.microsoft.com/office/drawing/2014/main" id="{5EB49831-4BD0-4982-A699-31A13177703C}"/>
               </a:ext>
             </a:extLst>
           </p:cNvPr>
@@ -20786,7 +20855,7 @@
           <p:cNvPr id="3" name="Contribuições para o meu TCC">
             <a:extLst xmlns:a="http://schemas.openxmlformats.org/drawingml/2006/main">
               <a:ext uri="{FF2B5EF4-FFF2-40B4-BE49-F238E27FC236}">
-                <a16:creationId xmlns:a16="http://schemas.microsoft.com/office/drawing/2014/main" id="{19D4E716-F836-46D9-B81C-BA27C14CC7AF}"/>
+                <a16:creationId xmlns:a16="http://schemas.microsoft.com/office/drawing/2014/main" id="{9FFC13B1-F8D6-48D1-841B-E7BAD2EDFEFE}"/>
               </a:ext>
             </a:extLst>
           </p:cNvPr>
@@ -20843,7 +20912,7 @@
           <p:cNvPr id="4" name="">
             <a:extLst xmlns:a="http://schemas.openxmlformats.org/drawingml/2006/main">
               <a:ext uri="{FF2B5EF4-FFF2-40B4-BE49-F238E27FC236}">
-                <a16:creationId xmlns:a16="http://schemas.microsoft.com/office/drawing/2014/main" id="{0C5C1F3F-C222-4444-99F3-99BB402EF452}"/>
+                <a16:creationId xmlns:a16="http://schemas.microsoft.com/office/drawing/2014/main" id="{153FB4D8-D91D-4E01-A2C8-549A1B147F8B}"/>
               </a:ext>
             </a:extLst>
           </p:cNvPr>
@@ -20873,7 +20942,7 @@
           <p:cNvPr id="5" name="">
             <a:extLst xmlns:a="http://schemas.openxmlformats.org/drawingml/2006/main">
               <a:ext uri="{FF2B5EF4-FFF2-40B4-BE49-F238E27FC236}">
-                <a16:creationId xmlns:a16="http://schemas.microsoft.com/office/drawing/2014/main" id="{F3D957EF-34C4-462E-9739-185E101FE468}"/>
+                <a16:creationId xmlns:a16="http://schemas.microsoft.com/office/drawing/2014/main" id="{DBA95A01-321C-4FA9-9433-B4E12CAC85F8}"/>
               </a:ext>
             </a:extLst>
           </p:cNvPr>
@@ -20903,7 +20972,7 @@
           <p:cNvPr id="6" name="Fontes: artigo de Nguyen et al. (2022) e">
             <a:extLst xmlns:a="http://schemas.openxmlformats.org/drawingml/2006/main">
               <a:ext uri="{FF2B5EF4-FFF2-40B4-BE49-F238E27FC236}">
-                <a16:creationId xmlns:a16="http://schemas.microsoft.com/office/drawing/2014/main" id="{885640DB-8830-45ED-85E4-5871A0D481E6}"/>
+                <a16:creationId xmlns:a16="http://schemas.microsoft.com/office/drawing/2014/main" id="{43A02A25-FD24-4D70-A9D4-2823C35E10B4}"/>
               </a:ext>
             </a:extLst>
           </p:cNvPr>
@@ -20960,7 +21029,7 @@
           <p:cNvPr id="7" name="23 / 23">
             <a:extLst xmlns:a="http://schemas.openxmlformats.org/drawingml/2006/main">
               <a:ext uri="{FF2B5EF4-FFF2-40B4-BE49-F238E27FC236}">
-                <a16:creationId xmlns:a16="http://schemas.microsoft.com/office/drawing/2014/main" id="{34420174-6E87-4928-9823-5322CCBE234A}"/>
+                <a16:creationId xmlns:a16="http://schemas.microsoft.com/office/drawing/2014/main" id="{D4C9E6AC-F7B1-4CFC-BA24-FC233022C469}"/>
               </a:ext>
             </a:extLst>
           </p:cNvPr>
@@ -21017,7 +21086,7 @@
           <p:cNvPr id="8" name="MÉTODO">
             <a:extLst xmlns:a="http://schemas.openxmlformats.org/drawingml/2006/main">
               <a:ext uri="{FF2B5EF4-FFF2-40B4-BE49-F238E27FC236}">
-                <a16:creationId xmlns:a16="http://schemas.microsoft.com/office/drawing/2014/main" id="{FDC5789C-07BA-48B0-B181-C9797AE47C72}"/>
+                <a16:creationId xmlns:a16="http://schemas.microsoft.com/office/drawing/2014/main" id="{F3F1C5B8-42C2-44DD-A6DF-E482CD338E45}"/>
               </a:ext>
             </a:extLst>
           </p:cNvPr>
@@ -21074,7 +21143,7 @@
           <p:cNvPr id="9" name="Relacionar as interfaces e declarações d">
             <a:extLst xmlns:a="http://schemas.openxmlformats.org/drawingml/2006/main">
               <a:ext uri="{FF2B5EF4-FFF2-40B4-BE49-F238E27FC236}">
-                <a16:creationId xmlns:a16="http://schemas.microsoft.com/office/drawing/2014/main" id="{6ACFB781-6F7C-435A-9C11-7D650957E1A2}"/>
+                <a16:creationId xmlns:a16="http://schemas.microsoft.com/office/drawing/2014/main" id="{CCC9F957-0B5F-4969-B83E-BD3FEAC5C46C}"/>
               </a:ext>
             </a:extLst>
           </p:cNvPr>
@@ -21154,7 +21223,7 @@
           <p:cNvPr id="10" name="">
             <a:extLst xmlns:a="http://schemas.openxmlformats.org/drawingml/2006/main">
               <a:ext uri="{FF2B5EF4-FFF2-40B4-BE49-F238E27FC236}">
-                <a16:creationId xmlns:a16="http://schemas.microsoft.com/office/drawing/2014/main" id="{C73381B7-A084-4D2D-9749-160E8F28BBE6}"/>
+                <a16:creationId xmlns:a16="http://schemas.microsoft.com/office/drawing/2014/main" id="{4B57598C-90D8-4197-8BA1-CB7629678183}"/>
               </a:ext>
             </a:extLst>
           </p:cNvPr>
@@ -21184,7 +21253,7 @@
           <p:cNvPr id="11" name="ESCRITA">
             <a:extLst xmlns:a="http://schemas.openxmlformats.org/drawingml/2006/main">
               <a:ext uri="{FF2B5EF4-FFF2-40B4-BE49-F238E27FC236}">
-                <a16:creationId xmlns:a16="http://schemas.microsoft.com/office/drawing/2014/main" id="{2C3CFED0-3A0B-434C-B1D0-29DC6505D5C8}"/>
+                <a16:creationId xmlns:a16="http://schemas.microsoft.com/office/drawing/2014/main" id="{1A7D13C7-0D41-4773-B216-0A0DC0E41ADA}"/>
               </a:ext>
             </a:extLst>
           </p:cNvPr>
@@ -21241,7 +21310,7 @@
           <p:cNvPr id="12" name="Informar perdas da análise, limitações e">
             <a:extLst xmlns:a="http://schemas.openxmlformats.org/drawingml/2006/main">
               <a:ext uri="{FF2B5EF4-FFF2-40B4-BE49-F238E27FC236}">
-                <a16:creationId xmlns:a16="http://schemas.microsoft.com/office/drawing/2014/main" id="{94827551-5B51-4276-A756-2B87478C216A}"/>
+                <a16:creationId xmlns:a16="http://schemas.microsoft.com/office/drawing/2014/main" id="{C3B3F1D4-5F1E-4CB2-B705-9859303AEA37}"/>
               </a:ext>
             </a:extLst>
           </p:cNvPr>
@@ -21321,7 +21390,7 @@
           <p:cNvPr id="13" name="">
             <a:extLst xmlns:a="http://schemas.openxmlformats.org/drawingml/2006/main">
               <a:ext uri="{FF2B5EF4-FFF2-40B4-BE49-F238E27FC236}">
-                <a16:creationId xmlns:a16="http://schemas.microsoft.com/office/drawing/2014/main" id="{9382DFB9-99C5-42DE-AB8B-C3548D2E24C6}"/>
+                <a16:creationId xmlns:a16="http://schemas.microsoft.com/office/drawing/2014/main" id="{571236BE-6489-4D3C-950F-754E6D311577}"/>
               </a:ext>
             </a:extLst>
           </p:cNvPr>
@@ -21351,7 +21420,7 @@
           <p:cNvPr id="14" name="RECORTE">
             <a:extLst xmlns:a="http://schemas.openxmlformats.org/drawingml/2006/main">
               <a:ext uri="{FF2B5EF4-FFF2-40B4-BE49-F238E27FC236}">
-                <a16:creationId xmlns:a16="http://schemas.microsoft.com/office/drawing/2014/main" id="{C39A6B6F-BF66-43E9-BDE3-367A89ADE55E}"/>
+                <a16:creationId xmlns:a16="http://schemas.microsoft.com/office/drawing/2014/main" id="{FAAA7B0A-5245-4BFA-9F81-567A6AB26D46}"/>
               </a:ext>
             </a:extLst>
           </p:cNvPr>
@@ -21408,7 +21477,7 @@
           <p:cNvPr id="15" name="Investigar aplicativos governamentais br">
             <a:extLst xmlns:a="http://schemas.openxmlformats.org/drawingml/2006/main">
               <a:ext uri="{FF2B5EF4-FFF2-40B4-BE49-F238E27FC236}">
-                <a16:creationId xmlns:a16="http://schemas.microsoft.com/office/drawing/2014/main" id="{57C8DE73-D7CE-439A-B117-3F2F292671A4}"/>
+                <a16:creationId xmlns:a16="http://schemas.microsoft.com/office/drawing/2014/main" id="{1D0ADE23-F91B-46AF-85A6-09ED94D83AC6}"/>
               </a:ext>
             </a:extLst>
           </p:cNvPr>
@@ -21488,7 +21557,7 @@
           <p:cNvPr id="16" name="">
             <a:extLst xmlns:a="http://schemas.openxmlformats.org/drawingml/2006/main">
               <a:ext uri="{FF2B5EF4-FFF2-40B4-BE49-F238E27FC236}">
-                <a16:creationId xmlns:a16="http://schemas.microsoft.com/office/drawing/2014/main" id="{9256CCCA-0313-4510-9AB4-C92B8BB687A1}"/>
+                <a16:creationId xmlns:a16="http://schemas.microsoft.com/office/drawing/2014/main" id="{B794715D-E115-46D2-97B5-EAEC3CB1C42E}"/>
               </a:ext>
             </a:extLst>
           </p:cNvPr>
@@ -21518,7 +21587,7 @@
           <p:cNvPr id="17" name="Que dados os apps governamentais enviam ">
             <a:extLst xmlns:a="http://schemas.openxmlformats.org/drawingml/2006/main">
               <a:ext uri="{FF2B5EF4-FFF2-40B4-BE49-F238E27FC236}">
-                <a16:creationId xmlns:a16="http://schemas.microsoft.com/office/drawing/2014/main" id="{2EE396FE-9E6A-4248-8D9B-86DFB3C4F88E}"/>
+                <a16:creationId xmlns:a16="http://schemas.microsoft.com/office/drawing/2014/main" id="{4B725100-75B4-4DD1-80D9-2A84B36121B8}"/>
               </a:ext>
             </a:extLst>
           </p:cNvPr>
@@ -21596,7 +21665,7 @@
     </p:spTree>
     <p:extLst>
       <p:ext uri="{BB962C8B-B14F-4D97-AF65-F5344CB8AC3E}">
-        <p14:creationId xmlns:p14="http://schemas.microsoft.com/office/powerpoint/2010/main" val="1009302349"/>
+        <p14:creationId xmlns:p14="http://schemas.microsoft.com/office/powerpoint/2010/main" val="1648870052"/>
       </p:ext>
     </p:extLst>
   </p:cSld>
@@ -21627,7 +21696,7 @@
           <p:cNvPr id="10" name="">
             <a:extLst xmlns:a="http://schemas.openxmlformats.org/drawingml/2006/main">
               <a:ext uri="{FF2B5EF4-FFF2-40B4-BE49-F238E27FC236}">
-                <a16:creationId xmlns:a16="http://schemas.microsoft.com/office/drawing/2014/main" id="{5B3B1B59-A487-4A91-90A7-1BE578210DA9}"/>
+                <a16:creationId xmlns:a16="http://schemas.microsoft.com/office/drawing/2014/main" id="{B53FE043-7F5F-470F-B0D9-CC336B558C90}"/>
               </a:ext>
             </a:extLst>
           </p:cNvPr>
@@ -21657,7 +21726,7 @@
           <p:cNvPr id="2" name="APOIO: SELEÇÃO">
             <a:extLst xmlns:a="http://schemas.openxmlformats.org/drawingml/2006/main">
               <a:ext uri="{FF2B5EF4-FFF2-40B4-BE49-F238E27FC236}">
-                <a16:creationId xmlns:a16="http://schemas.microsoft.com/office/drawing/2014/main" id="{3B710465-2369-4F61-AE25-E2FBB1F09C09}"/>
+                <a16:creationId xmlns:a16="http://schemas.microsoft.com/office/drawing/2014/main" id="{0B90D7FE-D1E5-4E3F-B50B-86ABCC1B238D}"/>
               </a:ext>
             </a:extLst>
           </p:cNvPr>
@@ -21714,7 +21783,7 @@
           <p:cNvPr id="3" name="Os cinco finalistas da seleção">
             <a:extLst xmlns:a="http://schemas.openxmlformats.org/drawingml/2006/main">
               <a:ext uri="{FF2B5EF4-FFF2-40B4-BE49-F238E27FC236}">
-                <a16:creationId xmlns:a16="http://schemas.microsoft.com/office/drawing/2014/main" id="{D0251A63-5D98-4CED-BE0F-8B71D6C9E9CB}"/>
+                <a16:creationId xmlns:a16="http://schemas.microsoft.com/office/drawing/2014/main" id="{CB9C0884-BB49-4670-8F82-7ABA9A7E49F0}"/>
               </a:ext>
             </a:extLst>
           </p:cNvPr>
@@ -21771,7 +21840,7 @@
           <p:cNvPr id="4" name="">
             <a:extLst xmlns:a="http://schemas.openxmlformats.org/drawingml/2006/main">
               <a:ext uri="{FF2B5EF4-FFF2-40B4-BE49-F238E27FC236}">
-                <a16:creationId xmlns:a16="http://schemas.microsoft.com/office/drawing/2014/main" id="{C2B7B68D-8670-4736-9BAE-A6AC0B007210}"/>
+                <a16:creationId xmlns:a16="http://schemas.microsoft.com/office/drawing/2014/main" id="{05B0E472-2071-492C-B42F-CC43EB3C709E}"/>
               </a:ext>
             </a:extLst>
           </p:cNvPr>
@@ -21801,7 +21870,7 @@
           <p:cNvPr id="5" name="">
             <a:extLst xmlns:a="http://schemas.openxmlformats.org/drawingml/2006/main">
               <a:ext uri="{FF2B5EF4-FFF2-40B4-BE49-F238E27FC236}">
-                <a16:creationId xmlns:a16="http://schemas.microsoft.com/office/drawing/2014/main" id="{DD2B15D9-65B3-46A6-B03E-C10F5D71E840}"/>
+                <a16:creationId xmlns:a16="http://schemas.microsoft.com/office/drawing/2014/main" id="{C619AA50-3875-45C7-BDCB-77BFFE087582}"/>
               </a:ext>
             </a:extLst>
           </p:cNvPr>
@@ -21831,7 +21900,7 @@
           <p:cNvPr id="6" name="Fontes: Scopus via CAPES/CAFe (21/09/202">
             <a:extLst xmlns:a="http://schemas.openxmlformats.org/drawingml/2006/main">
               <a:ext uri="{FF2B5EF4-FFF2-40B4-BE49-F238E27FC236}">
-                <a16:creationId xmlns:a16="http://schemas.microsoft.com/office/drawing/2014/main" id="{D7C4EEC7-C425-464D-87D7-56A245A8A1EF}"/>
+                <a16:creationId xmlns:a16="http://schemas.microsoft.com/office/drawing/2014/main" id="{4C89A84E-004D-4922-95D5-FE0B8A69C521}"/>
               </a:ext>
             </a:extLst>
           </p:cNvPr>
@@ -21888,7 +21957,7 @@
           <p:cNvPr id="7" name="APOIO 1">
             <a:extLst xmlns:a="http://schemas.openxmlformats.org/drawingml/2006/main">
               <a:ext uri="{FF2B5EF4-FFF2-40B4-BE49-F238E27FC236}">
-                <a16:creationId xmlns:a16="http://schemas.microsoft.com/office/drawing/2014/main" id="{AE48465F-A078-42AA-B9AC-81AF0B2C7FE8}"/>
+                <a16:creationId xmlns:a16="http://schemas.microsoft.com/office/drawing/2014/main" id="{99AC486B-2E5D-405F-B10B-6A0D7C1AEC3C}"/>
               </a:ext>
             </a:extLst>
           </p:cNvPr>
@@ -23247,7 +23316,7 @@
           <p:cNvPr id="9" name="Citações e classificação complementam a ">
             <a:extLst xmlns:a="http://schemas.openxmlformats.org/drawingml/2006/main">
               <a:ext uri="{FF2B5EF4-FFF2-40B4-BE49-F238E27FC236}">
-                <a16:creationId xmlns:a16="http://schemas.microsoft.com/office/drawing/2014/main" id="{4447C0CF-07A3-4863-BFAF-1549BC8B1FE3}"/>
+                <a16:creationId xmlns:a16="http://schemas.microsoft.com/office/drawing/2014/main" id="{B8BE6745-1EAA-4C55-845C-26938D590D75}"/>
               </a:ext>
             </a:extLst>
           </p:cNvPr>
@@ -23302,7 +23371,7 @@
     </p:spTree>
     <p:extLst>
       <p:ext uri="{BB962C8B-B14F-4D97-AF65-F5344CB8AC3E}">
-        <p14:creationId xmlns:p14="http://schemas.microsoft.com/office/powerpoint/2010/main" val="275537605"/>
+        <p14:creationId xmlns:p14="http://schemas.microsoft.com/office/powerpoint/2010/main" val="872901211"/>
       </p:ext>
     </p:extLst>
   </p:cSld>
@@ -23333,7 +23402,7 @@
           <p:cNvPr id="15" name="">
             <a:extLst xmlns:a="http://schemas.openxmlformats.org/drawingml/2006/main">
               <a:ext uri="{FF2B5EF4-FFF2-40B4-BE49-F238E27FC236}">
-                <a16:creationId xmlns:a16="http://schemas.microsoft.com/office/drawing/2014/main" id="{4DB3A64F-35C9-4253-A5EA-A595A4624B0C}"/>
+                <a16:creationId xmlns:a16="http://schemas.microsoft.com/office/drawing/2014/main" id="{2B4B1A20-9371-4A0F-B665-A161C2B2C3AE}"/>
               </a:ext>
             </a:extLst>
           </p:cNvPr>
@@ -23363,7 +23432,7 @@
           <p:cNvPr id="2" name="APOIO: FONTES">
             <a:extLst xmlns:a="http://schemas.openxmlformats.org/drawingml/2006/main">
               <a:ext uri="{FF2B5EF4-FFF2-40B4-BE49-F238E27FC236}">
-                <a16:creationId xmlns:a16="http://schemas.microsoft.com/office/drawing/2014/main" id="{E409EF4B-F774-414D-AE62-A1373783B9F1}"/>
+                <a16:creationId xmlns:a16="http://schemas.microsoft.com/office/drawing/2014/main" id="{C4565919-BD4E-4A9A-A93B-FA482D05C410}"/>
               </a:ext>
             </a:extLst>
           </p:cNvPr>
@@ -23420,7 +23489,7 @@
           <p:cNvPr id="3" name="Referências e rastreabilidade">
             <a:extLst xmlns:a="http://schemas.openxmlformats.org/drawingml/2006/main">
               <a:ext uri="{FF2B5EF4-FFF2-40B4-BE49-F238E27FC236}">
-                <a16:creationId xmlns:a16="http://schemas.microsoft.com/office/drawing/2014/main" id="{C14278F9-1088-453F-A4F0-F95E4BD79EF2}"/>
+                <a16:creationId xmlns:a16="http://schemas.microsoft.com/office/drawing/2014/main" id="{2D3F848C-6125-4427-8A84-2FF2B478CA78}"/>
               </a:ext>
             </a:extLst>
           </p:cNvPr>
@@ -23477,7 +23546,7 @@
           <p:cNvPr id="4" name="">
             <a:extLst xmlns:a="http://schemas.openxmlformats.org/drawingml/2006/main">
               <a:ext uri="{FF2B5EF4-FFF2-40B4-BE49-F238E27FC236}">
-                <a16:creationId xmlns:a16="http://schemas.microsoft.com/office/drawing/2014/main" id="{C67EE91E-D6FD-4CC8-AA4C-03168C633177}"/>
+                <a16:creationId xmlns:a16="http://schemas.microsoft.com/office/drawing/2014/main" id="{71AEB447-9CB2-4235-9B2F-F96E6D88DE7D}"/>
               </a:ext>
             </a:extLst>
           </p:cNvPr>
@@ -23507,7 +23576,7 @@
           <p:cNvPr id="5" name="">
             <a:extLst xmlns:a="http://schemas.openxmlformats.org/drawingml/2006/main">
               <a:ext uri="{FF2B5EF4-FFF2-40B4-BE49-F238E27FC236}">
-                <a16:creationId xmlns:a16="http://schemas.microsoft.com/office/drawing/2014/main" id="{35BF7F96-9E6F-4AD1-B2B0-60FA2E13EBDF}"/>
+                <a16:creationId xmlns:a16="http://schemas.microsoft.com/office/drawing/2014/main" id="{80CE2D65-8AD3-4CAE-BE2A-EA903D528E6E}"/>
               </a:ext>
             </a:extLst>
           </p:cNvPr>
@@ -23537,7 +23606,7 @@
           <p:cNvPr id="6" name="Páginas dos slides: contagem interna do ">
             <a:extLst xmlns:a="http://schemas.openxmlformats.org/drawingml/2006/main">
               <a:ext uri="{FF2B5EF4-FFF2-40B4-BE49-F238E27FC236}">
-                <a16:creationId xmlns:a16="http://schemas.microsoft.com/office/drawing/2014/main" id="{CDC9B96D-EA90-4C3C-BF56-33820656819D}"/>
+                <a16:creationId xmlns:a16="http://schemas.microsoft.com/office/drawing/2014/main" id="{6BFC9537-51C5-485E-A5FF-9F78681E8D0A}"/>
               </a:ext>
             </a:extLst>
           </p:cNvPr>
@@ -23594,7 +23663,7 @@
           <p:cNvPr id="7" name="APOIO 2">
             <a:extLst xmlns:a="http://schemas.openxmlformats.org/drawingml/2006/main">
               <a:ext uri="{FF2B5EF4-FFF2-40B4-BE49-F238E27FC236}">
-                <a16:creationId xmlns:a16="http://schemas.microsoft.com/office/drawing/2014/main" id="{2763D525-BAB5-4AD8-8B3A-022A203BA439}"/>
+                <a16:creationId xmlns:a16="http://schemas.microsoft.com/office/drawing/2014/main" id="{B8FD1BA0-334B-4048-A8C8-986A7E84FBD9}"/>
               </a:ext>
             </a:extLst>
           </p:cNvPr>
@@ -23651,7 +23720,7 @@
           <p:cNvPr id="8" name="ARTIGO ANALISADO">
             <a:extLst xmlns:a="http://schemas.openxmlformats.org/drawingml/2006/main">
               <a:ext uri="{FF2B5EF4-FFF2-40B4-BE49-F238E27FC236}">
-                <a16:creationId xmlns:a16="http://schemas.microsoft.com/office/drawing/2014/main" id="{811CE3DC-8FBE-4C86-A09F-98E3000A8554}"/>
+                <a16:creationId xmlns:a16="http://schemas.microsoft.com/office/drawing/2014/main" id="{E6BB84C6-BE0C-4BAE-929C-BAED615AF7EF}"/>
               </a:ext>
             </a:extLst>
           </p:cNvPr>
@@ -23708,7 +23777,7 @@
           <p:cNvPr id="9" name="NGUYEN, Trung Tin; BACKES, Michael; STOC">
             <a:extLst xmlns:a="http://schemas.openxmlformats.org/drawingml/2006/main">
               <a:ext uri="{FF2B5EF4-FFF2-40B4-BE49-F238E27FC236}">
-                <a16:creationId xmlns:a16="http://schemas.microsoft.com/office/drawing/2014/main" id="{BDC6A57E-17B4-452D-87F7-75AC42E9405C}"/>
+                <a16:creationId xmlns:a16="http://schemas.microsoft.com/office/drawing/2014/main" id="{F52C0600-BB4D-4173-93B4-7D354D455626}"/>
               </a:ext>
             </a:extLst>
           </p:cNvPr>
@@ -23811,7 +23880,7 @@
           <p:cNvPr id="10" name="https://doi.org/10.1145/3548606.3560564">
             <a:extLst xmlns:a="http://schemas.openxmlformats.org/drawingml/2006/main">
               <a:ext uri="{FF2B5EF4-FFF2-40B4-BE49-F238E27FC236}">
-                <a16:creationId xmlns:a16="http://schemas.microsoft.com/office/drawing/2014/main" id="{7229A963-6A3B-48CE-939B-0613839A3723}"/>
+                <a16:creationId xmlns:a16="http://schemas.microsoft.com/office/drawing/2014/main" id="{95F8C60D-0A49-4747-9BB4-813D5EBAFB64}"/>
               </a:ext>
             </a:extLst>
           </p:cNvPr>
@@ -23868,7 +23937,7 @@
           <p:cNvPr id="11" name="PROJETO E REGISTRO DA SELEÇÃO">
             <a:extLst xmlns:a="http://schemas.openxmlformats.org/drawingml/2006/main">
               <a:ext uri="{FF2B5EF4-FFF2-40B4-BE49-F238E27FC236}">
-                <a16:creationId xmlns:a16="http://schemas.microsoft.com/office/drawing/2014/main" id="{4253C281-35B6-4F4F-9F50-D291D5F5D234}"/>
+                <a16:creationId xmlns:a16="http://schemas.microsoft.com/office/drawing/2014/main" id="{E4386D60-3836-4531-9AE6-28DA3535164E}"/>
               </a:ext>
             </a:extLst>
           </p:cNvPr>
@@ -23925,7 +23994,7 @@
           <p:cNvPr id="12" name="github.com/ClaudioAMF1/TCC&#10;Proposta N3, ">
             <a:extLst xmlns:a="http://schemas.openxmlformats.org/drawingml/2006/main">
               <a:ext uri="{FF2B5EF4-FFF2-40B4-BE49-F238E27FC236}">
-                <a16:creationId xmlns:a16="http://schemas.microsoft.com/office/drawing/2014/main" id="{D32836BB-9A17-4751-90A5-DFF9F8481691}"/>
+                <a16:creationId xmlns:a16="http://schemas.microsoft.com/office/drawing/2014/main" id="{0814ED54-1943-4DF1-9B9A-4D920B42E14C}"/>
               </a:ext>
             </a:extLst>
           </p:cNvPr>
@@ -24005,7 +24074,7 @@
           <p:cNvPr id="13" name="MÉTRICAS E CLASSIFICAÇÃO">
             <a:extLst xmlns:a="http://schemas.openxmlformats.org/drawingml/2006/main">
               <a:ext uri="{FF2B5EF4-FFF2-40B4-BE49-F238E27FC236}">
-                <a16:creationId xmlns:a16="http://schemas.microsoft.com/office/drawing/2014/main" id="{EB70A217-7E9D-478C-AA50-40CD6FAA0D31}"/>
+                <a16:creationId xmlns:a16="http://schemas.microsoft.com/office/drawing/2014/main" id="{C8B51932-A531-40B5-8052-50C5101F1F9E}"/>
               </a:ext>
             </a:extLst>
           </p:cNvPr>
@@ -24062,7 +24131,7 @@
           <p:cNvPr id="14" name="Google Scholar Metrics, Computer Securit">
             <a:extLst xmlns:a="http://schemas.openxmlformats.org/drawingml/2006/main">
               <a:ext uri="{FF2B5EF4-FFF2-40B4-BE49-F238E27FC236}">
-                <a16:creationId xmlns:a16="http://schemas.microsoft.com/office/drawing/2014/main" id="{F51F3866-ECB4-421C-A5F1-611C546A3378}"/>
+                <a16:creationId xmlns:a16="http://schemas.microsoft.com/office/drawing/2014/main" id="{29E36387-C6C7-4B9E-8012-A300EFD3156E}"/>
               </a:ext>
             </a:extLst>
           </p:cNvPr>
@@ -24155,7 +24224,7 @@
                 <a:ea typeface="Arial"/>
                 <a:cs typeface="Arial"/>
               </a:rPr>
-              <a:t>CAPES. Relatório Qualis Eventos, Computação, quadriênio 2017–2020, p. 9.</a:t>
+              <a:t>CAPES/Sucupira. Qualis Eventos, Computação, 2021–2024. Consulta: 28/09/2026.</a:t>
             </a:r>
           </a:p>
           <a:p xmlns:a="http://schemas.openxmlformats.org/drawingml/2006/main">
@@ -24186,7 +24255,7 @@
     </p:spTree>
     <p:extLst>
       <p:ext uri="{BB962C8B-B14F-4D97-AF65-F5344CB8AC3E}">
-        <p14:creationId xmlns:p14="http://schemas.microsoft.com/office/powerpoint/2010/main" val="1850473603"/>
+        <p14:creationId xmlns:p14="http://schemas.microsoft.com/office/powerpoint/2010/main" val="1278251828"/>
       </p:ext>
     </p:extLst>
   </p:cSld>
@@ -24217,7 +24286,7 @@
           <p:cNvPr id="18" name="">
             <a:extLst xmlns:a="http://schemas.openxmlformats.org/drawingml/2006/main">
               <a:ext uri="{FF2B5EF4-FFF2-40B4-BE49-F238E27FC236}">
-                <a16:creationId xmlns:a16="http://schemas.microsoft.com/office/drawing/2014/main" id="{0A0FBF10-1B4A-4C86-9134-82886FCE94AB}"/>
+                <a16:creationId xmlns:a16="http://schemas.microsoft.com/office/drawing/2014/main" id="{842C7824-9459-4EA6-8A1C-0C830B6553B9}"/>
               </a:ext>
             </a:extLst>
           </p:cNvPr>
@@ -24247,7 +24316,7 @@
           <p:cNvPr id="2" name="SELEÇÃO">
             <a:extLst xmlns:a="http://schemas.openxmlformats.org/drawingml/2006/main">
               <a:ext uri="{FF2B5EF4-FFF2-40B4-BE49-F238E27FC236}">
-                <a16:creationId xmlns:a16="http://schemas.microsoft.com/office/drawing/2014/main" id="{3840F412-6664-43B8-B16E-81ADA6F027ED}"/>
+                <a16:creationId xmlns:a16="http://schemas.microsoft.com/office/drawing/2014/main" id="{D67AAF6F-BFDB-4EAA-B021-F51F1B73F534}"/>
               </a:ext>
             </a:extLst>
           </p:cNvPr>
@@ -24304,7 +24373,7 @@
           <p:cNvPr id="3" name="Originalidade e relevância para o TCC">
             <a:extLst xmlns:a="http://schemas.openxmlformats.org/drawingml/2006/main">
               <a:ext uri="{FF2B5EF4-FFF2-40B4-BE49-F238E27FC236}">
-                <a16:creationId xmlns:a16="http://schemas.microsoft.com/office/drawing/2014/main" id="{E70CA4DA-C215-4F89-879C-052A10269867}"/>
+                <a16:creationId xmlns:a16="http://schemas.microsoft.com/office/drawing/2014/main" id="{F22BF09B-0EDA-4346-9772-6AA103243086}"/>
               </a:ext>
             </a:extLst>
           </p:cNvPr>
@@ -24361,7 +24430,7 @@
           <p:cNvPr id="4" name="">
             <a:extLst xmlns:a="http://schemas.openxmlformats.org/drawingml/2006/main">
               <a:ext uri="{FF2B5EF4-FFF2-40B4-BE49-F238E27FC236}">
-                <a16:creationId xmlns:a16="http://schemas.microsoft.com/office/drawing/2014/main" id="{CAAE4655-9588-4A02-9E96-0F4705E4CF65}"/>
+                <a16:creationId xmlns:a16="http://schemas.microsoft.com/office/drawing/2014/main" id="{62D7F620-7BF0-45D6-BD74-A95391FC2B50}"/>
               </a:ext>
             </a:extLst>
           </p:cNvPr>
@@ -24391,7 +24460,7 @@
           <p:cNvPr id="5" name="">
             <a:extLst xmlns:a="http://schemas.openxmlformats.org/drawingml/2006/main">
               <a:ext uri="{FF2B5EF4-FFF2-40B4-BE49-F238E27FC236}">
-                <a16:creationId xmlns:a16="http://schemas.microsoft.com/office/drawing/2014/main" id="{23BB625E-194C-4237-804D-6CE957E49111}"/>
+                <a16:creationId xmlns:a16="http://schemas.microsoft.com/office/drawing/2014/main" id="{C5231506-2650-41F7-8547-40B9D2853D05}"/>
               </a:ext>
             </a:extLst>
           </p:cNvPr>
@@ -24421,7 +24490,7 @@
           <p:cNvPr id="6" name="Nguyen, Backes e Stock (2022), p. 1–2. C">
             <a:extLst xmlns:a="http://schemas.openxmlformats.org/drawingml/2006/main">
               <a:ext uri="{FF2B5EF4-FFF2-40B4-BE49-F238E27FC236}">
-                <a16:creationId xmlns:a16="http://schemas.microsoft.com/office/drawing/2014/main" id="{EBFDEE43-E058-44B4-845D-DF6C41EA7CE8}"/>
+                <a16:creationId xmlns:a16="http://schemas.microsoft.com/office/drawing/2014/main" id="{1945F650-C060-43E9-86D7-2B7FA40489B4}"/>
               </a:ext>
             </a:extLst>
           </p:cNvPr>
@@ -24478,7 +24547,7 @@
           <p:cNvPr id="7" name="03 / 23">
             <a:extLst xmlns:a="http://schemas.openxmlformats.org/drawingml/2006/main">
               <a:ext uri="{FF2B5EF4-FFF2-40B4-BE49-F238E27FC236}">
-                <a16:creationId xmlns:a16="http://schemas.microsoft.com/office/drawing/2014/main" id="{CBD9ADCA-2575-4EC0-B6D7-5E81A67D554B}"/>
+                <a16:creationId xmlns:a16="http://schemas.microsoft.com/office/drawing/2014/main" id="{CA98393C-DAE8-47BB-8D3E-B1C9B9220A04}"/>
               </a:ext>
             </a:extLst>
           </p:cNvPr>
@@ -24539,7 +24608,7 @@
           <p:nvPr/>
         </p:nvPicPr>
         <p:blipFill>
-          <a:blip xmlns:r="http://schemas.openxmlformats.org/officeDocument/2006/relationships" xmlns:a="http://schemas.openxmlformats.org/drawingml/2006/main" r:embed="R7310ba10151e4108"/>
+          <a:blip xmlns:r="http://schemas.openxmlformats.org/officeDocument/2006/relationships" xmlns:a="http://schemas.openxmlformats.org/drawingml/2006/main" r:embed="R656f1e96f885439c"/>
           <a:stretch xmlns:a="http://schemas.openxmlformats.org/drawingml/2006/main"/>
         </p:blipFill>
         <p:spPr>
@@ -24557,7 +24626,7 @@
           <p:cNvPr id="9" name="239.381">
             <a:extLst xmlns:a="http://schemas.openxmlformats.org/drawingml/2006/main">
               <a:ext uri="{FF2B5EF4-FFF2-40B4-BE49-F238E27FC236}">
-                <a16:creationId xmlns:a16="http://schemas.microsoft.com/office/drawing/2014/main" id="{3B26C001-2E8E-4F4A-8B82-B3BEBA5DCAD5}"/>
+                <a16:creationId xmlns:a16="http://schemas.microsoft.com/office/drawing/2014/main" id="{4846F817-AE4F-4490-B692-41FDCDC8052E}"/>
               </a:ext>
             </a:extLst>
           </p:cNvPr>
@@ -24614,7 +24683,7 @@
           <p:cNvPr id="10" name="aplicativos Android analisados">
             <a:extLst xmlns:a="http://schemas.openxmlformats.org/drawingml/2006/main">
               <a:ext uri="{FF2B5EF4-FFF2-40B4-BE49-F238E27FC236}">
-                <a16:creationId xmlns:a16="http://schemas.microsoft.com/office/drawing/2014/main" id="{DEF6EC97-834A-461A-8082-53EB8894E0E9}"/>
+                <a16:creationId xmlns:a16="http://schemas.microsoft.com/office/drawing/2014/main" id="{3B424771-EB64-484B-9BE9-54D92BA102F9}"/>
               </a:ext>
             </a:extLst>
           </p:cNvPr>
@@ -24671,7 +24740,7 @@
           <p:cNvPr id="11" name="">
             <a:extLst xmlns:a="http://schemas.openxmlformats.org/drawingml/2006/main">
               <a:ext uri="{FF2B5EF4-FFF2-40B4-BE49-F238E27FC236}">
-                <a16:creationId xmlns:a16="http://schemas.microsoft.com/office/drawing/2014/main" id="{26D8C6F5-15EA-417C-8F04-9178C9DA30B7}"/>
+                <a16:creationId xmlns:a16="http://schemas.microsoft.com/office/drawing/2014/main" id="{02940BB8-BBC7-4A99-8E06-060F625A84F7}"/>
               </a:ext>
             </a:extLst>
           </p:cNvPr>
@@ -24701,7 +24770,7 @@
           <p:cNvPr id="12" name="PESQUISA ORIGINAL">
             <a:extLst xmlns:a="http://schemas.openxmlformats.org/drawingml/2006/main">
               <a:ext uri="{FF2B5EF4-FFF2-40B4-BE49-F238E27FC236}">
-                <a16:creationId xmlns:a16="http://schemas.microsoft.com/office/drawing/2014/main" id="{928008ED-2FD6-41FC-AE43-57370B6D112B}"/>
+                <a16:creationId xmlns:a16="http://schemas.microsoft.com/office/drawing/2014/main" id="{34B0ED20-8689-4C60-A906-D94E668DBD58}"/>
               </a:ext>
             </a:extLst>
           </p:cNvPr>
@@ -24758,7 +24827,7 @@
           <p:cNvPr id="13" name="Os autores constroem um corpus de avisos">
             <a:extLst xmlns:a="http://schemas.openxmlformats.org/drawingml/2006/main">
               <a:ext uri="{FF2B5EF4-FFF2-40B4-BE49-F238E27FC236}">
-                <a16:creationId xmlns:a16="http://schemas.microsoft.com/office/drawing/2014/main" id="{A74F4B28-4E4A-4282-9571-97D73602254E}"/>
+                <a16:creationId xmlns:a16="http://schemas.microsoft.com/office/drawing/2014/main" id="{8AD7FE5A-AD07-4F28-9ED9-ABF759873CB2}"/>
               </a:ext>
             </a:extLst>
           </p:cNvPr>
@@ -24861,7 +24930,7 @@
           <p:cNvPr id="14" name="RELAÇÃO COM O TCC">
             <a:extLst xmlns:a="http://schemas.openxmlformats.org/drawingml/2006/main">
               <a:ext uri="{FF2B5EF4-FFF2-40B4-BE49-F238E27FC236}">
-                <a16:creationId xmlns:a16="http://schemas.microsoft.com/office/drawing/2014/main" id="{1DBF3382-6C32-4D43-8896-E9B2DDA99410}"/>
+                <a16:creationId xmlns:a16="http://schemas.microsoft.com/office/drawing/2014/main" id="{C116CDC9-DF36-405A-982D-6779D74CD06E}"/>
               </a:ext>
             </a:extLst>
           </p:cNvPr>
@@ -24918,7 +24987,7 @@
           <p:cNvPr id="15" name="O TCC investiga rastreamento de terceiro">
             <a:extLst xmlns:a="http://schemas.openxmlformats.org/drawingml/2006/main">
               <a:ext uri="{FF2B5EF4-FFF2-40B4-BE49-F238E27FC236}">
-                <a16:creationId xmlns:a16="http://schemas.microsoft.com/office/drawing/2014/main" id="{F1217C52-6BA0-4E66-856B-957F8BDD0A99}"/>
+                <a16:creationId xmlns:a16="http://schemas.microsoft.com/office/drawing/2014/main" id="{A8B5E4AE-760C-4BCC-A158-04759E6A9244}"/>
               </a:ext>
             </a:extLst>
           </p:cNvPr>
@@ -25021,7 +25090,7 @@
           <p:cNvPr id="16" name="Contribuição central: comparar as escolh">
             <a:extLst xmlns:a="http://schemas.openxmlformats.org/drawingml/2006/main">
               <a:ext uri="{FF2B5EF4-FFF2-40B4-BE49-F238E27FC236}">
-                <a16:creationId xmlns:a16="http://schemas.microsoft.com/office/drawing/2014/main" id="{77075456-20DC-4C1F-99BB-B9B7B140B670}"/>
+                <a16:creationId xmlns:a16="http://schemas.microsoft.com/office/drawing/2014/main" id="{279BBED1-232A-468D-940A-04A8FC768E1F}"/>
               </a:ext>
             </a:extLst>
           </p:cNvPr>
@@ -25078,7 +25147,7 @@
           <p:cNvPr id="17" name="Citações em 17/09/2026: 42 na ACM Digita">
             <a:extLst xmlns:a="http://schemas.openxmlformats.org/drawingml/2006/main">
               <a:ext uri="{FF2B5EF4-FFF2-40B4-BE49-F238E27FC236}">
-                <a16:creationId xmlns:a16="http://schemas.microsoft.com/office/drawing/2014/main" id="{DF51BF14-F848-4EA0-928E-0CB8BDEFD6F8}"/>
+                <a16:creationId xmlns:a16="http://schemas.microsoft.com/office/drawing/2014/main" id="{E845677B-BA81-4871-BDF3-8ED610AF577A}"/>
               </a:ext>
             </a:extLst>
           </p:cNvPr>
@@ -25133,7 +25202,7 @@
     </p:spTree>
     <p:extLst>
       <p:ext uri="{BB962C8B-B14F-4D97-AF65-F5344CB8AC3E}">
-        <p14:creationId xmlns:p14="http://schemas.microsoft.com/office/powerpoint/2010/main" val="63077981"/>
+        <p14:creationId xmlns:p14="http://schemas.microsoft.com/office/powerpoint/2010/main" val="477823105"/>
       </p:ext>
     </p:extLst>
   </p:cSld>
@@ -25164,7 +25233,7 @@
           <p:cNvPr id="22" name="">
             <a:extLst xmlns:a="http://schemas.openxmlformats.org/drawingml/2006/main">
               <a:ext uri="{FF2B5EF4-FFF2-40B4-BE49-F238E27FC236}">
-                <a16:creationId xmlns:a16="http://schemas.microsoft.com/office/drawing/2014/main" id="{C979F3C9-0693-4A89-A51D-DA1431A0D20D}"/>
+                <a16:creationId xmlns:a16="http://schemas.microsoft.com/office/drawing/2014/main" id="{8876020E-A920-4CA2-B9AA-9EB4F15BCFBD}"/>
               </a:ext>
             </a:extLst>
           </p:cNvPr>
@@ -25194,7 +25263,7 @@
           <p:cNvPr id="2" name="MÉTRICAS">
             <a:extLst xmlns:a="http://schemas.openxmlformats.org/drawingml/2006/main">
               <a:ext uri="{FF2B5EF4-FFF2-40B4-BE49-F238E27FC236}">
-                <a16:creationId xmlns:a16="http://schemas.microsoft.com/office/drawing/2014/main" id="{2605E8EB-EC3F-459E-B2B9-B74F65D7087E}"/>
+                <a16:creationId xmlns:a16="http://schemas.microsoft.com/office/drawing/2014/main" id="{A5AFAA03-E22B-41E9-A47C-82DD3433F23E}"/>
               </a:ext>
             </a:extLst>
           </p:cNvPr>
@@ -25251,7 +25320,7 @@
           <p:cNvPr id="3" name="Métricas do veículo: ACM CCS">
             <a:extLst xmlns:a="http://schemas.openxmlformats.org/drawingml/2006/main">
               <a:ext uri="{FF2B5EF4-FFF2-40B4-BE49-F238E27FC236}">
-                <a16:creationId xmlns:a16="http://schemas.microsoft.com/office/drawing/2014/main" id="{2AE5F3FD-4AD1-4161-93B2-4E5197078B2E}"/>
+                <a16:creationId xmlns:a16="http://schemas.microsoft.com/office/drawing/2014/main" id="{90F2B350-0893-4AAE-BA93-12AF556A0027}"/>
               </a:ext>
             </a:extLst>
           </p:cNvPr>
@@ -25308,7 +25377,7 @@
           <p:cNvPr id="4" name="">
             <a:extLst xmlns:a="http://schemas.openxmlformats.org/drawingml/2006/main">
               <a:ext uri="{FF2B5EF4-FFF2-40B4-BE49-F238E27FC236}">
-                <a16:creationId xmlns:a16="http://schemas.microsoft.com/office/drawing/2014/main" id="{A69FB34C-A4DD-43F3-B5D9-1D5C2AC15245}"/>
+                <a16:creationId xmlns:a16="http://schemas.microsoft.com/office/drawing/2014/main" id="{AFCB806A-4B3F-45A5-8B19-48349EEC172D}"/>
               </a:ext>
             </a:extLst>
           </p:cNvPr>
@@ -25338,7 +25407,7 @@
           <p:cNvPr id="5" name="">
             <a:extLst xmlns:a="http://schemas.openxmlformats.org/drawingml/2006/main">
               <a:ext uri="{FF2B5EF4-FFF2-40B4-BE49-F238E27FC236}">
-                <a16:creationId xmlns:a16="http://schemas.microsoft.com/office/drawing/2014/main" id="{97463ED5-E569-4795-A70D-B38F5F6E633B}"/>
+                <a16:creationId xmlns:a16="http://schemas.microsoft.com/office/drawing/2014/main" id="{015A7026-FE2C-406D-894D-B5A2247BEF32}"/>
               </a:ext>
             </a:extLst>
           </p:cNvPr>
@@ -25368,7 +25437,7 @@
           <p:cNvPr id="6" name="Fontes: Google Scholar Metrics e ICORE, ">
             <a:extLst xmlns:a="http://schemas.openxmlformats.org/drawingml/2006/main">
               <a:ext uri="{FF2B5EF4-FFF2-40B4-BE49-F238E27FC236}">
-                <a16:creationId xmlns:a16="http://schemas.microsoft.com/office/drawing/2014/main" id="{FD18C375-7242-4628-8AC0-B8B53DED8263}"/>
+                <a16:creationId xmlns:a16="http://schemas.microsoft.com/office/drawing/2014/main" id="{B26001CC-C6F4-4D7E-BC4D-B33C07B79C31}"/>
               </a:ext>
             </a:extLst>
           </p:cNvPr>
@@ -25415,7 +25484,7 @@
                 <a:ea typeface="Arial"/>
                 <a:cs typeface="Arial"/>
               </a:rPr>
-              <a:t>Fontes: Google Scholar Metrics e ICORE, consulta em 17/09/2026; CAPES, Qualis Eventos Computação 2017–2020.</a:t>
+              <a:t>Fontes: Google Scholar Metrics e ICORE, consulta em 17/09/2026; CAPES/Sucupira, Qualis Eventos 2021–2024, consulta em 28/09/2026.</a:t>
             </a:r>
           </a:p>
         </p:txBody>
@@ -25425,7 +25494,7 @@
           <p:cNvPr id="7" name="04 / 23">
             <a:extLst xmlns:a="http://schemas.openxmlformats.org/drawingml/2006/main">
               <a:ext uri="{FF2B5EF4-FFF2-40B4-BE49-F238E27FC236}">
-                <a16:creationId xmlns:a16="http://schemas.microsoft.com/office/drawing/2014/main" id="{9CE030FF-9B99-4C80-B7BD-EF9B9D016E3A}"/>
+                <a16:creationId xmlns:a16="http://schemas.microsoft.com/office/drawing/2014/main" id="{BB91F976-EBDD-4912-BE10-AD1DE8A0F090}"/>
               </a:ext>
             </a:extLst>
           </p:cNvPr>
@@ -25482,7 +25551,7 @@
           <p:cNvPr id="8" name="GOOGLE SCHOLAR METRICS">
             <a:extLst xmlns:a="http://schemas.openxmlformats.org/drawingml/2006/main">
               <a:ext uri="{FF2B5EF4-FFF2-40B4-BE49-F238E27FC236}">
-                <a16:creationId xmlns:a16="http://schemas.microsoft.com/office/drawing/2014/main" id="{24C21F61-DD78-4F69-98AE-107EF2E4F86D}"/>
+                <a16:creationId xmlns:a16="http://schemas.microsoft.com/office/drawing/2014/main" id="{653E458A-B2B9-4622-B351-133277BCAE25}"/>
               </a:ext>
             </a:extLst>
           </p:cNvPr>
@@ -25539,7 +25608,7 @@
           <p:cNvPr id="9" name="90">
             <a:extLst xmlns:a="http://schemas.openxmlformats.org/drawingml/2006/main">
               <a:ext uri="{FF2B5EF4-FFF2-40B4-BE49-F238E27FC236}">
-                <a16:creationId xmlns:a16="http://schemas.microsoft.com/office/drawing/2014/main" id="{7B36245D-B156-45CC-BF56-CFEAE72E084A}"/>
+                <a16:creationId xmlns:a16="http://schemas.microsoft.com/office/drawing/2014/main" id="{0983DA16-9C67-41AE-BDF8-4EA790C934AB}"/>
               </a:ext>
             </a:extLst>
           </p:cNvPr>
@@ -25596,7 +25665,7 @@
           <p:cNvPr id="10" name="índice h5&#10;mediana h5: 146">
             <a:extLst xmlns:a="http://schemas.openxmlformats.org/drawingml/2006/main">
               <a:ext uri="{FF2B5EF4-FFF2-40B4-BE49-F238E27FC236}">
-                <a16:creationId xmlns:a16="http://schemas.microsoft.com/office/drawing/2014/main" id="{404E61CD-5F42-4CD7-A9E3-09C50DF2AF3F}"/>
+                <a16:creationId xmlns:a16="http://schemas.microsoft.com/office/drawing/2014/main" id="{F7AB11DF-505F-46CD-AF09-F3206335EDF4}"/>
               </a:ext>
             </a:extLst>
           </p:cNvPr>
@@ -25676,7 +25745,7 @@
           <p:cNvPr id="11" name="Computer Security &amp; Cryptography: posiçã">
             <a:extLst xmlns:a="http://schemas.openxmlformats.org/drawingml/2006/main">
               <a:ext uri="{FF2B5EF4-FFF2-40B4-BE49-F238E27FC236}">
-                <a16:creationId xmlns:a16="http://schemas.microsoft.com/office/drawing/2014/main" id="{098655A0-045E-4F8A-B2F8-362EA56E02E6}"/>
+                <a16:creationId xmlns:a16="http://schemas.microsoft.com/office/drawing/2014/main" id="{5FAE5E31-96F8-43A5-8DCC-54ED9BCCDDA5}"/>
               </a:ext>
             </a:extLst>
           </p:cNvPr>
@@ -25779,7 +25848,7 @@
           <p:cNvPr id="12" name="">
             <a:extLst xmlns:a="http://schemas.openxmlformats.org/drawingml/2006/main">
               <a:ext uri="{FF2B5EF4-FFF2-40B4-BE49-F238E27FC236}">
-                <a16:creationId xmlns:a16="http://schemas.microsoft.com/office/drawing/2014/main" id="{FA73947F-7723-48E6-B162-DCA22CCD91A8}"/>
+                <a16:creationId xmlns:a16="http://schemas.microsoft.com/office/drawing/2014/main" id="{9B1E04DD-1C16-4668-8661-14420B0E4781}"/>
               </a:ext>
             </a:extLst>
           </p:cNvPr>
@@ -25809,7 +25878,7 @@
           <p:cNvPr id="13" name="ICORE CONFERENCE PORTAL">
             <a:extLst xmlns:a="http://schemas.openxmlformats.org/drawingml/2006/main">
               <a:ext uri="{FF2B5EF4-FFF2-40B4-BE49-F238E27FC236}">
-                <a16:creationId xmlns:a16="http://schemas.microsoft.com/office/drawing/2014/main" id="{214D63C0-9F32-450B-90C6-88EC2971F5A8}"/>
+                <a16:creationId xmlns:a16="http://schemas.microsoft.com/office/drawing/2014/main" id="{4F64CCA4-46D4-406D-A966-1C5ED9CE6C23}"/>
               </a:ext>
             </a:extLst>
           </p:cNvPr>
@@ -25866,7 +25935,7 @@
           <p:cNvPr id="14" name="A*">
             <a:extLst xmlns:a="http://schemas.openxmlformats.org/drawingml/2006/main">
               <a:ext uri="{FF2B5EF4-FFF2-40B4-BE49-F238E27FC236}">
-                <a16:creationId xmlns:a16="http://schemas.microsoft.com/office/drawing/2014/main" id="{AC3F8C12-7DB1-4DD6-BBC8-8295EB601905}"/>
+                <a16:creationId xmlns:a16="http://schemas.microsoft.com/office/drawing/2014/main" id="{C4CD8157-6426-41C7-89BD-38BF22A72F27}"/>
               </a:ext>
             </a:extLst>
           </p:cNvPr>
@@ -25923,7 +25992,7 @@
           <p:cNvPr id="15" name="ACM CCS&#10;classificação ICORE 2026">
             <a:extLst xmlns:a="http://schemas.openxmlformats.org/drawingml/2006/main">
               <a:ext uri="{FF2B5EF4-FFF2-40B4-BE49-F238E27FC236}">
-                <a16:creationId xmlns:a16="http://schemas.microsoft.com/office/drawing/2014/main" id="{5469CF75-6C9D-43CB-B808-DD8725BF7AEC}"/>
+                <a16:creationId xmlns:a16="http://schemas.microsoft.com/office/drawing/2014/main" id="{29B398B5-4277-4A6F-AC34-40508A03D6ED}"/>
               </a:ext>
             </a:extLst>
           </p:cNvPr>
@@ -26003,7 +26072,7 @@
           <p:cNvPr id="16" name="Classificação registrada no portal.&#10;Cons">
             <a:extLst xmlns:a="http://schemas.openxmlformats.org/drawingml/2006/main">
               <a:ext uri="{FF2B5EF4-FFF2-40B4-BE49-F238E27FC236}">
-                <a16:creationId xmlns:a16="http://schemas.microsoft.com/office/drawing/2014/main" id="{BDE3C33A-E66A-4814-B8B7-04FDBB89F211}"/>
+                <a16:creationId xmlns:a16="http://schemas.microsoft.com/office/drawing/2014/main" id="{CBBDF912-A107-4F88-BF2B-3EAC8EBB9443}"/>
               </a:ext>
             </a:extLst>
           </p:cNvPr>
@@ -26083,7 +26152,7 @@
           <p:cNvPr id="17" name="">
             <a:extLst xmlns:a="http://schemas.openxmlformats.org/drawingml/2006/main">
               <a:ext uri="{FF2B5EF4-FFF2-40B4-BE49-F238E27FC236}">
-                <a16:creationId xmlns:a16="http://schemas.microsoft.com/office/drawing/2014/main" id="{B009D361-FDF6-40E2-94DF-29815F8AF216}"/>
+                <a16:creationId xmlns:a16="http://schemas.microsoft.com/office/drawing/2014/main" id="{915A94BE-3E85-491C-9DF3-AA36079E2BA4}"/>
               </a:ext>
             </a:extLst>
           </p:cNvPr>
@@ -26113,7 +26182,7 @@
           <p:cNvPr id="18" name="QUALIS CAPES">
             <a:extLst xmlns:a="http://schemas.openxmlformats.org/drawingml/2006/main">
               <a:ext uri="{FF2B5EF4-FFF2-40B4-BE49-F238E27FC236}">
-                <a16:creationId xmlns:a16="http://schemas.microsoft.com/office/drawing/2014/main" id="{6E358437-CCA6-432C-9F91-A545B42317B1}"/>
+                <a16:creationId xmlns:a16="http://schemas.microsoft.com/office/drawing/2014/main" id="{6CA66E99-1A36-4DD5-875B-312924A7D848}"/>
               </a:ext>
             </a:extLst>
           </p:cNvPr>
@@ -26170,7 +26239,7 @@
           <p:cNvPr id="19" name="A1">
             <a:extLst xmlns:a="http://schemas.openxmlformats.org/drawingml/2006/main">
               <a:ext uri="{FF2B5EF4-FFF2-40B4-BE49-F238E27FC236}">
-                <a16:creationId xmlns:a16="http://schemas.microsoft.com/office/drawing/2014/main" id="{55A6507A-E6CC-444E-A176-17D42CBD7A20}"/>
+                <a16:creationId xmlns:a16="http://schemas.microsoft.com/office/drawing/2014/main" id="{DFB39244-0067-4B15-BE43-159CBD84BF7E}"/>
               </a:ext>
             </a:extLst>
           </p:cNvPr>
@@ -26227,7 +26296,7 @@
           <p:cNvPr id="20" name="Qualis Eventos da Computação, quadriênio">
             <a:extLst xmlns:a="http://schemas.openxmlformats.org/drawingml/2006/main">
               <a:ext uri="{FF2B5EF4-FFF2-40B4-BE49-F238E27FC236}">
-                <a16:creationId xmlns:a16="http://schemas.microsoft.com/office/drawing/2014/main" id="{47C8B70A-B5F0-4324-BFED-2E4D39477ADB}"/>
+                <a16:creationId xmlns:a16="http://schemas.microsoft.com/office/drawing/2014/main" id="{900D0807-EB91-4B6F-AF53-87E17E9E0974}"/>
               </a:ext>
             </a:extLst>
           </p:cNvPr>
@@ -26274,7 +26343,7 @@
                 <a:ea typeface="Arial"/>
                 <a:cs typeface="Arial"/>
               </a:rPr>
-              <a:t>Qualis Eventos da Computação, quadriênio 2017–2020, p. 9.</a:t>
+              <a:t>Qualis Eventos da Computação, quadriênio 2021–2024.</a:t>
             </a:r>
           </a:p>
           <a:p xmlns:a="http://schemas.openxmlformats.org/drawingml/2006/main">
@@ -26297,7 +26366,7 @@
                 <a:ea typeface="Arial"/>
                 <a:cs typeface="Arial"/>
               </a:rPr>
-              <a:t>A sigla CCS identifica o veículo do artigo.</a:t>
+              <a:t>Relatório oficial, p. 6. Consulta à Sucupira em 28/09/2026.</a:t>
             </a:r>
           </a:p>
         </p:txBody>
@@ -26311,13 +26380,13 @@
           <p:nvPr/>
         </p:nvPicPr>
         <p:blipFill>
-          <a:blip xmlns:r="http://schemas.openxmlformats.org/officeDocument/2006/relationships" xmlns:a="http://schemas.openxmlformats.org/drawingml/2006/main" r:embed="R23f44abec6be4f5b"/>
+          <a:blip xmlns:r="http://schemas.openxmlformats.org/officeDocument/2006/relationships" xmlns:a="http://schemas.openxmlformats.org/drawingml/2006/main" r:embed="R080771f189bd419a"/>
           <a:stretch xmlns:a="http://schemas.openxmlformats.org/drawingml/2006/main"/>
         </p:blipFill>
         <p:spPr>
           <a:xfrm xmlns:a="http://schemas.openxmlformats.org/drawingml/2006/main">
-            <a:off x="1871951" y="5962650"/>
-            <a:ext cx="9695873" cy="323850"/>
+            <a:off x="1857375" y="5992054"/>
+            <a:ext cx="9725025" cy="265043"/>
           </a:xfrm>
           <a:prstGeom xmlns:a="http://schemas.openxmlformats.org/drawingml/2006/main" prst="rect">
             <a:avLst/>
@@ -26327,7 +26396,7 @@
     </p:spTree>
     <p:extLst>
       <p:ext uri="{BB962C8B-B14F-4D97-AF65-F5344CB8AC3E}">
-        <p14:creationId xmlns:p14="http://schemas.microsoft.com/office/powerpoint/2010/main" val="769236556"/>
+        <p14:creationId xmlns:p14="http://schemas.microsoft.com/office/powerpoint/2010/main" val="710612902"/>
       </p:ext>
     </p:extLst>
   </p:cSld>
@@ -26355,10 +26424,10 @@
       </p:grpSpPr>
       <p:sp>
         <p:nvSpPr>
-          <p:cNvPr id="11" name="">
-            <a:extLst xmlns:a="http://schemas.openxmlformats.org/drawingml/2006/main">
-              <a:ext uri="{FF2B5EF4-FFF2-40B4-BE49-F238E27FC236}">
-                <a16:creationId xmlns:a16="http://schemas.microsoft.com/office/drawing/2014/main" id="{36343368-B28E-4913-9C8D-9EAA719D1302}"/>
+          <p:cNvPr id="10" name="">
+            <a:extLst xmlns:a="http://schemas.openxmlformats.org/drawingml/2006/main">
+              <a:ext uri="{FF2B5EF4-FFF2-40B4-BE49-F238E27FC236}">
+                <a16:creationId xmlns:a16="http://schemas.microsoft.com/office/drawing/2014/main" id="{D25E950A-49E5-4F63-84B3-641C95F5914D}"/>
               </a:ext>
             </a:extLst>
           </p:cNvPr>
@@ -26388,7 +26457,7 @@
           <p:cNvPr id="2" name="ESTRUTURA">
             <a:extLst xmlns:a="http://schemas.openxmlformats.org/drawingml/2006/main">
               <a:ext uri="{FF2B5EF4-FFF2-40B4-BE49-F238E27FC236}">
-                <a16:creationId xmlns:a16="http://schemas.microsoft.com/office/drawing/2014/main" id="{C2E72982-1A33-45CE-8BA2-D38DF1FF6500}"/>
+                <a16:creationId xmlns:a16="http://schemas.microsoft.com/office/drawing/2014/main" id="{4690D2C4-BDFF-4D7A-856D-78994FDA7C37}"/>
               </a:ext>
             </a:extLst>
           </p:cNvPr>
@@ -26445,7 +26514,7 @@
           <p:cNvPr id="3" name="Como o artigo organiza o argumento">
             <a:extLst xmlns:a="http://schemas.openxmlformats.org/drawingml/2006/main">
               <a:ext uri="{FF2B5EF4-FFF2-40B4-BE49-F238E27FC236}">
-                <a16:creationId xmlns:a16="http://schemas.microsoft.com/office/drawing/2014/main" id="{D90FEB43-0FBC-490F-90C6-887D473CD12B}"/>
+                <a16:creationId xmlns:a16="http://schemas.microsoft.com/office/drawing/2014/main" id="{A38ACF36-F82E-4033-8C6F-58787456334B}"/>
               </a:ext>
             </a:extLst>
           </p:cNvPr>
@@ -26502,7 +26571,7 @@
           <p:cNvPr id="4" name="">
             <a:extLst xmlns:a="http://schemas.openxmlformats.org/drawingml/2006/main">
               <a:ext uri="{FF2B5EF4-FFF2-40B4-BE49-F238E27FC236}">
-                <a16:creationId xmlns:a16="http://schemas.microsoft.com/office/drawing/2014/main" id="{EB59BC38-B31D-44B6-9B91-7A0E6C4E33C3}"/>
+                <a16:creationId xmlns:a16="http://schemas.microsoft.com/office/drawing/2014/main" id="{DD9B5DD2-FB67-40FD-AF43-B27592622FDF}"/>
               </a:ext>
             </a:extLst>
           </p:cNvPr>
@@ -26532,7 +26601,7 @@
           <p:cNvPr id="5" name="">
             <a:extLst xmlns:a="http://schemas.openxmlformats.org/drawingml/2006/main">
               <a:ext uri="{FF2B5EF4-FFF2-40B4-BE49-F238E27FC236}">
-                <a16:creationId xmlns:a16="http://schemas.microsoft.com/office/drawing/2014/main" id="{6E3B4F34-7F08-4B41-9277-E9C009C6BC0E}"/>
+                <a16:creationId xmlns:a16="http://schemas.microsoft.com/office/drawing/2014/main" id="{4049C2B6-87C2-4BDD-A9CC-FC81B853C852}"/>
               </a:ext>
             </a:extLst>
           </p:cNvPr>
@@ -26562,7 +26631,7 @@
           <p:cNvPr id="6" name="Nguyen, Backes e Stock (2022), p. 1–13. ">
             <a:extLst xmlns:a="http://schemas.openxmlformats.org/drawingml/2006/main">
               <a:ext uri="{FF2B5EF4-FFF2-40B4-BE49-F238E27FC236}">
-                <a16:creationId xmlns:a16="http://schemas.microsoft.com/office/drawing/2014/main" id="{E4136794-21B8-4B98-AD2A-7D8EA3C7DF0B}"/>
+                <a16:creationId xmlns:a16="http://schemas.microsoft.com/office/drawing/2014/main" id="{EEA6CF2B-61E0-4048-8EB9-B696E25ED652}"/>
               </a:ext>
             </a:extLst>
           </p:cNvPr>
@@ -26619,7 +26688,7 @@
           <p:cNvPr id="7" name="05 / 23">
             <a:extLst xmlns:a="http://schemas.openxmlformats.org/drawingml/2006/main">
               <a:ext uri="{FF2B5EF4-FFF2-40B4-BE49-F238E27FC236}">
-                <a16:creationId xmlns:a16="http://schemas.microsoft.com/office/drawing/2014/main" id="{FD974EA3-4D4F-4F42-AE9E-65B7C0592809}"/>
+                <a16:creationId xmlns:a16="http://schemas.microsoft.com/office/drawing/2014/main" id="{F42D107B-331E-4FAB-9494-EEDE2426277C}"/>
               </a:ext>
             </a:extLst>
           </p:cNvPr>
@@ -26673,13 +26742,13 @@
       </p:sp>
       <p:graphicFrame>
         <p:nvGraphicFramePr>
-          <p:cNvPr id="18" name=""/>
+          <p:cNvPr id="17" name=""/>
           <p:cNvGraphicFramePr/>
           <p:nvPr/>
         </p:nvGraphicFramePr>
         <p:xfrm>
           <a:off xmlns:a="http://schemas.openxmlformats.org/drawingml/2006/main" x="609600" y="1685925"/>
-          <a:ext xmlns:a="http://schemas.openxmlformats.org/drawingml/2006/main" cx="10972800" cy="3810000"/>
+          <a:ext xmlns:a="http://schemas.openxmlformats.org/drawingml/2006/main" cx="10972800" cy="4114800"/>
         </p:xfrm>
         <a:graphic xmlns:a="http://schemas.openxmlformats.org/drawingml/2006/main">
           <a:graphicData uri="http://schemas.openxmlformats.org/drawingml/2006/table">
@@ -26689,7 +26758,7 @@
                 <a:gridCol w="5400675"/>
                 <a:gridCol w="5572125"/>
               </a:tblGrid>
-              <a:tr h="476250">
+              <a:tr h="457200">
                 <a:tc>
                   <a:txBody>
                     <a:bodyPr wrap="square" lIns="114300" tIns="95250" rIns="114300" bIns="95250">
@@ -26699,7 +26768,7 @@
                     <a:p>
                       <a:pPr algn="l"/>
                       <a:r>
-                        <a:rPr sz="1725" b="1">
+                        <a:rPr sz="1650" b="1">
                           <a:solidFill>
                             <a:srgbClr val="FFFFFF"/>
                           </a:solidFill>
@@ -26750,7 +26819,7 @@
                     <a:p>
                       <a:pPr algn="ctr"/>
                       <a:r>
-                        <a:rPr sz="1725" b="1">
+                        <a:rPr sz="1650" b="1">
                           <a:solidFill>
                             <a:srgbClr val="FFFFFF"/>
                           </a:solidFill>
@@ -26793,7 +26862,7 @@
                   </a:tcPr>
                 </a:tc>
               </a:tr>
-              <a:tr h="476250">
+              <a:tr h="457200">
                 <a:tc>
                   <a:txBody>
                     <a:bodyPr wrap="square" lIns="114300" tIns="95250" rIns="114300" bIns="95250">
@@ -26803,7 +26872,7 @@
                     <a:p>
                       <a:pPr algn="l"/>
                       <a:r>
-                        <a:rPr sz="1725" b="0">
+                        <a:rPr sz="1650" b="0">
                           <a:solidFill>
                             <a:srgbClr val="24384A"/>
                           </a:solidFill>
@@ -26854,7 +26923,7 @@
                     <a:p>
                       <a:pPr algn="l"/>
                       <a:r>
-                        <a:rPr sz="1725" b="0">
+                        <a:rPr sz="1650" b="0">
                           <a:solidFill>
                             <a:srgbClr val="24384A"/>
                           </a:solidFill>
@@ -26897,7 +26966,7 @@
                   </a:tcPr>
                 </a:tc>
               </a:tr>
-              <a:tr h="476250">
+              <a:tr h="457200">
                 <a:tc>
                   <a:txBody>
                     <a:bodyPr wrap="square" lIns="114300" tIns="95250" rIns="114300" bIns="95250">
@@ -26907,7 +26976,7 @@
                     <a:p>
                       <a:pPr algn="l"/>
                       <a:r>
-                        <a:rPr sz="1725" b="0">
+                        <a:rPr sz="1650" b="0">
                           <a:solidFill>
                             <a:srgbClr val="24384A"/>
                           </a:solidFill>
@@ -26958,7 +27027,7 @@
                     <a:p>
                       <a:pPr algn="l"/>
                       <a:r>
-                        <a:rPr sz="1725" b="0">
+                        <a:rPr sz="1650" b="0">
                           <a:solidFill>
                             <a:srgbClr val="24384A"/>
                           </a:solidFill>
@@ -27001,7 +27070,7 @@
                   </a:tcPr>
                 </a:tc>
               </a:tr>
-              <a:tr h="476250">
+              <a:tr h="457200">
                 <a:tc>
                   <a:txBody>
                     <a:bodyPr wrap="square" lIns="114300" tIns="95250" rIns="114300" bIns="95250">
@@ -27011,7 +27080,7 @@
                     <a:p>
                       <a:pPr algn="l"/>
                       <a:r>
-                        <a:rPr sz="1725" b="0">
+                        <a:rPr sz="1650" b="0">
                           <a:solidFill>
                             <a:srgbClr val="24384A"/>
                           </a:solidFill>
@@ -27062,7 +27131,7 @@
                     <a:p>
                       <a:pPr algn="l"/>
                       <a:r>
-                        <a:rPr sz="1725" b="0">
+                        <a:rPr sz="1650" b="0">
                           <a:solidFill>
                             <a:srgbClr val="24384A"/>
                           </a:solidFill>
@@ -27105,7 +27174,7 @@
                   </a:tcPr>
                 </a:tc>
               </a:tr>
-              <a:tr h="476250">
+              <a:tr h="457200">
                 <a:tc>
                   <a:txBody>
                     <a:bodyPr wrap="square" lIns="114300" tIns="95250" rIns="114300" bIns="95250">
@@ -27115,7 +27184,7 @@
                     <a:p>
                       <a:pPr algn="l"/>
                       <a:r>
-                        <a:rPr sz="1725" b="0">
+                        <a:rPr sz="1650" b="0">
                           <a:solidFill>
                             <a:srgbClr val="24384A"/>
                           </a:solidFill>
@@ -27166,7 +27235,7 @@
                     <a:p>
                       <a:pPr algn="l"/>
                       <a:r>
-                        <a:rPr sz="1725" b="0">
+                        <a:rPr sz="1650" b="0">
                           <a:solidFill>
                             <a:srgbClr val="24384A"/>
                           </a:solidFill>
@@ -27209,7 +27278,7 @@
                   </a:tcPr>
                 </a:tc>
               </a:tr>
-              <a:tr h="476250">
+              <a:tr h="457200">
                 <a:tc>
                   <a:txBody>
                     <a:bodyPr wrap="square" lIns="114300" tIns="95250" rIns="114300" bIns="95250">
@@ -27219,7 +27288,7 @@
                     <a:p>
                       <a:pPr algn="l"/>
                       <a:r>
-                        <a:rPr sz="1725" b="0">
+                        <a:rPr sz="1650" b="0">
                           <a:solidFill>
                             <a:srgbClr val="24384A"/>
                           </a:solidFill>
@@ -27270,7 +27339,7 @@
                     <a:p>
                       <a:pPr algn="l"/>
                       <a:r>
-                        <a:rPr sz="1725" b="0">
+                        <a:rPr sz="1650" b="0">
                           <a:solidFill>
                             <a:srgbClr val="24384A"/>
                           </a:solidFill>
@@ -27313,7 +27382,7 @@
                   </a:tcPr>
                 </a:tc>
               </a:tr>
-              <a:tr h="476250">
+              <a:tr h="457200">
                 <a:tc>
                   <a:txBody>
                     <a:bodyPr wrap="square" lIns="114300" tIns="95250" rIns="114300" bIns="95250">
@@ -27323,7 +27392,7 @@
                     <a:p>
                       <a:pPr algn="l"/>
                       <a:r>
-                        <a:rPr sz="1725" b="0">
+                        <a:rPr sz="1650" b="0">
                           <a:solidFill>
                             <a:srgbClr val="24384A"/>
                           </a:solidFill>
@@ -27374,7 +27443,7 @@
                     <a:p>
                       <a:pPr algn="l"/>
                       <a:r>
-                        <a:rPr sz="1725" b="0">
+                        <a:rPr sz="1650" b="0">
                           <a:solidFill>
                             <a:srgbClr val="24384A"/>
                           </a:solidFill>
@@ -27417,7 +27486,7 @@
                   </a:tcPr>
                 </a:tc>
               </a:tr>
-              <a:tr h="476250">
+              <a:tr h="457200">
                 <a:tc>
                   <a:txBody>
                     <a:bodyPr wrap="square" lIns="114300" tIns="95250" rIns="114300" bIns="95250">
@@ -27427,7 +27496,7 @@
                     <a:p>
                       <a:pPr algn="l"/>
                       <a:r>
-                        <a:rPr sz="1725" b="0">
+                        <a:rPr sz="1650" b="0">
                           <a:solidFill>
                             <a:srgbClr val="24384A"/>
                           </a:solidFill>
@@ -27435,7 +27504,7 @@
                           <a:ea typeface="Arial"/>
                           <a:cs typeface="Arial"/>
                         </a:rPr>
-                        <a:t>7 Related Work e 8 Conclusion</a:t>
+                        <a:t>7 Related Work</a:t>
                       </a:r>
                     </a:p>
                   </a:txBody>
@@ -27478,7 +27547,7 @@
                     <a:p>
                       <a:pPr algn="l"/>
                       <a:r>
-                        <a:rPr sz="1725" b="0">
+                        <a:rPr sz="1650" b="0">
                           <a:solidFill>
                             <a:srgbClr val="24384A"/>
                           </a:solidFill>
@@ -27486,7 +27555,7 @@
                           <a:ea typeface="Arial"/>
                           <a:cs typeface="Arial"/>
                         </a:rPr>
-                        <a:t>Comparação com a literatura e síntese final</a:t>
+                        <a:t>Comparação com estudos anteriores</a:t>
                       </a:r>
                     </a:p>
                   </a:txBody>
@@ -27517,6 +27586,110 @@
                     </a:lnL>
                     <a:solidFill>
                       <a:srgbClr val="EDF3F8"/>
+                    </a:solidFill>
+                  </a:tcPr>
+                </a:tc>
+              </a:tr>
+              <a:tr h="457200">
+                <a:tc>
+                  <a:txBody>
+                    <a:bodyPr wrap="square" lIns="114300" tIns="95250" rIns="114300" bIns="95250">
+                      <a:noAutofit/>
+                    </a:bodyPr>
+                    <a:lstStyle/>
+                    <a:p>
+                      <a:pPr algn="l"/>
+                      <a:r>
+                        <a:rPr sz="1650" b="0">
+                          <a:solidFill>
+                            <a:srgbClr val="24384A"/>
+                          </a:solidFill>
+                          <a:latin typeface="Arial"/>
+                          <a:ea typeface="Arial"/>
+                          <a:cs typeface="Arial"/>
+                        </a:rPr>
+                        <a:t>8 Conclusion</a:t>
+                      </a:r>
+                    </a:p>
+                  </a:txBody>
+                  <a:tcPr marL="91440" marR="91440" marT="45720" marB="45720" anchor="ctr">
+                    <a:lnB w="6350" cap="flat" cmpd="sng" algn="ctr">
+                      <a:solidFill>
+                        <a:srgbClr val="C5D1DB"/>
+                      </a:solidFill>
+                      <a:prstDash val="solid"/>
+                    </a:lnB>
+                    <a:lnT w="6350" cap="flat" cmpd="sng" algn="ctr">
+                      <a:solidFill>
+                        <a:srgbClr val="C5D1DB"/>
+                      </a:solidFill>
+                      <a:prstDash val="solid"/>
+                    </a:lnT>
+                    <a:lnR w="6350" cap="flat" cmpd="sng" algn="ctr">
+                      <a:solidFill>
+                        <a:srgbClr val="C5D1DB"/>
+                      </a:solidFill>
+                      <a:prstDash val="solid"/>
+                    </a:lnR>
+                    <a:lnL w="6350" cap="flat" cmpd="sng" algn="ctr">
+                      <a:solidFill>
+                        <a:srgbClr val="C5D1DB"/>
+                      </a:solidFill>
+                      <a:prstDash val="solid"/>
+                    </a:lnL>
+                    <a:solidFill>
+                      <a:srgbClr val="FFFFFF"/>
+                    </a:solidFill>
+                  </a:tcPr>
+                </a:tc>
+                <a:tc>
+                  <a:txBody>
+                    <a:bodyPr wrap="square" lIns="114300" tIns="95250" rIns="114300" bIns="95250">
+                      <a:noAutofit/>
+                    </a:bodyPr>
+                    <a:lstStyle/>
+                    <a:p>
+                      <a:pPr algn="l"/>
+                      <a:r>
+                        <a:rPr sz="1650" b="0">
+                          <a:solidFill>
+                            <a:srgbClr val="24384A"/>
+                          </a:solidFill>
+                          <a:latin typeface="Arial"/>
+                          <a:ea typeface="Arial"/>
+                          <a:cs typeface="Arial"/>
+                        </a:rPr>
+                        <a:t>Retomada do objetivo, síntese e implicações</a:t>
+                      </a:r>
+                    </a:p>
+                  </a:txBody>
+                  <a:tcPr marL="91440" marR="91440" marT="45720" marB="45720" anchor="ctr">
+                    <a:lnB w="6350" cap="flat" cmpd="sng" algn="ctr">
+                      <a:solidFill>
+                        <a:srgbClr val="C5D1DB"/>
+                      </a:solidFill>
+                      <a:prstDash val="solid"/>
+                    </a:lnB>
+                    <a:lnT w="6350" cap="flat" cmpd="sng" algn="ctr">
+                      <a:solidFill>
+                        <a:srgbClr val="C5D1DB"/>
+                      </a:solidFill>
+                      <a:prstDash val="solid"/>
+                    </a:lnT>
+                    <a:lnR w="6350" cap="flat" cmpd="sng" algn="ctr">
+                      <a:solidFill>
+                        <a:srgbClr val="C5D1DB"/>
+                      </a:solidFill>
+                      <a:prstDash val="solid"/>
+                    </a:lnR>
+                    <a:lnL w="6350" cap="flat" cmpd="sng" algn="ctr">
+                      <a:solidFill>
+                        <a:srgbClr val="C5D1DB"/>
+                      </a:solidFill>
+                      <a:prstDash val="solid"/>
+                    </a:lnL>
+                    <a:solidFill>
+                      <a:srgbClr val="FFFFFF"/>
                     </a:solidFill>
                   </a:tcPr>
                 </a:tc>
@@ -27527,22 +27700,22 @@
       </p:graphicFrame>
       <p:sp>
         <p:nvSpPr>
-          <p:cNvPr id="9" name="A Seção 3 apresenta o método. A Seção 4 ">
-            <a:extLst xmlns:a="http://schemas.openxmlformats.org/drawingml/2006/main">
-              <a:ext uri="{FF2B5EF4-FFF2-40B4-BE49-F238E27FC236}">
-                <a16:creationId xmlns:a16="http://schemas.microsoft.com/office/drawing/2014/main" id="{B7C221C5-B3B6-4A7A-B43E-8EEE6580E66E}"/>
-              </a:ext>
-            </a:extLst>
-          </p:cNvPr>
-          <p:cNvSpPr>
-            <a:spLocks xmlns:a="http://schemas.openxmlformats.org/drawingml/2006/main" noGrp="1"/>
-          </p:cNvSpPr>
-          <p:nvPr/>
-        </p:nvSpPr>
-        <p:spPr>
-          <a:xfrm xmlns:a="http://schemas.openxmlformats.org/drawingml/2006/main">
-            <a:off x="609600" y="5629275"/>
-            <a:ext cx="10972800" cy="304800"/>
+          <p:cNvPr id="9" name="A revisão detalhada de trabalhos relacio">
+            <a:extLst xmlns:a="http://schemas.openxmlformats.org/drawingml/2006/main">
+              <a:ext uri="{FF2B5EF4-FFF2-40B4-BE49-F238E27FC236}">
+                <a16:creationId xmlns:a16="http://schemas.microsoft.com/office/drawing/2014/main" id="{24C09E47-8C3E-4AF5-814D-C07B96DE6F00}"/>
+              </a:ext>
+            </a:extLst>
+          </p:cNvPr>
+          <p:cNvSpPr>
+            <a:spLocks xmlns:a="http://schemas.openxmlformats.org/drawingml/2006/main" noGrp="1"/>
+          </p:cNvSpPr>
+          <p:nvPr/>
+        </p:nvSpPr>
+        <p:spPr>
+          <a:xfrm xmlns:a="http://schemas.openxmlformats.org/drawingml/2006/main">
+            <a:off x="609600" y="5991225"/>
+            <a:ext cx="10972800" cy="295275"/>
           </a:xfrm>
           <a:prstGeom xmlns:a="http://schemas.openxmlformats.org/drawingml/2006/main" prst="rect">
             <a:avLst/>
@@ -27559,7 +27732,7 @@
           <a:lstStyle xmlns:a="http://schemas.openxmlformats.org/drawingml/2006/main"/>
           <a:p xmlns:a="http://schemas.openxmlformats.org/drawingml/2006/main">
             <a:pPr algn="l">
-              <a:defRPr sz="1875" b="1">
+              <a:defRPr sz="1800" b="1">
                 <a:solidFill>
                   <a:srgbClr val="174875"/>
                 </a:solidFill>
@@ -27569,66 +27742,9 @@
               </a:defRPr>
             </a:pPr>
             <a:r>
-              <a:rPr sz="1875" b="1">
+              <a:rPr sz="1800" b="1">
                 <a:solidFill>
                   <a:srgbClr val="174875"/>
-                </a:solidFill>
-                <a:latin typeface="Arial"/>
-                <a:ea typeface="Arial"/>
-                <a:cs typeface="Arial"/>
-              </a:rPr>
-              <a:t>A Seção 3 apresenta o método. A Seção 4 mostra sua aplicação em escala.</a:t>
-            </a:r>
-          </a:p>
-        </p:txBody>
-      </p:sp>
-      <p:sp>
-        <p:nvSpPr>
-          <p:cNvPr id="10" name="A revisão detalhada de trabalhos relacio">
-            <a:extLst xmlns:a="http://schemas.openxmlformats.org/drawingml/2006/main">
-              <a:ext uri="{FF2B5EF4-FFF2-40B4-BE49-F238E27FC236}">
-                <a16:creationId xmlns:a16="http://schemas.microsoft.com/office/drawing/2014/main" id="{1E8CB4A9-8314-44D2-9D24-7B24C61983A5}"/>
-              </a:ext>
-            </a:extLst>
-          </p:cNvPr>
-          <p:cNvSpPr>
-            <a:spLocks xmlns:a="http://schemas.openxmlformats.org/drawingml/2006/main" noGrp="1"/>
-          </p:cNvSpPr>
-          <p:nvPr/>
-        </p:nvSpPr>
-        <p:spPr>
-          <a:xfrm xmlns:a="http://schemas.openxmlformats.org/drawingml/2006/main">
-            <a:off x="609600" y="5972175"/>
-            <a:ext cx="10972800" cy="295275"/>
-          </a:xfrm>
-          <a:prstGeom xmlns:a="http://schemas.openxmlformats.org/drawingml/2006/main" prst="rect">
-            <a:avLst/>
-          </a:prstGeom>
-          <a:noFill xmlns:a="http://schemas.openxmlformats.org/drawingml/2006/main"/>
-          <a:ln xmlns:a="http://schemas.openxmlformats.org/drawingml/2006/main" w="0">
-            <a:noFill/>
-          </a:ln>
-        </p:spPr>
-        <p:txBody>
-          <a:bodyPr xmlns:a="http://schemas.openxmlformats.org/drawingml/2006/main" wrap="square" lIns="0" tIns="0" rIns="0" bIns="0" anchor="t">
-            <a:noAutofit/>
-          </a:bodyPr>
-          <a:lstStyle xmlns:a="http://schemas.openxmlformats.org/drawingml/2006/main"/>
-          <a:p xmlns:a="http://schemas.openxmlformats.org/drawingml/2006/main">
-            <a:pPr algn="l">
-              <a:defRPr sz="1800" b="0">
-                <a:solidFill>
-                  <a:srgbClr val="24384A"/>
-                </a:solidFill>
-                <a:latin typeface="Arial"/>
-                <a:ea typeface="Arial"/>
-                <a:cs typeface="Arial"/>
-              </a:defRPr>
-            </a:pPr>
-            <a:r>
-              <a:rPr sz="1800" b="0">
-                <a:solidFill>
-                  <a:srgbClr val="24384A"/>
                 </a:solidFill>
                 <a:latin typeface="Arial"/>
                 <a:ea typeface="Arial"/>
@@ -27642,7 +27758,7 @@
     </p:spTree>
     <p:extLst>
       <p:ext uri="{BB962C8B-B14F-4D97-AF65-F5344CB8AC3E}">
-        <p14:creationId xmlns:p14="http://schemas.microsoft.com/office/powerpoint/2010/main" val="1424236277"/>
+        <p14:creationId xmlns:p14="http://schemas.microsoft.com/office/powerpoint/2010/main" val="299718735"/>
       </p:ext>
     </p:extLst>
   </p:cSld>
@@ -27673,7 +27789,7 @@
           <p:cNvPr id="25" name="">
             <a:extLst xmlns:a="http://schemas.openxmlformats.org/drawingml/2006/main">
               <a:ext uri="{FF2B5EF4-FFF2-40B4-BE49-F238E27FC236}">
-                <a16:creationId xmlns:a16="http://schemas.microsoft.com/office/drawing/2014/main" id="{3B392D1C-FD1F-4765-83BF-6615FCD670D8}"/>
+                <a16:creationId xmlns:a16="http://schemas.microsoft.com/office/drawing/2014/main" id="{5105D1C3-FF42-4B34-B781-148AE2FAC672}"/>
               </a:ext>
             </a:extLst>
           </p:cNvPr>
@@ -27703,7 +27819,7 @@
           <p:cNvPr id="2" name="ANÁLISE DO ABSTRACT">
             <a:extLst xmlns:a="http://schemas.openxmlformats.org/drawingml/2006/main">
               <a:ext uri="{FF2B5EF4-FFF2-40B4-BE49-F238E27FC236}">
-                <a16:creationId xmlns:a16="http://schemas.microsoft.com/office/drawing/2014/main" id="{E994C503-9226-4B7B-AC1C-BE28DD81FB9F}"/>
+                <a16:creationId xmlns:a16="http://schemas.microsoft.com/office/drawing/2014/main" id="{6A431CA4-8A04-4E16-8C78-C6DD117FB5AF}"/>
               </a:ext>
             </a:extLst>
           </p:cNvPr>
@@ -27760,7 +27876,7 @@
           <p:cNvPr id="3" name="Resumo: contexto, lacuna e objetivo">
             <a:extLst xmlns:a="http://schemas.openxmlformats.org/drawingml/2006/main">
               <a:ext uri="{FF2B5EF4-FFF2-40B4-BE49-F238E27FC236}">
-                <a16:creationId xmlns:a16="http://schemas.microsoft.com/office/drawing/2014/main" id="{11AE3A62-EDFC-4665-97DB-A15FB7E89E2B}"/>
+                <a16:creationId xmlns:a16="http://schemas.microsoft.com/office/drawing/2014/main" id="{98C2617F-970B-4D41-AD70-613CE7A3E241}"/>
               </a:ext>
             </a:extLst>
           </p:cNvPr>
@@ -27817,7 +27933,7 @@
           <p:cNvPr id="4" name="">
             <a:extLst xmlns:a="http://schemas.openxmlformats.org/drawingml/2006/main">
               <a:ext uri="{FF2B5EF4-FFF2-40B4-BE49-F238E27FC236}">
-                <a16:creationId xmlns:a16="http://schemas.microsoft.com/office/drawing/2014/main" id="{863CD8A2-43CD-47A4-AC49-DDCDC7BE2D02}"/>
+                <a16:creationId xmlns:a16="http://schemas.microsoft.com/office/drawing/2014/main" id="{8032A474-40CF-4E58-84F9-3EED2ED73C89}"/>
               </a:ext>
             </a:extLst>
           </p:cNvPr>
@@ -27847,7 +27963,7 @@
           <p:cNvPr id="5" name="">
             <a:extLst xmlns:a="http://schemas.openxmlformats.org/drawingml/2006/main">
               <a:ext uri="{FF2B5EF4-FFF2-40B4-BE49-F238E27FC236}">
-                <a16:creationId xmlns:a16="http://schemas.microsoft.com/office/drawing/2014/main" id="{A6A89FB5-2E2F-4226-9544-8A8A520455B3}"/>
+                <a16:creationId xmlns:a16="http://schemas.microsoft.com/office/drawing/2014/main" id="{00BD0A7A-A403-4116-9AD7-FAA29CB108F4}"/>
               </a:ext>
             </a:extLst>
           </p:cNvPr>
@@ -27877,7 +27993,7 @@
           <p:cNvPr id="6" name="Nguyen, Backes e Stock (2022), Abstract,">
             <a:extLst xmlns:a="http://schemas.openxmlformats.org/drawingml/2006/main">
               <a:ext uri="{FF2B5EF4-FFF2-40B4-BE49-F238E27FC236}">
-                <a16:creationId xmlns:a16="http://schemas.microsoft.com/office/drawing/2014/main" id="{65C89E5D-35DE-4D7A-8EFC-22CD5A3A3F62}"/>
+                <a16:creationId xmlns:a16="http://schemas.microsoft.com/office/drawing/2014/main" id="{C61BF0DC-7A14-4B2B-851F-A3BD3D5EBBC7}"/>
               </a:ext>
             </a:extLst>
           </p:cNvPr>
@@ -27934,7 +28050,7 @@
           <p:cNvPr id="7" name="06 / 23">
             <a:extLst xmlns:a="http://schemas.openxmlformats.org/drawingml/2006/main">
               <a:ext uri="{FF2B5EF4-FFF2-40B4-BE49-F238E27FC236}">
-                <a16:creationId xmlns:a16="http://schemas.microsoft.com/office/drawing/2014/main" id="{F3A4FA85-CFE8-4799-982F-A2EC1677CB2E}"/>
+                <a16:creationId xmlns:a16="http://schemas.microsoft.com/office/drawing/2014/main" id="{2FCAF904-4A60-4461-B644-6B22EA7EC6B3}"/>
               </a:ext>
             </a:extLst>
           </p:cNvPr>
@@ -27991,7 +28107,7 @@
           <p:cNvPr id="8" name="CONTEXTO">
             <a:extLst xmlns:a="http://schemas.openxmlformats.org/drawingml/2006/main">
               <a:ext uri="{FF2B5EF4-FFF2-40B4-BE49-F238E27FC236}">
-                <a16:creationId xmlns:a16="http://schemas.microsoft.com/office/drawing/2014/main" id="{1F8E3D19-092B-4BAC-A0FC-4EC67BF3A900}"/>
+                <a16:creationId xmlns:a16="http://schemas.microsoft.com/office/drawing/2014/main" id="{31BC30AF-7279-4D61-A4D5-BFA4A0F612E1}"/>
               </a:ext>
             </a:extLst>
           </p:cNvPr>
@@ -28048,7 +28164,7 @@
           <p:cNvPr id="9" name="EN">
             <a:extLst xmlns:a="http://schemas.openxmlformats.org/drawingml/2006/main">
               <a:ext uri="{FF2B5EF4-FFF2-40B4-BE49-F238E27FC236}">
-                <a16:creationId xmlns:a16="http://schemas.microsoft.com/office/drawing/2014/main" id="{BD23F619-AFB6-4E59-9255-2DDE772B0B98}"/>
+                <a16:creationId xmlns:a16="http://schemas.microsoft.com/office/drawing/2014/main" id="{CA949620-1B11-4864-BFC6-F46FC53088CF}"/>
               </a:ext>
             </a:extLst>
           </p:cNvPr>
@@ -28105,7 +28221,7 @@
           <p:cNvPr id="10" name="“freely given, specific, informed, and u">
             <a:extLst xmlns:a="http://schemas.openxmlformats.org/drawingml/2006/main">
               <a:ext uri="{FF2B5EF4-FFF2-40B4-BE49-F238E27FC236}">
-                <a16:creationId xmlns:a16="http://schemas.microsoft.com/office/drawing/2014/main" id="{41E289B7-5944-4E7A-A294-C3E489F793A2}"/>
+                <a16:creationId xmlns:a16="http://schemas.microsoft.com/office/drawing/2014/main" id="{380F7567-6406-4DB2-977B-EEC743BD23C4}"/>
               </a:ext>
             </a:extLst>
           </p:cNvPr>
@@ -28162,7 +28278,7 @@
           <p:cNvPr id="11" name="PT">
             <a:extLst xmlns:a="http://schemas.openxmlformats.org/drawingml/2006/main">
               <a:ext uri="{FF2B5EF4-FFF2-40B4-BE49-F238E27FC236}">
-                <a16:creationId xmlns:a16="http://schemas.microsoft.com/office/drawing/2014/main" id="{A39A31C8-4FE5-4C75-8C8F-FC732BC406E4}"/>
+                <a16:creationId xmlns:a16="http://schemas.microsoft.com/office/drawing/2014/main" id="{3D43B041-C3AF-4E60-83EF-CB801F9354D3}"/>
               </a:ext>
             </a:extLst>
           </p:cNvPr>
@@ -28219,7 +28335,7 @@
           <p:cNvPr id="12" name="Livre, específico, informado e inequívoc">
             <a:extLst xmlns:a="http://schemas.openxmlformats.org/drawingml/2006/main">
               <a:ext uri="{FF2B5EF4-FFF2-40B4-BE49-F238E27FC236}">
-                <a16:creationId xmlns:a16="http://schemas.microsoft.com/office/drawing/2014/main" id="{0E4DBE66-1187-4F2D-A197-CF211EBB585C}"/>
+                <a16:creationId xmlns:a16="http://schemas.microsoft.com/office/drawing/2014/main" id="{588199F4-5CC8-40D4-8A38-E353A5DDDAC4}"/>
               </a:ext>
             </a:extLst>
           </p:cNvPr>
@@ -28276,7 +28392,7 @@
           <p:cNvPr id="13" name="">
             <a:extLst xmlns:a="http://schemas.openxmlformats.org/drawingml/2006/main">
               <a:ext uri="{FF2B5EF4-FFF2-40B4-BE49-F238E27FC236}">
-                <a16:creationId xmlns:a16="http://schemas.microsoft.com/office/drawing/2014/main" id="{DA45AFE3-FE89-4124-88F4-30E4E5F0B820}"/>
+                <a16:creationId xmlns:a16="http://schemas.microsoft.com/office/drawing/2014/main" id="{7FE3D621-569A-4BDC-B6F0-090413691FDA}"/>
               </a:ext>
             </a:extLst>
           </p:cNvPr>
@@ -28306,7 +28422,7 @@
           <p:cNvPr id="14" name="LACUNA">
             <a:extLst xmlns:a="http://schemas.openxmlformats.org/drawingml/2006/main">
               <a:ext uri="{FF2B5EF4-FFF2-40B4-BE49-F238E27FC236}">
-                <a16:creationId xmlns:a16="http://schemas.microsoft.com/office/drawing/2014/main" id="{520FE5D7-F817-407C-A641-817C55F2BF3D}"/>
+                <a16:creationId xmlns:a16="http://schemas.microsoft.com/office/drawing/2014/main" id="{88FCBE81-EC6D-4812-BAB9-B29579BDADC6}"/>
               </a:ext>
             </a:extLst>
           </p:cNvPr>
@@ -28363,7 +28479,7 @@
           <p:cNvPr id="15" name="EN">
             <a:extLst xmlns:a="http://schemas.openxmlformats.org/drawingml/2006/main">
               <a:ext uri="{FF2B5EF4-FFF2-40B4-BE49-F238E27FC236}">
-                <a16:creationId xmlns:a16="http://schemas.microsoft.com/office/drawing/2014/main" id="{1B6306C1-4D3C-4117-BAF7-9DDC6CA11302}"/>
+                <a16:creationId xmlns:a16="http://schemas.microsoft.com/office/drawing/2014/main" id="{49B30B5A-14D1-4523-AC51-65361778D91E}"/>
               </a:ext>
             </a:extLst>
           </p:cNvPr>
@@ -28420,7 +28536,7 @@
           <p:cNvPr id="16" name="“no research has systematically studied ">
             <a:extLst xmlns:a="http://schemas.openxmlformats.org/drawingml/2006/main">
               <a:ext uri="{FF2B5EF4-FFF2-40B4-BE49-F238E27FC236}">
-                <a16:creationId xmlns:a16="http://schemas.microsoft.com/office/drawing/2014/main" id="{938DEB37-4DF0-4819-8346-4FF0B7212403}"/>
+                <a16:creationId xmlns:a16="http://schemas.microsoft.com/office/drawing/2014/main" id="{F8B51F30-A123-4B95-BC18-3FFC8E54E699}"/>
               </a:ext>
             </a:extLst>
           </p:cNvPr>
@@ -28477,7 +28593,7 @@
           <p:cNvPr id="17" name="PT">
             <a:extLst xmlns:a="http://schemas.openxmlformats.org/drawingml/2006/main">
               <a:ext uri="{FF2B5EF4-FFF2-40B4-BE49-F238E27FC236}">
-                <a16:creationId xmlns:a16="http://schemas.microsoft.com/office/drawing/2014/main" id="{049143A2-6818-4ACE-9814-87AB0500C9C0}"/>
+                <a16:creationId xmlns:a16="http://schemas.microsoft.com/office/drawing/2014/main" id="{E2E6AC51-7C7E-4902-9D80-B834596A78DE}"/>
               </a:ext>
             </a:extLst>
           </p:cNvPr>
@@ -28534,7 +28650,7 @@
           <p:cNvPr id="18" name="Nenhuma pesquisa havia estudado sistemat">
             <a:extLst xmlns:a="http://schemas.openxmlformats.org/drawingml/2006/main">
               <a:ext uri="{FF2B5EF4-FFF2-40B4-BE49-F238E27FC236}">
-                <a16:creationId xmlns:a16="http://schemas.microsoft.com/office/drawing/2014/main" id="{DE9679F9-F374-4C84-A869-A6A96FCF5BDB}"/>
+                <a16:creationId xmlns:a16="http://schemas.microsoft.com/office/drawing/2014/main" id="{5CAC9E98-DA93-4BD0-A505-E3FDCD9AAD72}"/>
               </a:ext>
             </a:extLst>
           </p:cNvPr>
@@ -28591,7 +28707,7 @@
           <p:cNvPr id="19" name="">
             <a:extLst xmlns:a="http://schemas.openxmlformats.org/drawingml/2006/main">
               <a:ext uri="{FF2B5EF4-FFF2-40B4-BE49-F238E27FC236}">
-                <a16:creationId xmlns:a16="http://schemas.microsoft.com/office/drawing/2014/main" id="{3944C9B8-D780-4824-AE81-3F6C237D7ECF}"/>
+                <a16:creationId xmlns:a16="http://schemas.microsoft.com/office/drawing/2014/main" id="{E5CCEE44-1CC9-419A-B7B0-938D09AFB1DE}"/>
               </a:ext>
             </a:extLst>
           </p:cNvPr>
@@ -28621,7 +28737,7 @@
           <p:cNvPr id="20" name="OBJETIVO">
             <a:extLst xmlns:a="http://schemas.openxmlformats.org/drawingml/2006/main">
               <a:ext uri="{FF2B5EF4-FFF2-40B4-BE49-F238E27FC236}">
-                <a16:creationId xmlns:a16="http://schemas.microsoft.com/office/drawing/2014/main" id="{7198A0B5-71B2-40D8-A56C-9B2456507C86}"/>
+                <a16:creationId xmlns:a16="http://schemas.microsoft.com/office/drawing/2014/main" id="{C2D9CFCD-ABD8-4523-A34C-BC9846EF57A3}"/>
               </a:ext>
             </a:extLst>
           </p:cNvPr>
@@ -28678,7 +28794,7 @@
           <p:cNvPr id="21" name="EN">
             <a:extLst xmlns:a="http://schemas.openxmlformats.org/drawingml/2006/main">
               <a:ext uri="{FF2B5EF4-FFF2-40B4-BE49-F238E27FC236}">
-                <a16:creationId xmlns:a16="http://schemas.microsoft.com/office/drawing/2014/main" id="{471573A0-8E42-4C99-9F8A-5A292380085C}"/>
+                <a16:creationId xmlns:a16="http://schemas.microsoft.com/office/drawing/2014/main" id="{DF2693C8-3026-4256-B21D-5C5B2AF3369E}"/>
               </a:ext>
             </a:extLst>
           </p:cNvPr>
@@ -28735,7 +28851,7 @@
           <p:cNvPr id="22" name="“we perform the first large-scale study ">
             <a:extLst xmlns:a="http://schemas.openxmlformats.org/drawingml/2006/main">
               <a:ext uri="{FF2B5EF4-FFF2-40B4-BE49-F238E27FC236}">
-                <a16:creationId xmlns:a16="http://schemas.microsoft.com/office/drawing/2014/main" id="{82877A5C-B6F3-4464-ACD7-150E9CD5A8FD}"/>
+                <a16:creationId xmlns:a16="http://schemas.microsoft.com/office/drawing/2014/main" id="{7DBFA940-F3B0-4D4B-86DB-33ED019AFC38}"/>
               </a:ext>
             </a:extLst>
           </p:cNvPr>
@@ -28792,7 +28908,7 @@
           <p:cNvPr id="23" name="PT">
             <a:extLst xmlns:a="http://schemas.openxmlformats.org/drawingml/2006/main">
               <a:ext uri="{FF2B5EF4-FFF2-40B4-BE49-F238E27FC236}">
-                <a16:creationId xmlns:a16="http://schemas.microsoft.com/office/drawing/2014/main" id="{9EA91FE0-DE61-415C-BBDC-B06A837F43D6}"/>
+                <a16:creationId xmlns:a16="http://schemas.microsoft.com/office/drawing/2014/main" id="{8411F8F4-2F00-4CBD-8262-7E321DDAF268}"/>
               </a:ext>
             </a:extLst>
           </p:cNvPr>
@@ -28849,7 +28965,7 @@
           <p:cNvPr id="24" name="Realizamos o primeiro estudo em larga es">
             <a:extLst xmlns:a="http://schemas.openxmlformats.org/drawingml/2006/main">
               <a:ext uri="{FF2B5EF4-FFF2-40B4-BE49-F238E27FC236}">
-                <a16:creationId xmlns:a16="http://schemas.microsoft.com/office/drawing/2014/main" id="{825986D6-2DC6-46BE-AD76-91C17ECA97D5}"/>
+                <a16:creationId xmlns:a16="http://schemas.microsoft.com/office/drawing/2014/main" id="{F96D9C07-63DE-480B-B99A-FE2188E15D2C}"/>
               </a:ext>
             </a:extLst>
           </p:cNvPr>
@@ -28904,7 +29020,7 @@
     </p:spTree>
     <p:extLst>
       <p:ext uri="{BB962C8B-B14F-4D97-AF65-F5344CB8AC3E}">
-        <p14:creationId xmlns:p14="http://schemas.microsoft.com/office/powerpoint/2010/main" val="994505604"/>
+        <p14:creationId xmlns:p14="http://schemas.microsoft.com/office/powerpoint/2010/main" val="1386392529"/>
       </p:ext>
     </p:extLst>
   </p:cSld>
@@ -28935,7 +29051,7 @@
           <p:cNvPr id="26" name="">
             <a:extLst xmlns:a="http://schemas.openxmlformats.org/drawingml/2006/main">
               <a:ext uri="{FF2B5EF4-FFF2-40B4-BE49-F238E27FC236}">
-                <a16:creationId xmlns:a16="http://schemas.microsoft.com/office/drawing/2014/main" id="{E11B3252-804B-4B23-8CD2-F0AECF684474}"/>
+                <a16:creationId xmlns:a16="http://schemas.microsoft.com/office/drawing/2014/main" id="{2E362B36-55BD-444A-BB7B-5AFAC3B3FACE}"/>
               </a:ext>
             </a:extLst>
           </p:cNvPr>
@@ -28965,7 +29081,7 @@
           <p:cNvPr id="2" name="ANÁLISE DO ABSTRACT">
             <a:extLst xmlns:a="http://schemas.openxmlformats.org/drawingml/2006/main">
               <a:ext uri="{FF2B5EF4-FFF2-40B4-BE49-F238E27FC236}">
-                <a16:creationId xmlns:a16="http://schemas.microsoft.com/office/drawing/2014/main" id="{8E00AC70-D5B5-4AF0-B29A-2E933865A7F1}"/>
+                <a16:creationId xmlns:a16="http://schemas.microsoft.com/office/drawing/2014/main" id="{A707FD7A-FB66-463D-9757-9FA9E2851735}"/>
               </a:ext>
             </a:extLst>
           </p:cNvPr>
@@ -29022,7 +29138,7 @@
           <p:cNvPr id="3" name="Resumo: método, resultado e implicação">
             <a:extLst xmlns:a="http://schemas.openxmlformats.org/drawingml/2006/main">
               <a:ext uri="{FF2B5EF4-FFF2-40B4-BE49-F238E27FC236}">
-                <a16:creationId xmlns:a16="http://schemas.microsoft.com/office/drawing/2014/main" id="{0E5AD0ED-DA4D-4447-A331-DE52DFDD7464}"/>
+                <a16:creationId xmlns:a16="http://schemas.microsoft.com/office/drawing/2014/main" id="{F34FB287-970D-4414-BDA7-6BA6390F6703}"/>
               </a:ext>
             </a:extLst>
           </p:cNvPr>
@@ -29079,7 +29195,7 @@
           <p:cNvPr id="4" name="">
             <a:extLst xmlns:a="http://schemas.openxmlformats.org/drawingml/2006/main">
               <a:ext uri="{FF2B5EF4-FFF2-40B4-BE49-F238E27FC236}">
-                <a16:creationId xmlns:a16="http://schemas.microsoft.com/office/drawing/2014/main" id="{54BAFEC2-81F9-40BA-98A5-8DC02D4B5174}"/>
+                <a16:creationId xmlns:a16="http://schemas.microsoft.com/office/drawing/2014/main" id="{7CD1ABA4-789A-400C-BF53-831ABA99EC6D}"/>
               </a:ext>
             </a:extLst>
           </p:cNvPr>
@@ -29109,7 +29225,7 @@
           <p:cNvPr id="5" name="">
             <a:extLst xmlns:a="http://schemas.openxmlformats.org/drawingml/2006/main">
               <a:ext uri="{FF2B5EF4-FFF2-40B4-BE49-F238E27FC236}">
-                <a16:creationId xmlns:a16="http://schemas.microsoft.com/office/drawing/2014/main" id="{2A09903B-3A1D-443D-8D43-CA2683D8026C}"/>
+                <a16:creationId xmlns:a16="http://schemas.microsoft.com/office/drawing/2014/main" id="{00720985-D306-4709-9A40-F626B2C580BB}"/>
               </a:ext>
             </a:extLst>
           </p:cNvPr>
@@ -29139,7 +29255,7 @@
           <p:cNvPr id="6" name="Nguyen, Backes e Stock (2022), Abstract,">
             <a:extLst xmlns:a="http://schemas.openxmlformats.org/drawingml/2006/main">
               <a:ext uri="{FF2B5EF4-FFF2-40B4-BE49-F238E27FC236}">
-                <a16:creationId xmlns:a16="http://schemas.microsoft.com/office/drawing/2014/main" id="{D7399315-B4B6-4B3C-A0B2-E3F5824ED474}"/>
+                <a16:creationId xmlns:a16="http://schemas.microsoft.com/office/drawing/2014/main" id="{1151AB9B-E3E2-4662-9E84-0E7BC8E3BC5F}"/>
               </a:ext>
             </a:extLst>
           </p:cNvPr>
@@ -29196,7 +29312,7 @@
           <p:cNvPr id="7" name="07 / 23">
             <a:extLst xmlns:a="http://schemas.openxmlformats.org/drawingml/2006/main">
               <a:ext uri="{FF2B5EF4-FFF2-40B4-BE49-F238E27FC236}">
-                <a16:creationId xmlns:a16="http://schemas.microsoft.com/office/drawing/2014/main" id="{ED815924-4AF5-4B64-B2E7-B9F398A5A682}"/>
+                <a16:creationId xmlns:a16="http://schemas.microsoft.com/office/drawing/2014/main" id="{C82BFB5C-8F36-4F35-9096-B4713C3AE9C2}"/>
               </a:ext>
             </a:extLst>
           </p:cNvPr>
@@ -29253,7 +29369,7 @@
           <p:cNvPr id="8" name="MÉTODO">
             <a:extLst xmlns:a="http://schemas.openxmlformats.org/drawingml/2006/main">
               <a:ext uri="{FF2B5EF4-FFF2-40B4-BE49-F238E27FC236}">
-                <a16:creationId xmlns:a16="http://schemas.microsoft.com/office/drawing/2014/main" id="{0759BE27-7D5C-41E5-8080-1C45FF53940C}"/>
+                <a16:creationId xmlns:a16="http://schemas.microsoft.com/office/drawing/2014/main" id="{E5D234E3-C87B-46E4-B0BF-6C61E1264812}"/>
               </a:ext>
             </a:extLst>
           </p:cNvPr>
@@ -29310,7 +29426,7 @@
           <p:cNvPr id="9" name="EN">
             <a:extLst xmlns:a="http://schemas.openxmlformats.org/drawingml/2006/main">
               <a:ext uri="{FF2B5EF4-FFF2-40B4-BE49-F238E27FC236}">
-                <a16:creationId xmlns:a16="http://schemas.microsoft.com/office/drawing/2014/main" id="{F76F2768-CFD7-44BC-9B2A-1B16C7CD3A19}"/>
+                <a16:creationId xmlns:a16="http://schemas.microsoft.com/office/drawing/2014/main" id="{215926B4-2D1E-44EB-AE0F-012C1A7100EA}"/>
               </a:ext>
             </a:extLst>
           </p:cNvPr>
@@ -29367,7 +29483,7 @@
           <p:cNvPr id="10" name="“a mostly automated and scalable approac">
             <a:extLst xmlns:a="http://schemas.openxmlformats.org/drawingml/2006/main">
               <a:ext uri="{FF2B5EF4-FFF2-40B4-BE49-F238E27FC236}">
-                <a16:creationId xmlns:a16="http://schemas.microsoft.com/office/drawing/2014/main" id="{D32373CB-4413-4C51-A5F3-FADA80EBFF01}"/>
+                <a16:creationId xmlns:a16="http://schemas.microsoft.com/office/drawing/2014/main" id="{9E04337D-0E75-4F42-9FCF-12567E183B01}"/>
               </a:ext>
             </a:extLst>
           </p:cNvPr>
@@ -29424,7 +29540,7 @@
           <p:cNvPr id="11" name="PT">
             <a:extLst xmlns:a="http://schemas.openxmlformats.org/drawingml/2006/main">
               <a:ext uri="{FF2B5EF4-FFF2-40B4-BE49-F238E27FC236}">
-                <a16:creationId xmlns:a16="http://schemas.microsoft.com/office/drawing/2014/main" id="{50D46FFF-4548-4F6E-AEDA-6539EFC315A4}"/>
+                <a16:creationId xmlns:a16="http://schemas.microsoft.com/office/drawing/2014/main" id="{C34BABD2-7E45-4F02-813F-790CC135EC09}"/>
               </a:ext>
             </a:extLst>
           </p:cNvPr>
@@ -29481,7 +29597,7 @@
           <p:cNvPr id="12" name="Uma abordagem majoritariamente automatiz">
             <a:extLst xmlns:a="http://schemas.openxmlformats.org/drawingml/2006/main">
               <a:ext uri="{FF2B5EF4-FFF2-40B4-BE49-F238E27FC236}">
-                <a16:creationId xmlns:a16="http://schemas.microsoft.com/office/drawing/2014/main" id="{2B8DABE0-CF69-4E4A-AFC7-D830320CE3DD}"/>
+                <a16:creationId xmlns:a16="http://schemas.microsoft.com/office/drawing/2014/main" id="{35E56F4A-87F2-4D7B-8B08-591DF370973A}"/>
               </a:ext>
             </a:extLst>
           </p:cNvPr>
@@ -29538,7 +29654,7 @@
           <p:cNvPr id="13" name="">
             <a:extLst xmlns:a="http://schemas.openxmlformats.org/drawingml/2006/main">
               <a:ext uri="{FF2B5EF4-FFF2-40B4-BE49-F238E27FC236}">
-                <a16:creationId xmlns:a16="http://schemas.microsoft.com/office/drawing/2014/main" id="{3BC11570-2A3B-4990-96F4-1F41B1712E4F}"/>
+                <a16:creationId xmlns:a16="http://schemas.microsoft.com/office/drawing/2014/main" id="{67CE2EEB-AC05-4055-9A0C-DEFF3230D83E}"/>
               </a:ext>
             </a:extLst>
           </p:cNvPr>
@@ -29568,7 +29684,7 @@
           <p:cNvPr id="14" name="RESULTADO">
             <a:extLst xmlns:a="http://schemas.openxmlformats.org/drawingml/2006/main">
               <a:ext uri="{FF2B5EF4-FFF2-40B4-BE49-F238E27FC236}">
-                <a16:creationId xmlns:a16="http://schemas.microsoft.com/office/drawing/2014/main" id="{36C5CCFA-530B-4FEB-A2BB-D2A552DD4DCE}"/>
+                <a16:creationId xmlns:a16="http://schemas.microsoft.com/office/drawing/2014/main" id="{4C44CFCF-CBE8-4668-9763-72A9ED9622E8}"/>
               </a:ext>
             </a:extLst>
           </p:cNvPr>
@@ -29625,7 +29741,7 @@
           <p:cNvPr id="15" name="EN">
             <a:extLst xmlns:a="http://schemas.openxmlformats.org/drawingml/2006/main">
               <a:ext uri="{FF2B5EF4-FFF2-40B4-BE49-F238E27FC236}">
-                <a16:creationId xmlns:a16="http://schemas.microsoft.com/office/drawing/2014/main" id="{C86FFB92-4FAA-4906-8B37-4D9E6A2431AF}"/>
+                <a16:creationId xmlns:a16="http://schemas.microsoft.com/office/drawing/2014/main" id="{95767925-B9FC-4093-A010-2E44264D6E2C}"/>
               </a:ext>
             </a:extLst>
           </p:cNvPr>
@@ -29682,7 +29798,7 @@
           <p:cNvPr id="16" name="“we identify 2,688 (20.54%) apps violate">
             <a:extLst xmlns:a="http://schemas.openxmlformats.org/drawingml/2006/main">
               <a:ext uri="{FF2B5EF4-FFF2-40B4-BE49-F238E27FC236}">
-                <a16:creationId xmlns:a16="http://schemas.microsoft.com/office/drawing/2014/main" id="{7E977E6D-52F4-4F97-BB74-BE57E52989CA}"/>
+                <a16:creationId xmlns:a16="http://schemas.microsoft.com/office/drawing/2014/main" id="{6E12C1B3-627F-45A2-A95A-E6C05F229481}"/>
               </a:ext>
             </a:extLst>
           </p:cNvPr>
@@ -29739,7 +29855,7 @@
           <p:cNvPr id="17" name="PT">
             <a:extLst xmlns:a="http://schemas.openxmlformats.org/drawingml/2006/main">
               <a:ext uri="{FF2B5EF4-FFF2-40B4-BE49-F238E27FC236}">
-                <a16:creationId xmlns:a16="http://schemas.microsoft.com/office/drawing/2014/main" id="{6DC6343F-5271-476A-BC44-703CC5291514}"/>
+                <a16:creationId xmlns:a16="http://schemas.microsoft.com/office/drawing/2014/main" id="{D8085EC4-2139-4EFA-85D5-F5291ACD6723}"/>
               </a:ext>
             </a:extLst>
           </p:cNvPr>
@@ -29796,7 +29912,7 @@
           <p:cNvPr id="18" name="Identificamos 2.688 aplicativos (20,54%)">
             <a:extLst xmlns:a="http://schemas.openxmlformats.org/drawingml/2006/main">
               <a:ext uri="{FF2B5EF4-FFF2-40B4-BE49-F238E27FC236}">
-                <a16:creationId xmlns:a16="http://schemas.microsoft.com/office/drawing/2014/main" id="{9D2033E3-FCEF-47FF-9364-2D613B90ADD0}"/>
+                <a16:creationId xmlns:a16="http://schemas.microsoft.com/office/drawing/2014/main" id="{55ED7D53-7940-4EDE-82E1-B03282F727E7}"/>
               </a:ext>
             </a:extLst>
           </p:cNvPr>
@@ -29853,7 +29969,7 @@
           <p:cNvPr id="19" name="">
             <a:extLst xmlns:a="http://schemas.openxmlformats.org/drawingml/2006/main">
               <a:ext uri="{FF2B5EF4-FFF2-40B4-BE49-F238E27FC236}">
-                <a16:creationId xmlns:a16="http://schemas.microsoft.com/office/drawing/2014/main" id="{2E1C427A-54B7-4643-B74A-92ED7DD57C47}"/>
+                <a16:creationId xmlns:a16="http://schemas.microsoft.com/office/drawing/2014/main" id="{A7C2F081-5EE8-4D00-9744-00512A34DDDC}"/>
               </a:ext>
             </a:extLst>
           </p:cNvPr>
@@ -29883,7 +29999,7 @@
           <p:cNvPr id="20" name="IMPLICAÇÃO">
             <a:extLst xmlns:a="http://schemas.openxmlformats.org/drawingml/2006/main">
               <a:ext uri="{FF2B5EF4-FFF2-40B4-BE49-F238E27FC236}">
-                <a16:creationId xmlns:a16="http://schemas.microsoft.com/office/drawing/2014/main" id="{BC8AC5F2-611B-4BFA-9DCD-998C991524B6}"/>
+                <a16:creationId xmlns:a16="http://schemas.microsoft.com/office/drawing/2014/main" id="{FC9CCEEF-63E6-4817-A356-90FA3B39FBC7}"/>
               </a:ext>
             </a:extLst>
           </p:cNvPr>
@@ -29940,7 +30056,7 @@
           <p:cNvPr id="21" name="EN">
             <a:extLst xmlns:a="http://schemas.openxmlformats.org/drawingml/2006/main">
               <a:ext uri="{FF2B5EF4-FFF2-40B4-BE49-F238E27FC236}">
-                <a16:creationId xmlns:a16="http://schemas.microsoft.com/office/drawing/2014/main" id="{DA214321-D73A-4539-B5E7-AC91021D2C17}"/>
+                <a16:creationId xmlns:a16="http://schemas.microsoft.com/office/drawing/2014/main" id="{FD9A4F37-A9B0-4E44-B7BE-A9E29E7BE6BA}"/>
               </a:ext>
             </a:extLst>
           </p:cNvPr>
@@ -29997,7 +30113,7 @@
           <p:cNvPr id="22" name="“more transparent processing of personal">
             <a:extLst xmlns:a="http://schemas.openxmlformats.org/drawingml/2006/main">
               <a:ext uri="{FF2B5EF4-FFF2-40B4-BE49-F238E27FC236}">
-                <a16:creationId xmlns:a16="http://schemas.microsoft.com/office/drawing/2014/main" id="{375AA09E-DBF8-4B69-9FF7-F0912D98E64A}"/>
+                <a16:creationId xmlns:a16="http://schemas.microsoft.com/office/drawing/2014/main" id="{9E161F2D-A418-405A-9504-C6145EE39A63}"/>
               </a:ext>
             </a:extLst>
           </p:cNvPr>
@@ -30054,7 +30170,7 @@
           <p:cNvPr id="23" name="PT">
             <a:extLst xmlns:a="http://schemas.openxmlformats.org/drawingml/2006/main">
               <a:ext uri="{FF2B5EF4-FFF2-40B4-BE49-F238E27FC236}">
-                <a16:creationId xmlns:a16="http://schemas.microsoft.com/office/drawing/2014/main" id="{E94640B7-CA84-473F-A55F-C8E4416A7836}"/>
+                <a16:creationId xmlns:a16="http://schemas.microsoft.com/office/drawing/2014/main" id="{A30C4001-5F12-46A7-B483-2630278EE5AD}"/>
               </a:ext>
             </a:extLst>
           </p:cNvPr>
@@ -30111,7 +30227,7 @@
           <p:cNvPr id="24" name="Maior transparência no tratamento de dad">
             <a:extLst xmlns:a="http://schemas.openxmlformats.org/drawingml/2006/main">
               <a:ext uri="{FF2B5EF4-FFF2-40B4-BE49-F238E27FC236}">
-                <a16:creationId xmlns:a16="http://schemas.microsoft.com/office/drawing/2014/main" id="{9957EEF5-6DE4-4F61-994E-8A72FFC5FC09}"/>
+                <a16:creationId xmlns:a16="http://schemas.microsoft.com/office/drawing/2014/main" id="{D3BB46E7-EA90-48A4-90C9-D22CAEEA2F72}"/>
               </a:ext>
             </a:extLst>
           </p:cNvPr>
@@ -30168,7 +30284,7 @@
           <p:cNvPr id="25" name="Leitura do seminário: o resumo antecipa ">
             <a:extLst xmlns:a="http://schemas.openxmlformats.org/drawingml/2006/main">
               <a:ext uri="{FF2B5EF4-FFF2-40B4-BE49-F238E27FC236}">
-                <a16:creationId xmlns:a16="http://schemas.microsoft.com/office/drawing/2014/main" id="{DAD5697F-67A9-4A5D-96E8-81F0C07505A3}"/>
+                <a16:creationId xmlns:a16="http://schemas.microsoft.com/office/drawing/2014/main" id="{A33588E1-1D53-4FD3-95FC-F333DC7B247F}"/>
               </a:ext>
             </a:extLst>
           </p:cNvPr>
@@ -30223,7 +30339,7 @@
     </p:spTree>
     <p:extLst>
       <p:ext uri="{BB962C8B-B14F-4D97-AF65-F5344CB8AC3E}">
-        <p14:creationId xmlns:p14="http://schemas.microsoft.com/office/powerpoint/2010/main" val="2085325094"/>
+        <p14:creationId xmlns:p14="http://schemas.microsoft.com/office/powerpoint/2010/main" val="2085742461"/>
       </p:ext>
     </p:extLst>
   </p:cSld>
@@ -30254,7 +30370,7 @@
           <p:cNvPr id="26" name="">
             <a:extLst xmlns:a="http://schemas.openxmlformats.org/drawingml/2006/main">
               <a:ext uri="{FF2B5EF4-FFF2-40B4-BE49-F238E27FC236}">
-                <a16:creationId xmlns:a16="http://schemas.microsoft.com/office/drawing/2014/main" id="{32F196C5-1AFC-4B84-82E1-510C3EC51D1A}"/>
+                <a16:creationId xmlns:a16="http://schemas.microsoft.com/office/drawing/2014/main" id="{1C91B071-F380-4CD6-BCCC-68C7D39E5555}"/>
               </a:ext>
             </a:extLst>
           </p:cNvPr>
@@ -30284,7 +30400,7 @@
           <p:cNvPr id="2" name="ANÁLISE DA INTRODUÇÃO">
             <a:extLst xmlns:a="http://schemas.openxmlformats.org/drawingml/2006/main">
               <a:ext uri="{FF2B5EF4-FFF2-40B4-BE49-F238E27FC236}">
-                <a16:creationId xmlns:a16="http://schemas.microsoft.com/office/drawing/2014/main" id="{4890CE3E-D1B3-4A87-9106-A496497D4EBC}"/>
+                <a16:creationId xmlns:a16="http://schemas.microsoft.com/office/drawing/2014/main" id="{1F298E1E-0F78-4BE8-83B2-A81A772A6413}"/>
               </a:ext>
             </a:extLst>
           </p:cNvPr>
@@ -30341,7 +30457,7 @@
           <p:cNvPr id="3" name="Introdução: três perguntas de pesquisa">
             <a:extLst xmlns:a="http://schemas.openxmlformats.org/drawingml/2006/main">
               <a:ext uri="{FF2B5EF4-FFF2-40B4-BE49-F238E27FC236}">
-                <a16:creationId xmlns:a16="http://schemas.microsoft.com/office/drawing/2014/main" id="{18222539-1C79-4E45-AB33-4021ADE2E86D}"/>
+                <a16:creationId xmlns:a16="http://schemas.microsoft.com/office/drawing/2014/main" id="{3D744B74-2A83-4D28-9F5C-7C0204C51543}"/>
               </a:ext>
             </a:extLst>
           </p:cNvPr>
@@ -30398,7 +30514,7 @@
           <p:cNvPr id="4" name="">
             <a:extLst xmlns:a="http://schemas.openxmlformats.org/drawingml/2006/main">
               <a:ext uri="{FF2B5EF4-FFF2-40B4-BE49-F238E27FC236}">
-                <a16:creationId xmlns:a16="http://schemas.microsoft.com/office/drawing/2014/main" id="{5E199AFF-8C92-4EFB-80CB-12E4E86DC2D5}"/>
+                <a16:creationId xmlns:a16="http://schemas.microsoft.com/office/drawing/2014/main" id="{B0C61BA1-2235-46C5-A66E-74B923941A0C}"/>
               </a:ext>
             </a:extLst>
           </p:cNvPr>
@@ -30428,7 +30544,7 @@
           <p:cNvPr id="5" name="">
             <a:extLst xmlns:a="http://schemas.openxmlformats.org/drawingml/2006/main">
               <a:ext uri="{FF2B5EF4-FFF2-40B4-BE49-F238E27FC236}">
-                <a16:creationId xmlns:a16="http://schemas.microsoft.com/office/drawing/2014/main" id="{E3017BDB-A301-4792-BCF0-392444619E11}"/>
+                <a16:creationId xmlns:a16="http://schemas.microsoft.com/office/drawing/2014/main" id="{A308AAB1-CDDB-460C-9E67-54E3F28B5146}"/>
               </a:ext>
             </a:extLst>
           </p:cNvPr>
@@ -30458,7 +30574,7 @@
           <p:cNvPr id="6" name="Nguyen, Backes e Stock (2022), Seção 1, ">
             <a:extLst xmlns:a="http://schemas.openxmlformats.org/drawingml/2006/main">
               <a:ext uri="{FF2B5EF4-FFF2-40B4-BE49-F238E27FC236}">
-                <a16:creationId xmlns:a16="http://schemas.microsoft.com/office/drawing/2014/main" id="{9179C3EA-A2E5-4BA0-A521-59AD9B679A91}"/>
+                <a16:creationId xmlns:a16="http://schemas.microsoft.com/office/drawing/2014/main" id="{4B1D015E-BA0C-4956-A51A-38241D17BD2E}"/>
               </a:ext>
             </a:extLst>
           </p:cNvPr>
@@ -30515,7 +30631,7 @@
           <p:cNvPr id="7" name="08 / 23">
             <a:extLst xmlns:a="http://schemas.openxmlformats.org/drawingml/2006/main">
               <a:ext uri="{FF2B5EF4-FFF2-40B4-BE49-F238E27FC236}">
-                <a16:creationId xmlns:a16="http://schemas.microsoft.com/office/drawing/2014/main" id="{E94148D8-9203-4A56-8DBC-3F270DE7DE7A}"/>
+                <a16:creationId xmlns:a16="http://schemas.microsoft.com/office/drawing/2014/main" id="{34F26070-68FE-4654-9C34-769821180BBB}"/>
               </a:ext>
             </a:extLst>
           </p:cNvPr>
@@ -30572,7 +30688,7 @@
           <p:cNvPr id="8" name="01">
             <a:extLst xmlns:a="http://schemas.openxmlformats.org/drawingml/2006/main">
               <a:ext uri="{FF2B5EF4-FFF2-40B4-BE49-F238E27FC236}">
-                <a16:creationId xmlns:a16="http://schemas.microsoft.com/office/drawing/2014/main" id="{56F0317A-A140-4EC9-8A63-3B4348EAD8B5}"/>
+                <a16:creationId xmlns:a16="http://schemas.microsoft.com/office/drawing/2014/main" id="{3D0198DB-D6DD-4314-B6FC-6B7FE7DCFE97}"/>
               </a:ext>
             </a:extLst>
           </p:cNvPr>
@@ -30629,7 +30745,7 @@
           <p:cNvPr id="9" name="EN">
             <a:extLst xmlns:a="http://schemas.openxmlformats.org/drawingml/2006/main">
               <a:ext uri="{FF2B5EF4-FFF2-40B4-BE49-F238E27FC236}">
-                <a16:creationId xmlns:a16="http://schemas.microsoft.com/office/drawing/2014/main" id="{3088068B-E4E1-43D6-AB3A-F9444DEF2E9B}"/>
+                <a16:creationId xmlns:a16="http://schemas.microsoft.com/office/drawing/2014/main" id="{9E71226E-B630-4F76-A7F7-091296F71D64}"/>
               </a:ext>
             </a:extLst>
           </p:cNvPr>
@@ -30686,7 +30802,7 @@
           <p:cNvPr id="10" name="“Do mobile apps implement any form of co">
             <a:extLst xmlns:a="http://schemas.openxmlformats.org/drawingml/2006/main">
               <a:ext uri="{FF2B5EF4-FFF2-40B4-BE49-F238E27FC236}">
-                <a16:creationId xmlns:a16="http://schemas.microsoft.com/office/drawing/2014/main" id="{49A7389E-9F6B-4E94-A4DD-B04633DF79D2}"/>
+                <a16:creationId xmlns:a16="http://schemas.microsoft.com/office/drawing/2014/main" id="{5B6B1C6E-4C96-4061-A21C-87744F49B759}"/>
               </a:ext>
             </a:extLst>
           </p:cNvPr>
@@ -30743,7 +30859,7 @@
           <p:cNvPr id="11" name="PT">
             <a:extLst xmlns:a="http://schemas.openxmlformats.org/drawingml/2006/main">
               <a:ext uri="{FF2B5EF4-FFF2-40B4-BE49-F238E27FC236}">
-                <a16:creationId xmlns:a16="http://schemas.microsoft.com/office/drawing/2014/main" id="{363868EC-DD02-4881-88A7-DCF222A991A0}"/>
+                <a16:creationId xmlns:a16="http://schemas.microsoft.com/office/drawing/2014/main" id="{9069D830-2E84-45E0-BBE8-AE516AB3818C}"/>
               </a:ext>
             </a:extLst>
           </p:cNvPr>
@@ -30800,7 +30916,7 @@
           <p:cNvPr id="12" name="Os aplicativos móveis implementam avisos">
             <a:extLst xmlns:a="http://schemas.openxmlformats.org/drawingml/2006/main">
               <a:ext uri="{FF2B5EF4-FFF2-40B4-BE49-F238E27FC236}">
-                <a16:creationId xmlns:a16="http://schemas.microsoft.com/office/drawing/2014/main" id="{C2C65C7B-D36F-40A2-B57B-407F4D390E04}"/>
+                <a16:creationId xmlns:a16="http://schemas.microsoft.com/office/drawing/2014/main" id="{EF5E4976-BADE-42C3-B568-10E60FA67126}"/>
               </a:ext>
             </a:extLst>
           </p:cNvPr>
@@ -30857,7 +30973,7 @@
           <p:cNvPr id="13" name="">
             <a:extLst xmlns:a="http://schemas.openxmlformats.org/drawingml/2006/main">
               <a:ext uri="{FF2B5EF4-FFF2-40B4-BE49-F238E27FC236}">
-                <a16:creationId xmlns:a16="http://schemas.microsoft.com/office/drawing/2014/main" id="{21E84379-FCDF-4044-A0F3-1E48C969CD5E}"/>
+                <a16:creationId xmlns:a16="http://schemas.microsoft.com/office/drawing/2014/main" id="{ED5733F7-48CF-47E1-9AA8-055D7E516AAA}"/>
               </a:ext>
             </a:extLst>
           </p:cNvPr>
@@ -30887,7 +31003,7 @@
           <p:cNvPr id="14" name="02">
             <a:extLst xmlns:a="http://schemas.openxmlformats.org/drawingml/2006/main">
               <a:ext uri="{FF2B5EF4-FFF2-40B4-BE49-F238E27FC236}">
-                <a16:creationId xmlns:a16="http://schemas.microsoft.com/office/drawing/2014/main" id="{0343878E-3C80-4199-9253-AA1A3F0710DE}"/>
+                <a16:creationId xmlns:a16="http://schemas.microsoft.com/office/drawing/2014/main" id="{5BFFE12D-5D85-4EB8-B45F-0D295753112D}"/>
               </a:ext>
             </a:extLst>
           </p:cNvPr>
@@ -30944,7 +31060,7 @@
           <p:cNvPr id="15" name="EN">
             <a:extLst xmlns:a="http://schemas.openxmlformats.org/drawingml/2006/main">
               <a:ext uri="{FF2B5EF4-FFF2-40B4-BE49-F238E27FC236}">
-                <a16:creationId xmlns:a16="http://schemas.microsoft.com/office/drawing/2014/main" id="{60032223-AA5F-493A-B1D4-91955342D0C2}"/>
+                <a16:creationId xmlns:a16="http://schemas.microsoft.com/office/drawing/2014/main" id="{15AE9607-A6C4-4820-8F02-3D420E8B604F}"/>
               </a:ext>
             </a:extLst>
           </p:cNvPr>
@@ -31001,7 +31117,7 @@
           <p:cNvPr id="16" name="“Can these implemented consent notices b">
             <a:extLst xmlns:a="http://schemas.openxmlformats.org/drawingml/2006/main">
               <a:ext uri="{FF2B5EF4-FFF2-40B4-BE49-F238E27FC236}">
-                <a16:creationId xmlns:a16="http://schemas.microsoft.com/office/drawing/2014/main" id="{E4741653-6D35-4ADC-924E-F2D834F7D304}"/>
+                <a16:creationId xmlns:a16="http://schemas.microsoft.com/office/drawing/2014/main" id="{86C3C16B-B59C-46B4-9946-B1EC641248A3}"/>
               </a:ext>
             </a:extLst>
           </p:cNvPr>
@@ -31058,7 +31174,7 @@
           <p:cNvPr id="17" name="PT">
             <a:extLst xmlns:a="http://schemas.openxmlformats.org/drawingml/2006/main">
               <a:ext uri="{FF2B5EF4-FFF2-40B4-BE49-F238E27FC236}">
-                <a16:creationId xmlns:a16="http://schemas.microsoft.com/office/drawing/2014/main" id="{C7E812A2-00F1-424E-8E76-D72C51892FBE}"/>
+                <a16:creationId xmlns:a16="http://schemas.microsoft.com/office/drawing/2014/main" id="{B8C7988C-E32F-4441-97A9-702CBDF4D726}"/>
               </a:ext>
             </a:extLst>
           </p:cNvPr>
@@ -31115,7 +31231,7 @@
           <p:cNvPr id="18" name="Esses avisos de consentimento podem ser ">
             <a:extLst xmlns:a="http://schemas.openxmlformats.org/drawingml/2006/main">
               <a:ext uri="{FF2B5EF4-FFF2-40B4-BE49-F238E27FC236}">
-                <a16:creationId xmlns:a16="http://schemas.microsoft.com/office/drawing/2014/main" id="{9F580B80-2507-4F7D-BADD-FFCA3781E42F}"/>
+                <a16:creationId xmlns:a16="http://schemas.microsoft.com/office/drawing/2014/main" id="{0B47D23E-69B1-44DC-9B75-F692349DA4FD}"/>
               </a:ext>
             </a:extLst>
           </p:cNvPr>
@@ -31172,7 +31288,7 @@
           <p:cNvPr id="19" name="">
             <a:extLst xmlns:a="http://schemas.openxmlformats.org/drawingml/2006/main">
               <a:ext uri="{FF2B5EF4-FFF2-40B4-BE49-F238E27FC236}">
-                <a16:creationId xmlns:a16="http://schemas.microsoft.com/office/drawing/2014/main" id="{BA9C9255-A1B9-48F2-B971-F9BAA80A00DF}"/>
+                <a16:creationId xmlns:a16="http://schemas.microsoft.com/office/drawing/2014/main" id="{865635C1-FCFB-46A2-BC42-C56267C8AD8D}"/>
               </a:ext>
             </a:extLst>
           </p:cNvPr>
@@ -31202,7 +31318,7 @@
           <p:cNvPr id="20" name="03">
             <a:extLst xmlns:a="http://schemas.openxmlformats.org/drawingml/2006/main">
               <a:ext uri="{FF2B5EF4-FFF2-40B4-BE49-F238E27FC236}">
-                <a16:creationId xmlns:a16="http://schemas.microsoft.com/office/drawing/2014/main" id="{6048074F-2EB2-44FB-8070-8820FDB7E4EC}"/>
+                <a16:creationId xmlns:a16="http://schemas.microsoft.com/office/drawing/2014/main" id="{94146482-CD6A-47D9-9A15-8902F31175B0}"/>
               </a:ext>
             </a:extLst>
           </p:cNvPr>
@@ -31259,7 +31375,7 @@
           <p:cNvPr id="21" name="EN">
             <a:extLst xmlns:a="http://schemas.openxmlformats.org/drawingml/2006/main">
               <a:ext uri="{FF2B5EF4-FFF2-40B4-BE49-F238E27FC236}">
-                <a16:creationId xmlns:a16="http://schemas.microsoft.com/office/drawing/2014/main" id="{6B64D363-9671-4052-A644-F192B9A1DDCB}"/>
+                <a16:creationId xmlns:a16="http://schemas.microsoft.com/office/drawing/2014/main" id="{39CB0955-5DD0-426E-86E3-D31CD4B0F448}"/>
               </a:ext>
             </a:extLst>
           </p:cNvPr>
@@ -31316,7 +31432,7 @@
           <p:cNvPr id="22" name="“Are developers aware of the GDPR consen">
             <a:extLst xmlns:a="http://schemas.openxmlformats.org/drawingml/2006/main">
               <a:ext uri="{FF2B5EF4-FFF2-40B4-BE49-F238E27FC236}">
-                <a16:creationId xmlns:a16="http://schemas.microsoft.com/office/drawing/2014/main" id="{91DB4778-AF0C-4C1D-ACEF-2CB335A59659}"/>
+                <a16:creationId xmlns:a16="http://schemas.microsoft.com/office/drawing/2014/main" id="{F3E577C0-D005-4AFC-89E7-035A9A12650E}"/>
               </a:ext>
             </a:extLst>
           </p:cNvPr>
@@ -31373,7 +31489,7 @@
           <p:cNvPr id="23" name="PT">
             <a:extLst xmlns:a="http://schemas.openxmlformats.org/drawingml/2006/main">
               <a:ext uri="{FF2B5EF4-FFF2-40B4-BE49-F238E27FC236}">
-                <a16:creationId xmlns:a16="http://schemas.microsoft.com/office/drawing/2014/main" id="{2CC8439B-D43C-46C1-BB7B-D867753712D0}"/>
+                <a16:creationId xmlns:a16="http://schemas.microsoft.com/office/drawing/2014/main" id="{B332E377-23C0-42F4-AD23-00F81EA651C4}"/>
               </a:ext>
             </a:extLst>
           </p:cNvPr>
@@ -31430,7 +31546,7 @@
           <p:cNvPr id="24" name="Os desenvolvedores conhecem os requisito">
             <a:extLst xmlns:a="http://schemas.openxmlformats.org/drawingml/2006/main">
               <a:ext uri="{FF2B5EF4-FFF2-40B4-BE49-F238E27FC236}">
-                <a16:creationId xmlns:a16="http://schemas.microsoft.com/office/drawing/2014/main" id="{B9E11603-D685-4C02-9CED-1C628D4725ED}"/>
+                <a16:creationId xmlns:a16="http://schemas.microsoft.com/office/drawing/2014/main" id="{0B8178CC-E690-4D1F-98B0-D95FB1F95158}"/>
               </a:ext>
             </a:extLst>
           </p:cNvPr>
@@ -31484,10 +31600,10 @@
       </p:sp>
       <p:sp>
         <p:nvSpPr>
-          <p:cNvPr id="25" name="Análise do seminário: as perguntas orien">
-            <a:extLst xmlns:a="http://schemas.openxmlformats.org/drawingml/2006/main">
-              <a:ext uri="{FF2B5EF4-FFF2-40B4-BE49-F238E27FC236}">
-                <a16:creationId xmlns:a16="http://schemas.microsoft.com/office/drawing/2014/main" id="{53C70638-91E8-4F92-BB05-9C6682B008DC}"/>
+          <p:cNvPr id="25" name="Análise: cada pergunta orienta uma etapa">
+            <a:extLst xmlns:a="http://schemas.openxmlformats.org/drawingml/2006/main">
+              <a:ext uri="{FF2B5EF4-FFF2-40B4-BE49-F238E27FC236}">
+                <a16:creationId xmlns:a16="http://schemas.microsoft.com/office/drawing/2014/main" id="{471D8574-D94B-45E1-828C-3B8E7763EBA6}"/>
               </a:ext>
             </a:extLst>
           </p:cNvPr>
@@ -31534,7 +31650,7 @@
                 <a:ea typeface="Arial"/>
                 <a:cs typeface="Arial"/>
               </a:rPr>
-              <a:t>Análise do seminário: as perguntas orientam a classificação das interfaces, a medição do tráfego e a notificação.</a:t>
+              <a:t>Análise: cada pergunta orienta uma etapa do estudo e o conjunto de evidências necessário para respondê-la.</a:t>
             </a:r>
           </a:p>
         </p:txBody>
@@ -31542,7 +31658,7 @@
     </p:spTree>
     <p:extLst>
       <p:ext uri="{BB962C8B-B14F-4D97-AF65-F5344CB8AC3E}">
-        <p14:creationId xmlns:p14="http://schemas.microsoft.com/office/powerpoint/2010/main" val="69417606"/>
+        <p14:creationId xmlns:p14="http://schemas.microsoft.com/office/powerpoint/2010/main" val="867170618"/>
       </p:ext>
     </p:extLst>
   </p:cSld>
@@ -31573,7 +31689,7 @@
           <p:cNvPr id="21" name="">
             <a:extLst xmlns:a="http://schemas.openxmlformats.org/drawingml/2006/main">
               <a:ext uri="{FF2B5EF4-FFF2-40B4-BE49-F238E27FC236}">
-                <a16:creationId xmlns:a16="http://schemas.microsoft.com/office/drawing/2014/main" id="{85BDB4A2-946D-41C9-8C7C-55783DC01987}"/>
+                <a16:creationId xmlns:a16="http://schemas.microsoft.com/office/drawing/2014/main" id="{4422AC5D-BF36-4563-899A-EA8EFB183F9F}"/>
               </a:ext>
             </a:extLst>
           </p:cNvPr>
@@ -31603,7 +31719,7 @@
           <p:cNvPr id="2" name="ANÁLISE VISUAL DA INTRODUÇÃO">
             <a:extLst xmlns:a="http://schemas.openxmlformats.org/drawingml/2006/main">
               <a:ext uri="{FF2B5EF4-FFF2-40B4-BE49-F238E27FC236}">
-                <a16:creationId xmlns:a16="http://schemas.microsoft.com/office/drawing/2014/main" id="{A4B46455-7DE4-41C4-B1F6-6168C05BA7B8}"/>
+                <a16:creationId xmlns:a16="http://schemas.microsoft.com/office/drawing/2014/main" id="{AA8D58D1-00FC-43C3-BFB8-0C6AFEBFB2F7}"/>
               </a:ext>
             </a:extLst>
           </p:cNvPr>
@@ -31660,7 +31776,7 @@
           <p:cNvPr id="3" name="Figura 1: avisos com confirmação única">
             <a:extLst xmlns:a="http://schemas.openxmlformats.org/drawingml/2006/main">
               <a:ext uri="{FF2B5EF4-FFF2-40B4-BE49-F238E27FC236}">
-                <a16:creationId xmlns:a16="http://schemas.microsoft.com/office/drawing/2014/main" id="{AB859D72-061B-4B75-AA8A-3B217A05FD94}"/>
+                <a16:creationId xmlns:a16="http://schemas.microsoft.com/office/drawing/2014/main" id="{39F7FB8F-9403-4DD9-8CA7-85CD64E87659}"/>
               </a:ext>
             </a:extLst>
           </p:cNvPr>
@@ -31717,7 +31833,7 @@
           <p:cNvPr id="4" name="">
             <a:extLst xmlns:a="http://schemas.openxmlformats.org/drawingml/2006/main">
               <a:ext uri="{FF2B5EF4-FFF2-40B4-BE49-F238E27FC236}">
-                <a16:creationId xmlns:a16="http://schemas.microsoft.com/office/drawing/2014/main" id="{5A63AA22-5050-4BB7-9509-72EFE955DC99}"/>
+                <a16:creationId xmlns:a16="http://schemas.microsoft.com/office/drawing/2014/main" id="{3134E899-76D2-4FA2-A98D-759CE3DF1585}"/>
               </a:ext>
             </a:extLst>
           </p:cNvPr>
@@ -31747,7 +31863,7 @@
           <p:cNvPr id="5" name="">
             <a:extLst xmlns:a="http://schemas.openxmlformats.org/drawingml/2006/main">
               <a:ext uri="{FF2B5EF4-FFF2-40B4-BE49-F238E27FC236}">
-                <a16:creationId xmlns:a16="http://schemas.microsoft.com/office/drawing/2014/main" id="{37A79E4B-5DEE-47EA-AC09-7AD033044E77}"/>
+                <a16:creationId xmlns:a16="http://schemas.microsoft.com/office/drawing/2014/main" id="{0088577D-B214-4E4E-BCD1-51FC582DECCA}"/>
               </a:ext>
             </a:extLst>
           </p:cNvPr>
@@ -31777,7 +31893,7 @@
           <p:cNvPr id="6" name="Nguyen, Backes e Stock (2022), Figura 1 ">
             <a:extLst xmlns:a="http://schemas.openxmlformats.org/drawingml/2006/main">
               <a:ext uri="{FF2B5EF4-FFF2-40B4-BE49-F238E27FC236}">
-                <a16:creationId xmlns:a16="http://schemas.microsoft.com/office/drawing/2014/main" id="{76054320-3075-40DB-9145-28B1F528E288}"/>
+                <a16:creationId xmlns:a16="http://schemas.microsoft.com/office/drawing/2014/main" id="{C1A8ACCD-847B-42E8-8C13-BB495A284C9C}"/>
               </a:ext>
             </a:extLst>
           </p:cNvPr>
@@ -31834,7 +31950,7 @@
           <p:cNvPr id="7" name="09 / 23">
             <a:extLst xmlns:a="http://schemas.openxmlformats.org/drawingml/2006/main">
               <a:ext uri="{FF2B5EF4-FFF2-40B4-BE49-F238E27FC236}">
-                <a16:creationId xmlns:a16="http://schemas.microsoft.com/office/drawing/2014/main" id="{19684502-738D-428F-B513-E010DEEEB1E8}"/>
+                <a16:creationId xmlns:a16="http://schemas.microsoft.com/office/drawing/2014/main" id="{C367A2A3-CD35-4337-894F-B68F2B435AC0}"/>
               </a:ext>
             </a:extLst>
           </p:cNvPr>
@@ -31895,7 +32011,7 @@
           <p:nvPr/>
         </p:nvPicPr>
         <p:blipFill>
-          <a:blip xmlns:r="http://schemas.openxmlformats.org/officeDocument/2006/relationships" xmlns:a="http://schemas.openxmlformats.org/drawingml/2006/main" r:embed="R1f7d6cc1310a431f"/>
+          <a:blip xmlns:r="http://schemas.openxmlformats.org/officeDocument/2006/relationships" xmlns:a="http://schemas.openxmlformats.org/drawingml/2006/main" r:embed="R1bbeccceebd847a5"/>
           <a:stretch xmlns:a="http://schemas.openxmlformats.org/drawingml/2006/main"/>
         </p:blipFill>
         <p:spPr>
@@ -31913,7 +32029,7 @@
           <p:cNvPr id="9" name="(a)">
             <a:extLst xmlns:a="http://schemas.openxmlformats.org/drawingml/2006/main">
               <a:ext uri="{FF2B5EF4-FFF2-40B4-BE49-F238E27FC236}">
-                <a16:creationId xmlns:a16="http://schemas.microsoft.com/office/drawing/2014/main" id="{9EDB0C3A-5464-411A-80E7-758929C01B56}"/>
+                <a16:creationId xmlns:a16="http://schemas.microsoft.com/office/drawing/2014/main" id="{AC1A3485-64EF-41DC-8B49-BF4C1B717833}"/>
               </a:ext>
             </a:extLst>
           </p:cNvPr>
@@ -31974,7 +32090,7 @@
           <p:nvPr/>
         </p:nvPicPr>
         <p:blipFill>
-          <a:blip xmlns:r="http://schemas.openxmlformats.org/officeDocument/2006/relationships" xmlns:a="http://schemas.openxmlformats.org/drawingml/2006/main" r:embed="R54cd3d95c85f4e4e"/>
+          <a:blip xmlns:r="http://schemas.openxmlformats.org/officeDocument/2006/relationships" xmlns:a="http://schemas.openxmlformats.org/drawingml/2006/main" r:embed="R41c2216c355941d6"/>
           <a:stretch xmlns:a="http://schemas.openxmlformats.org/drawingml/2006/main"/>
         </p:blipFill>
         <p:spPr>
@@ -31992,7 +32108,7 @@
           <p:cNvPr id="11" name="(b)">
             <a:extLst xmlns:a="http://schemas.openxmlformats.org/drawingml/2006/main">
               <a:ext uri="{FF2B5EF4-FFF2-40B4-BE49-F238E27FC236}">
-                <a16:creationId xmlns:a16="http://schemas.microsoft.com/office/drawing/2014/main" id="{BB4A6EB5-DF48-4E55-9979-189D1FA5A472}"/>
+                <a16:creationId xmlns:a16="http://schemas.microsoft.com/office/drawing/2014/main" id="{ECF1FFF8-5278-4D11-9999-1EB4B3DD566B}"/>
               </a:ext>
             </a:extLst>
           </p:cNvPr>
@@ -32053,7 +32169,7 @@
           <p:nvPr/>
         </p:nvPicPr>
         <p:blipFill>
-          <a:blip xmlns:r="http://schemas.openxmlformats.org/officeDocument/2006/relationships" xmlns:a="http://schemas.openxmlformats.org/drawingml/2006/main" r:embed="Ra4c392fca68e4abe"/>
+          <a:blip xmlns:r="http://schemas.openxmlformats.org/officeDocument/2006/relationships" xmlns:a="http://schemas.openxmlformats.org/drawingml/2006/main" r:embed="Rdea151243c164508"/>
           <a:stretch xmlns:a="http://schemas.openxmlformats.org/drawingml/2006/main"/>
         </p:blipFill>
         <p:spPr>
@@ -32071,7 +32187,7 @@
           <p:cNvPr id="13" name="(c)">
             <a:extLst xmlns:a="http://schemas.openxmlformats.org/drawingml/2006/main">
               <a:ext uri="{FF2B5EF4-FFF2-40B4-BE49-F238E27FC236}">
-                <a16:creationId xmlns:a16="http://schemas.microsoft.com/office/drawing/2014/main" id="{18695BF9-2746-4828-B8EB-34764A61E577}"/>
+                <a16:creationId xmlns:a16="http://schemas.microsoft.com/office/drawing/2014/main" id="{51783851-228F-489E-A03E-C86B253F6C4C}"/>
               </a:ext>
             </a:extLst>
           </p:cNvPr>
@@ -32128,7 +32244,7 @@
           <p:cNvPr id="14" name="EN">
             <a:extLst xmlns:a="http://schemas.openxmlformats.org/drawingml/2006/main">
               <a:ext uri="{FF2B5EF4-FFF2-40B4-BE49-F238E27FC236}">
-                <a16:creationId xmlns:a16="http://schemas.microsoft.com/office/drawing/2014/main" id="{858B79DC-057C-435E-B4F9-2B9D5651A6C4}"/>
+                <a16:creationId xmlns:a16="http://schemas.microsoft.com/office/drawing/2014/main" id="{3B56E572-5729-45B7-B811-31082B377161}"/>
               </a:ext>
             </a:extLst>
           </p:cNvPr>
@@ -32185,7 +32301,7 @@
           <p:cNvPr id="15" name="“confirmation-only notices that feature ">
             <a:extLst xmlns:a="http://schemas.openxmlformats.org/drawingml/2006/main">
               <a:ext uri="{FF2B5EF4-FFF2-40B4-BE49-F238E27FC236}">
-                <a16:creationId xmlns:a16="http://schemas.microsoft.com/office/drawing/2014/main" id="{FCBECF6F-75CE-4B3D-AC4D-F568176FE915}"/>
+                <a16:creationId xmlns:a16="http://schemas.microsoft.com/office/drawing/2014/main" id="{DBD727CB-5FDC-43A2-B3AD-322A419B7456}"/>
               </a:ext>
             </a:extLst>
           </p:cNvPr>
@@ -32242,7 +32358,7 @@
           <p:cNvPr id="16" name="PT">
             <a:extLst xmlns:a="http://schemas.openxmlformats.org/drawingml/2006/main">
               <a:ext uri="{FF2B5EF4-FFF2-40B4-BE49-F238E27FC236}">
-                <a16:creationId xmlns:a16="http://schemas.microsoft.com/office/drawing/2014/main" id="{B8E54F29-EF2B-49D0-9CF6-A7B39F690DD3}"/>
+                <a16:creationId xmlns:a16="http://schemas.microsoft.com/office/drawing/2014/main" id="{E1A00CAA-3EE8-47F1-AB45-2307133CDAA6}"/>
               </a:ext>
             </a:extLst>
           </p:cNvPr>
@@ -32299,7 +32415,7 @@
           <p:cNvPr id="17" name="Avisos apenas de confirmação, com um bot">
             <a:extLst xmlns:a="http://schemas.openxmlformats.org/drawingml/2006/main">
               <a:ext uri="{FF2B5EF4-FFF2-40B4-BE49-F238E27FC236}">
-                <a16:creationId xmlns:a16="http://schemas.microsoft.com/office/drawing/2014/main" id="{00C1F81E-34E5-45E4-8367-675C725A31CE}"/>
+                <a16:creationId xmlns:a16="http://schemas.microsoft.com/office/drawing/2014/main" id="{C30E05B0-6A75-4AF4-960B-B0381513E308}"/>
               </a:ext>
             </a:extLst>
           </p:cNvPr>
@@ -32356,7 +32472,7 @@
           <p:cNvPr id="18" name="">
             <a:extLst xmlns:a="http://schemas.openxmlformats.org/drawingml/2006/main">
               <a:ext uri="{FF2B5EF4-FFF2-40B4-BE49-F238E27FC236}">
-                <a16:creationId xmlns:a16="http://schemas.microsoft.com/office/drawing/2014/main" id="{2B214D9C-2532-44F7-A0AD-0D6A595398E8}"/>
+                <a16:creationId xmlns:a16="http://schemas.microsoft.com/office/drawing/2014/main" id="{6941D7AE-56E0-42C3-B13F-B2E98E02CDAE}"/>
               </a:ext>
             </a:extLst>
           </p:cNvPr>
@@ -32386,7 +32502,7 @@
           <p:cNvPr id="19" name="ANÁLISE DO SEMINÁRIO">
             <a:extLst xmlns:a="http://schemas.openxmlformats.org/drawingml/2006/main">
               <a:ext uri="{FF2B5EF4-FFF2-40B4-BE49-F238E27FC236}">
-                <a16:creationId xmlns:a16="http://schemas.microsoft.com/office/drawing/2014/main" id="{B470511C-B57A-432D-BDB0-6F5386B566AA}"/>
+                <a16:creationId xmlns:a16="http://schemas.microsoft.com/office/drawing/2014/main" id="{EB8CC2C4-CF5C-441A-AA25-6FC64B893A91}"/>
               </a:ext>
             </a:extLst>
           </p:cNvPr>
@@ -32443,7 +32559,7 @@
           <p:cNvPr id="20" name="A interface mostra como avançar,&#10;mas não">
             <a:extLst xmlns:a="http://schemas.openxmlformats.org/drawingml/2006/main">
               <a:ext uri="{FF2B5EF4-FFF2-40B4-BE49-F238E27FC236}">
-                <a16:creationId xmlns:a16="http://schemas.microsoft.com/office/drawing/2014/main" id="{6C9262F5-7D3E-4CC0-BA23-E6B209DC7173}"/>
+                <a16:creationId xmlns:a16="http://schemas.microsoft.com/office/drawing/2014/main" id="{323B8D34-B3F1-4425-BBF8-F106EA00AE88}"/>
               </a:ext>
             </a:extLst>
           </p:cNvPr>
@@ -32544,7 +32660,7 @@
     </p:spTree>
     <p:extLst>
       <p:ext uri="{BB962C8B-B14F-4D97-AF65-F5344CB8AC3E}">
-        <p14:creationId xmlns:p14="http://schemas.microsoft.com/office/powerpoint/2010/main" val="412204481"/>
+        <p14:creationId xmlns:p14="http://schemas.microsoft.com/office/powerpoint/2010/main" val="968891628"/>
       </p:ext>
     </p:extLst>
   </p:cSld>
@@ -32592,16 +32708,16 @@
         <a:srgbClr val="96607D"/>
       </a:folHlink>
     </a:clrScheme>
-    <a:fontScheme name="Office">
+    <a:fontScheme name="">
       <a:majorFont>
-        <a:latin typeface="Calibri Light"/>
-        <a:ea typeface="Calibri Light"/>
-        <a:cs typeface="Calibri Light"/>
+        <a:latin typeface="Aptos"/>
+        <a:ea typeface=""/>
+        <a:cs typeface=""/>
       </a:majorFont>
       <a:minorFont>
-        <a:latin typeface="Calibri"/>
-        <a:ea typeface="Calibri"/>
-        <a:cs typeface="Calibri"/>
+        <a:latin typeface="Aptos"/>
+        <a:ea typeface=""/>
+        <a:cs typeface=""/>
       </a:minorFont>
     </a:fontScheme>
     <a:fmtScheme name="ChatGPT">

--- a/seminario/apresentacao/seminario-analise-de-artigo.pptx
+++ b/seminario/apresentacao/seminario-analise-de-artigo.pptx
@@ -2,37 +2,37 @@
 <file path=ppt/presentation.xml><?xml version="1.0" encoding="utf-8"?>
 <p:presentation xmlns:p="http://schemas.openxmlformats.org/presentationml/2006/main">
   <p:sldMasterIdLst>
-    <p:sldMasterId xmlns:r="http://schemas.openxmlformats.org/officeDocument/2006/relationships" id="2147483648" r:id="Re4ab5222c0644d1b"/>
+    <p:sldMasterId xmlns:r="http://schemas.openxmlformats.org/officeDocument/2006/relationships" id="2147483648" r:id="Rd2f319820dac442e"/>
   </p:sldMasterIdLst>
   <p:notesMasterIdLst>
-    <p:notesMasterId xmlns:r="http://schemas.openxmlformats.org/officeDocument/2006/relationships" r:id="Rccc5fa9f101a45f1"/>
+    <p:notesMasterId xmlns:r="http://schemas.openxmlformats.org/officeDocument/2006/relationships" r:id="R595b19fcff924bec"/>
   </p:notesMasterIdLst>
   <p:sldIdLst>
-    <p:sldId xmlns:r="http://schemas.openxmlformats.org/officeDocument/2006/relationships" id="256" r:id="Rda373d23d197469c"/>
-    <p:sldId xmlns:r="http://schemas.openxmlformats.org/officeDocument/2006/relationships" id="257" r:id="R45356b48f77c4c65"/>
-    <p:sldId xmlns:r="http://schemas.openxmlformats.org/officeDocument/2006/relationships" id="258" r:id="R50ca950d42984063"/>
-    <p:sldId xmlns:r="http://schemas.openxmlformats.org/officeDocument/2006/relationships" id="259" r:id="R5fdb6139c9324f93"/>
-    <p:sldId xmlns:r="http://schemas.openxmlformats.org/officeDocument/2006/relationships" id="260" r:id="R41835390f7de436c"/>
-    <p:sldId xmlns:r="http://schemas.openxmlformats.org/officeDocument/2006/relationships" id="261" r:id="R1619ae2d7a5b4b39"/>
-    <p:sldId xmlns:r="http://schemas.openxmlformats.org/officeDocument/2006/relationships" id="262" r:id="Rf92173408e1349f6"/>
-    <p:sldId xmlns:r="http://schemas.openxmlformats.org/officeDocument/2006/relationships" id="263" r:id="R3b0667f8103f42f4"/>
-    <p:sldId xmlns:r="http://schemas.openxmlformats.org/officeDocument/2006/relationships" id="264" r:id="Rc4f66faaf5824957"/>
-    <p:sldId xmlns:r="http://schemas.openxmlformats.org/officeDocument/2006/relationships" id="265" r:id="R6b39357b9d504289"/>
-    <p:sldId xmlns:r="http://schemas.openxmlformats.org/officeDocument/2006/relationships" id="266" r:id="Rfc0eea783e7a42c8"/>
-    <p:sldId xmlns:r="http://schemas.openxmlformats.org/officeDocument/2006/relationships" id="267" r:id="Rbff3b31b82464818"/>
-    <p:sldId xmlns:r="http://schemas.openxmlformats.org/officeDocument/2006/relationships" id="268" r:id="R496b27de0bc846c4"/>
-    <p:sldId xmlns:r="http://schemas.openxmlformats.org/officeDocument/2006/relationships" id="269" r:id="Rcfa0d4328a8f4553"/>
-    <p:sldId xmlns:r="http://schemas.openxmlformats.org/officeDocument/2006/relationships" id="270" r:id="Rb7913d62a65b4d36"/>
-    <p:sldId xmlns:r="http://schemas.openxmlformats.org/officeDocument/2006/relationships" id="271" r:id="R23ab3d97c02a4115"/>
-    <p:sldId xmlns:r="http://schemas.openxmlformats.org/officeDocument/2006/relationships" id="272" r:id="Rf7e1524315be4ace"/>
-    <p:sldId xmlns:r="http://schemas.openxmlformats.org/officeDocument/2006/relationships" id="273" r:id="Rfd287c23ad7a4c78"/>
-    <p:sldId xmlns:r="http://schemas.openxmlformats.org/officeDocument/2006/relationships" id="274" r:id="Rb886cc92560645d3"/>
-    <p:sldId xmlns:r="http://schemas.openxmlformats.org/officeDocument/2006/relationships" id="275" r:id="R282e4940cef848e9"/>
-    <p:sldId xmlns:r="http://schemas.openxmlformats.org/officeDocument/2006/relationships" id="276" r:id="Re4d8b090892749d3"/>
-    <p:sldId xmlns:r="http://schemas.openxmlformats.org/officeDocument/2006/relationships" id="277" r:id="R3538ae9152f643de"/>
-    <p:sldId xmlns:r="http://schemas.openxmlformats.org/officeDocument/2006/relationships" id="278" r:id="R0095e8aec2a54e62"/>
-    <p:sldId xmlns:r="http://schemas.openxmlformats.org/officeDocument/2006/relationships" id="279" r:id="R3242b2dd4e9c474f"/>
-    <p:sldId xmlns:r="http://schemas.openxmlformats.org/officeDocument/2006/relationships" id="280" r:id="Rbb1fd1d98ae54627"/>
+    <p:sldId xmlns:r="http://schemas.openxmlformats.org/officeDocument/2006/relationships" id="256" r:id="Rfc8489d3bcb64d5e"/>
+    <p:sldId xmlns:r="http://schemas.openxmlformats.org/officeDocument/2006/relationships" id="257" r:id="Rc3cdf9252cd44b97"/>
+    <p:sldId xmlns:r="http://schemas.openxmlformats.org/officeDocument/2006/relationships" id="258" r:id="R961f3f38ceda4fb1"/>
+    <p:sldId xmlns:r="http://schemas.openxmlformats.org/officeDocument/2006/relationships" id="259" r:id="Rea8ed98a386b48f6"/>
+    <p:sldId xmlns:r="http://schemas.openxmlformats.org/officeDocument/2006/relationships" id="260" r:id="R1ac678f65dbc4992"/>
+    <p:sldId xmlns:r="http://schemas.openxmlformats.org/officeDocument/2006/relationships" id="261" r:id="R306bf5c6670840ba"/>
+    <p:sldId xmlns:r="http://schemas.openxmlformats.org/officeDocument/2006/relationships" id="262" r:id="R776336d28c644425"/>
+    <p:sldId xmlns:r="http://schemas.openxmlformats.org/officeDocument/2006/relationships" id="263" r:id="R53b588d6b4574a1e"/>
+    <p:sldId xmlns:r="http://schemas.openxmlformats.org/officeDocument/2006/relationships" id="264" r:id="R5b015caa5d784d39"/>
+    <p:sldId xmlns:r="http://schemas.openxmlformats.org/officeDocument/2006/relationships" id="265" r:id="Rc48f10f1cfd3462e"/>
+    <p:sldId xmlns:r="http://schemas.openxmlformats.org/officeDocument/2006/relationships" id="266" r:id="Rdbf26bff5d2c413a"/>
+    <p:sldId xmlns:r="http://schemas.openxmlformats.org/officeDocument/2006/relationships" id="267" r:id="R487370f93c4b44be"/>
+    <p:sldId xmlns:r="http://schemas.openxmlformats.org/officeDocument/2006/relationships" id="268" r:id="Rb007ebdc45c1441f"/>
+    <p:sldId xmlns:r="http://schemas.openxmlformats.org/officeDocument/2006/relationships" id="269" r:id="R5177bd3bb8aa4be1"/>
+    <p:sldId xmlns:r="http://schemas.openxmlformats.org/officeDocument/2006/relationships" id="270" r:id="R59f22b94b3834b95"/>
+    <p:sldId xmlns:r="http://schemas.openxmlformats.org/officeDocument/2006/relationships" id="271" r:id="R674187069abb4951"/>
+    <p:sldId xmlns:r="http://schemas.openxmlformats.org/officeDocument/2006/relationships" id="272" r:id="R904d2de73bdd43e1"/>
+    <p:sldId xmlns:r="http://schemas.openxmlformats.org/officeDocument/2006/relationships" id="273" r:id="R3a26ce193c5e4863"/>
+    <p:sldId xmlns:r="http://schemas.openxmlformats.org/officeDocument/2006/relationships" id="274" r:id="R7e92f34ebf4842e3"/>
+    <p:sldId xmlns:r="http://schemas.openxmlformats.org/officeDocument/2006/relationships" id="275" r:id="Rba2ab6e279d94136"/>
+    <p:sldId xmlns:r="http://schemas.openxmlformats.org/officeDocument/2006/relationships" id="276" r:id="R56f00203deaa43b3"/>
+    <p:sldId xmlns:r="http://schemas.openxmlformats.org/officeDocument/2006/relationships" id="277" r:id="R9875e15e80db41c3"/>
+    <p:sldId xmlns:r="http://schemas.openxmlformats.org/officeDocument/2006/relationships" id="278" r:id="R645a1163957f43a8"/>
+    <p:sldId xmlns:r="http://schemas.openxmlformats.org/officeDocument/2006/relationships" id="279" r:id="R76471c60530f4da2"/>
+    <p:sldId xmlns:r="http://schemas.openxmlformats.org/officeDocument/2006/relationships" id="280" r:id="R16a382d2484746b4"/>
   </p:sldIdLst>
   <p:sldSz cx="12192000" cy="6858000"/>
   <p:notesSz cx="6858000" cy="9144000"/>
@@ -561,7 +561,7 @@
           <a:lstStyle xmlns:a="http://schemas.openxmlformats.org/drawingml/2006/main"/>
           <a:p xmlns:a="http://schemas.openxmlformats.org/drawingml/2006/main">
             <a:r>
-              <a:t>Tempo sugerido: 30 segundos.</a:t>
+              <a:t>Tempo sugerido: 25 segundos.</a:t>
             </a:r>
           </a:p>
           <a:p xmlns:a="http://schemas.openxmlformats.org/drawingml/2006/main">
@@ -846,7 +846,7 @@
           <a:lstStyle xmlns:a="http://schemas.openxmlformats.org/drawingml/2006/main"/>
           <a:p xmlns:a="http://schemas.openxmlformats.org/drawingml/2006/main">
             <a:r>
-              <a:t>Tempo sugerido: 55 segundos.</a:t>
+              <a:t>Tempo sugerido: 50 segundos.</a:t>
             </a:r>
           </a:p>
           <a:p xmlns:a="http://schemas.openxmlformats.org/drawingml/2006/main">
@@ -941,7 +941,7 @@
           <a:lstStyle xmlns:a="http://schemas.openxmlformats.org/drawingml/2006/main"/>
           <a:p xmlns:a="http://schemas.openxmlformats.org/drawingml/2006/main">
             <a:r>
-              <a:t>Tempo sugerido: 40 segundos.</a:t>
+              <a:t>Tempo sugerido: 35 segundos.</a:t>
             </a:r>
           </a:p>
           <a:p xmlns:a="http://schemas.openxmlformats.org/drawingml/2006/main">
@@ -1321,7 +1321,7 @@
           <a:lstStyle xmlns:a="http://schemas.openxmlformats.org/drawingml/2006/main"/>
           <a:p xmlns:a="http://schemas.openxmlformats.org/drawingml/2006/main">
             <a:r>
-              <a:t>Tempo sugerido: 40 segundos.</a:t>
+              <a:t>Tempo sugerido: 45 segundos.</a:t>
             </a:r>
           </a:p>
           <a:p xmlns:a="http://schemas.openxmlformats.org/drawingml/2006/main">
@@ -1511,7 +1511,7 @@
           <a:lstStyle xmlns:a="http://schemas.openxmlformats.org/drawingml/2006/main"/>
           <a:p xmlns:a="http://schemas.openxmlformats.org/drawingml/2006/main">
             <a:r>
-              <a:t>Tempo sugerido: 45 segundos.</a:t>
+              <a:t>Tempo sugerido: 50 segundos.</a:t>
             </a:r>
           </a:p>
           <a:p xmlns:a="http://schemas.openxmlformats.org/drawingml/2006/main">
@@ -1701,7 +1701,7 @@
           <a:lstStyle xmlns:a="http://schemas.openxmlformats.org/drawingml/2006/main"/>
           <a:p xmlns:a="http://schemas.openxmlformats.org/drawingml/2006/main">
             <a:r>
-              <a:t>Tempo sugerido: 40 segundos.</a:t>
+              <a:t>Tempo sugerido: 30 segundos.</a:t>
             </a:r>
           </a:p>
           <a:p xmlns:a="http://schemas.openxmlformats.org/drawingml/2006/main">
@@ -1796,7 +1796,7 @@
           <a:lstStyle xmlns:a="http://schemas.openxmlformats.org/drawingml/2006/main"/>
           <a:p xmlns:a="http://schemas.openxmlformats.org/drawingml/2006/main">
             <a:r>
-              <a:t>Tempo sugerido: 35 segundos.</a:t>
+              <a:t>Tempo sugerido: 25 segundos.</a:t>
             </a:r>
           </a:p>
           <a:p xmlns:a="http://schemas.openxmlformats.org/drawingml/2006/main">
@@ -1806,7 +1806,7 @@
           </a:p>
           <a:p xmlns:a="http://schemas.openxmlformats.org/drawingml/2006/main">
             <a:r>
-              <a:t>O fechamento converte os números em uma implicação: transparência e suporte para que usuários possam fazer escolhas livres e informadas. A comparação textual mostra uma diferença real. O resumo usa violate; a conclusão usa potentially violate. A última formulação expressa a cautela descrita na nota 1. A observação é sobre a precisão da redação, sem substituir a avaliação técnica ou jurídica.</a:t>
+              <a:t>A conclusão reúne os achados e explicita suas implicações: maior transparência no tratamento de dados e apoio aos desenvolvedores. Esse trecho mostra por que os resultados importam e encerra o argumento iniciado na introdução.</a:t>
             </a:r>
           </a:p>
           <a:p xmlns:a="http://schemas.openxmlformats.org/drawingml/2006/main">
@@ -1816,7 +1816,7 @@
           </a:p>
           <a:p xmlns:a="http://schemas.openxmlformats.org/drawingml/2006/main">
             <a:r>
-              <a:t>Fontes: Artigo, Abstract, p. 1; nota 1, p. 2–3; Conclusion, p. 13.</a:t>
+              <a:t>Fontes: Artigo, Seção 8, p. 13.</a:t>
             </a:r>
           </a:p>
           <a:p xmlns:a="http://schemas.openxmlformats.org/drawingml/2006/main">
@@ -2176,7 +2176,7 @@
           <a:lstStyle xmlns:a="http://schemas.openxmlformats.org/drawingml/2006/main"/>
           <a:p xmlns:a="http://schemas.openxmlformats.org/drawingml/2006/main">
             <a:r>
-              <a:t>Tempo sugerido: 35 segundos.</a:t>
+              <a:t>Tempo sugerido: 40 segundos.</a:t>
             </a:r>
           </a:p>
           <a:p xmlns:a="http://schemas.openxmlformats.org/drawingml/2006/main">
@@ -2271,7 +2271,7 @@
           <a:lstStyle xmlns:a="http://schemas.openxmlformats.org/drawingml/2006/main"/>
           <a:p xmlns:a="http://schemas.openxmlformats.org/drawingml/2006/main">
             <a:r>
-              <a:t>Tempo sugerido: 40 segundos.</a:t>
+              <a:t>Tempo sugerido: 45 segundos.</a:t>
             </a:r>
           </a:p>
           <a:p xmlns:a="http://schemas.openxmlformats.org/drawingml/2006/main">
@@ -2556,7 +2556,7 @@
           <a:lstStyle xmlns:a="http://schemas.openxmlformats.org/drawingml/2006/main"/>
           <a:p xmlns:a="http://schemas.openxmlformats.org/drawingml/2006/main">
             <a:r>
-              <a:t>Tempo sugerido: 35 segundos.</a:t>
+              <a:t>Tempo sugerido: 30 segundos.</a:t>
             </a:r>
           </a:p>
           <a:p xmlns:a="http://schemas.openxmlformats.org/drawingml/2006/main">
@@ -2566,7 +2566,7 @@
           </a:p>
           <a:p xmlns:a="http://schemas.openxmlformats.org/drawingml/2006/main">
             <a:r>
-              <a:t>O resumo condensa o procedimento, os números e a implicação. Neste trecho literal, os autores escrevem violate, sem potentially. Preservo a citação como está e, ao analisar os resultados, uso a qualificação de potencial violação, consistente com a nota de rodapé e com a conclusão. A comparação volta no fechamento.</a:t>
+              <a:t>O resumo condensa o procedimento, o principal resultado e sua implicação. A função desse trecho é permitir que o leitor compreenda a contribuição do estudo antes de ler as demais seções.</a:t>
             </a:r>
           </a:p>
           <a:p xmlns:a="http://schemas.openxmlformats.org/drawingml/2006/main">
@@ -2576,7 +2576,7 @@
           </a:p>
           <a:p xmlns:a="http://schemas.openxmlformats.org/drawingml/2006/main">
             <a:r>
-              <a:t>Fontes: Artigo, Abstract, p. 1. Comparação com nota 1, p. 2–3, e Conclusion, p. 13.</a:t>
+              <a:t>Fontes: Artigo, Abstract, p. 1.</a:t>
             </a:r>
           </a:p>
           <a:p xmlns:a="http://schemas.openxmlformats.org/drawingml/2006/main">
@@ -2651,7 +2651,7 @@
           <a:lstStyle xmlns:a="http://schemas.openxmlformats.org/drawingml/2006/main"/>
           <a:p xmlns:a="http://schemas.openxmlformats.org/drawingml/2006/main">
             <a:r>
-              <a:t>Tempo sugerido: 45 segundos.</a:t>
+              <a:t>Tempo sugerido: 40 segundos.</a:t>
             </a:r>
           </a:p>
           <a:p xmlns:a="http://schemas.openxmlformats.org/drawingml/2006/main">
@@ -2746,7 +2746,7 @@
           <a:lstStyle xmlns:a="http://schemas.openxmlformats.org/drawingml/2006/main"/>
           <a:p xmlns:a="http://schemas.openxmlformats.org/drawingml/2006/main">
             <a:r>
-              <a:t>Tempo sugerido: 35 segundos.</a:t>
+              <a:t>Tempo sugerido: 25 segundos.</a:t>
             </a:r>
           </a:p>
           <a:p xmlns:a="http://schemas.openxmlformats.org/drawingml/2006/main">
@@ -2839,7 +2839,7 @@
   </p:cSld>
   <p:clrMap bg1="lt1" tx1="dk1" bg2="lt2" tx2="dk2" accent1="accent1" accent2="accent2" accent3="accent3" accent4="accent4" accent5="accent5" accent6="accent6" hlink="hlink" folHlink="folHlink"/>
   <p:sldLayoutIdLst>
-    <p:sldLayoutId xmlns:r="http://schemas.openxmlformats.org/officeDocument/2006/relationships" id="2147483649" r:id="Rf778cc5e57ba4207"/>
+    <p:sldLayoutId xmlns:r="http://schemas.openxmlformats.org/officeDocument/2006/relationships" id="2147483649" r:id="R134a93ecc5424dea"/>
   </p:sldLayoutIdLst>
   <p:txStyles>
     <p:titleStyle>
@@ -3387,10 +3387,10 @@
       </p:grpSpPr>
       <p:sp>
         <p:nvSpPr>
-          <p:cNvPr id="13" name="">
-            <a:extLst xmlns:a="http://schemas.openxmlformats.org/drawingml/2006/main">
-              <a:ext uri="{FF2B5EF4-FFF2-40B4-BE49-F238E27FC236}">
-                <a16:creationId xmlns:a16="http://schemas.microsoft.com/office/drawing/2014/main" id="{490CFA38-1539-4817-9F4F-F1418041BE71}"/>
+          <p:cNvPr id="14" name="">
+            <a:extLst xmlns:a="http://schemas.openxmlformats.org/drawingml/2006/main">
+              <a:ext uri="{FF2B5EF4-FFF2-40B4-BE49-F238E27FC236}">
+                <a16:creationId xmlns:a16="http://schemas.microsoft.com/office/drawing/2014/main" id="{39BB035E-1F64-4848-8240-B9E73F9CAD14}"/>
               </a:ext>
             </a:extLst>
           </p:cNvPr>
@@ -3420,7 +3420,7 @@
           <p:cNvPr id="2" name="ANÁLISE DE ARTIGO CIENTÍFICO">
             <a:extLst xmlns:a="http://schemas.openxmlformats.org/drawingml/2006/main">
               <a:ext uri="{FF2B5EF4-FFF2-40B4-BE49-F238E27FC236}">
-                <a16:creationId xmlns:a16="http://schemas.microsoft.com/office/drawing/2014/main" id="{FDD5CD12-49CE-43E9-9C76-FB65129F7EB2}"/>
+                <a16:creationId xmlns:a16="http://schemas.microsoft.com/office/drawing/2014/main" id="{48F51633-14E8-4FB7-83DC-3C89CC3818BD}"/>
               </a:ext>
             </a:extLst>
           </p:cNvPr>
@@ -3477,7 +3477,7 @@
           <p:cNvPr id="3" name="Freely Given Consent?">
             <a:extLst xmlns:a="http://schemas.openxmlformats.org/drawingml/2006/main">
               <a:ext uri="{FF2B5EF4-FFF2-40B4-BE49-F238E27FC236}">
-                <a16:creationId xmlns:a16="http://schemas.microsoft.com/office/drawing/2014/main" id="{140028CA-FB9B-41D0-925D-6EA9A5057BD4}"/>
+                <a16:creationId xmlns:a16="http://schemas.microsoft.com/office/drawing/2014/main" id="{C599FC37-0294-4A25-9D37-E7E18A703CF3}"/>
               </a:ext>
             </a:extLst>
           </p:cNvPr>
@@ -3534,7 +3534,7 @@
           <p:cNvPr id="4" name="Studying Consent Notice of Third-Party T">
             <a:extLst xmlns:a="http://schemas.openxmlformats.org/drawingml/2006/main">
               <a:ext uri="{FF2B5EF4-FFF2-40B4-BE49-F238E27FC236}">
-                <a16:creationId xmlns:a16="http://schemas.microsoft.com/office/drawing/2014/main" id="{3F1CA7D5-5ECD-4949-827A-C10D597552B7}"/>
+                <a16:creationId xmlns:a16="http://schemas.microsoft.com/office/drawing/2014/main" id="{7E053BAF-FBB1-480D-B9A1-2B52393E9473}"/>
               </a:ext>
             </a:extLst>
           </p:cNvPr>
@@ -3614,7 +3614,7 @@
           <p:cNvPr id="5" name="PT">
             <a:extLst xmlns:a="http://schemas.openxmlformats.org/drawingml/2006/main">
               <a:ext uri="{FF2B5EF4-FFF2-40B4-BE49-F238E27FC236}">
-                <a16:creationId xmlns:a16="http://schemas.microsoft.com/office/drawing/2014/main" id="{7273A1EB-B304-44EA-9D1F-722138FE2E2E}"/>
+                <a16:creationId xmlns:a16="http://schemas.microsoft.com/office/drawing/2014/main" id="{0830C14F-BBA5-4D51-93D4-D142935C5F28}"/>
               </a:ext>
             </a:extLst>
           </p:cNvPr>
@@ -3671,7 +3671,7 @@
           <p:cNvPr id="6" name="Consentimento dado livremente? Estudo do">
             <a:extLst xmlns:a="http://schemas.openxmlformats.org/drawingml/2006/main">
               <a:ext uri="{FF2B5EF4-FFF2-40B4-BE49-F238E27FC236}">
-                <a16:creationId xmlns:a16="http://schemas.microsoft.com/office/drawing/2014/main" id="{89A97001-706D-441F-9DA0-39F398BC5CA7}"/>
+                <a16:creationId xmlns:a16="http://schemas.microsoft.com/office/drawing/2014/main" id="{DA79AA58-CDD4-4B65-81DE-60B6CBA86682}"/>
               </a:ext>
             </a:extLst>
           </p:cNvPr>
@@ -3751,7 +3751,7 @@
           <p:cNvPr id="7" name="">
             <a:extLst xmlns:a="http://schemas.openxmlformats.org/drawingml/2006/main">
               <a:ext uri="{FF2B5EF4-FFF2-40B4-BE49-F238E27FC236}">
-                <a16:creationId xmlns:a16="http://schemas.microsoft.com/office/drawing/2014/main" id="{F5245925-E796-45DA-AD15-1ADBFD70239A}"/>
+                <a16:creationId xmlns:a16="http://schemas.microsoft.com/office/drawing/2014/main" id="{C66A9986-5F0E-4460-82BD-847C554F29D6}"/>
               </a:ext>
             </a:extLst>
           </p:cNvPr>
@@ -3781,7 +3781,7 @@
           <p:cNvPr id="8" name="Trung Tin Nguyen, Michael Backes e Ben S">
             <a:extLst xmlns:a="http://schemas.openxmlformats.org/drawingml/2006/main">
               <a:ext uri="{FF2B5EF4-FFF2-40B4-BE49-F238E27FC236}">
-                <a16:creationId xmlns:a16="http://schemas.microsoft.com/office/drawing/2014/main" id="{D3AF4EE8-A034-473F-8B74-5385629E033A}"/>
+                <a16:creationId xmlns:a16="http://schemas.microsoft.com/office/drawing/2014/main" id="{71E96C23-66BA-4A7F-82BF-105229B122B5}"/>
               </a:ext>
             </a:extLst>
           </p:cNvPr>
@@ -3838,7 +3838,7 @@
           <p:cNvPr id="9" name="ACM CCS 2022, p. 2369–2383. DOI: 10.1145">
             <a:extLst xmlns:a="http://schemas.openxmlformats.org/drawingml/2006/main">
               <a:ext uri="{FF2B5EF4-FFF2-40B4-BE49-F238E27FC236}">
-                <a16:creationId xmlns:a16="http://schemas.microsoft.com/office/drawing/2014/main" id="{0CB89FF0-2950-456A-BDB2-3BF8CE48D282}"/>
+                <a16:creationId xmlns:a16="http://schemas.microsoft.com/office/drawing/2014/main" id="{E877533F-4E36-41FB-9501-223ED1E397A3}"/>
               </a:ext>
             </a:extLst>
           </p:cNvPr>
@@ -3895,7 +3895,7 @@
           <p:cNvPr id="10" name="Claudio Meireles">
             <a:extLst xmlns:a="http://schemas.openxmlformats.org/drawingml/2006/main">
               <a:ext uri="{FF2B5EF4-FFF2-40B4-BE49-F238E27FC236}">
-                <a16:creationId xmlns:a16="http://schemas.microsoft.com/office/drawing/2014/main" id="{6F32C597-F004-4B0B-918C-1FF263894313}"/>
+                <a16:creationId xmlns:a16="http://schemas.microsoft.com/office/drawing/2014/main" id="{BB8193BA-2754-4505-8C93-040D35B6C238}"/>
               </a:ext>
             </a:extLst>
           </p:cNvPr>
@@ -3952,7 +3952,7 @@
           <p:cNvPr id="11" name="Projeto Capstone I · IDP · 29/09/2026">
             <a:extLst xmlns:a="http://schemas.openxmlformats.org/drawingml/2006/main">
               <a:ext uri="{FF2B5EF4-FFF2-40B4-BE49-F238E27FC236}">
-                <a16:creationId xmlns:a16="http://schemas.microsoft.com/office/drawing/2014/main" id="{A660C991-9212-420F-A167-AA1509D480D8}"/>
+                <a16:creationId xmlns:a16="http://schemas.microsoft.com/office/drawing/2014/main" id="{0A88F25A-E11F-41CD-ACDF-32BAE8EBCAC1}"/>
               </a:ext>
             </a:extLst>
           </p:cNvPr>
@@ -4009,7 +4009,7 @@
           <p:cNvPr id="12" name="01 / 23">
             <a:extLst xmlns:a="http://schemas.openxmlformats.org/drawingml/2006/main">
               <a:ext uri="{FF2B5EF4-FFF2-40B4-BE49-F238E27FC236}">
-                <a16:creationId xmlns:a16="http://schemas.microsoft.com/office/drawing/2014/main" id="{D6AB57DA-3A94-44CB-B0BA-2362666A64D4}"/>
+                <a16:creationId xmlns:a16="http://schemas.microsoft.com/office/drawing/2014/main" id="{351F02A2-A145-4FE8-ADF5-2B0CA26D7626}"/>
               </a:ext>
             </a:extLst>
           </p:cNvPr>
@@ -4061,10 +4061,32 @@
           </a:p>
         </p:txBody>
       </p:sp>
+      <p:pic>
+        <p:nvPicPr>
+          <p:cNvPr id="26" name=""/>
+          <p:cNvPicPr>
+            <a:picLocks xmlns:a="http://schemas.openxmlformats.org/drawingml/2006/main" noChangeAspect="1"/>
+          </p:cNvPicPr>
+          <p:nvPr/>
+        </p:nvPicPr>
+        <p:blipFill>
+          <a:blip xmlns:r="http://schemas.openxmlformats.org/officeDocument/2006/relationships" xmlns:a="http://schemas.openxmlformats.org/drawingml/2006/main" r:embed="R6ec1709806ef4a5c"/>
+          <a:stretch xmlns:a="http://schemas.openxmlformats.org/drawingml/2006/main"/>
+        </p:blipFill>
+        <p:spPr>
+          <a:xfrm xmlns:a="http://schemas.openxmlformats.org/drawingml/2006/main">
+            <a:off x="10829925" y="3830"/>
+            <a:ext cx="952500" cy="944839"/>
+          </a:xfrm>
+          <a:prstGeom xmlns:a="http://schemas.openxmlformats.org/drawingml/2006/main" prst="rect">
+            <a:avLst/>
+          </a:prstGeom>
+        </p:spPr>
+      </p:pic>
     </p:spTree>
     <p:extLst>
       <p:ext uri="{BB962C8B-B14F-4D97-AF65-F5344CB8AC3E}">
-        <p14:creationId xmlns:p14="http://schemas.microsoft.com/office/powerpoint/2010/main" val="972569737"/>
+        <p14:creationId xmlns:p14="http://schemas.microsoft.com/office/powerpoint/2010/main" val="1230809720"/>
       </p:ext>
     </p:extLst>
   </p:cSld>
@@ -4092,10 +4114,10 @@
       </p:grpSpPr>
       <p:sp>
         <p:nvSpPr>
-          <p:cNvPr id="20" name="">
-            <a:extLst xmlns:a="http://schemas.openxmlformats.org/drawingml/2006/main">
-              <a:ext uri="{FF2B5EF4-FFF2-40B4-BE49-F238E27FC236}">
-                <a16:creationId xmlns:a16="http://schemas.microsoft.com/office/drawing/2014/main" id="{F2666A00-BBB1-4F73-9AF5-72AFE9ED2B1F}"/>
+          <p:cNvPr id="21" name="">
+            <a:extLst xmlns:a="http://schemas.openxmlformats.org/drawingml/2006/main">
+              <a:ext uri="{FF2B5EF4-FFF2-40B4-BE49-F238E27FC236}">
+                <a16:creationId xmlns:a16="http://schemas.microsoft.com/office/drawing/2014/main" id="{767650C9-B2E3-4580-BCF7-AEFAE5A1A00E}"/>
               </a:ext>
             </a:extLst>
           </p:cNvPr>
@@ -4125,7 +4147,7 @@
           <p:cNvPr id="2" name="ANÁLISE VISUAL DA INTRODUÇÃO">
             <a:extLst xmlns:a="http://schemas.openxmlformats.org/drawingml/2006/main">
               <a:ext uri="{FF2B5EF4-FFF2-40B4-BE49-F238E27FC236}">
-                <a16:creationId xmlns:a16="http://schemas.microsoft.com/office/drawing/2014/main" id="{AC5D6685-E491-4225-8BEE-40568EB499A2}"/>
+                <a16:creationId xmlns:a16="http://schemas.microsoft.com/office/drawing/2014/main" id="{6EC310B9-1E2D-445D-80C2-97D73FB1EED3}"/>
               </a:ext>
             </a:extLst>
           </p:cNvPr>
@@ -4182,7 +4204,7 @@
           <p:cNvPr id="3" name="Figura 1: recusa e escolhas mais complex">
             <a:extLst xmlns:a="http://schemas.openxmlformats.org/drawingml/2006/main">
               <a:ext uri="{FF2B5EF4-FFF2-40B4-BE49-F238E27FC236}">
-                <a16:creationId xmlns:a16="http://schemas.microsoft.com/office/drawing/2014/main" id="{98AC3608-8779-4C92-ADC4-7A20EA135253}"/>
+                <a16:creationId xmlns:a16="http://schemas.microsoft.com/office/drawing/2014/main" id="{D7224D34-B903-4E4A-8A52-51CCC9A6C647}"/>
               </a:ext>
             </a:extLst>
           </p:cNvPr>
@@ -4239,7 +4261,7 @@
           <p:cNvPr id="4" name="">
             <a:extLst xmlns:a="http://schemas.openxmlformats.org/drawingml/2006/main">
               <a:ext uri="{FF2B5EF4-FFF2-40B4-BE49-F238E27FC236}">
-                <a16:creationId xmlns:a16="http://schemas.microsoft.com/office/drawing/2014/main" id="{3051DDE1-80D3-4ECE-8F9E-E05E697521BA}"/>
+                <a16:creationId xmlns:a16="http://schemas.microsoft.com/office/drawing/2014/main" id="{19353AC7-6E89-43DF-8DE0-D0FD86CD949F}"/>
               </a:ext>
             </a:extLst>
           </p:cNvPr>
@@ -4269,7 +4291,7 @@
           <p:cNvPr id="5" name="">
             <a:extLst xmlns:a="http://schemas.openxmlformats.org/drawingml/2006/main">
               <a:ext uri="{FF2B5EF4-FFF2-40B4-BE49-F238E27FC236}">
-                <a16:creationId xmlns:a16="http://schemas.microsoft.com/office/drawing/2014/main" id="{BFD58318-8C8F-4DBF-BDA2-3BE60911E11C}"/>
+                <a16:creationId xmlns:a16="http://schemas.microsoft.com/office/drawing/2014/main" id="{3A833810-700E-4B3D-831B-7EE72FA5A786}"/>
               </a:ext>
             </a:extLst>
           </p:cNvPr>
@@ -4299,7 +4321,7 @@
           <p:cNvPr id="6" name="Nguyen, Backes e Stock (2022), Figura 1 ">
             <a:extLst xmlns:a="http://schemas.openxmlformats.org/drawingml/2006/main">
               <a:ext uri="{FF2B5EF4-FFF2-40B4-BE49-F238E27FC236}">
-                <a16:creationId xmlns:a16="http://schemas.microsoft.com/office/drawing/2014/main" id="{053E2F1B-17EF-4E73-90A2-BF52D3C15B11}"/>
+                <a16:creationId xmlns:a16="http://schemas.microsoft.com/office/drawing/2014/main" id="{CF9E1B39-5E7A-423F-863E-8F905B71B339}"/>
               </a:ext>
             </a:extLst>
           </p:cNvPr>
@@ -4356,7 +4378,7 @@
           <p:cNvPr id="7" name="10 / 23">
             <a:extLst xmlns:a="http://schemas.openxmlformats.org/drawingml/2006/main">
               <a:ext uri="{FF2B5EF4-FFF2-40B4-BE49-F238E27FC236}">
-                <a16:creationId xmlns:a16="http://schemas.microsoft.com/office/drawing/2014/main" id="{A0CEA681-39A7-4F1B-BCF9-7A8E4881E7BB}"/>
+                <a16:creationId xmlns:a16="http://schemas.microsoft.com/office/drawing/2014/main" id="{F071E74B-A46C-42CC-A7F3-34E5998BD49F}"/>
               </a:ext>
             </a:extLst>
           </p:cNvPr>
@@ -4410,14 +4432,14 @@
       </p:sp>
       <p:pic>
         <p:nvPicPr>
-          <p:cNvPr id="27" name=""/>
+          <p:cNvPr id="28" name=""/>
           <p:cNvPicPr>
             <a:picLocks xmlns:a="http://schemas.openxmlformats.org/drawingml/2006/main" noChangeAspect="1"/>
           </p:cNvPicPr>
           <p:nvPr/>
         </p:nvPicPr>
         <p:blipFill>
-          <a:blip xmlns:r="http://schemas.openxmlformats.org/officeDocument/2006/relationships" xmlns:a="http://schemas.openxmlformats.org/drawingml/2006/main" r:embed="R9e9624f223d2476b"/>
+          <a:blip xmlns:r="http://schemas.openxmlformats.org/officeDocument/2006/relationships" xmlns:a="http://schemas.openxmlformats.org/drawingml/2006/main" r:embed="Rd9c42b476c854b31"/>
           <a:stretch xmlns:a="http://schemas.openxmlformats.org/drawingml/2006/main"/>
         </p:blipFill>
         <p:spPr>
@@ -4435,7 +4457,7 @@
           <p:cNvPr id="9" name="(d)">
             <a:extLst xmlns:a="http://schemas.openxmlformats.org/drawingml/2006/main">
               <a:ext uri="{FF2B5EF4-FFF2-40B4-BE49-F238E27FC236}">
-                <a16:creationId xmlns:a16="http://schemas.microsoft.com/office/drawing/2014/main" id="{46AF3057-0AE8-49C1-9D6A-F289B5E74FD6}"/>
+                <a16:creationId xmlns:a16="http://schemas.microsoft.com/office/drawing/2014/main" id="{A77BA965-E342-4CB0-8A63-A496C572D338}"/>
               </a:ext>
             </a:extLst>
           </p:cNvPr>
@@ -4489,14 +4511,14 @@
       </p:sp>
       <p:pic>
         <p:nvPicPr>
-          <p:cNvPr id="29" name=""/>
+          <p:cNvPr id="30" name=""/>
           <p:cNvPicPr>
             <a:picLocks xmlns:a="http://schemas.openxmlformats.org/drawingml/2006/main" noChangeAspect="1"/>
           </p:cNvPicPr>
           <p:nvPr/>
         </p:nvPicPr>
         <p:blipFill>
-          <a:blip xmlns:r="http://schemas.openxmlformats.org/officeDocument/2006/relationships" xmlns:a="http://schemas.openxmlformats.org/drawingml/2006/main" r:embed="R8292f32e217641c6"/>
+          <a:blip xmlns:r="http://schemas.openxmlformats.org/officeDocument/2006/relationships" xmlns:a="http://schemas.openxmlformats.org/drawingml/2006/main" r:embed="R6036a087e8bf4cfa"/>
           <a:stretch xmlns:a="http://schemas.openxmlformats.org/drawingml/2006/main"/>
         </p:blipFill>
         <p:spPr>
@@ -4514,7 +4536,7 @@
           <p:cNvPr id="11" name="(e)">
             <a:extLst xmlns:a="http://schemas.openxmlformats.org/drawingml/2006/main">
               <a:ext uri="{FF2B5EF4-FFF2-40B4-BE49-F238E27FC236}">
-                <a16:creationId xmlns:a16="http://schemas.microsoft.com/office/drawing/2014/main" id="{D92C3257-3698-49F2-89E0-2BE52D30CA03}"/>
+                <a16:creationId xmlns:a16="http://schemas.microsoft.com/office/drawing/2014/main" id="{C2DEA890-CC22-45A3-B0C3-4AFF5CF718FB}"/>
               </a:ext>
             </a:extLst>
           </p:cNvPr>
@@ -4568,14 +4590,14 @@
       </p:sp>
       <p:pic>
         <p:nvPicPr>
-          <p:cNvPr id="31" name=""/>
+          <p:cNvPr id="32" name=""/>
           <p:cNvPicPr>
             <a:picLocks xmlns:a="http://schemas.openxmlformats.org/drawingml/2006/main" noChangeAspect="1"/>
           </p:cNvPicPr>
           <p:nvPr/>
         </p:nvPicPr>
         <p:blipFill>
-          <a:blip xmlns:r="http://schemas.openxmlformats.org/officeDocument/2006/relationships" xmlns:a="http://schemas.openxmlformats.org/drawingml/2006/main" r:embed="R62f26e9df52041a7"/>
+          <a:blip xmlns:r="http://schemas.openxmlformats.org/officeDocument/2006/relationships" xmlns:a="http://schemas.openxmlformats.org/drawingml/2006/main" r:embed="R1046c42dde0642f5"/>
           <a:stretch xmlns:a="http://schemas.openxmlformats.org/drawingml/2006/main"/>
         </p:blipFill>
         <p:spPr>
@@ -4593,7 +4615,7 @@
           <p:cNvPr id="13" name="(f)">
             <a:extLst xmlns:a="http://schemas.openxmlformats.org/drawingml/2006/main">
               <a:ext uri="{FF2B5EF4-FFF2-40B4-BE49-F238E27FC236}">
-                <a16:creationId xmlns:a16="http://schemas.microsoft.com/office/drawing/2014/main" id="{0ACC720C-B58A-4305-9462-101481B3FDAA}"/>
+                <a16:creationId xmlns:a16="http://schemas.microsoft.com/office/drawing/2014/main" id="{96BE3256-0A47-43A3-BEC8-CE38EB5D49CF}"/>
               </a:ext>
             </a:extLst>
           </p:cNvPr>
@@ -4650,7 +4672,7 @@
           <p:cNvPr id="14" name="EN">
             <a:extLst xmlns:a="http://schemas.openxmlformats.org/drawingml/2006/main">
               <a:ext uri="{FF2B5EF4-FFF2-40B4-BE49-F238E27FC236}">
-                <a16:creationId xmlns:a16="http://schemas.microsoft.com/office/drawing/2014/main" id="{4BD0D7BA-940C-4C44-911E-07E7FFDBC813}"/>
+                <a16:creationId xmlns:a16="http://schemas.microsoft.com/office/drawing/2014/main" id="{AEDE81E6-6B52-4CA6-9F09-2DFD9291DB9C}"/>
               </a:ext>
             </a:extLst>
           </p:cNvPr>
@@ -4707,7 +4729,7 @@
           <p:cNvPr id="15" name="“the consent dialog in Figure 1 (f) show">
             <a:extLst xmlns:a="http://schemas.openxmlformats.org/drawingml/2006/main">
               <a:ext uri="{FF2B5EF4-FFF2-40B4-BE49-F238E27FC236}">
-                <a16:creationId xmlns:a16="http://schemas.microsoft.com/office/drawing/2014/main" id="{5B05E793-BB58-4F66-BC22-A36C99440F12}"/>
+                <a16:creationId xmlns:a16="http://schemas.microsoft.com/office/drawing/2014/main" id="{9571E5C9-F5C7-43FB-BC5D-86F0405E195C}"/>
               </a:ext>
             </a:extLst>
           </p:cNvPr>
@@ -4764,7 +4786,7 @@
           <p:cNvPr id="16" name="PT">
             <a:extLst xmlns:a="http://schemas.openxmlformats.org/drawingml/2006/main">
               <a:ext uri="{FF2B5EF4-FFF2-40B4-BE49-F238E27FC236}">
-                <a16:creationId xmlns:a16="http://schemas.microsoft.com/office/drawing/2014/main" id="{7119F553-6348-4956-A824-465D4CE8DF3F}"/>
+                <a16:creationId xmlns:a16="http://schemas.microsoft.com/office/drawing/2014/main" id="{3CA9C9F6-B51C-449E-ACA8-9D8D473BC2B5}"/>
               </a:ext>
             </a:extLst>
           </p:cNvPr>
@@ -4821,7 +4843,7 @@
           <p:cNvPr id="17" name="O diálogo da Figura 1(f) mostra mecanism">
             <a:extLst xmlns:a="http://schemas.openxmlformats.org/drawingml/2006/main">
               <a:ext uri="{FF2B5EF4-FFF2-40B4-BE49-F238E27FC236}">
-                <a16:creationId xmlns:a16="http://schemas.microsoft.com/office/drawing/2014/main" id="{B36E6EEF-46EE-445A-81B0-A2A74A04FA82}"/>
+                <a16:creationId xmlns:a16="http://schemas.microsoft.com/office/drawing/2014/main" id="{FFE6FC42-6190-45F2-8053-E5609DF447C6}"/>
               </a:ext>
             </a:extLst>
           </p:cNvPr>
@@ -4878,7 +4900,7 @@
           <p:cNvPr id="18" name="ANÁLISE DO SEMINÁRIO">
             <a:extLst xmlns:a="http://schemas.openxmlformats.org/drawingml/2006/main">
               <a:ext uri="{FF2B5EF4-FFF2-40B4-BE49-F238E27FC236}">
-                <a16:creationId xmlns:a16="http://schemas.microsoft.com/office/drawing/2014/main" id="{848E0164-C00C-470F-87E6-FF17B43FE75A}"/>
+                <a16:creationId xmlns:a16="http://schemas.microsoft.com/office/drawing/2014/main" id="{C803E5AF-AA31-47A6-9A10-FC0DFB116AD3}"/>
               </a:ext>
             </a:extLst>
           </p:cNvPr>
@@ -4935,7 +4957,7 @@
           <p:cNvPr id="19" name="As opções visíveis precisam ser&#10;confront">
             <a:extLst xmlns:a="http://schemas.openxmlformats.org/drawingml/2006/main">
               <a:ext uri="{FF2B5EF4-FFF2-40B4-BE49-F238E27FC236}">
-                <a16:creationId xmlns:a16="http://schemas.microsoft.com/office/drawing/2014/main" id="{5337209B-E1BF-4CD0-800C-D5D978502000}"/>
+                <a16:creationId xmlns:a16="http://schemas.microsoft.com/office/drawing/2014/main" id="{419619FC-2CF2-4AF6-97E8-2527ED70ED66}"/>
               </a:ext>
             </a:extLst>
           </p:cNvPr>
@@ -5033,10 +5055,32 @@
           </a:p>
         </p:txBody>
       </p:sp>
+      <p:pic>
+        <p:nvPicPr>
+          <p:cNvPr id="40" name=""/>
+          <p:cNvPicPr>
+            <a:picLocks xmlns:a="http://schemas.openxmlformats.org/drawingml/2006/main" noChangeAspect="1"/>
+          </p:cNvPicPr>
+          <p:nvPr/>
+        </p:nvPicPr>
+        <p:blipFill>
+          <a:blip xmlns:r="http://schemas.openxmlformats.org/officeDocument/2006/relationships" xmlns:a="http://schemas.openxmlformats.org/drawingml/2006/main" r:embed="Ree8d2aa173834931"/>
+          <a:stretch xmlns:a="http://schemas.openxmlformats.org/drawingml/2006/main"/>
+        </p:blipFill>
+        <p:spPr>
+          <a:xfrm xmlns:a="http://schemas.openxmlformats.org/drawingml/2006/main">
+            <a:off x="10829925" y="3830"/>
+            <a:ext cx="952500" cy="944839"/>
+          </a:xfrm>
+          <a:prstGeom xmlns:a="http://schemas.openxmlformats.org/drawingml/2006/main" prst="rect">
+            <a:avLst/>
+          </a:prstGeom>
+        </p:spPr>
+      </p:pic>
     </p:spTree>
     <p:extLst>
       <p:ext uri="{BB962C8B-B14F-4D97-AF65-F5344CB8AC3E}">
-        <p14:creationId xmlns:p14="http://schemas.microsoft.com/office/powerpoint/2010/main" val="236519176"/>
+        <p14:creationId xmlns:p14="http://schemas.microsoft.com/office/powerpoint/2010/main" val="257156012"/>
       </p:ext>
     </p:extLst>
   </p:cSld>
@@ -5064,10 +5108,10 @@
       </p:grpSpPr>
       <p:sp>
         <p:nvSpPr>
-          <p:cNvPr id="13" name="">
-            <a:extLst xmlns:a="http://schemas.openxmlformats.org/drawingml/2006/main">
-              <a:ext uri="{FF2B5EF4-FFF2-40B4-BE49-F238E27FC236}">
-                <a16:creationId xmlns:a16="http://schemas.microsoft.com/office/drawing/2014/main" id="{D1940017-4E25-4FB8-812C-16D98FD83936}"/>
+          <p:cNvPr id="14" name="">
+            <a:extLst xmlns:a="http://schemas.openxmlformats.org/drawingml/2006/main">
+              <a:ext uri="{FF2B5EF4-FFF2-40B4-BE49-F238E27FC236}">
+                <a16:creationId xmlns:a16="http://schemas.microsoft.com/office/drawing/2014/main" id="{E1679650-F0C2-4BA1-A25D-B333AE5D3ECF}"/>
               </a:ext>
             </a:extLst>
           </p:cNvPr>
@@ -5097,7 +5141,7 @@
           <p:cNvPr id="2" name="ANÁLISE DA FUNDAMENTAÇÃO">
             <a:extLst xmlns:a="http://schemas.openxmlformats.org/drawingml/2006/main">
               <a:ext uri="{FF2B5EF4-FFF2-40B4-BE49-F238E27FC236}">
-                <a16:creationId xmlns:a16="http://schemas.microsoft.com/office/drawing/2014/main" id="{EDD06CB2-556B-4CC8-8973-2A74C4223FCF}"/>
+                <a16:creationId xmlns:a16="http://schemas.microsoft.com/office/drawing/2014/main" id="{1F6BEC74-96CB-4452-AC6C-235FC1DCABD7}"/>
               </a:ext>
             </a:extLst>
           </p:cNvPr>
@@ -5154,7 +5198,7 @@
           <p:cNvPr id="3" name="Marco jurídico: critérios usados no estu">
             <a:extLst xmlns:a="http://schemas.openxmlformats.org/drawingml/2006/main">
               <a:ext uri="{FF2B5EF4-FFF2-40B4-BE49-F238E27FC236}">
-                <a16:creationId xmlns:a16="http://schemas.microsoft.com/office/drawing/2014/main" id="{85C69946-B3F0-4D6A-AA8A-A90AB1CE58B3}"/>
+                <a16:creationId xmlns:a16="http://schemas.microsoft.com/office/drawing/2014/main" id="{E5EAC90F-097F-44CE-97B1-BE456D3E3737}"/>
               </a:ext>
             </a:extLst>
           </p:cNvPr>
@@ -5211,7 +5255,7 @@
           <p:cNvPr id="4" name="">
             <a:extLst xmlns:a="http://schemas.openxmlformats.org/drawingml/2006/main">
               <a:ext uri="{FF2B5EF4-FFF2-40B4-BE49-F238E27FC236}">
-                <a16:creationId xmlns:a16="http://schemas.microsoft.com/office/drawing/2014/main" id="{D728A761-01F0-4E66-B135-84DAB58E814E}"/>
+                <a16:creationId xmlns:a16="http://schemas.microsoft.com/office/drawing/2014/main" id="{674FF9DD-8DE1-46E2-A0BF-A3E7B0DCE5F7}"/>
               </a:ext>
             </a:extLst>
           </p:cNvPr>
@@ -5241,7 +5285,7 @@
           <p:cNvPr id="5" name="">
             <a:extLst xmlns:a="http://schemas.openxmlformats.org/drawingml/2006/main">
               <a:ext uri="{FF2B5EF4-FFF2-40B4-BE49-F238E27FC236}">
-                <a16:creationId xmlns:a16="http://schemas.microsoft.com/office/drawing/2014/main" id="{2908B8FD-3DD3-4A82-BCD2-3B180C5A0129}"/>
+                <a16:creationId xmlns:a16="http://schemas.microsoft.com/office/drawing/2014/main" id="{9A2688F1-D9F3-42C4-A953-7D6C429517FB}"/>
               </a:ext>
             </a:extLst>
           </p:cNvPr>
@@ -5271,7 +5315,7 @@
           <p:cNvPr id="6" name="Nguyen, Backes e Stock (2022), Seção 2, ">
             <a:extLst xmlns:a="http://schemas.openxmlformats.org/drawingml/2006/main">
               <a:ext uri="{FF2B5EF4-FFF2-40B4-BE49-F238E27FC236}">
-                <a16:creationId xmlns:a16="http://schemas.microsoft.com/office/drawing/2014/main" id="{2A5F5159-F44C-4CFA-9DF3-69AC7EBF2780}"/>
+                <a16:creationId xmlns:a16="http://schemas.microsoft.com/office/drawing/2014/main" id="{205CA208-DB53-4E97-B16F-2E6E26465338}"/>
               </a:ext>
             </a:extLst>
           </p:cNvPr>
@@ -5328,7 +5372,7 @@
           <p:cNvPr id="7" name="11 / 23">
             <a:extLst xmlns:a="http://schemas.openxmlformats.org/drawingml/2006/main">
               <a:ext uri="{FF2B5EF4-FFF2-40B4-BE49-F238E27FC236}">
-                <a16:creationId xmlns:a16="http://schemas.microsoft.com/office/drawing/2014/main" id="{3B618ECF-511D-4C8F-A94D-67C124B12814}"/>
+                <a16:creationId xmlns:a16="http://schemas.microsoft.com/office/drawing/2014/main" id="{E7095A68-79EA-4DCD-8D53-F517A6BE1E91}"/>
               </a:ext>
             </a:extLst>
           </p:cNvPr>
@@ -5382,7 +5426,7 @@
       </p:sp>
       <p:graphicFrame>
         <p:nvGraphicFramePr>
-          <p:cNvPr id="20" name=""/>
+          <p:cNvPr id="21" name=""/>
           <p:cNvGraphicFramePr/>
           <p:nvPr/>
         </p:nvGraphicFramePr>
@@ -5927,7 +5971,7 @@
           <p:cNvPr id="9" name="EN">
             <a:extLst xmlns:a="http://schemas.openxmlformats.org/drawingml/2006/main">
               <a:ext uri="{FF2B5EF4-FFF2-40B4-BE49-F238E27FC236}">
-                <a16:creationId xmlns:a16="http://schemas.microsoft.com/office/drawing/2014/main" id="{017D0D9D-059C-4F5E-9007-87D4F28330B9}"/>
+                <a16:creationId xmlns:a16="http://schemas.microsoft.com/office/drawing/2014/main" id="{5B4E2737-9D98-4028-BD89-FDBD808C536D}"/>
               </a:ext>
             </a:extLst>
           </p:cNvPr>
@@ -5984,7 +6028,7 @@
           <p:cNvPr id="10" name="“only a judicial ruling can provide lega">
             <a:extLst xmlns:a="http://schemas.openxmlformats.org/drawingml/2006/main">
               <a:ext uri="{FF2B5EF4-FFF2-40B4-BE49-F238E27FC236}">
-                <a16:creationId xmlns:a16="http://schemas.microsoft.com/office/drawing/2014/main" id="{A225A4E7-6850-487A-BF6B-2774EFE143C6}"/>
+                <a16:creationId xmlns:a16="http://schemas.microsoft.com/office/drawing/2014/main" id="{634862E9-B7BC-4EF5-894F-FED5FCFED6D5}"/>
               </a:ext>
             </a:extLst>
           </p:cNvPr>
@@ -6041,7 +6085,7 @@
           <p:cNvPr id="11" name="PT">
             <a:extLst xmlns:a="http://schemas.openxmlformats.org/drawingml/2006/main">
               <a:ext uri="{FF2B5EF4-FFF2-40B4-BE49-F238E27FC236}">
-                <a16:creationId xmlns:a16="http://schemas.microsoft.com/office/drawing/2014/main" id="{069C15C1-13DF-4F69-92B3-A9CBA479C520}"/>
+                <a16:creationId xmlns:a16="http://schemas.microsoft.com/office/drawing/2014/main" id="{50D3591A-643D-406C-A2D2-254ACE77014C}"/>
               </a:ext>
             </a:extLst>
           </p:cNvPr>
@@ -6098,7 +6142,7 @@
           <p:cNvPr id="12" name="Somente uma decisão judicial pode propor">
             <a:extLst xmlns:a="http://schemas.openxmlformats.org/drawingml/2006/main">
               <a:ext uri="{FF2B5EF4-FFF2-40B4-BE49-F238E27FC236}">
-                <a16:creationId xmlns:a16="http://schemas.microsoft.com/office/drawing/2014/main" id="{3E59D68F-D70C-49FB-80E3-DB1D672E2A94}"/>
+                <a16:creationId xmlns:a16="http://schemas.microsoft.com/office/drawing/2014/main" id="{ABD1271F-270A-43CE-860C-6BA270A92DC0}"/>
               </a:ext>
             </a:extLst>
           </p:cNvPr>
@@ -6150,10 +6194,32 @@
           </a:p>
         </p:txBody>
       </p:sp>
+      <p:pic>
+        <p:nvPicPr>
+          <p:cNvPr id="26" name=""/>
+          <p:cNvPicPr>
+            <a:picLocks xmlns:a="http://schemas.openxmlformats.org/drawingml/2006/main" noChangeAspect="1"/>
+          </p:cNvPicPr>
+          <p:nvPr/>
+        </p:nvPicPr>
+        <p:blipFill>
+          <a:blip xmlns:r="http://schemas.openxmlformats.org/officeDocument/2006/relationships" xmlns:a="http://schemas.openxmlformats.org/drawingml/2006/main" r:embed="Rb4fe66ab8f1b42c3"/>
+          <a:stretch xmlns:a="http://schemas.openxmlformats.org/drawingml/2006/main"/>
+        </p:blipFill>
+        <p:spPr>
+          <a:xfrm xmlns:a="http://schemas.openxmlformats.org/drawingml/2006/main">
+            <a:off x="10829925" y="3830"/>
+            <a:ext cx="952500" cy="944839"/>
+          </a:xfrm>
+          <a:prstGeom xmlns:a="http://schemas.openxmlformats.org/drawingml/2006/main" prst="rect">
+            <a:avLst/>
+          </a:prstGeom>
+        </p:spPr>
+      </p:pic>
     </p:spTree>
     <p:extLst>
       <p:ext uri="{BB962C8B-B14F-4D97-AF65-F5344CB8AC3E}">
-        <p14:creationId xmlns:p14="http://schemas.microsoft.com/office/powerpoint/2010/main" val="1904828299"/>
+        <p14:creationId xmlns:p14="http://schemas.microsoft.com/office/powerpoint/2010/main" val="333837736"/>
       </p:ext>
     </p:extLst>
   </p:cSld>
@@ -6181,10 +6247,10 @@
       </p:grpSpPr>
       <p:sp>
         <p:nvSpPr>
-          <p:cNvPr id="31" name="">
-            <a:extLst xmlns:a="http://schemas.openxmlformats.org/drawingml/2006/main">
-              <a:ext uri="{FF2B5EF4-FFF2-40B4-BE49-F238E27FC236}">
-                <a16:creationId xmlns:a16="http://schemas.microsoft.com/office/drawing/2014/main" id="{4A605B04-4658-453E-8B16-56817ED1B21D}"/>
+          <p:cNvPr id="32" name="">
+            <a:extLst xmlns:a="http://schemas.openxmlformats.org/drawingml/2006/main">
+              <a:ext uri="{FF2B5EF4-FFF2-40B4-BE49-F238E27FC236}">
+                <a16:creationId xmlns:a16="http://schemas.microsoft.com/office/drawing/2014/main" id="{B35EDF1C-DAE9-41CA-9553-193ECCDEA676}"/>
               </a:ext>
             </a:extLst>
           </p:cNvPr>
@@ -6214,7 +6280,7 @@
           <p:cNvPr id="2" name="METODOLOGIA">
             <a:extLst xmlns:a="http://schemas.openxmlformats.org/drawingml/2006/main">
               <a:ext uri="{FF2B5EF4-FFF2-40B4-BE49-F238E27FC236}">
-                <a16:creationId xmlns:a16="http://schemas.microsoft.com/office/drawing/2014/main" id="{557BFED9-9B21-4FE1-9C2F-7F8A9B8EA7E5}"/>
+                <a16:creationId xmlns:a16="http://schemas.microsoft.com/office/drawing/2014/main" id="{F740107C-BC02-4EE0-A449-AA5EAC306EB0}"/>
               </a:ext>
             </a:extLst>
           </p:cNvPr>
@@ -6271,7 +6337,7 @@
           <p:cNvPr id="3" name="Método I: identificação dos avisos">
             <a:extLst xmlns:a="http://schemas.openxmlformats.org/drawingml/2006/main">
               <a:ext uri="{FF2B5EF4-FFF2-40B4-BE49-F238E27FC236}">
-                <a16:creationId xmlns:a16="http://schemas.microsoft.com/office/drawing/2014/main" id="{97F291F7-F7C6-4820-BA6C-229E79E2D83B}"/>
+                <a16:creationId xmlns:a16="http://schemas.microsoft.com/office/drawing/2014/main" id="{60D96984-0B32-4D28-B7C7-93797F69BFBF}"/>
               </a:ext>
             </a:extLst>
           </p:cNvPr>
@@ -6328,7 +6394,7 @@
           <p:cNvPr id="4" name="">
             <a:extLst xmlns:a="http://schemas.openxmlformats.org/drawingml/2006/main">
               <a:ext uri="{FF2B5EF4-FFF2-40B4-BE49-F238E27FC236}">
-                <a16:creationId xmlns:a16="http://schemas.microsoft.com/office/drawing/2014/main" id="{8E588312-8F3C-4122-9A46-2DAA6EA8CAAF}"/>
+                <a16:creationId xmlns:a16="http://schemas.microsoft.com/office/drawing/2014/main" id="{A0E278DE-F5D6-4201-A59C-9149F1F49B60}"/>
               </a:ext>
             </a:extLst>
           </p:cNvPr>
@@ -6358,7 +6424,7 @@
           <p:cNvPr id="5" name="">
             <a:extLst xmlns:a="http://schemas.openxmlformats.org/drawingml/2006/main">
               <a:ext uri="{FF2B5EF4-FFF2-40B4-BE49-F238E27FC236}">
-                <a16:creationId xmlns:a16="http://schemas.microsoft.com/office/drawing/2014/main" id="{9E5591A6-8154-4CC5-B468-032855DD7907}"/>
+                <a16:creationId xmlns:a16="http://schemas.microsoft.com/office/drawing/2014/main" id="{964A35CC-B25C-4AFE-A5B9-A0652FCD80D3}"/>
               </a:ext>
             </a:extLst>
           </p:cNvPr>
@@ -6388,7 +6454,7 @@
           <p:cNvPr id="6" name="Nguyen, Backes e Stock (2022), Seções 3,">
             <a:extLst xmlns:a="http://schemas.openxmlformats.org/drawingml/2006/main">
               <a:ext uri="{FF2B5EF4-FFF2-40B4-BE49-F238E27FC236}">
-                <a16:creationId xmlns:a16="http://schemas.microsoft.com/office/drawing/2014/main" id="{54E87FC5-1167-47DB-A7B6-C8E0512D3F11}"/>
+                <a16:creationId xmlns:a16="http://schemas.microsoft.com/office/drawing/2014/main" id="{B36CCEA0-8B79-4786-8D91-68D2AEF0CC45}"/>
               </a:ext>
             </a:extLst>
           </p:cNvPr>
@@ -6445,7 +6511,7 @@
           <p:cNvPr id="7" name="12 / 23">
             <a:extLst xmlns:a="http://schemas.openxmlformats.org/drawingml/2006/main">
               <a:ext uri="{FF2B5EF4-FFF2-40B4-BE49-F238E27FC236}">
-                <a16:creationId xmlns:a16="http://schemas.microsoft.com/office/drawing/2014/main" id="{E414BF8D-810B-4816-97F3-0AE949D42507}"/>
+                <a16:creationId xmlns:a16="http://schemas.microsoft.com/office/drawing/2014/main" id="{3A97D14F-9426-4829-8BC6-4C66ACAA7536}"/>
               </a:ext>
             </a:extLst>
           </p:cNvPr>
@@ -6499,14 +6565,14 @@
       </p:sp>
       <p:pic>
         <p:nvPicPr>
-          <p:cNvPr id="38" name=""/>
+          <p:cNvPr id="39" name=""/>
           <p:cNvPicPr>
             <a:picLocks xmlns:a="http://schemas.openxmlformats.org/drawingml/2006/main" noChangeAspect="1"/>
           </p:cNvPicPr>
           <p:nvPr/>
         </p:nvPicPr>
         <p:blipFill>
-          <a:blip xmlns:r="http://schemas.openxmlformats.org/officeDocument/2006/relationships" xmlns:a="http://schemas.openxmlformats.org/drawingml/2006/main" r:embed="R921cd49305ba4f55"/>
+          <a:blip xmlns:r="http://schemas.openxmlformats.org/officeDocument/2006/relationships" xmlns:a="http://schemas.openxmlformats.org/drawingml/2006/main" r:embed="R34286c45c50f4b77"/>
           <a:stretch xmlns:a="http://schemas.openxmlformats.org/drawingml/2006/main"/>
         </p:blipFill>
         <p:spPr>
@@ -6524,7 +6590,7 @@
           <p:cNvPr id="9" name="Figura 2 do artigo: corpus e resultados ">
             <a:extLst xmlns:a="http://schemas.openxmlformats.org/drawingml/2006/main">
               <a:ext uri="{FF2B5EF4-FFF2-40B4-BE49-F238E27FC236}">
-                <a16:creationId xmlns:a16="http://schemas.microsoft.com/office/drawing/2014/main" id="{72B0D0CC-7E12-4C55-A045-3C1B597919C5}"/>
+                <a16:creationId xmlns:a16="http://schemas.microsoft.com/office/drawing/2014/main" id="{D4AE9877-E1E1-4889-A0AB-280A222F0C5E}"/>
               </a:ext>
             </a:extLst>
           </p:cNvPr>
@@ -6581,7 +6647,7 @@
           <p:cNvPr id="10" name="CRITÉRIOS DO CORPUS">
             <a:extLst xmlns:a="http://schemas.openxmlformats.org/drawingml/2006/main">
               <a:ext uri="{FF2B5EF4-FFF2-40B4-BE49-F238E27FC236}">
-                <a16:creationId xmlns:a16="http://schemas.microsoft.com/office/drawing/2014/main" id="{0F1C2323-E4E5-4FA8-83B4-FF4607CE7726}"/>
+                <a16:creationId xmlns:a16="http://schemas.microsoft.com/office/drawing/2014/main" id="{79249FB0-2C30-41E5-8F16-B4E530BD35EC}"/>
               </a:ext>
             </a:extLst>
           </p:cNvPr>
@@ -6638,7 +6704,7 @@
           <p:cNvPr id="11" name="Apps gratuitos, ao menos 10.000 download">
             <a:extLst xmlns:a="http://schemas.openxmlformats.org/drawingml/2006/main">
               <a:ext uri="{FF2B5EF4-FFF2-40B4-BE49-F238E27FC236}">
-                <a16:creationId xmlns:a16="http://schemas.microsoft.com/office/drawing/2014/main" id="{B82B4AAF-2CFC-4309-BEC3-D4119C6279C4}"/>
+                <a16:creationId xmlns:a16="http://schemas.microsoft.com/office/drawing/2014/main" id="{9C9FDEB4-E58C-4AC3-BFED-07D6B6869EA8}"/>
               </a:ext>
             </a:extLst>
           </p:cNvPr>
@@ -6741,7 +6807,7 @@
           <p:cNvPr id="12" name="">
             <a:extLst xmlns:a="http://schemas.openxmlformats.org/drawingml/2006/main">
               <a:ext uri="{FF2B5EF4-FFF2-40B4-BE49-F238E27FC236}">
-                <a16:creationId xmlns:a16="http://schemas.microsoft.com/office/drawing/2014/main" id="{AAE783F2-85CF-414F-8298-2CC0D2EC296C}"/>
+                <a16:creationId xmlns:a16="http://schemas.microsoft.com/office/drawing/2014/main" id="{3F33D90D-D0DD-4569-BEFD-87E72C000540}"/>
               </a:ext>
             </a:extLst>
           </p:cNvPr>
@@ -6771,7 +6837,7 @@
           <p:cNvPr id="13" name="Capturas de tela">
             <a:extLst xmlns:a="http://schemas.openxmlformats.org/drawingml/2006/main">
               <a:ext uri="{FF2B5EF4-FFF2-40B4-BE49-F238E27FC236}">
-                <a16:creationId xmlns:a16="http://schemas.microsoft.com/office/drawing/2014/main" id="{846347A9-2D31-471D-B9A5-8910FCFFA405}"/>
+                <a16:creationId xmlns:a16="http://schemas.microsoft.com/office/drawing/2014/main" id="{26050614-3390-4667-B969-141D0B88A274}"/>
               </a:ext>
             </a:extLst>
           </p:cNvPr>
@@ -6828,7 +6894,7 @@
           <p:cNvPr id="14" name="captura após 5 s">
             <a:extLst xmlns:a="http://schemas.openxmlformats.org/drawingml/2006/main">
               <a:ext uri="{FF2B5EF4-FFF2-40B4-BE49-F238E27FC236}">
-                <a16:creationId xmlns:a16="http://schemas.microsoft.com/office/drawing/2014/main" id="{9326E99A-5FB1-4665-A43D-A9BBB33B81DB}"/>
+                <a16:creationId xmlns:a16="http://schemas.microsoft.com/office/drawing/2014/main" id="{8F66BD17-96BC-4E7F-A3DC-DCE2BF81A2DB}"/>
               </a:ext>
             </a:extLst>
           </p:cNvPr>
@@ -6885,7 +6951,7 @@
           <p:cNvPr id="15" name="">
             <a:extLst xmlns:a="http://schemas.openxmlformats.org/drawingml/2006/main">
               <a:ext uri="{FF2B5EF4-FFF2-40B4-BE49-F238E27FC236}">
-                <a16:creationId xmlns:a16="http://schemas.microsoft.com/office/drawing/2014/main" id="{AE5D6565-0104-4B2C-B09C-B56B9B4237FF}"/>
+                <a16:creationId xmlns:a16="http://schemas.microsoft.com/office/drawing/2014/main" id="{B0907135-C194-4059-BF76-957DBAB4C1FB}"/>
               </a:ext>
             </a:extLst>
           </p:cNvPr>
@@ -6915,7 +6981,7 @@
           <p:cNvPr id="16" name="">
             <a:extLst xmlns:a="http://schemas.openxmlformats.org/drawingml/2006/main">
               <a:ext uri="{FF2B5EF4-FFF2-40B4-BE49-F238E27FC236}">
-                <a16:creationId xmlns:a16="http://schemas.microsoft.com/office/drawing/2014/main" id="{CCE7A8C9-758A-4F8A-8EDD-F5F946BCB63F}"/>
+                <a16:creationId xmlns:a16="http://schemas.microsoft.com/office/drawing/2014/main" id="{EB54D04D-2F25-472C-AC09-2DE0272FF013}"/>
               </a:ext>
             </a:extLst>
           </p:cNvPr>
@@ -6945,7 +7011,7 @@
           <p:cNvPr id="17" name="OCR">
             <a:extLst xmlns:a="http://schemas.openxmlformats.org/drawingml/2006/main">
               <a:ext uri="{FF2B5EF4-FFF2-40B4-BE49-F238E27FC236}">
-                <a16:creationId xmlns:a16="http://schemas.microsoft.com/office/drawing/2014/main" id="{F26990E3-2AAD-4AD4-B718-FD92822A81EC}"/>
+                <a16:creationId xmlns:a16="http://schemas.microsoft.com/office/drawing/2014/main" id="{F0B06676-433E-4E19-BE6E-610F75800977}"/>
               </a:ext>
             </a:extLst>
           </p:cNvPr>
@@ -7002,7 +7068,7 @@
           <p:cNvPr id="18" name="reconhecimento de texto">
             <a:extLst xmlns:a="http://schemas.openxmlformats.org/drawingml/2006/main">
               <a:ext uri="{FF2B5EF4-FFF2-40B4-BE49-F238E27FC236}">
-                <a16:creationId xmlns:a16="http://schemas.microsoft.com/office/drawing/2014/main" id="{434D775D-3CF7-43B6-838E-1CA1D19CD8C4}"/>
+                <a16:creationId xmlns:a16="http://schemas.microsoft.com/office/drawing/2014/main" id="{E8203B17-93A7-4DB3-A7AB-B6596BE7E258}"/>
               </a:ext>
             </a:extLst>
           </p:cNvPr>
@@ -7059,7 +7125,7 @@
           <p:cNvPr id="19" name="">
             <a:extLst xmlns:a="http://schemas.openxmlformats.org/drawingml/2006/main">
               <a:ext uri="{FF2B5EF4-FFF2-40B4-BE49-F238E27FC236}">
-                <a16:creationId xmlns:a16="http://schemas.microsoft.com/office/drawing/2014/main" id="{D22D7C47-70AC-4220-81A2-1462049EA005}"/>
+                <a16:creationId xmlns:a16="http://schemas.microsoft.com/office/drawing/2014/main" id="{2C9F3D39-ECDC-4CDC-B57D-9D0B2C68311A}"/>
               </a:ext>
             </a:extLst>
           </p:cNvPr>
@@ -7089,7 +7155,7 @@
           <p:cNvPr id="20" name="">
             <a:extLst xmlns:a="http://schemas.openxmlformats.org/drawingml/2006/main">
               <a:ext uri="{FF2B5EF4-FFF2-40B4-BE49-F238E27FC236}">
-                <a16:creationId xmlns:a16="http://schemas.microsoft.com/office/drawing/2014/main" id="{8109AB4F-7FC8-4244-AE34-1D381F040763}"/>
+                <a16:creationId xmlns:a16="http://schemas.microsoft.com/office/drawing/2014/main" id="{C3B55FAE-833A-49E8-AD68-EC01637F4C1D}"/>
               </a:ext>
             </a:extLst>
           </p:cNvPr>
@@ -7119,7 +7185,7 @@
           <p:cNvPr id="21" name="NLP">
             <a:extLst xmlns:a="http://schemas.openxmlformats.org/drawingml/2006/main">
               <a:ext uri="{FF2B5EF4-FFF2-40B4-BE49-F238E27FC236}">
-                <a16:creationId xmlns:a16="http://schemas.microsoft.com/office/drawing/2014/main" id="{F184A923-B92A-4C26-B147-E55CE4E985A7}"/>
+                <a16:creationId xmlns:a16="http://schemas.microsoft.com/office/drawing/2014/main" id="{92E70F7F-FEBE-4C4D-8A4F-621961D7498A}"/>
               </a:ext>
             </a:extLst>
           </p:cNvPr>
@@ -7176,7 +7242,7 @@
           <p:cNvPr id="22" name="processamento de&#10;linguagem natural">
             <a:extLst xmlns:a="http://schemas.openxmlformats.org/drawingml/2006/main">
               <a:ext uri="{FF2B5EF4-FFF2-40B4-BE49-F238E27FC236}">
-                <a16:creationId xmlns:a16="http://schemas.microsoft.com/office/drawing/2014/main" id="{B280BDFE-3BB7-477B-B6EE-B6A708DB73F5}"/>
+                <a16:creationId xmlns:a16="http://schemas.microsoft.com/office/drawing/2014/main" id="{60967232-510D-4016-ACDE-887C34C0DEED}"/>
               </a:ext>
             </a:extLst>
           </p:cNvPr>
@@ -7256,7 +7322,7 @@
           <p:cNvPr id="23" name="">
             <a:extLst xmlns:a="http://schemas.openxmlformats.org/drawingml/2006/main">
               <a:ext uri="{FF2B5EF4-FFF2-40B4-BE49-F238E27FC236}">
-                <a16:creationId xmlns:a16="http://schemas.microsoft.com/office/drawing/2014/main" id="{09728845-63BE-467A-9930-356ACBCEE4AE}"/>
+                <a16:creationId xmlns:a16="http://schemas.microsoft.com/office/drawing/2014/main" id="{1CE0F65D-D950-4E11-81E9-D09B68C0AA3F}"/>
               </a:ext>
             </a:extLst>
           </p:cNvPr>
@@ -7286,7 +7352,7 @@
           <p:cNvPr id="24" name="">
             <a:extLst xmlns:a="http://schemas.openxmlformats.org/drawingml/2006/main">
               <a:ext uri="{FF2B5EF4-FFF2-40B4-BE49-F238E27FC236}">
-                <a16:creationId xmlns:a16="http://schemas.microsoft.com/office/drawing/2014/main" id="{45F71B75-FA0D-4079-97AC-D9B39F12B4AF}"/>
+                <a16:creationId xmlns:a16="http://schemas.microsoft.com/office/drawing/2014/main" id="{9130451B-EEE5-42A7-B0BD-1B69A75E45F1}"/>
               </a:ext>
             </a:extLst>
           </p:cNvPr>
@@ -7316,7 +7382,7 @@
           <p:cNvPr id="25" name="Clustering">
             <a:extLst xmlns:a="http://schemas.openxmlformats.org/drawingml/2006/main">
               <a:ext uri="{FF2B5EF4-FFF2-40B4-BE49-F238E27FC236}">
-                <a16:creationId xmlns:a16="http://schemas.microsoft.com/office/drawing/2014/main" id="{28C58D89-CE0E-44F2-B640-C8AB2D0AC78C}"/>
+                <a16:creationId xmlns:a16="http://schemas.microsoft.com/office/drawing/2014/main" id="{79628AB0-C506-498B-87E9-ABFA256C7883}"/>
               </a:ext>
             </a:extLst>
           </p:cNvPr>
@@ -7373,7 +7439,7 @@
           <p:cNvPr id="26" name="agrupamento por&#10;semelhança: 44 grupos">
             <a:extLst xmlns:a="http://schemas.openxmlformats.org/drawingml/2006/main">
               <a:ext uri="{FF2B5EF4-FFF2-40B4-BE49-F238E27FC236}">
-                <a16:creationId xmlns:a16="http://schemas.microsoft.com/office/drawing/2014/main" id="{9ECE5EDF-ECA1-4C34-B4AE-FF05F4FF23B2}"/>
+                <a16:creationId xmlns:a16="http://schemas.microsoft.com/office/drawing/2014/main" id="{6D53D066-449D-4BE0-9B38-2C29EE1E67F4}"/>
               </a:ext>
             </a:extLst>
           </p:cNvPr>
@@ -7453,7 +7519,7 @@
           <p:cNvPr id="27" name="">
             <a:extLst xmlns:a="http://schemas.openxmlformats.org/drawingml/2006/main">
               <a:ext uri="{FF2B5EF4-FFF2-40B4-BE49-F238E27FC236}">
-                <a16:creationId xmlns:a16="http://schemas.microsoft.com/office/drawing/2014/main" id="{0FEC00BE-DF67-4BB7-8B4F-03AF75534BDC}"/>
+                <a16:creationId xmlns:a16="http://schemas.microsoft.com/office/drawing/2014/main" id="{EBE7291A-26EB-4C89-A024-B800B5ABDC32}"/>
               </a:ext>
             </a:extLst>
           </p:cNvPr>
@@ -7483,7 +7549,7 @@
           <p:cNvPr id="28" name="">
             <a:extLst xmlns:a="http://schemas.openxmlformats.org/drawingml/2006/main">
               <a:ext uri="{FF2B5EF4-FFF2-40B4-BE49-F238E27FC236}">
-                <a16:creationId xmlns:a16="http://schemas.microsoft.com/office/drawing/2014/main" id="{EAFBA797-F1C6-4E1C-B6F1-FA09FF2BCD82}"/>
+                <a16:creationId xmlns:a16="http://schemas.microsoft.com/office/drawing/2014/main" id="{11E0620D-587E-4DCA-B018-ED76A5683EAC}"/>
               </a:ext>
             </a:extLst>
           </p:cNvPr>
@@ -7513,7 +7579,7 @@
           <p:cNvPr id="29" name="Inspeção">
             <a:extLst xmlns:a="http://schemas.openxmlformats.org/drawingml/2006/main">
               <a:ext uri="{FF2B5EF4-FFF2-40B4-BE49-F238E27FC236}">
-                <a16:creationId xmlns:a16="http://schemas.microsoft.com/office/drawing/2014/main" id="{3A7B5EE8-4A39-4A51-B1E2-2098D8F72DB1}"/>
+                <a16:creationId xmlns:a16="http://schemas.microsoft.com/office/drawing/2014/main" id="{5C42B7A8-8087-4C2E-AE59-EF44AF41B6AE}"/>
               </a:ext>
             </a:extLst>
           </p:cNvPr>
@@ -7570,7 +7636,7 @@
           <p:cNvPr id="30" name="13.082 avisos">
             <a:extLst xmlns:a="http://schemas.openxmlformats.org/drawingml/2006/main">
               <a:ext uri="{FF2B5EF4-FFF2-40B4-BE49-F238E27FC236}">
-                <a16:creationId xmlns:a16="http://schemas.microsoft.com/office/drawing/2014/main" id="{AB021D2B-7AB6-4716-93A1-376BCCF3C6E7}"/>
+                <a16:creationId xmlns:a16="http://schemas.microsoft.com/office/drawing/2014/main" id="{9B195DD9-0671-498F-94E7-0E758F753396}"/>
               </a:ext>
             </a:extLst>
           </p:cNvPr>
@@ -7622,10 +7688,32 @@
           </a:p>
         </p:txBody>
       </p:sp>
+      <p:pic>
+        <p:nvPicPr>
+          <p:cNvPr id="62" name=""/>
+          <p:cNvPicPr>
+            <a:picLocks xmlns:a="http://schemas.openxmlformats.org/drawingml/2006/main" noChangeAspect="1"/>
+          </p:cNvPicPr>
+          <p:nvPr/>
+        </p:nvPicPr>
+        <p:blipFill>
+          <a:blip xmlns:r="http://schemas.openxmlformats.org/officeDocument/2006/relationships" xmlns:a="http://schemas.openxmlformats.org/drawingml/2006/main" r:embed="Rdc8e9e86e10f490a"/>
+          <a:stretch xmlns:a="http://schemas.openxmlformats.org/drawingml/2006/main"/>
+        </p:blipFill>
+        <p:spPr>
+          <a:xfrm xmlns:a="http://schemas.openxmlformats.org/drawingml/2006/main">
+            <a:off x="10829925" y="3830"/>
+            <a:ext cx="952500" cy="944839"/>
+          </a:xfrm>
+          <a:prstGeom xmlns:a="http://schemas.openxmlformats.org/drawingml/2006/main" prst="rect">
+            <a:avLst/>
+          </a:prstGeom>
+        </p:spPr>
+      </p:pic>
     </p:spTree>
     <p:extLst>
       <p:ext uri="{BB962C8B-B14F-4D97-AF65-F5344CB8AC3E}">
-        <p14:creationId xmlns:p14="http://schemas.microsoft.com/office/powerpoint/2010/main" val="51001593"/>
+        <p14:creationId xmlns:p14="http://schemas.microsoft.com/office/powerpoint/2010/main" val="142892328"/>
       </p:ext>
     </p:extLst>
   </p:cSld>
@@ -7653,10 +7741,10 @@
       </p:grpSpPr>
       <p:sp>
         <p:nvSpPr>
-          <p:cNvPr id="23" name="">
-            <a:extLst xmlns:a="http://schemas.openxmlformats.org/drawingml/2006/main">
-              <a:ext uri="{FF2B5EF4-FFF2-40B4-BE49-F238E27FC236}">
-                <a16:creationId xmlns:a16="http://schemas.microsoft.com/office/drawing/2014/main" id="{605B8D78-BF93-4152-8A40-04328FF69A55}"/>
+          <p:cNvPr id="24" name="">
+            <a:extLst xmlns:a="http://schemas.openxmlformats.org/drawingml/2006/main">
+              <a:ext uri="{FF2B5EF4-FFF2-40B4-BE49-F238E27FC236}">
+                <a16:creationId xmlns:a16="http://schemas.microsoft.com/office/drawing/2014/main" id="{678503FD-5F28-4474-BB62-7A31F6064BF8}"/>
               </a:ext>
             </a:extLst>
           </p:cNvPr>
@@ -7686,7 +7774,7 @@
           <p:cNvPr id="2" name="METODOLOGIA">
             <a:extLst xmlns:a="http://schemas.openxmlformats.org/drawingml/2006/main">
               <a:ext uri="{FF2B5EF4-FFF2-40B4-BE49-F238E27FC236}">
-                <a16:creationId xmlns:a16="http://schemas.microsoft.com/office/drawing/2014/main" id="{5B91BBFA-5D27-4BE5-A1A6-70C1ADCA3138}"/>
+                <a16:creationId xmlns:a16="http://schemas.microsoft.com/office/drawing/2014/main" id="{9A07D021-A963-4CCA-B85C-11B668285A26}"/>
               </a:ext>
             </a:extLst>
           </p:cNvPr>
@@ -7743,7 +7831,7 @@
           <p:cNvPr id="3" name="Método II: tráfego sob três condições">
             <a:extLst xmlns:a="http://schemas.openxmlformats.org/drawingml/2006/main">
               <a:ext uri="{FF2B5EF4-FFF2-40B4-BE49-F238E27FC236}">
-                <a16:creationId xmlns:a16="http://schemas.microsoft.com/office/drawing/2014/main" id="{2CC01E1E-2E29-40F7-9EAE-FD35623F8BFD}"/>
+                <a16:creationId xmlns:a16="http://schemas.microsoft.com/office/drawing/2014/main" id="{683C63D1-0A90-4EED-B014-4D64EA581911}"/>
               </a:ext>
             </a:extLst>
           </p:cNvPr>
@@ -7800,7 +7888,7 @@
           <p:cNvPr id="4" name="">
             <a:extLst xmlns:a="http://schemas.openxmlformats.org/drawingml/2006/main">
               <a:ext uri="{FF2B5EF4-FFF2-40B4-BE49-F238E27FC236}">
-                <a16:creationId xmlns:a16="http://schemas.microsoft.com/office/drawing/2014/main" id="{5137B842-3D6A-4009-A9B2-FC7034712213}"/>
+                <a16:creationId xmlns:a16="http://schemas.microsoft.com/office/drawing/2014/main" id="{0C2F33C4-517A-4A32-A1D1-6E25E0A34D20}"/>
               </a:ext>
             </a:extLst>
           </p:cNvPr>
@@ -7830,7 +7918,7 @@
           <p:cNvPr id="5" name="">
             <a:extLst xmlns:a="http://schemas.openxmlformats.org/drawingml/2006/main">
               <a:ext uri="{FF2B5EF4-FFF2-40B4-BE49-F238E27FC236}">
-                <a16:creationId xmlns:a16="http://schemas.microsoft.com/office/drawing/2014/main" id="{D181616E-A0CF-494E-A2A0-A0F70EACDB59}"/>
+                <a16:creationId xmlns:a16="http://schemas.microsoft.com/office/drawing/2014/main" id="{E5C7A68D-D152-4DDA-9733-22B7D1A0FD3E}"/>
               </a:ext>
             </a:extLst>
           </p:cNvPr>
@@ -7860,7 +7948,7 @@
           <p:cNvPr id="6" name="Nguyen, Backes e Stock (2022), Seção 4.3">
             <a:extLst xmlns:a="http://schemas.openxmlformats.org/drawingml/2006/main">
               <a:ext uri="{FF2B5EF4-FFF2-40B4-BE49-F238E27FC236}">
-                <a16:creationId xmlns:a16="http://schemas.microsoft.com/office/drawing/2014/main" id="{C36B505F-9E5A-44B4-8CF9-777C77304FEA}"/>
+                <a16:creationId xmlns:a16="http://schemas.microsoft.com/office/drawing/2014/main" id="{969B159B-7598-41F4-87D9-3F93637C58F7}"/>
               </a:ext>
             </a:extLst>
           </p:cNvPr>
@@ -7917,7 +8005,7 @@
           <p:cNvPr id="7" name="13 / 23">
             <a:extLst xmlns:a="http://schemas.openxmlformats.org/drawingml/2006/main">
               <a:ext uri="{FF2B5EF4-FFF2-40B4-BE49-F238E27FC236}">
-                <a16:creationId xmlns:a16="http://schemas.microsoft.com/office/drawing/2014/main" id="{9D8696A2-81F6-41BC-B6D6-FE63F5847FD5}"/>
+                <a16:creationId xmlns:a16="http://schemas.microsoft.com/office/drawing/2014/main" id="{2E12B380-F23C-436F-85A3-08B33C58558E}"/>
               </a:ext>
             </a:extLst>
           </p:cNvPr>
@@ -7971,14 +8059,14 @@
       </p:sp>
       <p:pic>
         <p:nvPicPr>
-          <p:cNvPr id="30" name=""/>
+          <p:cNvPr id="31" name=""/>
           <p:cNvPicPr>
             <a:picLocks xmlns:a="http://schemas.openxmlformats.org/drawingml/2006/main" noChangeAspect="1"/>
           </p:cNvPicPr>
           <p:nvPr/>
         </p:nvPicPr>
         <p:blipFill>
-          <a:blip xmlns:r="http://schemas.openxmlformats.org/officeDocument/2006/relationships" xmlns:a="http://schemas.openxmlformats.org/drawingml/2006/main" r:embed="R11c547413aed4496"/>
+          <a:blip xmlns:r="http://schemas.openxmlformats.org/officeDocument/2006/relationships" xmlns:a="http://schemas.openxmlformats.org/drawingml/2006/main" r:embed="R7344478abcd3469e"/>
           <a:stretch xmlns:a="http://schemas.openxmlformats.org/drawingml/2006/main"/>
         </p:blipFill>
         <p:spPr>
@@ -7996,7 +8084,7 @@
           <p:cNvPr id="9" name="Figura 4 do artigo: identificação do avi">
             <a:extLst xmlns:a="http://schemas.openxmlformats.org/drawingml/2006/main">
               <a:ext uri="{FF2B5EF4-FFF2-40B4-BE49-F238E27FC236}">
-                <a16:creationId xmlns:a16="http://schemas.microsoft.com/office/drawing/2014/main" id="{21AF3312-C453-450B-A8DB-ADD43A44D6B6}"/>
+                <a16:creationId xmlns:a16="http://schemas.microsoft.com/office/drawing/2014/main" id="{E8D835DF-3A79-4068-B692-0250D430E412}"/>
               </a:ext>
             </a:extLst>
           </p:cNvPr>
@@ -8053,7 +8141,7 @@
           <p:cNvPr id="10" name="">
             <a:extLst xmlns:a="http://schemas.openxmlformats.org/drawingml/2006/main">
               <a:ext uri="{FF2B5EF4-FFF2-40B4-BE49-F238E27FC236}">
-                <a16:creationId xmlns:a16="http://schemas.microsoft.com/office/drawing/2014/main" id="{58C62E64-7538-4CA2-A00C-3115B7E173AF}"/>
+                <a16:creationId xmlns:a16="http://schemas.microsoft.com/office/drawing/2014/main" id="{0372269C-141E-4E64-9E7C-8B15E1577146}"/>
               </a:ext>
             </a:extLst>
           </p:cNvPr>
@@ -8083,7 +8171,7 @@
           <p:cNvPr id="11" name="Tno-consent">
             <a:extLst xmlns:a="http://schemas.openxmlformats.org/drawingml/2006/main">
               <a:ext uri="{FF2B5EF4-FFF2-40B4-BE49-F238E27FC236}">
-                <a16:creationId xmlns:a16="http://schemas.microsoft.com/office/drawing/2014/main" id="{060C20FA-9E29-4B4E-ADCB-45BEA42D502E}"/>
+                <a16:creationId xmlns:a16="http://schemas.microsoft.com/office/drawing/2014/main" id="{0855270C-8DCF-4066-AF6C-F1966789C669}"/>
               </a:ext>
             </a:extLst>
           </p:cNvPr>
@@ -8140,7 +8228,7 @@
           <p:cNvPr id="12" name="SEM CONSENTIR">
             <a:extLst xmlns:a="http://schemas.openxmlformats.org/drawingml/2006/main">
               <a:ext uri="{FF2B5EF4-FFF2-40B4-BE49-F238E27FC236}">
-                <a16:creationId xmlns:a16="http://schemas.microsoft.com/office/drawing/2014/main" id="{D11DA864-E9C3-41D3-9549-8457834BCDAE}"/>
+                <a16:creationId xmlns:a16="http://schemas.microsoft.com/office/drawing/2014/main" id="{EDA2A14F-308E-4471-AF2A-59BFD6D850DA}"/>
               </a:ext>
             </a:extLst>
           </p:cNvPr>
@@ -8197,7 +8285,7 @@
           <p:cNvPr id="13" name="Abrir o app e não interagir.&#10;Registrar o">
             <a:extLst xmlns:a="http://schemas.openxmlformats.org/drawingml/2006/main">
               <a:ext uri="{FF2B5EF4-FFF2-40B4-BE49-F238E27FC236}">
-                <a16:creationId xmlns:a16="http://schemas.microsoft.com/office/drawing/2014/main" id="{C9319FED-97C4-45B8-9A48-912B85FC9BA0}"/>
+                <a16:creationId xmlns:a16="http://schemas.microsoft.com/office/drawing/2014/main" id="{C5327788-98F7-45DB-99A9-5583DCD41ACB}"/>
               </a:ext>
             </a:extLst>
           </p:cNvPr>
@@ -8300,7 +8388,7 @@
           <p:cNvPr id="14" name="">
             <a:extLst xmlns:a="http://schemas.openxmlformats.org/drawingml/2006/main">
               <a:ext uri="{FF2B5EF4-FFF2-40B4-BE49-F238E27FC236}">
-                <a16:creationId xmlns:a16="http://schemas.microsoft.com/office/drawing/2014/main" id="{1A0D8855-B648-4D62-AF87-023C0F9FDB91}"/>
+                <a16:creationId xmlns:a16="http://schemas.microsoft.com/office/drawing/2014/main" id="{3AE2F66F-CC4C-436A-85A2-519C39B59F3B}"/>
               </a:ext>
             </a:extLst>
           </p:cNvPr>
@@ -8330,7 +8418,7 @@
           <p:cNvPr id="15" name="Tconfirm">
             <a:extLst xmlns:a="http://schemas.openxmlformats.org/drawingml/2006/main">
               <a:ext uri="{FF2B5EF4-FFF2-40B4-BE49-F238E27FC236}">
-                <a16:creationId xmlns:a16="http://schemas.microsoft.com/office/drawing/2014/main" id="{21E45EFF-E2B4-4EA0-A912-6100D4D2339E}"/>
+                <a16:creationId xmlns:a16="http://schemas.microsoft.com/office/drawing/2014/main" id="{CE7B1D5E-B086-4A22-A5A2-1CADCC639DE7}"/>
               </a:ext>
             </a:extLst>
           </p:cNvPr>
@@ -8387,7 +8475,7 @@
           <p:cNvPr id="16" name="APÓS ACEITAR">
             <a:extLst xmlns:a="http://schemas.openxmlformats.org/drawingml/2006/main">
               <a:ext uri="{FF2B5EF4-FFF2-40B4-BE49-F238E27FC236}">
-                <a16:creationId xmlns:a16="http://schemas.microsoft.com/office/drawing/2014/main" id="{0AD35479-1EF8-4F78-B886-A37969B79347}"/>
+                <a16:creationId xmlns:a16="http://schemas.microsoft.com/office/drawing/2014/main" id="{51708B63-B0A1-4EC3-B642-37FF1013EA0D}"/>
               </a:ext>
             </a:extLst>
           </p:cNvPr>
@@ -8444,7 +8532,7 @@
           <p:cNvPr id="17" name="Acionar a opção de aceitação.&#10;Navegar au">
             <a:extLst xmlns:a="http://schemas.openxmlformats.org/drawingml/2006/main">
               <a:ext uri="{FF2B5EF4-FFF2-40B4-BE49-F238E27FC236}">
-                <a16:creationId xmlns:a16="http://schemas.microsoft.com/office/drawing/2014/main" id="{33AB5DD6-E60E-4EE1-B555-23512673A4C6}"/>
+                <a16:creationId xmlns:a16="http://schemas.microsoft.com/office/drawing/2014/main" id="{3F37F987-B1B3-49CE-BDB3-632C47969A48}"/>
               </a:ext>
             </a:extLst>
           </p:cNvPr>
@@ -8547,7 +8635,7 @@
           <p:cNvPr id="18" name="">
             <a:extLst xmlns:a="http://schemas.openxmlformats.org/drawingml/2006/main">
               <a:ext uri="{FF2B5EF4-FFF2-40B4-BE49-F238E27FC236}">
-                <a16:creationId xmlns:a16="http://schemas.microsoft.com/office/drawing/2014/main" id="{A8D8B5F0-D03C-4E07-9BF8-23AB2AF74CFF}"/>
+                <a16:creationId xmlns:a16="http://schemas.microsoft.com/office/drawing/2014/main" id="{9D78193A-BDBC-4EAD-A9B2-BC9E78D9E2DA}"/>
               </a:ext>
             </a:extLst>
           </p:cNvPr>
@@ -8577,7 +8665,7 @@
           <p:cNvPr id="19" name="Treject">
             <a:extLst xmlns:a="http://schemas.openxmlformats.org/drawingml/2006/main">
               <a:ext uri="{FF2B5EF4-FFF2-40B4-BE49-F238E27FC236}">
-                <a16:creationId xmlns:a16="http://schemas.microsoft.com/office/drawing/2014/main" id="{69133F27-AB24-4381-8992-FE1F8510B611}"/>
+                <a16:creationId xmlns:a16="http://schemas.microsoft.com/office/drawing/2014/main" id="{137FC123-336E-457B-A4A8-FD0924855CFE}"/>
               </a:ext>
             </a:extLst>
           </p:cNvPr>
@@ -8634,7 +8722,7 @@
           <p:cNvPr id="20" name="APÓS RECUSAR">
             <a:extLst xmlns:a="http://schemas.openxmlformats.org/drawingml/2006/main">
               <a:ext uri="{FF2B5EF4-FFF2-40B4-BE49-F238E27FC236}">
-                <a16:creationId xmlns:a16="http://schemas.microsoft.com/office/drawing/2014/main" id="{4B30D404-1470-4F69-91C7-8DE6675352CF}"/>
+                <a16:creationId xmlns:a16="http://schemas.microsoft.com/office/drawing/2014/main" id="{A44F30FD-4564-4FCF-AC37-676C1B926AFE}"/>
               </a:ext>
             </a:extLst>
           </p:cNvPr>
@@ -8691,7 +8779,7 @@
           <p:cNvPr id="21" name="Se houver opção, recusar.&#10;Verificar se o">
             <a:extLst xmlns:a="http://schemas.openxmlformats.org/drawingml/2006/main">
               <a:ext uri="{FF2B5EF4-FFF2-40B4-BE49-F238E27FC236}">
-                <a16:creationId xmlns:a16="http://schemas.microsoft.com/office/drawing/2014/main" id="{824B7488-2ACE-47D8-8679-8BDC0AD92749}"/>
+                <a16:creationId xmlns:a16="http://schemas.microsoft.com/office/drawing/2014/main" id="{ED7DCA88-B8A2-4EFC-8FD1-24AF1DBCCD24}"/>
               </a:ext>
             </a:extLst>
           </p:cNvPr>
@@ -8794,7 +8882,7 @@
           <p:cNvPr id="22" name="Até 150 s por condição, com foco em 45 d">
             <a:extLst xmlns:a="http://schemas.openxmlformats.org/drawingml/2006/main">
               <a:ext uri="{FF2B5EF4-FFF2-40B4-BE49-F238E27FC236}">
-                <a16:creationId xmlns:a16="http://schemas.microsoft.com/office/drawing/2014/main" id="{F78B2762-A718-49C6-846C-964A844B35DC}"/>
+                <a16:creationId xmlns:a16="http://schemas.microsoft.com/office/drawing/2014/main" id="{EFBDECC3-F15F-4998-A683-195622903BAF}"/>
               </a:ext>
             </a:extLst>
           </p:cNvPr>
@@ -8869,10 +8957,32 @@
           </a:p>
         </p:txBody>
       </p:sp>
+      <p:pic>
+        <p:nvPicPr>
+          <p:cNvPr id="46" name=""/>
+          <p:cNvPicPr>
+            <a:picLocks xmlns:a="http://schemas.openxmlformats.org/drawingml/2006/main" noChangeAspect="1"/>
+          </p:cNvPicPr>
+          <p:nvPr/>
+        </p:nvPicPr>
+        <p:blipFill>
+          <a:blip xmlns:r="http://schemas.openxmlformats.org/officeDocument/2006/relationships" xmlns:a="http://schemas.openxmlformats.org/drawingml/2006/main" r:embed="Rc107ef06f6aa41d5"/>
+          <a:stretch xmlns:a="http://schemas.openxmlformats.org/drawingml/2006/main"/>
+        </p:blipFill>
+        <p:spPr>
+          <a:xfrm xmlns:a="http://schemas.openxmlformats.org/drawingml/2006/main">
+            <a:off x="10829925" y="3830"/>
+            <a:ext cx="952500" cy="944839"/>
+          </a:xfrm>
+          <a:prstGeom xmlns:a="http://schemas.openxmlformats.org/drawingml/2006/main" prst="rect">
+            <a:avLst/>
+          </a:prstGeom>
+        </p:spPr>
+      </p:pic>
     </p:spTree>
     <p:extLst>
       <p:ext uri="{BB962C8B-B14F-4D97-AF65-F5344CB8AC3E}">
-        <p14:creationId xmlns:p14="http://schemas.microsoft.com/office/powerpoint/2010/main" val="1867519034"/>
+        <p14:creationId xmlns:p14="http://schemas.microsoft.com/office/powerpoint/2010/main" val="1227920804"/>
       </p:ext>
     </p:extLst>
   </p:cSld>
@@ -8900,10 +9010,10 @@
       </p:grpSpPr>
       <p:sp>
         <p:nvSpPr>
-          <p:cNvPr id="12" name="">
-            <a:extLst xmlns:a="http://schemas.openxmlformats.org/drawingml/2006/main">
-              <a:ext uri="{FF2B5EF4-FFF2-40B4-BE49-F238E27FC236}">
-                <a16:creationId xmlns:a16="http://schemas.microsoft.com/office/drawing/2014/main" id="{0E9086AA-92E1-4049-B87A-6EDC9F58A5F2}"/>
+          <p:cNvPr id="13" name="">
+            <a:extLst xmlns:a="http://schemas.openxmlformats.org/drawingml/2006/main">
+              <a:ext uri="{FF2B5EF4-FFF2-40B4-BE49-F238E27FC236}">
+                <a16:creationId xmlns:a16="http://schemas.microsoft.com/office/drawing/2014/main" id="{61EEF6AF-AD86-4FA7-B31E-680C7B26676D}"/>
               </a:ext>
             </a:extLst>
           </p:cNvPr>
@@ -8933,7 +9043,7 @@
           <p:cNvPr id="2" name="RESULTADOS: RESPOSTA À PERGUNTA 1">
             <a:extLst xmlns:a="http://schemas.openxmlformats.org/drawingml/2006/main">
               <a:ext uri="{FF2B5EF4-FFF2-40B4-BE49-F238E27FC236}">
-                <a16:creationId xmlns:a16="http://schemas.microsoft.com/office/drawing/2014/main" id="{6F3261AE-351B-4173-AF2B-FDD756C3B4C5}"/>
+                <a16:creationId xmlns:a16="http://schemas.microsoft.com/office/drawing/2014/main" id="{D25EE216-C1BC-4E7C-9194-1BF2BD409600}"/>
               </a:ext>
             </a:extLst>
           </p:cNvPr>
@@ -8990,7 +9100,7 @@
           <p:cNvPr id="3" name="Quatro mecanismos nos 13.082 avisos">
             <a:extLst xmlns:a="http://schemas.openxmlformats.org/drawingml/2006/main">
               <a:ext uri="{FF2B5EF4-FFF2-40B4-BE49-F238E27FC236}">
-                <a16:creationId xmlns:a16="http://schemas.microsoft.com/office/drawing/2014/main" id="{C3FEB9E9-16B7-4CD1-8CF1-CB500877BDBD}"/>
+                <a16:creationId xmlns:a16="http://schemas.microsoft.com/office/drawing/2014/main" id="{2744BCC2-BE43-4F26-AA2B-83C5A9844B5C}"/>
               </a:ext>
             </a:extLst>
           </p:cNvPr>
@@ -9047,7 +9157,7 @@
           <p:cNvPr id="4" name="">
             <a:extLst xmlns:a="http://schemas.openxmlformats.org/drawingml/2006/main">
               <a:ext uri="{FF2B5EF4-FFF2-40B4-BE49-F238E27FC236}">
-                <a16:creationId xmlns:a16="http://schemas.microsoft.com/office/drawing/2014/main" id="{49492511-A328-4DCC-8578-A0813F0ED72E}"/>
+                <a16:creationId xmlns:a16="http://schemas.microsoft.com/office/drawing/2014/main" id="{E5E830F6-D766-435B-93F8-3DBDA4AC57A1}"/>
               </a:ext>
             </a:extLst>
           </p:cNvPr>
@@ -9077,7 +9187,7 @@
           <p:cNvPr id="5" name="">
             <a:extLst xmlns:a="http://schemas.openxmlformats.org/drawingml/2006/main">
               <a:ext uri="{FF2B5EF4-FFF2-40B4-BE49-F238E27FC236}">
-                <a16:creationId xmlns:a16="http://schemas.microsoft.com/office/drawing/2014/main" id="{7A244B09-9849-46F8-A226-F97ECF842BE5}"/>
+                <a16:creationId xmlns:a16="http://schemas.microsoft.com/office/drawing/2014/main" id="{C227D896-B419-4793-B7ED-0F6875C533D5}"/>
               </a:ext>
             </a:extLst>
           </p:cNvPr>
@@ -9107,7 +9217,7 @@
           <p:cNvPr id="6" name="Nguyen, Backes e Stock (2022), Seção 4.2">
             <a:extLst xmlns:a="http://schemas.openxmlformats.org/drawingml/2006/main">
               <a:ext uri="{FF2B5EF4-FFF2-40B4-BE49-F238E27FC236}">
-                <a16:creationId xmlns:a16="http://schemas.microsoft.com/office/drawing/2014/main" id="{2D3C5D46-7173-44C4-B771-EEDBD1FDFE91}"/>
+                <a16:creationId xmlns:a16="http://schemas.microsoft.com/office/drawing/2014/main" id="{B37F71CF-7117-4EB9-A01E-0051523C9B91}"/>
               </a:ext>
             </a:extLst>
           </p:cNvPr>
@@ -9164,7 +9274,7 @@
           <p:cNvPr id="7" name="14 / 23">
             <a:extLst xmlns:a="http://schemas.openxmlformats.org/drawingml/2006/main">
               <a:ext uri="{FF2B5EF4-FFF2-40B4-BE49-F238E27FC236}">
-                <a16:creationId xmlns:a16="http://schemas.microsoft.com/office/drawing/2014/main" id="{1AA2CA9F-D1CF-4B86-9316-778C074233A1}"/>
+                <a16:creationId xmlns:a16="http://schemas.microsoft.com/office/drawing/2014/main" id="{FEC3F8BC-4FCD-4CDB-8478-275EA5437930}"/>
               </a:ext>
             </a:extLst>
           </p:cNvPr>
@@ -9218,14 +9328,14 @@
       </p:sp>
       <p:pic>
         <p:nvPicPr>
-          <p:cNvPr id="19" name=""/>
+          <p:cNvPr id="20" name=""/>
           <p:cNvPicPr>
             <a:picLocks xmlns:a="http://schemas.openxmlformats.org/drawingml/2006/main" noChangeAspect="1"/>
           </p:cNvPicPr>
           <p:nvPr/>
         </p:nvPicPr>
         <p:blipFill>
-          <a:blip xmlns:r="http://schemas.openxmlformats.org/officeDocument/2006/relationships" xmlns:a="http://schemas.openxmlformats.org/drawingml/2006/main" r:embed="R75a7fa5bc38a4805"/>
+          <a:blip xmlns:r="http://schemas.openxmlformats.org/officeDocument/2006/relationships" xmlns:a="http://schemas.openxmlformats.org/drawingml/2006/main" r:embed="R08e6916df065416d"/>
           <a:stretch xmlns:a="http://schemas.openxmlformats.org/drawingml/2006/main"/>
         </p:blipFill>
         <p:spPr>
@@ -9243,7 +9353,7 @@
           <p:cNvPr id="9" name="Figura 3 do artigo: exemplos dos quatro ">
             <a:extLst xmlns:a="http://schemas.openxmlformats.org/drawingml/2006/main">
               <a:ext uri="{FF2B5EF4-FFF2-40B4-BE49-F238E27FC236}">
-                <a16:creationId xmlns:a16="http://schemas.microsoft.com/office/drawing/2014/main" id="{A0638C12-B8E6-4614-9A3E-54A5EEB93FA4}"/>
+                <a16:creationId xmlns:a16="http://schemas.microsoft.com/office/drawing/2014/main" id="{458362DB-8454-41B4-A105-B19348F81C4B}"/>
               </a:ext>
             </a:extLst>
           </p:cNvPr>
@@ -9297,7 +9407,7 @@
       </p:sp>
       <p:graphicFrame>
         <p:nvGraphicFramePr>
-          <p:cNvPr id="21" name=""/>
+          <p:cNvPr id="22" name=""/>
           <p:cNvGraphicFramePr/>
           <p:nvPr/>
         </p:nvGraphicFramePr>
@@ -10154,7 +10264,7 @@
           <p:cNvPr id="11" name="Recusar anúncios personalizados não nece">
             <a:extLst xmlns:a="http://schemas.openxmlformats.org/drawingml/2006/main">
               <a:ext uri="{FF2B5EF4-FFF2-40B4-BE49-F238E27FC236}">
-                <a16:creationId xmlns:a16="http://schemas.microsoft.com/office/drawing/2014/main" id="{E66C6C21-03EE-44CA-B660-D95A8C757874}"/>
+                <a16:creationId xmlns:a16="http://schemas.microsoft.com/office/drawing/2014/main" id="{A5B9C6A4-480A-45A4-949C-0B64DF684E4F}"/>
               </a:ext>
             </a:extLst>
           </p:cNvPr>
@@ -10206,10 +10316,32 @@
           </a:p>
         </p:txBody>
       </p:sp>
+      <p:pic>
+        <p:nvPicPr>
+          <p:cNvPr id="24" name=""/>
+          <p:cNvPicPr>
+            <a:picLocks xmlns:a="http://schemas.openxmlformats.org/drawingml/2006/main" noChangeAspect="1"/>
+          </p:cNvPicPr>
+          <p:nvPr/>
+        </p:nvPicPr>
+        <p:blipFill>
+          <a:blip xmlns:r="http://schemas.openxmlformats.org/officeDocument/2006/relationships" xmlns:a="http://schemas.openxmlformats.org/drawingml/2006/main" r:embed="R398ae1929b674107"/>
+          <a:stretch xmlns:a="http://schemas.openxmlformats.org/drawingml/2006/main"/>
+        </p:blipFill>
+        <p:spPr>
+          <a:xfrm xmlns:a="http://schemas.openxmlformats.org/drawingml/2006/main">
+            <a:off x="10829925" y="3830"/>
+            <a:ext cx="952500" cy="944839"/>
+          </a:xfrm>
+          <a:prstGeom xmlns:a="http://schemas.openxmlformats.org/drawingml/2006/main" prst="rect">
+            <a:avLst/>
+          </a:prstGeom>
+        </p:spPr>
+      </p:pic>
     </p:spTree>
     <p:extLst>
       <p:ext uri="{BB962C8B-B14F-4D97-AF65-F5344CB8AC3E}">
-        <p14:creationId xmlns:p14="http://schemas.microsoft.com/office/powerpoint/2010/main" val="261408967"/>
+        <p14:creationId xmlns:p14="http://schemas.microsoft.com/office/powerpoint/2010/main" val="1421205033"/>
       </p:ext>
     </p:extLst>
   </p:cSld>
@@ -10237,10 +10369,10 @@
       </p:grpSpPr>
       <p:sp>
         <p:nvSpPr>
-          <p:cNvPr id="19" name="">
-            <a:extLst xmlns:a="http://schemas.openxmlformats.org/drawingml/2006/main">
-              <a:ext uri="{FF2B5EF4-FFF2-40B4-BE49-F238E27FC236}">
-                <a16:creationId xmlns:a16="http://schemas.microsoft.com/office/drawing/2014/main" id="{73A553D1-9353-4858-9F8C-977138A9DB58}"/>
+          <p:cNvPr id="20" name="">
+            <a:extLst xmlns:a="http://schemas.openxmlformats.org/drawingml/2006/main">
+              <a:ext uri="{FF2B5EF4-FFF2-40B4-BE49-F238E27FC236}">
+                <a16:creationId xmlns:a16="http://schemas.microsoft.com/office/drawing/2014/main" id="{4D77E80F-C3DE-433C-AF48-33E961B97661}"/>
               </a:ext>
             </a:extLst>
           </p:cNvPr>
@@ -10270,7 +10402,7 @@
           <p:cNvPr id="2" name="RESULTADOS: EVIDÊNCIAS PARA A PERGUNTA 2">
             <a:extLst xmlns:a="http://schemas.openxmlformats.org/drawingml/2006/main">
               <a:ext uri="{FF2B5EF4-FFF2-40B4-BE49-F238E27FC236}">
-                <a16:creationId xmlns:a16="http://schemas.microsoft.com/office/drawing/2014/main" id="{D1F4963F-BD94-448A-9D3C-7E15B8D2AB14}"/>
+                <a16:creationId xmlns:a16="http://schemas.microsoft.com/office/drawing/2014/main" id="{8FBFEB7A-3872-48BA-A15B-FA0CDA08F711}"/>
               </a:ext>
             </a:extLst>
           </p:cNvPr>
@@ -10327,7 +10459,7 @@
           <p:cNvPr id="3" name="Resultados: dois conjuntos distintos">
             <a:extLst xmlns:a="http://schemas.openxmlformats.org/drawingml/2006/main">
               <a:ext uri="{FF2B5EF4-FFF2-40B4-BE49-F238E27FC236}">
-                <a16:creationId xmlns:a16="http://schemas.microsoft.com/office/drawing/2014/main" id="{295AD339-95BA-478F-929C-CB5826B0A787}"/>
+                <a16:creationId xmlns:a16="http://schemas.microsoft.com/office/drawing/2014/main" id="{EDAFFA8C-BB4E-4B64-8946-32F06C8485C3}"/>
               </a:ext>
             </a:extLst>
           </p:cNvPr>
@@ -10384,7 +10516,7 @@
           <p:cNvPr id="4" name="">
             <a:extLst xmlns:a="http://schemas.openxmlformats.org/drawingml/2006/main">
               <a:ext uri="{FF2B5EF4-FFF2-40B4-BE49-F238E27FC236}">
-                <a16:creationId xmlns:a16="http://schemas.microsoft.com/office/drawing/2014/main" id="{AC8ABF5E-4FBE-4C19-9AFC-A02E2C9A0242}"/>
+                <a16:creationId xmlns:a16="http://schemas.microsoft.com/office/drawing/2014/main" id="{ECB72500-50EB-4EA6-869E-E0C59EDDFB73}"/>
               </a:ext>
             </a:extLst>
           </p:cNvPr>
@@ -10414,7 +10546,7 @@
           <p:cNvPr id="5" name="">
             <a:extLst xmlns:a="http://schemas.openxmlformats.org/drawingml/2006/main">
               <a:ext uri="{FF2B5EF4-FFF2-40B4-BE49-F238E27FC236}">
-                <a16:creationId xmlns:a16="http://schemas.microsoft.com/office/drawing/2014/main" id="{5CE735FC-C446-4EFF-8709-89B5866545F9}"/>
+                <a16:creationId xmlns:a16="http://schemas.microsoft.com/office/drawing/2014/main" id="{5B4E2112-FB64-4D8F-A17F-A4129E9CB970}"/>
               </a:ext>
             </a:extLst>
           </p:cNvPr>
@@ -10444,7 +10576,7 @@
           <p:cNvPr id="6" name="Nguyen, Backes e Stock (2022), Seções 4.">
             <a:extLst xmlns:a="http://schemas.openxmlformats.org/drawingml/2006/main">
               <a:ext uri="{FF2B5EF4-FFF2-40B4-BE49-F238E27FC236}">
-                <a16:creationId xmlns:a16="http://schemas.microsoft.com/office/drawing/2014/main" id="{3B4479E7-1C8A-4DDB-ACCD-093FF98869CA}"/>
+                <a16:creationId xmlns:a16="http://schemas.microsoft.com/office/drawing/2014/main" id="{0AD0845C-24A6-4B37-A422-859704EF9791}"/>
               </a:ext>
             </a:extLst>
           </p:cNvPr>
@@ -10501,7 +10633,7 @@
           <p:cNvPr id="7" name="15 / 23">
             <a:extLst xmlns:a="http://schemas.openxmlformats.org/drawingml/2006/main">
               <a:ext uri="{FF2B5EF4-FFF2-40B4-BE49-F238E27FC236}">
-                <a16:creationId xmlns:a16="http://schemas.microsoft.com/office/drawing/2014/main" id="{A4FA8A35-8197-45EF-86D5-CA5785EFE34A}"/>
+                <a16:creationId xmlns:a16="http://schemas.microsoft.com/office/drawing/2014/main" id="{7B004934-4B36-484D-9D37-1A1177C276C6}"/>
               </a:ext>
             </a:extLst>
           </p:cNvPr>
@@ -10558,7 +10690,7 @@
           <p:cNvPr id="8" name="239.381 aplicativos analisados">
             <a:extLst xmlns:a="http://schemas.openxmlformats.org/drawingml/2006/main">
               <a:ext uri="{FF2B5EF4-FFF2-40B4-BE49-F238E27FC236}">
-                <a16:creationId xmlns:a16="http://schemas.microsoft.com/office/drawing/2014/main" id="{BC7EA066-FBB8-4915-A2F4-95615B76C723}"/>
+                <a16:creationId xmlns:a16="http://schemas.microsoft.com/office/drawing/2014/main" id="{B497DF2A-7325-4967-B75B-AB7BE976281C}"/>
               </a:ext>
             </a:extLst>
           </p:cNvPr>
@@ -10615,7 +10747,7 @@
           <p:cNvPr id="9" name="">
             <a:extLst xmlns:a="http://schemas.openxmlformats.org/drawingml/2006/main">
               <a:ext uri="{FF2B5EF4-FFF2-40B4-BE49-F238E27FC236}">
-                <a16:creationId xmlns:a16="http://schemas.microsoft.com/office/drawing/2014/main" id="{81A0BFE9-0CF1-4D0C-8B95-E3B730F699DF}"/>
+                <a16:creationId xmlns:a16="http://schemas.microsoft.com/office/drawing/2014/main" id="{C0F61D6B-1731-40D6-B231-08B298FFC970}"/>
               </a:ext>
             </a:extLst>
           </p:cNvPr>
@@ -10645,7 +10777,7 @@
           <p:cNvPr id="10" name="APPS COM AVISO IDENTIFICADO">
             <a:extLst xmlns:a="http://schemas.openxmlformats.org/drawingml/2006/main">
               <a:ext uri="{FF2B5EF4-FFF2-40B4-BE49-F238E27FC236}">
-                <a16:creationId xmlns:a16="http://schemas.microsoft.com/office/drawing/2014/main" id="{A38D2205-5C82-47D4-ADFE-1B1B94A454C9}"/>
+                <a16:creationId xmlns:a16="http://schemas.microsoft.com/office/drawing/2014/main" id="{768DB658-91A7-45DA-9EF7-3232B4E69B12}"/>
               </a:ext>
             </a:extLst>
           </p:cNvPr>
@@ -10702,7 +10834,7 @@
           <p:cNvPr id="11" name="2.688">
             <a:extLst xmlns:a="http://schemas.openxmlformats.org/drawingml/2006/main">
               <a:ext uri="{FF2B5EF4-FFF2-40B4-BE49-F238E27FC236}">
-                <a16:creationId xmlns:a16="http://schemas.microsoft.com/office/drawing/2014/main" id="{DBF3D2F2-5DDC-41B0-B8F1-484EE78D70AA}"/>
+                <a16:creationId xmlns:a16="http://schemas.microsoft.com/office/drawing/2014/main" id="{A9CFFEF9-96C2-46C2-A3A4-8D76FDF7D9E7}"/>
               </a:ext>
             </a:extLst>
           </p:cNvPr>
@@ -10759,7 +10891,7 @@
           <p:cNvPr id="12" name="20,54% dos 13.082 apps com aviso">
             <a:extLst xmlns:a="http://schemas.openxmlformats.org/drawingml/2006/main">
               <a:ext uri="{FF2B5EF4-FFF2-40B4-BE49-F238E27FC236}">
-                <a16:creationId xmlns:a16="http://schemas.microsoft.com/office/drawing/2014/main" id="{1DD472D2-1630-4D6C-B20B-62E0DBC993EC}"/>
+                <a16:creationId xmlns:a16="http://schemas.microsoft.com/office/drawing/2014/main" id="{851B2AAE-508E-4800-90A1-D4EBBF3A60C0}"/>
               </a:ext>
             </a:extLst>
           </p:cNvPr>
@@ -10816,7 +10948,7 @@
           <p:cNvPr id="13" name="Pelo menos uma potencial violação&#10;dos re">
             <a:extLst xmlns:a="http://schemas.openxmlformats.org/drawingml/2006/main">
               <a:ext uri="{FF2B5EF4-FFF2-40B4-BE49-F238E27FC236}">
-                <a16:creationId xmlns:a16="http://schemas.microsoft.com/office/drawing/2014/main" id="{76EEA075-E64E-4EDB-B417-3632B1A67036}"/>
+                <a16:creationId xmlns:a16="http://schemas.microsoft.com/office/drawing/2014/main" id="{FE2881D5-9B58-4493-8B35-DE526F4675BC}"/>
               </a:ext>
             </a:extLst>
           </p:cNvPr>
@@ -10896,7 +11028,7 @@
           <p:cNvPr id="14" name="">
             <a:extLst xmlns:a="http://schemas.openxmlformats.org/drawingml/2006/main">
               <a:ext uri="{FF2B5EF4-FFF2-40B4-BE49-F238E27FC236}">
-                <a16:creationId xmlns:a16="http://schemas.microsoft.com/office/drawing/2014/main" id="{A981771A-4114-46AB-8CD2-5510CAC85DFF}"/>
+                <a16:creationId xmlns:a16="http://schemas.microsoft.com/office/drawing/2014/main" id="{F88E6AD1-764C-4CCE-A788-B8CEB6CDB04C}"/>
               </a:ext>
             </a:extLst>
           </p:cNvPr>
@@ -10926,7 +11058,7 @@
           <p:cNvPr id="15" name="APPS SEM AVISO IDENTIFICADO">
             <a:extLst xmlns:a="http://schemas.openxmlformats.org/drawingml/2006/main">
               <a:ext uri="{FF2B5EF4-FFF2-40B4-BE49-F238E27FC236}">
-                <a16:creationId xmlns:a16="http://schemas.microsoft.com/office/drawing/2014/main" id="{431BE203-7604-4E3D-9A12-13D99AFBB81B}"/>
+                <a16:creationId xmlns:a16="http://schemas.microsoft.com/office/drawing/2014/main" id="{A8CBEB3D-3A2A-4196-A781-2010BEE4260E}"/>
               </a:ext>
             </a:extLst>
           </p:cNvPr>
@@ -10983,7 +11115,7 @@
           <p:cNvPr id="16" name="30.160">
             <a:extLst xmlns:a="http://schemas.openxmlformats.org/drawingml/2006/main">
               <a:ext uri="{FF2B5EF4-FFF2-40B4-BE49-F238E27FC236}">
-                <a16:creationId xmlns:a16="http://schemas.microsoft.com/office/drawing/2014/main" id="{064DDC9F-5785-462B-916B-A7881D4F2CA6}"/>
+                <a16:creationId xmlns:a16="http://schemas.microsoft.com/office/drawing/2014/main" id="{5191D6F0-A588-44EF-9101-00231AEACEB8}"/>
               </a:ext>
             </a:extLst>
           </p:cNvPr>
@@ -11040,7 +11172,7 @@
           <p:cNvPr id="17" name="Enviaram dados pessoais a&#10;controladores ">
             <a:extLst xmlns:a="http://schemas.openxmlformats.org/drawingml/2006/main">
               <a:ext uri="{FF2B5EF4-FFF2-40B4-BE49-F238E27FC236}">
-                <a16:creationId xmlns:a16="http://schemas.microsoft.com/office/drawing/2014/main" id="{3528B86F-5404-4E14-9BFD-EDAB9C535062}"/>
+                <a16:creationId xmlns:a16="http://schemas.microsoft.com/office/drawing/2014/main" id="{870117A0-02FB-4B1A-A7AF-B722BEBE49E4}"/>
               </a:ext>
             </a:extLst>
           </p:cNvPr>
@@ -11120,7 +11252,7 @@
           <p:cNvPr id="18" name="93,26% dos 32.341 apps que enviaram&#10;dado">
             <a:extLst xmlns:a="http://schemas.openxmlformats.org/drawingml/2006/main">
               <a:ext uri="{FF2B5EF4-FFF2-40B4-BE49-F238E27FC236}">
-                <a16:creationId xmlns:a16="http://schemas.microsoft.com/office/drawing/2014/main" id="{4582DA7F-203E-4012-9475-B8AC1F3F0EC6}"/>
+                <a16:creationId xmlns:a16="http://schemas.microsoft.com/office/drawing/2014/main" id="{00994B42-65FF-497A-BABB-A30A54A943C3}"/>
               </a:ext>
             </a:extLst>
           </p:cNvPr>
@@ -11218,10 +11350,32 @@
           </a:p>
         </p:txBody>
       </p:sp>
+      <p:pic>
+        <p:nvPicPr>
+          <p:cNvPr id="38" name=""/>
+          <p:cNvPicPr>
+            <a:picLocks xmlns:a="http://schemas.openxmlformats.org/drawingml/2006/main" noChangeAspect="1"/>
+          </p:cNvPicPr>
+          <p:nvPr/>
+        </p:nvPicPr>
+        <p:blipFill>
+          <a:blip xmlns:r="http://schemas.openxmlformats.org/officeDocument/2006/relationships" xmlns:a="http://schemas.openxmlformats.org/drawingml/2006/main" r:embed="R219de336598249f4"/>
+          <a:stretch xmlns:a="http://schemas.openxmlformats.org/drawingml/2006/main"/>
+        </p:blipFill>
+        <p:spPr>
+          <a:xfrm xmlns:a="http://schemas.openxmlformats.org/drawingml/2006/main">
+            <a:off x="10829925" y="3830"/>
+            <a:ext cx="952500" cy="944839"/>
+          </a:xfrm>
+          <a:prstGeom xmlns:a="http://schemas.openxmlformats.org/drawingml/2006/main" prst="rect">
+            <a:avLst/>
+          </a:prstGeom>
+        </p:spPr>
+      </p:pic>
     </p:spTree>
     <p:extLst>
       <p:ext uri="{BB962C8B-B14F-4D97-AF65-F5344CB8AC3E}">
-        <p14:creationId xmlns:p14="http://schemas.microsoft.com/office/powerpoint/2010/main" val="153455315"/>
+        <p14:creationId xmlns:p14="http://schemas.microsoft.com/office/powerpoint/2010/main" val="169537071"/>
       </p:ext>
     </p:extLst>
   </p:cSld>
@@ -11249,10 +11403,10 @@
       </p:grpSpPr>
       <p:sp>
         <p:nvSpPr>
-          <p:cNvPr id="16" name="">
-            <a:extLst xmlns:a="http://schemas.openxmlformats.org/drawingml/2006/main">
-              <a:ext uri="{FF2B5EF4-FFF2-40B4-BE49-F238E27FC236}">
-                <a16:creationId xmlns:a16="http://schemas.microsoft.com/office/drawing/2014/main" id="{19D8E1E3-0FBF-47CB-82BE-E3495DAE94D7}"/>
+          <p:cNvPr id="17" name="">
+            <a:extLst xmlns:a="http://schemas.openxmlformats.org/drawingml/2006/main">
+              <a:ext uri="{FF2B5EF4-FFF2-40B4-BE49-F238E27FC236}">
+                <a16:creationId xmlns:a16="http://schemas.microsoft.com/office/drawing/2014/main" id="{CB900D9C-AC77-4214-9E5F-EBE4AE898E5A}"/>
               </a:ext>
             </a:extLst>
           </p:cNvPr>
@@ -11282,7 +11436,7 @@
           <p:cNvPr id="2" name="RESULTADOS: EVIDÊNCIAS PARA A PERGUNTA 2">
             <a:extLst xmlns:a="http://schemas.openxmlformats.org/drawingml/2006/main">
               <a:ext uri="{FF2B5EF4-FFF2-40B4-BE49-F238E27FC236}">
-                <a16:creationId xmlns:a16="http://schemas.microsoft.com/office/drawing/2014/main" id="{446F76EB-6469-4E40-A5E7-A323016DA5E0}"/>
+                <a16:creationId xmlns:a16="http://schemas.microsoft.com/office/drawing/2014/main" id="{5EDCE399-7825-41B1-8AF1-4ED8EA326F01}"/>
               </a:ext>
             </a:extLst>
           </p:cNvPr>
@@ -11339,7 +11493,7 @@
           <p:cNvPr id="3" name="Potenciais violações entre apps com avis">
             <a:extLst xmlns:a="http://schemas.openxmlformats.org/drawingml/2006/main">
               <a:ext uri="{FF2B5EF4-FFF2-40B4-BE49-F238E27FC236}">
-                <a16:creationId xmlns:a16="http://schemas.microsoft.com/office/drawing/2014/main" id="{893DD9C4-257C-47FB-899A-310A8EA060C6}"/>
+                <a16:creationId xmlns:a16="http://schemas.microsoft.com/office/drawing/2014/main" id="{08446A5C-B5CC-413E-9099-6A677C53C721}"/>
               </a:ext>
             </a:extLst>
           </p:cNvPr>
@@ -11396,7 +11550,7 @@
           <p:cNvPr id="4" name="">
             <a:extLst xmlns:a="http://schemas.openxmlformats.org/drawingml/2006/main">
               <a:ext uri="{FF2B5EF4-FFF2-40B4-BE49-F238E27FC236}">
-                <a16:creationId xmlns:a16="http://schemas.microsoft.com/office/drawing/2014/main" id="{F438C0B1-1C04-4D46-BCAF-2E7DE5CEFB4B}"/>
+                <a16:creationId xmlns:a16="http://schemas.microsoft.com/office/drawing/2014/main" id="{86DBC33C-1358-45F7-A0DE-081D75A65B31}"/>
               </a:ext>
             </a:extLst>
           </p:cNvPr>
@@ -11426,7 +11580,7 @@
           <p:cNvPr id="5" name="">
             <a:extLst xmlns:a="http://schemas.openxmlformats.org/drawingml/2006/main">
               <a:ext uri="{FF2B5EF4-FFF2-40B4-BE49-F238E27FC236}">
-                <a16:creationId xmlns:a16="http://schemas.microsoft.com/office/drawing/2014/main" id="{CEC19141-8380-487B-812A-6A789B47E2DF}"/>
+                <a16:creationId xmlns:a16="http://schemas.microsoft.com/office/drawing/2014/main" id="{994D9D96-255F-4B7C-B295-A99B717406DB}"/>
               </a:ext>
             </a:extLst>
           </p:cNvPr>
@@ -11456,7 +11610,7 @@
           <p:cNvPr id="6" name="Nguyen, Backes e Stock (2022), Tabela 3 ">
             <a:extLst xmlns:a="http://schemas.openxmlformats.org/drawingml/2006/main">
               <a:ext uri="{FF2B5EF4-FFF2-40B4-BE49-F238E27FC236}">
-                <a16:creationId xmlns:a16="http://schemas.microsoft.com/office/drawing/2014/main" id="{207B3243-6D3A-406D-8079-E71BCB5B283A}"/>
+                <a16:creationId xmlns:a16="http://schemas.microsoft.com/office/drawing/2014/main" id="{C6B0A008-6365-4364-B93B-73BF72CC5A43}"/>
               </a:ext>
             </a:extLst>
           </p:cNvPr>
@@ -11513,7 +11667,7 @@
           <p:cNvPr id="7" name="16 / 23">
             <a:extLst xmlns:a="http://schemas.openxmlformats.org/drawingml/2006/main">
               <a:ext uri="{FF2B5EF4-FFF2-40B4-BE49-F238E27FC236}">
-                <a16:creationId xmlns:a16="http://schemas.microsoft.com/office/drawing/2014/main" id="{ABD77542-63D8-4334-8F07-CDA1FDD7B69A}"/>
+                <a16:creationId xmlns:a16="http://schemas.microsoft.com/office/drawing/2014/main" id="{D26F7FAF-7F93-47B0-877C-B0C078AD54D6}"/>
               </a:ext>
             </a:extLst>
           </p:cNvPr>
@@ -11567,7 +11721,7 @@
       </p:sp>
       <p:graphicFrame>
         <p:nvGraphicFramePr>
-          <p:cNvPr id="23" name=""/>
+          <p:cNvPr id="24" name=""/>
           <p:cNvGraphicFramePr/>
           <p:nvPr/>
         </p:nvGraphicFramePr>
@@ -12666,7 +12820,7 @@
           <p:cNvPr id="9" name="2.181">
             <a:extLst xmlns:a="http://schemas.openxmlformats.org/drawingml/2006/main">
               <a:ext uri="{FF2B5EF4-FFF2-40B4-BE49-F238E27FC236}">
-                <a16:creationId xmlns:a16="http://schemas.microsoft.com/office/drawing/2014/main" id="{99373119-37F3-43DC-9DB9-9F5849B1DC03}"/>
+                <a16:creationId xmlns:a16="http://schemas.microsoft.com/office/drawing/2014/main" id="{D1B4D53F-658F-4180-85A5-644C8021773E}"/>
               </a:ext>
             </a:extLst>
           </p:cNvPr>
@@ -12723,7 +12877,7 @@
           <p:cNvPr id="10" name="antes de consentir (16,67%)">
             <a:extLst xmlns:a="http://schemas.openxmlformats.org/drawingml/2006/main">
               <a:ext uri="{FF2B5EF4-FFF2-40B4-BE49-F238E27FC236}">
-                <a16:creationId xmlns:a16="http://schemas.microsoft.com/office/drawing/2014/main" id="{FB8F73ED-8881-4EAA-A08B-D4579C5E9DB5}"/>
+                <a16:creationId xmlns:a16="http://schemas.microsoft.com/office/drawing/2014/main" id="{A37B9527-159F-44D5-AEC7-7B618210A534}"/>
               </a:ext>
             </a:extLst>
           </p:cNvPr>
@@ -12780,7 +12934,7 @@
           <p:cNvPr id="11" name="1.084">
             <a:extLst xmlns:a="http://schemas.openxmlformats.org/drawingml/2006/main">
               <a:ext uri="{FF2B5EF4-FFF2-40B4-BE49-F238E27FC236}">
-                <a16:creationId xmlns:a16="http://schemas.microsoft.com/office/drawing/2014/main" id="{6B23BFD6-88B0-4720-A8F4-CC2B36EAEAB6}"/>
+                <a16:creationId xmlns:a16="http://schemas.microsoft.com/office/drawing/2014/main" id="{AB7DF3C1-4459-48B1-94E4-6A05335270CC}"/>
               </a:ext>
             </a:extLst>
           </p:cNvPr>
@@ -12837,7 +12991,7 @@
           <p:cNvPr id="12" name="sem opt-out (8,28%)">
             <a:extLst xmlns:a="http://schemas.openxmlformats.org/drawingml/2006/main">
               <a:ext uri="{FF2B5EF4-FFF2-40B4-BE49-F238E27FC236}">
-                <a16:creationId xmlns:a16="http://schemas.microsoft.com/office/drawing/2014/main" id="{0D10DA60-0A4A-4BD7-9F04-3B134890D10F}"/>
+                <a16:creationId xmlns:a16="http://schemas.microsoft.com/office/drawing/2014/main" id="{A296D315-2967-452F-B659-67063F09DDE1}"/>
               </a:ext>
             </a:extLst>
           </p:cNvPr>
@@ -12894,7 +13048,7 @@
           <p:cNvPr id="13" name="134">
             <a:extLst xmlns:a="http://schemas.openxmlformats.org/drawingml/2006/main">
               <a:ext uri="{FF2B5EF4-FFF2-40B4-BE49-F238E27FC236}">
-                <a16:creationId xmlns:a16="http://schemas.microsoft.com/office/drawing/2014/main" id="{9165FBAC-ECD1-442D-B68A-585A474402A7}"/>
+                <a16:creationId xmlns:a16="http://schemas.microsoft.com/office/drawing/2014/main" id="{43133AE6-4C96-469C-B10D-C21266B02A90}"/>
               </a:ext>
             </a:extLst>
           </p:cNvPr>
@@ -12951,7 +13105,7 @@
           <p:cNvPr id="14" name="enviam após a recusa">
             <a:extLst xmlns:a="http://schemas.openxmlformats.org/drawingml/2006/main">
               <a:ext uri="{FF2B5EF4-FFF2-40B4-BE49-F238E27FC236}">
-                <a16:creationId xmlns:a16="http://schemas.microsoft.com/office/drawing/2014/main" id="{06E5798B-E5B3-4ECF-895B-89E275378110}"/>
+                <a16:creationId xmlns:a16="http://schemas.microsoft.com/office/drawing/2014/main" id="{8B258161-016F-4147-A3DE-709E9A4966DF}"/>
               </a:ext>
             </a:extLst>
           </p:cNvPr>
@@ -13008,7 +13162,7 @@
           <p:cNvPr id="15" name="Categorias sobrepostas. Tabela: % de cad">
             <a:extLst xmlns:a="http://schemas.openxmlformats.org/drawingml/2006/main">
               <a:ext uri="{FF2B5EF4-FFF2-40B4-BE49-F238E27FC236}">
-                <a16:creationId xmlns:a16="http://schemas.microsoft.com/office/drawing/2014/main" id="{7D75F9B9-1E1F-470E-AB31-DA505AA04E9D}"/>
+                <a16:creationId xmlns:a16="http://schemas.microsoft.com/office/drawing/2014/main" id="{F419C9D0-BBA5-4AAB-AB76-EA28F515D46E}"/>
               </a:ext>
             </a:extLst>
           </p:cNvPr>
@@ -13060,10 +13214,32 @@
           </a:p>
         </p:txBody>
       </p:sp>
+      <p:pic>
+        <p:nvPicPr>
+          <p:cNvPr id="32" name=""/>
+          <p:cNvPicPr>
+            <a:picLocks xmlns:a="http://schemas.openxmlformats.org/drawingml/2006/main" noChangeAspect="1"/>
+          </p:cNvPicPr>
+          <p:nvPr/>
+        </p:nvPicPr>
+        <p:blipFill>
+          <a:blip xmlns:r="http://schemas.openxmlformats.org/officeDocument/2006/relationships" xmlns:a="http://schemas.openxmlformats.org/drawingml/2006/main" r:embed="Rb46456e923344ecd"/>
+          <a:stretch xmlns:a="http://schemas.openxmlformats.org/drawingml/2006/main"/>
+        </p:blipFill>
+        <p:spPr>
+          <a:xfrm xmlns:a="http://schemas.openxmlformats.org/drawingml/2006/main">
+            <a:off x="10829925" y="3830"/>
+            <a:ext cx="952500" cy="944839"/>
+          </a:xfrm>
+          <a:prstGeom xmlns:a="http://schemas.openxmlformats.org/drawingml/2006/main" prst="rect">
+            <a:avLst/>
+          </a:prstGeom>
+        </p:spPr>
+      </p:pic>
     </p:spTree>
     <p:extLst>
       <p:ext uri="{BB962C8B-B14F-4D97-AF65-F5344CB8AC3E}">
-        <p14:creationId xmlns:p14="http://schemas.microsoft.com/office/powerpoint/2010/main" val="115839935"/>
+        <p14:creationId xmlns:p14="http://schemas.microsoft.com/office/powerpoint/2010/main" val="563544965"/>
       </p:ext>
     </p:extLst>
   </p:cSld>
@@ -13091,10 +13267,10 @@
       </p:grpSpPr>
       <p:sp>
         <p:nvSpPr>
-          <p:cNvPr id="16" name="">
-            <a:extLst xmlns:a="http://schemas.openxmlformats.org/drawingml/2006/main">
-              <a:ext uri="{FF2B5EF4-FFF2-40B4-BE49-F238E27FC236}">
-                <a16:creationId xmlns:a16="http://schemas.microsoft.com/office/drawing/2014/main" id="{79043D2C-DF4D-44BB-B371-1E551B7F1EAE}"/>
+          <p:cNvPr id="17" name="">
+            <a:extLst xmlns:a="http://schemas.openxmlformats.org/drawingml/2006/main">
+              <a:ext uri="{FF2B5EF4-FFF2-40B4-BE49-F238E27FC236}">
+                <a16:creationId xmlns:a16="http://schemas.microsoft.com/office/drawing/2014/main" id="{BA064A4E-4BEB-409F-8DC1-CF4163C1B66B}"/>
               </a:ext>
             </a:extLst>
           </p:cNvPr>
@@ -13124,7 +13300,7 @@
           <p:cNvPr id="2" name="RESULTADOS: EVIDÊNCIAS PARA A PERGUNTA 2">
             <a:extLst xmlns:a="http://schemas.openxmlformats.org/drawingml/2006/main">
               <a:ext uri="{FF2B5EF4-FFF2-40B4-BE49-F238E27FC236}">
-                <a16:creationId xmlns:a16="http://schemas.microsoft.com/office/drawing/2014/main" id="{FD6235C3-3B10-4AC9-9B10-2344D3126FAB}"/>
+                <a16:creationId xmlns:a16="http://schemas.microsoft.com/office/drawing/2014/main" id="{90530F01-BFCD-44C2-BE51-F65F4673A3F3}"/>
               </a:ext>
             </a:extLst>
           </p:cNvPr>
@@ -13181,7 +13357,7 @@
           <p:cNvPr id="3" name="Envio sem aviso: destinos e tipo de dado">
             <a:extLst xmlns:a="http://schemas.openxmlformats.org/drawingml/2006/main">
               <a:ext uri="{FF2B5EF4-FFF2-40B4-BE49-F238E27FC236}">
-                <a16:creationId xmlns:a16="http://schemas.microsoft.com/office/drawing/2014/main" id="{44B1E6B6-42E5-49D0-914C-862A652C0895}"/>
+                <a16:creationId xmlns:a16="http://schemas.microsoft.com/office/drawing/2014/main" id="{55A292DA-9A24-481B-9BF3-99AB67EAD046}"/>
               </a:ext>
             </a:extLst>
           </p:cNvPr>
@@ -13238,7 +13414,7 @@
           <p:cNvPr id="4" name="">
             <a:extLst xmlns:a="http://schemas.openxmlformats.org/drawingml/2006/main">
               <a:ext uri="{FF2B5EF4-FFF2-40B4-BE49-F238E27FC236}">
-                <a16:creationId xmlns:a16="http://schemas.microsoft.com/office/drawing/2014/main" id="{4A53BEAF-6932-48C6-ADD3-C5FD6F99627A}"/>
+                <a16:creationId xmlns:a16="http://schemas.microsoft.com/office/drawing/2014/main" id="{E54B7DE8-1884-4D24-B0C7-5DD5D399C75B}"/>
               </a:ext>
             </a:extLst>
           </p:cNvPr>
@@ -13268,7 +13444,7 @@
           <p:cNvPr id="5" name="">
             <a:extLst xmlns:a="http://schemas.openxmlformats.org/drawingml/2006/main">
               <a:ext uri="{FF2B5EF4-FFF2-40B4-BE49-F238E27FC236}">
-                <a16:creationId xmlns:a16="http://schemas.microsoft.com/office/drawing/2014/main" id="{2001B17A-A9F0-49B1-B35A-8EBD6C6549AB}"/>
+                <a16:creationId xmlns:a16="http://schemas.microsoft.com/office/drawing/2014/main" id="{76415FB3-404E-419D-AB16-53A442C24397}"/>
               </a:ext>
             </a:extLst>
           </p:cNvPr>
@@ -13298,7 +13474,7 @@
           <p:cNvPr id="6" name="Nguyen, Backes e Stock (2022), Figura 5,">
             <a:extLst xmlns:a="http://schemas.openxmlformats.org/drawingml/2006/main">
               <a:ext uri="{FF2B5EF4-FFF2-40B4-BE49-F238E27FC236}">
-                <a16:creationId xmlns:a16="http://schemas.microsoft.com/office/drawing/2014/main" id="{AD74BCFC-92EC-4FE3-B80E-8DFE32B6189F}"/>
+                <a16:creationId xmlns:a16="http://schemas.microsoft.com/office/drawing/2014/main" id="{A51FBEB2-E408-4E9B-9464-0EEB4EC7CCF4}"/>
               </a:ext>
             </a:extLst>
           </p:cNvPr>
@@ -13355,7 +13531,7 @@
           <p:cNvPr id="7" name="17 / 23">
             <a:extLst xmlns:a="http://schemas.openxmlformats.org/drawingml/2006/main">
               <a:ext uri="{FF2B5EF4-FFF2-40B4-BE49-F238E27FC236}">
-                <a16:creationId xmlns:a16="http://schemas.microsoft.com/office/drawing/2014/main" id="{9DBD9892-B2DE-46F9-A5C2-EEE5D42431A4}"/>
+                <a16:creationId xmlns:a16="http://schemas.microsoft.com/office/drawing/2014/main" id="{6F88A919-D73C-44F6-88F0-E8EB99543466}"/>
               </a:ext>
             </a:extLst>
           </p:cNvPr>
@@ -13409,14 +13585,14 @@
       </p:sp>
       <p:pic>
         <p:nvPicPr>
-          <p:cNvPr id="23" name=""/>
+          <p:cNvPr id="24" name=""/>
           <p:cNvPicPr>
             <a:picLocks xmlns:a="http://schemas.openxmlformats.org/drawingml/2006/main" noChangeAspect="1"/>
           </p:cNvPicPr>
           <p:nvPr/>
         </p:nvPicPr>
         <p:blipFill>
-          <a:blip xmlns:r="http://schemas.openxmlformats.org/officeDocument/2006/relationships" xmlns:a="http://schemas.openxmlformats.org/drawingml/2006/main" r:embed="Re7fd406c784c4c15"/>
+          <a:blip xmlns:r="http://schemas.openxmlformats.org/officeDocument/2006/relationships" xmlns:a="http://schemas.openxmlformats.org/drawingml/2006/main" r:embed="R565d2068a6644422"/>
           <a:stretch xmlns:a="http://schemas.openxmlformats.org/drawingml/2006/main"/>
         </p:blipFill>
         <p:spPr>
@@ -13434,7 +13610,7 @@
           <p:cNvPr id="9" name="Figura 5 do artigo: dez domínios publici">
             <a:extLst xmlns:a="http://schemas.openxmlformats.org/drawingml/2006/main">
               <a:ext uri="{FF2B5EF4-FFF2-40B4-BE49-F238E27FC236}">
-                <a16:creationId xmlns:a16="http://schemas.microsoft.com/office/drawing/2014/main" id="{476BE210-F05E-4A33-BE6A-4FED1FC86D33}"/>
+                <a16:creationId xmlns:a16="http://schemas.microsoft.com/office/drawing/2014/main" id="{31A4219C-A1AF-4BA0-95C7-8460ADEF7492}"/>
               </a:ext>
             </a:extLst>
           </p:cNvPr>
@@ -13514,7 +13690,7 @@
           <p:cNvPr id="10" name="">
             <a:extLst xmlns:a="http://schemas.openxmlformats.org/drawingml/2006/main">
               <a:ext uri="{FF2B5EF4-FFF2-40B4-BE49-F238E27FC236}">
-                <a16:creationId xmlns:a16="http://schemas.microsoft.com/office/drawing/2014/main" id="{90EECC60-7C73-4273-A0A7-65485A52D4FD}"/>
+                <a16:creationId xmlns:a16="http://schemas.microsoft.com/office/drawing/2014/main" id="{00E9A6E5-05B2-48AF-8959-602E0B89C335}"/>
               </a:ext>
             </a:extLst>
           </p:cNvPr>
@@ -13544,7 +13720,7 @@
           <p:cNvPr id="11" name="14.420">
             <a:extLst xmlns:a="http://schemas.openxmlformats.org/drawingml/2006/main">
               <a:ext uri="{FF2B5EF4-FFF2-40B4-BE49-F238E27FC236}">
-                <a16:creationId xmlns:a16="http://schemas.microsoft.com/office/drawing/2014/main" id="{61F5D775-A077-4153-A02D-D95ECA9CD34E}"/>
+                <a16:creationId xmlns:a16="http://schemas.microsoft.com/office/drawing/2014/main" id="{D82C8A7B-687A-429E-BB44-83089526EC0E}"/>
               </a:ext>
             </a:extLst>
           </p:cNvPr>
@@ -13601,7 +13777,7 @@
           <p:cNvPr id="12" name="apps enviaram dados&#10;para facebook.com&#10;(4">
             <a:extLst xmlns:a="http://schemas.openxmlformats.org/drawingml/2006/main">
               <a:ext uri="{FF2B5EF4-FFF2-40B4-BE49-F238E27FC236}">
-                <a16:creationId xmlns:a16="http://schemas.microsoft.com/office/drawing/2014/main" id="{195F180F-D045-4B59-91E0-8F89011B0985}"/>
+                <a16:creationId xmlns:a16="http://schemas.microsoft.com/office/drawing/2014/main" id="{66017683-BD04-41A5-8424-A063456CE521}"/>
               </a:ext>
             </a:extLst>
           </p:cNvPr>
@@ -13704,7 +13880,7 @@
           <p:cNvPr id="13" name="">
             <a:extLst xmlns:a="http://schemas.openxmlformats.org/drawingml/2006/main">
               <a:ext uri="{FF2B5EF4-FFF2-40B4-BE49-F238E27FC236}">
-                <a16:creationId xmlns:a16="http://schemas.microsoft.com/office/drawing/2014/main" id="{029AC74E-72C8-48F9-B83C-D99E2A1E3D94}"/>
+                <a16:creationId xmlns:a16="http://schemas.microsoft.com/office/drawing/2014/main" id="{827BC5B1-E7BB-4557-BA96-A417A01B7BB9}"/>
               </a:ext>
             </a:extLst>
           </p:cNvPr>
@@ -13734,7 +13910,7 @@
           <p:cNvPr id="14" name="29.952">
             <a:extLst xmlns:a="http://schemas.openxmlformats.org/drawingml/2006/main">
               <a:ext uri="{FF2B5EF4-FFF2-40B4-BE49-F238E27FC236}">
-                <a16:creationId xmlns:a16="http://schemas.microsoft.com/office/drawing/2014/main" id="{EA2308F9-1D13-49D8-A44B-AEAFEDFE7D26}"/>
+                <a16:creationId xmlns:a16="http://schemas.microsoft.com/office/drawing/2014/main" id="{F311079F-12A6-4444-BC23-0DD0DB40B4FF}"/>
               </a:ext>
             </a:extLst>
           </p:cNvPr>
@@ -13791,7 +13967,7 @@
           <p:cNvPr id="15" name="enviaram o identificador&#10;publicitário do">
             <a:extLst xmlns:a="http://schemas.openxmlformats.org/drawingml/2006/main">
               <a:ext uri="{FF2B5EF4-FFF2-40B4-BE49-F238E27FC236}">
-                <a16:creationId xmlns:a16="http://schemas.microsoft.com/office/drawing/2014/main" id="{874B5C5A-0E91-485A-A7D7-3FD93F73B134}"/>
+                <a16:creationId xmlns:a16="http://schemas.microsoft.com/office/drawing/2014/main" id="{6E3C05D9-4B63-4D83-8721-FDE09061F7F0}"/>
               </a:ext>
             </a:extLst>
           </p:cNvPr>
@@ -13912,10 +14088,32 @@
           </a:p>
         </p:txBody>
       </p:sp>
+      <p:pic>
+        <p:nvPicPr>
+          <p:cNvPr id="32" name=""/>
+          <p:cNvPicPr>
+            <a:picLocks xmlns:a="http://schemas.openxmlformats.org/drawingml/2006/main" noChangeAspect="1"/>
+          </p:cNvPicPr>
+          <p:nvPr/>
+        </p:nvPicPr>
+        <p:blipFill>
+          <a:blip xmlns:r="http://schemas.openxmlformats.org/officeDocument/2006/relationships" xmlns:a="http://schemas.openxmlformats.org/drawingml/2006/main" r:embed="R7daf37876a114d54"/>
+          <a:stretch xmlns:a="http://schemas.openxmlformats.org/drawingml/2006/main"/>
+        </p:blipFill>
+        <p:spPr>
+          <a:xfrm xmlns:a="http://schemas.openxmlformats.org/drawingml/2006/main">
+            <a:off x="10829925" y="3830"/>
+            <a:ext cx="952500" cy="944839"/>
+          </a:xfrm>
+          <a:prstGeom xmlns:a="http://schemas.openxmlformats.org/drawingml/2006/main" prst="rect">
+            <a:avLst/>
+          </a:prstGeom>
+        </p:spPr>
+      </p:pic>
     </p:spTree>
     <p:extLst>
       <p:ext uri="{BB962C8B-B14F-4D97-AF65-F5344CB8AC3E}">
-        <p14:creationId xmlns:p14="http://schemas.microsoft.com/office/powerpoint/2010/main" val="275387639"/>
+        <p14:creationId xmlns:p14="http://schemas.microsoft.com/office/powerpoint/2010/main" val="973744402"/>
       </p:ext>
     </p:extLst>
   </p:cSld>
@@ -13943,10 +14141,10 @@
       </p:grpSpPr>
       <p:sp>
         <p:nvSpPr>
-          <p:cNvPr id="25" name="">
-            <a:extLst xmlns:a="http://schemas.openxmlformats.org/drawingml/2006/main">
-              <a:ext uri="{FF2B5EF4-FFF2-40B4-BE49-F238E27FC236}">
-                <a16:creationId xmlns:a16="http://schemas.microsoft.com/office/drawing/2014/main" id="{99100D02-73C3-4C43-B41E-454E8D9C8370}"/>
+          <p:cNvPr id="26" name="">
+            <a:extLst xmlns:a="http://schemas.openxmlformats.org/drawingml/2006/main">
+              <a:ext uri="{FF2B5EF4-FFF2-40B4-BE49-F238E27FC236}">
+                <a16:creationId xmlns:a16="http://schemas.microsoft.com/office/drawing/2014/main" id="{1462E8BA-1942-4EF7-95B4-71E4C4F74C7C}"/>
               </a:ext>
             </a:extLst>
           </p:cNvPr>
@@ -13976,7 +14174,7 @@
           <p:cNvPr id="2" name="SEÇÃO 5: RESPOSTA À PERGUNTA 3">
             <a:extLst xmlns:a="http://schemas.openxmlformats.org/drawingml/2006/main">
               <a:ext uri="{FF2B5EF4-FFF2-40B4-BE49-F238E27FC236}">
-                <a16:creationId xmlns:a16="http://schemas.microsoft.com/office/drawing/2014/main" id="{94DF40E1-2CEB-4C90-A5D4-0D5F084690D9}"/>
+                <a16:creationId xmlns:a16="http://schemas.microsoft.com/office/drawing/2014/main" id="{7D9A25DE-88CD-4431-9420-D4CDD5318AD0}"/>
               </a:ext>
             </a:extLst>
           </p:cNvPr>
@@ -14033,7 +14231,7 @@
           <p:cNvPr id="3" name="Notificação: respostas e mudanças observ">
             <a:extLst xmlns:a="http://schemas.openxmlformats.org/drawingml/2006/main">
               <a:ext uri="{FF2B5EF4-FFF2-40B4-BE49-F238E27FC236}">
-                <a16:creationId xmlns:a16="http://schemas.microsoft.com/office/drawing/2014/main" id="{F2333F80-D491-49D2-9FE5-57DE9FA2D7D1}"/>
+                <a16:creationId xmlns:a16="http://schemas.microsoft.com/office/drawing/2014/main" id="{AA7090D5-D1BC-406D-BC9A-8DB93D04C17D}"/>
               </a:ext>
             </a:extLst>
           </p:cNvPr>
@@ -14090,7 +14288,7 @@
           <p:cNvPr id="4" name="">
             <a:extLst xmlns:a="http://schemas.openxmlformats.org/drawingml/2006/main">
               <a:ext uri="{FF2B5EF4-FFF2-40B4-BE49-F238E27FC236}">
-                <a16:creationId xmlns:a16="http://schemas.microsoft.com/office/drawing/2014/main" id="{61712B08-59CD-425B-9496-FAE9C15A4445}"/>
+                <a16:creationId xmlns:a16="http://schemas.microsoft.com/office/drawing/2014/main" id="{9744DB10-5DF2-4DC2-8443-23E97A6F6374}"/>
               </a:ext>
             </a:extLst>
           </p:cNvPr>
@@ -14120,7 +14318,7 @@
           <p:cNvPr id="5" name="">
             <a:extLst xmlns:a="http://schemas.openxmlformats.org/drawingml/2006/main">
               <a:ext uri="{FF2B5EF4-FFF2-40B4-BE49-F238E27FC236}">
-                <a16:creationId xmlns:a16="http://schemas.microsoft.com/office/drawing/2014/main" id="{D71CF591-C376-467A-A217-B5211CB6A50C}"/>
+                <a16:creationId xmlns:a16="http://schemas.microsoft.com/office/drawing/2014/main" id="{4F67E475-EFCF-43CB-A3E7-2D3E4A7072A4}"/>
               </a:ext>
             </a:extLst>
           </p:cNvPr>
@@ -14150,7 +14348,7 @@
           <p:cNvPr id="6" name="Nguyen, Backes e Stock (2022), Seção 5, ">
             <a:extLst xmlns:a="http://schemas.openxmlformats.org/drawingml/2006/main">
               <a:ext uri="{FF2B5EF4-FFF2-40B4-BE49-F238E27FC236}">
-                <a16:creationId xmlns:a16="http://schemas.microsoft.com/office/drawing/2014/main" id="{23C8BC37-6079-420B-9F7E-7C34CF0CB192}"/>
+                <a16:creationId xmlns:a16="http://schemas.microsoft.com/office/drawing/2014/main" id="{A6CA5679-4822-4E1C-8EC4-4025715F7C13}"/>
               </a:ext>
             </a:extLst>
           </p:cNvPr>
@@ -14207,7 +14405,7 @@
           <p:cNvPr id="7" name="18 / 23">
             <a:extLst xmlns:a="http://schemas.openxmlformats.org/drawingml/2006/main">
               <a:ext uri="{FF2B5EF4-FFF2-40B4-BE49-F238E27FC236}">
-                <a16:creationId xmlns:a16="http://schemas.microsoft.com/office/drawing/2014/main" id="{2A108D72-3427-4DF0-B04E-747E364CB43E}"/>
+                <a16:creationId xmlns:a16="http://schemas.microsoft.com/office/drawing/2014/main" id="{1D84B2F5-D461-4AC6-A090-8E74F5CEA3DD}"/>
               </a:ext>
             </a:extLst>
           </p:cNvPr>
@@ -14264,7 +14462,7 @@
           <p:cNvPr id="8" name="1.127">
             <a:extLst xmlns:a="http://schemas.openxmlformats.org/drawingml/2006/main">
               <a:ext uri="{FF2B5EF4-FFF2-40B4-BE49-F238E27FC236}">
-                <a16:creationId xmlns:a16="http://schemas.microsoft.com/office/drawing/2014/main" id="{9ABB5690-8C2E-465E-A693-523762B9F8F7}"/>
+                <a16:creationId xmlns:a16="http://schemas.microsoft.com/office/drawing/2014/main" id="{CF92EDA1-3581-4BC6-B347-55BA0A4CE9DA}"/>
               </a:ext>
             </a:extLst>
           </p:cNvPr>
@@ -14321,7 +14519,7 @@
           <p:cNvPr id="9" name="desenvolvedores notificados">
             <a:extLst xmlns:a="http://schemas.openxmlformats.org/drawingml/2006/main">
               <a:ext uri="{FF2B5EF4-FFF2-40B4-BE49-F238E27FC236}">
-                <a16:creationId xmlns:a16="http://schemas.microsoft.com/office/drawing/2014/main" id="{43FFAB82-AA4C-4EB3-9CCB-5A4BB5B26C3D}"/>
+                <a16:creationId xmlns:a16="http://schemas.microsoft.com/office/drawing/2014/main" id="{B07F7038-5E88-446E-A9C9-18D537602F4A}"/>
               </a:ext>
             </a:extLst>
           </p:cNvPr>
@@ -14378,7 +14576,7 @@
           <p:cNvPr id="10" name="1.859">
             <a:extLst xmlns:a="http://schemas.openxmlformats.org/drawingml/2006/main">
               <a:ext uri="{FF2B5EF4-FFF2-40B4-BE49-F238E27FC236}">
-                <a16:creationId xmlns:a16="http://schemas.microsoft.com/office/drawing/2014/main" id="{C2D37600-4F7B-4454-B7A7-32589ED95C78}"/>
+                <a16:creationId xmlns:a16="http://schemas.microsoft.com/office/drawing/2014/main" id="{7A34CBBA-1B96-47BB-BD3C-D0E0F5F3DE22}"/>
               </a:ext>
             </a:extLst>
           </p:cNvPr>
@@ -14435,7 +14633,7 @@
           <p:cNvPr id="11" name="aplicativos abrangidos">
             <a:extLst xmlns:a="http://schemas.openxmlformats.org/drawingml/2006/main">
               <a:ext uri="{FF2B5EF4-FFF2-40B4-BE49-F238E27FC236}">
-                <a16:creationId xmlns:a16="http://schemas.microsoft.com/office/drawing/2014/main" id="{F8CDA88C-7D89-4DF1-809B-293F2CEED2E5}"/>
+                <a16:creationId xmlns:a16="http://schemas.microsoft.com/office/drawing/2014/main" id="{1195D29C-417E-440A-B9E7-4BA187A5D02E}"/>
               </a:ext>
             </a:extLst>
           </p:cNvPr>
@@ -14492,7 +14690,7 @@
           <p:cNvPr id="12" name="43">
             <a:extLst xmlns:a="http://schemas.openxmlformats.org/drawingml/2006/main">
               <a:ext uri="{FF2B5EF4-FFF2-40B4-BE49-F238E27FC236}">
-                <a16:creationId xmlns:a16="http://schemas.microsoft.com/office/drawing/2014/main" id="{A8D76446-E66A-4116-A5D3-2FCAB99A5A2C}"/>
+                <a16:creationId xmlns:a16="http://schemas.microsoft.com/office/drawing/2014/main" id="{F104BE1E-B94E-474A-8343-88E8129B4F24}"/>
               </a:ext>
             </a:extLst>
           </p:cNvPr>
@@ -14549,7 +14747,7 @@
           <p:cNvPr id="13" name="desenvolvedores responderam">
             <a:extLst xmlns:a="http://schemas.openxmlformats.org/drawingml/2006/main">
               <a:ext uri="{FF2B5EF4-FFF2-40B4-BE49-F238E27FC236}">
-                <a16:creationId xmlns:a16="http://schemas.microsoft.com/office/drawing/2014/main" id="{65C924DE-189A-463A-B06A-8A80D3755ADB}"/>
+                <a16:creationId xmlns:a16="http://schemas.microsoft.com/office/drawing/2014/main" id="{D8DA4BB1-620E-499A-B11D-EE87B96B5D8F}"/>
               </a:ext>
             </a:extLst>
           </p:cNvPr>
@@ -14606,7 +14804,7 @@
           <p:cNvPr id="14" name="">
             <a:extLst xmlns:a="http://schemas.openxmlformats.org/drawingml/2006/main">
               <a:ext uri="{FF2B5EF4-FFF2-40B4-BE49-F238E27FC236}">
-                <a16:creationId xmlns:a16="http://schemas.microsoft.com/office/drawing/2014/main" id="{2235295A-9906-4830-8783-84D33B34CC33}"/>
+                <a16:creationId xmlns:a16="http://schemas.microsoft.com/office/drawing/2014/main" id="{40F9BD53-6EB5-47E8-AB76-A4817207AEE1}"/>
               </a:ext>
             </a:extLst>
           </p:cNvPr>
@@ -14636,7 +14834,7 @@
           <p:cNvPr id="15" name="9/14">
             <a:extLst xmlns:a="http://schemas.openxmlformats.org/drawingml/2006/main">
               <a:ext uri="{FF2B5EF4-FFF2-40B4-BE49-F238E27FC236}">
-                <a16:creationId xmlns:a16="http://schemas.microsoft.com/office/drawing/2014/main" id="{155BAFB3-40FC-47C0-8EAB-4A3A7398D9CA}"/>
+                <a16:creationId xmlns:a16="http://schemas.microsoft.com/office/drawing/2014/main" id="{BBFE3BA2-0EBB-4459-B7CA-A22DDCCBE208}"/>
               </a:ext>
             </a:extLst>
           </p:cNvPr>
@@ -14693,7 +14891,7 @@
           <p:cNvPr id="16" name="não conheciam os tipos de dado coletados">
             <a:extLst xmlns:a="http://schemas.openxmlformats.org/drawingml/2006/main">
               <a:ext uri="{FF2B5EF4-FFF2-40B4-BE49-F238E27FC236}">
-                <a16:creationId xmlns:a16="http://schemas.microsoft.com/office/drawing/2014/main" id="{C1136908-0810-4126-8EC1-8C1E6579CAD4}"/>
+                <a16:creationId xmlns:a16="http://schemas.microsoft.com/office/drawing/2014/main" id="{259D5593-EF75-4B90-BACF-F11A2D2CF573}"/>
               </a:ext>
             </a:extLst>
           </p:cNvPr>
@@ -14750,7 +14948,7 @@
           <p:cNvPr id="17" name="9/13">
             <a:extLst xmlns:a="http://schemas.openxmlformats.org/drawingml/2006/main">
               <a:ext uri="{FF2B5EF4-FFF2-40B4-BE49-F238E27FC236}">
-                <a16:creationId xmlns:a16="http://schemas.microsoft.com/office/drawing/2014/main" id="{50B0B6DC-B4F0-424A-B871-D9D954BC001C}"/>
+                <a16:creationId xmlns:a16="http://schemas.microsoft.com/office/drawing/2014/main" id="{30464A13-152C-400A-9E5C-0A1879DF9C74}"/>
               </a:ext>
             </a:extLst>
           </p:cNvPr>
@@ -14807,7 +15005,7 @@
           <p:cNvPr id="18" name="declararam conhecer os requisitos de con">
             <a:extLst xmlns:a="http://schemas.openxmlformats.org/drawingml/2006/main">
               <a:ext uri="{FF2B5EF4-FFF2-40B4-BE49-F238E27FC236}">
-                <a16:creationId xmlns:a16="http://schemas.microsoft.com/office/drawing/2014/main" id="{BB8C9CC3-CD0A-435D-A83F-76DB56D9CA2B}"/>
+                <a16:creationId xmlns:a16="http://schemas.microsoft.com/office/drawing/2014/main" id="{52B7FFEC-D266-4F37-A554-518AF47D1544}"/>
               </a:ext>
             </a:extLst>
           </p:cNvPr>
@@ -14864,7 +15062,7 @@
           <p:cNvPr id="19" name="6/7">
             <a:extLst xmlns:a="http://schemas.openxmlformats.org/drawingml/2006/main">
               <a:ext uri="{FF2B5EF4-FFF2-40B4-BE49-F238E27FC236}">
-                <a16:creationId xmlns:a16="http://schemas.microsoft.com/office/drawing/2014/main" id="{8285CC02-3699-4BB1-8E03-6D33D4B433DA}"/>
+                <a16:creationId xmlns:a16="http://schemas.microsoft.com/office/drawing/2014/main" id="{9144CA35-9398-405D-AB25-D0A5B86280F9}"/>
               </a:ext>
             </a:extLst>
           </p:cNvPr>
@@ -14921,7 +15119,7 @@
           <p:cNvPr id="20" name="queriam uma ferramenta automatizada de a">
             <a:extLst xmlns:a="http://schemas.openxmlformats.org/drawingml/2006/main">
               <a:ext uri="{FF2B5EF4-FFF2-40B4-BE49-F238E27FC236}">
-                <a16:creationId xmlns:a16="http://schemas.microsoft.com/office/drawing/2014/main" id="{09A7C9D4-49B4-42DA-B856-1EC50593FBEF}"/>
+                <a16:creationId xmlns:a16="http://schemas.microsoft.com/office/drawing/2014/main" id="{915EF01D-E6CA-412F-A04B-2E544C3C1020}"/>
               </a:ext>
             </a:extLst>
           </p:cNvPr>
@@ -14978,7 +15176,7 @@
           <p:cNvPr id="21" name="">
             <a:extLst xmlns:a="http://schemas.openxmlformats.org/drawingml/2006/main">
               <a:ext uri="{FF2B5EF4-FFF2-40B4-BE49-F238E27FC236}">
-                <a16:creationId xmlns:a16="http://schemas.microsoft.com/office/drawing/2014/main" id="{6A630AC0-145D-41D3-B105-00C2A1B4600E}"/>
+                <a16:creationId xmlns:a16="http://schemas.microsoft.com/office/drawing/2014/main" id="{2E03DD8B-99E1-45FC-9039-00832E3008FB}"/>
               </a:ext>
             </a:extLst>
           </p:cNvPr>
@@ -15008,7 +15206,7 @@
           <p:cNvPr id="22" name="147 apps atualizados">
             <a:extLst xmlns:a="http://schemas.openxmlformats.org/drawingml/2006/main">
               <a:ext uri="{FF2B5EF4-FFF2-40B4-BE49-F238E27FC236}">
-                <a16:creationId xmlns:a16="http://schemas.microsoft.com/office/drawing/2014/main" id="{2F44A21F-9202-4E4B-A068-51CCD7D8D254}"/>
+                <a16:creationId xmlns:a16="http://schemas.microsoft.com/office/drawing/2014/main" id="{E0A5B990-B807-4BB1-BB2C-9DB1C8794E7C}"/>
               </a:ext>
             </a:extLst>
           </p:cNvPr>
@@ -15065,7 +15263,7 @@
           <p:cNvPr id="23" name="63 corrigiram os problemas">
             <a:extLst xmlns:a="http://schemas.openxmlformats.org/drawingml/2006/main">
               <a:ext uri="{FF2B5EF4-FFF2-40B4-BE49-F238E27FC236}">
-                <a16:creationId xmlns:a16="http://schemas.microsoft.com/office/drawing/2014/main" id="{D80CDE03-47D0-4406-B622-01D6D6266662}"/>
+                <a16:creationId xmlns:a16="http://schemas.microsoft.com/office/drawing/2014/main" id="{24CD7281-6E4A-4750-BF13-F311B9F10CC8}"/>
               </a:ext>
             </a:extLst>
           </p:cNvPr>
@@ -15122,7 +15320,7 @@
           <p:cNvPr id="24" name="84 com potencial violação">
             <a:extLst xmlns:a="http://schemas.openxmlformats.org/drawingml/2006/main">
               <a:ext uri="{FF2B5EF4-FFF2-40B4-BE49-F238E27FC236}">
-                <a16:creationId xmlns:a16="http://schemas.microsoft.com/office/drawing/2014/main" id="{330BAC67-057C-4681-A475-B6E58F3BF71A}"/>
+                <a16:creationId xmlns:a16="http://schemas.microsoft.com/office/drawing/2014/main" id="{028638CB-B235-49EB-8395-0FA5FA5B1908}"/>
               </a:ext>
             </a:extLst>
           </p:cNvPr>
@@ -15174,10 +15372,32 @@
           </a:p>
         </p:txBody>
       </p:sp>
+      <p:pic>
+        <p:nvPicPr>
+          <p:cNvPr id="50" name=""/>
+          <p:cNvPicPr>
+            <a:picLocks xmlns:a="http://schemas.openxmlformats.org/drawingml/2006/main" noChangeAspect="1"/>
+          </p:cNvPicPr>
+          <p:nvPr/>
+        </p:nvPicPr>
+        <p:blipFill>
+          <a:blip xmlns:r="http://schemas.openxmlformats.org/officeDocument/2006/relationships" xmlns:a="http://schemas.openxmlformats.org/drawingml/2006/main" r:embed="R9d074bfab3824992"/>
+          <a:stretch xmlns:a="http://schemas.openxmlformats.org/drawingml/2006/main"/>
+        </p:blipFill>
+        <p:spPr>
+          <a:xfrm xmlns:a="http://schemas.openxmlformats.org/drawingml/2006/main">
+            <a:off x="10829925" y="3830"/>
+            <a:ext cx="952500" cy="944839"/>
+          </a:xfrm>
+          <a:prstGeom xmlns:a="http://schemas.openxmlformats.org/drawingml/2006/main" prst="rect">
+            <a:avLst/>
+          </a:prstGeom>
+        </p:spPr>
+      </p:pic>
     </p:spTree>
     <p:extLst>
       <p:ext uri="{BB962C8B-B14F-4D97-AF65-F5344CB8AC3E}">
-        <p14:creationId xmlns:p14="http://schemas.microsoft.com/office/powerpoint/2010/main" val="191557179"/>
+        <p14:creationId xmlns:p14="http://schemas.microsoft.com/office/powerpoint/2010/main" val="444479747"/>
       </p:ext>
     </p:extLst>
   </p:cSld>
@@ -15205,10 +15425,10 @@
       </p:grpSpPr>
       <p:sp>
         <p:nvSpPr>
-          <p:cNvPr id="22" name="">
-            <a:extLst xmlns:a="http://schemas.openxmlformats.org/drawingml/2006/main">
-              <a:ext uri="{FF2B5EF4-FFF2-40B4-BE49-F238E27FC236}">
-                <a16:creationId xmlns:a16="http://schemas.microsoft.com/office/drawing/2014/main" id="{327D9DDA-8816-4049-BDA0-8A377B089C58}"/>
+          <p:cNvPr id="23" name="">
+            <a:extLst xmlns:a="http://schemas.openxmlformats.org/drawingml/2006/main">
+              <a:ext uri="{FF2B5EF4-FFF2-40B4-BE49-F238E27FC236}">
+                <a16:creationId xmlns:a16="http://schemas.microsoft.com/office/drawing/2014/main" id="{274CF859-AE9C-4918-A383-CE47D9EC977E}"/>
               </a:ext>
             </a:extLst>
           </p:cNvPr>
@@ -15238,7 +15458,7 @@
           <p:cNvPr id="2" name="ANÁLISE DA SEÇÃO 6">
             <a:extLst xmlns:a="http://schemas.openxmlformats.org/drawingml/2006/main">
               <a:ext uri="{FF2B5EF4-FFF2-40B4-BE49-F238E27FC236}">
-                <a16:creationId xmlns:a16="http://schemas.microsoft.com/office/drawing/2014/main" id="{8972E00D-EFEF-438B-8B24-E80638926CED}"/>
+                <a16:creationId xmlns:a16="http://schemas.microsoft.com/office/drawing/2014/main" id="{A30584F4-BCFE-4E50-8F87-FE2995DAC7FC}"/>
               </a:ext>
             </a:extLst>
           </p:cNvPr>
@@ -15295,7 +15515,7 @@
           <p:cNvPr id="3" name="Discussão: alcance e implicações dos ach">
             <a:extLst xmlns:a="http://schemas.openxmlformats.org/drawingml/2006/main">
               <a:ext uri="{FF2B5EF4-FFF2-40B4-BE49-F238E27FC236}">
-                <a16:creationId xmlns:a16="http://schemas.microsoft.com/office/drawing/2014/main" id="{2A70DB26-2E39-4C94-970E-F4FD2E41FF95}"/>
+                <a16:creationId xmlns:a16="http://schemas.microsoft.com/office/drawing/2014/main" id="{4A94163A-CCC4-4B22-BA9A-4A2728B71DEC}"/>
               </a:ext>
             </a:extLst>
           </p:cNvPr>
@@ -15352,7 +15572,7 @@
           <p:cNvPr id="4" name="">
             <a:extLst xmlns:a="http://schemas.openxmlformats.org/drawingml/2006/main">
               <a:ext uri="{FF2B5EF4-FFF2-40B4-BE49-F238E27FC236}">
-                <a16:creationId xmlns:a16="http://schemas.microsoft.com/office/drawing/2014/main" id="{81E5E0E2-1E0E-465E-B81D-1AF449892806}"/>
+                <a16:creationId xmlns:a16="http://schemas.microsoft.com/office/drawing/2014/main" id="{AC43B90D-06B4-4D56-A4B8-53485B82C5C4}"/>
               </a:ext>
             </a:extLst>
           </p:cNvPr>
@@ -15382,7 +15602,7 @@
           <p:cNvPr id="5" name="">
             <a:extLst xmlns:a="http://schemas.openxmlformats.org/drawingml/2006/main">
               <a:ext uri="{FF2B5EF4-FFF2-40B4-BE49-F238E27FC236}">
-                <a16:creationId xmlns:a16="http://schemas.microsoft.com/office/drawing/2014/main" id="{949D6D15-027D-4246-933B-448283266EFE}"/>
+                <a16:creationId xmlns:a16="http://schemas.microsoft.com/office/drawing/2014/main" id="{9C401B1D-D22A-40F8-A4BB-83A30F0ACE47}"/>
               </a:ext>
             </a:extLst>
           </p:cNvPr>
@@ -15412,7 +15632,7 @@
           <p:cNvPr id="6" name="Nguyen, Backes e Stock (2022), Seções 6.">
             <a:extLst xmlns:a="http://schemas.openxmlformats.org/drawingml/2006/main">
               <a:ext uri="{FF2B5EF4-FFF2-40B4-BE49-F238E27FC236}">
-                <a16:creationId xmlns:a16="http://schemas.microsoft.com/office/drawing/2014/main" id="{A353FDBB-3C73-4D08-AD9A-C33D65F76EC1}"/>
+                <a16:creationId xmlns:a16="http://schemas.microsoft.com/office/drawing/2014/main" id="{62E47F56-EAE1-4865-84CD-B05DC2084806}"/>
               </a:ext>
             </a:extLst>
           </p:cNvPr>
@@ -15469,7 +15689,7 @@
           <p:cNvPr id="7" name="19 / 23">
             <a:extLst xmlns:a="http://schemas.openxmlformats.org/drawingml/2006/main">
               <a:ext uri="{FF2B5EF4-FFF2-40B4-BE49-F238E27FC236}">
-                <a16:creationId xmlns:a16="http://schemas.microsoft.com/office/drawing/2014/main" id="{AF421531-C6C6-4925-8EB3-B42222A65B61}"/>
+                <a16:creationId xmlns:a16="http://schemas.microsoft.com/office/drawing/2014/main" id="{9DF64908-49DA-45C3-80C2-0F63084FB9B9}"/>
               </a:ext>
             </a:extLst>
           </p:cNvPr>
@@ -15526,7 +15746,7 @@
           <p:cNvPr id="8" name="6.1  Alcance das potenciais violações">
             <a:extLst xmlns:a="http://schemas.openxmlformats.org/drawingml/2006/main">
               <a:ext uri="{FF2B5EF4-FFF2-40B4-BE49-F238E27FC236}">
-                <a16:creationId xmlns:a16="http://schemas.microsoft.com/office/drawing/2014/main" id="{19536961-FCB9-42EF-869F-4F0DCC763355}"/>
+                <a16:creationId xmlns:a16="http://schemas.microsoft.com/office/drawing/2014/main" id="{8728C24E-DFEA-44F3-8D91-048A2C5F9047}"/>
               </a:ext>
             </a:extLst>
           </p:cNvPr>
@@ -15583,7 +15803,7 @@
           <p:cNvPr id="9" name="Relaciona os achados empíricos&#10;às prátic">
             <a:extLst xmlns:a="http://schemas.openxmlformats.org/drawingml/2006/main">
               <a:ext uri="{FF2B5EF4-FFF2-40B4-BE49-F238E27FC236}">
-                <a16:creationId xmlns:a16="http://schemas.microsoft.com/office/drawing/2014/main" id="{29046424-8495-4727-87A4-6EC501982EC1}"/>
+                <a16:creationId xmlns:a16="http://schemas.microsoft.com/office/drawing/2014/main" id="{9F1C30AF-548A-432D-908C-8B2A15501246}"/>
               </a:ext>
             </a:extLst>
           </p:cNvPr>
@@ -15663,7 +15883,7 @@
           <p:cNvPr id="10" name="">
             <a:extLst xmlns:a="http://schemas.openxmlformats.org/drawingml/2006/main">
               <a:ext uri="{FF2B5EF4-FFF2-40B4-BE49-F238E27FC236}">
-                <a16:creationId xmlns:a16="http://schemas.microsoft.com/office/drawing/2014/main" id="{3B3998EA-75F2-40F9-B833-D6E1F88B0494}"/>
+                <a16:creationId xmlns:a16="http://schemas.microsoft.com/office/drawing/2014/main" id="{9032F674-8E83-4A79-9D1D-BFDC9C16D4D4}"/>
               </a:ext>
             </a:extLst>
           </p:cNvPr>
@@ -15693,7 +15913,7 @@
           <p:cNvPr id="11" name="6.2  Transparência do tratamento">
             <a:extLst xmlns:a="http://schemas.openxmlformats.org/drawingml/2006/main">
               <a:ext uri="{FF2B5EF4-FFF2-40B4-BE49-F238E27FC236}">
-                <a16:creationId xmlns:a16="http://schemas.microsoft.com/office/drawing/2014/main" id="{6B0FFBC1-492D-4F2C-9BDC-4B70F97DF19D}"/>
+                <a16:creationId xmlns:a16="http://schemas.microsoft.com/office/drawing/2014/main" id="{2E896BB8-DED8-4D70-A6CE-C1A02415CA15}"/>
               </a:ext>
             </a:extLst>
           </p:cNvPr>
@@ -15750,7 +15970,7 @@
           <p:cNvPr id="12" name="Discute a dificuldade de saber&#10;quem rece">
             <a:extLst xmlns:a="http://schemas.openxmlformats.org/drawingml/2006/main">
               <a:ext uri="{FF2B5EF4-FFF2-40B4-BE49-F238E27FC236}">
-                <a16:creationId xmlns:a16="http://schemas.microsoft.com/office/drawing/2014/main" id="{2EFEFE40-F710-4A51-9522-E2DDC48C89EF}"/>
+                <a16:creationId xmlns:a16="http://schemas.microsoft.com/office/drawing/2014/main" id="{433A0098-1B3F-4AFA-80CC-12992D968B17}"/>
               </a:ext>
             </a:extLst>
           </p:cNvPr>
@@ -15830,7 +16050,7 @@
           <p:cNvPr id="13" name="">
             <a:extLst xmlns:a="http://schemas.openxmlformats.org/drawingml/2006/main">
               <a:ext uri="{FF2B5EF4-FFF2-40B4-BE49-F238E27FC236}">
-                <a16:creationId xmlns:a16="http://schemas.microsoft.com/office/drawing/2014/main" id="{784F1476-0A10-4BBE-90D2-4B05EC2775F4}"/>
+                <a16:creationId xmlns:a16="http://schemas.microsoft.com/office/drawing/2014/main" id="{62D753EC-6DF6-4C9C-B7C3-2D40ECEEDB6B}"/>
               </a:ext>
             </a:extLst>
           </p:cNvPr>
@@ -15860,7 +16080,7 @@
           <p:cNvPr id="14" name="6.3  Suporte aos desenvolvedores">
             <a:extLst xmlns:a="http://schemas.openxmlformats.org/drawingml/2006/main">
               <a:ext uri="{FF2B5EF4-FFF2-40B4-BE49-F238E27FC236}">
-                <a16:creationId xmlns:a16="http://schemas.microsoft.com/office/drawing/2014/main" id="{1EB4C9EE-A268-4B4C-A851-FF510E8B3329}"/>
+                <a16:creationId xmlns:a16="http://schemas.microsoft.com/office/drawing/2014/main" id="{5142BBAB-A41C-45EE-9D94-C5C68F79C487}"/>
               </a:ext>
             </a:extLst>
           </p:cNvPr>
@@ -15917,7 +16137,7 @@
           <p:cNvPr id="15" name="Defende documentação clara&#10;e ferramentas">
             <a:extLst xmlns:a="http://schemas.openxmlformats.org/drawingml/2006/main">
               <a:ext uri="{FF2B5EF4-FFF2-40B4-BE49-F238E27FC236}">
-                <a16:creationId xmlns:a16="http://schemas.microsoft.com/office/drawing/2014/main" id="{0D3A2C61-1D1A-455E-A784-4DED4BAEF0FB}"/>
+                <a16:creationId xmlns:a16="http://schemas.microsoft.com/office/drawing/2014/main" id="{43917806-2DC7-4952-BBD2-BE6E1E04D6F1}"/>
               </a:ext>
             </a:extLst>
           </p:cNvPr>
@@ -15997,7 +16217,7 @@
           <p:cNvPr id="16" name="">
             <a:extLst xmlns:a="http://schemas.openxmlformats.org/drawingml/2006/main">
               <a:ext uri="{FF2B5EF4-FFF2-40B4-BE49-F238E27FC236}">
-                <a16:creationId xmlns:a16="http://schemas.microsoft.com/office/drawing/2014/main" id="{B0D3A798-FEAE-4772-8129-C99D3A5B9CDA}"/>
+                <a16:creationId xmlns:a16="http://schemas.microsoft.com/office/drawing/2014/main" id="{CCE13C84-1091-4380-B5C7-E7492052127A}"/>
               </a:ext>
             </a:extLst>
           </p:cNvPr>
@@ -16027,7 +16247,7 @@
           <p:cNvPr id="17" name="EN">
             <a:extLst xmlns:a="http://schemas.openxmlformats.org/drawingml/2006/main">
               <a:ext uri="{FF2B5EF4-FFF2-40B4-BE49-F238E27FC236}">
-                <a16:creationId xmlns:a16="http://schemas.microsoft.com/office/drawing/2014/main" id="{E845AFD1-0F3C-46DA-9EC7-6A1AFE96056B}"/>
+                <a16:creationId xmlns:a16="http://schemas.microsoft.com/office/drawing/2014/main" id="{B95DE619-9007-4F11-BC9C-307D57317207}"/>
               </a:ext>
             </a:extLst>
           </p:cNvPr>
@@ -16084,7 +16304,7 @@
           <p:cNvPr id="18" name="“there is a clear need for better inform">
             <a:extLst xmlns:a="http://schemas.openxmlformats.org/drawingml/2006/main">
               <a:ext uri="{FF2B5EF4-FFF2-40B4-BE49-F238E27FC236}">
-                <a16:creationId xmlns:a16="http://schemas.microsoft.com/office/drawing/2014/main" id="{BA267943-19FC-43F6-AFEC-FD1E1172A291}"/>
+                <a16:creationId xmlns:a16="http://schemas.microsoft.com/office/drawing/2014/main" id="{A4BC65A3-D466-4518-9A78-8E0549149C40}"/>
               </a:ext>
             </a:extLst>
           </p:cNvPr>
@@ -16141,7 +16361,7 @@
           <p:cNvPr id="19" name="PT">
             <a:extLst xmlns:a="http://schemas.openxmlformats.org/drawingml/2006/main">
               <a:ext uri="{FF2B5EF4-FFF2-40B4-BE49-F238E27FC236}">
-                <a16:creationId xmlns:a16="http://schemas.microsoft.com/office/drawing/2014/main" id="{E009C666-AA9D-4C8C-852B-2A4E04DCCD86}"/>
+                <a16:creationId xmlns:a16="http://schemas.microsoft.com/office/drawing/2014/main" id="{0141D07A-1931-4537-9C31-B2F7218E22DD}"/>
               </a:ext>
             </a:extLst>
           </p:cNvPr>
@@ -16198,7 +16418,7 @@
           <p:cNvPr id="20" name="Há uma necessidade clara de melhores inf">
             <a:extLst xmlns:a="http://schemas.openxmlformats.org/drawingml/2006/main">
               <a:ext uri="{FF2B5EF4-FFF2-40B4-BE49-F238E27FC236}">
-                <a16:creationId xmlns:a16="http://schemas.microsoft.com/office/drawing/2014/main" id="{01C1B801-EAEC-4B16-86B3-57CBC72C1805}"/>
+                <a16:creationId xmlns:a16="http://schemas.microsoft.com/office/drawing/2014/main" id="{3645C678-8179-4E18-90DF-380B56C9B0D4}"/>
               </a:ext>
             </a:extLst>
           </p:cNvPr>
@@ -16255,7 +16475,7 @@
           <p:cNvPr id="21" name="Análise: os autores discutem também as&#10;d">
             <a:extLst xmlns:a="http://schemas.openxmlformats.org/drawingml/2006/main">
               <a:ext uri="{FF2B5EF4-FFF2-40B4-BE49-F238E27FC236}">
-                <a16:creationId xmlns:a16="http://schemas.microsoft.com/office/drawing/2014/main" id="{B72FFAF1-8341-4984-ACAD-7C7BB77B73AC}"/>
+                <a16:creationId xmlns:a16="http://schemas.microsoft.com/office/drawing/2014/main" id="{3C6DAAF4-81E0-45E5-B35B-02F798E0F523}"/>
               </a:ext>
             </a:extLst>
           </p:cNvPr>
@@ -16353,10 +16573,32 @@
           </a:p>
         </p:txBody>
       </p:sp>
+      <p:pic>
+        <p:nvPicPr>
+          <p:cNvPr id="44" name=""/>
+          <p:cNvPicPr>
+            <a:picLocks xmlns:a="http://schemas.openxmlformats.org/drawingml/2006/main" noChangeAspect="1"/>
+          </p:cNvPicPr>
+          <p:nvPr/>
+        </p:nvPicPr>
+        <p:blipFill>
+          <a:blip xmlns:r="http://schemas.openxmlformats.org/officeDocument/2006/relationships" xmlns:a="http://schemas.openxmlformats.org/drawingml/2006/main" r:embed="R8c3df62902f64250"/>
+          <a:stretch xmlns:a="http://schemas.openxmlformats.org/drawingml/2006/main"/>
+        </p:blipFill>
+        <p:spPr>
+          <a:xfrm xmlns:a="http://schemas.openxmlformats.org/drawingml/2006/main">
+            <a:off x="10829925" y="3830"/>
+            <a:ext cx="952500" cy="944839"/>
+          </a:xfrm>
+          <a:prstGeom xmlns:a="http://schemas.openxmlformats.org/drawingml/2006/main" prst="rect">
+            <a:avLst/>
+          </a:prstGeom>
+        </p:spPr>
+      </p:pic>
     </p:spTree>
     <p:extLst>
       <p:ext uri="{BB962C8B-B14F-4D97-AF65-F5344CB8AC3E}">
-        <p14:creationId xmlns:p14="http://schemas.microsoft.com/office/powerpoint/2010/main" val="1416419486"/>
+        <p14:creationId xmlns:p14="http://schemas.microsoft.com/office/powerpoint/2010/main" val="1043962684"/>
       </p:ext>
     </p:extLst>
   </p:cSld>
@@ -16384,10 +16626,10 @@
       </p:grpSpPr>
       <p:sp>
         <p:nvSpPr>
-          <p:cNvPr id="28" name="">
-            <a:extLst xmlns:a="http://schemas.openxmlformats.org/drawingml/2006/main">
-              <a:ext uri="{FF2B5EF4-FFF2-40B4-BE49-F238E27FC236}">
-                <a16:creationId xmlns:a16="http://schemas.microsoft.com/office/drawing/2014/main" id="{E8790434-CDDC-4FF3-B773-DFD1D0E0E07F}"/>
+          <p:cNvPr id="29" name="">
+            <a:extLst xmlns:a="http://schemas.openxmlformats.org/drawingml/2006/main">
+              <a:ext uri="{FF2B5EF4-FFF2-40B4-BE49-F238E27FC236}">
+                <a16:creationId xmlns:a16="http://schemas.microsoft.com/office/drawing/2014/main" id="{DF47143D-BE37-451B-B0E4-925B29260868}"/>
               </a:ext>
             </a:extLst>
           </p:cNvPr>
@@ -16417,7 +16659,7 @@
           <p:cNvPr id="2" name="SELEÇÃO">
             <a:extLst xmlns:a="http://schemas.openxmlformats.org/drawingml/2006/main">
               <a:ext uri="{FF2B5EF4-FFF2-40B4-BE49-F238E27FC236}">
-                <a16:creationId xmlns:a16="http://schemas.microsoft.com/office/drawing/2014/main" id="{E2DC25A8-5B72-4D04-B7B9-5446FBA8CD66}"/>
+                <a16:creationId xmlns:a16="http://schemas.microsoft.com/office/drawing/2014/main" id="{7996BD8C-0FF1-4EC1-8859-86628641C841}"/>
               </a:ext>
             </a:extLst>
           </p:cNvPr>
@@ -16474,7 +16716,7 @@
           <p:cNvPr id="3" name="Seleção do artigo no Scopus">
             <a:extLst xmlns:a="http://schemas.openxmlformats.org/drawingml/2006/main">
               <a:ext uri="{FF2B5EF4-FFF2-40B4-BE49-F238E27FC236}">
-                <a16:creationId xmlns:a16="http://schemas.microsoft.com/office/drawing/2014/main" id="{813779D1-2C07-419A-91FC-3C25AD85A93C}"/>
+                <a16:creationId xmlns:a16="http://schemas.microsoft.com/office/drawing/2014/main" id="{FAB265AF-B9B9-4D10-BCC3-269D6801D69A}"/>
               </a:ext>
             </a:extLst>
           </p:cNvPr>
@@ -16531,7 +16773,7 @@
           <p:cNvPr id="4" name="">
             <a:extLst xmlns:a="http://schemas.openxmlformats.org/drawingml/2006/main">
               <a:ext uri="{FF2B5EF4-FFF2-40B4-BE49-F238E27FC236}">
-                <a16:creationId xmlns:a16="http://schemas.microsoft.com/office/drawing/2014/main" id="{F6B9BE53-A224-476E-9D5C-B8A2A43D0639}"/>
+                <a16:creationId xmlns:a16="http://schemas.microsoft.com/office/drawing/2014/main" id="{3E4D4D78-5E08-4FE0-8B37-136FB775BCA2}"/>
               </a:ext>
             </a:extLst>
           </p:cNvPr>
@@ -16561,7 +16803,7 @@
           <p:cNvPr id="5" name="">
             <a:extLst xmlns:a="http://schemas.openxmlformats.org/drawingml/2006/main">
               <a:ext uri="{FF2B5EF4-FFF2-40B4-BE49-F238E27FC236}">
-                <a16:creationId xmlns:a16="http://schemas.microsoft.com/office/drawing/2014/main" id="{1B43D21F-54B4-4044-83F3-6569282B7E86}"/>
+                <a16:creationId xmlns:a16="http://schemas.microsoft.com/office/drawing/2014/main" id="{7BACE761-2535-4A32-BC3B-79DC6F7F3D67}"/>
               </a:ext>
             </a:extLst>
           </p:cNvPr>
@@ -16591,7 +16833,7 @@
           <p:cNvPr id="6" name="Fonte: registro da busca no TCC, 21/09/2">
             <a:extLst xmlns:a="http://schemas.openxmlformats.org/drawingml/2006/main">
               <a:ext uri="{FF2B5EF4-FFF2-40B4-BE49-F238E27FC236}">
-                <a16:creationId xmlns:a16="http://schemas.microsoft.com/office/drawing/2014/main" id="{1C944BC0-5CB4-4E3D-B341-DE6157BA7F35}"/>
+                <a16:creationId xmlns:a16="http://schemas.microsoft.com/office/drawing/2014/main" id="{C23128F4-C99D-4C86-A340-4B2FC55294AF}"/>
               </a:ext>
             </a:extLst>
           </p:cNvPr>
@@ -16648,7 +16890,7 @@
           <p:cNvPr id="7" name="02 / 23">
             <a:extLst xmlns:a="http://schemas.openxmlformats.org/drawingml/2006/main">
               <a:ext uri="{FF2B5EF4-FFF2-40B4-BE49-F238E27FC236}">
-                <a16:creationId xmlns:a16="http://schemas.microsoft.com/office/drawing/2014/main" id="{3C00645C-8A2A-40DF-8C36-C682C13D03A3}"/>
+                <a16:creationId xmlns:a16="http://schemas.microsoft.com/office/drawing/2014/main" id="{6691F032-11B4-4276-BE0E-7FFCB1556ABF}"/>
               </a:ext>
             </a:extLst>
           </p:cNvPr>
@@ -16705,7 +16947,7 @@
           <p:cNvPr id="8" name="Busca: “third-party tracking”">
             <a:extLst xmlns:a="http://schemas.openxmlformats.org/drawingml/2006/main">
               <a:ext uri="{FF2B5EF4-FFF2-40B4-BE49-F238E27FC236}">
-                <a16:creationId xmlns:a16="http://schemas.microsoft.com/office/drawing/2014/main" id="{C2FED849-477A-418D-9B24-08EFFF145B12}"/>
+                <a16:creationId xmlns:a16="http://schemas.microsoft.com/office/drawing/2014/main" id="{651DB4FE-F7EC-4B4B-B3B6-F7A62F14C109}"/>
               </a:ext>
             </a:extLst>
           </p:cNvPr>
@@ -16762,7 +17004,7 @@
           <p:cNvPr id="9" name="CAPES / CAFe (IDP) → Scopus · Campo: tít">
             <a:extLst xmlns:a="http://schemas.openxmlformats.org/drawingml/2006/main">
               <a:ext uri="{FF2B5EF4-FFF2-40B4-BE49-F238E27FC236}">
-                <a16:creationId xmlns:a16="http://schemas.microsoft.com/office/drawing/2014/main" id="{6A6F6DFC-8295-4561-927B-96E6A9878620}"/>
+                <a16:creationId xmlns:a16="http://schemas.microsoft.com/office/drawing/2014/main" id="{A02B8615-1EB4-43DF-9F7F-9352C56DBBA3}"/>
               </a:ext>
             </a:extLst>
           </p:cNvPr>
@@ -16814,28 +17056,6 @@
           </a:p>
         </p:txBody>
       </p:sp>
-      <p:pic>
-        <p:nvPicPr>
-          <p:cNvPr id="37" name=""/>
-          <p:cNvPicPr>
-            <a:picLocks xmlns:a="http://schemas.openxmlformats.org/drawingml/2006/main" noChangeAspect="1"/>
-          </p:cNvPicPr>
-          <p:nvPr/>
-        </p:nvPicPr>
-        <p:blipFill>
-          <a:blip xmlns:r="http://schemas.openxmlformats.org/officeDocument/2006/relationships" xmlns:a="http://schemas.openxmlformats.org/drawingml/2006/main" r:embed="Ra012af651c3740dc"/>
-          <a:stretch xmlns:a="http://schemas.openxmlformats.org/drawingml/2006/main"/>
-        </p:blipFill>
-        <p:spPr>
-          <a:xfrm xmlns:a="http://schemas.openxmlformats.org/drawingml/2006/main">
-            <a:off x="609600" y="2449449"/>
-            <a:ext cx="2514600" cy="1454277"/>
-          </a:xfrm>
-          <a:prstGeom xmlns:a="http://schemas.openxmlformats.org/drawingml/2006/main" prst="rect">
-            <a:avLst/>
-          </a:prstGeom>
-        </p:spPr>
-      </p:pic>
       <p:pic>
         <p:nvPicPr>
           <p:cNvPr id="38" name=""/>
@@ -16845,12 +17065,12 @@
           <p:nvPr/>
         </p:nvPicPr>
         <p:blipFill>
-          <a:blip xmlns:r="http://schemas.openxmlformats.org/officeDocument/2006/relationships" xmlns:a="http://schemas.openxmlformats.org/drawingml/2006/main" r:embed="Ra8ba26ad515e4b0e"/>
+          <a:blip xmlns:r="http://schemas.openxmlformats.org/officeDocument/2006/relationships" xmlns:a="http://schemas.openxmlformats.org/drawingml/2006/main" r:embed="Rc1b4bf142fed4720"/>
           <a:stretch xmlns:a="http://schemas.openxmlformats.org/drawingml/2006/main"/>
         </p:blipFill>
         <p:spPr>
           <a:xfrm xmlns:a="http://schemas.openxmlformats.org/drawingml/2006/main">
-            <a:off x="3429000" y="2449449"/>
+            <a:off x="609600" y="2449449"/>
             <a:ext cx="2514600" cy="1454277"/>
           </a:xfrm>
           <a:prstGeom xmlns:a="http://schemas.openxmlformats.org/drawingml/2006/main" prst="rect">
@@ -16867,12 +17087,12 @@
           <p:nvPr/>
         </p:nvPicPr>
         <p:blipFill>
-          <a:blip xmlns:r="http://schemas.openxmlformats.org/officeDocument/2006/relationships" xmlns:a="http://schemas.openxmlformats.org/drawingml/2006/main" r:embed="Red807158090a44f2"/>
+          <a:blip xmlns:r="http://schemas.openxmlformats.org/officeDocument/2006/relationships" xmlns:a="http://schemas.openxmlformats.org/drawingml/2006/main" r:embed="R2cbc8d8ce760487e"/>
           <a:stretch xmlns:a="http://schemas.openxmlformats.org/drawingml/2006/main"/>
         </p:blipFill>
         <p:spPr>
           <a:xfrm xmlns:a="http://schemas.openxmlformats.org/drawingml/2006/main">
-            <a:off x="6248400" y="2449449"/>
+            <a:off x="3429000" y="2449449"/>
             <a:ext cx="2514600" cy="1454277"/>
           </a:xfrm>
           <a:prstGeom xmlns:a="http://schemas.openxmlformats.org/drawingml/2006/main" prst="rect">
@@ -16889,11 +17109,33 @@
           <p:nvPr/>
         </p:nvPicPr>
         <p:blipFill>
-          <a:blip xmlns:r="http://schemas.openxmlformats.org/officeDocument/2006/relationships" xmlns:a="http://schemas.openxmlformats.org/drawingml/2006/main" r:embed="R1a91ad69f12049e5"/>
+          <a:blip xmlns:r="http://schemas.openxmlformats.org/officeDocument/2006/relationships" xmlns:a="http://schemas.openxmlformats.org/drawingml/2006/main" r:embed="R51f8258f1b8948d4"/>
           <a:stretch xmlns:a="http://schemas.openxmlformats.org/drawingml/2006/main"/>
         </p:blipFill>
         <p:spPr>
           <a:xfrm xmlns:a="http://schemas.openxmlformats.org/drawingml/2006/main">
+            <a:off x="6248400" y="2449449"/>
+            <a:ext cx="2514600" cy="1454277"/>
+          </a:xfrm>
+          <a:prstGeom xmlns:a="http://schemas.openxmlformats.org/drawingml/2006/main" prst="rect">
+            <a:avLst/>
+          </a:prstGeom>
+        </p:spPr>
+      </p:pic>
+      <p:pic>
+        <p:nvPicPr>
+          <p:cNvPr id="41" name=""/>
+          <p:cNvPicPr>
+            <a:picLocks xmlns:a="http://schemas.openxmlformats.org/drawingml/2006/main" noChangeAspect="1"/>
+          </p:cNvPicPr>
+          <p:nvPr/>
+        </p:nvPicPr>
+        <p:blipFill>
+          <a:blip xmlns:r="http://schemas.openxmlformats.org/officeDocument/2006/relationships" xmlns:a="http://schemas.openxmlformats.org/drawingml/2006/main" r:embed="Rb13850605d3549d9"/>
+          <a:stretch xmlns:a="http://schemas.openxmlformats.org/drawingml/2006/main"/>
+        </p:blipFill>
+        <p:spPr>
+          <a:xfrm xmlns:a="http://schemas.openxmlformats.org/drawingml/2006/main">
             <a:off x="9067800" y="2449449"/>
             <a:ext cx="2514600" cy="1454277"/>
           </a:xfrm>
@@ -16907,7 +17149,7 @@
           <p:cNvPr id="14" name="131">
             <a:extLst xmlns:a="http://schemas.openxmlformats.org/drawingml/2006/main">
               <a:ext uri="{FF2B5EF4-FFF2-40B4-BE49-F238E27FC236}">
-                <a16:creationId xmlns:a16="http://schemas.microsoft.com/office/drawing/2014/main" id="{ED556128-302F-4D19-AF55-FE171A2F3D69}"/>
+                <a16:creationId xmlns:a16="http://schemas.microsoft.com/office/drawing/2014/main" id="{BC625B51-85E7-4B73-89F3-B4DCA601A093}"/>
               </a:ext>
             </a:extLst>
           </p:cNvPr>
@@ -16964,7 +17206,7 @@
           <p:cNvPr id="15" name="frase entre aspas,&#10;sem filtros">
             <a:extLst xmlns:a="http://schemas.openxmlformats.org/drawingml/2006/main">
               <a:ext uri="{FF2B5EF4-FFF2-40B4-BE49-F238E27FC236}">
-                <a16:creationId xmlns:a16="http://schemas.microsoft.com/office/drawing/2014/main" id="{A504700C-E039-42AC-A096-617CF0851421}"/>
+                <a16:creationId xmlns:a16="http://schemas.microsoft.com/office/drawing/2014/main" id="{5B665931-3E3C-41AA-B1A1-3946DD598085}"/>
               </a:ext>
             </a:extLst>
           </p:cNvPr>
@@ -17044,7 +17286,7 @@
           <p:cNvPr id="16" name="">
             <a:extLst xmlns:a="http://schemas.openxmlformats.org/drawingml/2006/main">
               <a:ext uri="{FF2B5EF4-FFF2-40B4-BE49-F238E27FC236}">
-                <a16:creationId xmlns:a16="http://schemas.microsoft.com/office/drawing/2014/main" id="{ADB66A87-4A34-4317-ADBC-93A8358D8582}"/>
+                <a16:creationId xmlns:a16="http://schemas.microsoft.com/office/drawing/2014/main" id="{5B6B7E0D-B51E-4D48-9C23-EEC06637DEEC}"/>
               </a:ext>
             </a:extLst>
           </p:cNvPr>
@@ -17074,7 +17316,7 @@
           <p:cNvPr id="17" name="70">
             <a:extLst xmlns:a="http://schemas.openxmlformats.org/drawingml/2006/main">
               <a:ext uri="{FF2B5EF4-FFF2-40B4-BE49-F238E27FC236}">
-                <a16:creationId xmlns:a16="http://schemas.microsoft.com/office/drawing/2014/main" id="{49D60611-8354-4A40-99F1-D93C11C7CF9F}"/>
+                <a16:creationId xmlns:a16="http://schemas.microsoft.com/office/drawing/2014/main" id="{8FA35FAD-E679-4AB7-B689-DBB298C7B843}"/>
               </a:ext>
             </a:extLst>
           </p:cNvPr>
@@ -17131,7 +17373,7 @@
           <p:cNvPr id="18" name="2018–2026, Computação,&#10;artigos e conferê">
             <a:extLst xmlns:a="http://schemas.openxmlformats.org/drawingml/2006/main">
               <a:ext uri="{FF2B5EF4-FFF2-40B4-BE49-F238E27FC236}">
-                <a16:creationId xmlns:a16="http://schemas.microsoft.com/office/drawing/2014/main" id="{FB16EC49-6E78-4D2C-8968-FCE1EE43661B}"/>
+                <a16:creationId xmlns:a16="http://schemas.microsoft.com/office/drawing/2014/main" id="{5760EC39-C6F0-46EE-91D5-5D8127DA141E}"/>
               </a:ext>
             </a:extLst>
           </p:cNvPr>
@@ -17211,7 +17453,7 @@
           <p:cNvPr id="19" name="">
             <a:extLst xmlns:a="http://schemas.openxmlformats.org/drawingml/2006/main">
               <a:ext uri="{FF2B5EF4-FFF2-40B4-BE49-F238E27FC236}">
-                <a16:creationId xmlns:a16="http://schemas.microsoft.com/office/drawing/2014/main" id="{1A0E4B1A-F65D-4D2D-B4C7-8EF34EEB6540}"/>
+                <a16:creationId xmlns:a16="http://schemas.microsoft.com/office/drawing/2014/main" id="{FE28AFEF-AF5C-45EA-8834-0C788DEC22ED}"/>
               </a:ext>
             </a:extLst>
           </p:cNvPr>
@@ -17241,7 +17483,7 @@
           <p:cNvPr id="20" name="39">
             <a:extLst xmlns:a="http://schemas.openxmlformats.org/drawingml/2006/main">
               <a:ext uri="{FF2B5EF4-FFF2-40B4-BE49-F238E27FC236}">
-                <a16:creationId xmlns:a16="http://schemas.microsoft.com/office/drawing/2014/main" id="{47B902EC-D828-4077-88FC-6C4DDCFCFF08}"/>
+                <a16:creationId xmlns:a16="http://schemas.microsoft.com/office/drawing/2014/main" id="{5D8FC50C-BCFE-42E4-8DBC-EC1216EEFCC8}"/>
               </a:ext>
             </a:extLst>
           </p:cNvPr>
@@ -17298,7 +17540,7 @@
           <p:cNvPr id="21" name="palavras-chave&#10;Third Parties e&#10;Third-par">
             <a:extLst xmlns:a="http://schemas.openxmlformats.org/drawingml/2006/main">
               <a:ext uri="{FF2B5EF4-FFF2-40B4-BE49-F238E27FC236}">
-                <a16:creationId xmlns:a16="http://schemas.microsoft.com/office/drawing/2014/main" id="{F5AB2780-83B1-4F70-95DD-C2D64C46DC4D}"/>
+                <a16:creationId xmlns:a16="http://schemas.microsoft.com/office/drawing/2014/main" id="{938472CB-793A-4D83-8BB4-1DA78C67176D}"/>
               </a:ext>
             </a:extLst>
           </p:cNvPr>
@@ -17401,7 +17643,7 @@
           <p:cNvPr id="22" name="">
             <a:extLst xmlns:a="http://schemas.openxmlformats.org/drawingml/2006/main">
               <a:ext uri="{FF2B5EF4-FFF2-40B4-BE49-F238E27FC236}">
-                <a16:creationId xmlns:a16="http://schemas.microsoft.com/office/drawing/2014/main" id="{0BD2C656-BF1E-41B5-8F8F-A1ACA8D5EA04}"/>
+                <a16:creationId xmlns:a16="http://schemas.microsoft.com/office/drawing/2014/main" id="{317C94C5-081D-4433-9624-6499CAB8BE9C}"/>
               </a:ext>
             </a:extLst>
           </p:cNvPr>
@@ -17431,7 +17673,7 @@
           <p:cNvPr id="23" name="5">
             <a:extLst xmlns:a="http://schemas.openxmlformats.org/drawingml/2006/main">
               <a:ext uri="{FF2B5EF4-FFF2-40B4-BE49-F238E27FC236}">
-                <a16:creationId xmlns:a16="http://schemas.microsoft.com/office/drawing/2014/main" id="{1D5E07E9-696D-4CE1-A307-166544E2D693}"/>
+                <a16:creationId xmlns:a16="http://schemas.microsoft.com/office/drawing/2014/main" id="{AB1B0BAE-F48A-4302-BCE8-03FC63FFA3BE}"/>
               </a:ext>
             </a:extLst>
           </p:cNvPr>
@@ -17488,7 +17730,7 @@
           <p:cNvPr id="24" name="+ termo consent na busca,&#10;período 2018–2">
             <a:extLst xmlns:a="http://schemas.openxmlformats.org/drawingml/2006/main">
               <a:ext uri="{FF2B5EF4-FFF2-40B4-BE49-F238E27FC236}">
-                <a16:creationId xmlns:a16="http://schemas.microsoft.com/office/drawing/2014/main" id="{D311843B-BD0C-4FD3-8824-C4849440B126}"/>
+                <a16:creationId xmlns:a16="http://schemas.microsoft.com/office/drawing/2014/main" id="{6466D83A-17A2-4E1C-B154-C089626F142C}"/>
               </a:ext>
             </a:extLst>
           </p:cNvPr>
@@ -17568,7 +17810,7 @@
           <p:cNvPr id="25" name="">
             <a:extLst xmlns:a="http://schemas.openxmlformats.org/drawingml/2006/main">
               <a:ext uri="{FF2B5EF4-FFF2-40B4-BE49-F238E27FC236}">
-                <a16:creationId xmlns:a16="http://schemas.microsoft.com/office/drawing/2014/main" id="{9E912FB5-36FC-408D-8275-D4DB768C6180}"/>
+                <a16:creationId xmlns:a16="http://schemas.microsoft.com/office/drawing/2014/main" id="{79329439-274B-4D0E-9442-06CD5961C48F}"/>
               </a:ext>
             </a:extLst>
           </p:cNvPr>
@@ -17598,7 +17840,7 @@
           <p:cNvPr id="26" name="1 artigo selecionado">
             <a:extLst xmlns:a="http://schemas.openxmlformats.org/drawingml/2006/main">
               <a:ext uri="{FF2B5EF4-FFF2-40B4-BE49-F238E27FC236}">
-                <a16:creationId xmlns:a16="http://schemas.microsoft.com/office/drawing/2014/main" id="{1BE4B7F0-77D2-4E57-B731-B2D39A1EBAAC}"/>
+                <a16:creationId xmlns:a16="http://schemas.microsoft.com/office/drawing/2014/main" id="{9A2688D4-7287-4148-A9D1-32ACBAB9E658}"/>
               </a:ext>
             </a:extLst>
           </p:cNvPr>
@@ -17655,7 +17897,7 @@
           <p:cNvPr id="27" name="Consent delimita o aspecto analisado par">
             <a:extLst xmlns:a="http://schemas.openxmlformats.org/drawingml/2006/main">
               <a:ext uri="{FF2B5EF4-FFF2-40B4-BE49-F238E27FC236}">
-                <a16:creationId xmlns:a16="http://schemas.microsoft.com/office/drawing/2014/main" id="{4C167829-D02E-4786-AFD0-99F41A8A502C}"/>
+                <a16:creationId xmlns:a16="http://schemas.microsoft.com/office/drawing/2014/main" id="{7AE3DFFA-890B-46DE-915E-7688CAB1DBEE}"/>
               </a:ext>
             </a:extLst>
           </p:cNvPr>
@@ -17730,10 +17972,32 @@
           </a:p>
         </p:txBody>
       </p:sp>
+      <p:pic>
+        <p:nvPicPr>
+          <p:cNvPr id="56" name=""/>
+          <p:cNvPicPr>
+            <a:picLocks xmlns:a="http://schemas.openxmlformats.org/drawingml/2006/main" noChangeAspect="1"/>
+          </p:cNvPicPr>
+          <p:nvPr/>
+        </p:nvPicPr>
+        <p:blipFill>
+          <a:blip xmlns:r="http://schemas.openxmlformats.org/officeDocument/2006/relationships" xmlns:a="http://schemas.openxmlformats.org/drawingml/2006/main" r:embed="R39e0ff92b24b4acc"/>
+          <a:stretch xmlns:a="http://schemas.openxmlformats.org/drawingml/2006/main"/>
+        </p:blipFill>
+        <p:spPr>
+          <a:xfrm xmlns:a="http://schemas.openxmlformats.org/drawingml/2006/main">
+            <a:off x="10829925" y="3830"/>
+            <a:ext cx="952500" cy="944839"/>
+          </a:xfrm>
+          <a:prstGeom xmlns:a="http://schemas.openxmlformats.org/drawingml/2006/main" prst="rect">
+            <a:avLst/>
+          </a:prstGeom>
+        </p:spPr>
+      </p:pic>
     </p:spTree>
     <p:extLst>
       <p:ext uri="{BB962C8B-B14F-4D97-AF65-F5344CB8AC3E}">
-        <p14:creationId xmlns:p14="http://schemas.microsoft.com/office/powerpoint/2010/main" val="1701717666"/>
+        <p14:creationId xmlns:p14="http://schemas.microsoft.com/office/powerpoint/2010/main" val="2072005635"/>
       </p:ext>
     </p:extLst>
   </p:cSld>
@@ -17761,10 +18025,10 @@
       </p:grpSpPr>
       <p:sp>
         <p:nvSpPr>
-          <p:cNvPr id="20" name="">
-            <a:extLst xmlns:a="http://schemas.openxmlformats.org/drawingml/2006/main">
-              <a:ext uri="{FF2B5EF4-FFF2-40B4-BE49-F238E27FC236}">
-                <a16:creationId xmlns:a16="http://schemas.microsoft.com/office/drawing/2014/main" id="{6DA9F88B-FE3E-497B-A76E-08C5F9E70354}"/>
+          <p:cNvPr id="21" name="">
+            <a:extLst xmlns:a="http://schemas.openxmlformats.org/drawingml/2006/main">
+              <a:ext uri="{FF2B5EF4-FFF2-40B4-BE49-F238E27FC236}">
+                <a16:creationId xmlns:a16="http://schemas.microsoft.com/office/drawing/2014/main" id="{DFC952DA-6D59-435A-B74F-C0B68C66C66A}"/>
               </a:ext>
             </a:extLst>
           </p:cNvPr>
@@ -17794,7 +18058,7 @@
           <p:cNvPr id="2" name="ANÁLISE METODOLÓGICA">
             <a:extLst xmlns:a="http://schemas.openxmlformats.org/drawingml/2006/main">
               <a:ext uri="{FF2B5EF4-FFF2-40B4-BE49-F238E27FC236}">
-                <a16:creationId xmlns:a16="http://schemas.microsoft.com/office/drawing/2014/main" id="{183F08A2-AAEB-4017-A865-9CBF992FDF11}"/>
+                <a16:creationId xmlns:a16="http://schemas.microsoft.com/office/drawing/2014/main" id="{3A06DE1C-BE90-49F9-8FC0-19BC7E1195B7}"/>
               </a:ext>
             </a:extLst>
           </p:cNvPr>
@@ -17851,7 +18115,7 @@
           <p:cNvPr id="3" name="Limites da evidência e da generalização">
             <a:extLst xmlns:a="http://schemas.openxmlformats.org/drawingml/2006/main">
               <a:ext uri="{FF2B5EF4-FFF2-40B4-BE49-F238E27FC236}">
-                <a16:creationId xmlns:a16="http://schemas.microsoft.com/office/drawing/2014/main" id="{E2024A74-7707-4B18-B5C3-F89CCA620E74}"/>
+                <a16:creationId xmlns:a16="http://schemas.microsoft.com/office/drawing/2014/main" id="{37AD29DA-C97F-4A5B-A01F-D554F16E18DD}"/>
               </a:ext>
             </a:extLst>
           </p:cNvPr>
@@ -17908,7 +18172,7 @@
           <p:cNvPr id="4" name="">
             <a:extLst xmlns:a="http://schemas.openxmlformats.org/drawingml/2006/main">
               <a:ext uri="{FF2B5EF4-FFF2-40B4-BE49-F238E27FC236}">
-                <a16:creationId xmlns:a16="http://schemas.microsoft.com/office/drawing/2014/main" id="{C8A3F601-6D5F-4B3D-8497-0AAD227186E8}"/>
+                <a16:creationId xmlns:a16="http://schemas.microsoft.com/office/drawing/2014/main" id="{CEE83CC4-4139-4638-9FBF-1417D64ABD0A}"/>
               </a:ext>
             </a:extLst>
           </p:cNvPr>
@@ -17938,7 +18202,7 @@
           <p:cNvPr id="5" name="">
             <a:extLst xmlns:a="http://schemas.openxmlformats.org/drawingml/2006/main">
               <a:ext uri="{FF2B5EF4-FFF2-40B4-BE49-F238E27FC236}">
-                <a16:creationId xmlns:a16="http://schemas.microsoft.com/office/drawing/2014/main" id="{AD375425-6DF0-4B95-B846-31F4EEBC6A10}"/>
+                <a16:creationId xmlns:a16="http://schemas.microsoft.com/office/drawing/2014/main" id="{B421DA83-37C8-4D00-83ED-87F9896798B8}"/>
               </a:ext>
             </a:extLst>
           </p:cNvPr>
@@ -17968,7 +18232,7 @@
           <p:cNvPr id="6" name="Nguyen, Backes e Stock (2022), Seções 4.">
             <a:extLst xmlns:a="http://schemas.openxmlformats.org/drawingml/2006/main">
               <a:ext uri="{FF2B5EF4-FFF2-40B4-BE49-F238E27FC236}">
-                <a16:creationId xmlns:a16="http://schemas.microsoft.com/office/drawing/2014/main" id="{5F827E4C-AF98-4A00-99AA-355A6046C6B8}"/>
+                <a16:creationId xmlns:a16="http://schemas.microsoft.com/office/drawing/2014/main" id="{85E3B4C6-A62B-46B4-94B3-3A52E36D0C2D}"/>
               </a:ext>
             </a:extLst>
           </p:cNvPr>
@@ -18025,7 +18289,7 @@
           <p:cNvPr id="7" name="20 / 23">
             <a:extLst xmlns:a="http://schemas.openxmlformats.org/drawingml/2006/main">
               <a:ext uri="{FF2B5EF4-FFF2-40B4-BE49-F238E27FC236}">
-                <a16:creationId xmlns:a16="http://schemas.microsoft.com/office/drawing/2014/main" id="{4A3E592A-0E64-4C51-A847-C3FFCBAF90E7}"/>
+                <a16:creationId xmlns:a16="http://schemas.microsoft.com/office/drawing/2014/main" id="{B1BE3E74-C8B4-451D-A7C7-CDE0A3DEEF0E}"/>
               </a:ext>
             </a:extLst>
           </p:cNvPr>
@@ -18082,7 +18346,7 @@
           <p:cNvPr id="8" name="CORPUS">
             <a:extLst xmlns:a="http://schemas.openxmlformats.org/drawingml/2006/main">
               <a:ext uri="{FF2B5EF4-FFF2-40B4-BE49-F238E27FC236}">
-                <a16:creationId xmlns:a16="http://schemas.microsoft.com/office/drawing/2014/main" id="{BDC8E591-4A29-4E79-AB34-EF52FFD90AE2}"/>
+                <a16:creationId xmlns:a16="http://schemas.microsoft.com/office/drawing/2014/main" id="{9C191F17-06B2-4668-A886-26153722DE83}"/>
               </a:ext>
             </a:extLst>
           </p:cNvPr>
@@ -18139,7 +18403,7 @@
           <p:cNvPr id="9" name="Somente aplicativos gratuitos que atendi">
             <a:extLst xmlns:a="http://schemas.openxmlformats.org/drawingml/2006/main">
               <a:ext uri="{FF2B5EF4-FFF2-40B4-BE49-F238E27FC236}">
-                <a16:creationId xmlns:a16="http://schemas.microsoft.com/office/drawing/2014/main" id="{4695400B-0B46-4EA8-80F0-CA5979EC11D0}"/>
+                <a16:creationId xmlns:a16="http://schemas.microsoft.com/office/drawing/2014/main" id="{F9F15257-9E97-4B62-B583-9FA5F980F049}"/>
               </a:ext>
             </a:extLst>
           </p:cNvPr>
@@ -18219,7 +18483,7 @@
           <p:cNvPr id="10" name="">
             <a:extLst xmlns:a="http://schemas.openxmlformats.org/drawingml/2006/main">
               <a:ext uri="{FF2B5EF4-FFF2-40B4-BE49-F238E27FC236}">
-                <a16:creationId xmlns:a16="http://schemas.microsoft.com/office/drawing/2014/main" id="{A8606D0B-57B9-49ED-81A1-560FEE54F1D3}"/>
+                <a16:creationId xmlns:a16="http://schemas.microsoft.com/office/drawing/2014/main" id="{FD695E04-8A7C-4A25-B510-B8D376286BC2}"/>
               </a:ext>
             </a:extLst>
           </p:cNvPr>
@@ -18249,7 +18513,7 @@
           <p:cNvPr id="11" name="EXECUÇÃO">
             <a:extLst xmlns:a="http://schemas.openxmlformats.org/drawingml/2006/main">
               <a:ext uri="{FF2B5EF4-FFF2-40B4-BE49-F238E27FC236}">
-                <a16:creationId xmlns:a16="http://schemas.microsoft.com/office/drawing/2014/main" id="{3A566CDF-96B3-46DD-B63A-389725930293}"/>
+                <a16:creationId xmlns:a16="http://schemas.microsoft.com/office/drawing/2014/main" id="{AC16B79B-789A-4919-9E66-C61BF5BF1FBF}"/>
               </a:ext>
             </a:extLst>
           </p:cNvPr>
@@ -18306,7 +18570,7 @@
           <p:cNvPr id="12" name="11.591 apps não puderam ser analisados p">
             <a:extLst xmlns:a="http://schemas.openxmlformats.org/drawingml/2006/main">
               <a:ext uri="{FF2B5EF4-FFF2-40B4-BE49-F238E27FC236}">
-                <a16:creationId xmlns:a16="http://schemas.microsoft.com/office/drawing/2014/main" id="{B9E156D7-D0D3-48B8-934B-6E65CB840679}"/>
+                <a16:creationId xmlns:a16="http://schemas.microsoft.com/office/drawing/2014/main" id="{7AC84018-58A0-42D6-95D3-B7981BCC0858}"/>
               </a:ext>
             </a:extLst>
           </p:cNvPr>
@@ -18386,7 +18650,7 @@
           <p:cNvPr id="13" name="">
             <a:extLst xmlns:a="http://schemas.openxmlformats.org/drawingml/2006/main">
               <a:ext uri="{FF2B5EF4-FFF2-40B4-BE49-F238E27FC236}">
-                <a16:creationId xmlns:a16="http://schemas.microsoft.com/office/drawing/2014/main" id="{C7A831AF-606D-4B82-8A54-0F93CB6A19C1}"/>
+                <a16:creationId xmlns:a16="http://schemas.microsoft.com/office/drawing/2014/main" id="{0BBED79A-29C3-4F9B-A07F-1BEDCE1A9BEF}"/>
               </a:ext>
             </a:extLst>
           </p:cNvPr>
@@ -18416,7 +18680,7 @@
           <p:cNvPr id="14" name="IDIOMA E OCR">
             <a:extLst xmlns:a="http://schemas.openxmlformats.org/drawingml/2006/main">
               <a:ext uri="{FF2B5EF4-FFF2-40B4-BE49-F238E27FC236}">
-                <a16:creationId xmlns:a16="http://schemas.microsoft.com/office/drawing/2014/main" id="{3FB913AE-05FB-46E2-9D4F-2A23FAE39A8D}"/>
+                <a16:creationId xmlns:a16="http://schemas.microsoft.com/office/drawing/2014/main" id="{B38CB309-85D8-4658-9C3F-4734316F6613}"/>
               </a:ext>
             </a:extLst>
           </p:cNvPr>
@@ -18473,7 +18737,7 @@
           <p:cNvPr id="15" name="1.996 interfaces relacionadas à privacid">
             <a:extLst xmlns:a="http://schemas.openxmlformats.org/drawingml/2006/main">
               <a:ext uri="{FF2B5EF4-FFF2-40B4-BE49-F238E27FC236}">
-                <a16:creationId xmlns:a16="http://schemas.microsoft.com/office/drawing/2014/main" id="{734B8C83-2520-4253-966F-85F83ECF5718}"/>
+                <a16:creationId xmlns:a16="http://schemas.microsoft.com/office/drawing/2014/main" id="{E44A22EF-60BE-4737-BCD6-F8BD6CFD0A42}"/>
               </a:ext>
             </a:extLst>
           </p:cNvPr>
@@ -18553,7 +18817,7 @@
           <p:cNvPr id="16" name="">
             <a:extLst xmlns:a="http://schemas.openxmlformats.org/drawingml/2006/main">
               <a:ext uri="{FF2B5EF4-FFF2-40B4-BE49-F238E27FC236}">
-                <a16:creationId xmlns:a16="http://schemas.microsoft.com/office/drawing/2014/main" id="{F8638523-8FD9-484B-8437-1DCF48E39819}"/>
+                <a16:creationId xmlns:a16="http://schemas.microsoft.com/office/drawing/2014/main" id="{D128571B-4E47-4E7F-8949-4F95EBF7CBC7}"/>
               </a:ext>
             </a:extLst>
           </p:cNvPr>
@@ -18583,7 +18847,7 @@
           <p:cNvPr id="17" name="OBSERVAÇÃO">
             <a:extLst xmlns:a="http://schemas.openxmlformats.org/drawingml/2006/main">
               <a:ext uri="{FF2B5EF4-FFF2-40B4-BE49-F238E27FC236}">
-                <a16:creationId xmlns:a16="http://schemas.microsoft.com/office/drawing/2014/main" id="{C2769975-EA35-453E-B143-2C3C57F6702B}"/>
+                <a16:creationId xmlns:a16="http://schemas.microsoft.com/office/drawing/2014/main" id="{8D183DD5-F967-4F07-B4D4-365B207497E5}"/>
               </a:ext>
             </a:extLst>
           </p:cNvPr>
@@ -18640,7 +18904,7 @@
           <p:cNvPr id="18" name="Execuções de até 150 s e foco em 45 domí">
             <a:extLst xmlns:a="http://schemas.openxmlformats.org/drawingml/2006/main">
               <a:ext uri="{FF2B5EF4-FFF2-40B4-BE49-F238E27FC236}">
-                <a16:creationId xmlns:a16="http://schemas.microsoft.com/office/drawing/2014/main" id="{3767B76D-DA80-47E6-B703-F5C8E3F18B47}"/>
+                <a16:creationId xmlns:a16="http://schemas.microsoft.com/office/drawing/2014/main" id="{6C2695B4-1AD6-45AB-894B-CF7F9E212429}"/>
               </a:ext>
             </a:extLst>
           </p:cNvPr>
@@ -18720,7 +18984,7 @@
           <p:cNvPr id="19" name="Análise do seminário: uma falha não obse">
             <a:extLst xmlns:a="http://schemas.openxmlformats.org/drawingml/2006/main">
               <a:ext uri="{FF2B5EF4-FFF2-40B4-BE49-F238E27FC236}">
-                <a16:creationId xmlns:a16="http://schemas.microsoft.com/office/drawing/2014/main" id="{0520765C-E7B8-4107-AB3F-973F0595B527}"/>
+                <a16:creationId xmlns:a16="http://schemas.microsoft.com/office/drawing/2014/main" id="{A4B7A839-23A6-4CBB-83DB-A77F42479020}"/>
               </a:ext>
             </a:extLst>
           </p:cNvPr>
@@ -18772,10 +19036,32 @@
           </a:p>
         </p:txBody>
       </p:sp>
+      <p:pic>
+        <p:nvPicPr>
+          <p:cNvPr id="40" name=""/>
+          <p:cNvPicPr>
+            <a:picLocks xmlns:a="http://schemas.openxmlformats.org/drawingml/2006/main" noChangeAspect="1"/>
+          </p:cNvPicPr>
+          <p:nvPr/>
+        </p:nvPicPr>
+        <p:blipFill>
+          <a:blip xmlns:r="http://schemas.openxmlformats.org/officeDocument/2006/relationships" xmlns:a="http://schemas.openxmlformats.org/drawingml/2006/main" r:embed="R756a9b3475bd4d85"/>
+          <a:stretch xmlns:a="http://schemas.openxmlformats.org/drawingml/2006/main"/>
+        </p:blipFill>
+        <p:spPr>
+          <a:xfrm xmlns:a="http://schemas.openxmlformats.org/drawingml/2006/main">
+            <a:off x="10829925" y="3830"/>
+            <a:ext cx="952500" cy="944839"/>
+          </a:xfrm>
+          <a:prstGeom xmlns:a="http://schemas.openxmlformats.org/drawingml/2006/main" prst="rect">
+            <a:avLst/>
+          </a:prstGeom>
+        </p:spPr>
+      </p:pic>
     </p:spTree>
     <p:extLst>
       <p:ext uri="{BB962C8B-B14F-4D97-AF65-F5344CB8AC3E}">
-        <p14:creationId xmlns:p14="http://schemas.microsoft.com/office/powerpoint/2010/main" val="1610572545"/>
+        <p14:creationId xmlns:p14="http://schemas.microsoft.com/office/powerpoint/2010/main" val="1550000879"/>
       </p:ext>
     </p:extLst>
   </p:cSld>
@@ -18803,10 +19089,10 @@
       </p:grpSpPr>
       <p:sp>
         <p:nvSpPr>
-          <p:cNvPr id="19" name="">
-            <a:extLst xmlns:a="http://schemas.openxmlformats.org/drawingml/2006/main">
-              <a:ext uri="{FF2B5EF4-FFF2-40B4-BE49-F238E27FC236}">
-                <a16:creationId xmlns:a16="http://schemas.microsoft.com/office/drawing/2014/main" id="{E93E5FA4-FC6A-46F8-B760-9D44C61C7AA9}"/>
+          <p:cNvPr id="20" name="">
+            <a:extLst xmlns:a="http://schemas.openxmlformats.org/drawingml/2006/main">
+              <a:ext uri="{FF2B5EF4-FFF2-40B4-BE49-F238E27FC236}">
+                <a16:creationId xmlns:a16="http://schemas.microsoft.com/office/drawing/2014/main" id="{2EB551A5-0D1C-43D1-AD05-AE7E2BC75906}"/>
               </a:ext>
             </a:extLst>
           </p:cNvPr>
@@ -18836,7 +19122,7 @@
           <p:cNvPr id="2" name="ANÁLISE DA SEÇÃO 8">
             <a:extLst xmlns:a="http://schemas.openxmlformats.org/drawingml/2006/main">
               <a:ext uri="{FF2B5EF4-FFF2-40B4-BE49-F238E27FC236}">
-                <a16:creationId xmlns:a16="http://schemas.microsoft.com/office/drawing/2014/main" id="{19126533-2EC4-42AD-BA8D-FC23E7FC3B07}"/>
+                <a16:creationId xmlns:a16="http://schemas.microsoft.com/office/drawing/2014/main" id="{EBF79BF4-45C7-45F7-9EBD-3E251B358A62}"/>
               </a:ext>
             </a:extLst>
           </p:cNvPr>
@@ -18893,7 +19179,7 @@
           <p:cNvPr id="3" name="Conclusão: retomada do objetivo e dos nú">
             <a:extLst xmlns:a="http://schemas.openxmlformats.org/drawingml/2006/main">
               <a:ext uri="{FF2B5EF4-FFF2-40B4-BE49-F238E27FC236}">
-                <a16:creationId xmlns:a16="http://schemas.microsoft.com/office/drawing/2014/main" id="{50C54A69-E316-40A1-B52A-AFF2563FA27C}"/>
+                <a16:creationId xmlns:a16="http://schemas.microsoft.com/office/drawing/2014/main" id="{FABCDDE3-B36D-4CDC-A3B6-5C688EFD78A8}"/>
               </a:ext>
             </a:extLst>
           </p:cNvPr>
@@ -18950,7 +19236,7 @@
           <p:cNvPr id="4" name="">
             <a:extLst xmlns:a="http://schemas.openxmlformats.org/drawingml/2006/main">
               <a:ext uri="{FF2B5EF4-FFF2-40B4-BE49-F238E27FC236}">
-                <a16:creationId xmlns:a16="http://schemas.microsoft.com/office/drawing/2014/main" id="{B1D062E5-7F1E-43FE-A173-836DD745B4DE}"/>
+                <a16:creationId xmlns:a16="http://schemas.microsoft.com/office/drawing/2014/main" id="{90645BDB-949B-4D02-8D81-9221EBF8E379}"/>
               </a:ext>
             </a:extLst>
           </p:cNvPr>
@@ -18980,7 +19266,7 @@
           <p:cNvPr id="5" name="">
             <a:extLst xmlns:a="http://schemas.openxmlformats.org/drawingml/2006/main">
               <a:ext uri="{FF2B5EF4-FFF2-40B4-BE49-F238E27FC236}">
-                <a16:creationId xmlns:a16="http://schemas.microsoft.com/office/drawing/2014/main" id="{28FB664F-B7A7-48B6-9A4B-1F45FE29DB70}"/>
+                <a16:creationId xmlns:a16="http://schemas.microsoft.com/office/drawing/2014/main" id="{F021BF5C-D70C-45A0-ACC5-9EE4975607F3}"/>
               </a:ext>
             </a:extLst>
           </p:cNvPr>
@@ -19010,7 +19296,7 @@
           <p:cNvPr id="6" name="Nguyen, Backes e Stock (2022), Seção 8, ">
             <a:extLst xmlns:a="http://schemas.openxmlformats.org/drawingml/2006/main">
               <a:ext uri="{FF2B5EF4-FFF2-40B4-BE49-F238E27FC236}">
-                <a16:creationId xmlns:a16="http://schemas.microsoft.com/office/drawing/2014/main" id="{1EC389C5-5E98-48FE-93F8-04C2BFACFBDF}"/>
+                <a16:creationId xmlns:a16="http://schemas.microsoft.com/office/drawing/2014/main" id="{02DBE63A-6A1D-4EAE-9E5F-3044757F89E4}"/>
               </a:ext>
             </a:extLst>
           </p:cNvPr>
@@ -19067,7 +19353,7 @@
           <p:cNvPr id="7" name="21 / 23">
             <a:extLst xmlns:a="http://schemas.openxmlformats.org/drawingml/2006/main">
               <a:ext uri="{FF2B5EF4-FFF2-40B4-BE49-F238E27FC236}">
-                <a16:creationId xmlns:a16="http://schemas.microsoft.com/office/drawing/2014/main" id="{A692DA4A-880A-4DBA-B8F2-1772241713C3}"/>
+                <a16:creationId xmlns:a16="http://schemas.microsoft.com/office/drawing/2014/main" id="{D07E8B26-7101-4485-9D4E-9B1FEDABAA90}"/>
               </a:ext>
             </a:extLst>
           </p:cNvPr>
@@ -19121,14 +19407,14 @@
       </p:sp>
       <p:pic>
         <p:nvPicPr>
-          <p:cNvPr id="26" name=""/>
+          <p:cNvPr id="27" name=""/>
           <p:cNvPicPr>
             <a:picLocks xmlns:a="http://schemas.openxmlformats.org/drawingml/2006/main" noChangeAspect="1"/>
           </p:cNvPicPr>
           <p:nvPr/>
         </p:nvPicPr>
         <p:blipFill>
-          <a:blip xmlns:r="http://schemas.openxmlformats.org/officeDocument/2006/relationships" xmlns:a="http://schemas.openxmlformats.org/drawingml/2006/main" r:embed="R572fa5a25a994f55"/>
+          <a:blip xmlns:r="http://schemas.openxmlformats.org/officeDocument/2006/relationships" xmlns:a="http://schemas.openxmlformats.org/drawingml/2006/main" r:embed="R6f575755ab164444"/>
           <a:stretch xmlns:a="http://schemas.openxmlformats.org/drawingml/2006/main"/>
         </p:blipFill>
         <p:spPr>
@@ -19146,7 +19432,7 @@
           <p:cNvPr id="9" name="Seção 8 do artigo, reproduzida integralm">
             <a:extLst xmlns:a="http://schemas.openxmlformats.org/drawingml/2006/main">
               <a:ext uri="{FF2B5EF4-FFF2-40B4-BE49-F238E27FC236}">
-                <a16:creationId xmlns:a16="http://schemas.microsoft.com/office/drawing/2014/main" id="{EA56A8EA-5ACD-422D-B056-B7D330AC719D}"/>
+                <a16:creationId xmlns:a16="http://schemas.microsoft.com/office/drawing/2014/main" id="{0B0A075E-34B6-4A6B-92DB-514397611CF9}"/>
               </a:ext>
             </a:extLst>
           </p:cNvPr>
@@ -19203,7 +19489,7 @@
           <p:cNvPr id="10" name="EN">
             <a:extLst xmlns:a="http://schemas.openxmlformats.org/drawingml/2006/main">
               <a:ext uri="{FF2B5EF4-FFF2-40B4-BE49-F238E27FC236}">
-                <a16:creationId xmlns:a16="http://schemas.microsoft.com/office/drawing/2014/main" id="{4BA4C7FE-4E39-496F-8730-213FA636C924}"/>
+                <a16:creationId xmlns:a16="http://schemas.microsoft.com/office/drawing/2014/main" id="{39AD3EB1-4988-4B8E-9818-C24AD4DC8104}"/>
               </a:ext>
             </a:extLst>
           </p:cNvPr>
@@ -19260,7 +19546,7 @@
           <p:cNvPr id="11" name="“we performed a systematic study into co">
             <a:extLst xmlns:a="http://schemas.openxmlformats.org/drawingml/2006/main">
               <a:ext uri="{FF2B5EF4-FFF2-40B4-BE49-F238E27FC236}">
-                <a16:creationId xmlns:a16="http://schemas.microsoft.com/office/drawing/2014/main" id="{C3ED219F-33D9-444E-8364-BF89685BC909}"/>
+                <a16:creationId xmlns:a16="http://schemas.microsoft.com/office/drawing/2014/main" id="{B7DF0BC6-9F89-4CA7-82BD-050F6669EC26}"/>
               </a:ext>
             </a:extLst>
           </p:cNvPr>
@@ -19317,7 +19603,7 @@
           <p:cNvPr id="12" name="PT">
             <a:extLst xmlns:a="http://schemas.openxmlformats.org/drawingml/2006/main">
               <a:ext uri="{FF2B5EF4-FFF2-40B4-BE49-F238E27FC236}">
-                <a16:creationId xmlns:a16="http://schemas.microsoft.com/office/drawing/2014/main" id="{AB703EF2-4F64-40C4-850F-8B587DB5A97A}"/>
+                <a16:creationId xmlns:a16="http://schemas.microsoft.com/office/drawing/2014/main" id="{5D4DA3E7-A6AB-4BA8-9A9C-98D0621924AF}"/>
               </a:ext>
             </a:extLst>
           </p:cNvPr>
@@ -19374,7 +19660,7 @@
           <p:cNvPr id="13" name="Realizamos um estudo sistemático dos avi">
             <a:extLst xmlns:a="http://schemas.openxmlformats.org/drawingml/2006/main">
               <a:ext uri="{FF2B5EF4-FFF2-40B4-BE49-F238E27FC236}">
-                <a16:creationId xmlns:a16="http://schemas.microsoft.com/office/drawing/2014/main" id="{0873B924-8B57-4552-8CBF-E66F2BB1961B}"/>
+                <a16:creationId xmlns:a16="http://schemas.microsoft.com/office/drawing/2014/main" id="{94489E3F-9BBF-4496-A8E5-74F02282C862}"/>
               </a:ext>
             </a:extLst>
           </p:cNvPr>
@@ -19431,7 +19717,7 @@
           <p:cNvPr id="14" name="">
             <a:extLst xmlns:a="http://schemas.openxmlformats.org/drawingml/2006/main">
               <a:ext uri="{FF2B5EF4-FFF2-40B4-BE49-F238E27FC236}">
-                <a16:creationId xmlns:a16="http://schemas.microsoft.com/office/drawing/2014/main" id="{606011F4-056C-49CF-9DEB-8A74C7474F5A}"/>
+                <a16:creationId xmlns:a16="http://schemas.microsoft.com/office/drawing/2014/main" id="{6B1E6161-41EE-41D2-874D-B73F8E152004}"/>
               </a:ext>
             </a:extLst>
           </p:cNvPr>
@@ -19461,7 +19747,7 @@
           <p:cNvPr id="15" name="30.160">
             <a:extLst xmlns:a="http://schemas.openxmlformats.org/drawingml/2006/main">
               <a:ext uri="{FF2B5EF4-FFF2-40B4-BE49-F238E27FC236}">
-                <a16:creationId xmlns:a16="http://schemas.microsoft.com/office/drawing/2014/main" id="{B701385C-0D68-48B2-B7B1-883AB6FCA681}"/>
+                <a16:creationId xmlns:a16="http://schemas.microsoft.com/office/drawing/2014/main" id="{9636B47A-B5E2-40F6-AA72-CE3AD0C6A8B7}"/>
               </a:ext>
             </a:extLst>
           </p:cNvPr>
@@ -19518,7 +19804,7 @@
           <p:cNvPr id="16" name="apps sem aviso que&#10;enviaram dados">
             <a:extLst xmlns:a="http://schemas.openxmlformats.org/drawingml/2006/main">
               <a:ext uri="{FF2B5EF4-FFF2-40B4-BE49-F238E27FC236}">
-                <a16:creationId xmlns:a16="http://schemas.microsoft.com/office/drawing/2014/main" id="{A834C251-8136-4FE2-9A00-DA98660195BF}"/>
+                <a16:creationId xmlns:a16="http://schemas.microsoft.com/office/drawing/2014/main" id="{309CA0F0-B8EA-40C5-AF06-ADFCEFC576FC}"/>
               </a:ext>
             </a:extLst>
           </p:cNvPr>
@@ -19598,7 +19884,7 @@
           <p:cNvPr id="17" name="2.688 (20,54%)">
             <a:extLst xmlns:a="http://schemas.openxmlformats.org/drawingml/2006/main">
               <a:ext uri="{FF2B5EF4-FFF2-40B4-BE49-F238E27FC236}">
-                <a16:creationId xmlns:a16="http://schemas.microsoft.com/office/drawing/2014/main" id="{74561AFA-9FCD-48CC-B8FE-6E9A023CA14B}"/>
+                <a16:creationId xmlns:a16="http://schemas.microsoft.com/office/drawing/2014/main" id="{E45BFC41-6C02-48AD-A49B-49BDB2A03D9A}"/>
               </a:ext>
             </a:extLst>
           </p:cNvPr>
@@ -19655,7 +19941,7 @@
           <p:cNvPr id="18" name="dos 13.082 apps com aviso,&#10;com potencial">
             <a:extLst xmlns:a="http://schemas.openxmlformats.org/drawingml/2006/main">
               <a:ext uri="{FF2B5EF4-FFF2-40B4-BE49-F238E27FC236}">
-                <a16:creationId xmlns:a16="http://schemas.microsoft.com/office/drawing/2014/main" id="{1092C222-CDF8-4D4E-95A9-45BC4CF9843D}"/>
+                <a16:creationId xmlns:a16="http://schemas.microsoft.com/office/drawing/2014/main" id="{2220D2FF-1ED0-413B-859C-CE6E3A39D85B}"/>
               </a:ext>
             </a:extLst>
           </p:cNvPr>
@@ -19730,10 +20016,32 @@
           </a:p>
         </p:txBody>
       </p:sp>
+      <p:pic>
+        <p:nvPicPr>
+          <p:cNvPr id="38" name=""/>
+          <p:cNvPicPr>
+            <a:picLocks xmlns:a="http://schemas.openxmlformats.org/drawingml/2006/main" noChangeAspect="1"/>
+          </p:cNvPicPr>
+          <p:nvPr/>
+        </p:nvPicPr>
+        <p:blipFill>
+          <a:blip xmlns:r="http://schemas.openxmlformats.org/officeDocument/2006/relationships" xmlns:a="http://schemas.openxmlformats.org/drawingml/2006/main" r:embed="R9072f734b7854939"/>
+          <a:stretch xmlns:a="http://schemas.openxmlformats.org/drawingml/2006/main"/>
+        </p:blipFill>
+        <p:spPr>
+          <a:xfrm xmlns:a="http://schemas.openxmlformats.org/drawingml/2006/main">
+            <a:off x="10829925" y="3830"/>
+            <a:ext cx="952500" cy="944839"/>
+          </a:xfrm>
+          <a:prstGeom xmlns:a="http://schemas.openxmlformats.org/drawingml/2006/main" prst="rect">
+            <a:avLst/>
+          </a:prstGeom>
+        </p:spPr>
+      </p:pic>
     </p:spTree>
     <p:extLst>
       <p:ext uri="{BB962C8B-B14F-4D97-AF65-F5344CB8AC3E}">
-        <p14:creationId xmlns:p14="http://schemas.microsoft.com/office/powerpoint/2010/main" val="1261623168"/>
+        <p14:creationId xmlns:p14="http://schemas.microsoft.com/office/powerpoint/2010/main" val="504699128"/>
       </p:ext>
     </p:extLst>
   </p:cSld>
@@ -19761,10 +20069,10 @@
       </p:grpSpPr>
       <p:sp>
         <p:nvSpPr>
-          <p:cNvPr id="20" name="">
-            <a:extLst xmlns:a="http://schemas.openxmlformats.org/drawingml/2006/main">
-              <a:ext uri="{FF2B5EF4-FFF2-40B4-BE49-F238E27FC236}">
-                <a16:creationId xmlns:a16="http://schemas.microsoft.com/office/drawing/2014/main" id="{3E66ABFB-6C76-48E7-ABA6-AB1DA1F428C6}"/>
+          <p:cNvPr id="16" name="">
+            <a:extLst xmlns:a="http://schemas.openxmlformats.org/drawingml/2006/main">
+              <a:ext uri="{FF2B5EF4-FFF2-40B4-BE49-F238E27FC236}">
+                <a16:creationId xmlns:a16="http://schemas.microsoft.com/office/drawing/2014/main" id="{592F8099-A4A8-4355-A46B-7467A7FC4360}"/>
               </a:ext>
             </a:extLst>
           </p:cNvPr>
@@ -19794,7 +20102,7 @@
           <p:cNvPr id="2" name="ANÁLISE DA SEÇÃO 8">
             <a:extLst xmlns:a="http://schemas.openxmlformats.org/drawingml/2006/main">
               <a:ext uri="{FF2B5EF4-FFF2-40B4-BE49-F238E27FC236}">
-                <a16:creationId xmlns:a16="http://schemas.microsoft.com/office/drawing/2014/main" id="{018FD4D6-9F1C-4598-A99A-F815301DECF3}"/>
+                <a16:creationId xmlns:a16="http://schemas.microsoft.com/office/drawing/2014/main" id="{81BFD1BA-16FA-45F9-ACA2-2EF4FF9DFCB4}"/>
               </a:ext>
             </a:extLst>
           </p:cNvPr>
@@ -19848,10 +20156,10 @@
       </p:sp>
       <p:sp>
         <p:nvSpPr>
-          <p:cNvPr id="3" name="Conclusão: transparência, suporte e caut">
-            <a:extLst xmlns:a="http://schemas.openxmlformats.org/drawingml/2006/main">
-              <a:ext uri="{FF2B5EF4-FFF2-40B4-BE49-F238E27FC236}">
-                <a16:creationId xmlns:a16="http://schemas.microsoft.com/office/drawing/2014/main" id="{3E2153A0-3AAF-434D-B98E-1603B75E2FC6}"/>
+          <p:cNvPr id="3" name="Conclusão: transparência e apoio aos des">
+            <a:extLst xmlns:a="http://schemas.openxmlformats.org/drawingml/2006/main">
+              <a:ext uri="{FF2B5EF4-FFF2-40B4-BE49-F238E27FC236}">
+                <a16:creationId xmlns:a16="http://schemas.microsoft.com/office/drawing/2014/main" id="{174E7EEC-0E95-4689-A315-589AA8B62FF7}"/>
               </a:ext>
             </a:extLst>
           </p:cNvPr>
@@ -19898,7 +20206,7 @@
                 <a:ea typeface="Arial"/>
                 <a:cs typeface="Arial"/>
               </a:rPr>
-              <a:t>Conclusão: transparência, suporte e cautela</a:t>
+              <a:t>Conclusão: transparência e apoio aos desenvolvedores</a:t>
             </a:r>
           </a:p>
         </p:txBody>
@@ -19908,7 +20216,7 @@
           <p:cNvPr id="4" name="">
             <a:extLst xmlns:a="http://schemas.openxmlformats.org/drawingml/2006/main">
               <a:ext uri="{FF2B5EF4-FFF2-40B4-BE49-F238E27FC236}">
-                <a16:creationId xmlns:a16="http://schemas.microsoft.com/office/drawing/2014/main" id="{C393C677-51C1-4B93-8C3D-A601BD68C4A0}"/>
+                <a16:creationId xmlns:a16="http://schemas.microsoft.com/office/drawing/2014/main" id="{84716DB5-E896-47C7-862E-8756F4EA9642}"/>
               </a:ext>
             </a:extLst>
           </p:cNvPr>
@@ -19938,7 +20246,7 @@
           <p:cNvPr id="5" name="">
             <a:extLst xmlns:a="http://schemas.openxmlformats.org/drawingml/2006/main">
               <a:ext uri="{FF2B5EF4-FFF2-40B4-BE49-F238E27FC236}">
-                <a16:creationId xmlns:a16="http://schemas.microsoft.com/office/drawing/2014/main" id="{BC262B17-621A-4624-84F8-42EFA898646F}"/>
+                <a16:creationId xmlns:a16="http://schemas.microsoft.com/office/drawing/2014/main" id="{389B3EBF-647C-4961-843A-3D2CC4FF3505}"/>
               </a:ext>
             </a:extLst>
           </p:cNvPr>
@@ -19965,10 +20273,10 @@
       </p:sp>
       <p:sp>
         <p:nvSpPr>
-          <p:cNvPr id="6" name="Nguyen, Backes e Stock (2022), Abstract,">
-            <a:extLst xmlns:a="http://schemas.openxmlformats.org/drawingml/2006/main">
-              <a:ext uri="{FF2B5EF4-FFF2-40B4-BE49-F238E27FC236}">
-                <a16:creationId xmlns:a16="http://schemas.microsoft.com/office/drawing/2014/main" id="{71D9E55D-37B3-49E0-8EE2-799B400236ED}"/>
+          <p:cNvPr id="6" name="Nguyen, Backes e Stock (2022), Conclusio">
+            <a:extLst xmlns:a="http://schemas.openxmlformats.org/drawingml/2006/main">
+              <a:ext uri="{FF2B5EF4-FFF2-40B4-BE49-F238E27FC236}">
+                <a16:creationId xmlns:a16="http://schemas.microsoft.com/office/drawing/2014/main" id="{9AFB1FA9-80BC-43E4-B622-303C790BCD0B}"/>
               </a:ext>
             </a:extLst>
           </p:cNvPr>
@@ -20015,7 +20323,7 @@
                 <a:ea typeface="Arial"/>
                 <a:cs typeface="Arial"/>
               </a:rPr>
-              <a:t>Nguyen, Backes e Stock (2022), Abstract, p. 1, nota 1, p. 2–3, e Conclusion, p. 13.</a:t>
+              <a:t>Nguyen, Backes e Stock (2022), Conclusion, p. 13. EN: excerto literal. PT: tradução do apresentador.</a:t>
             </a:r>
           </a:p>
         </p:txBody>
@@ -20025,7 +20333,7 @@
           <p:cNvPr id="7" name="22 / 23">
             <a:extLst xmlns:a="http://schemas.openxmlformats.org/drawingml/2006/main">
               <a:ext uri="{FF2B5EF4-FFF2-40B4-BE49-F238E27FC236}">
-                <a16:creationId xmlns:a16="http://schemas.microsoft.com/office/drawing/2014/main" id="{97F17288-0888-467F-807E-45929B7B224B}"/>
+                <a16:creationId xmlns:a16="http://schemas.microsoft.com/office/drawing/2014/main" id="{0375D18A-031C-4297-94C6-924199D3D160}"/>
               </a:ext>
             </a:extLst>
           </p:cNvPr>
@@ -20082,18 +20390,18 @@
           <p:cNvPr id="8" name="EN">
             <a:extLst xmlns:a="http://schemas.openxmlformats.org/drawingml/2006/main">
               <a:ext uri="{FF2B5EF4-FFF2-40B4-BE49-F238E27FC236}">
-                <a16:creationId xmlns:a16="http://schemas.microsoft.com/office/drawing/2014/main" id="{F4B6627A-6864-4582-BAC4-CAE9F7533977}"/>
-              </a:ext>
-            </a:extLst>
-          </p:cNvPr>
-          <p:cNvSpPr>
-            <a:spLocks xmlns:a="http://schemas.openxmlformats.org/drawingml/2006/main" noGrp="1"/>
-          </p:cNvSpPr>
-          <p:nvPr/>
-        </p:nvSpPr>
-        <p:spPr>
-          <a:xfrm xmlns:a="http://schemas.openxmlformats.org/drawingml/2006/main">
-            <a:off x="609600" y="1762125"/>
+                <a16:creationId xmlns:a16="http://schemas.microsoft.com/office/drawing/2014/main" id="{D5AD3B95-9D8B-4A87-82C7-D9E63D891F9F}"/>
+              </a:ext>
+            </a:extLst>
+          </p:cNvPr>
+          <p:cNvSpPr>
+            <a:spLocks xmlns:a="http://schemas.openxmlformats.org/drawingml/2006/main" noGrp="1"/>
+          </p:cNvSpPr>
+          <p:nvPr/>
+        </p:nvSpPr>
+        <p:spPr>
+          <a:xfrm xmlns:a="http://schemas.openxmlformats.org/drawingml/2006/main">
+            <a:off x="609600" y="1857375"/>
             <a:ext cx="323850" cy="209550"/>
           </a:xfrm>
           <a:prstGeom xmlns:a="http://schemas.openxmlformats.org/drawingml/2006/main" prst="rect">
@@ -20139,19 +20447,19 @@
           <p:cNvPr id="9" name="“Our study showed the urgent need for mo">
             <a:extLst xmlns:a="http://schemas.openxmlformats.org/drawingml/2006/main">
               <a:ext uri="{FF2B5EF4-FFF2-40B4-BE49-F238E27FC236}">
-                <a16:creationId xmlns:a16="http://schemas.microsoft.com/office/drawing/2014/main" id="{CEF5311B-C839-48D8-B3CB-E2C5EF0AB97B}"/>
-              </a:ext>
-            </a:extLst>
-          </p:cNvPr>
-          <p:cNvSpPr>
-            <a:spLocks xmlns:a="http://schemas.openxmlformats.org/drawingml/2006/main" noGrp="1"/>
-          </p:cNvSpPr>
-          <p:nvPr/>
-        </p:nvSpPr>
-        <p:spPr>
-          <a:xfrm xmlns:a="http://schemas.openxmlformats.org/drawingml/2006/main">
-            <a:off x="1028700" y="1733550"/>
-            <a:ext cx="10553700" cy="714375"/>
+                <a16:creationId xmlns:a16="http://schemas.microsoft.com/office/drawing/2014/main" id="{401AD8D2-D627-4C3B-B81F-90E68DF69FFC}"/>
+              </a:ext>
+            </a:extLst>
+          </p:cNvPr>
+          <p:cNvSpPr>
+            <a:spLocks xmlns:a="http://schemas.openxmlformats.org/drawingml/2006/main" noGrp="1"/>
+          </p:cNvSpPr>
+          <p:nvPr/>
+        </p:nvSpPr>
+        <p:spPr>
+          <a:xfrm xmlns:a="http://schemas.openxmlformats.org/drawingml/2006/main">
+            <a:off x="1028700" y="1828800"/>
+            <a:ext cx="10553700" cy="762000"/>
           </a:xfrm>
           <a:prstGeom xmlns:a="http://schemas.openxmlformats.org/drawingml/2006/main" prst="rect">
             <a:avLst/>
@@ -20196,18 +20504,18 @@
           <p:cNvPr id="10" name="PT">
             <a:extLst xmlns:a="http://schemas.openxmlformats.org/drawingml/2006/main">
               <a:ext uri="{FF2B5EF4-FFF2-40B4-BE49-F238E27FC236}">
-                <a16:creationId xmlns:a16="http://schemas.microsoft.com/office/drawing/2014/main" id="{D30ABBD3-6934-4FA0-838E-6922234B9D71}"/>
-              </a:ext>
-            </a:extLst>
-          </p:cNvPr>
-          <p:cNvSpPr>
-            <a:spLocks xmlns:a="http://schemas.openxmlformats.org/drawingml/2006/main" noGrp="1"/>
-          </p:cNvSpPr>
-          <p:nvPr/>
-        </p:nvSpPr>
-        <p:spPr>
-          <a:xfrm xmlns:a="http://schemas.openxmlformats.org/drawingml/2006/main">
-            <a:off x="609600" y="2647950"/>
+                <a16:creationId xmlns:a16="http://schemas.microsoft.com/office/drawing/2014/main" id="{22FFDEDD-23EA-4480-8CF7-0F8EE1518213}"/>
+              </a:ext>
+            </a:extLst>
+          </p:cNvPr>
+          <p:cNvSpPr>
+            <a:spLocks xmlns:a="http://schemas.openxmlformats.org/drawingml/2006/main" noGrp="1"/>
+          </p:cNvSpPr>
+          <p:nvPr/>
+        </p:nvSpPr>
+        <p:spPr>
+          <a:xfrm xmlns:a="http://schemas.openxmlformats.org/drawingml/2006/main">
+            <a:off x="609600" y="2838450"/>
             <a:ext cx="323850" cy="209550"/>
           </a:xfrm>
           <a:prstGeom xmlns:a="http://schemas.openxmlformats.org/drawingml/2006/main" prst="rect">
@@ -20253,19 +20561,19 @@
           <p:cNvPr id="11" name="Nosso estudo mostrou a necessidade urgen">
             <a:extLst xmlns:a="http://schemas.openxmlformats.org/drawingml/2006/main">
               <a:ext uri="{FF2B5EF4-FFF2-40B4-BE49-F238E27FC236}">
-                <a16:creationId xmlns:a16="http://schemas.microsoft.com/office/drawing/2014/main" id="{19465716-C18A-445D-BD63-D9B48385AA82}"/>
-              </a:ext>
-            </a:extLst>
-          </p:cNvPr>
-          <p:cNvSpPr>
-            <a:spLocks xmlns:a="http://schemas.openxmlformats.org/drawingml/2006/main" noGrp="1"/>
-          </p:cNvSpPr>
-          <p:nvPr/>
-        </p:nvSpPr>
-        <p:spPr>
-          <a:xfrm xmlns:a="http://schemas.openxmlformats.org/drawingml/2006/main">
-            <a:off x="1028700" y="2619375"/>
-            <a:ext cx="10553700" cy="790575"/>
+                <a16:creationId xmlns:a16="http://schemas.microsoft.com/office/drawing/2014/main" id="{B27ABEC1-CBE0-4523-B372-450E2642C105}"/>
+              </a:ext>
+            </a:extLst>
+          </p:cNvPr>
+          <p:cNvSpPr>
+            <a:spLocks xmlns:a="http://schemas.openxmlformats.org/drawingml/2006/main" noGrp="1"/>
+          </p:cNvSpPr>
+          <p:nvPr/>
+        </p:nvSpPr>
+        <p:spPr>
+          <a:xfrm xmlns:a="http://schemas.openxmlformats.org/drawingml/2006/main">
+            <a:off x="1028700" y="2809875"/>
+            <a:ext cx="10553700" cy="857250"/>
           </a:xfrm>
           <a:prstGeom xmlns:a="http://schemas.openxmlformats.org/drawingml/2006/main" prst="rect">
             <a:avLst/>
@@ -20310,18 +20618,18 @@
           <p:cNvPr id="12" name="">
             <a:extLst xmlns:a="http://schemas.openxmlformats.org/drawingml/2006/main">
               <a:ext uri="{FF2B5EF4-FFF2-40B4-BE49-F238E27FC236}">
-                <a16:creationId xmlns:a16="http://schemas.microsoft.com/office/drawing/2014/main" id="{F8CF8C0F-7F44-4F9B-94C5-5F2EBE85BFCD}"/>
-              </a:ext>
-            </a:extLst>
-          </p:cNvPr>
-          <p:cNvSpPr>
-            <a:spLocks xmlns:a="http://schemas.openxmlformats.org/drawingml/2006/main" noGrp="1"/>
-          </p:cNvSpPr>
-          <p:nvPr/>
-        </p:nvSpPr>
-        <p:spPr>
-          <a:xfrm xmlns:a="http://schemas.openxmlformats.org/drawingml/2006/main">
-            <a:off x="609600" y="3800475"/>
+                <a16:creationId xmlns:a16="http://schemas.microsoft.com/office/drawing/2014/main" id="{FF80F5BC-5B44-4A35-86B8-E524E0EB930F}"/>
+              </a:ext>
+            </a:extLst>
+          </p:cNvPr>
+          <p:cNvSpPr>
+            <a:spLocks xmlns:a="http://schemas.openxmlformats.org/drawingml/2006/main" noGrp="1"/>
+          </p:cNvSpPr>
+          <p:nvPr/>
+        </p:nvSpPr>
+        <p:spPr>
+          <a:xfrm xmlns:a="http://schemas.openxmlformats.org/drawingml/2006/main">
+            <a:off x="609600" y="4057650"/>
             <a:ext cx="10972800" cy="9525"/>
           </a:xfrm>
           <a:prstGeom xmlns:a="http://schemas.openxmlformats.org/drawingml/2006/main" prst="rect">
@@ -20337,22 +20645,22 @@
       </p:sp>
       <p:sp>
         <p:nvSpPr>
-          <p:cNvPr id="13" name="ABSTRACT">
-            <a:extLst xmlns:a="http://schemas.openxmlformats.org/drawingml/2006/main">
-              <a:ext uri="{FF2B5EF4-FFF2-40B4-BE49-F238E27FC236}">
-                <a16:creationId xmlns:a16="http://schemas.microsoft.com/office/drawing/2014/main" id="{192C9E6B-9577-4C66-833D-FA200AD5953A}"/>
-              </a:ext>
-            </a:extLst>
-          </p:cNvPr>
-          <p:cNvSpPr>
-            <a:spLocks xmlns:a="http://schemas.openxmlformats.org/drawingml/2006/main" noGrp="1"/>
-          </p:cNvSpPr>
-          <p:nvPr/>
-        </p:nvSpPr>
-        <p:spPr>
-          <a:xfrm xmlns:a="http://schemas.openxmlformats.org/drawingml/2006/main">
-            <a:off x="609600" y="4095750"/>
-            <a:ext cx="5162550" cy="266700"/>
+          <p:cNvPr id="13" name="ANÁLISE DO SEMINÁRIO">
+            <a:extLst xmlns:a="http://schemas.openxmlformats.org/drawingml/2006/main">
+              <a:ext uri="{FF2B5EF4-FFF2-40B4-BE49-F238E27FC236}">
+                <a16:creationId xmlns:a16="http://schemas.microsoft.com/office/drawing/2014/main" id="{F813EC08-AEB7-4D0C-8557-17DFB5D8392C}"/>
+              </a:ext>
+            </a:extLst>
+          </p:cNvPr>
+          <p:cNvSpPr>
+            <a:spLocks xmlns:a="http://schemas.openxmlformats.org/drawingml/2006/main" noGrp="1"/>
+          </p:cNvSpPr>
+          <p:nvPr/>
+        </p:nvSpPr>
+        <p:spPr>
+          <a:xfrm xmlns:a="http://schemas.openxmlformats.org/drawingml/2006/main">
+            <a:off x="609600" y="4410075"/>
+            <a:ext cx="10972800" cy="266700"/>
           </a:xfrm>
           <a:prstGeom xmlns:a="http://schemas.openxmlformats.org/drawingml/2006/main" prst="rect">
             <a:avLst/>
@@ -20371,7 +20679,7 @@
             <a:pPr algn="l">
               <a:defRPr sz="1350" b="1">
                 <a:solidFill>
-                  <a:srgbClr val="AC4C45"/>
+                  <a:srgbClr val="174875"/>
                 </a:solidFill>
                 <a:latin typeface="Arial"/>
                 <a:ea typeface="Arial"/>
@@ -20381,35 +20689,35 @@
             <a:r>
               <a:rPr sz="1350" b="1">
                 <a:solidFill>
-                  <a:srgbClr val="AC4C45"/>
-                </a:solidFill>
-                <a:latin typeface="Arial"/>
-                <a:ea typeface="Arial"/>
-                <a:cs typeface="Arial"/>
-              </a:rPr>
-              <a:t>ABSTRACT</a:t>
-            </a:r>
-          </a:p>
-        </p:txBody>
-      </p:sp>
-      <p:sp>
-        <p:nvSpPr>
-          <p:cNvPr id="14" name="EN  “apps violate”">
-            <a:extLst xmlns:a="http://schemas.openxmlformats.org/drawingml/2006/main">
-              <a:ext uri="{FF2B5EF4-FFF2-40B4-BE49-F238E27FC236}">
-                <a16:creationId xmlns:a16="http://schemas.microsoft.com/office/drawing/2014/main" id="{58A6A5F8-0E7D-43F1-950E-837952220AC2}"/>
-              </a:ext>
-            </a:extLst>
-          </p:cNvPr>
-          <p:cNvSpPr>
-            <a:spLocks xmlns:a="http://schemas.openxmlformats.org/drawingml/2006/main" noGrp="1"/>
-          </p:cNvSpPr>
-          <p:nvPr/>
-        </p:nvSpPr>
-        <p:spPr>
-          <a:xfrm xmlns:a="http://schemas.openxmlformats.org/drawingml/2006/main">
-            <a:off x="609600" y="4495800"/>
-            <a:ext cx="5162550" cy="419100"/>
+                  <a:srgbClr val="174875"/>
+                </a:solidFill>
+                <a:latin typeface="Arial"/>
+                <a:ea typeface="Arial"/>
+                <a:cs typeface="Arial"/>
+              </a:rPr>
+              <a:t>ANÁLISE DO SEMINÁRIO</a:t>
+            </a:r>
+          </a:p>
+        </p:txBody>
+      </p:sp>
+      <p:sp>
+        <p:nvSpPr>
+          <p:cNvPr id="14" name="A conclusão retoma os achados e aponta a">
+            <a:extLst xmlns:a="http://schemas.openxmlformats.org/drawingml/2006/main">
+              <a:ext uri="{FF2B5EF4-FFF2-40B4-BE49-F238E27FC236}">
+                <a16:creationId xmlns:a16="http://schemas.microsoft.com/office/drawing/2014/main" id="{8DF2E33C-D446-457D-B0CE-1A79DEE2D6A5}"/>
+              </a:ext>
+            </a:extLst>
+          </p:cNvPr>
+          <p:cNvSpPr>
+            <a:spLocks xmlns:a="http://schemas.openxmlformats.org/drawingml/2006/main" noGrp="1"/>
+          </p:cNvSpPr>
+          <p:nvPr/>
+        </p:nvSpPr>
+        <p:spPr>
+          <a:xfrm xmlns:a="http://schemas.openxmlformats.org/drawingml/2006/main">
+            <a:off x="609600" y="4857750"/>
+            <a:ext cx="10972800" cy="1047750"/>
           </a:xfrm>
           <a:prstGeom xmlns:a="http://schemas.openxmlformats.org/drawingml/2006/main" prst="rect">
             <a:avLst/>
@@ -20426,7 +20734,7 @@
           <a:lstStyle xmlns:a="http://schemas.openxmlformats.org/drawingml/2006/main"/>
           <a:p xmlns:a="http://schemas.openxmlformats.org/drawingml/2006/main">
             <a:pPr algn="l">
-              <a:defRPr sz="2325" b="1">
+              <a:defRPr sz="2325" b="0">
                 <a:solidFill>
                   <a:srgbClr val="24384A"/>
                 </a:solidFill>
@@ -20436,7 +20744,7 @@
               </a:defRPr>
             </a:pPr>
             <a:r>
-              <a:rPr sz="2325" b="1">
+              <a:rPr sz="2325" b="0">
                 <a:solidFill>
                   <a:srgbClr val="24384A"/>
                 </a:solidFill>
@@ -20444,300 +20752,37 @@
                 <a:ea typeface="Arial"/>
                 <a:cs typeface="Arial"/>
               </a:rPr>
-              <a:t>EN  “apps violate”</a:t>
-            </a:r>
-          </a:p>
-        </p:txBody>
-      </p:sp>
-      <p:sp>
-        <p:nvSpPr>
-          <p:cNvPr id="15" name="PT  aplicativos violam">
-            <a:extLst xmlns:a="http://schemas.openxmlformats.org/drawingml/2006/main">
-              <a:ext uri="{FF2B5EF4-FFF2-40B4-BE49-F238E27FC236}">
-                <a16:creationId xmlns:a16="http://schemas.microsoft.com/office/drawing/2014/main" id="{18448069-E63B-47BE-8ADC-1C441A940553}"/>
-              </a:ext>
-            </a:extLst>
-          </p:cNvPr>
-          <p:cNvSpPr>
-            <a:spLocks xmlns:a="http://schemas.openxmlformats.org/drawingml/2006/main" noGrp="1"/>
-          </p:cNvSpPr>
-          <p:nvPr/>
-        </p:nvSpPr>
-        <p:spPr>
-          <a:xfrm xmlns:a="http://schemas.openxmlformats.org/drawingml/2006/main">
-            <a:off x="609600" y="5010150"/>
-            <a:ext cx="5162550" cy="409575"/>
-          </a:xfrm>
-          <a:prstGeom xmlns:a="http://schemas.openxmlformats.org/drawingml/2006/main" prst="rect">
-            <a:avLst/>
-          </a:prstGeom>
-          <a:noFill xmlns:a="http://schemas.openxmlformats.org/drawingml/2006/main"/>
-          <a:ln xmlns:a="http://schemas.openxmlformats.org/drawingml/2006/main" w="0">
-            <a:noFill/>
-          </a:ln>
-        </p:spPr>
-        <p:txBody>
-          <a:bodyPr xmlns:a="http://schemas.openxmlformats.org/drawingml/2006/main" wrap="square" lIns="0" tIns="0" rIns="0" bIns="0" anchor="t">
-            <a:noAutofit/>
-          </a:bodyPr>
-          <a:lstStyle xmlns:a="http://schemas.openxmlformats.org/drawingml/2006/main"/>
-          <a:p xmlns:a="http://schemas.openxmlformats.org/drawingml/2006/main">
-            <a:pPr algn="l">
-              <a:defRPr sz="2175" b="0">
-                <a:solidFill>
-                  <a:srgbClr val="AC4C45"/>
-                </a:solidFill>
-                <a:latin typeface="Arial"/>
-                <a:ea typeface="Arial"/>
-                <a:cs typeface="Arial"/>
-              </a:defRPr>
-            </a:pPr>
-            <a:r>
-              <a:rPr sz="2175" b="0">
-                <a:solidFill>
-                  <a:srgbClr val="AC4C45"/>
-                </a:solidFill>
-                <a:latin typeface="Arial"/>
-                <a:ea typeface="Arial"/>
-                <a:cs typeface="Arial"/>
-              </a:rPr>
-              <a:t>PT  aplicativos violam</a:t>
-            </a:r>
-          </a:p>
-        </p:txBody>
-      </p:sp>
-      <p:sp>
-        <p:nvSpPr>
-          <p:cNvPr id="16" name="CONCLUSION">
-            <a:extLst xmlns:a="http://schemas.openxmlformats.org/drawingml/2006/main">
-              <a:ext uri="{FF2B5EF4-FFF2-40B4-BE49-F238E27FC236}">
-                <a16:creationId xmlns:a16="http://schemas.microsoft.com/office/drawing/2014/main" id="{5372C517-5941-4C1B-8DF7-47AB20A68EB9}"/>
-              </a:ext>
-            </a:extLst>
-          </p:cNvPr>
-          <p:cNvSpPr>
-            <a:spLocks xmlns:a="http://schemas.openxmlformats.org/drawingml/2006/main" noGrp="1"/>
-          </p:cNvSpPr>
-          <p:nvPr/>
-        </p:nvSpPr>
-        <p:spPr>
-          <a:xfrm xmlns:a="http://schemas.openxmlformats.org/drawingml/2006/main">
-            <a:off x="6438900" y="4095750"/>
-            <a:ext cx="5143500" cy="266700"/>
-          </a:xfrm>
-          <a:prstGeom xmlns:a="http://schemas.openxmlformats.org/drawingml/2006/main" prst="rect">
-            <a:avLst/>
-          </a:prstGeom>
-          <a:noFill xmlns:a="http://schemas.openxmlformats.org/drawingml/2006/main"/>
-          <a:ln xmlns:a="http://schemas.openxmlformats.org/drawingml/2006/main" w="0">
-            <a:noFill/>
-          </a:ln>
-        </p:spPr>
-        <p:txBody>
-          <a:bodyPr xmlns:a="http://schemas.openxmlformats.org/drawingml/2006/main" wrap="square" lIns="0" tIns="0" rIns="0" bIns="0" anchor="t">
-            <a:noAutofit/>
-          </a:bodyPr>
-          <a:lstStyle xmlns:a="http://schemas.openxmlformats.org/drawingml/2006/main"/>
-          <a:p xmlns:a="http://schemas.openxmlformats.org/drawingml/2006/main">
-            <a:pPr algn="l">
-              <a:defRPr sz="1350" b="1">
-                <a:solidFill>
-                  <a:srgbClr val="174875"/>
-                </a:solidFill>
-                <a:latin typeface="Arial"/>
-                <a:ea typeface="Arial"/>
-                <a:cs typeface="Arial"/>
-              </a:defRPr>
-            </a:pPr>
-            <a:r>
-              <a:rPr sz="1350" b="1">
-                <a:solidFill>
-                  <a:srgbClr val="174875"/>
-                </a:solidFill>
-                <a:latin typeface="Arial"/>
-                <a:ea typeface="Arial"/>
-                <a:cs typeface="Arial"/>
-              </a:rPr>
-              <a:t>CONCLUSION</a:t>
-            </a:r>
-          </a:p>
-        </p:txBody>
-      </p:sp>
-      <p:sp>
-        <p:nvSpPr>
-          <p:cNvPr id="17" name="EN  “apps potentially violate”">
-            <a:extLst xmlns:a="http://schemas.openxmlformats.org/drawingml/2006/main">
-              <a:ext uri="{FF2B5EF4-FFF2-40B4-BE49-F238E27FC236}">
-                <a16:creationId xmlns:a16="http://schemas.microsoft.com/office/drawing/2014/main" id="{DB03AC1F-30DC-4472-8811-9E75C8C9493A}"/>
-              </a:ext>
-            </a:extLst>
-          </p:cNvPr>
-          <p:cNvSpPr>
-            <a:spLocks xmlns:a="http://schemas.openxmlformats.org/drawingml/2006/main" noGrp="1"/>
-          </p:cNvSpPr>
-          <p:nvPr/>
-        </p:nvSpPr>
-        <p:spPr>
-          <a:xfrm xmlns:a="http://schemas.openxmlformats.org/drawingml/2006/main">
-            <a:off x="6438900" y="4495800"/>
-            <a:ext cx="5143500" cy="419100"/>
-          </a:xfrm>
-          <a:prstGeom xmlns:a="http://schemas.openxmlformats.org/drawingml/2006/main" prst="rect">
-            <a:avLst/>
-          </a:prstGeom>
-          <a:noFill xmlns:a="http://schemas.openxmlformats.org/drawingml/2006/main"/>
-          <a:ln xmlns:a="http://schemas.openxmlformats.org/drawingml/2006/main" w="0">
-            <a:noFill/>
-          </a:ln>
-        </p:spPr>
-        <p:txBody>
-          <a:bodyPr xmlns:a="http://schemas.openxmlformats.org/drawingml/2006/main" wrap="square" lIns="0" tIns="0" rIns="0" bIns="0" anchor="t">
-            <a:noAutofit/>
-          </a:bodyPr>
-          <a:lstStyle xmlns:a="http://schemas.openxmlformats.org/drawingml/2006/main"/>
-          <a:p xmlns:a="http://schemas.openxmlformats.org/drawingml/2006/main">
-            <a:pPr algn="l">
-              <a:defRPr sz="2325" b="1">
-                <a:solidFill>
-                  <a:srgbClr val="24384A"/>
-                </a:solidFill>
-                <a:latin typeface="Arial"/>
-                <a:ea typeface="Arial"/>
-                <a:cs typeface="Arial"/>
-              </a:defRPr>
-            </a:pPr>
-            <a:r>
-              <a:rPr sz="2325" b="1">
-                <a:solidFill>
-                  <a:srgbClr val="24384A"/>
-                </a:solidFill>
-                <a:latin typeface="Arial"/>
-                <a:ea typeface="Arial"/>
-                <a:cs typeface="Arial"/>
-              </a:rPr>
-              <a:t>EN  “apps potentially violate”</a:t>
-            </a:r>
-          </a:p>
-        </p:txBody>
-      </p:sp>
-      <p:sp>
-        <p:nvSpPr>
-          <p:cNvPr id="18" name="PT  aplicativos potencialmente violam">
-            <a:extLst xmlns:a="http://schemas.openxmlformats.org/drawingml/2006/main">
-              <a:ext uri="{FF2B5EF4-FFF2-40B4-BE49-F238E27FC236}">
-                <a16:creationId xmlns:a16="http://schemas.microsoft.com/office/drawing/2014/main" id="{08221B71-40FE-491B-ADF8-9A79E14F654B}"/>
-              </a:ext>
-            </a:extLst>
-          </p:cNvPr>
-          <p:cNvSpPr>
-            <a:spLocks xmlns:a="http://schemas.openxmlformats.org/drawingml/2006/main" noGrp="1"/>
-          </p:cNvSpPr>
-          <p:nvPr/>
-        </p:nvSpPr>
-        <p:spPr>
-          <a:xfrm xmlns:a="http://schemas.openxmlformats.org/drawingml/2006/main">
-            <a:off x="6438900" y="5010150"/>
-            <a:ext cx="5143500" cy="704850"/>
-          </a:xfrm>
-          <a:prstGeom xmlns:a="http://schemas.openxmlformats.org/drawingml/2006/main" prst="rect">
-            <a:avLst/>
-          </a:prstGeom>
-          <a:noFill xmlns:a="http://schemas.openxmlformats.org/drawingml/2006/main"/>
-          <a:ln xmlns:a="http://schemas.openxmlformats.org/drawingml/2006/main" w="0">
-            <a:noFill/>
-          </a:ln>
-        </p:spPr>
-        <p:txBody>
-          <a:bodyPr xmlns:a="http://schemas.openxmlformats.org/drawingml/2006/main" wrap="square" lIns="0" tIns="0" rIns="0" bIns="0" anchor="t">
-            <a:noAutofit/>
-          </a:bodyPr>
-          <a:lstStyle xmlns:a="http://schemas.openxmlformats.org/drawingml/2006/main"/>
-          <a:p xmlns:a="http://schemas.openxmlformats.org/drawingml/2006/main">
-            <a:pPr algn="l">
-              <a:defRPr sz="2175" b="0">
-                <a:solidFill>
-                  <a:srgbClr val="174875"/>
-                </a:solidFill>
-                <a:latin typeface="Arial"/>
-                <a:ea typeface="Arial"/>
-                <a:cs typeface="Arial"/>
-              </a:defRPr>
-            </a:pPr>
-            <a:r>
-              <a:rPr sz="2175" b="0">
-                <a:solidFill>
-                  <a:srgbClr val="174875"/>
-                </a:solidFill>
-                <a:latin typeface="Arial"/>
-                <a:ea typeface="Arial"/>
-                <a:cs typeface="Arial"/>
-              </a:rPr>
-              <a:t>PT  aplicativos potencialmente violam</a:t>
-            </a:r>
-          </a:p>
-        </p:txBody>
-      </p:sp>
-      <p:sp>
-        <p:nvSpPr>
-          <p:cNvPr id="19" name="Análise do seminário: “potentially” expl">
-            <a:extLst xmlns:a="http://schemas.openxmlformats.org/drawingml/2006/main">
-              <a:ext uri="{FF2B5EF4-FFF2-40B4-BE49-F238E27FC236}">
-                <a16:creationId xmlns:a16="http://schemas.microsoft.com/office/drawing/2014/main" id="{AD61CFAA-AEA9-479D-BFAA-878E79062081}"/>
-              </a:ext>
-            </a:extLst>
-          </p:cNvPr>
-          <p:cNvSpPr>
-            <a:spLocks xmlns:a="http://schemas.openxmlformats.org/drawingml/2006/main" noGrp="1"/>
-          </p:cNvSpPr>
-          <p:nvPr/>
-        </p:nvSpPr>
-        <p:spPr>
-          <a:xfrm xmlns:a="http://schemas.openxmlformats.org/drawingml/2006/main">
-            <a:off x="609600" y="5886450"/>
-            <a:ext cx="10972800" cy="409575"/>
-          </a:xfrm>
-          <a:prstGeom xmlns:a="http://schemas.openxmlformats.org/drawingml/2006/main" prst="rect">
-            <a:avLst/>
-          </a:prstGeom>
-          <a:noFill xmlns:a="http://schemas.openxmlformats.org/drawingml/2006/main"/>
-          <a:ln xmlns:a="http://schemas.openxmlformats.org/drawingml/2006/main" w="0">
-            <a:noFill/>
-          </a:ln>
-        </p:spPr>
-        <p:txBody>
-          <a:bodyPr xmlns:a="http://schemas.openxmlformats.org/drawingml/2006/main" wrap="square" lIns="0" tIns="0" rIns="0" bIns="0" anchor="t">
-            <a:noAutofit/>
-          </a:bodyPr>
-          <a:lstStyle xmlns:a="http://schemas.openxmlformats.org/drawingml/2006/main"/>
-          <a:p xmlns:a="http://schemas.openxmlformats.org/drawingml/2006/main">
-            <a:pPr algn="l">
-              <a:defRPr sz="1875" b="1">
-                <a:solidFill>
-                  <a:srgbClr val="12324F"/>
-                </a:solidFill>
-                <a:latin typeface="Arial"/>
-                <a:ea typeface="Arial"/>
-                <a:cs typeface="Arial"/>
-              </a:defRPr>
-            </a:pPr>
-            <a:r>
-              <a:rPr sz="1875" b="1">
-                <a:solidFill>
-                  <a:srgbClr val="12324F"/>
-                </a:solidFill>
-                <a:latin typeface="Arial"/>
-                <a:ea typeface="Arial"/>
-                <a:cs typeface="Arial"/>
-              </a:rPr>
-              <a:t>Análise do seminário: “potentially” explicita no fechamento a cautela anunciada na nota 1.</a:t>
-            </a:r>
-          </a:p>
-        </p:txBody>
-      </p:sp>
+              <a:t>A conclusão retoma os achados e aponta a necessidade de maior transparência no tratamento de dados e de apoio aos desenvolvedores.</a:t>
+            </a:r>
+          </a:p>
+        </p:txBody>
+      </p:sp>
+      <p:pic>
+        <p:nvPicPr>
+          <p:cNvPr id="30" name=""/>
+          <p:cNvPicPr>
+            <a:picLocks xmlns:a="http://schemas.openxmlformats.org/drawingml/2006/main" noChangeAspect="1"/>
+          </p:cNvPicPr>
+          <p:nvPr/>
+        </p:nvPicPr>
+        <p:blipFill>
+          <a:blip xmlns:r="http://schemas.openxmlformats.org/officeDocument/2006/relationships" xmlns:a="http://schemas.openxmlformats.org/drawingml/2006/main" r:embed="R136fa0e6e41e4616"/>
+          <a:stretch xmlns:a="http://schemas.openxmlformats.org/drawingml/2006/main"/>
+        </p:blipFill>
+        <p:spPr>
+          <a:xfrm xmlns:a="http://schemas.openxmlformats.org/drawingml/2006/main">
+            <a:off x="10829925" y="3830"/>
+            <a:ext cx="952500" cy="944839"/>
+          </a:xfrm>
+          <a:prstGeom xmlns:a="http://schemas.openxmlformats.org/drawingml/2006/main" prst="rect">
+            <a:avLst/>
+          </a:prstGeom>
+        </p:spPr>
+      </p:pic>
     </p:spTree>
     <p:extLst>
       <p:ext uri="{BB962C8B-B14F-4D97-AF65-F5344CB8AC3E}">
-        <p14:creationId xmlns:p14="http://schemas.microsoft.com/office/powerpoint/2010/main" val="2074659549"/>
+        <p14:creationId xmlns:p14="http://schemas.microsoft.com/office/powerpoint/2010/main" val="715282385"/>
       </p:ext>
     </p:extLst>
   </p:cSld>
@@ -20765,10 +20810,10 @@
       </p:grpSpPr>
       <p:sp>
         <p:nvSpPr>
-          <p:cNvPr id="18" name="">
-            <a:extLst xmlns:a="http://schemas.openxmlformats.org/drawingml/2006/main">
-              <a:ext uri="{FF2B5EF4-FFF2-40B4-BE49-F238E27FC236}">
-                <a16:creationId xmlns:a16="http://schemas.microsoft.com/office/drawing/2014/main" id="{3CEF2252-BD3A-4390-B12F-4FB1BC7E2B73}"/>
+          <p:cNvPr id="19" name="">
+            <a:extLst xmlns:a="http://schemas.openxmlformats.org/drawingml/2006/main">
+              <a:ext uri="{FF2B5EF4-FFF2-40B4-BE49-F238E27FC236}">
+                <a16:creationId xmlns:a16="http://schemas.microsoft.com/office/drawing/2014/main" id="{E5B4DBEC-C9BF-48B3-B561-494BEC44BE0C}"/>
               </a:ext>
             </a:extLst>
           </p:cNvPr>
@@ -20798,7 +20843,7 @@
           <p:cNvPr id="2" name="APLICAÇÃO AO PROJETO">
             <a:extLst xmlns:a="http://schemas.openxmlformats.org/drawingml/2006/main">
               <a:ext uri="{FF2B5EF4-FFF2-40B4-BE49-F238E27FC236}">
-                <a16:creationId xmlns:a16="http://schemas.microsoft.com/office/drawing/2014/main" id="{5EB49831-4BD0-4982-A699-31A13177703C}"/>
+                <a16:creationId xmlns:a16="http://schemas.microsoft.com/office/drawing/2014/main" id="{7D3B4955-434A-45C0-A152-45062D21F19C}"/>
               </a:ext>
             </a:extLst>
           </p:cNvPr>
@@ -20855,7 +20900,7 @@
           <p:cNvPr id="3" name="Contribuições para o meu TCC">
             <a:extLst xmlns:a="http://schemas.openxmlformats.org/drawingml/2006/main">
               <a:ext uri="{FF2B5EF4-FFF2-40B4-BE49-F238E27FC236}">
-                <a16:creationId xmlns:a16="http://schemas.microsoft.com/office/drawing/2014/main" id="{9FFC13B1-F8D6-48D1-841B-E7BAD2EDFEFE}"/>
+                <a16:creationId xmlns:a16="http://schemas.microsoft.com/office/drawing/2014/main" id="{A5531C43-D1C5-4FF1-BA6B-A72A661C1D76}"/>
               </a:ext>
             </a:extLst>
           </p:cNvPr>
@@ -20912,7 +20957,7 @@
           <p:cNvPr id="4" name="">
             <a:extLst xmlns:a="http://schemas.openxmlformats.org/drawingml/2006/main">
               <a:ext uri="{FF2B5EF4-FFF2-40B4-BE49-F238E27FC236}">
-                <a16:creationId xmlns:a16="http://schemas.microsoft.com/office/drawing/2014/main" id="{153FB4D8-D91D-4E01-A2C8-549A1B147F8B}"/>
+                <a16:creationId xmlns:a16="http://schemas.microsoft.com/office/drawing/2014/main" id="{9B5FDCF2-C739-4ECD-88F5-B781C279809A}"/>
               </a:ext>
             </a:extLst>
           </p:cNvPr>
@@ -20942,7 +20987,7 @@
           <p:cNvPr id="5" name="">
             <a:extLst xmlns:a="http://schemas.openxmlformats.org/drawingml/2006/main">
               <a:ext uri="{FF2B5EF4-FFF2-40B4-BE49-F238E27FC236}">
-                <a16:creationId xmlns:a16="http://schemas.microsoft.com/office/drawing/2014/main" id="{DBA95A01-321C-4FA9-9433-B4E12CAC85F8}"/>
+                <a16:creationId xmlns:a16="http://schemas.microsoft.com/office/drawing/2014/main" id="{349F72E6-891E-4029-8F22-280F88DE7580}"/>
               </a:ext>
             </a:extLst>
           </p:cNvPr>
@@ -20972,7 +21017,7 @@
           <p:cNvPr id="6" name="Fontes: artigo de Nguyen et al. (2022) e">
             <a:extLst xmlns:a="http://schemas.openxmlformats.org/drawingml/2006/main">
               <a:ext uri="{FF2B5EF4-FFF2-40B4-BE49-F238E27FC236}">
-                <a16:creationId xmlns:a16="http://schemas.microsoft.com/office/drawing/2014/main" id="{43A02A25-FD24-4D70-A9D4-2823C35E10B4}"/>
+                <a16:creationId xmlns:a16="http://schemas.microsoft.com/office/drawing/2014/main" id="{BA6FC5CF-029E-455C-B428-43505A5A27D7}"/>
               </a:ext>
             </a:extLst>
           </p:cNvPr>
@@ -21029,7 +21074,7 @@
           <p:cNvPr id="7" name="23 / 23">
             <a:extLst xmlns:a="http://schemas.openxmlformats.org/drawingml/2006/main">
               <a:ext uri="{FF2B5EF4-FFF2-40B4-BE49-F238E27FC236}">
-                <a16:creationId xmlns:a16="http://schemas.microsoft.com/office/drawing/2014/main" id="{D4C9E6AC-F7B1-4CFC-BA24-FC233022C469}"/>
+                <a16:creationId xmlns:a16="http://schemas.microsoft.com/office/drawing/2014/main" id="{573BF2A5-CDFF-4895-87CC-506CE77B7971}"/>
               </a:ext>
             </a:extLst>
           </p:cNvPr>
@@ -21086,7 +21131,7 @@
           <p:cNvPr id="8" name="MÉTODO">
             <a:extLst xmlns:a="http://schemas.openxmlformats.org/drawingml/2006/main">
               <a:ext uri="{FF2B5EF4-FFF2-40B4-BE49-F238E27FC236}">
-                <a16:creationId xmlns:a16="http://schemas.microsoft.com/office/drawing/2014/main" id="{F3F1C5B8-42C2-44DD-A6DF-E482CD338E45}"/>
+                <a16:creationId xmlns:a16="http://schemas.microsoft.com/office/drawing/2014/main" id="{D3AD7E11-2ADD-4258-BC27-9183DC416766}"/>
               </a:ext>
             </a:extLst>
           </p:cNvPr>
@@ -21143,7 +21188,7 @@
           <p:cNvPr id="9" name="Relacionar as interfaces e declarações d">
             <a:extLst xmlns:a="http://schemas.openxmlformats.org/drawingml/2006/main">
               <a:ext uri="{FF2B5EF4-FFF2-40B4-BE49-F238E27FC236}">
-                <a16:creationId xmlns:a16="http://schemas.microsoft.com/office/drawing/2014/main" id="{CCC9F957-0B5F-4969-B83E-BD3FEAC5C46C}"/>
+                <a16:creationId xmlns:a16="http://schemas.microsoft.com/office/drawing/2014/main" id="{717B590E-D077-4DEA-BF07-DA105DDD3973}"/>
               </a:ext>
             </a:extLst>
           </p:cNvPr>
@@ -21223,7 +21268,7 @@
           <p:cNvPr id="10" name="">
             <a:extLst xmlns:a="http://schemas.openxmlformats.org/drawingml/2006/main">
               <a:ext uri="{FF2B5EF4-FFF2-40B4-BE49-F238E27FC236}">
-                <a16:creationId xmlns:a16="http://schemas.microsoft.com/office/drawing/2014/main" id="{4B57598C-90D8-4197-8BA1-CB7629678183}"/>
+                <a16:creationId xmlns:a16="http://schemas.microsoft.com/office/drawing/2014/main" id="{D328A934-CC2F-443A-A26E-97D3E91D3552}"/>
               </a:ext>
             </a:extLst>
           </p:cNvPr>
@@ -21253,7 +21298,7 @@
           <p:cNvPr id="11" name="ESCRITA">
             <a:extLst xmlns:a="http://schemas.openxmlformats.org/drawingml/2006/main">
               <a:ext uri="{FF2B5EF4-FFF2-40B4-BE49-F238E27FC236}">
-                <a16:creationId xmlns:a16="http://schemas.microsoft.com/office/drawing/2014/main" id="{1A7D13C7-0D41-4773-B216-0A0DC0E41ADA}"/>
+                <a16:creationId xmlns:a16="http://schemas.microsoft.com/office/drawing/2014/main" id="{D3AED329-97D5-4B39-9A32-1758E72A6E6B}"/>
               </a:ext>
             </a:extLst>
           </p:cNvPr>
@@ -21310,7 +21355,7 @@
           <p:cNvPr id="12" name="Informar perdas da análise, limitações e">
             <a:extLst xmlns:a="http://schemas.openxmlformats.org/drawingml/2006/main">
               <a:ext uri="{FF2B5EF4-FFF2-40B4-BE49-F238E27FC236}">
-                <a16:creationId xmlns:a16="http://schemas.microsoft.com/office/drawing/2014/main" id="{C3B3F1D4-5F1E-4CB2-B705-9859303AEA37}"/>
+                <a16:creationId xmlns:a16="http://schemas.microsoft.com/office/drawing/2014/main" id="{E9593C0F-70C2-43F6-BAB7-B190D159AED6}"/>
               </a:ext>
             </a:extLst>
           </p:cNvPr>
@@ -21390,7 +21435,7 @@
           <p:cNvPr id="13" name="">
             <a:extLst xmlns:a="http://schemas.openxmlformats.org/drawingml/2006/main">
               <a:ext uri="{FF2B5EF4-FFF2-40B4-BE49-F238E27FC236}">
-                <a16:creationId xmlns:a16="http://schemas.microsoft.com/office/drawing/2014/main" id="{571236BE-6489-4D3C-950F-754E6D311577}"/>
+                <a16:creationId xmlns:a16="http://schemas.microsoft.com/office/drawing/2014/main" id="{3B8FDA0D-53B3-4FEA-B552-414D5F641641}"/>
               </a:ext>
             </a:extLst>
           </p:cNvPr>
@@ -21420,7 +21465,7 @@
           <p:cNvPr id="14" name="RECORTE">
             <a:extLst xmlns:a="http://schemas.openxmlformats.org/drawingml/2006/main">
               <a:ext uri="{FF2B5EF4-FFF2-40B4-BE49-F238E27FC236}">
-                <a16:creationId xmlns:a16="http://schemas.microsoft.com/office/drawing/2014/main" id="{FAAA7B0A-5245-4BFA-9F81-567A6AB26D46}"/>
+                <a16:creationId xmlns:a16="http://schemas.microsoft.com/office/drawing/2014/main" id="{A57D00B1-86DB-4EC7-A8E6-3090FFCE12BF}"/>
               </a:ext>
             </a:extLst>
           </p:cNvPr>
@@ -21477,7 +21522,7 @@
           <p:cNvPr id="15" name="Investigar aplicativos governamentais br">
             <a:extLst xmlns:a="http://schemas.openxmlformats.org/drawingml/2006/main">
               <a:ext uri="{FF2B5EF4-FFF2-40B4-BE49-F238E27FC236}">
-                <a16:creationId xmlns:a16="http://schemas.microsoft.com/office/drawing/2014/main" id="{1D0ADE23-F91B-46AF-85A6-09ED94D83AC6}"/>
+                <a16:creationId xmlns:a16="http://schemas.microsoft.com/office/drawing/2014/main" id="{E99B8ADB-51CD-42BF-8D97-6AB7C35876BA}"/>
               </a:ext>
             </a:extLst>
           </p:cNvPr>
@@ -21557,7 +21602,7 @@
           <p:cNvPr id="16" name="">
             <a:extLst xmlns:a="http://schemas.openxmlformats.org/drawingml/2006/main">
               <a:ext uri="{FF2B5EF4-FFF2-40B4-BE49-F238E27FC236}">
-                <a16:creationId xmlns:a16="http://schemas.microsoft.com/office/drawing/2014/main" id="{B794715D-E115-46D2-97B5-EAEC3CB1C42E}"/>
+                <a16:creationId xmlns:a16="http://schemas.microsoft.com/office/drawing/2014/main" id="{D841FF5E-7C93-477B-B46A-060859E462C4}"/>
               </a:ext>
             </a:extLst>
           </p:cNvPr>
@@ -21587,7 +21632,7 @@
           <p:cNvPr id="17" name="Que dados os apps governamentais enviam ">
             <a:extLst xmlns:a="http://schemas.openxmlformats.org/drawingml/2006/main">
               <a:ext uri="{FF2B5EF4-FFF2-40B4-BE49-F238E27FC236}">
-                <a16:creationId xmlns:a16="http://schemas.microsoft.com/office/drawing/2014/main" id="{4B725100-75B4-4DD1-80D9-2A84B36121B8}"/>
+                <a16:creationId xmlns:a16="http://schemas.microsoft.com/office/drawing/2014/main" id="{8E9B5E22-6DD4-4DA3-88DD-BD38E1102E74}"/>
               </a:ext>
             </a:extLst>
           </p:cNvPr>
@@ -21662,10 +21707,32 @@
           </a:p>
         </p:txBody>
       </p:sp>
+      <p:pic>
+        <p:nvPicPr>
+          <p:cNvPr id="36" name=""/>
+          <p:cNvPicPr>
+            <a:picLocks xmlns:a="http://schemas.openxmlformats.org/drawingml/2006/main" noChangeAspect="1"/>
+          </p:cNvPicPr>
+          <p:nvPr/>
+        </p:nvPicPr>
+        <p:blipFill>
+          <a:blip xmlns:r="http://schemas.openxmlformats.org/officeDocument/2006/relationships" xmlns:a="http://schemas.openxmlformats.org/drawingml/2006/main" r:embed="Rf2916d670eb14881"/>
+          <a:stretch xmlns:a="http://schemas.openxmlformats.org/drawingml/2006/main"/>
+        </p:blipFill>
+        <p:spPr>
+          <a:xfrm xmlns:a="http://schemas.openxmlformats.org/drawingml/2006/main">
+            <a:off x="10829925" y="3830"/>
+            <a:ext cx="952500" cy="944839"/>
+          </a:xfrm>
+          <a:prstGeom xmlns:a="http://schemas.openxmlformats.org/drawingml/2006/main" prst="rect">
+            <a:avLst/>
+          </a:prstGeom>
+        </p:spPr>
+      </p:pic>
     </p:spTree>
     <p:extLst>
       <p:ext uri="{BB962C8B-B14F-4D97-AF65-F5344CB8AC3E}">
-        <p14:creationId xmlns:p14="http://schemas.microsoft.com/office/powerpoint/2010/main" val="1648870052"/>
+        <p14:creationId xmlns:p14="http://schemas.microsoft.com/office/powerpoint/2010/main" val="116850020"/>
       </p:ext>
     </p:extLst>
   </p:cSld>
@@ -21693,10 +21760,10 @@
       </p:grpSpPr>
       <p:sp>
         <p:nvSpPr>
-          <p:cNvPr id="10" name="">
-            <a:extLst xmlns:a="http://schemas.openxmlformats.org/drawingml/2006/main">
-              <a:ext uri="{FF2B5EF4-FFF2-40B4-BE49-F238E27FC236}">
-                <a16:creationId xmlns:a16="http://schemas.microsoft.com/office/drawing/2014/main" id="{B53FE043-7F5F-470F-B0D9-CC336B558C90}"/>
+          <p:cNvPr id="11" name="">
+            <a:extLst xmlns:a="http://schemas.openxmlformats.org/drawingml/2006/main">
+              <a:ext uri="{FF2B5EF4-FFF2-40B4-BE49-F238E27FC236}">
+                <a16:creationId xmlns:a16="http://schemas.microsoft.com/office/drawing/2014/main" id="{B60448E0-85A4-4F9C-A30D-1A4D1FB365E1}"/>
               </a:ext>
             </a:extLst>
           </p:cNvPr>
@@ -21726,7 +21793,7 @@
           <p:cNvPr id="2" name="APOIO: SELEÇÃO">
             <a:extLst xmlns:a="http://schemas.openxmlformats.org/drawingml/2006/main">
               <a:ext uri="{FF2B5EF4-FFF2-40B4-BE49-F238E27FC236}">
-                <a16:creationId xmlns:a16="http://schemas.microsoft.com/office/drawing/2014/main" id="{0B90D7FE-D1E5-4E3F-B50B-86ABCC1B238D}"/>
+                <a16:creationId xmlns:a16="http://schemas.microsoft.com/office/drawing/2014/main" id="{93B4BC1E-2B8D-4D45-B1B1-290751B572D0}"/>
               </a:ext>
             </a:extLst>
           </p:cNvPr>
@@ -21783,7 +21850,7 @@
           <p:cNvPr id="3" name="Os cinco finalistas da seleção">
             <a:extLst xmlns:a="http://schemas.openxmlformats.org/drawingml/2006/main">
               <a:ext uri="{FF2B5EF4-FFF2-40B4-BE49-F238E27FC236}">
-                <a16:creationId xmlns:a16="http://schemas.microsoft.com/office/drawing/2014/main" id="{CB9C0884-BB49-4670-8F82-7ABA9A7E49F0}"/>
+                <a16:creationId xmlns:a16="http://schemas.microsoft.com/office/drawing/2014/main" id="{7F6267BF-99C9-4032-ADBE-FD2296E5CA97}"/>
               </a:ext>
             </a:extLst>
           </p:cNvPr>
@@ -21840,7 +21907,7 @@
           <p:cNvPr id="4" name="">
             <a:extLst xmlns:a="http://schemas.openxmlformats.org/drawingml/2006/main">
               <a:ext uri="{FF2B5EF4-FFF2-40B4-BE49-F238E27FC236}">
-                <a16:creationId xmlns:a16="http://schemas.microsoft.com/office/drawing/2014/main" id="{05B0E472-2071-492C-B42F-CC43EB3C709E}"/>
+                <a16:creationId xmlns:a16="http://schemas.microsoft.com/office/drawing/2014/main" id="{88B58D77-1CAC-4D4C-899E-31B58944CA70}"/>
               </a:ext>
             </a:extLst>
           </p:cNvPr>
@@ -21870,7 +21937,7 @@
           <p:cNvPr id="5" name="">
             <a:extLst xmlns:a="http://schemas.openxmlformats.org/drawingml/2006/main">
               <a:ext uri="{FF2B5EF4-FFF2-40B4-BE49-F238E27FC236}">
-                <a16:creationId xmlns:a16="http://schemas.microsoft.com/office/drawing/2014/main" id="{C619AA50-3875-45C7-BDCB-77BFFE087582}"/>
+                <a16:creationId xmlns:a16="http://schemas.microsoft.com/office/drawing/2014/main" id="{FFA24F05-55CB-46BE-97F8-FC8F17ED7C99}"/>
               </a:ext>
             </a:extLst>
           </p:cNvPr>
@@ -21900,7 +21967,7 @@
           <p:cNvPr id="6" name="Fontes: Scopus via CAPES/CAFe (21/09/202">
             <a:extLst xmlns:a="http://schemas.openxmlformats.org/drawingml/2006/main">
               <a:ext uri="{FF2B5EF4-FFF2-40B4-BE49-F238E27FC236}">
-                <a16:creationId xmlns:a16="http://schemas.microsoft.com/office/drawing/2014/main" id="{4C89A84E-004D-4922-95D5-FE0B8A69C521}"/>
+                <a16:creationId xmlns:a16="http://schemas.microsoft.com/office/drawing/2014/main" id="{221E8ED0-30D0-441D-97BA-3E9FFB95A366}"/>
               </a:ext>
             </a:extLst>
           </p:cNvPr>
@@ -21957,7 +22024,7 @@
           <p:cNvPr id="7" name="APOIO 1">
             <a:extLst xmlns:a="http://schemas.openxmlformats.org/drawingml/2006/main">
               <a:ext uri="{FF2B5EF4-FFF2-40B4-BE49-F238E27FC236}">
-                <a16:creationId xmlns:a16="http://schemas.microsoft.com/office/drawing/2014/main" id="{99AC486B-2E5D-405F-B10B-6A0D7C1AEC3C}"/>
+                <a16:creationId xmlns:a16="http://schemas.microsoft.com/office/drawing/2014/main" id="{0D1DD1DD-0F21-4B7C-A47A-A9B045E2F382}"/>
               </a:ext>
             </a:extLst>
           </p:cNvPr>
@@ -22011,7 +22078,7 @@
       </p:sp>
       <p:graphicFrame>
         <p:nvGraphicFramePr>
-          <p:cNvPr id="17" name=""/>
+          <p:cNvPr id="18" name=""/>
           <p:cNvGraphicFramePr/>
           <p:nvPr/>
         </p:nvGraphicFramePr>
@@ -23316,7 +23383,7 @@
           <p:cNvPr id="9" name="Citações e classificação complementam a ">
             <a:extLst xmlns:a="http://schemas.openxmlformats.org/drawingml/2006/main">
               <a:ext uri="{FF2B5EF4-FFF2-40B4-BE49-F238E27FC236}">
-                <a16:creationId xmlns:a16="http://schemas.microsoft.com/office/drawing/2014/main" id="{B8BE6745-1EAA-4C55-845C-26938D590D75}"/>
+                <a16:creationId xmlns:a16="http://schemas.microsoft.com/office/drawing/2014/main" id="{3279A5EF-221C-4BFA-9029-1D7E8EEB6892}"/>
               </a:ext>
             </a:extLst>
           </p:cNvPr>
@@ -23368,10 +23435,32 @@
           </a:p>
         </p:txBody>
       </p:sp>
+      <p:pic>
+        <p:nvPicPr>
+          <p:cNvPr id="20" name=""/>
+          <p:cNvPicPr>
+            <a:picLocks xmlns:a="http://schemas.openxmlformats.org/drawingml/2006/main" noChangeAspect="1"/>
+          </p:cNvPicPr>
+          <p:nvPr/>
+        </p:nvPicPr>
+        <p:blipFill>
+          <a:blip xmlns:r="http://schemas.openxmlformats.org/officeDocument/2006/relationships" xmlns:a="http://schemas.openxmlformats.org/drawingml/2006/main" r:embed="R0cd083ce753642b0"/>
+          <a:stretch xmlns:a="http://schemas.openxmlformats.org/drawingml/2006/main"/>
+        </p:blipFill>
+        <p:spPr>
+          <a:xfrm xmlns:a="http://schemas.openxmlformats.org/drawingml/2006/main">
+            <a:off x="10829925" y="3830"/>
+            <a:ext cx="952500" cy="944839"/>
+          </a:xfrm>
+          <a:prstGeom xmlns:a="http://schemas.openxmlformats.org/drawingml/2006/main" prst="rect">
+            <a:avLst/>
+          </a:prstGeom>
+        </p:spPr>
+      </p:pic>
     </p:spTree>
     <p:extLst>
       <p:ext uri="{BB962C8B-B14F-4D97-AF65-F5344CB8AC3E}">
-        <p14:creationId xmlns:p14="http://schemas.microsoft.com/office/powerpoint/2010/main" val="872901211"/>
+        <p14:creationId xmlns:p14="http://schemas.microsoft.com/office/powerpoint/2010/main" val="283107448"/>
       </p:ext>
     </p:extLst>
   </p:cSld>
@@ -23399,10 +23488,10 @@
       </p:grpSpPr>
       <p:sp>
         <p:nvSpPr>
-          <p:cNvPr id="15" name="">
-            <a:extLst xmlns:a="http://schemas.openxmlformats.org/drawingml/2006/main">
-              <a:ext uri="{FF2B5EF4-FFF2-40B4-BE49-F238E27FC236}">
-                <a16:creationId xmlns:a16="http://schemas.microsoft.com/office/drawing/2014/main" id="{2B4B1A20-9371-4A0F-B665-A161C2B2C3AE}"/>
+          <p:cNvPr id="16" name="">
+            <a:extLst xmlns:a="http://schemas.openxmlformats.org/drawingml/2006/main">
+              <a:ext uri="{FF2B5EF4-FFF2-40B4-BE49-F238E27FC236}">
+                <a16:creationId xmlns:a16="http://schemas.microsoft.com/office/drawing/2014/main" id="{19909AA5-3940-40B4-A6A2-E851490A9FA9}"/>
               </a:ext>
             </a:extLst>
           </p:cNvPr>
@@ -23432,7 +23521,7 @@
           <p:cNvPr id="2" name="APOIO: FONTES">
             <a:extLst xmlns:a="http://schemas.openxmlformats.org/drawingml/2006/main">
               <a:ext uri="{FF2B5EF4-FFF2-40B4-BE49-F238E27FC236}">
-                <a16:creationId xmlns:a16="http://schemas.microsoft.com/office/drawing/2014/main" id="{C4565919-BD4E-4A9A-A93B-FA482D05C410}"/>
+                <a16:creationId xmlns:a16="http://schemas.microsoft.com/office/drawing/2014/main" id="{4C5088DC-6415-44CD-B774-1C3EA6761948}"/>
               </a:ext>
             </a:extLst>
           </p:cNvPr>
@@ -23489,7 +23578,7 @@
           <p:cNvPr id="3" name="Referências e rastreabilidade">
             <a:extLst xmlns:a="http://schemas.openxmlformats.org/drawingml/2006/main">
               <a:ext uri="{FF2B5EF4-FFF2-40B4-BE49-F238E27FC236}">
-                <a16:creationId xmlns:a16="http://schemas.microsoft.com/office/drawing/2014/main" id="{2D3F848C-6125-4427-8A84-2FF2B478CA78}"/>
+                <a16:creationId xmlns:a16="http://schemas.microsoft.com/office/drawing/2014/main" id="{CC4AFAAB-9CC9-4E5D-A44A-D0A38FEB0C13}"/>
               </a:ext>
             </a:extLst>
           </p:cNvPr>
@@ -23546,7 +23635,7 @@
           <p:cNvPr id="4" name="">
             <a:extLst xmlns:a="http://schemas.openxmlformats.org/drawingml/2006/main">
               <a:ext uri="{FF2B5EF4-FFF2-40B4-BE49-F238E27FC236}">
-                <a16:creationId xmlns:a16="http://schemas.microsoft.com/office/drawing/2014/main" id="{71AEB447-9CB2-4235-9B2F-F96E6D88DE7D}"/>
+                <a16:creationId xmlns:a16="http://schemas.microsoft.com/office/drawing/2014/main" id="{5E666C44-F2EB-4AA6-B534-1EC7D738BF91}"/>
               </a:ext>
             </a:extLst>
           </p:cNvPr>
@@ -23576,7 +23665,7 @@
           <p:cNvPr id="5" name="">
             <a:extLst xmlns:a="http://schemas.openxmlformats.org/drawingml/2006/main">
               <a:ext uri="{FF2B5EF4-FFF2-40B4-BE49-F238E27FC236}">
-                <a16:creationId xmlns:a16="http://schemas.microsoft.com/office/drawing/2014/main" id="{80CE2D65-8AD3-4CAE-BE2A-EA903D528E6E}"/>
+                <a16:creationId xmlns:a16="http://schemas.microsoft.com/office/drawing/2014/main" id="{40B65BF3-9F8E-4349-B5DE-972A8AFD09EC}"/>
               </a:ext>
             </a:extLst>
           </p:cNvPr>
@@ -23606,7 +23695,7 @@
           <p:cNvPr id="6" name="Páginas dos slides: contagem interna do ">
             <a:extLst xmlns:a="http://schemas.openxmlformats.org/drawingml/2006/main">
               <a:ext uri="{FF2B5EF4-FFF2-40B4-BE49-F238E27FC236}">
-                <a16:creationId xmlns:a16="http://schemas.microsoft.com/office/drawing/2014/main" id="{6BFC9537-51C5-485E-A5FF-9F78681E8D0A}"/>
+                <a16:creationId xmlns:a16="http://schemas.microsoft.com/office/drawing/2014/main" id="{1F2D116D-1D6F-402B-95E4-FC872DB1C8F7}"/>
               </a:ext>
             </a:extLst>
           </p:cNvPr>
@@ -23663,7 +23752,7 @@
           <p:cNvPr id="7" name="APOIO 2">
             <a:extLst xmlns:a="http://schemas.openxmlformats.org/drawingml/2006/main">
               <a:ext uri="{FF2B5EF4-FFF2-40B4-BE49-F238E27FC236}">
-                <a16:creationId xmlns:a16="http://schemas.microsoft.com/office/drawing/2014/main" id="{B8FD1BA0-334B-4048-A8C8-986A7E84FBD9}"/>
+                <a16:creationId xmlns:a16="http://schemas.microsoft.com/office/drawing/2014/main" id="{A20B6A88-D115-4DAD-8E00-FB29DEB98422}"/>
               </a:ext>
             </a:extLst>
           </p:cNvPr>
@@ -23720,7 +23809,7 @@
           <p:cNvPr id="8" name="ARTIGO ANALISADO">
             <a:extLst xmlns:a="http://schemas.openxmlformats.org/drawingml/2006/main">
               <a:ext uri="{FF2B5EF4-FFF2-40B4-BE49-F238E27FC236}">
-                <a16:creationId xmlns:a16="http://schemas.microsoft.com/office/drawing/2014/main" id="{E6BB84C6-BE0C-4BAE-929C-BAED615AF7EF}"/>
+                <a16:creationId xmlns:a16="http://schemas.microsoft.com/office/drawing/2014/main" id="{D12A5A48-BA69-47C7-AA45-D11FEB035A94}"/>
               </a:ext>
             </a:extLst>
           </p:cNvPr>
@@ -23777,7 +23866,7 @@
           <p:cNvPr id="9" name="NGUYEN, Trung Tin; BACKES, Michael; STOC">
             <a:extLst xmlns:a="http://schemas.openxmlformats.org/drawingml/2006/main">
               <a:ext uri="{FF2B5EF4-FFF2-40B4-BE49-F238E27FC236}">
-                <a16:creationId xmlns:a16="http://schemas.microsoft.com/office/drawing/2014/main" id="{F52C0600-BB4D-4173-93B4-7D354D455626}"/>
+                <a16:creationId xmlns:a16="http://schemas.microsoft.com/office/drawing/2014/main" id="{56F304F8-75BC-4B94-AFE1-CE5B499557A8}"/>
               </a:ext>
             </a:extLst>
           </p:cNvPr>
@@ -23880,7 +23969,7 @@
           <p:cNvPr id="10" name="https://doi.org/10.1145/3548606.3560564">
             <a:extLst xmlns:a="http://schemas.openxmlformats.org/drawingml/2006/main">
               <a:ext uri="{FF2B5EF4-FFF2-40B4-BE49-F238E27FC236}">
-                <a16:creationId xmlns:a16="http://schemas.microsoft.com/office/drawing/2014/main" id="{95F8C60D-0A49-4747-9BB4-813D5EBAFB64}"/>
+                <a16:creationId xmlns:a16="http://schemas.microsoft.com/office/drawing/2014/main" id="{36873C19-9321-4FBD-A7C6-C57050A48322}"/>
               </a:ext>
             </a:extLst>
           </p:cNvPr>
@@ -23937,7 +24026,7 @@
           <p:cNvPr id="11" name="PROJETO E REGISTRO DA SELEÇÃO">
             <a:extLst xmlns:a="http://schemas.openxmlformats.org/drawingml/2006/main">
               <a:ext uri="{FF2B5EF4-FFF2-40B4-BE49-F238E27FC236}">
-                <a16:creationId xmlns:a16="http://schemas.microsoft.com/office/drawing/2014/main" id="{E4386D60-3836-4531-9AE6-28DA3535164E}"/>
+                <a16:creationId xmlns:a16="http://schemas.microsoft.com/office/drawing/2014/main" id="{462A1C36-8E5E-4911-8AB9-C7FACCA744CB}"/>
               </a:ext>
             </a:extLst>
           </p:cNvPr>
@@ -23994,7 +24083,7 @@
           <p:cNvPr id="12" name="github.com/ClaudioAMF1/TCC&#10;Proposta N3, ">
             <a:extLst xmlns:a="http://schemas.openxmlformats.org/drawingml/2006/main">
               <a:ext uri="{FF2B5EF4-FFF2-40B4-BE49-F238E27FC236}">
-                <a16:creationId xmlns:a16="http://schemas.microsoft.com/office/drawing/2014/main" id="{0814ED54-1943-4DF1-9B9A-4D920B42E14C}"/>
+                <a16:creationId xmlns:a16="http://schemas.microsoft.com/office/drawing/2014/main" id="{193C6BA3-FD1A-4FA4-A858-B14D7C14BCC1}"/>
               </a:ext>
             </a:extLst>
           </p:cNvPr>
@@ -24074,7 +24163,7 @@
           <p:cNvPr id="13" name="MÉTRICAS E CLASSIFICAÇÃO">
             <a:extLst xmlns:a="http://schemas.openxmlformats.org/drawingml/2006/main">
               <a:ext uri="{FF2B5EF4-FFF2-40B4-BE49-F238E27FC236}">
-                <a16:creationId xmlns:a16="http://schemas.microsoft.com/office/drawing/2014/main" id="{C8B51932-A531-40B5-8052-50C5101F1F9E}"/>
+                <a16:creationId xmlns:a16="http://schemas.microsoft.com/office/drawing/2014/main" id="{36DFC05F-AC4B-41F5-A050-C6BFEE788667}"/>
               </a:ext>
             </a:extLst>
           </p:cNvPr>
@@ -24131,7 +24220,7 @@
           <p:cNvPr id="14" name="Google Scholar Metrics, Computer Securit">
             <a:extLst xmlns:a="http://schemas.openxmlformats.org/drawingml/2006/main">
               <a:ext uri="{FF2B5EF4-FFF2-40B4-BE49-F238E27FC236}">
-                <a16:creationId xmlns:a16="http://schemas.microsoft.com/office/drawing/2014/main" id="{29E36387-C6C7-4B9E-8012-A300EFD3156E}"/>
+                <a16:creationId xmlns:a16="http://schemas.microsoft.com/office/drawing/2014/main" id="{86569ADB-C1C0-4CBF-8371-B702867B8A09}"/>
               </a:ext>
             </a:extLst>
           </p:cNvPr>
@@ -24252,10 +24341,32 @@
           </a:p>
         </p:txBody>
       </p:sp>
+      <p:pic>
+        <p:nvPicPr>
+          <p:cNvPr id="30" name=""/>
+          <p:cNvPicPr>
+            <a:picLocks xmlns:a="http://schemas.openxmlformats.org/drawingml/2006/main" noChangeAspect="1"/>
+          </p:cNvPicPr>
+          <p:nvPr/>
+        </p:nvPicPr>
+        <p:blipFill>
+          <a:blip xmlns:r="http://schemas.openxmlformats.org/officeDocument/2006/relationships" xmlns:a="http://schemas.openxmlformats.org/drawingml/2006/main" r:embed="R7a95c44e64b648b5"/>
+          <a:stretch xmlns:a="http://schemas.openxmlformats.org/drawingml/2006/main"/>
+        </p:blipFill>
+        <p:spPr>
+          <a:xfrm xmlns:a="http://schemas.openxmlformats.org/drawingml/2006/main">
+            <a:off x="10829925" y="3830"/>
+            <a:ext cx="952500" cy="944839"/>
+          </a:xfrm>
+          <a:prstGeom xmlns:a="http://schemas.openxmlformats.org/drawingml/2006/main" prst="rect">
+            <a:avLst/>
+          </a:prstGeom>
+        </p:spPr>
+      </p:pic>
     </p:spTree>
     <p:extLst>
       <p:ext uri="{BB962C8B-B14F-4D97-AF65-F5344CB8AC3E}">
-        <p14:creationId xmlns:p14="http://schemas.microsoft.com/office/powerpoint/2010/main" val="1278251828"/>
+        <p14:creationId xmlns:p14="http://schemas.microsoft.com/office/powerpoint/2010/main" val="1337605554"/>
       </p:ext>
     </p:extLst>
   </p:cSld>
@@ -24283,10 +24394,10 @@
       </p:grpSpPr>
       <p:sp>
         <p:nvSpPr>
-          <p:cNvPr id="18" name="">
-            <a:extLst xmlns:a="http://schemas.openxmlformats.org/drawingml/2006/main">
-              <a:ext uri="{FF2B5EF4-FFF2-40B4-BE49-F238E27FC236}">
-                <a16:creationId xmlns:a16="http://schemas.microsoft.com/office/drawing/2014/main" id="{842C7824-9459-4EA6-8A1C-0C830B6553B9}"/>
+          <p:cNvPr id="19" name="">
+            <a:extLst xmlns:a="http://schemas.openxmlformats.org/drawingml/2006/main">
+              <a:ext uri="{FF2B5EF4-FFF2-40B4-BE49-F238E27FC236}">
+                <a16:creationId xmlns:a16="http://schemas.microsoft.com/office/drawing/2014/main" id="{AFCC312D-CC40-4258-B894-DAD8949B9D10}"/>
               </a:ext>
             </a:extLst>
           </p:cNvPr>
@@ -24316,7 +24427,7 @@
           <p:cNvPr id="2" name="SELEÇÃO">
             <a:extLst xmlns:a="http://schemas.openxmlformats.org/drawingml/2006/main">
               <a:ext uri="{FF2B5EF4-FFF2-40B4-BE49-F238E27FC236}">
-                <a16:creationId xmlns:a16="http://schemas.microsoft.com/office/drawing/2014/main" id="{D67AAF6F-BFDB-4EAA-B021-F51F1B73F534}"/>
+                <a16:creationId xmlns:a16="http://schemas.microsoft.com/office/drawing/2014/main" id="{86D124A5-C20F-4BD8-97BB-68BD068AC19B}"/>
               </a:ext>
             </a:extLst>
           </p:cNvPr>
@@ -24373,7 +24484,7 @@
           <p:cNvPr id="3" name="Originalidade e relevância para o TCC">
             <a:extLst xmlns:a="http://schemas.openxmlformats.org/drawingml/2006/main">
               <a:ext uri="{FF2B5EF4-FFF2-40B4-BE49-F238E27FC236}">
-                <a16:creationId xmlns:a16="http://schemas.microsoft.com/office/drawing/2014/main" id="{F22BF09B-0EDA-4346-9772-6AA103243086}"/>
+                <a16:creationId xmlns:a16="http://schemas.microsoft.com/office/drawing/2014/main" id="{1571BA39-4C90-4061-9036-285DDB919973}"/>
               </a:ext>
             </a:extLst>
           </p:cNvPr>
@@ -24430,7 +24541,7 @@
           <p:cNvPr id="4" name="">
             <a:extLst xmlns:a="http://schemas.openxmlformats.org/drawingml/2006/main">
               <a:ext uri="{FF2B5EF4-FFF2-40B4-BE49-F238E27FC236}">
-                <a16:creationId xmlns:a16="http://schemas.microsoft.com/office/drawing/2014/main" id="{62D7F620-7BF0-45D6-BD74-A95391FC2B50}"/>
+                <a16:creationId xmlns:a16="http://schemas.microsoft.com/office/drawing/2014/main" id="{161C6065-E513-4064-82FF-74988C55E4EC}"/>
               </a:ext>
             </a:extLst>
           </p:cNvPr>
@@ -24460,7 +24571,7 @@
           <p:cNvPr id="5" name="">
             <a:extLst xmlns:a="http://schemas.openxmlformats.org/drawingml/2006/main">
               <a:ext uri="{FF2B5EF4-FFF2-40B4-BE49-F238E27FC236}">
-                <a16:creationId xmlns:a16="http://schemas.microsoft.com/office/drawing/2014/main" id="{C5231506-2650-41F7-8547-40B9D2853D05}"/>
+                <a16:creationId xmlns:a16="http://schemas.microsoft.com/office/drawing/2014/main" id="{4461DE01-A203-49CA-8E8C-8C843B5DEAA9}"/>
               </a:ext>
             </a:extLst>
           </p:cNvPr>
@@ -24490,7 +24601,7 @@
           <p:cNvPr id="6" name="Nguyen, Backes e Stock (2022), p. 1–2. C">
             <a:extLst xmlns:a="http://schemas.openxmlformats.org/drawingml/2006/main">
               <a:ext uri="{FF2B5EF4-FFF2-40B4-BE49-F238E27FC236}">
-                <a16:creationId xmlns:a16="http://schemas.microsoft.com/office/drawing/2014/main" id="{1945F650-C060-43E9-86D7-2B7FA40489B4}"/>
+                <a16:creationId xmlns:a16="http://schemas.microsoft.com/office/drawing/2014/main" id="{467283B2-9104-4AA7-A9F7-5A5C9B6AD873}"/>
               </a:ext>
             </a:extLst>
           </p:cNvPr>
@@ -24547,7 +24658,7 @@
           <p:cNvPr id="7" name="03 / 23">
             <a:extLst xmlns:a="http://schemas.openxmlformats.org/drawingml/2006/main">
               <a:ext uri="{FF2B5EF4-FFF2-40B4-BE49-F238E27FC236}">
-                <a16:creationId xmlns:a16="http://schemas.microsoft.com/office/drawing/2014/main" id="{CA98393C-DAE8-47BB-8D3E-B1C9B9220A04}"/>
+                <a16:creationId xmlns:a16="http://schemas.microsoft.com/office/drawing/2014/main" id="{FAA05192-78FC-4DEB-93A8-3CFC8F5F6ADB}"/>
               </a:ext>
             </a:extLst>
           </p:cNvPr>
@@ -24601,14 +24712,14 @@
       </p:sp>
       <p:pic>
         <p:nvPicPr>
-          <p:cNvPr id="25" name=""/>
+          <p:cNvPr id="26" name=""/>
           <p:cNvPicPr>
             <a:picLocks xmlns:a="http://schemas.openxmlformats.org/drawingml/2006/main" noChangeAspect="1"/>
           </p:cNvPicPr>
           <p:nvPr/>
         </p:nvPicPr>
         <p:blipFill>
-          <a:blip xmlns:r="http://schemas.openxmlformats.org/officeDocument/2006/relationships" xmlns:a="http://schemas.openxmlformats.org/drawingml/2006/main" r:embed="R656f1e96f885439c"/>
+          <a:blip xmlns:r="http://schemas.openxmlformats.org/officeDocument/2006/relationships" xmlns:a="http://schemas.openxmlformats.org/drawingml/2006/main" r:embed="Rbdbe0f80782f4b8a"/>
           <a:stretch xmlns:a="http://schemas.openxmlformats.org/drawingml/2006/main"/>
         </p:blipFill>
         <p:spPr>
@@ -24626,7 +24737,7 @@
           <p:cNvPr id="9" name="239.381">
             <a:extLst xmlns:a="http://schemas.openxmlformats.org/drawingml/2006/main">
               <a:ext uri="{FF2B5EF4-FFF2-40B4-BE49-F238E27FC236}">
-                <a16:creationId xmlns:a16="http://schemas.microsoft.com/office/drawing/2014/main" id="{4846F817-AE4F-4490-B692-41FDCDC8052E}"/>
+                <a16:creationId xmlns:a16="http://schemas.microsoft.com/office/drawing/2014/main" id="{C1A3DD45-DAB3-433D-B867-7DDAE22E6460}"/>
               </a:ext>
             </a:extLst>
           </p:cNvPr>
@@ -24683,7 +24794,7 @@
           <p:cNvPr id="10" name="aplicativos Android analisados">
             <a:extLst xmlns:a="http://schemas.openxmlformats.org/drawingml/2006/main">
               <a:ext uri="{FF2B5EF4-FFF2-40B4-BE49-F238E27FC236}">
-                <a16:creationId xmlns:a16="http://schemas.microsoft.com/office/drawing/2014/main" id="{3B424771-EB64-484B-9BE9-54D92BA102F9}"/>
+                <a16:creationId xmlns:a16="http://schemas.microsoft.com/office/drawing/2014/main" id="{CDDA1E1F-F56D-455F-ACB4-76FEA98B6825}"/>
               </a:ext>
             </a:extLst>
           </p:cNvPr>
@@ -24740,7 +24851,7 @@
           <p:cNvPr id="11" name="">
             <a:extLst xmlns:a="http://schemas.openxmlformats.org/drawingml/2006/main">
               <a:ext uri="{FF2B5EF4-FFF2-40B4-BE49-F238E27FC236}">
-                <a16:creationId xmlns:a16="http://schemas.microsoft.com/office/drawing/2014/main" id="{02940BB8-BBC7-4A99-8E06-060F625A84F7}"/>
+                <a16:creationId xmlns:a16="http://schemas.microsoft.com/office/drawing/2014/main" id="{1E9291DF-F5A0-412D-AF1A-55D34F9DC04F}"/>
               </a:ext>
             </a:extLst>
           </p:cNvPr>
@@ -24770,7 +24881,7 @@
           <p:cNvPr id="12" name="PESQUISA ORIGINAL">
             <a:extLst xmlns:a="http://schemas.openxmlformats.org/drawingml/2006/main">
               <a:ext uri="{FF2B5EF4-FFF2-40B4-BE49-F238E27FC236}">
-                <a16:creationId xmlns:a16="http://schemas.microsoft.com/office/drawing/2014/main" id="{34B0ED20-8689-4C60-A906-D94E668DBD58}"/>
+                <a16:creationId xmlns:a16="http://schemas.microsoft.com/office/drawing/2014/main" id="{DF973B10-55B6-450D-A516-82082E71DB02}"/>
               </a:ext>
             </a:extLst>
           </p:cNvPr>
@@ -24827,7 +24938,7 @@
           <p:cNvPr id="13" name="Os autores constroem um corpus de avisos">
             <a:extLst xmlns:a="http://schemas.openxmlformats.org/drawingml/2006/main">
               <a:ext uri="{FF2B5EF4-FFF2-40B4-BE49-F238E27FC236}">
-                <a16:creationId xmlns:a16="http://schemas.microsoft.com/office/drawing/2014/main" id="{8AD7FE5A-AD07-4F28-9ED9-ABF759873CB2}"/>
+                <a16:creationId xmlns:a16="http://schemas.microsoft.com/office/drawing/2014/main" id="{9D26F409-717C-47E5-B52A-67A83A0D3993}"/>
               </a:ext>
             </a:extLst>
           </p:cNvPr>
@@ -24930,7 +25041,7 @@
           <p:cNvPr id="14" name="RELAÇÃO COM O TCC">
             <a:extLst xmlns:a="http://schemas.openxmlformats.org/drawingml/2006/main">
               <a:ext uri="{FF2B5EF4-FFF2-40B4-BE49-F238E27FC236}">
-                <a16:creationId xmlns:a16="http://schemas.microsoft.com/office/drawing/2014/main" id="{C116CDC9-DF36-405A-982D-6779D74CD06E}"/>
+                <a16:creationId xmlns:a16="http://schemas.microsoft.com/office/drawing/2014/main" id="{D69F88A3-7DD1-4C3F-A4B0-373F46F87F8F}"/>
               </a:ext>
             </a:extLst>
           </p:cNvPr>
@@ -24987,7 +25098,7 @@
           <p:cNvPr id="15" name="O TCC investiga rastreamento de terceiro">
             <a:extLst xmlns:a="http://schemas.openxmlformats.org/drawingml/2006/main">
               <a:ext uri="{FF2B5EF4-FFF2-40B4-BE49-F238E27FC236}">
-                <a16:creationId xmlns:a16="http://schemas.microsoft.com/office/drawing/2014/main" id="{A8B5E4AE-760C-4BCC-A158-04759E6A9244}"/>
+                <a16:creationId xmlns:a16="http://schemas.microsoft.com/office/drawing/2014/main" id="{470D37B0-3735-4457-B460-860833627F07}"/>
               </a:ext>
             </a:extLst>
           </p:cNvPr>
@@ -25090,7 +25201,7 @@
           <p:cNvPr id="16" name="Contribuição central: comparar as escolh">
             <a:extLst xmlns:a="http://schemas.openxmlformats.org/drawingml/2006/main">
               <a:ext uri="{FF2B5EF4-FFF2-40B4-BE49-F238E27FC236}">
-                <a16:creationId xmlns:a16="http://schemas.microsoft.com/office/drawing/2014/main" id="{279BBED1-232A-468D-940A-04A8FC768E1F}"/>
+                <a16:creationId xmlns:a16="http://schemas.microsoft.com/office/drawing/2014/main" id="{1475D5D6-CF88-477B-85B9-2CB0C8690CF3}"/>
               </a:ext>
             </a:extLst>
           </p:cNvPr>
@@ -25147,7 +25258,7 @@
           <p:cNvPr id="17" name="Citações em 17/09/2026: 42 na ACM Digita">
             <a:extLst xmlns:a="http://schemas.openxmlformats.org/drawingml/2006/main">
               <a:ext uri="{FF2B5EF4-FFF2-40B4-BE49-F238E27FC236}">
-                <a16:creationId xmlns:a16="http://schemas.microsoft.com/office/drawing/2014/main" id="{E845677B-BA81-4871-BDF3-8ED610AF577A}"/>
+                <a16:creationId xmlns:a16="http://schemas.microsoft.com/office/drawing/2014/main" id="{59905493-0450-42F5-B271-7C3B7761D1E3}"/>
               </a:ext>
             </a:extLst>
           </p:cNvPr>
@@ -25199,10 +25310,32 @@
           </a:p>
         </p:txBody>
       </p:sp>
+      <p:pic>
+        <p:nvPicPr>
+          <p:cNvPr id="36" name=""/>
+          <p:cNvPicPr>
+            <a:picLocks xmlns:a="http://schemas.openxmlformats.org/drawingml/2006/main" noChangeAspect="1"/>
+          </p:cNvPicPr>
+          <p:nvPr/>
+        </p:nvPicPr>
+        <p:blipFill>
+          <a:blip xmlns:r="http://schemas.openxmlformats.org/officeDocument/2006/relationships" xmlns:a="http://schemas.openxmlformats.org/drawingml/2006/main" r:embed="R82054f5a304d473e"/>
+          <a:stretch xmlns:a="http://schemas.openxmlformats.org/drawingml/2006/main"/>
+        </p:blipFill>
+        <p:spPr>
+          <a:xfrm xmlns:a="http://schemas.openxmlformats.org/drawingml/2006/main">
+            <a:off x="10829925" y="3830"/>
+            <a:ext cx="952500" cy="944839"/>
+          </a:xfrm>
+          <a:prstGeom xmlns:a="http://schemas.openxmlformats.org/drawingml/2006/main" prst="rect">
+            <a:avLst/>
+          </a:prstGeom>
+        </p:spPr>
+      </p:pic>
     </p:spTree>
     <p:extLst>
       <p:ext uri="{BB962C8B-B14F-4D97-AF65-F5344CB8AC3E}">
-        <p14:creationId xmlns:p14="http://schemas.microsoft.com/office/powerpoint/2010/main" val="477823105"/>
+        <p14:creationId xmlns:p14="http://schemas.microsoft.com/office/powerpoint/2010/main" val="650139943"/>
       </p:ext>
     </p:extLst>
   </p:cSld>
@@ -25230,10 +25363,10 @@
       </p:grpSpPr>
       <p:sp>
         <p:nvSpPr>
-          <p:cNvPr id="22" name="">
-            <a:extLst xmlns:a="http://schemas.openxmlformats.org/drawingml/2006/main">
-              <a:ext uri="{FF2B5EF4-FFF2-40B4-BE49-F238E27FC236}">
-                <a16:creationId xmlns:a16="http://schemas.microsoft.com/office/drawing/2014/main" id="{8876020E-A920-4CA2-B9AA-9EB4F15BCFBD}"/>
+          <p:cNvPr id="23" name="">
+            <a:extLst xmlns:a="http://schemas.openxmlformats.org/drawingml/2006/main">
+              <a:ext uri="{FF2B5EF4-FFF2-40B4-BE49-F238E27FC236}">
+                <a16:creationId xmlns:a16="http://schemas.microsoft.com/office/drawing/2014/main" id="{5EA5CEB0-77E3-42CD-8BAB-AA957382A160}"/>
               </a:ext>
             </a:extLst>
           </p:cNvPr>
@@ -25263,7 +25396,7 @@
           <p:cNvPr id="2" name="MÉTRICAS">
             <a:extLst xmlns:a="http://schemas.openxmlformats.org/drawingml/2006/main">
               <a:ext uri="{FF2B5EF4-FFF2-40B4-BE49-F238E27FC236}">
-                <a16:creationId xmlns:a16="http://schemas.microsoft.com/office/drawing/2014/main" id="{A5AFAA03-E22B-41E9-A47C-82DD3433F23E}"/>
+                <a16:creationId xmlns:a16="http://schemas.microsoft.com/office/drawing/2014/main" id="{F0DBFFF5-2A32-4F58-B238-1233C5896007}"/>
               </a:ext>
             </a:extLst>
           </p:cNvPr>
@@ -25320,7 +25453,7 @@
           <p:cNvPr id="3" name="Métricas do veículo: ACM CCS">
             <a:extLst xmlns:a="http://schemas.openxmlformats.org/drawingml/2006/main">
               <a:ext uri="{FF2B5EF4-FFF2-40B4-BE49-F238E27FC236}">
-                <a16:creationId xmlns:a16="http://schemas.microsoft.com/office/drawing/2014/main" id="{90F2B350-0893-4AAE-BA93-12AF556A0027}"/>
+                <a16:creationId xmlns:a16="http://schemas.microsoft.com/office/drawing/2014/main" id="{B57D90EB-8CEC-49B4-92A6-C2D8051586B4}"/>
               </a:ext>
             </a:extLst>
           </p:cNvPr>
@@ -25377,7 +25510,7 @@
           <p:cNvPr id="4" name="">
             <a:extLst xmlns:a="http://schemas.openxmlformats.org/drawingml/2006/main">
               <a:ext uri="{FF2B5EF4-FFF2-40B4-BE49-F238E27FC236}">
-                <a16:creationId xmlns:a16="http://schemas.microsoft.com/office/drawing/2014/main" id="{AFCB806A-4B3F-45A5-8B19-48349EEC172D}"/>
+                <a16:creationId xmlns:a16="http://schemas.microsoft.com/office/drawing/2014/main" id="{ED131436-12D2-438E-AB92-A2E8F5FDF21D}"/>
               </a:ext>
             </a:extLst>
           </p:cNvPr>
@@ -25407,7 +25540,7 @@
           <p:cNvPr id="5" name="">
             <a:extLst xmlns:a="http://schemas.openxmlformats.org/drawingml/2006/main">
               <a:ext uri="{FF2B5EF4-FFF2-40B4-BE49-F238E27FC236}">
-                <a16:creationId xmlns:a16="http://schemas.microsoft.com/office/drawing/2014/main" id="{015A7026-FE2C-406D-894D-B5A2247BEF32}"/>
+                <a16:creationId xmlns:a16="http://schemas.microsoft.com/office/drawing/2014/main" id="{91FB7BAA-2BD1-4F2A-9902-12755410A994}"/>
               </a:ext>
             </a:extLst>
           </p:cNvPr>
@@ -25437,7 +25570,7 @@
           <p:cNvPr id="6" name="Fontes: Google Scholar Metrics e ICORE, ">
             <a:extLst xmlns:a="http://schemas.openxmlformats.org/drawingml/2006/main">
               <a:ext uri="{FF2B5EF4-FFF2-40B4-BE49-F238E27FC236}">
-                <a16:creationId xmlns:a16="http://schemas.microsoft.com/office/drawing/2014/main" id="{B26001CC-C6F4-4D7E-BC4D-B33C07B79C31}"/>
+                <a16:creationId xmlns:a16="http://schemas.microsoft.com/office/drawing/2014/main" id="{CEF0E27D-A714-4736-BF98-9C765E8A1C46}"/>
               </a:ext>
             </a:extLst>
           </p:cNvPr>
@@ -25494,7 +25627,7 @@
           <p:cNvPr id="7" name="04 / 23">
             <a:extLst xmlns:a="http://schemas.openxmlformats.org/drawingml/2006/main">
               <a:ext uri="{FF2B5EF4-FFF2-40B4-BE49-F238E27FC236}">
-                <a16:creationId xmlns:a16="http://schemas.microsoft.com/office/drawing/2014/main" id="{BB91F976-EBDD-4912-BE10-AD1DE8A0F090}"/>
+                <a16:creationId xmlns:a16="http://schemas.microsoft.com/office/drawing/2014/main" id="{6EE4BCC5-93DA-457A-85CE-0074BCE82454}"/>
               </a:ext>
             </a:extLst>
           </p:cNvPr>
@@ -25551,7 +25684,7 @@
           <p:cNvPr id="8" name="GOOGLE SCHOLAR METRICS">
             <a:extLst xmlns:a="http://schemas.openxmlformats.org/drawingml/2006/main">
               <a:ext uri="{FF2B5EF4-FFF2-40B4-BE49-F238E27FC236}">
-                <a16:creationId xmlns:a16="http://schemas.microsoft.com/office/drawing/2014/main" id="{653E458A-B2B9-4622-B351-133277BCAE25}"/>
+                <a16:creationId xmlns:a16="http://schemas.microsoft.com/office/drawing/2014/main" id="{3261C244-F127-4A57-A613-756DA80086CE}"/>
               </a:ext>
             </a:extLst>
           </p:cNvPr>
@@ -25608,7 +25741,7 @@
           <p:cNvPr id="9" name="90">
             <a:extLst xmlns:a="http://schemas.openxmlformats.org/drawingml/2006/main">
               <a:ext uri="{FF2B5EF4-FFF2-40B4-BE49-F238E27FC236}">
-                <a16:creationId xmlns:a16="http://schemas.microsoft.com/office/drawing/2014/main" id="{0983DA16-9C67-41AE-BDF8-4EA790C934AB}"/>
+                <a16:creationId xmlns:a16="http://schemas.microsoft.com/office/drawing/2014/main" id="{99C7080B-7935-4E3D-9629-BA3B9988233A}"/>
               </a:ext>
             </a:extLst>
           </p:cNvPr>
@@ -25665,7 +25798,7 @@
           <p:cNvPr id="10" name="índice h5&#10;mediana h5: 146">
             <a:extLst xmlns:a="http://schemas.openxmlformats.org/drawingml/2006/main">
               <a:ext uri="{FF2B5EF4-FFF2-40B4-BE49-F238E27FC236}">
-                <a16:creationId xmlns:a16="http://schemas.microsoft.com/office/drawing/2014/main" id="{F7AB11DF-505F-46CD-AF09-F3206335EDF4}"/>
+                <a16:creationId xmlns:a16="http://schemas.microsoft.com/office/drawing/2014/main" id="{811B0583-BDFF-4E13-97C0-FB1B67321D34}"/>
               </a:ext>
             </a:extLst>
           </p:cNvPr>
@@ -25745,7 +25878,7 @@
           <p:cNvPr id="11" name="Computer Security &amp; Cryptography: posiçã">
             <a:extLst xmlns:a="http://schemas.openxmlformats.org/drawingml/2006/main">
               <a:ext uri="{FF2B5EF4-FFF2-40B4-BE49-F238E27FC236}">
-                <a16:creationId xmlns:a16="http://schemas.microsoft.com/office/drawing/2014/main" id="{5FAE5E31-96F8-43A5-8DCC-54ED9BCCDDA5}"/>
+                <a16:creationId xmlns:a16="http://schemas.microsoft.com/office/drawing/2014/main" id="{8E0E0D39-B14C-466A-8128-DA99C947F3AF}"/>
               </a:ext>
             </a:extLst>
           </p:cNvPr>
@@ -25848,7 +25981,7 @@
           <p:cNvPr id="12" name="">
             <a:extLst xmlns:a="http://schemas.openxmlformats.org/drawingml/2006/main">
               <a:ext uri="{FF2B5EF4-FFF2-40B4-BE49-F238E27FC236}">
-                <a16:creationId xmlns:a16="http://schemas.microsoft.com/office/drawing/2014/main" id="{9B1E04DD-1C16-4668-8661-14420B0E4781}"/>
+                <a16:creationId xmlns:a16="http://schemas.microsoft.com/office/drawing/2014/main" id="{E9C475B3-995C-41EB-A965-AF3EF3789A53}"/>
               </a:ext>
             </a:extLst>
           </p:cNvPr>
@@ -25878,7 +26011,7 @@
           <p:cNvPr id="13" name="ICORE CONFERENCE PORTAL">
             <a:extLst xmlns:a="http://schemas.openxmlformats.org/drawingml/2006/main">
               <a:ext uri="{FF2B5EF4-FFF2-40B4-BE49-F238E27FC236}">
-                <a16:creationId xmlns:a16="http://schemas.microsoft.com/office/drawing/2014/main" id="{4F64CCA4-46D4-406D-A966-1C5ED9CE6C23}"/>
+                <a16:creationId xmlns:a16="http://schemas.microsoft.com/office/drawing/2014/main" id="{610024A1-6D55-4F3E-A82F-BC3860A9E1D4}"/>
               </a:ext>
             </a:extLst>
           </p:cNvPr>
@@ -25935,7 +26068,7 @@
           <p:cNvPr id="14" name="A*">
             <a:extLst xmlns:a="http://schemas.openxmlformats.org/drawingml/2006/main">
               <a:ext uri="{FF2B5EF4-FFF2-40B4-BE49-F238E27FC236}">
-                <a16:creationId xmlns:a16="http://schemas.microsoft.com/office/drawing/2014/main" id="{C4CD8157-6426-41C7-89BD-38BF22A72F27}"/>
+                <a16:creationId xmlns:a16="http://schemas.microsoft.com/office/drawing/2014/main" id="{529D1573-B60C-425B-B994-CEBE0E8592B0}"/>
               </a:ext>
             </a:extLst>
           </p:cNvPr>
@@ -25992,7 +26125,7 @@
           <p:cNvPr id="15" name="ACM CCS&#10;classificação ICORE 2026">
             <a:extLst xmlns:a="http://schemas.openxmlformats.org/drawingml/2006/main">
               <a:ext uri="{FF2B5EF4-FFF2-40B4-BE49-F238E27FC236}">
-                <a16:creationId xmlns:a16="http://schemas.microsoft.com/office/drawing/2014/main" id="{29B398B5-4277-4A6F-AC34-40508A03D6ED}"/>
+                <a16:creationId xmlns:a16="http://schemas.microsoft.com/office/drawing/2014/main" id="{338A1CBB-D568-4B52-ACD6-01C8124CFD57}"/>
               </a:ext>
             </a:extLst>
           </p:cNvPr>
@@ -26072,7 +26205,7 @@
           <p:cNvPr id="16" name="Classificação registrada no portal.&#10;Cons">
             <a:extLst xmlns:a="http://schemas.openxmlformats.org/drawingml/2006/main">
               <a:ext uri="{FF2B5EF4-FFF2-40B4-BE49-F238E27FC236}">
-                <a16:creationId xmlns:a16="http://schemas.microsoft.com/office/drawing/2014/main" id="{CBBDF912-A107-4F88-BF2B-3EAC8EBB9443}"/>
+                <a16:creationId xmlns:a16="http://schemas.microsoft.com/office/drawing/2014/main" id="{43155066-90DE-490C-B188-00D96B756E81}"/>
               </a:ext>
             </a:extLst>
           </p:cNvPr>
@@ -26152,7 +26285,7 @@
           <p:cNvPr id="17" name="">
             <a:extLst xmlns:a="http://schemas.openxmlformats.org/drawingml/2006/main">
               <a:ext uri="{FF2B5EF4-FFF2-40B4-BE49-F238E27FC236}">
-                <a16:creationId xmlns:a16="http://schemas.microsoft.com/office/drawing/2014/main" id="{915A94BE-3E85-491C-9DF3-AA36079E2BA4}"/>
+                <a16:creationId xmlns:a16="http://schemas.microsoft.com/office/drawing/2014/main" id="{FC615CFC-B344-428F-8AFC-523CE2B422CF}"/>
               </a:ext>
             </a:extLst>
           </p:cNvPr>
@@ -26182,7 +26315,7 @@
           <p:cNvPr id="18" name="QUALIS CAPES">
             <a:extLst xmlns:a="http://schemas.openxmlformats.org/drawingml/2006/main">
               <a:ext uri="{FF2B5EF4-FFF2-40B4-BE49-F238E27FC236}">
-                <a16:creationId xmlns:a16="http://schemas.microsoft.com/office/drawing/2014/main" id="{6CA66E99-1A36-4DD5-875B-312924A7D848}"/>
+                <a16:creationId xmlns:a16="http://schemas.microsoft.com/office/drawing/2014/main" id="{E4A66CD1-FCF9-4B53-BC4A-750812E6A19D}"/>
               </a:ext>
             </a:extLst>
           </p:cNvPr>
@@ -26239,7 +26372,7 @@
           <p:cNvPr id="19" name="A1">
             <a:extLst xmlns:a="http://schemas.openxmlformats.org/drawingml/2006/main">
               <a:ext uri="{FF2B5EF4-FFF2-40B4-BE49-F238E27FC236}">
-                <a16:creationId xmlns:a16="http://schemas.microsoft.com/office/drawing/2014/main" id="{DFB39244-0067-4B15-BE43-159CBD84BF7E}"/>
+                <a16:creationId xmlns:a16="http://schemas.microsoft.com/office/drawing/2014/main" id="{F4C7D448-8301-41EE-94B6-07EF4B6E98E5}"/>
               </a:ext>
             </a:extLst>
           </p:cNvPr>
@@ -26296,7 +26429,7 @@
           <p:cNvPr id="20" name="Qualis Eventos da Computação, quadriênio">
             <a:extLst xmlns:a="http://schemas.openxmlformats.org/drawingml/2006/main">
               <a:ext uri="{FF2B5EF4-FFF2-40B4-BE49-F238E27FC236}">
-                <a16:creationId xmlns:a16="http://schemas.microsoft.com/office/drawing/2014/main" id="{900D0807-EB91-4B6F-AF53-87E17E9E0974}"/>
+                <a16:creationId xmlns:a16="http://schemas.microsoft.com/office/drawing/2014/main" id="{D058A60F-8DBD-4CA5-96D7-572B9A4CF320}"/>
               </a:ext>
             </a:extLst>
           </p:cNvPr>
@@ -26373,20 +26506,42 @@
       </p:sp>
       <p:pic>
         <p:nvPicPr>
-          <p:cNvPr id="42" name=""/>
+          <p:cNvPr id="43" name=""/>
           <p:cNvPicPr>
             <a:picLocks xmlns:a="http://schemas.openxmlformats.org/drawingml/2006/main" noChangeAspect="1"/>
           </p:cNvPicPr>
           <p:nvPr/>
         </p:nvPicPr>
         <p:blipFill>
-          <a:blip xmlns:r="http://schemas.openxmlformats.org/officeDocument/2006/relationships" xmlns:a="http://schemas.openxmlformats.org/drawingml/2006/main" r:embed="R080771f189bd419a"/>
+          <a:blip xmlns:r="http://schemas.openxmlformats.org/officeDocument/2006/relationships" xmlns:a="http://schemas.openxmlformats.org/drawingml/2006/main" r:embed="R8f271d7edfc543ac"/>
           <a:stretch xmlns:a="http://schemas.openxmlformats.org/drawingml/2006/main"/>
         </p:blipFill>
         <p:spPr>
           <a:xfrm xmlns:a="http://schemas.openxmlformats.org/drawingml/2006/main">
             <a:off x="1857375" y="5992054"/>
             <a:ext cx="9725025" cy="265043"/>
+          </a:xfrm>
+          <a:prstGeom xmlns:a="http://schemas.openxmlformats.org/drawingml/2006/main" prst="rect">
+            <a:avLst/>
+          </a:prstGeom>
+        </p:spPr>
+      </p:pic>
+      <p:pic>
+        <p:nvPicPr>
+          <p:cNvPr id="44" name=""/>
+          <p:cNvPicPr>
+            <a:picLocks xmlns:a="http://schemas.openxmlformats.org/drawingml/2006/main" noChangeAspect="1"/>
+          </p:cNvPicPr>
+          <p:nvPr/>
+        </p:nvPicPr>
+        <p:blipFill>
+          <a:blip xmlns:r="http://schemas.openxmlformats.org/officeDocument/2006/relationships" xmlns:a="http://schemas.openxmlformats.org/drawingml/2006/main" r:embed="R47df95c162f247ac"/>
+          <a:stretch xmlns:a="http://schemas.openxmlformats.org/drawingml/2006/main"/>
+        </p:blipFill>
+        <p:spPr>
+          <a:xfrm xmlns:a="http://schemas.openxmlformats.org/drawingml/2006/main">
+            <a:off x="10829925" y="3830"/>
+            <a:ext cx="952500" cy="944839"/>
           </a:xfrm>
           <a:prstGeom xmlns:a="http://schemas.openxmlformats.org/drawingml/2006/main" prst="rect">
             <a:avLst/>
@@ -26396,7 +26551,7 @@
     </p:spTree>
     <p:extLst>
       <p:ext uri="{BB962C8B-B14F-4D97-AF65-F5344CB8AC3E}">
-        <p14:creationId xmlns:p14="http://schemas.microsoft.com/office/powerpoint/2010/main" val="710612902"/>
+        <p14:creationId xmlns:p14="http://schemas.microsoft.com/office/powerpoint/2010/main" val="1995020374"/>
       </p:ext>
     </p:extLst>
   </p:cSld>
@@ -26424,10 +26579,10 @@
       </p:grpSpPr>
       <p:sp>
         <p:nvSpPr>
-          <p:cNvPr id="10" name="">
-            <a:extLst xmlns:a="http://schemas.openxmlformats.org/drawingml/2006/main">
-              <a:ext uri="{FF2B5EF4-FFF2-40B4-BE49-F238E27FC236}">
-                <a16:creationId xmlns:a16="http://schemas.microsoft.com/office/drawing/2014/main" id="{D25E950A-49E5-4F63-84B3-641C95F5914D}"/>
+          <p:cNvPr id="11" name="">
+            <a:extLst xmlns:a="http://schemas.openxmlformats.org/drawingml/2006/main">
+              <a:ext uri="{FF2B5EF4-FFF2-40B4-BE49-F238E27FC236}">
+                <a16:creationId xmlns:a16="http://schemas.microsoft.com/office/drawing/2014/main" id="{51617C07-236B-416B-B403-14CDC879D9B0}"/>
               </a:ext>
             </a:extLst>
           </p:cNvPr>
@@ -26457,7 +26612,7 @@
           <p:cNvPr id="2" name="ESTRUTURA">
             <a:extLst xmlns:a="http://schemas.openxmlformats.org/drawingml/2006/main">
               <a:ext uri="{FF2B5EF4-FFF2-40B4-BE49-F238E27FC236}">
-                <a16:creationId xmlns:a16="http://schemas.microsoft.com/office/drawing/2014/main" id="{4690D2C4-BDFF-4D7A-856D-78994FDA7C37}"/>
+                <a16:creationId xmlns:a16="http://schemas.microsoft.com/office/drawing/2014/main" id="{32AD45C3-B0E2-4DE0-B2FF-B9F288301463}"/>
               </a:ext>
             </a:extLst>
           </p:cNvPr>
@@ -26514,7 +26669,7 @@
           <p:cNvPr id="3" name="Como o artigo organiza o argumento">
             <a:extLst xmlns:a="http://schemas.openxmlformats.org/drawingml/2006/main">
               <a:ext uri="{FF2B5EF4-FFF2-40B4-BE49-F238E27FC236}">
-                <a16:creationId xmlns:a16="http://schemas.microsoft.com/office/drawing/2014/main" id="{A38ACF36-F82E-4033-8C6F-58787456334B}"/>
+                <a16:creationId xmlns:a16="http://schemas.microsoft.com/office/drawing/2014/main" id="{30DD898B-D43E-45B1-A7F0-072C9A46E8A0}"/>
               </a:ext>
             </a:extLst>
           </p:cNvPr>
@@ -26571,7 +26726,7 @@
           <p:cNvPr id="4" name="">
             <a:extLst xmlns:a="http://schemas.openxmlformats.org/drawingml/2006/main">
               <a:ext uri="{FF2B5EF4-FFF2-40B4-BE49-F238E27FC236}">
-                <a16:creationId xmlns:a16="http://schemas.microsoft.com/office/drawing/2014/main" id="{DD9B5DD2-FB67-40FD-AF43-B27592622FDF}"/>
+                <a16:creationId xmlns:a16="http://schemas.microsoft.com/office/drawing/2014/main" id="{DF2C6C9B-AA6F-40F5-863E-93E3B72CA08F}"/>
               </a:ext>
             </a:extLst>
           </p:cNvPr>
@@ -26601,7 +26756,7 @@
           <p:cNvPr id="5" name="">
             <a:extLst xmlns:a="http://schemas.openxmlformats.org/drawingml/2006/main">
               <a:ext uri="{FF2B5EF4-FFF2-40B4-BE49-F238E27FC236}">
-                <a16:creationId xmlns:a16="http://schemas.microsoft.com/office/drawing/2014/main" id="{4049C2B6-87C2-4BDD-A9CC-FC81B853C852}"/>
+                <a16:creationId xmlns:a16="http://schemas.microsoft.com/office/drawing/2014/main" id="{B214E5D8-7F0D-4888-AC84-81A1DE85B507}"/>
               </a:ext>
             </a:extLst>
           </p:cNvPr>
@@ -26631,7 +26786,7 @@
           <p:cNvPr id="6" name="Nguyen, Backes e Stock (2022), p. 1–13. ">
             <a:extLst xmlns:a="http://schemas.openxmlformats.org/drawingml/2006/main">
               <a:ext uri="{FF2B5EF4-FFF2-40B4-BE49-F238E27FC236}">
-                <a16:creationId xmlns:a16="http://schemas.microsoft.com/office/drawing/2014/main" id="{EEA6CF2B-61E0-4048-8EB9-B696E25ED652}"/>
+                <a16:creationId xmlns:a16="http://schemas.microsoft.com/office/drawing/2014/main" id="{13BC3595-D11C-49BA-AEFB-5FC500F38222}"/>
               </a:ext>
             </a:extLst>
           </p:cNvPr>
@@ -26688,7 +26843,7 @@
           <p:cNvPr id="7" name="05 / 23">
             <a:extLst xmlns:a="http://schemas.openxmlformats.org/drawingml/2006/main">
               <a:ext uri="{FF2B5EF4-FFF2-40B4-BE49-F238E27FC236}">
-                <a16:creationId xmlns:a16="http://schemas.microsoft.com/office/drawing/2014/main" id="{F42D107B-331E-4FAB-9494-EEDE2426277C}"/>
+                <a16:creationId xmlns:a16="http://schemas.microsoft.com/office/drawing/2014/main" id="{880254CB-65AC-4A6B-A74C-E735541063FE}"/>
               </a:ext>
             </a:extLst>
           </p:cNvPr>
@@ -26742,7 +26897,7 @@
       </p:sp>
       <p:graphicFrame>
         <p:nvGraphicFramePr>
-          <p:cNvPr id="17" name=""/>
+          <p:cNvPr id="18" name=""/>
           <p:cNvGraphicFramePr/>
           <p:nvPr/>
         </p:nvGraphicFramePr>
@@ -27703,7 +27858,7 @@
           <p:cNvPr id="9" name="A revisão detalhada de trabalhos relacio">
             <a:extLst xmlns:a="http://schemas.openxmlformats.org/drawingml/2006/main">
               <a:ext uri="{FF2B5EF4-FFF2-40B4-BE49-F238E27FC236}">
-                <a16:creationId xmlns:a16="http://schemas.microsoft.com/office/drawing/2014/main" id="{24C09E47-8C3E-4AF5-814D-C07B96DE6F00}"/>
+                <a16:creationId xmlns:a16="http://schemas.microsoft.com/office/drawing/2014/main" id="{3C09F1F5-6CFD-4B87-81A4-19677328388B}"/>
               </a:ext>
             </a:extLst>
           </p:cNvPr>
@@ -27755,10 +27910,32 @@
           </a:p>
         </p:txBody>
       </p:sp>
+      <p:pic>
+        <p:nvPicPr>
+          <p:cNvPr id="20" name=""/>
+          <p:cNvPicPr>
+            <a:picLocks xmlns:a="http://schemas.openxmlformats.org/drawingml/2006/main" noChangeAspect="1"/>
+          </p:cNvPicPr>
+          <p:nvPr/>
+        </p:nvPicPr>
+        <p:blipFill>
+          <a:blip xmlns:r="http://schemas.openxmlformats.org/officeDocument/2006/relationships" xmlns:a="http://schemas.openxmlformats.org/drawingml/2006/main" r:embed="R63c2ff4de7244516"/>
+          <a:stretch xmlns:a="http://schemas.openxmlformats.org/drawingml/2006/main"/>
+        </p:blipFill>
+        <p:spPr>
+          <a:xfrm xmlns:a="http://schemas.openxmlformats.org/drawingml/2006/main">
+            <a:off x="10829925" y="3830"/>
+            <a:ext cx="952500" cy="944839"/>
+          </a:xfrm>
+          <a:prstGeom xmlns:a="http://schemas.openxmlformats.org/drawingml/2006/main" prst="rect">
+            <a:avLst/>
+          </a:prstGeom>
+        </p:spPr>
+      </p:pic>
     </p:spTree>
     <p:extLst>
       <p:ext uri="{BB962C8B-B14F-4D97-AF65-F5344CB8AC3E}">
-        <p14:creationId xmlns:p14="http://schemas.microsoft.com/office/powerpoint/2010/main" val="299718735"/>
+        <p14:creationId xmlns:p14="http://schemas.microsoft.com/office/powerpoint/2010/main" val="1367958018"/>
       </p:ext>
     </p:extLst>
   </p:cSld>
@@ -27786,10 +27963,10 @@
       </p:grpSpPr>
       <p:sp>
         <p:nvSpPr>
-          <p:cNvPr id="25" name="">
-            <a:extLst xmlns:a="http://schemas.openxmlformats.org/drawingml/2006/main">
-              <a:ext uri="{FF2B5EF4-FFF2-40B4-BE49-F238E27FC236}">
-                <a16:creationId xmlns:a16="http://schemas.microsoft.com/office/drawing/2014/main" id="{5105D1C3-FF42-4B34-B781-148AE2FAC672}"/>
+          <p:cNvPr id="26" name="">
+            <a:extLst xmlns:a="http://schemas.openxmlformats.org/drawingml/2006/main">
+              <a:ext uri="{FF2B5EF4-FFF2-40B4-BE49-F238E27FC236}">
+                <a16:creationId xmlns:a16="http://schemas.microsoft.com/office/drawing/2014/main" id="{D3D8E828-D87C-4C1D-8751-8B72984E7836}"/>
               </a:ext>
             </a:extLst>
           </p:cNvPr>
@@ -27819,7 +27996,7 @@
           <p:cNvPr id="2" name="ANÁLISE DO ABSTRACT">
             <a:extLst xmlns:a="http://schemas.openxmlformats.org/drawingml/2006/main">
               <a:ext uri="{FF2B5EF4-FFF2-40B4-BE49-F238E27FC236}">
-                <a16:creationId xmlns:a16="http://schemas.microsoft.com/office/drawing/2014/main" id="{6A431CA4-8A04-4E16-8C78-C6DD117FB5AF}"/>
+                <a16:creationId xmlns:a16="http://schemas.microsoft.com/office/drawing/2014/main" id="{77E36E8A-FD7F-4109-B0FF-C3BC9EEEA3CD}"/>
               </a:ext>
             </a:extLst>
           </p:cNvPr>
@@ -27876,7 +28053,7 @@
           <p:cNvPr id="3" name="Resumo: contexto, lacuna e objetivo">
             <a:extLst xmlns:a="http://schemas.openxmlformats.org/drawingml/2006/main">
               <a:ext uri="{FF2B5EF4-FFF2-40B4-BE49-F238E27FC236}">
-                <a16:creationId xmlns:a16="http://schemas.microsoft.com/office/drawing/2014/main" id="{98C2617F-970B-4D41-AD70-613CE7A3E241}"/>
+                <a16:creationId xmlns:a16="http://schemas.microsoft.com/office/drawing/2014/main" id="{528587F4-3BD4-4BF1-AFE2-A5323F68B5C4}"/>
               </a:ext>
             </a:extLst>
           </p:cNvPr>
@@ -27933,7 +28110,7 @@
           <p:cNvPr id="4" name="">
             <a:extLst xmlns:a="http://schemas.openxmlformats.org/drawingml/2006/main">
               <a:ext uri="{FF2B5EF4-FFF2-40B4-BE49-F238E27FC236}">
-                <a16:creationId xmlns:a16="http://schemas.microsoft.com/office/drawing/2014/main" id="{8032A474-40CF-4E58-84F9-3EED2ED73C89}"/>
+                <a16:creationId xmlns:a16="http://schemas.microsoft.com/office/drawing/2014/main" id="{24D63956-9FF8-459D-AE04-ABC23F502B45}"/>
               </a:ext>
             </a:extLst>
           </p:cNvPr>
@@ -27963,7 +28140,7 @@
           <p:cNvPr id="5" name="">
             <a:extLst xmlns:a="http://schemas.openxmlformats.org/drawingml/2006/main">
               <a:ext uri="{FF2B5EF4-FFF2-40B4-BE49-F238E27FC236}">
-                <a16:creationId xmlns:a16="http://schemas.microsoft.com/office/drawing/2014/main" id="{00BD0A7A-A403-4116-9AD7-FAA29CB108F4}"/>
+                <a16:creationId xmlns:a16="http://schemas.microsoft.com/office/drawing/2014/main" id="{C6E4DB5D-845B-444C-A85C-EF470E4DC957}"/>
               </a:ext>
             </a:extLst>
           </p:cNvPr>
@@ -27993,7 +28170,7 @@
           <p:cNvPr id="6" name="Nguyen, Backes e Stock (2022), Abstract,">
             <a:extLst xmlns:a="http://schemas.openxmlformats.org/drawingml/2006/main">
               <a:ext uri="{FF2B5EF4-FFF2-40B4-BE49-F238E27FC236}">
-                <a16:creationId xmlns:a16="http://schemas.microsoft.com/office/drawing/2014/main" id="{C61BF0DC-7A14-4B2B-851F-A3BD3D5EBBC7}"/>
+                <a16:creationId xmlns:a16="http://schemas.microsoft.com/office/drawing/2014/main" id="{32C3C7B0-44CB-482D-93B4-6DA07D976A78}"/>
               </a:ext>
             </a:extLst>
           </p:cNvPr>
@@ -28050,7 +28227,7 @@
           <p:cNvPr id="7" name="06 / 23">
             <a:extLst xmlns:a="http://schemas.openxmlformats.org/drawingml/2006/main">
               <a:ext uri="{FF2B5EF4-FFF2-40B4-BE49-F238E27FC236}">
-                <a16:creationId xmlns:a16="http://schemas.microsoft.com/office/drawing/2014/main" id="{2FCAF904-4A60-4461-B644-6B22EA7EC6B3}"/>
+                <a16:creationId xmlns:a16="http://schemas.microsoft.com/office/drawing/2014/main" id="{B9D98086-0375-48F3-AD17-CC1C50D8FCE9}"/>
               </a:ext>
             </a:extLst>
           </p:cNvPr>
@@ -28107,7 +28284,7 @@
           <p:cNvPr id="8" name="CONTEXTO">
             <a:extLst xmlns:a="http://schemas.openxmlformats.org/drawingml/2006/main">
               <a:ext uri="{FF2B5EF4-FFF2-40B4-BE49-F238E27FC236}">
-                <a16:creationId xmlns:a16="http://schemas.microsoft.com/office/drawing/2014/main" id="{31BC30AF-7279-4D61-A4D5-BFA4A0F612E1}"/>
+                <a16:creationId xmlns:a16="http://schemas.microsoft.com/office/drawing/2014/main" id="{95C7B58D-7BAC-4B5C-8651-BC2A9886E119}"/>
               </a:ext>
             </a:extLst>
           </p:cNvPr>
@@ -28164,7 +28341,7 @@
           <p:cNvPr id="9" name="EN">
             <a:extLst xmlns:a="http://schemas.openxmlformats.org/drawingml/2006/main">
               <a:ext uri="{FF2B5EF4-FFF2-40B4-BE49-F238E27FC236}">
-                <a16:creationId xmlns:a16="http://schemas.microsoft.com/office/drawing/2014/main" id="{CA949620-1B11-4864-BFC6-F46FC53088CF}"/>
+                <a16:creationId xmlns:a16="http://schemas.microsoft.com/office/drawing/2014/main" id="{408F830E-C9F1-4083-A5B3-78EF2E3DA36E}"/>
               </a:ext>
             </a:extLst>
           </p:cNvPr>
@@ -28221,7 +28398,7 @@
           <p:cNvPr id="10" name="“freely given, specific, informed, and u">
             <a:extLst xmlns:a="http://schemas.openxmlformats.org/drawingml/2006/main">
               <a:ext uri="{FF2B5EF4-FFF2-40B4-BE49-F238E27FC236}">
-                <a16:creationId xmlns:a16="http://schemas.microsoft.com/office/drawing/2014/main" id="{380F7567-6406-4DB2-977B-EEC743BD23C4}"/>
+                <a16:creationId xmlns:a16="http://schemas.microsoft.com/office/drawing/2014/main" id="{16059F3F-196D-4C4B-AC57-E96EA089CE2F}"/>
               </a:ext>
             </a:extLst>
           </p:cNvPr>
@@ -28278,7 +28455,7 @@
           <p:cNvPr id="11" name="PT">
             <a:extLst xmlns:a="http://schemas.openxmlformats.org/drawingml/2006/main">
               <a:ext uri="{FF2B5EF4-FFF2-40B4-BE49-F238E27FC236}">
-                <a16:creationId xmlns:a16="http://schemas.microsoft.com/office/drawing/2014/main" id="{3D43B041-C3AF-4E60-83EF-CB801F9354D3}"/>
+                <a16:creationId xmlns:a16="http://schemas.microsoft.com/office/drawing/2014/main" id="{3F636893-B436-463E-881C-D9BAC23DD8E6}"/>
               </a:ext>
             </a:extLst>
           </p:cNvPr>
@@ -28335,7 +28512,7 @@
           <p:cNvPr id="12" name="Livre, específico, informado e inequívoc">
             <a:extLst xmlns:a="http://schemas.openxmlformats.org/drawingml/2006/main">
               <a:ext uri="{FF2B5EF4-FFF2-40B4-BE49-F238E27FC236}">
-                <a16:creationId xmlns:a16="http://schemas.microsoft.com/office/drawing/2014/main" id="{588199F4-5CC8-40D4-8A38-E353A5DDDAC4}"/>
+                <a16:creationId xmlns:a16="http://schemas.microsoft.com/office/drawing/2014/main" id="{8B1678C6-E489-4D67-90C8-BD658332FE7F}"/>
               </a:ext>
             </a:extLst>
           </p:cNvPr>
@@ -28392,7 +28569,7 @@
           <p:cNvPr id="13" name="">
             <a:extLst xmlns:a="http://schemas.openxmlformats.org/drawingml/2006/main">
               <a:ext uri="{FF2B5EF4-FFF2-40B4-BE49-F238E27FC236}">
-                <a16:creationId xmlns:a16="http://schemas.microsoft.com/office/drawing/2014/main" id="{7FE3D621-569A-4BDC-B6F0-090413691FDA}"/>
+                <a16:creationId xmlns:a16="http://schemas.microsoft.com/office/drawing/2014/main" id="{A2D51784-07B1-4E59-8F94-0F479E16727C}"/>
               </a:ext>
             </a:extLst>
           </p:cNvPr>
@@ -28422,7 +28599,7 @@
           <p:cNvPr id="14" name="LACUNA">
             <a:extLst xmlns:a="http://schemas.openxmlformats.org/drawingml/2006/main">
               <a:ext uri="{FF2B5EF4-FFF2-40B4-BE49-F238E27FC236}">
-                <a16:creationId xmlns:a16="http://schemas.microsoft.com/office/drawing/2014/main" id="{88FCBE81-EC6D-4812-BAB9-B29579BDADC6}"/>
+                <a16:creationId xmlns:a16="http://schemas.microsoft.com/office/drawing/2014/main" id="{B56BBC93-3F6A-42FF-885D-0BFA07FF81F9}"/>
               </a:ext>
             </a:extLst>
           </p:cNvPr>
@@ -28479,7 +28656,7 @@
           <p:cNvPr id="15" name="EN">
             <a:extLst xmlns:a="http://schemas.openxmlformats.org/drawingml/2006/main">
               <a:ext uri="{FF2B5EF4-FFF2-40B4-BE49-F238E27FC236}">
-                <a16:creationId xmlns:a16="http://schemas.microsoft.com/office/drawing/2014/main" id="{49B30B5A-14D1-4523-AC51-65361778D91E}"/>
+                <a16:creationId xmlns:a16="http://schemas.microsoft.com/office/drawing/2014/main" id="{97FF61A4-370E-4DF7-9CB9-4A1CC46F0819}"/>
               </a:ext>
             </a:extLst>
           </p:cNvPr>
@@ -28536,7 +28713,7 @@
           <p:cNvPr id="16" name="“no research has systematically studied ">
             <a:extLst xmlns:a="http://schemas.openxmlformats.org/drawingml/2006/main">
               <a:ext uri="{FF2B5EF4-FFF2-40B4-BE49-F238E27FC236}">
-                <a16:creationId xmlns:a16="http://schemas.microsoft.com/office/drawing/2014/main" id="{F8B51F30-A123-4B95-BC18-3FFC8E54E699}"/>
+                <a16:creationId xmlns:a16="http://schemas.microsoft.com/office/drawing/2014/main" id="{98B58737-15B4-44CD-B835-B21983C1A606}"/>
               </a:ext>
             </a:extLst>
           </p:cNvPr>
@@ -28593,7 +28770,7 @@
           <p:cNvPr id="17" name="PT">
             <a:extLst xmlns:a="http://schemas.openxmlformats.org/drawingml/2006/main">
               <a:ext uri="{FF2B5EF4-FFF2-40B4-BE49-F238E27FC236}">
-                <a16:creationId xmlns:a16="http://schemas.microsoft.com/office/drawing/2014/main" id="{E2E6AC51-7C7E-4902-9D80-B834596A78DE}"/>
+                <a16:creationId xmlns:a16="http://schemas.microsoft.com/office/drawing/2014/main" id="{AB9BF911-B85D-4595-BA99-19E3179F16A8}"/>
               </a:ext>
             </a:extLst>
           </p:cNvPr>
@@ -28650,7 +28827,7 @@
           <p:cNvPr id="18" name="Nenhuma pesquisa havia estudado sistemat">
             <a:extLst xmlns:a="http://schemas.openxmlformats.org/drawingml/2006/main">
               <a:ext uri="{FF2B5EF4-FFF2-40B4-BE49-F238E27FC236}">
-                <a16:creationId xmlns:a16="http://schemas.microsoft.com/office/drawing/2014/main" id="{5CAC9E98-DA93-4BD0-A505-E3FDCD9AAD72}"/>
+                <a16:creationId xmlns:a16="http://schemas.microsoft.com/office/drawing/2014/main" id="{022FFDF0-DF93-4D51-B0CD-28D6FC2909F2}"/>
               </a:ext>
             </a:extLst>
           </p:cNvPr>
@@ -28707,7 +28884,7 @@
           <p:cNvPr id="19" name="">
             <a:extLst xmlns:a="http://schemas.openxmlformats.org/drawingml/2006/main">
               <a:ext uri="{FF2B5EF4-FFF2-40B4-BE49-F238E27FC236}">
-                <a16:creationId xmlns:a16="http://schemas.microsoft.com/office/drawing/2014/main" id="{E5CCEE44-1CC9-419A-B7B0-938D09AFB1DE}"/>
+                <a16:creationId xmlns:a16="http://schemas.microsoft.com/office/drawing/2014/main" id="{ACD87E3F-754C-4DF6-8324-C239D19DF57A}"/>
               </a:ext>
             </a:extLst>
           </p:cNvPr>
@@ -28737,7 +28914,7 @@
           <p:cNvPr id="20" name="OBJETIVO">
             <a:extLst xmlns:a="http://schemas.openxmlformats.org/drawingml/2006/main">
               <a:ext uri="{FF2B5EF4-FFF2-40B4-BE49-F238E27FC236}">
-                <a16:creationId xmlns:a16="http://schemas.microsoft.com/office/drawing/2014/main" id="{C2D9CFCD-ABD8-4523-A34C-BC9846EF57A3}"/>
+                <a16:creationId xmlns:a16="http://schemas.microsoft.com/office/drawing/2014/main" id="{411320A9-C318-4D3C-B163-51AAC59BC932}"/>
               </a:ext>
             </a:extLst>
           </p:cNvPr>
@@ -28794,7 +28971,7 @@
           <p:cNvPr id="21" name="EN">
             <a:extLst xmlns:a="http://schemas.openxmlformats.org/drawingml/2006/main">
               <a:ext uri="{FF2B5EF4-FFF2-40B4-BE49-F238E27FC236}">
-                <a16:creationId xmlns:a16="http://schemas.microsoft.com/office/drawing/2014/main" id="{DF2693C8-3026-4256-B21D-5C5B2AF3369E}"/>
+                <a16:creationId xmlns:a16="http://schemas.microsoft.com/office/drawing/2014/main" id="{DCB0EDC9-97FC-4416-9D12-4F97A571D72D}"/>
               </a:ext>
             </a:extLst>
           </p:cNvPr>
@@ -28851,7 +29028,7 @@
           <p:cNvPr id="22" name="“we perform the first large-scale study ">
             <a:extLst xmlns:a="http://schemas.openxmlformats.org/drawingml/2006/main">
               <a:ext uri="{FF2B5EF4-FFF2-40B4-BE49-F238E27FC236}">
-                <a16:creationId xmlns:a16="http://schemas.microsoft.com/office/drawing/2014/main" id="{7DBFA940-F3B0-4D4B-86DB-33ED019AFC38}"/>
+                <a16:creationId xmlns:a16="http://schemas.microsoft.com/office/drawing/2014/main" id="{A5E769CA-C6DF-46B8-95A1-A18F38687B78}"/>
               </a:ext>
             </a:extLst>
           </p:cNvPr>
@@ -28908,7 +29085,7 @@
           <p:cNvPr id="23" name="PT">
             <a:extLst xmlns:a="http://schemas.openxmlformats.org/drawingml/2006/main">
               <a:ext uri="{FF2B5EF4-FFF2-40B4-BE49-F238E27FC236}">
-                <a16:creationId xmlns:a16="http://schemas.microsoft.com/office/drawing/2014/main" id="{8411F8F4-2F00-4CBD-8262-7E321DDAF268}"/>
+                <a16:creationId xmlns:a16="http://schemas.microsoft.com/office/drawing/2014/main" id="{57B618F3-D234-4D4D-8667-DF084272F119}"/>
               </a:ext>
             </a:extLst>
           </p:cNvPr>
@@ -28965,7 +29142,7 @@
           <p:cNvPr id="24" name="Realizamos o primeiro estudo em larga es">
             <a:extLst xmlns:a="http://schemas.openxmlformats.org/drawingml/2006/main">
               <a:ext uri="{FF2B5EF4-FFF2-40B4-BE49-F238E27FC236}">
-                <a16:creationId xmlns:a16="http://schemas.microsoft.com/office/drawing/2014/main" id="{F96D9C07-63DE-480B-B99A-FE2188E15D2C}"/>
+                <a16:creationId xmlns:a16="http://schemas.microsoft.com/office/drawing/2014/main" id="{8A8AA331-C601-4977-9006-711DF9E887D8}"/>
               </a:ext>
             </a:extLst>
           </p:cNvPr>
@@ -29017,10 +29194,32 @@
           </a:p>
         </p:txBody>
       </p:sp>
+      <p:pic>
+        <p:nvPicPr>
+          <p:cNvPr id="50" name=""/>
+          <p:cNvPicPr>
+            <a:picLocks xmlns:a="http://schemas.openxmlformats.org/drawingml/2006/main" noChangeAspect="1"/>
+          </p:cNvPicPr>
+          <p:nvPr/>
+        </p:nvPicPr>
+        <p:blipFill>
+          <a:blip xmlns:r="http://schemas.openxmlformats.org/officeDocument/2006/relationships" xmlns:a="http://schemas.openxmlformats.org/drawingml/2006/main" r:embed="Rdd60dbbcad084daf"/>
+          <a:stretch xmlns:a="http://schemas.openxmlformats.org/drawingml/2006/main"/>
+        </p:blipFill>
+        <p:spPr>
+          <a:xfrm xmlns:a="http://schemas.openxmlformats.org/drawingml/2006/main">
+            <a:off x="10829925" y="3830"/>
+            <a:ext cx="952500" cy="944839"/>
+          </a:xfrm>
+          <a:prstGeom xmlns:a="http://schemas.openxmlformats.org/drawingml/2006/main" prst="rect">
+            <a:avLst/>
+          </a:prstGeom>
+        </p:spPr>
+      </p:pic>
     </p:spTree>
     <p:extLst>
       <p:ext uri="{BB962C8B-B14F-4D97-AF65-F5344CB8AC3E}">
-        <p14:creationId xmlns:p14="http://schemas.microsoft.com/office/powerpoint/2010/main" val="1386392529"/>
+        <p14:creationId xmlns:p14="http://schemas.microsoft.com/office/powerpoint/2010/main" val="741724438"/>
       </p:ext>
     </p:extLst>
   </p:cSld>
@@ -29048,10 +29247,10 @@
       </p:grpSpPr>
       <p:sp>
         <p:nvSpPr>
-          <p:cNvPr id="26" name="">
-            <a:extLst xmlns:a="http://schemas.openxmlformats.org/drawingml/2006/main">
-              <a:ext uri="{FF2B5EF4-FFF2-40B4-BE49-F238E27FC236}">
-                <a16:creationId xmlns:a16="http://schemas.microsoft.com/office/drawing/2014/main" id="{2E362B36-55BD-444A-BB7B-5AFAC3B3FACE}"/>
+          <p:cNvPr id="27" name="">
+            <a:extLst xmlns:a="http://schemas.openxmlformats.org/drawingml/2006/main">
+              <a:ext uri="{FF2B5EF4-FFF2-40B4-BE49-F238E27FC236}">
+                <a16:creationId xmlns:a16="http://schemas.microsoft.com/office/drawing/2014/main" id="{737F7C82-6A65-4106-A2E8-27747C7C80BC}"/>
               </a:ext>
             </a:extLst>
           </p:cNvPr>
@@ -29081,7 +29280,7 @@
           <p:cNvPr id="2" name="ANÁLISE DO ABSTRACT">
             <a:extLst xmlns:a="http://schemas.openxmlformats.org/drawingml/2006/main">
               <a:ext uri="{FF2B5EF4-FFF2-40B4-BE49-F238E27FC236}">
-                <a16:creationId xmlns:a16="http://schemas.microsoft.com/office/drawing/2014/main" id="{A707FD7A-FB66-463D-9757-9FA9E2851735}"/>
+                <a16:creationId xmlns:a16="http://schemas.microsoft.com/office/drawing/2014/main" id="{A17EDF17-9DFB-46A5-BD88-7639C53EABE7}"/>
               </a:ext>
             </a:extLst>
           </p:cNvPr>
@@ -29138,7 +29337,7 @@
           <p:cNvPr id="3" name="Resumo: método, resultado e implicação">
             <a:extLst xmlns:a="http://schemas.openxmlformats.org/drawingml/2006/main">
               <a:ext uri="{FF2B5EF4-FFF2-40B4-BE49-F238E27FC236}">
-                <a16:creationId xmlns:a16="http://schemas.microsoft.com/office/drawing/2014/main" id="{F34FB287-970D-4414-BDA7-6BA6390F6703}"/>
+                <a16:creationId xmlns:a16="http://schemas.microsoft.com/office/drawing/2014/main" id="{EE07671D-693C-43BD-919F-EC254F8A482F}"/>
               </a:ext>
             </a:extLst>
           </p:cNvPr>
@@ -29195,7 +29394,7 @@
           <p:cNvPr id="4" name="">
             <a:extLst xmlns:a="http://schemas.openxmlformats.org/drawingml/2006/main">
               <a:ext uri="{FF2B5EF4-FFF2-40B4-BE49-F238E27FC236}">
-                <a16:creationId xmlns:a16="http://schemas.microsoft.com/office/drawing/2014/main" id="{7CD1ABA4-789A-400C-BF53-831ABA99EC6D}"/>
+                <a16:creationId xmlns:a16="http://schemas.microsoft.com/office/drawing/2014/main" id="{4C3DEABA-C772-41C4-B0B0-1208641ECA3A}"/>
               </a:ext>
             </a:extLst>
           </p:cNvPr>
@@ -29225,7 +29424,7 @@
           <p:cNvPr id="5" name="">
             <a:extLst xmlns:a="http://schemas.openxmlformats.org/drawingml/2006/main">
               <a:ext uri="{FF2B5EF4-FFF2-40B4-BE49-F238E27FC236}">
-                <a16:creationId xmlns:a16="http://schemas.microsoft.com/office/drawing/2014/main" id="{00720985-D306-4709-9A40-F626B2C580BB}"/>
+                <a16:creationId xmlns:a16="http://schemas.microsoft.com/office/drawing/2014/main" id="{EC25DCBF-A8CA-43D4-9665-09953ED66EFF}"/>
               </a:ext>
             </a:extLst>
           </p:cNvPr>
@@ -29255,7 +29454,7 @@
           <p:cNvPr id="6" name="Nguyen, Backes e Stock (2022), Abstract,">
             <a:extLst xmlns:a="http://schemas.openxmlformats.org/drawingml/2006/main">
               <a:ext uri="{FF2B5EF4-FFF2-40B4-BE49-F238E27FC236}">
-                <a16:creationId xmlns:a16="http://schemas.microsoft.com/office/drawing/2014/main" id="{1151AB9B-E3E2-4662-9E84-0E7BC8E3BC5F}"/>
+                <a16:creationId xmlns:a16="http://schemas.microsoft.com/office/drawing/2014/main" id="{FF2A3B91-FCA4-4BFC-864D-644FAC2C342E}"/>
               </a:ext>
             </a:extLst>
           </p:cNvPr>
@@ -29312,7 +29511,7 @@
           <p:cNvPr id="7" name="07 / 23">
             <a:extLst xmlns:a="http://schemas.openxmlformats.org/drawingml/2006/main">
               <a:ext uri="{FF2B5EF4-FFF2-40B4-BE49-F238E27FC236}">
-                <a16:creationId xmlns:a16="http://schemas.microsoft.com/office/drawing/2014/main" id="{C82BFB5C-8F36-4F35-9096-B4713C3AE9C2}"/>
+                <a16:creationId xmlns:a16="http://schemas.microsoft.com/office/drawing/2014/main" id="{03B9C102-9C0B-4E22-9AF3-F9F90C848DE0}"/>
               </a:ext>
             </a:extLst>
           </p:cNvPr>
@@ -29369,7 +29568,7 @@
           <p:cNvPr id="8" name="MÉTODO">
             <a:extLst xmlns:a="http://schemas.openxmlformats.org/drawingml/2006/main">
               <a:ext uri="{FF2B5EF4-FFF2-40B4-BE49-F238E27FC236}">
-                <a16:creationId xmlns:a16="http://schemas.microsoft.com/office/drawing/2014/main" id="{E5D234E3-C87B-46E4-B0BF-6C61E1264812}"/>
+                <a16:creationId xmlns:a16="http://schemas.microsoft.com/office/drawing/2014/main" id="{F4FDB8E0-AA81-40AF-80A2-19DE6EF5F54E}"/>
               </a:ext>
             </a:extLst>
           </p:cNvPr>
@@ -29426,7 +29625,7 @@
           <p:cNvPr id="9" name="EN">
             <a:extLst xmlns:a="http://schemas.openxmlformats.org/drawingml/2006/main">
               <a:ext uri="{FF2B5EF4-FFF2-40B4-BE49-F238E27FC236}">
-                <a16:creationId xmlns:a16="http://schemas.microsoft.com/office/drawing/2014/main" id="{215926B4-2D1E-44EB-AE0F-012C1A7100EA}"/>
+                <a16:creationId xmlns:a16="http://schemas.microsoft.com/office/drawing/2014/main" id="{1E4B1043-A670-41BC-8700-E459F86AACD1}"/>
               </a:ext>
             </a:extLst>
           </p:cNvPr>
@@ -29483,7 +29682,7 @@
           <p:cNvPr id="10" name="“a mostly automated and scalable approac">
             <a:extLst xmlns:a="http://schemas.openxmlformats.org/drawingml/2006/main">
               <a:ext uri="{FF2B5EF4-FFF2-40B4-BE49-F238E27FC236}">
-                <a16:creationId xmlns:a16="http://schemas.microsoft.com/office/drawing/2014/main" id="{9E04337D-0E75-4F42-9FCF-12567E183B01}"/>
+                <a16:creationId xmlns:a16="http://schemas.microsoft.com/office/drawing/2014/main" id="{5166BC57-1808-4980-8779-0B1EBC93CDC5}"/>
               </a:ext>
             </a:extLst>
           </p:cNvPr>
@@ -29540,7 +29739,7 @@
           <p:cNvPr id="11" name="PT">
             <a:extLst xmlns:a="http://schemas.openxmlformats.org/drawingml/2006/main">
               <a:ext uri="{FF2B5EF4-FFF2-40B4-BE49-F238E27FC236}">
-                <a16:creationId xmlns:a16="http://schemas.microsoft.com/office/drawing/2014/main" id="{C34BABD2-7E45-4F02-813F-790CC135EC09}"/>
+                <a16:creationId xmlns:a16="http://schemas.microsoft.com/office/drawing/2014/main" id="{38C7BC3E-6A85-4551-9093-F266EC13E6AA}"/>
               </a:ext>
             </a:extLst>
           </p:cNvPr>
@@ -29597,7 +29796,7 @@
           <p:cNvPr id="12" name="Uma abordagem majoritariamente automatiz">
             <a:extLst xmlns:a="http://schemas.openxmlformats.org/drawingml/2006/main">
               <a:ext uri="{FF2B5EF4-FFF2-40B4-BE49-F238E27FC236}">
-                <a16:creationId xmlns:a16="http://schemas.microsoft.com/office/drawing/2014/main" id="{35E56F4A-87F2-4D7B-8B08-591DF370973A}"/>
+                <a16:creationId xmlns:a16="http://schemas.microsoft.com/office/drawing/2014/main" id="{91CE404D-18B7-4D10-BB4F-52A501C14B30}"/>
               </a:ext>
             </a:extLst>
           </p:cNvPr>
@@ -29654,7 +29853,7 @@
           <p:cNvPr id="13" name="">
             <a:extLst xmlns:a="http://schemas.openxmlformats.org/drawingml/2006/main">
               <a:ext uri="{FF2B5EF4-FFF2-40B4-BE49-F238E27FC236}">
-                <a16:creationId xmlns:a16="http://schemas.microsoft.com/office/drawing/2014/main" id="{67CE2EEB-AC05-4055-9A0C-DEFF3230D83E}"/>
+                <a16:creationId xmlns:a16="http://schemas.microsoft.com/office/drawing/2014/main" id="{B8176DD0-0E6B-490E-9179-7B0FF6BC5473}"/>
               </a:ext>
             </a:extLst>
           </p:cNvPr>
@@ -29684,7 +29883,7 @@
           <p:cNvPr id="14" name="RESULTADO">
             <a:extLst xmlns:a="http://schemas.openxmlformats.org/drawingml/2006/main">
               <a:ext uri="{FF2B5EF4-FFF2-40B4-BE49-F238E27FC236}">
-                <a16:creationId xmlns:a16="http://schemas.microsoft.com/office/drawing/2014/main" id="{4C44CFCF-CBE8-4668-9763-72A9ED9622E8}"/>
+                <a16:creationId xmlns:a16="http://schemas.microsoft.com/office/drawing/2014/main" id="{5976C365-34D2-4AAD-A59D-A5C23FD2AEEF}"/>
               </a:ext>
             </a:extLst>
           </p:cNvPr>
@@ -29741,7 +29940,7 @@
           <p:cNvPr id="15" name="EN">
             <a:extLst xmlns:a="http://schemas.openxmlformats.org/drawingml/2006/main">
               <a:ext uri="{FF2B5EF4-FFF2-40B4-BE49-F238E27FC236}">
-                <a16:creationId xmlns:a16="http://schemas.microsoft.com/office/drawing/2014/main" id="{95767925-B9FC-4093-A010-2E44264D6E2C}"/>
+                <a16:creationId xmlns:a16="http://schemas.microsoft.com/office/drawing/2014/main" id="{72B5DDC6-80C2-422E-B97B-C19281C60146}"/>
               </a:ext>
             </a:extLst>
           </p:cNvPr>
@@ -29798,7 +29997,7 @@
           <p:cNvPr id="16" name="“we identify 2,688 (20.54%) apps violate">
             <a:extLst xmlns:a="http://schemas.openxmlformats.org/drawingml/2006/main">
               <a:ext uri="{FF2B5EF4-FFF2-40B4-BE49-F238E27FC236}">
-                <a16:creationId xmlns:a16="http://schemas.microsoft.com/office/drawing/2014/main" id="{6E12C1B3-627F-45A2-A95A-E6C05F229481}"/>
+                <a16:creationId xmlns:a16="http://schemas.microsoft.com/office/drawing/2014/main" id="{14D85A0A-7BCC-43EB-8C39-0CE6D7F15E54}"/>
               </a:ext>
             </a:extLst>
           </p:cNvPr>
@@ -29855,7 +30054,7 @@
           <p:cNvPr id="17" name="PT">
             <a:extLst xmlns:a="http://schemas.openxmlformats.org/drawingml/2006/main">
               <a:ext uri="{FF2B5EF4-FFF2-40B4-BE49-F238E27FC236}">
-                <a16:creationId xmlns:a16="http://schemas.microsoft.com/office/drawing/2014/main" id="{D8085EC4-2139-4EFA-85D5-F5291ACD6723}"/>
+                <a16:creationId xmlns:a16="http://schemas.microsoft.com/office/drawing/2014/main" id="{007F52B4-765E-48A8-AA7A-96B27FD0CFA1}"/>
               </a:ext>
             </a:extLst>
           </p:cNvPr>
@@ -29912,7 +30111,7 @@
           <p:cNvPr id="18" name="Identificamos 2.688 aplicativos (20,54%)">
             <a:extLst xmlns:a="http://schemas.openxmlformats.org/drawingml/2006/main">
               <a:ext uri="{FF2B5EF4-FFF2-40B4-BE49-F238E27FC236}">
-                <a16:creationId xmlns:a16="http://schemas.microsoft.com/office/drawing/2014/main" id="{55ED7D53-7940-4EDE-82E1-B03282F727E7}"/>
+                <a16:creationId xmlns:a16="http://schemas.microsoft.com/office/drawing/2014/main" id="{C09ECB2B-7302-42A4-9BC1-5C75F1DD8FB4}"/>
               </a:ext>
             </a:extLst>
           </p:cNvPr>
@@ -29969,7 +30168,7 @@
           <p:cNvPr id="19" name="">
             <a:extLst xmlns:a="http://schemas.openxmlformats.org/drawingml/2006/main">
               <a:ext uri="{FF2B5EF4-FFF2-40B4-BE49-F238E27FC236}">
-                <a16:creationId xmlns:a16="http://schemas.microsoft.com/office/drawing/2014/main" id="{A7C2F081-5EE8-4D00-9744-00512A34DDDC}"/>
+                <a16:creationId xmlns:a16="http://schemas.microsoft.com/office/drawing/2014/main" id="{EC41C8FE-95B4-4ED3-B4A4-412967DCC764}"/>
               </a:ext>
             </a:extLst>
           </p:cNvPr>
@@ -29999,7 +30198,7 @@
           <p:cNvPr id="20" name="IMPLICAÇÃO">
             <a:extLst xmlns:a="http://schemas.openxmlformats.org/drawingml/2006/main">
               <a:ext uri="{FF2B5EF4-FFF2-40B4-BE49-F238E27FC236}">
-                <a16:creationId xmlns:a16="http://schemas.microsoft.com/office/drawing/2014/main" id="{FC9CCEEF-63E6-4817-A356-90FA3B39FBC7}"/>
+                <a16:creationId xmlns:a16="http://schemas.microsoft.com/office/drawing/2014/main" id="{1B8158CC-90B8-4308-AC05-D01C69914EB4}"/>
               </a:ext>
             </a:extLst>
           </p:cNvPr>
@@ -30056,7 +30255,7 @@
           <p:cNvPr id="21" name="EN">
             <a:extLst xmlns:a="http://schemas.openxmlformats.org/drawingml/2006/main">
               <a:ext uri="{FF2B5EF4-FFF2-40B4-BE49-F238E27FC236}">
-                <a16:creationId xmlns:a16="http://schemas.microsoft.com/office/drawing/2014/main" id="{FD9A4F37-A9B0-4E44-B7BE-A9E29E7BE6BA}"/>
+                <a16:creationId xmlns:a16="http://schemas.microsoft.com/office/drawing/2014/main" id="{40DE5C92-352B-4E6B-B5EB-9490401ACE24}"/>
               </a:ext>
             </a:extLst>
           </p:cNvPr>
@@ -30113,7 +30312,7 @@
           <p:cNvPr id="22" name="“more transparent processing of personal">
             <a:extLst xmlns:a="http://schemas.openxmlformats.org/drawingml/2006/main">
               <a:ext uri="{FF2B5EF4-FFF2-40B4-BE49-F238E27FC236}">
-                <a16:creationId xmlns:a16="http://schemas.microsoft.com/office/drawing/2014/main" id="{9E161F2D-A418-405A-9504-C6145EE39A63}"/>
+                <a16:creationId xmlns:a16="http://schemas.microsoft.com/office/drawing/2014/main" id="{2DF5457A-0410-4FC1-AE15-218D5518DA75}"/>
               </a:ext>
             </a:extLst>
           </p:cNvPr>
@@ -30170,7 +30369,7 @@
           <p:cNvPr id="23" name="PT">
             <a:extLst xmlns:a="http://schemas.openxmlformats.org/drawingml/2006/main">
               <a:ext uri="{FF2B5EF4-FFF2-40B4-BE49-F238E27FC236}">
-                <a16:creationId xmlns:a16="http://schemas.microsoft.com/office/drawing/2014/main" id="{A30C4001-5F12-46A7-B483-2630278EE5AD}"/>
+                <a16:creationId xmlns:a16="http://schemas.microsoft.com/office/drawing/2014/main" id="{F9C32360-022C-4156-9312-2920AB4AC1E1}"/>
               </a:ext>
             </a:extLst>
           </p:cNvPr>
@@ -30227,7 +30426,7 @@
           <p:cNvPr id="24" name="Maior transparência no tratamento de dad">
             <a:extLst xmlns:a="http://schemas.openxmlformats.org/drawingml/2006/main">
               <a:ext uri="{FF2B5EF4-FFF2-40B4-BE49-F238E27FC236}">
-                <a16:creationId xmlns:a16="http://schemas.microsoft.com/office/drawing/2014/main" id="{D3BB46E7-EA90-48A4-90C9-D22CAEEA2F72}"/>
+                <a16:creationId xmlns:a16="http://schemas.microsoft.com/office/drawing/2014/main" id="{0F6B6A29-B064-438F-BAF0-7526BAFBAA14}"/>
               </a:ext>
             </a:extLst>
           </p:cNvPr>
@@ -30281,10 +30480,10 @@
       </p:sp>
       <p:sp>
         <p:nvSpPr>
-          <p:cNvPr id="25" name="Leitura do seminário: o resumo antecipa ">
-            <a:extLst xmlns:a="http://schemas.openxmlformats.org/drawingml/2006/main">
-              <a:ext uri="{FF2B5EF4-FFF2-40B4-BE49-F238E27FC236}">
-                <a16:creationId xmlns:a16="http://schemas.microsoft.com/office/drawing/2014/main" id="{A33588E1-1D53-4FD3-95FC-F333DC7B247F}"/>
+          <p:cNvPr id="25" name="Análise do seminário: o resumo sintetiza">
+            <a:extLst xmlns:a="http://schemas.openxmlformats.org/drawingml/2006/main">
+              <a:ext uri="{FF2B5EF4-FFF2-40B4-BE49-F238E27FC236}">
+                <a16:creationId xmlns:a16="http://schemas.microsoft.com/office/drawing/2014/main" id="{B577AD6C-9F87-4435-AFB6-9454AB1D0745}"/>
               </a:ext>
             </a:extLst>
           </p:cNvPr>
@@ -30331,15 +30530,37 @@
                 <a:ea typeface="Arial"/>
                 <a:cs typeface="Arial"/>
               </a:rPr>
-              <a:t>Leitura do seminário: o resumo antecipa os achados. A conclusão torna a formulação jurídica mais cautelosa.</a:t>
-            </a:r>
-          </a:p>
-        </p:txBody>
-      </p:sp>
+              <a:t>Análise do seminário: o resumo sintetiza o método, o principal resultado e sua relevância.</a:t>
+            </a:r>
+          </a:p>
+        </p:txBody>
+      </p:sp>
+      <p:pic>
+        <p:nvPicPr>
+          <p:cNvPr id="52" name=""/>
+          <p:cNvPicPr>
+            <a:picLocks xmlns:a="http://schemas.openxmlformats.org/drawingml/2006/main" noChangeAspect="1"/>
+          </p:cNvPicPr>
+          <p:nvPr/>
+        </p:nvPicPr>
+        <p:blipFill>
+          <a:blip xmlns:r="http://schemas.openxmlformats.org/officeDocument/2006/relationships" xmlns:a="http://schemas.openxmlformats.org/drawingml/2006/main" r:embed="Rab6556484ed24dc3"/>
+          <a:stretch xmlns:a="http://schemas.openxmlformats.org/drawingml/2006/main"/>
+        </p:blipFill>
+        <p:spPr>
+          <a:xfrm xmlns:a="http://schemas.openxmlformats.org/drawingml/2006/main">
+            <a:off x="10829925" y="3830"/>
+            <a:ext cx="952500" cy="944839"/>
+          </a:xfrm>
+          <a:prstGeom xmlns:a="http://schemas.openxmlformats.org/drawingml/2006/main" prst="rect">
+            <a:avLst/>
+          </a:prstGeom>
+        </p:spPr>
+      </p:pic>
     </p:spTree>
     <p:extLst>
       <p:ext uri="{BB962C8B-B14F-4D97-AF65-F5344CB8AC3E}">
-        <p14:creationId xmlns:p14="http://schemas.microsoft.com/office/powerpoint/2010/main" val="2085742461"/>
+        <p14:creationId xmlns:p14="http://schemas.microsoft.com/office/powerpoint/2010/main" val="1367184472"/>
       </p:ext>
     </p:extLst>
   </p:cSld>
@@ -30367,10 +30588,10 @@
       </p:grpSpPr>
       <p:sp>
         <p:nvSpPr>
-          <p:cNvPr id="26" name="">
-            <a:extLst xmlns:a="http://schemas.openxmlformats.org/drawingml/2006/main">
-              <a:ext uri="{FF2B5EF4-FFF2-40B4-BE49-F238E27FC236}">
-                <a16:creationId xmlns:a16="http://schemas.microsoft.com/office/drawing/2014/main" id="{1C91B071-F380-4CD6-BCCC-68C7D39E5555}"/>
+          <p:cNvPr id="27" name="">
+            <a:extLst xmlns:a="http://schemas.openxmlformats.org/drawingml/2006/main">
+              <a:ext uri="{FF2B5EF4-FFF2-40B4-BE49-F238E27FC236}">
+                <a16:creationId xmlns:a16="http://schemas.microsoft.com/office/drawing/2014/main" id="{53B35640-7DD9-4A3F-8ACB-61883789963D}"/>
               </a:ext>
             </a:extLst>
           </p:cNvPr>
@@ -30400,7 +30621,7 @@
           <p:cNvPr id="2" name="ANÁLISE DA INTRODUÇÃO">
             <a:extLst xmlns:a="http://schemas.openxmlformats.org/drawingml/2006/main">
               <a:ext uri="{FF2B5EF4-FFF2-40B4-BE49-F238E27FC236}">
-                <a16:creationId xmlns:a16="http://schemas.microsoft.com/office/drawing/2014/main" id="{1F298E1E-0F78-4BE8-83B2-A81A772A6413}"/>
+                <a16:creationId xmlns:a16="http://schemas.microsoft.com/office/drawing/2014/main" id="{200EA67A-AF7B-4ED3-8E1A-1200190B9CB9}"/>
               </a:ext>
             </a:extLst>
           </p:cNvPr>
@@ -30457,7 +30678,7 @@
           <p:cNvPr id="3" name="Introdução: três perguntas de pesquisa">
             <a:extLst xmlns:a="http://schemas.openxmlformats.org/drawingml/2006/main">
               <a:ext uri="{FF2B5EF4-FFF2-40B4-BE49-F238E27FC236}">
-                <a16:creationId xmlns:a16="http://schemas.microsoft.com/office/drawing/2014/main" id="{3D744B74-2A83-4D28-9F5C-7C0204C51543}"/>
+                <a16:creationId xmlns:a16="http://schemas.microsoft.com/office/drawing/2014/main" id="{1E316521-7D94-4801-9AE8-CE5E7DC09526}"/>
               </a:ext>
             </a:extLst>
           </p:cNvPr>
@@ -30514,7 +30735,7 @@
           <p:cNvPr id="4" name="">
             <a:extLst xmlns:a="http://schemas.openxmlformats.org/drawingml/2006/main">
               <a:ext uri="{FF2B5EF4-FFF2-40B4-BE49-F238E27FC236}">
-                <a16:creationId xmlns:a16="http://schemas.microsoft.com/office/drawing/2014/main" id="{B0C61BA1-2235-46C5-A66E-74B923941A0C}"/>
+                <a16:creationId xmlns:a16="http://schemas.microsoft.com/office/drawing/2014/main" id="{8E436B71-98B6-4837-9C67-80BFBEF4B372}"/>
               </a:ext>
             </a:extLst>
           </p:cNvPr>
@@ -30544,7 +30765,7 @@
           <p:cNvPr id="5" name="">
             <a:extLst xmlns:a="http://schemas.openxmlformats.org/drawingml/2006/main">
               <a:ext uri="{FF2B5EF4-FFF2-40B4-BE49-F238E27FC236}">
-                <a16:creationId xmlns:a16="http://schemas.microsoft.com/office/drawing/2014/main" id="{A308AAB1-CDDB-460C-9E67-54E3F28B5146}"/>
+                <a16:creationId xmlns:a16="http://schemas.microsoft.com/office/drawing/2014/main" id="{12DE5373-C895-4F31-A8F9-19B6AB2CB2E5}"/>
               </a:ext>
             </a:extLst>
           </p:cNvPr>
@@ -30574,7 +30795,7 @@
           <p:cNvPr id="6" name="Nguyen, Backes e Stock (2022), Seção 1, ">
             <a:extLst xmlns:a="http://schemas.openxmlformats.org/drawingml/2006/main">
               <a:ext uri="{FF2B5EF4-FFF2-40B4-BE49-F238E27FC236}">
-                <a16:creationId xmlns:a16="http://schemas.microsoft.com/office/drawing/2014/main" id="{4B1D015E-BA0C-4956-A51A-38241D17BD2E}"/>
+                <a16:creationId xmlns:a16="http://schemas.microsoft.com/office/drawing/2014/main" id="{E98A0D49-216F-44CB-9B25-FB8C22B77ABA}"/>
               </a:ext>
             </a:extLst>
           </p:cNvPr>
@@ -30631,7 +30852,7 @@
           <p:cNvPr id="7" name="08 / 23">
             <a:extLst xmlns:a="http://schemas.openxmlformats.org/drawingml/2006/main">
               <a:ext uri="{FF2B5EF4-FFF2-40B4-BE49-F238E27FC236}">
-                <a16:creationId xmlns:a16="http://schemas.microsoft.com/office/drawing/2014/main" id="{34F26070-68FE-4654-9C34-769821180BBB}"/>
+                <a16:creationId xmlns:a16="http://schemas.microsoft.com/office/drawing/2014/main" id="{B88B390A-CA1B-481D-8B90-3F05C81A2601}"/>
               </a:ext>
             </a:extLst>
           </p:cNvPr>
@@ -30688,7 +30909,7 @@
           <p:cNvPr id="8" name="01">
             <a:extLst xmlns:a="http://schemas.openxmlformats.org/drawingml/2006/main">
               <a:ext uri="{FF2B5EF4-FFF2-40B4-BE49-F238E27FC236}">
-                <a16:creationId xmlns:a16="http://schemas.microsoft.com/office/drawing/2014/main" id="{3D0198DB-D6DD-4314-B6FC-6B7FE7DCFE97}"/>
+                <a16:creationId xmlns:a16="http://schemas.microsoft.com/office/drawing/2014/main" id="{76909318-D441-4954-9E67-FC39A566223D}"/>
               </a:ext>
             </a:extLst>
           </p:cNvPr>
@@ -30745,7 +30966,7 @@
           <p:cNvPr id="9" name="EN">
             <a:extLst xmlns:a="http://schemas.openxmlformats.org/drawingml/2006/main">
               <a:ext uri="{FF2B5EF4-FFF2-40B4-BE49-F238E27FC236}">
-                <a16:creationId xmlns:a16="http://schemas.microsoft.com/office/drawing/2014/main" id="{9E71226E-B630-4F76-A7F7-091296F71D64}"/>
+                <a16:creationId xmlns:a16="http://schemas.microsoft.com/office/drawing/2014/main" id="{CE3A74E6-3431-4855-B0CB-BD381BDE9AB2}"/>
               </a:ext>
             </a:extLst>
           </p:cNvPr>
@@ -30802,7 +31023,7 @@
           <p:cNvPr id="10" name="“Do mobile apps implement any form of co">
             <a:extLst xmlns:a="http://schemas.openxmlformats.org/drawingml/2006/main">
               <a:ext uri="{FF2B5EF4-FFF2-40B4-BE49-F238E27FC236}">
-                <a16:creationId xmlns:a16="http://schemas.microsoft.com/office/drawing/2014/main" id="{5B6B1C6E-4C96-4061-A21C-87744F49B759}"/>
+                <a16:creationId xmlns:a16="http://schemas.microsoft.com/office/drawing/2014/main" id="{227E817D-B3FF-46D6-BCCE-38B1C0AF94AC}"/>
               </a:ext>
             </a:extLst>
           </p:cNvPr>
@@ -30859,7 +31080,7 @@
           <p:cNvPr id="11" name="PT">
             <a:extLst xmlns:a="http://schemas.openxmlformats.org/drawingml/2006/main">
               <a:ext uri="{FF2B5EF4-FFF2-40B4-BE49-F238E27FC236}">
-                <a16:creationId xmlns:a16="http://schemas.microsoft.com/office/drawing/2014/main" id="{9069D830-2E84-45E0-BBE8-AE516AB3818C}"/>
+                <a16:creationId xmlns:a16="http://schemas.microsoft.com/office/drawing/2014/main" id="{DDAE380E-FC4B-4A44-B011-169608324F32}"/>
               </a:ext>
             </a:extLst>
           </p:cNvPr>
@@ -30916,7 +31137,7 @@
           <p:cNvPr id="12" name="Os aplicativos móveis implementam avisos">
             <a:extLst xmlns:a="http://schemas.openxmlformats.org/drawingml/2006/main">
               <a:ext uri="{FF2B5EF4-FFF2-40B4-BE49-F238E27FC236}">
-                <a16:creationId xmlns:a16="http://schemas.microsoft.com/office/drawing/2014/main" id="{EF5E4976-BADE-42C3-B568-10E60FA67126}"/>
+                <a16:creationId xmlns:a16="http://schemas.microsoft.com/office/drawing/2014/main" id="{3DCD4759-7C37-4382-914F-E7B92732CD1C}"/>
               </a:ext>
             </a:extLst>
           </p:cNvPr>
@@ -30973,7 +31194,7 @@
           <p:cNvPr id="13" name="">
             <a:extLst xmlns:a="http://schemas.openxmlformats.org/drawingml/2006/main">
               <a:ext uri="{FF2B5EF4-FFF2-40B4-BE49-F238E27FC236}">
-                <a16:creationId xmlns:a16="http://schemas.microsoft.com/office/drawing/2014/main" id="{ED5733F7-48CF-47E1-9AA8-055D7E516AAA}"/>
+                <a16:creationId xmlns:a16="http://schemas.microsoft.com/office/drawing/2014/main" id="{45B193E8-8562-419E-B948-1527699FDC40}"/>
               </a:ext>
             </a:extLst>
           </p:cNvPr>
@@ -31003,7 +31224,7 @@
           <p:cNvPr id="14" name="02">
             <a:extLst xmlns:a="http://schemas.openxmlformats.org/drawingml/2006/main">
               <a:ext uri="{FF2B5EF4-FFF2-40B4-BE49-F238E27FC236}">
-                <a16:creationId xmlns:a16="http://schemas.microsoft.com/office/drawing/2014/main" id="{5BFFE12D-5D85-4EB8-B45F-0D295753112D}"/>
+                <a16:creationId xmlns:a16="http://schemas.microsoft.com/office/drawing/2014/main" id="{24BFB089-E176-4044-BAB4-FF68BB93DB19}"/>
               </a:ext>
             </a:extLst>
           </p:cNvPr>
@@ -31060,7 +31281,7 @@
           <p:cNvPr id="15" name="EN">
             <a:extLst xmlns:a="http://schemas.openxmlformats.org/drawingml/2006/main">
               <a:ext uri="{FF2B5EF4-FFF2-40B4-BE49-F238E27FC236}">
-                <a16:creationId xmlns:a16="http://schemas.microsoft.com/office/drawing/2014/main" id="{15AE9607-A6C4-4820-8F02-3D420E8B604F}"/>
+                <a16:creationId xmlns:a16="http://schemas.microsoft.com/office/drawing/2014/main" id="{8610C3F7-507C-4784-BC60-02C10EA01FFA}"/>
               </a:ext>
             </a:extLst>
           </p:cNvPr>
@@ -31117,7 +31338,7 @@
           <p:cNvPr id="16" name="“Can these implemented consent notices b">
             <a:extLst xmlns:a="http://schemas.openxmlformats.org/drawingml/2006/main">
               <a:ext uri="{FF2B5EF4-FFF2-40B4-BE49-F238E27FC236}">
-                <a16:creationId xmlns:a16="http://schemas.microsoft.com/office/drawing/2014/main" id="{86C3C16B-B59C-46B4-9946-B1EC641248A3}"/>
+                <a16:creationId xmlns:a16="http://schemas.microsoft.com/office/drawing/2014/main" id="{6EDF4482-B108-4ED2-8668-16DCE6B74082}"/>
               </a:ext>
             </a:extLst>
           </p:cNvPr>
@@ -31174,7 +31395,7 @@
           <p:cNvPr id="17" name="PT">
             <a:extLst xmlns:a="http://schemas.openxmlformats.org/drawingml/2006/main">
               <a:ext uri="{FF2B5EF4-FFF2-40B4-BE49-F238E27FC236}">
-                <a16:creationId xmlns:a16="http://schemas.microsoft.com/office/drawing/2014/main" id="{B8C7988C-E32F-4441-97A9-702CBDF4D726}"/>
+                <a16:creationId xmlns:a16="http://schemas.microsoft.com/office/drawing/2014/main" id="{743C2412-BC57-4E07-B920-E3587BF7583D}"/>
               </a:ext>
             </a:extLst>
           </p:cNvPr>
@@ -31231,7 +31452,7 @@
           <p:cNvPr id="18" name="Esses avisos de consentimento podem ser ">
             <a:extLst xmlns:a="http://schemas.openxmlformats.org/drawingml/2006/main">
               <a:ext uri="{FF2B5EF4-FFF2-40B4-BE49-F238E27FC236}">
-                <a16:creationId xmlns:a16="http://schemas.microsoft.com/office/drawing/2014/main" id="{0B47D23E-69B1-44DC-9B75-F692349DA4FD}"/>
+                <a16:creationId xmlns:a16="http://schemas.microsoft.com/office/drawing/2014/main" id="{27AA1D23-AC81-44D6-BE3A-3798498FC3C5}"/>
               </a:ext>
             </a:extLst>
           </p:cNvPr>
@@ -31288,7 +31509,7 @@
           <p:cNvPr id="19" name="">
             <a:extLst xmlns:a="http://schemas.openxmlformats.org/drawingml/2006/main">
               <a:ext uri="{FF2B5EF4-FFF2-40B4-BE49-F238E27FC236}">
-                <a16:creationId xmlns:a16="http://schemas.microsoft.com/office/drawing/2014/main" id="{865635C1-FCFB-46A2-BC42-C56267C8AD8D}"/>
+                <a16:creationId xmlns:a16="http://schemas.microsoft.com/office/drawing/2014/main" id="{7537B457-9753-4774-B749-2D89ECA4C999}"/>
               </a:ext>
             </a:extLst>
           </p:cNvPr>
@@ -31318,7 +31539,7 @@
           <p:cNvPr id="20" name="03">
             <a:extLst xmlns:a="http://schemas.openxmlformats.org/drawingml/2006/main">
               <a:ext uri="{FF2B5EF4-FFF2-40B4-BE49-F238E27FC236}">
-                <a16:creationId xmlns:a16="http://schemas.microsoft.com/office/drawing/2014/main" id="{94146482-CD6A-47D9-9A15-8902F31175B0}"/>
+                <a16:creationId xmlns:a16="http://schemas.microsoft.com/office/drawing/2014/main" id="{56E9301F-FF69-4774-94F0-BCDB2184AA68}"/>
               </a:ext>
             </a:extLst>
           </p:cNvPr>
@@ -31375,7 +31596,7 @@
           <p:cNvPr id="21" name="EN">
             <a:extLst xmlns:a="http://schemas.openxmlformats.org/drawingml/2006/main">
               <a:ext uri="{FF2B5EF4-FFF2-40B4-BE49-F238E27FC236}">
-                <a16:creationId xmlns:a16="http://schemas.microsoft.com/office/drawing/2014/main" id="{39CB0955-5DD0-426E-86E3-D31CD4B0F448}"/>
+                <a16:creationId xmlns:a16="http://schemas.microsoft.com/office/drawing/2014/main" id="{DE96A69A-B57F-4E6D-BF88-47D6137E3F5E}"/>
               </a:ext>
             </a:extLst>
           </p:cNvPr>
@@ -31432,7 +31653,7 @@
           <p:cNvPr id="22" name="“Are developers aware of the GDPR consen">
             <a:extLst xmlns:a="http://schemas.openxmlformats.org/drawingml/2006/main">
               <a:ext uri="{FF2B5EF4-FFF2-40B4-BE49-F238E27FC236}">
-                <a16:creationId xmlns:a16="http://schemas.microsoft.com/office/drawing/2014/main" id="{F3E577C0-D005-4AFC-89E7-035A9A12650E}"/>
+                <a16:creationId xmlns:a16="http://schemas.microsoft.com/office/drawing/2014/main" id="{7AB31BCB-13A1-448E-B3E5-4659A3A2C9EC}"/>
               </a:ext>
             </a:extLst>
           </p:cNvPr>
@@ -31489,7 +31710,7 @@
           <p:cNvPr id="23" name="PT">
             <a:extLst xmlns:a="http://schemas.openxmlformats.org/drawingml/2006/main">
               <a:ext uri="{FF2B5EF4-FFF2-40B4-BE49-F238E27FC236}">
-                <a16:creationId xmlns:a16="http://schemas.microsoft.com/office/drawing/2014/main" id="{B332E377-23C0-42F4-AD23-00F81EA651C4}"/>
+                <a16:creationId xmlns:a16="http://schemas.microsoft.com/office/drawing/2014/main" id="{05C50913-E6CB-4517-AA6E-E45908A7E89F}"/>
               </a:ext>
             </a:extLst>
           </p:cNvPr>
@@ -31546,7 +31767,7 @@
           <p:cNvPr id="24" name="Os desenvolvedores conhecem os requisito">
             <a:extLst xmlns:a="http://schemas.openxmlformats.org/drawingml/2006/main">
               <a:ext uri="{FF2B5EF4-FFF2-40B4-BE49-F238E27FC236}">
-                <a16:creationId xmlns:a16="http://schemas.microsoft.com/office/drawing/2014/main" id="{0B8178CC-E690-4D1F-98B0-D95FB1F95158}"/>
+                <a16:creationId xmlns:a16="http://schemas.microsoft.com/office/drawing/2014/main" id="{9D12BE5D-7F5D-4069-B806-994B9E4F32DC}"/>
               </a:ext>
             </a:extLst>
           </p:cNvPr>
@@ -31603,7 +31824,7 @@
           <p:cNvPr id="25" name="Análise: cada pergunta orienta uma etapa">
             <a:extLst xmlns:a="http://schemas.openxmlformats.org/drawingml/2006/main">
               <a:ext uri="{FF2B5EF4-FFF2-40B4-BE49-F238E27FC236}">
-                <a16:creationId xmlns:a16="http://schemas.microsoft.com/office/drawing/2014/main" id="{471D8574-D94B-45E1-828C-3B8E7763EBA6}"/>
+                <a16:creationId xmlns:a16="http://schemas.microsoft.com/office/drawing/2014/main" id="{7277F93B-148C-4FCF-9D35-F19B164C8DBA}"/>
               </a:ext>
             </a:extLst>
           </p:cNvPr>
@@ -31655,10 +31876,32 @@
           </a:p>
         </p:txBody>
       </p:sp>
+      <p:pic>
+        <p:nvPicPr>
+          <p:cNvPr id="52" name=""/>
+          <p:cNvPicPr>
+            <a:picLocks xmlns:a="http://schemas.openxmlformats.org/drawingml/2006/main" noChangeAspect="1"/>
+          </p:cNvPicPr>
+          <p:nvPr/>
+        </p:nvPicPr>
+        <p:blipFill>
+          <a:blip xmlns:r="http://schemas.openxmlformats.org/officeDocument/2006/relationships" xmlns:a="http://schemas.openxmlformats.org/drawingml/2006/main" r:embed="R8387445700574ba7"/>
+          <a:stretch xmlns:a="http://schemas.openxmlformats.org/drawingml/2006/main"/>
+        </p:blipFill>
+        <p:spPr>
+          <a:xfrm xmlns:a="http://schemas.openxmlformats.org/drawingml/2006/main">
+            <a:off x="10829925" y="3830"/>
+            <a:ext cx="952500" cy="944839"/>
+          </a:xfrm>
+          <a:prstGeom xmlns:a="http://schemas.openxmlformats.org/drawingml/2006/main" prst="rect">
+            <a:avLst/>
+          </a:prstGeom>
+        </p:spPr>
+      </p:pic>
     </p:spTree>
     <p:extLst>
       <p:ext uri="{BB962C8B-B14F-4D97-AF65-F5344CB8AC3E}">
-        <p14:creationId xmlns:p14="http://schemas.microsoft.com/office/powerpoint/2010/main" val="867170618"/>
+        <p14:creationId xmlns:p14="http://schemas.microsoft.com/office/powerpoint/2010/main" val="300423129"/>
       </p:ext>
     </p:extLst>
   </p:cSld>
@@ -31686,10 +31929,10 @@
       </p:grpSpPr>
       <p:sp>
         <p:nvSpPr>
-          <p:cNvPr id="21" name="">
-            <a:extLst xmlns:a="http://schemas.openxmlformats.org/drawingml/2006/main">
-              <a:ext uri="{FF2B5EF4-FFF2-40B4-BE49-F238E27FC236}">
-                <a16:creationId xmlns:a16="http://schemas.microsoft.com/office/drawing/2014/main" id="{4422AC5D-BF36-4563-899A-EA8EFB183F9F}"/>
+          <p:cNvPr id="22" name="">
+            <a:extLst xmlns:a="http://schemas.openxmlformats.org/drawingml/2006/main">
+              <a:ext uri="{FF2B5EF4-FFF2-40B4-BE49-F238E27FC236}">
+                <a16:creationId xmlns:a16="http://schemas.microsoft.com/office/drawing/2014/main" id="{DFB8371A-9834-4217-A3D4-258FBC33253C}"/>
               </a:ext>
             </a:extLst>
           </p:cNvPr>
@@ -31719,7 +31962,7 @@
           <p:cNvPr id="2" name="ANÁLISE VISUAL DA INTRODUÇÃO">
             <a:extLst xmlns:a="http://schemas.openxmlformats.org/drawingml/2006/main">
               <a:ext uri="{FF2B5EF4-FFF2-40B4-BE49-F238E27FC236}">
-                <a16:creationId xmlns:a16="http://schemas.microsoft.com/office/drawing/2014/main" id="{AA8D58D1-00FC-43C3-BFB8-0C6AFEBFB2F7}"/>
+                <a16:creationId xmlns:a16="http://schemas.microsoft.com/office/drawing/2014/main" id="{7CEB8901-7846-419B-95C8-3286CF012F77}"/>
               </a:ext>
             </a:extLst>
           </p:cNvPr>
@@ -31776,7 +32019,7 @@
           <p:cNvPr id="3" name="Figura 1: avisos com confirmação única">
             <a:extLst xmlns:a="http://schemas.openxmlformats.org/drawingml/2006/main">
               <a:ext uri="{FF2B5EF4-FFF2-40B4-BE49-F238E27FC236}">
-                <a16:creationId xmlns:a16="http://schemas.microsoft.com/office/drawing/2014/main" id="{39F7FB8F-9403-4DD9-8CA7-85CD64E87659}"/>
+                <a16:creationId xmlns:a16="http://schemas.microsoft.com/office/drawing/2014/main" id="{1D19238B-72DE-46A6-9047-543B1C24EDF6}"/>
               </a:ext>
             </a:extLst>
           </p:cNvPr>
@@ -31833,7 +32076,7 @@
           <p:cNvPr id="4" name="">
             <a:extLst xmlns:a="http://schemas.openxmlformats.org/drawingml/2006/main">
               <a:ext uri="{FF2B5EF4-FFF2-40B4-BE49-F238E27FC236}">
-                <a16:creationId xmlns:a16="http://schemas.microsoft.com/office/drawing/2014/main" id="{3134E899-76D2-4FA2-A98D-759CE3DF1585}"/>
+                <a16:creationId xmlns:a16="http://schemas.microsoft.com/office/drawing/2014/main" id="{56DE7A61-2A49-422F-9A10-54945179E8F8}"/>
               </a:ext>
             </a:extLst>
           </p:cNvPr>
@@ -31863,7 +32106,7 @@
           <p:cNvPr id="5" name="">
             <a:extLst xmlns:a="http://schemas.openxmlformats.org/drawingml/2006/main">
               <a:ext uri="{FF2B5EF4-FFF2-40B4-BE49-F238E27FC236}">
-                <a16:creationId xmlns:a16="http://schemas.microsoft.com/office/drawing/2014/main" id="{0088577D-B214-4E4E-BCD1-51FC582DECCA}"/>
+                <a16:creationId xmlns:a16="http://schemas.microsoft.com/office/drawing/2014/main" id="{F770E2DF-5991-490D-BB46-8E9DFC57F6DC}"/>
               </a:ext>
             </a:extLst>
           </p:cNvPr>
@@ -31893,7 +32136,7 @@
           <p:cNvPr id="6" name="Nguyen, Backes e Stock (2022), Figura 1 ">
             <a:extLst xmlns:a="http://schemas.openxmlformats.org/drawingml/2006/main">
               <a:ext uri="{FF2B5EF4-FFF2-40B4-BE49-F238E27FC236}">
-                <a16:creationId xmlns:a16="http://schemas.microsoft.com/office/drawing/2014/main" id="{C1A8ACCD-847B-42E8-8C13-BB495A284C9C}"/>
+                <a16:creationId xmlns:a16="http://schemas.microsoft.com/office/drawing/2014/main" id="{B56CCA88-CF38-4E23-801E-70F7585E19C1}"/>
               </a:ext>
             </a:extLst>
           </p:cNvPr>
@@ -31950,7 +32193,7 @@
           <p:cNvPr id="7" name="09 / 23">
             <a:extLst xmlns:a="http://schemas.openxmlformats.org/drawingml/2006/main">
               <a:ext uri="{FF2B5EF4-FFF2-40B4-BE49-F238E27FC236}">
-                <a16:creationId xmlns:a16="http://schemas.microsoft.com/office/drawing/2014/main" id="{C367A2A3-CD35-4337-894F-B68F2B435AC0}"/>
+                <a16:creationId xmlns:a16="http://schemas.microsoft.com/office/drawing/2014/main" id="{04386CD4-B5CE-463F-863B-9BF7EEC260AE}"/>
               </a:ext>
             </a:extLst>
           </p:cNvPr>
@@ -32004,14 +32247,14 @@
       </p:sp>
       <p:pic>
         <p:nvPicPr>
-          <p:cNvPr id="28" name=""/>
+          <p:cNvPr id="29" name=""/>
           <p:cNvPicPr>
             <a:picLocks xmlns:a="http://schemas.openxmlformats.org/drawingml/2006/main" noChangeAspect="1"/>
           </p:cNvPicPr>
           <p:nvPr/>
         </p:nvPicPr>
         <p:blipFill>
-          <a:blip xmlns:r="http://schemas.openxmlformats.org/officeDocument/2006/relationships" xmlns:a="http://schemas.openxmlformats.org/drawingml/2006/main" r:embed="R1bbeccceebd847a5"/>
+          <a:blip xmlns:r="http://schemas.openxmlformats.org/officeDocument/2006/relationships" xmlns:a="http://schemas.openxmlformats.org/drawingml/2006/main" r:embed="R258a277cc04e48cb"/>
           <a:stretch xmlns:a="http://schemas.openxmlformats.org/drawingml/2006/main"/>
         </p:blipFill>
         <p:spPr>
@@ -32029,7 +32272,7 @@
           <p:cNvPr id="9" name="(a)">
             <a:extLst xmlns:a="http://schemas.openxmlformats.org/drawingml/2006/main">
               <a:ext uri="{FF2B5EF4-FFF2-40B4-BE49-F238E27FC236}">
-                <a16:creationId xmlns:a16="http://schemas.microsoft.com/office/drawing/2014/main" id="{AC1A3485-64EF-41DC-8B49-BF4C1B717833}"/>
+                <a16:creationId xmlns:a16="http://schemas.microsoft.com/office/drawing/2014/main" id="{DCC3482D-D60E-4B8C-9EF0-4DAD2CD5D2A3}"/>
               </a:ext>
             </a:extLst>
           </p:cNvPr>
@@ -32083,14 +32326,14 @@
       </p:sp>
       <p:pic>
         <p:nvPicPr>
-          <p:cNvPr id="30" name=""/>
+          <p:cNvPr id="31" name=""/>
           <p:cNvPicPr>
             <a:picLocks xmlns:a="http://schemas.openxmlformats.org/drawingml/2006/main" noChangeAspect="1"/>
           </p:cNvPicPr>
           <p:nvPr/>
         </p:nvPicPr>
         <p:blipFill>
-          <a:blip xmlns:r="http://schemas.openxmlformats.org/officeDocument/2006/relationships" xmlns:a="http://schemas.openxmlformats.org/drawingml/2006/main" r:embed="R41c2216c355941d6"/>
+          <a:blip xmlns:r="http://schemas.openxmlformats.org/officeDocument/2006/relationships" xmlns:a="http://schemas.openxmlformats.org/drawingml/2006/main" r:embed="R0b20caa9ea004fe8"/>
           <a:stretch xmlns:a="http://schemas.openxmlformats.org/drawingml/2006/main"/>
         </p:blipFill>
         <p:spPr>
@@ -32108,7 +32351,7 @@
           <p:cNvPr id="11" name="(b)">
             <a:extLst xmlns:a="http://schemas.openxmlformats.org/drawingml/2006/main">
               <a:ext uri="{FF2B5EF4-FFF2-40B4-BE49-F238E27FC236}">
-                <a16:creationId xmlns:a16="http://schemas.microsoft.com/office/drawing/2014/main" id="{ECF1FFF8-5278-4D11-9999-1EB4B3DD566B}"/>
+                <a16:creationId xmlns:a16="http://schemas.microsoft.com/office/drawing/2014/main" id="{BF9BDB2F-0AC0-4DCA-AE05-72865FD9338C}"/>
               </a:ext>
             </a:extLst>
           </p:cNvPr>
@@ -32162,14 +32405,14 @@
       </p:sp>
       <p:pic>
         <p:nvPicPr>
-          <p:cNvPr id="32" name=""/>
+          <p:cNvPr id="33" name=""/>
           <p:cNvPicPr>
             <a:picLocks xmlns:a="http://schemas.openxmlformats.org/drawingml/2006/main" noChangeAspect="1"/>
           </p:cNvPicPr>
           <p:nvPr/>
         </p:nvPicPr>
         <p:blipFill>
-          <a:blip xmlns:r="http://schemas.openxmlformats.org/officeDocument/2006/relationships" xmlns:a="http://schemas.openxmlformats.org/drawingml/2006/main" r:embed="Rdea151243c164508"/>
+          <a:blip xmlns:r="http://schemas.openxmlformats.org/officeDocument/2006/relationships" xmlns:a="http://schemas.openxmlformats.org/drawingml/2006/main" r:embed="Ra9d1ab6b0db94170"/>
           <a:stretch xmlns:a="http://schemas.openxmlformats.org/drawingml/2006/main"/>
         </p:blipFill>
         <p:spPr>
@@ -32187,7 +32430,7 @@
           <p:cNvPr id="13" name="(c)">
             <a:extLst xmlns:a="http://schemas.openxmlformats.org/drawingml/2006/main">
               <a:ext uri="{FF2B5EF4-FFF2-40B4-BE49-F238E27FC236}">
-                <a16:creationId xmlns:a16="http://schemas.microsoft.com/office/drawing/2014/main" id="{51783851-228F-489E-A03E-C86B253F6C4C}"/>
+                <a16:creationId xmlns:a16="http://schemas.microsoft.com/office/drawing/2014/main" id="{1105C873-ED0F-4E41-ACD1-2BA2CF598385}"/>
               </a:ext>
             </a:extLst>
           </p:cNvPr>
@@ -32244,7 +32487,7 @@
           <p:cNvPr id="14" name="EN">
             <a:extLst xmlns:a="http://schemas.openxmlformats.org/drawingml/2006/main">
               <a:ext uri="{FF2B5EF4-FFF2-40B4-BE49-F238E27FC236}">
-                <a16:creationId xmlns:a16="http://schemas.microsoft.com/office/drawing/2014/main" id="{3B56E572-5729-45B7-B811-31082B377161}"/>
+                <a16:creationId xmlns:a16="http://schemas.microsoft.com/office/drawing/2014/main" id="{B678398F-8DAA-4344-8041-DA196F06A015}"/>
               </a:ext>
             </a:extLst>
           </p:cNvPr>
@@ -32301,7 +32544,7 @@
           <p:cNvPr id="15" name="“confirmation-only notices that feature ">
             <a:extLst xmlns:a="http://schemas.openxmlformats.org/drawingml/2006/main">
               <a:ext uri="{FF2B5EF4-FFF2-40B4-BE49-F238E27FC236}">
-                <a16:creationId xmlns:a16="http://schemas.microsoft.com/office/drawing/2014/main" id="{DBD727CB-5FDC-43A2-B3AD-322A419B7456}"/>
+                <a16:creationId xmlns:a16="http://schemas.microsoft.com/office/drawing/2014/main" id="{D9E53C73-274A-4866-BB57-07657E048EA2}"/>
               </a:ext>
             </a:extLst>
           </p:cNvPr>
@@ -32358,7 +32601,7 @@
           <p:cNvPr id="16" name="PT">
             <a:extLst xmlns:a="http://schemas.openxmlformats.org/drawingml/2006/main">
               <a:ext uri="{FF2B5EF4-FFF2-40B4-BE49-F238E27FC236}">
-                <a16:creationId xmlns:a16="http://schemas.microsoft.com/office/drawing/2014/main" id="{E1A00CAA-3EE8-47F1-AB45-2307133CDAA6}"/>
+                <a16:creationId xmlns:a16="http://schemas.microsoft.com/office/drawing/2014/main" id="{0DE3BC9C-2694-4CA3-BC87-F0C264228A40}"/>
               </a:ext>
             </a:extLst>
           </p:cNvPr>
@@ -32415,7 +32658,7 @@
           <p:cNvPr id="17" name="Avisos apenas de confirmação, com um bot">
             <a:extLst xmlns:a="http://schemas.openxmlformats.org/drawingml/2006/main">
               <a:ext uri="{FF2B5EF4-FFF2-40B4-BE49-F238E27FC236}">
-                <a16:creationId xmlns:a16="http://schemas.microsoft.com/office/drawing/2014/main" id="{C30E05B0-6A75-4AF4-960B-B0381513E308}"/>
+                <a16:creationId xmlns:a16="http://schemas.microsoft.com/office/drawing/2014/main" id="{1BCDD606-A0ED-47A9-9967-CAFC3BA488A9}"/>
               </a:ext>
             </a:extLst>
           </p:cNvPr>
@@ -32472,7 +32715,7 @@
           <p:cNvPr id="18" name="">
             <a:extLst xmlns:a="http://schemas.openxmlformats.org/drawingml/2006/main">
               <a:ext uri="{FF2B5EF4-FFF2-40B4-BE49-F238E27FC236}">
-                <a16:creationId xmlns:a16="http://schemas.microsoft.com/office/drawing/2014/main" id="{6941D7AE-56E0-42C3-B13F-B2E98E02CDAE}"/>
+                <a16:creationId xmlns:a16="http://schemas.microsoft.com/office/drawing/2014/main" id="{93512D22-B955-4531-9C10-E00DCDF6E61C}"/>
               </a:ext>
             </a:extLst>
           </p:cNvPr>
@@ -32502,7 +32745,7 @@
           <p:cNvPr id="19" name="ANÁLISE DO SEMINÁRIO">
             <a:extLst xmlns:a="http://schemas.openxmlformats.org/drawingml/2006/main">
               <a:ext uri="{FF2B5EF4-FFF2-40B4-BE49-F238E27FC236}">
-                <a16:creationId xmlns:a16="http://schemas.microsoft.com/office/drawing/2014/main" id="{EB8CC2C4-CF5C-441A-AA25-6FC64B893A91}"/>
+                <a16:creationId xmlns:a16="http://schemas.microsoft.com/office/drawing/2014/main" id="{49A860A2-8FA4-47F3-8211-2E6A26A06EE3}"/>
               </a:ext>
             </a:extLst>
           </p:cNvPr>
@@ -32559,7 +32802,7 @@
           <p:cNvPr id="20" name="A interface mostra como avançar,&#10;mas não">
             <a:extLst xmlns:a="http://schemas.openxmlformats.org/drawingml/2006/main">
               <a:ext uri="{FF2B5EF4-FFF2-40B4-BE49-F238E27FC236}">
-                <a16:creationId xmlns:a16="http://schemas.microsoft.com/office/drawing/2014/main" id="{323B8D34-B3F1-4425-BBF8-F106EA00AE88}"/>
+                <a16:creationId xmlns:a16="http://schemas.microsoft.com/office/drawing/2014/main" id="{3E8C8853-AC7A-4D03-9F58-7C9BBAF3FD31}"/>
               </a:ext>
             </a:extLst>
           </p:cNvPr>
@@ -32657,10 +32900,32 @@
           </a:p>
         </p:txBody>
       </p:sp>
+      <p:pic>
+        <p:nvPicPr>
+          <p:cNvPr id="42" name=""/>
+          <p:cNvPicPr>
+            <a:picLocks xmlns:a="http://schemas.openxmlformats.org/drawingml/2006/main" noChangeAspect="1"/>
+          </p:cNvPicPr>
+          <p:nvPr/>
+        </p:nvPicPr>
+        <p:blipFill>
+          <a:blip xmlns:r="http://schemas.openxmlformats.org/officeDocument/2006/relationships" xmlns:a="http://schemas.openxmlformats.org/drawingml/2006/main" r:embed="R32f201eb977e4af0"/>
+          <a:stretch xmlns:a="http://schemas.openxmlformats.org/drawingml/2006/main"/>
+        </p:blipFill>
+        <p:spPr>
+          <a:xfrm xmlns:a="http://schemas.openxmlformats.org/drawingml/2006/main">
+            <a:off x="10829925" y="3830"/>
+            <a:ext cx="952500" cy="944839"/>
+          </a:xfrm>
+          <a:prstGeom xmlns:a="http://schemas.openxmlformats.org/drawingml/2006/main" prst="rect">
+            <a:avLst/>
+          </a:prstGeom>
+        </p:spPr>
+      </p:pic>
     </p:spTree>
     <p:extLst>
       <p:ext uri="{BB962C8B-B14F-4D97-AF65-F5344CB8AC3E}">
-        <p14:creationId xmlns:p14="http://schemas.microsoft.com/office/powerpoint/2010/main" val="968891628"/>
+        <p14:creationId xmlns:p14="http://schemas.microsoft.com/office/powerpoint/2010/main" val="1216374543"/>
       </p:ext>
     </p:extLst>
   </p:cSld>
